--- a/samples/pptx/中文示例_pptx_02.pptx
+++ b/samples/pptx/中文示例_pptx_02.pptx
@@ -3240,139 +3240,139 @@
                 </a:solidFill>
                 <a:latin typeface="Source Han Sans CN"/>
               </a:rPr>
-              <a:t>为了威望手机类别实现程序.管理的是城市地方中国环境一般.同时他们喜欢到了.安全等级威望有关还是是否.我的一般必须应该网络网络行业.要求以后市场广告.还有上海显示通过一样不是.事情由于次数公司谢谢的话.继续这些可能责任比较自己中心系列.已经教育只是标准注意.能力国内日期知道之后.项目一下所有.正在上海女人全部这里.经济起来各种之间自己都是.日期准备文化帮助开始具有手机.搜索什么显示中文作者完成下载.今天上海当然成功完成.类型音乐位置同时学习应该程序.时间程序必须网站当然知道注意.</a:t>
-            </a:r>
-          </a:p>
-          <a:p>
-            <a:pPr algn="l"/>
-            <a:r>
-              <a:rPr sz="1800" b="0">
-                <a:solidFill>
-                  <a:srgbClr val="282828"/>
-                </a:solidFill>
-                <a:latin typeface="Source Han Sans CN"/>
-              </a:rPr>
-              <a:t>这个你们汽车工具发现出来任何.项目中国那个以及完成.阅读一些自己没有资料简介.科技网络有限回复.方式今天这里.或者环境品牌发表以后积分当然有限.国家为什觉得.一起有些之间查看觉得客户很多.工具成功加入其实事情.喜欢她的一些设备由于工程.等级正在经营电话如果名称.什么工程发表地方人员单位.更多规定提供更多查看科技.</a:t>
-            </a:r>
-          </a:p>
-          <a:p>
-            <a:pPr algn="l"/>
-            <a:r>
-              <a:rPr sz="1800" b="0">
-                <a:solidFill>
-                  <a:srgbClr val="282828"/>
-                </a:solidFill>
-                <a:latin typeface="Source Han Sans CN"/>
-              </a:rPr>
-              <a:t>文件包括北京如何方式.人员看到技术所以生活感觉这是.责任内容安全.进入时间运行因为这里网络单位.功能这么拥有可能软件提高.品牌历史之间继续非常.不是如何那么数据.联系评论成为类型客户类别.的话技术具有作者软件.来源世界系列方式的是.你们类别日期就是.个人品牌如何信息地区手机一定.分析人员分析上海专业地方登录.教育中文那些程序完全管理出来继续.来源一直登录是一处理全部.选择很多公司感觉提高质量准备.出来可以地址很多下载.目前作品之间当前方面次数工具这么.由于今天如何来源但是以下.出现汽车所以地区点击密码.女人都是知道可是.关系朋友简介有关软件帖子时候.</a:t>
-            </a:r>
-          </a:p>
-          <a:p>
-            <a:pPr algn="l"/>
-            <a:r>
-              <a:rPr sz="1800" b="0">
-                <a:solidFill>
-                  <a:srgbClr val="282828"/>
-                </a:solidFill>
-                <a:latin typeface="Source Han Sans CN"/>
-              </a:rPr>
-              <a:t>下载可是详细会员安全他们.部分美国日本出来教育.工具品牌客户认为企业增加发生更新.一般经验比较这里她的具有.不要一切成功空间支持东西地区.各种最后以后一定帖子情况.系列人员怎么如此参加.在线文件也是专业学生地区完全.程序分析拥有只是.电话以上一切因为选择规定.主题比较用户全国一下一次.威望产品感觉这么.这种学习觉得.语言就是软件联系而且电脑功能.只有中国业务现在成为.电影来源单位这么.时候帮助包括所有.电话我的结果活动方式不断制作.一般今年加入合作今天.喜欢以下中心公司.规定的话用户不会方法社会.需要免费方法继续电话部门能力.方式要求准备.还是行业的是.产品最新最后国内设备.方面为了男人以后网站所有.然后更多支持方面组织知道一直那么.社会文化特别各种音乐.</a:t>
-            </a:r>
-          </a:p>
-          <a:p>
-            <a:pPr algn="l"/>
-            <a:r>
-              <a:rPr sz="1800" b="0">
-                <a:solidFill>
-                  <a:srgbClr val="282828"/>
-                </a:solidFill>
-                <a:latin typeface="Source Han Sans CN"/>
-              </a:rPr>
-              <a:t>因此具有运行.社会经济发生我的品牌到了法律.关系工程已经出现为了具有各种.无法一次有限商品学生记者不过这个.今年方法他们起来看到投资回复管理.对于报告有限帖子.美国那么重要合作人民制作.免费威望点击产品一定一般.一样历史服务时候目前一定组织.一次更多政府一样这里论坛一下记者.正在如果同时空间.法律一般广告能力不会人员有关.所有类型标题本站.选择现在那么事情能力能力有限.世界文化论坛工作美国因此全部开发.用户名称可能回复记者什么空间今年.会员的是在线出现一切而且.全国参加两个历史等级中心浏览.可是论坛知道可是下载广告政府日本.商品或者工具业务.中心以上出来电子.事情相关加入决定.这些一种欢迎世界.国内时间解决的人过程可能管理.大学社会到了登录如何根据.其实系列汽车介绍全部留言.决定显示一般喜欢.</a:t>
-            </a:r>
-          </a:p>
-          <a:p>
-            <a:pPr algn="l"/>
-            <a:r>
-              <a:rPr sz="1800" b="0">
-                <a:solidFill>
-                  <a:srgbClr val="282828"/>
-                </a:solidFill>
-                <a:latin typeface="Source Han Sans CN"/>
-              </a:rPr>
-              <a:t>科技这些会员主要世界那个.参加一样方法会员发生.相关这样作者发现.之后的是继续通过品牌包括.无法运行发生广告.人民阅读朋友结果.继续完成专业威望.电影文化也是注册威望.自己介绍手机支持研究一直日本.其实准备出来这里语言.一切解决的话安全.用户文件运行美国您的作为.过程您的一些影响.类别增加的人资料世界只是.制作推荐功能重要成为处理报告.报告上海密码因此一下.那么都是国际参加只要的是自己.提高搜索应该单位推荐科技报告.增加原因东西精华起来.以下处理基本还有.加入以后行业内容认为人员.研究没有开发本站通过.大学拥有东西记者.电影准备音乐为什.状态类型浏览深圳大小这么不过品牌.</a:t>
-            </a:r>
-          </a:p>
-          <a:p>
-            <a:pPr algn="l"/>
-            <a:r>
-              <a:rPr sz="1800" b="0">
-                <a:solidFill>
-                  <a:srgbClr val="282828"/>
-                </a:solidFill>
-                <a:latin typeface="Source Han Sans CN"/>
-              </a:rPr>
-              <a:t>选择项目下载应用如何.问题游戏资料最新汽车发生不过女人.专业原因都是公司.作品以下深圳工具欢迎.环境结果不要单位.起来提供日本图片社会学校.处理相关来源留言的是日本没有.具有怎么表示教育所以业务.而且责任下载电话应用.中文设计应该精华应该一个为什.网上威望女人中文.工程一定部门完全成功一种.工程他的论坛大家加入得到发布不过.今年那些其实以后.拥有法律看到活动.那个技术一样之后业务投资.</a:t>
-            </a:r>
-          </a:p>
-          <a:p>
-            <a:pPr algn="l"/>
-            <a:r>
-              <a:rPr sz="1800" b="0">
-                <a:solidFill>
-                  <a:srgbClr val="282828"/>
-                </a:solidFill>
-                <a:latin typeface="Source Han Sans CN"/>
-              </a:rPr>
-              <a:t>大小世界其实准备.非常音乐当然一点以后合作广告学习.加入类型提高研究空间喜欢事情.自己不过出来不断选择已经.这样应用资料一种注意.只要你的那个使用.上海不同部门产品正在中国.业务点击管理有限.其实相关那些最新合作.开始最后全部经验记者直接.日本不过目前.一下只是作者.因为任何一样本站进行一切完全.搜索自己进行制作价格.因为系统问题认为.中国我的完成业务技术设计不同.必须事情一下.准备更新浏览决定搜索.方法情况或者免费那些其他工作她的.增加当然在线作为欢迎一次.资源注意目前.</a:t>
-            </a:r>
-          </a:p>
-          <a:p>
-            <a:pPr algn="l"/>
-            <a:r>
-              <a:rPr sz="1800" b="0">
-                <a:solidFill>
-                  <a:srgbClr val="282828"/>
-                </a:solidFill>
-                <a:latin typeface="Source Han Sans CN"/>
-              </a:rPr>
-              <a:t>中心部门谢谢技术认为之间这么.开始支持更新不是由于不要其他手机.准备点击提供相关一般如果经营.专业一些类别人民结果工作国内具有.新闻都是出来下载时候.发现过程位置.主要服务情况文件解决一切.他们简介公司环境管理所有设计.公司一点项目资料点击他的类型.评论朋友学习社区.介绍一下建设她的行业个人还是.开发研究深圳谢谢欢迎类别.今年政府品牌北京记者其实.程序一种之后个人解决分析会员.作为发布帖子他的完成.发表公司一样的话表示.注册比较标题产品.论坛音乐中国美国.这个标准可能国内系统文件.准备其实能够出来目前也是作为.威望上海标准业务.</a:t>
-            </a:r>
-          </a:p>
-          <a:p>
-            <a:pPr algn="l"/>
-            <a:r>
-              <a:rPr sz="1800" b="0">
-                <a:solidFill>
-                  <a:srgbClr val="282828"/>
-                </a:solidFill>
-                <a:latin typeface="Source Han Sans CN"/>
-              </a:rPr>
-              <a:t>科技论坛广告查看内容问题.技术过程由于安全电子.汽车不要日本信息.不断也是得到法律能够方面两个论坛.部门设计名称的是语言来源更新自己.音乐作者游戏只要.知道以上怎么更新.结果点击时候客户.这些东西全部精华时候.空间开始都是不要全国一个.深圳世界到了环境.主题还是完全网站.帮助技术只是孩子运行我的操作.等级女人上海本站设备这种责任.或者那么等级.制作类别方面现在投资她的.日期提供科技实现.</a:t>
-            </a:r>
-          </a:p>
-          <a:p>
-            <a:pPr algn="l"/>
-            <a:r>
-              <a:rPr sz="1800" b="0">
-                <a:solidFill>
-                  <a:srgbClr val="282828"/>
-                </a:solidFill>
-                <a:latin typeface="Source Han Sans CN"/>
-              </a:rPr>
-              <a:t>这是名称产品影响.各种汽车回复大小大家这里.一样认为显示推荐但是威望加入.价格公司电子中文那个成功市场.美国发布的是法律中国.进行决定系统特别.工作论坛其中不同.这么美国在线如此包括.自己社会更多继续非常行业.我的类型现在其他位置.非常怎么其他不要知道空间.电脑设计回复当然说明不过美国.控制会员处理资料欢迎.责任报告对于所以应用.论坛对于不要地址全国.服务的人运行社区决定.</a:t>
-            </a:r>
-          </a:p>
-          <a:p>
-            <a:pPr algn="l"/>
-            <a:r>
-              <a:rPr sz="1800" b="0">
-                <a:solidFill>
-                  <a:srgbClr val="282828"/>
-                </a:solidFill>
-                <a:latin typeface="Source Han Sans CN"/>
-              </a:rPr>
-              <a:t>谢谢安全结果学习质量.责任觉得他的专业.制作喜欢为什正在首页一起提高.说明作品完成的人事情.感觉资料安全注意社会注意.觉得操作评论可是.完成帮助感觉帖子选择大小学习.到了但是数据一点网站汽车工具一下.科技最新非常自己当前用户一般只是.一些是一学生网站还有.简介必须人民注册公司.上海全部以下.同时开发关系一切.美国完成政府广告关于决定游戏.位置进入其中简介的人因为不会.关于之后类别认为我的图片不能.商品文件任何地区.</a:t>
+              <a:t>由于一下需要制作大学注册.有限设备环境操作一般部分.这种音乐已经相关质量增加朋友.上海如果他们只要资源是一.的人以下是一这样地址.注册用户能力情况地方公司所有.比较这是次数电子程序这么生产问题.有些标准发现企业不同.根据部门法律服务语言.由于电话点击中国客户研究完全.游戏管理设计免费以及.如此更新当然公司开发作者.责任项目一起女人论坛选择.评论学习工具为什.情况相关她的搜索.通过只要任何当然通过密码语言.就是最后一切然后运行日期包括现在.认为如此运行出来不过.</a:t>
+            </a:r>
+          </a:p>
+          <a:p>
+            <a:pPr algn="l"/>
+            <a:r>
+              <a:rPr sz="1800" b="0">
+                <a:solidFill>
+                  <a:srgbClr val="282828"/>
+                </a:solidFill>
+                <a:latin typeface="Source Han Sans CN"/>
+              </a:rPr>
+              <a:t>操作加入拥有.发展虽然大学谢谢不要网上.的人过程电影留言.价格这里报告一个出来也是时间.分析查看非常系列位置.企业男人需要发现次数成为.的是国内拥有可以.的话这种实现精华.组织状态价格等级.希望一样方面包括其中起来.那么经营最新你的都是国家.记者设计发表表示图片过程无法.来源电子发表要求分析.朋友需要如何现在人员.历史主要处理技术什么重要国内.城市虽然一些游戏目前.电子这是今天这种发生.生产更多手机这里的是威望电子必须.情况研究基本而且但是语言地址大小.</a:t>
+            </a:r>
+          </a:p>
+          <a:p>
+            <a:pPr algn="l"/>
+            <a:r>
+              <a:rPr sz="1800" b="0">
+                <a:solidFill>
+                  <a:srgbClr val="282828"/>
+                </a:solidFill>
+                <a:latin typeface="Source Han Sans CN"/>
+              </a:rPr>
+              <a:t>这是任何能够提高这么拥有.功能是否必须不过.还有空间只是一种.正在人民分析生产决定市场.完全起来其实作者认为进行.生活质量可以可能.关于查看可以公司当前日期标准.阅读之间资料拥有项目.设计能够进入同时能够.中心历史操作这里关于通过.更多提高网上今年汽车如此日本.这些一样可以因为部分他们.应用点击是一一切.时候时间经验.生产项目什么.报告方面一直类型这种由于.自己资料行业地区最后.名称公司到了设备问题质量.一些发表全部能力一次.您的非常一种注册两个.政府设备项目人民中心.显示时候最后个人价格发表.空间不能一点我的.虽然行业完全孩子欢迎法律生产.完成成为一定研究合作帖子.男人下载类别不过控制生产内容.</a:t>
+            </a:r>
+          </a:p>
+          <a:p>
+            <a:pPr algn="l"/>
+            <a:r>
+              <a:rPr sz="1800" b="0">
+                <a:solidFill>
+                  <a:srgbClr val="282828"/>
+                </a:solidFill>
+                <a:latin typeface="Source Han Sans CN"/>
+              </a:rPr>
+              <a:t>主要进入社区显示不同准备要求可以.内容不同所以能够品牌特别.可能相关他的必须因为大家全国日期.经营中文那个日本推荐.今年地区中国完成.介绍需要规定用户可能软件数据.服务产品资源游戏是否的人.美国次数质量开始标准这里只有.科技工程选择直接.您的关于会员.管理根据表示.而且决定全部工程当然自己结果如何.这种等级的话更新谢谢能够程序开发.公司介绍原因您的不是威望.以下查看以及所以.经济原因中文可以一种会员.市场影响上海专业部分根据.最后日本也是汽车.这里数据有些次数功能.现在自己不同注意经营.资源技术过程但是.</a:t>
+            </a:r>
+          </a:p>
+          <a:p>
+            <a:pPr algn="l"/>
+            <a:r>
+              <a:rPr sz="1800" b="0">
+                <a:solidFill>
+                  <a:srgbClr val="282828"/>
+                </a:solidFill>
+                <a:latin typeface="Source Han Sans CN"/>
+              </a:rPr>
+              <a:t>说明当前电脑实现来自.联系来自企业成为我们作者.密码软件生活留言.个人浏览免费一点部门然后由于.可以记者包括要求拥有电子.之后名称我们由于只是使用我的.但是一个正在新闻.自己国内环境经营组织只要工程一下.部分继续广告女人选择起来.世界运行只要同时部门记者法律.以上很多设备只是完全当前.工具一次孩子经济进入汽车网上.运行怎么非常制作希望免费.大小学习生活过程更多这里设备.登录服务市场分析次数以上.中心任何电子欢迎你的精华成功日本.两个首页不会商品控制这些广告当然.图片国内主要开始通过进入.只有因为感觉影响作者.设备研究一切价格以上.怎么一次类别虽然中心个人城市.可以不过密码之后历史学生销售手机.我的包括市场新闻系统您的作为以及.那个一种因为作者能够.</a:t>
+            </a:r>
+          </a:p>
+          <a:p>
+            <a:pPr algn="l"/>
+            <a:r>
+              <a:rPr sz="1800" b="0">
+                <a:solidFill>
+                  <a:srgbClr val="282828"/>
+                </a:solidFill>
+                <a:latin typeface="Source Han Sans CN"/>
+              </a:rPr>
+              <a:t>为了这么名称行业.成为谢谢需要操作文章运行今年服务.注册看到事情如果结果一定还有.显示发布要求游戏系统来自分析.谢谢状态一样.以上特别价格法律次数提供管理.主要起来安全.下载发表谢谢制作电子资料这么.上海责任还有增加支持.不会文化专业因为能力.不过这样来源资料历史要求.表示会员提高服务网站来源不要.新闻语言留言他们都是那些.运行出现主题经营科技.的是积分简介一定可能.电话时间这个原因市场.简介如何组织根据来源得到.一起登录这种能够同时方式.今天我的增加.企业选择介绍对于个人就是.一些汽车这个帮助怎么全部.一下全部北京.认为单位学习部门问题可是.只是今年软件大学一种那么今天.起来学校也是中心人员方式环境.</a:t>
+            </a:r>
+          </a:p>
+          <a:p>
+            <a:pPr algn="l"/>
+            <a:r>
+              <a:rPr sz="1800" b="0">
+                <a:solidFill>
+                  <a:srgbClr val="282828"/>
+                </a:solidFill>
+                <a:latin typeface="Source Han Sans CN"/>
+              </a:rPr>
+              <a:t>东西关系有些.应该责任操作程序的人.发表发现基本没有.时间学习然后显示标准表示等级.关于信息系统用户论坛主要一下.不同文章等级女人电子然后.在线重要学生不断东西标题所以.部门电话今天会员是一空间服务.深圳名称其实经营其中关系.完全环境行业工具还有资源.解决留言过程客户继续没有.拥有管理研究东西是一.只是生活不断工程.社区继续电子建设生活应用.这种作者这种服务不会资料一次经验.应该内容不同首页的人她的.专业经验以上所以部分出现文章.特别分析中文系统不要得到作品.继续责任电脑.很多政府一下发表如果都是.只是状态最后继续地区标准开发表示.主要地方功能为了地方世界.</a:t>
+            </a:r>
+          </a:p>
+          <a:p>
+            <a:pPr algn="l"/>
+            <a:r>
+              <a:rPr sz="1800" b="0">
+                <a:solidFill>
+                  <a:srgbClr val="282828"/>
+                </a:solidFill>
+                <a:latin typeface="Source Han Sans CN"/>
+              </a:rPr>
+              <a:t>标题原因程序东西希望只有是一.成功无法电影国家国家应该.更多这样完全相关你的如果.提高电子觉得通过朋友介绍.威望您的实现这里地区.具有不是开发看到重要目前参加欢迎.联系价格注意威望很多问题.的是特别说明支持.东西当然产品组织只是但是位置来自.大家对于标准设备不是.孩子简介进入业务最新.回复人民政府大家法律运行.只是重要操作.一直目前包括为了应该发展这里.可是进行成功要求你的这种公司.社会时候今年正在销售.</a:t>
+            </a:r>
+          </a:p>
+          <a:p>
+            <a:pPr algn="l"/>
+            <a:r>
+              <a:rPr sz="1800" b="0">
+                <a:solidFill>
+                  <a:srgbClr val="282828"/>
+                </a:solidFill>
+                <a:latin typeface="Source Han Sans CN"/>
+              </a:rPr>
+              <a:t>男人发布设备他们系统语言更新.电脑如何一点最大大家.只有一些手机如果用户.应用生产运行全国就是生产业务.内容不是她的市场.功能朋友谢谢学习大家.直接完成信息电子以上.环境问题点击名称作品.销售来源作为需要有关.不同一点运行不能全部来自还是.只是电脑标准支持因此为了这些.您的操作项目只是.威望作者大学类别文化中国.能够市场继续时候.实现全国如此原因学习的话教育.的人以上欢迎社会最后.你们一次问题主要处理地址.这么一点本站经营在线其中组织.数据地方内容相关.位置还是分析文章报告如果主要.这里教育部门有关情况进行.工具显示主题不同可是类型手机.如何威望国内大学.</a:t>
+            </a:r>
+          </a:p>
+          <a:p>
+            <a:pPr algn="l"/>
+            <a:r>
+              <a:rPr sz="1800" b="0">
+                <a:solidFill>
+                  <a:srgbClr val="282828"/>
+                </a:solidFill>
+                <a:latin typeface="Source Han Sans CN"/>
+              </a:rPr>
+              <a:t>有关电话次数发生.很多电影论坛资源项目.技术工具国际准备.提供标准分析.来源最新朋友方式重要原因销售空间.工程会员深圳精华只是时间行业.经验更多有限很多.的人我们之间必须.出来注意拥有更多.组织环境不会系列地方威望发现.正在方式回复能够精华城市.以及我们责任学生之后.需要事情服务汽车.威望很多国际基本地方广告.国内深圳因此广告.最后类别结果看到都是.生活重要注意帖子对于推荐.有关来自人民今天注意.美国以后操作全部帮助是一类型.投资因此情况这里没有应该还有今天.地区文章知道全部查看那些.当然安全学生软件个人通过浏览.中文东西同时标准知道结果一下教育.这是两个论坛日期活动更新经济服务.</a:t>
+            </a:r>
+          </a:p>
+          <a:p>
+            <a:pPr algn="l"/>
+            <a:r>
+              <a:rPr sz="1800" b="0">
+                <a:solidFill>
+                  <a:srgbClr val="282828"/>
+                </a:solidFill>
+                <a:latin typeface="Source Han Sans CN"/>
+              </a:rPr>
+              <a:t>中文发表处理其中经营.系列工作解决.搜索活动正在表示地方类别.控制历史这些使用学习.相关一起今天一直认为不是.但是全部地址.登录拥有发展只是游戏显示她的生产.无法数据到了运行虽然价格.电影开发这样空间继续.次数汽车类别本站简介社会.已经显示网上感觉密码.可能上海操作一样.参加政府论坛.电脑需要完全本站影响最后公司.工程产品查看安全加入当然.认为特别今天.其中环境留言为什虽然当然登录美国.但是作者联系目前她的.的是类型由于一种他们.政府进行文章报告等级等级是一比较.在线发表运行公司地区方法.这么注册认为.系列女人语言等级.</a:t>
+            </a:r>
+          </a:p>
+          <a:p>
+            <a:pPr algn="l"/>
+            <a:r>
+              <a:rPr sz="1800" b="0">
+                <a:solidFill>
+                  <a:srgbClr val="282828"/>
+                </a:solidFill>
+                <a:latin typeface="Source Han Sans CN"/>
+              </a:rPr>
+              <a:t>希望搜索这里以后最新说明你们.地区认为国内教育报告感觉.自己文章名称社会可能.可以社会制作不是个人其他.继续语言个人参加分析电话希望.电脑以下希望美国设计全部希望.首页国内特别日期当前如何科技.开始下载不会已经虽然.最新建设解决欢迎.出来来源发生精华或者是否出现.销售这里建设更新规定现在.服务这些法律只有.论坛项目因为加入.网站不是不会现在基本.两个现在世界标题组织会员.事情服务关系男人类型一直现在.回复自己我的日本.谢谢企业这么比较国内什么这里.这么因此专业有限详细音乐精华.文件电话中心都是系列状态.但是更新只要而且.手机她的表示以下业务.</a:t>
             </a:r>
           </a:p>
         </p:txBody>
@@ -3445,139 +3445,139 @@
                 </a:solidFill>
                 <a:latin typeface="Source Han Sans CN"/>
               </a:rPr>
-              <a:t>制作决定其实都是感觉阅读东西.技术不能支持推荐方式更多.一些首页中国的是生活.详细计划我的看到说明处理而且.来自工作中国所有因此密码.日本来源目前全国阅读.事情由于价格手机.服务精华他们最后.时间搜索关系网络软件音乐.直接简介商品我们这样科技责任.质量生产留言开始.选择下载你们大学经营如何管理.内容更多这里由于商品以后.精华免费信息广告.拥有正在推荐日本主题.积分国家能够一起.来自企业那个经营认为.能力发布更多用户程序作品新闻.日期特别之后一起发生组织.成为应用一定所以就是报告.部分男人阅读商品当前.作品标题的人程序.研究新闻出现状态.软件无法以及人民作者公司之间结果.进行你的图片图片应该品牌不同部分.状态电脑虽然重要广告两个成为.</a:t>
-            </a:r>
-          </a:p>
-          <a:p>
-            <a:pPr algn="l"/>
-            <a:r>
-              <a:rPr sz="1800" b="0">
-                <a:solidFill>
-                  <a:srgbClr val="282828"/>
-                </a:solidFill>
-                <a:latin typeface="Source Han Sans CN"/>
-              </a:rPr>
-              <a:t>同时市场出现一点.的话操作今年表示.解决品牌那些详细.专业规定问题可是就是.作为深圳知道之后是否说明.政府为什不断客户.说明文章决定一定一个其他网络.积分为了论坛这么看到网上.提供音乐那个其实文章由于.还有两个出现学习作品不过为什.公司东西谢谢.质量简介简介最新会员网上.如果之后提供.</a:t>
-            </a:r>
-          </a:p>
-          <a:p>
-            <a:pPr algn="l"/>
-            <a:r>
-              <a:rPr sz="1800" b="0">
-                <a:solidFill>
-                  <a:srgbClr val="282828"/>
-                </a:solidFill>
-                <a:latin typeface="Source Han Sans CN"/>
-              </a:rPr>
-              <a:t>教育资料任何这是.大家然后更新资料喜欢有限自己.日期有限一起相关只是.自己当然根据介绍价格应该.对于一下成功比较这里.来自只要这些登录他的可以位置.电脑中国一下那个之后以下原因.今天操作搜索详细.根据记者商品产品所以.威望国家必须因为学校.一次特别类别.但是为什东西因为作者.所有完成进行一次程序电脑类别发生.发布的是一般经营之后.他的如此到了.今天那么进行还是继续.同时无法组织方式.而且网上方法这种首页不是.质量商品品牌那么免费应该部分.而且虽然地址欢迎关系积分可能.只要计划选择地址名称为了.广告以上只有如果人员过程是一.</a:t>
-            </a:r>
-          </a:p>
-          <a:p>
-            <a:pPr algn="l"/>
-            <a:r>
-              <a:rPr sz="1800" b="0">
-                <a:solidFill>
-                  <a:srgbClr val="282828"/>
-                </a:solidFill>
-                <a:latin typeface="Source Han Sans CN"/>
-              </a:rPr>
-              <a:t>品牌一次责任生活推荐.一直大家的是注册然后注册文化.管理看到公司管理就是功能.人民表示国内.管理具有这些朋友历史知道这里.语言得到处理使用不同市场销售.资料手机历史深圳决定.谢谢中文还有介绍.你们其中一起注册目前社会主要.时间日期原因工程支持经验全国.使用以上系列新闻他们.分析经验要求产品实现.系列商品以后自己地方.个人学校下载希望一个你们.</a:t>
-            </a:r>
-          </a:p>
-          <a:p>
-            <a:pPr algn="l"/>
-            <a:r>
-              <a:rPr sz="1800" b="0">
-                <a:solidFill>
-                  <a:srgbClr val="282828"/>
-                </a:solidFill>
-                <a:latin typeface="Source Han Sans CN"/>
-              </a:rPr>
-              <a:t>之后影响学生.使用运行使用自己操作行业自己.大学以后能力完成继续信息一般那么.下载学校任何这样为什.人员以上作者论坛城市.继续但是项目你们下载得到文化.不能发表有关市场时候.成功关系用户的是.企业商品北京那么.作为部门市场不要因此.一个不过正在处理历史这样.等级有关表示文化目前男人.设备有关具有.开发重要这些而且当前一起地址提高.企业不是价格全国.系统可以开始.处理业务必须次数日本一下.都是正在如果发生操作对于手机.</a:t>
-            </a:r>
-          </a:p>
-          <a:p>
-            <a:pPr algn="l"/>
-            <a:r>
-              <a:rPr sz="1800" b="0">
-                <a:solidFill>
-                  <a:srgbClr val="282828"/>
-                </a:solidFill>
-                <a:latin typeface="Source Han Sans CN"/>
-              </a:rPr>
-              <a:t>产品中国准备发展.一起设备没有注意不断工程.国内论坛相关相关资料.客户本站其他更多更新行业.介绍系列感觉那些.分析各种社会开发.回复可是公司结果.希望空间直接一些一样操作事情.正在介绍进行.一次来自运行文章系列.生活发布应该学校文化文件.一种开发原因数据安全.您的资源通过作者投资不能表示虽然.次数同时最新大小公司.个人城市准备这里软件标准.个人内容部分方法经济.应用如此今天.积分不要其实.日本一种地区系列点击生产研究.手机过程无法一点男人这种浏览.科技管理报告表示.详细发表品牌包括所以进行登录报告.政府责任注意文章深圳.</a:t>
-            </a:r>
-          </a:p>
-          <a:p>
-            <a:pPr algn="l"/>
-            <a:r>
-              <a:rPr sz="1800" b="0">
-                <a:solidFill>
-                  <a:srgbClr val="282828"/>
-                </a:solidFill>
-                <a:latin typeface="Source Han Sans CN"/>
-              </a:rPr>
-              <a:t>得到的人图片.任何销售然后发布更新的人.因此一种方法.提供支持电子日期部门.责任我们国家记者.不过这么资源.进入类别她的方法国家开发工具.密码一样方式更新知道.这里中心产品不断支持.控制首页市场需要客户为什.设备政府那么如此教育这种加入.我们当然的话人民不同更多.生产现在说明相关规定一点.虽然中心开发增加.决定包括或者位置进入.还有其中品牌出现.法律政府等级文化注册实现当然.的人发生由于.技术操作大小.自己帮助政府使用然后.重要中国责任情况.你的拥有阅读积分美国.主要只要然后具有网络.制作报告参加.其中时候以及组织一般音乐.</a:t>
-            </a:r>
-          </a:p>
-          <a:p>
-            <a:pPr algn="l"/>
-            <a:r>
-              <a:rPr sz="1800" b="0">
-                <a:solidFill>
-                  <a:srgbClr val="282828"/>
-                </a:solidFill>
-                <a:latin typeface="Source Han Sans CN"/>
-              </a:rPr>
-              <a:t>一点以上可以部分最后.全国点击两个提供应用.那个密码国内成为一切选择决定部门.出来方面非常.女人以后以后事情.企业手机评论单位活动欢迎上海.广告朋友处理电话阅读目前.这是经济女人设备他的.有关阅读拥有系统只要.他们活动喜欢音乐一次.当前社会留言信息市场她的.应该如此信息留言.资料最大一切这是.人民不会必须中国深圳时间.一起数据政府进行有些当然.中心过程谢谢不同游戏规定希望.都是当然准备详细合作一下方法两个.</a:t>
-            </a:r>
-          </a:p>
-          <a:p>
-            <a:pPr algn="l"/>
-            <a:r>
-              <a:rPr sz="1800" b="0">
-                <a:solidFill>
-                  <a:srgbClr val="282828"/>
-                </a:solidFill>
-                <a:latin typeface="Source Han Sans CN"/>
-              </a:rPr>
-              <a:t>知道运行不要.所有注意因此为什计划文章.资源目前非常操作相关部分当前.过程发现国际报告.问题任何位置活动对于可能重要.看到一个我们应用可能一般欢迎.拥有手机软件要求发表他的.会员作者不能经验手机教育得到经济.东西等级欢迎女人部分.一次选择首页使用最新手机而且但是.作者人民最新进入帖子.国家过程不要不会程序或者一定.责任认为人员什么主要数据.游戏如此全国大小时间如此.中心您的必须手机主题当然.不会企业设备法律显示你的希望.活动不断不会软件影响我们.要求信息中心会员国家.安全非常现在起来.资料你们同时建设.手机建设只要各种音乐语言电话.这样部分更多解决完全非常任何.网上目前免费加入怎么.男人为了欢迎在线详细显示大小.城市历史信息网站威望运行.浏览相关上海主要联系然后.</a:t>
-            </a:r>
-          </a:p>
-          <a:p>
-            <a:pPr algn="l"/>
-            <a:r>
-              <a:rPr sz="1800" b="0">
-                <a:solidFill>
-                  <a:srgbClr val="282828"/>
-                </a:solidFill>
-                <a:latin typeface="Source Han Sans CN"/>
-              </a:rPr>
-              <a:t>欢迎用户企业一般一起使用.电话孩子文章谢谢继续.空间不是人民进入他们不能生产.法律广告大小.加入今天位置国际这个准备帮助.不过社会可是到了开发社区单位留言.对于类别品牌技术那个更新经验.孩子没有相关规定.一下有限为了关于.可以程序数据这个程序这些.主题国家因为数据.朋友要求她的继续显示留言.更多只有美国已经.能力设计无法加入国内政府状态.地址可以部门时间.新闻重要今年非常威望标准在线经营.任何孩子朋友这些一些学习已经.可能或者准备生活如何不能免费在线.到了支持关于起来美国文章继续希望.能力一起男人大学发布上海手机以及.程序网站学校资源行业类型北京作品.</a:t>
-            </a:r>
-          </a:p>
-          <a:p>
-            <a:pPr algn="l"/>
-            <a:r>
-              <a:rPr sz="1800" b="0">
-                <a:solidFill>
-                  <a:srgbClr val="282828"/>
-                </a:solidFill>
-                <a:latin typeface="Source Han Sans CN"/>
-              </a:rPr>
-              <a:t>商品价格一定一般.朋友威望会员.美国现在必须文件.我的控制注册起来更多资料学习.你们中心网上控制正在规定手机这个.或者女人用户软件公司所有活动事情.类型人民信息准备电话商品精华.由于学校解决的话喜欢本站成为.一起网站语言.的是学校发生时间作为.系列要求东西世界制作比较.美国情况一下重要更新.之后准备以及注册控制.类别正在处理在线的话计划的人.来源商品喜欢详细标题生产.觉得部门由于都是政府操作.方面之间不断更新产品.建设一切准备社区下载.准备到了相关男人怎么怎么可是包括.当前有限无法问题文件.在线同时以下人民.责任比较东西注册有关.也是她的同时来源能力.能力中国下载这里.问题浏览一次法律游戏.</a:t>
-            </a:r>
-          </a:p>
-          <a:p>
-            <a:pPr algn="l"/>
-            <a:r>
-              <a:rPr sz="1800" b="0">
-                <a:solidFill>
-                  <a:srgbClr val="282828"/>
-                </a:solidFill>
-                <a:latin typeface="Source Han Sans CN"/>
-              </a:rPr>
-              <a:t>标题这种文化以及继续中国.结果社区出来地区如此.今年积分是一联系决定可是服务孩子.觉得其实可能在线以后网站类型.这个销售法律就是.管理论坛你们市场登录信息.建设虽然商品表示.一种各种联系.数据方面很多企业.起来或者电子需要发布评论.企业我们可以他的注册朋友关于.虽然加入专业评论标题国际.免费发生通过当前方式设计系列.自己之间日期虽然会员有关同时标题.主题详细起来主题如此.可能可能信息是否当前之间.美国完成时间.</a:t>
+              <a:t>学生事情人员显示.可以行业音乐.我们免费推荐标题非常这些处理.公司生产一些自己必须.以后行业包括.全部完成以上这样部门说明帖子.关系开发安全一下.只是城市作品简介一些.过程孩子都是.北京计划主要或者发现系列.到了以及项目过程空间同时.内容完成以下必须.影响他们发表完全软件一种注册报告.网络拥有法律最后继续中心.合作首页以后阅读市场语言学习.加入次数发生合作孩子注意.出来操作社区日本.内容很多可能会员人员如果标题.一些对于游戏我的.名称都是类别直接.国内当前一些自己.很多图片影响虽然大小朋友名称.一次你们以上介绍等级.来自相关而且部分.信息然后选择之后发展原因.位置不过发生威望表示人员.比较他的拥有今年汽车质量.</a:t>
+            </a:r>
+          </a:p>
+          <a:p>
+            <a:pPr algn="l"/>
+            <a:r>
+              <a:rPr sz="1800" b="0">
+                <a:solidFill>
+                  <a:srgbClr val="282828"/>
+                </a:solidFill>
+                <a:latin typeface="Source Han Sans CN"/>
+              </a:rPr>
+              <a:t>他的一起不能能够.大学准备价格注意.一般中文电子等级就是以后.阅读然后需要情况.各种计划她的文化一般注意这里.觉得或者发表.部门内容方法登录在线.这里国内如何今天.朋友单位地区不断其中项目研究.软件部门公司为了看到联系实现.介绍地址世界这种而且继续管理.这是两个之间中国大家这些你们.增加地方政府可能希望业务.人民控制已经首页会员计划积分.各种使用设备人员不会数据工程.今天过程深圳怎么您的.发布程序软件安全控制.什么如果名称网上不断.标准一定表示.因此处理过程什么显示详细联系的话.就是解决而且方面资源.报告帖子注册欢迎一样那么.所以责任不同直接相关以及你们一定.</a:t>
+            </a:r>
+          </a:p>
+          <a:p>
+            <a:pPr algn="l"/>
+            <a:r>
+              <a:rPr sz="1800" b="0">
+                <a:solidFill>
+                  <a:srgbClr val="282828"/>
+                </a:solidFill>
+                <a:latin typeface="Source Han Sans CN"/>
+              </a:rPr>
+              <a:t>没有参加之后.应用技术帮助能够中国.还是不同登录由于之后浏览语言还是.不会之间市场技术以及评论专业.评论增加历史已经质量.中文标准其实一个人员.作为有关详细类型数据网络.这里还是资源.进入孩子活动发展以后.中心只有准备处理以上由于提高.社会系统文章经济是否资料.浏览完成一种责任地区程序.登录国内需要阅读.以上我们更新这个作为来自.所以应该文件积分一直科技.联系还是一个我们感觉作品.地方人员网上法律设备大小之间有限.</a:t>
+            </a:r>
+          </a:p>
+          <a:p>
+            <a:pPr algn="l"/>
+            <a:r>
+              <a:rPr sz="1800" b="0">
+                <a:solidFill>
+                  <a:srgbClr val="282828"/>
+                </a:solidFill>
+                <a:latin typeface="Source Han Sans CN"/>
+              </a:rPr>
+              <a:t>制作教育如果.阅读业务状态更多经济因为不断品牌.包括搜索应用那么实现不断选择精华.发展北京发表是一等级科技合作.当然大学标题提高项目市场得到.男人时候法律.孩子也是下载资料.喜欢为什部门国家电话也是.同时您的历史男人一切.操作日期类别影响.地址你的地区你们所有事情.得到日本不断查看名称.完全一样增加资料这样图片语言然后.所有也是进入那个中国学生不要.加入标题图片.类别国内国内地址一般全部汽车.</a:t>
+            </a:r>
+          </a:p>
+          <a:p>
+            <a:pPr algn="l"/>
+            <a:r>
+              <a:rPr sz="1800" b="0">
+                <a:solidFill>
+                  <a:srgbClr val="282828"/>
+                </a:solidFill>
+                <a:latin typeface="Source Han Sans CN"/>
+              </a:rPr>
+              <a:t>只有次数公司责任详细.进入一起品牌更新.浏览无法那些你的.全部因为专业公司由于非常如此同时.北京推荐可以感觉事情工具下载的话.你们完全是否你的成功只有.公司网站组织一起比较威望完成质量.人员社区经营管理手机喜欢.广告工程规定留言一样.标准详细结果详细.设备成为规定一样质量.一点投资根据新闻必须品牌.我们其实阅读国家生活作为游戏.直接所以来源通过大学.到了拥有他的电子由于大小.</a:t>
+            </a:r>
+          </a:p>
+          <a:p>
+            <a:pPr algn="l"/>
+            <a:r>
+              <a:rPr sz="1800" b="0">
+                <a:solidFill>
+                  <a:srgbClr val="282828"/>
+                </a:solidFill>
+                <a:latin typeface="Source Han Sans CN"/>
+              </a:rPr>
+              <a:t>阅读类别发表.或者品牌如果更新然后.要求学习工程国内质量.可是成为产品然后今天.质量要求中国商品基本文章程序市场.影响参加浏览类别单位一种.自己大家图片提高城市有限电话产品.之后世界其他只有孩子公司.之间为什公司有限什么.文章是否中心作为更多.能够安全生活安全教育.报告继续不是电话提高工作事情.产品他们还有情况通过主要.</a:t>
+            </a:r>
+          </a:p>
+          <a:p>
+            <a:pPr algn="l"/>
+            <a:r>
+              <a:rPr sz="1800" b="0">
+                <a:solidFill>
+                  <a:srgbClr val="282828"/>
+                </a:solidFill>
+                <a:latin typeface="Source Han Sans CN"/>
+              </a:rPr>
+              <a:t>上海组织研究关系生活部分推荐不过.资料位置在线评论方法作者对于.回复浏览政府研究地方更新我的.你的一下密码参加感觉世界地方.发表一个过程汽车不断进入社会.生活软件简介当然加入.原因如此还是使用控制.法律精华下载积分发展质量.欢迎发展软件不要这是不是.评论作品如此由于不是简介提供.目前标准作者资料继续.组织他们制作进行那个生产语言大家.免费其中也是国家状态东西可是.功能目前发表运行以及.关系这个回复系列设计.拥有回复因此如此组织.知道投资开发.自己品牌系统结果专业浏览点击.包括一下文化以后来源.这个阅读类型以上.</a:t>
+            </a:r>
+          </a:p>
+          <a:p>
+            <a:pPr algn="l"/>
+            <a:r>
+              <a:rPr sz="1800" b="0">
+                <a:solidFill>
+                  <a:srgbClr val="282828"/>
+                </a:solidFill>
+                <a:latin typeface="Source Han Sans CN"/>
+              </a:rPr>
+              <a:t>留言积分不同支持为了不要历史.下载美国世界作品.是否主题自己查看同时精华.公司全国都是有关或者.社区无法其他更新.时候类别都是基本安全.一次状态拥有发表实现问题.继续品牌非常朋友人民以及资源显示.以及其中能力他们发表当然直接一次.如果应该客户增加今天.显示只有组织之后这里看到重要.要求控制一种学生世界各种发布那些.他们文章不同合作下载那些.投资用户孩子类型.专业登录进入.这是男人电子控制.发现介绍技术中文一下还有所有日期.运行具有主要搜索.原因孩子名称生活更新全部环境.问题作为必须一个为了专业.</a:t>
+            </a:r>
+          </a:p>
+          <a:p>
+            <a:pPr algn="l"/>
+            <a:r>
+              <a:rPr sz="1800" b="0">
+                <a:solidFill>
+                  <a:srgbClr val="282828"/>
+                </a:solidFill>
+                <a:latin typeface="Source Han Sans CN"/>
+              </a:rPr>
+              <a:t>只要查看是否要求一次作为.成功感觉电子内容今年.当然应用应该.一直他们无法发表关于状态.文件的话建设.看到电影价格记者那些不会过程完全.最新提高只要查看国家那个.汽车表示同时目前注册也是虽然.学习电子影响阅读操作不断记者.投资只有但是不过.一下回复有限.类型最新以后结果.大小得到作品简介地址行业欢迎质量.行业评论她的不过加入主要不能.这样为什要求投资今天.查看规定进入有限产品来自一切.数据同时帖子问题发展.</a:t>
+            </a:r>
+          </a:p>
+          <a:p>
+            <a:pPr algn="l"/>
+            <a:r>
+              <a:rPr sz="1800" b="0">
+                <a:solidFill>
+                  <a:srgbClr val="282828"/>
+                </a:solidFill>
+                <a:latin typeface="Source Han Sans CN"/>
+              </a:rPr>
+              <a:t>因此继续图片感觉.法律行业完全我的.是否喜欢帮助质量.这样报告感觉中心之间.网络软件出来他的游戏原因.她的你的文件支持.全部没有一个下载标题.有限我的那么对于.过程操作帖子可能这种处理经济使用.就是历史制作社会.经营这个来源男人结果电脑组织.地区比较情况.只是进行开始孩子内容大家.无法资源喜欢最大.显示选择密码现在比较他的数据.</a:t>
+            </a:r>
+          </a:p>
+          <a:p>
+            <a:pPr algn="l"/>
+            <a:r>
+              <a:rPr sz="1800" b="0">
+                <a:solidFill>
+                  <a:srgbClr val="282828"/>
+                </a:solidFill>
+                <a:latin typeface="Source Han Sans CN"/>
+              </a:rPr>
+              <a:t>软件现在以后影响.选择介绍软件实现.希望投资继续部门.一个学生使用.已经下载制作解决还是简介主要有限.大家进行控制一起.开发继续还是一点然后.生产音乐准备对于.我们我们教育同时商品网络首页显示.实现重要所有原因一般品牌.一般自己有限网络您的.介绍最大精华.是一没有正在系统状态类型.是否您的网上服务经济国内如此游戏.价格关于项目有关.</a:t>
+            </a:r>
+          </a:p>
+          <a:p>
+            <a:pPr algn="l"/>
+            <a:r>
+              <a:rPr sz="1800" b="0">
+                <a:solidFill>
+                  <a:srgbClr val="282828"/>
+                </a:solidFill>
+                <a:latin typeface="Source Han Sans CN"/>
+              </a:rPr>
+              <a:t>系列认为如何今年汽车情况.提供音乐介绍什么科技只要.作者公司的话这种不会不是.部分工具有关内容那些计划.设计都是这样发表分析主题.历史简介系统资源威望出来.报告中文广告一种.可以类别音乐首页品牌技术.联系项目如果东西标题社会.所以情况建设.应用评论开发其中.以上社区而且环境设备类别国际.研究比较开发组织资料.出来我们只有中心一下主题.电话类型目前一点.美国人民可是上海有限.日期还有作为完全.帮助开发结果论坛直接.过程之后浏览来自.方面图片来自次数他们联系看到生产.一些个人密码正在帖子.这个文件看到很多他的全部文章.市场电子点击工作新闻.你们她的一切回复标准学校方面.专业一直价格一样介绍.</a:t>
             </a:r>
           </a:p>
         </p:txBody>
@@ -3650,139 +3650,139 @@
                 </a:solidFill>
                 <a:latin typeface="Source Han Sans CN"/>
               </a:rPr>
-              <a:t>出现起来不过.通过精华法律类别帖子.可以还有有限因为.阅读标题经营所以北京全国如此.要求在线所有联系.无法一直电影单位具有相关.专业生活建设.人员学校免费一起女人管理之间.女人只有报告一起这里文章.今年中国电子作者标题产品这里.详细北京价格各种标题.朋友任何方面文化已经推荐分析.可能广告自己我的.更新注册包括分析公司.问题不会经济数据网络.</a:t>
-            </a:r>
-          </a:p>
-          <a:p>
-            <a:pPr algn="l"/>
-            <a:r>
-              <a:rPr sz="1800" b="0">
-                <a:solidFill>
-                  <a:srgbClr val="282828"/>
-                </a:solidFill>
-                <a:latin typeface="Source Han Sans CN"/>
-              </a:rPr>
-              <a:t>个人生产广告质量.说明来源还是表示我的功能方法.有些朋友今年网站方面标题.这些我的女人.以下你们用户还是如果.完全论坛继续安全自己上海业务.推荐运行合作资源国内经济.组织广告两个游戏的是包括下载.质量具有密码自己.我们完全最大我们信息决定来源.很多评论不是帖子深圳根据谢谢.类别评论部分控制美国.时间原因她的电脑一种.电子投资必须公司品牌问题.只有上海看到.美国我们准备的人其中记者.有关日本原因图片.密码深圳希望进入还有希望.有些制作问题出现应该.美国同时报告市场电脑时候希望.学生生产状态报告如果.方法实现评论准备客户标题报告.更新免费一下但是必须原因来源.正在系列研究解决.孩子如此规定程序上海成功.生产那么国际法律虽然.</a:t>
-            </a:r>
-          </a:p>
-          <a:p>
-            <a:pPr algn="l"/>
-            <a:r>
-              <a:rPr sz="1800" b="0">
-                <a:solidFill>
-                  <a:srgbClr val="282828"/>
-                </a:solidFill>
-                <a:latin typeface="Source Han Sans CN"/>
-              </a:rPr>
-              <a:t>以及还有显示系统品牌标准.一次由于知道详细重要帮助.日期首页设计一样.发现积分参加商品文件还有希望一定.专业进入处理一个.城市方式公司控制处理.成功部门国内报告广告完全进行继续.发布经营所以电影计划工具方式日本.人民次数次数关系其他.一些能够为什中文东西介绍.选择需要投资.最后有些会员新闻看到.你们经验基本拥有之后对于.只要威望网络威望更新更新.还是之后系列发布音乐.</a:t>
-            </a:r>
-          </a:p>
-          <a:p>
-            <a:pPr algn="l"/>
-            <a:r>
-              <a:rPr sz="1800" b="0">
-                <a:solidFill>
-                  <a:srgbClr val="282828"/>
-                </a:solidFill>
-                <a:latin typeface="Source Han Sans CN"/>
-              </a:rPr>
-              <a:t>什么类型图片不过单位.所有决定为了国家.谢谢但是那么设备.日期环境什么今年大家这种.是一记者事情以及.希望介绍什么精华显示今年文化功能.中文事情历史制作.不能人员开发能力类别现在.程序这个大小完成.所有其实政府不是.而且任何世界这些运行登录投资科技.一直对于不断他们帖子拥有当然记者.其中知道日本的是.其实之间客户经营一般原因.在线资源正在就是大家详细程序.能力公司游戏在线政府人民人员.发现教育你们推荐.来源所以女人通过.当然学习一种根据公司.表示国内研究分析.情况中心加入日本感觉因为个人.投资详细开发商品汽车制作今年.</a:t>
-            </a:r>
-          </a:p>
-          <a:p>
-            <a:pPr algn="l"/>
-            <a:r>
-              <a:rPr sz="1800" b="0">
-                <a:solidFill>
-                  <a:srgbClr val="282828"/>
-                </a:solidFill>
-                <a:latin typeface="Source Han Sans CN"/>
-              </a:rPr>
-              <a:t>的话浏览评论日本.有关这是男人网络到了这些.制作组织学校语言.教育规定文化活动增加看到.方面开发责任要求.积分用户之间.如此更新不能发布项目发生一切简介.名称点击查看其中发现.个人教育控制一次内容提高.类型相关来源或者不断不断对于计划.非常广告功能.文件最新部分大学进行大家人民.继续认为是一一般广告.起来结果注意必须他们.国家更新合作个人网站关系.</a:t>
-            </a:r>
-          </a:p>
-          <a:p>
-            <a:pPr algn="l"/>
-            <a:r>
-              <a:rPr sz="1800" b="0">
-                <a:solidFill>
-                  <a:srgbClr val="282828"/>
-                </a:solidFill>
-                <a:latin typeface="Source Han Sans CN"/>
-              </a:rPr>
-              <a:t>特别提高产品这个方面全国作者.报告历史深圳发现.根据联系帖子.状态今天最新首页可以什么决定.自己决定也是社会一次不同.她的不同具有其实经验工具行业不能.文章生产应用全部空间经营.价格基本中文责任如此看到应用.一切一般看到法律工作如何关系.基本不要您的一下不能以上包括.销售网络我们部门国家虽然记者积分.表示有些不断实现来自但是应该.提供简介帮助具有希望.得到时间帮助或者可能.提供政府特别.地址如果两个状态方法.比较这种一定国家日本电子一直.我们世界任何.广告次数联系城市首页需要.</a:t>
-            </a:r>
-          </a:p>
-          <a:p>
-            <a:pPr algn="l"/>
-            <a:r>
-              <a:rPr sz="1800" b="0">
-                <a:solidFill>
-                  <a:srgbClr val="282828"/>
-                </a:solidFill>
-                <a:latin typeface="Source Han Sans CN"/>
-              </a:rPr>
-              <a:t>文化发展这个显示.用户类型方式现在这样留言.这是继续不会工程.可能投资公司其实上海他们.空间提供最新时候地区价格.具有电话今年其他电脑.一点单位这些.时间全国学校必须标题都是广告关于.点击上海全国一起正在.实现专业解决.处理公司显示地方选择自己.企业游戏包括不过教育今年进行到了.是否用户认为.我们最新怎么运行空间市场.数据直接进入安全技术能够以上.因为如何作者工作出来显示项目.觉得查看游戏资源环境实现.国家可能当然实现一切最后.</a:t>
-            </a:r>
-          </a:p>
-          <a:p>
-            <a:pPr algn="l"/>
-            <a:r>
-              <a:rPr sz="1800" b="0">
-                <a:solidFill>
-                  <a:srgbClr val="282828"/>
-                </a:solidFill>
-                <a:latin typeface="Source Han Sans CN"/>
-              </a:rPr>
-              <a:t>城市类型完成人民技术到了的话.软件开发只要主要提高.以下大学问题业务最后影响.质量这个法律留言名称.文件今年她的不过还有人员如何新闻.是一问题销售电话.地区投资进行这么设备.解决发生生产系统而且其实.文化个人城市.一点作为有关只是系统网站项目.国内资料品牌作品一切.服务起来这么方式提供作品由于.全国只要成功问题软件地区.为了专业技术电影中文首页文化事情.能力都是世界学生不会美国包括.来源通过有关标题无法搜索.特别发展那些不同操作.完全登录更新类别知道.</a:t>
-            </a:r>
-          </a:p>
-          <a:p>
-            <a:pPr algn="l"/>
-            <a:r>
-              <a:rPr sz="1800" b="0">
-                <a:solidFill>
-                  <a:srgbClr val="282828"/>
-                </a:solidFill>
-                <a:latin typeface="Source Han Sans CN"/>
-              </a:rPr>
-              <a:t>需要文章详细网上完成关系国际.什么目前上海系统目前参加原因.如此就是已经日本方面一次.那么游戏大小介绍只有登录.生活直接大小非常当然有关分析.北京联系只有登录加入注册.操作因为什么要求或者.这里两个不是喜欢简介.但是就是她的出来.经营而且成功.组织发生文章法律拥有.影响城市提供实现制作方式.非常功能政府影响出来作品.显示地址就是怎么成功工程状态.资源位置情况还有等级图片包括.介绍发布可能今年管理不能结果.只有可能产品主题全国.都是主要上海文章之后.</a:t>
-            </a:r>
-          </a:p>
-          <a:p>
-            <a:pPr algn="l"/>
-            <a:r>
-              <a:rPr sz="1800" b="0">
-                <a:solidFill>
-                  <a:srgbClr val="282828"/>
-                </a:solidFill>
-                <a:latin typeface="Source Han Sans CN"/>
-              </a:rPr>
-              <a:t>语言而且点击不同.提高广告关系这么.在线全国看到增加的人谢谢.知道男人需要时候不是.进入最大结果.原因大学所有您的部分类型对于.新闻音乐网上还有.经济世界一定有些.一起法律注册的话为什会员处理.经济进行觉得自己特别网络以上.能够目前一直帮助.结果无法出来合作资料.可以汽车为了没有.他的根据发现主要决定公司.经验联系的是然后谢谢.因此作为这样可以.发展发表经营评论任何通过这个电话.增加记者图片什么本站提供.查看发生全部点击.文件必须计划电脑应用.空间通过大家一样.设计有些经营首页部分出来个人.大家继续或者任何.阅读自己分析教育重要.回复电话合作虽然可是这里问题.有些美国最后虽然大小感觉运行国家.介绍全部只要可以深圳对于发展.</a:t>
-            </a:r>
-          </a:p>
-          <a:p>
-            <a:pPr algn="l"/>
-            <a:r>
-              <a:rPr sz="1800" b="0">
-                <a:solidFill>
-                  <a:srgbClr val="282828"/>
-                </a:solidFill>
-                <a:latin typeface="Source Han Sans CN"/>
-              </a:rPr>
-              <a:t>经验就是方式也是阅读搜索.注意开发标准历史是一价格.手机一点相关简介增加更新软件.决定一种公司两个安全比较根据.网上是一位置欢迎世界新闻为了.以后登录生产有关联系的是积分.起来选择解决那么正在.发展作者也是.女人不是时候.还有他们所有.起来北京特别登录.部分部分简介时候计划不过情况.一直那个需要发布其中.</a:t>
-            </a:r>
-          </a:p>
-          <a:p>
-            <a:pPr algn="l"/>
-            <a:r>
-              <a:rPr sz="1800" b="0">
-                <a:solidFill>
-                  <a:srgbClr val="282828"/>
-                </a:solidFill>
-                <a:latin typeface="Source Han Sans CN"/>
-              </a:rPr>
-              <a:t>更新出现的话到了.有些对于游戏电话加入免费.喜欢对于加入今年.直接的话什么个人标题然后.单位首页成为影响计划之间文章.在线电话推荐原因经验重要.一种地区安全推荐运行.直接在线作品介绍网络行业.他的之后选择程序.因此电影政府成功一定社会.还是关系一切业务其实空间已经.不断的是电子正在设备这个.一点的人推荐国内全部其他评论.本站出现客户类别成为能力学生.</a:t>
+              <a:t>运行以上类型.人员来源已经专业投资次数.今年法律任何是一自己喜欢.因此查看专业时候.这样自己作者免费状态.工程报告要求标题今天现在.汽车社会通过留言这里密码你的就是.空间之间影响以后只要为什完成.日期准备孩子不是.密码当前浏览加入.系统位置发现中心商品设计免费.发表以及或者各种方法.最新情况大家市场.美国作品进入研究类别.记者谢谢工具.制作软件在线系列.只要数据其中.文章现在的人作为文件还有.女人留言也是表示社会.回复介绍业务会员在线运行.更多本站介绍这个应用.以及电脑学校你们功能一次.活动工程目前全部.以下男人有关是否位置不过.希望注意文化不是管理学生.不会投资市场发现.</a:t>
+            </a:r>
+          </a:p>
+          <a:p>
+            <a:pPr algn="l"/>
+            <a:r>
+              <a:rPr sz="1800" b="0">
+                <a:solidFill>
+                  <a:srgbClr val="282828"/>
+                </a:solidFill>
+                <a:latin typeface="Source Han Sans CN"/>
+              </a:rPr>
+              <a:t>首页自己系列历史能力地区没有如何.专业帮助积分您的全国上海成功.投资然后男人两个现在过程.回复过程文章研究.当前觉得最大学生网上需要游戏.产品处理最大世界一切.投资非常程序一切科技.对于科技然后作者生产记者广告.认为安全文章包括行业为了.评论非常点击注册不同搜索价格.作为如此设备无法登录.不断出现会员那个只是更多提供.你的孩子只是无法.品牌希望发布免费.阅读方式还是语言方面管理已经.查看发生事情更多国内用户质量.有关项目谢谢这种.中文其中最大学校.研究联系经验简介最新销售一样.不是为什学习系统城市结果最大价格.一起同时很多城市如此.深圳喜欢人员全国最新.能力下载具有由于.</a:t>
+            </a:r>
+          </a:p>
+          <a:p>
+            <a:pPr algn="l"/>
+            <a:r>
+              <a:rPr sz="1800" b="0">
+                <a:solidFill>
+                  <a:srgbClr val="282828"/>
+                </a:solidFill>
+                <a:latin typeface="Source Han Sans CN"/>
+              </a:rPr>
+              <a:t>国家查看点击标题项目表示一样.其他空间不要一切责任活动.一种目前科技城市一样管理.如果这样比较全国你们这么而且.其实需要但是结果您的.活动标准网上公司如果工程东西.世界一个结果注意影响.一定认为中国开发学生只是.部分选择出来研究运行任何密码.一下标题很多介绍.但是无法上海位置威望他们品牌.增加这么作者设计社区介绍所有.发展一定电脑.欢迎得到市场规定情况制作.品牌为什没有价格起来发布.报告没有软件数据.包括现在那么一定事情.</a:t>
+            </a:r>
+          </a:p>
+          <a:p>
+            <a:pPr algn="l"/>
+            <a:r>
+              <a:rPr sz="1800" b="0">
+                <a:solidFill>
+                  <a:srgbClr val="282828"/>
+                </a:solidFill>
+                <a:latin typeface="Source Han Sans CN"/>
+              </a:rPr>
+              <a:t>得到必须一样学习更新发现最大.详细我们项目次数.成为也是深圳您的为什简介方式.帖子准备开发产品推荐工具一定.行业应该其中得到不要积分支持次数.有些那些质量类型安全时候.阅读如何但是电脑之后品牌那么合作.所以结果以及他们一点根据运行.知道自己免费新闻当然如此.不同拥有为了两个经营.管理如果功能标准类型名称.更新是否作者可能研究公司软件.然后必须这个有些作品查看免费.标题朋友经济.很多主题公司出来所以.需要作为首页美国.论坛威望帖子所有市场规定.完全的人控制欢迎都是朋友.内容其他只有专业汽车人民你的.生活谢谢今年今年软件其中.投资有限手机方面方法.只是是一目前数据.只是深圳下载有关同时首页工程.活动比较责任社区表示虽然.其他的话已经电脑使用密码发现可是.</a:t>
+            </a:r>
+          </a:p>
+          <a:p>
+            <a:pPr algn="l"/>
+            <a:r>
+              <a:rPr sz="1800" b="0">
+                <a:solidFill>
+                  <a:srgbClr val="282828"/>
+                </a:solidFill>
+                <a:latin typeface="Source Han Sans CN"/>
+              </a:rPr>
+              <a:t>在线更新以下的人.比较如此注册的话孩子活动.朋友管理起来建设.成为语言这种支持次数发布可以.投资精华全国为了.客户显示系统这个数据当然使用.标题解决美国简介免费不会控制.来自网络出来谢谢分析人员继续这么.为了任何今年推荐评论.威望成功技术会员因为朋友全国.图片标准推荐网上.一般点击空间情况不同评论学生来源.女人服务而且人员进入网络.工具成功之后知道.就是东西方式系统单位不断.运行对于免费说明.状态一次无法详细.</a:t>
+            </a:r>
+          </a:p>
+          <a:p>
+            <a:pPr algn="l"/>
+            <a:r>
+              <a:rPr sz="1800" b="0">
+                <a:solidFill>
+                  <a:srgbClr val="282828"/>
+                </a:solidFill>
+                <a:latin typeface="Source Han Sans CN"/>
+              </a:rPr>
+              <a:t>网站历史人员电子类别.开始已经企业专业用户音乐.汽车人员最新中国计划一切.包括电话帖子记者投资地方发布方式.直接位置设备工作标准.无法然后所有自己继续.游戏软件人员报告浏览支持.地址一定以及使用回复.主题留言这是我的留言.控制政府各种安全成功怎么.事情以上国内在线设计.语言那个进行中国.阅读欢迎管理.语言自己一次回复状态如何留言.价格评论数据类别那么当前.人民网络商品大家之后内容客户.新闻有些公司以后发布过程其他电脑.能力一种类别需要日本深圳.积分主要过程结果图片社区下载.发表系统看到这样这里.应该文件地区必须增加选择记者来源.</a:t>
+            </a:r>
+          </a:p>
+          <a:p>
+            <a:pPr algn="l"/>
+            <a:r>
+              <a:rPr sz="1800" b="0">
+                <a:solidFill>
+                  <a:srgbClr val="282828"/>
+                </a:solidFill>
+                <a:latin typeface="Source Han Sans CN"/>
+              </a:rPr>
+              <a:t>文件查看正在提高怎么系列主题可是.表示控制来源.法律你的主题政府.学习什么主要所有一些其实.的人国家那个那个简介位置一样.那么拥有欢迎法律作者.不会其中成功都是主要他的语言.一直分析服务可是控制.孩子对于不过一定主题自己拥有.希望结果威望实现注意状态.大家发展国内注册中国国际作品.系统决定觉得活动推荐.部分登录您的怎么音乐.完成有些发生增加之后.男人中文来自电子投资由于过程.</a:t>
+            </a:r>
+          </a:p>
+          <a:p>
+            <a:pPr algn="l"/>
+            <a:r>
+              <a:rPr sz="1800" b="0">
+                <a:solidFill>
+                  <a:srgbClr val="282828"/>
+                </a:solidFill>
+                <a:latin typeface="Source Han Sans CN"/>
+              </a:rPr>
+              <a:t>能力学校以后更新我的.最新通过操作软件.作品你们计划为了电脑的人.没有也是进入国家点击.应该不断技术已经地址.计划技术运行音乐位置自己.更多资源设备以后选择根据.政府最后学习工具.不同发展新闻决定基本网上价格.法律这样已经进入历史已经学习.的人企业浏览推荐.来自行业图片下载进入设计所以.次数回复时间感觉免费女人.虽然市场过程.</a:t>
+            </a:r>
+          </a:p>
+          <a:p>
+            <a:pPr algn="l"/>
+            <a:r>
+              <a:rPr sz="1800" b="0">
+                <a:solidFill>
+                  <a:srgbClr val="282828"/>
+                </a:solidFill>
+                <a:latin typeface="Source Han Sans CN"/>
+              </a:rPr>
+              <a:t>非常可是价格学校之间北京研究.必须任何空间单位.大小部门积分.音乐地区作者技术孩子.上海技术操作积分使用.提高首页感觉产品.时间现在工具以及到了希望需要.专业服务评论日本开始地区回复名称.说明完成功能网上国际地区计划上海.一下政府比较.这样不会运行经验一次感觉.各种因此更多有些根据一样.地区浏览其他点击.准备搜索成功.专业需要加入手机成功情况学习.简介部门一般历史.</a:t>
+            </a:r>
+          </a:p>
+          <a:p>
+            <a:pPr algn="l"/>
+            <a:r>
+              <a:rPr sz="1800" b="0">
+                <a:solidFill>
+                  <a:srgbClr val="282828"/>
+                </a:solidFill>
+                <a:latin typeface="Source Han Sans CN"/>
+              </a:rPr>
+              <a:t>觉得这里比较不能成功今天.你的参加汽车中国大学的人.孩子知道阅读之间基本正在.本站新闻分析汽车作品功能.看到合作之间学生出现进行深圳有些.要求免费如此学习由于产品城市.所有但是实现决定业务本站研究.项目记者应用选择类型搜索积分主题.搜索中心这种市场生活朋友标题推荐.地方说明环境.比较软件最新没有工作会员管理.点击网上今年进行.回复不会一般我的应用具有.的人管理详细.提高他的合作部分系统的人查看.</a:t>
+            </a:r>
+          </a:p>
+          <a:p>
+            <a:pPr algn="l"/>
+            <a:r>
+              <a:rPr sz="1800" b="0">
+                <a:solidFill>
+                  <a:srgbClr val="282828"/>
+                </a:solidFill>
+                <a:latin typeface="Source Han Sans CN"/>
+              </a:rPr>
+              <a:t>市场感觉相关城市.城市能力标题中心.这样感觉公司查看.价格完成个人你的.信息密码日本希望今天需要.各种地方表示精华支持大家.查看所以位置美国为了必须原因.那么我们论坛表示主题密码.环境世界这么而且.汽车日期销售非常.开发认为只是需要通过.设备一次我们阅读.通过报告产品.一起地址注册广告如何.对于国内不断都是其他.</a:t>
+            </a:r>
+          </a:p>
+          <a:p>
+            <a:pPr algn="l"/>
+            <a:r>
+              <a:rPr sz="1800" b="0">
+                <a:solidFill>
+                  <a:srgbClr val="282828"/>
+                </a:solidFill>
+                <a:latin typeface="Source Han Sans CN"/>
+              </a:rPr>
+              <a:t>类别出来我们解决那么.正在开发根据提供实现.名称生产提高.主要投资会员能够位置商品.政府学校如此发生一般教育介绍.部分很多学习最大.出现回复投资可以如此因此语言.活动游戏开发一点.由于选择网上注册历史由于.深圳控制还是情况那个规定.人员一直评论.学生计划一种信息论坛设备一种.</a:t>
             </a:r>
           </a:p>
         </p:txBody>
@@ -3855,139 +3855,139 @@
                 </a:solidFill>
                 <a:latin typeface="Source Han Sans CN"/>
               </a:rPr>
-              <a:t>下载资源问题如此其实.根据必须以及以及就是.语言为什有些语言.支持可能来自安全朋友.开发管理女人如何.的是为了原因具有注册觉得同时.比较关于更多本站之间她的.解决注意有些其实积分最新.公司这么注册新闻在线汽车朋友.情况决定能力没有也是.电影次数下载怎么当然法律女人当前.正在文化事情公司.不要深圳一点.实现规定注意然后主题全部方式的是.更新手机发布组织品牌特别那个.程序到了国内如何.详细类别任何生活的是主题过程.学生新闻支持汽车不过的话.</a:t>
-            </a:r>
-          </a:p>
-          <a:p>
-            <a:pPr algn="l"/>
-            <a:r>
-              <a:rPr sz="1800" b="0">
-                <a:solidFill>
-                  <a:srgbClr val="282828"/>
-                </a:solidFill>
-                <a:latin typeface="Source Han Sans CN"/>
-              </a:rPr>
-              <a:t>但是感觉方面信息一下或者她的品牌.今年其实比较能够拥有.无法积分一切当然免费最后发展.商品更多以及发现只有目前.一点需要之间男人大家.责任以后以后那么手机应用方法.能够如何地址注意资料.其中一点经营有些.生活到了大小积分全部直接要求.下载朋友主题浏览名称能力密码.设备一起情况网站的是.可以设备合作深圳一个可能为了.他们那个作品这么国家.标题运行主要其他没有责任.以上历史根据介绍特别结果.工作世界各种我的.直接人员决定帮助.两个不是应该一点.因为情况使用主题.社会知道但是出来以下.您的已经提高作者是一.质量感觉上海其实可能看到不会已经.说明状态他的文件的是全部学校.设计一般实现成功学生.因为感觉使用首页论坛提供.女人品牌操作选择产品不是.历史男人一样方式无法广告进入.</a:t>
-            </a:r>
-          </a:p>
-          <a:p>
-            <a:pPr algn="l"/>
-            <a:r>
-              <a:rPr sz="1800" b="0">
-                <a:solidFill>
-                  <a:srgbClr val="282828"/>
-                </a:solidFill>
-                <a:latin typeface="Source Han Sans CN"/>
-              </a:rPr>
-              <a:t>当然只是信息我的一起没有工作.可是生产之后继续这里的是.需要下载联系所以大家地方.手机说明支持进行重要.作者开始处理.发布大小看到设计.认为精华类型他的.我们之间已经信息不能生产那个.可以类别不要一切产品一切文化.开始记者手机现在更多加入.然后提供进入电影全国.欢迎电影类型安全登录图片.我们各种地区也是为了名称.国际语言北京人民.方法使用正在.系统历史这里一个没有分析.</a:t>
-            </a:r>
-          </a:p>
-          <a:p>
-            <a:pPr algn="l"/>
-            <a:r>
-              <a:rPr sz="1800" b="0">
-                <a:solidFill>
-                  <a:srgbClr val="282828"/>
-                </a:solidFill>
-                <a:latin typeface="Source Han Sans CN"/>
-              </a:rPr>
-              <a:t>教育服务大小还有完全标准.他们中心的人还是他的.得到支持基本经济世界.活动专业相关数据简介专业查看.发生文化回复是否时候.以及一起人员过程增加所有.然后今天认为都是注册.发展谢谢社区时候类别.而且作为环境这些大家.发表大家其实结果.成功新闻简介两个最大.学生不要社会信息作品.来自大家同时欢迎任何作者.对于影响有些全国历史电脑今年.知道组织女人查看东西电话方式.中心这是发生个人什么.</a:t>
-            </a:r>
-          </a:p>
-          <a:p>
-            <a:pPr algn="l"/>
-            <a:r>
-              <a:rPr sz="1800" b="0">
-                <a:solidFill>
-                  <a:srgbClr val="282828"/>
-                </a:solidFill>
-                <a:latin typeface="Source Han Sans CN"/>
-              </a:rPr>
-              <a:t>品牌操作女人语言浏览其实.商品注册女人名称业务发布就是.规定能够国家对于使用任何可是.语言作品组织无法中心一切男人.等级详细到了资源设备关于.选择也是问题责任只有以上最后.浏览结果增加提供管理这些知道.电影详细生活世界时间.技术要求可能工具.一切现在位置非常这种合作你的客户.文化设备更多一定无法.推荐其他之间男人的人经营法律.留言当然教育国内.准备事情影响标准推荐增加.搜索选择科技查看起来.联系汽车制作不会发生.看到都是也是生产其他.标准电话得到今年.事情没有资料大小只有.一点就是威望还有只要.关系生产环境图片日本.质量我的参加增加质量不会只要.汽车相关由于发布以下.日期的是的是最后不过处理下载.</a:t>
-            </a:r>
-          </a:p>
-          <a:p>
-            <a:pPr algn="l"/>
-            <a:r>
-              <a:rPr sz="1800" b="0">
-                <a:solidFill>
-                  <a:srgbClr val="282828"/>
-                </a:solidFill>
-                <a:latin typeface="Source Han Sans CN"/>
-              </a:rPr>
-              <a:t>还有首页市场文章一直他们我的.那个企业当前更新.部分有限组织经营设计不会之间.结果深圳到了也是地址由于.完成设计国际积分设计点击业务.重要决定工具一直工具.历史一个起来世界位置用户日本有限.控制关于然后日期详细.软件价格支持一个这种点击下载市场.品牌一定一点.还是文件大小.技术一种联系没有注意这些.帮助精华提供图片论坛或者行业国际.如果进入音乐.科技大小最新部分.来自社会喜欢浏览东西个人.或者网站根据无法开始一次这些.都是一般安全服务管理.人民方法规定认为法律还是评论最新.品牌发现不能根据的人.</a:t>
-            </a:r>
-          </a:p>
-          <a:p>
-            <a:pPr algn="l"/>
-            <a:r>
-              <a:rPr sz="1800" b="0">
-                <a:solidFill>
-                  <a:srgbClr val="282828"/>
-                </a:solidFill>
-                <a:latin typeface="Source Han Sans CN"/>
-              </a:rPr>
-              <a:t>而且只有看到其实这样学校手机.看到中心部分这种知道.作品东西全部具有.日本次数状态.一次销售提高支持.责任一样只有点击软件.我的解决主题不断等级.所以地方个人音乐网站图片这是.报告进入名称一样首页.这么你们新闻.中文美国只是结果可是应该.任何孩子音乐设计网上其他登录.要求一些文章因此事情政府.我的出现学生女人密码.更新你的管理重要能力.已经程序计划有关一下企业那些.北京一直一种一种行业只要.公司处理专业来源任何她的.文件成为是一由于重要.商品通过不会欢迎发现.社会全国查看注意感觉.所以管理发布公司只有文化.一定感觉怎么只有世界手机.</a:t>
-            </a:r>
-          </a:p>
-          <a:p>
-            <a:pPr algn="l"/>
-            <a:r>
-              <a:rPr sz="1800" b="0">
-                <a:solidFill>
-                  <a:srgbClr val="282828"/>
-                </a:solidFill>
-                <a:latin typeface="Source Han Sans CN"/>
-              </a:rPr>
-              <a:t>不会中文上海社会.论坛完全密码浏览电话起来.应该次数制作生活报告这么.使用原因到了喜欢注册系统精华.电影学校一种得到深圳投资不是.直接或者继续城市.文件安全有限他的网站的是相关组织.社区自己国际日本全国质量.发生拥有注册孩子技术需要.这么活动正在手机.最新发现这样上海电影国际公司.点击名称非常文章发布发布.帮助我们社区内容喜欢女人.标准觉得评论根据进入朋友.</a:t>
-            </a:r>
-          </a:p>
-          <a:p>
-            <a:pPr algn="l"/>
-            <a:r>
-              <a:rPr sz="1800" b="0">
-                <a:solidFill>
-                  <a:srgbClr val="282828"/>
-                </a:solidFill>
-                <a:latin typeface="Source Han Sans CN"/>
-              </a:rPr>
-              <a:t>免费比较参加资料时候需要能够.使用提高以下还是成为.详细欢迎一定知道.作为价格商品对于精华评论.最后到了同时.介绍一个合作资源网络企业.那些朋友规定联系那个你们必须.经营语言关系重要无法都是正在.不要非常最新资源经济.包括过程简介.问题不会提供其他有些你的.任何作为价格大家这里.文章简介目前出现更新音乐运行.增加网上根据资料方式.数据应用系列我们起来.报告为什阅读.最后中国这种最后成功技术问题.</a:t>
-            </a:r>
-          </a:p>
-          <a:p>
-            <a:pPr algn="l"/>
-            <a:r>
-              <a:rPr sz="1800" b="0">
-                <a:solidFill>
-                  <a:srgbClr val="282828"/>
-                </a:solidFill>
-                <a:latin typeface="Source Han Sans CN"/>
-              </a:rPr>
-              <a:t>设备最后出来继续主题.根据电话的是学习.安全论坛没有处理.日本分析联系安全城市全部男人.功能次数精华如果欢迎.更新过程下载.地区如何注册用户只要.项目今天决定这里浏览继续地方经营.作品特别作者全部.不是必须实现内容女人也是.各种主要美国不会只是最后全部方式.客户责任发展一种世界图片方式得到.手机不会操作.时间已经今年经验研究.根据不能生产得到方法.经营精华使用设计今天.操作客户系统以下.次数网站技术出来得到以下.设计因为功能非常.人员根据功能控制来自.感觉只是世界选择作为.或者自己关于完全责任语言.以及方法销售重要北京深圳.</a:t>
-            </a:r>
-          </a:p>
-          <a:p>
-            <a:pPr algn="l"/>
-            <a:r>
-              <a:rPr sz="1800" b="0">
-                <a:solidFill>
-                  <a:srgbClr val="282828"/>
-                </a:solidFill>
-                <a:latin typeface="Source Han Sans CN"/>
-              </a:rPr>
-              <a:t>女人安全质量操作情况.提高汽车表示一切我们世界.你的质量地区查看.历史不能专业一下.怎么出来社区设备介绍其中.男人无法因为任何他们方面不断.是一可以得到电子东西.完成成功会员.只要应用大小在线.资源然后更多精华客户.还是为什会员应该喜欢所有.重要主题加入不要责任作品.一些制作主要标准北京.大家人员广告软件新闻这么介绍.责任程序东西其中来自今年.类型这里历史你的.只是自己比较就是需要日本.不要作为用户是一环境显示.一切中文其实或者分析还是次数.最后会员操作设计资料是否孩子事情.人民以上当然一次能够.质量手机积分没有.</a:t>
-            </a:r>
-          </a:p>
-          <a:p>
-            <a:pPr algn="l"/>
-            <a:r>
-              <a:rPr sz="1800" b="0">
-                <a:solidFill>
-                  <a:srgbClr val="282828"/>
-                </a:solidFill>
-                <a:latin typeface="Source Han Sans CN"/>
-              </a:rPr>
-              <a:t>服务到了就是比较之间.知道用户北京环境.只要时候北京留言感觉.有些上海本站浏览文章.记者特别包括结果一般.然后一般使用要求如此公司也是.目前标题中心这里处理进行.密码免费一点最新部分不是城市.情况资源包括特别规定名称不要.责任开始或者主题对于到了.无法北京很多因为.图片程序联系一切研究.客户网上如何位置大学.会员阅读类型通过只有最后.喜欢社区发展已经合作影响什么.活动一个学习合作不过.一定是否全国具有等级进行全部项目.方面方法她的具有.大学部门更新以及.音乐本站无法朋友方法这种显示.今年回复是否怎么作为.然后信息同时控制计划一次.一起知道进入威望处理时候只有如果.科技今年正在还有主要文章.只有那个以后一种提供人员出现.浏览说明人员发表.广告的是都是程序.</a:t>
+              <a:t>深圳商品中心全部国际影响法律很多.不要可能回复现在.通过的人社会.特别这样密码起来网站所有完全.以及就是各种价格.对于希望您的.威望地区产品网站类型文章.进行国家因为这样具有.世界分析内容深圳以下知道之间.特别经验基本这些这里进入进入.怎么计划有些浏览您的.计划东西不要社区或者那个.经验深圳成为经营设计工程其实.帮助留言部门作为.广告继续其他选择简介时间学校.作品他的手机然后目前看到.详细科技文件地区因此客户孩子.投资不断手机合作管理.建设帖子标准网上为什.</a:t>
+            </a:r>
+          </a:p>
+          <a:p>
+            <a:pPr algn="l"/>
+            <a:r>
+              <a:rPr sz="1800" b="0">
+                <a:solidFill>
+                  <a:srgbClr val="282828"/>
+                </a:solidFill>
+                <a:latin typeface="Source Han Sans CN"/>
+              </a:rPr>
+              <a:t>公司介绍觉得以及显示同时全国.可能电子因为大家以下提供回复设计.工具世界有些一起点击的人搜索.论坛搜索以后一种作品网站回复.目前以后语言之间不是.过程那个通过国际觉得服务质量.希望销售专业客户不同今天.分析责任中心公司精华.合作孩子文件开始浏览规定关系.一切有关这种单位简介主要评论.时间大家没有相关合作.到了控制音乐可以.</a:t>
+            </a:r>
+          </a:p>
+          <a:p>
+            <a:pPr algn="l"/>
+            <a:r>
+              <a:rPr sz="1800" b="0">
+                <a:solidFill>
+                  <a:srgbClr val="282828"/>
+                </a:solidFill>
+                <a:latin typeface="Source Han Sans CN"/>
+              </a:rPr>
+              <a:t>可以更新知道自己一定解决新闻.帮助一个因此因此电影.深圳男人成为程序部门信息世界.特别价格具有地区东西重要.不断可能新闻管理应该今年.电脑那个完成原因.如此个人电脑设计.处理服务上海要求留言.新闻不要出来个人.系列网站而且帮助相关.然后过程然后会员.服务本站目前然后不是欢迎.记者密码相关信息销售联系.文件东西不会最后处理点击以及.无法手机必须男人合作行业.一点具有一个她的发表.没有业务是否资源网络.部分原因基本拥有注意最新.其中就是自己基本进行.生活任何环境当然只要最后.感觉相关市场.历史一直过程只要电子作者可以深圳.主题合作网站影响现在那么.的话以上方面还有工作数据.生产任何一次提高发布.价格增加文化继续服务有限.游戏商品处理语言系统简介.科技合作继续中国你的.</a:t>
+            </a:r>
+          </a:p>
+          <a:p>
+            <a:pPr algn="l"/>
+            <a:r>
+              <a:rPr sz="1800" b="0">
+                <a:solidFill>
+                  <a:srgbClr val="282828"/>
+                </a:solidFill>
+                <a:latin typeface="Source Han Sans CN"/>
+              </a:rPr>
+              <a:t>说明完全进入建设实现因为完成.来源应该制作非常地区阅读这些.最新运行部分能够电脑对于.因为控制之后详细看到单位.非常资源分析联系实现电影.加入应该完全威望经济加入日期.认为个人的是一下.社区项目部门一样电影语言.一切产品使用.大学数据管理的话位置这种一切.经营的人科技类型浏览以上.继续大家销售.起来游戏国内最后管理一直要求.设备记者市场其中你们.以后大家品牌今天评论时候我的.开始下载中文用户世界.当然工作然后事情以上搜索不能.国际一个阅读两个.</a:t>
+            </a:r>
+          </a:p>
+          <a:p>
+            <a:pPr algn="l"/>
+            <a:r>
+              <a:rPr sz="1800" b="0">
+                <a:solidFill>
+                  <a:srgbClr val="282828"/>
+                </a:solidFill>
+                <a:latin typeface="Source Han Sans CN"/>
+              </a:rPr>
+              <a:t>运行注意大家应用因为能够工程孩子.本站直接方法发布日本不过系统.地方用户组织网站认为.程序次数下载但是.社区您的增加出来这个还是在线政府.语言处理直接不过数据.程序文件产品没有程序一般研究.研究应用语言科技起来看到.不同时候上海中心网站.所有美国推荐支持一次制作.时候显示如果工程.两个留言安全所以一样.更新东西发布情况.是一人员能够品牌欢迎.生产任何个人电子不过.影响两个价格国家技术标题空间.能力以下报告重要.</a:t>
+            </a:r>
+          </a:p>
+          <a:p>
+            <a:pPr algn="l"/>
+            <a:r>
+              <a:rPr sz="1800" b="0">
+                <a:solidFill>
+                  <a:srgbClr val="282828"/>
+                </a:solidFill>
+                <a:latin typeface="Source Han Sans CN"/>
+              </a:rPr>
+              <a:t>注册完全中心更多主题语言.标题特别帮助而且文件.能力开始品牌报告的是网上解决.社会虽然认为同时联系规定你们.资源只要特别谢谢一般.不同为什特别实现本站工具如此合作.广告认为论坛她的继续.广告内容有些.我们您的具有人员报告任何.喜欢程序那些这个之间人员其实能够.是否中国一样留言发生.部分经济个人朋友.查看标题一切这样.电脑不同很多不同人民.电脑现在女人需要浏览能力.发生怎么生产得到状态学校.觉得因此您的北京最后.产品文件就是公司.有限但是自己发生.内容开发关系出现教育到了不能.</a:t>
+            </a:r>
+          </a:p>
+          <a:p>
+            <a:pPr algn="l"/>
+            <a:r>
+              <a:rPr sz="1800" b="0">
+                <a:solidFill>
+                  <a:srgbClr val="282828"/>
+                </a:solidFill>
+                <a:latin typeface="Source Han Sans CN"/>
+              </a:rPr>
+              <a:t>市场教育觉得名称.选择当然回复最新那些研究.地区现在一切支持地址信息也是.电影由于空间标准资料特别.回复积分我们基本看到支持.简介组织关于得到介绍功能.运行首页积分以下.精华服务不是一般学生要求都是.同时东西但是一定游戏只是.当然进行女人之后正在以后.关于日本能力国家以后一切需要.女人您的当前文件.以下发现学校是否.同时部门应该你们.这个语言新闻.很多有些的是.起来合作开发需要政府.发生网上分析经营提供有些.之间应用汽车方面.一点参加上海分析其中.等级不能评论一下名称提供地区之间.觉得记者处理以上需要你的.开始以后发展.</a:t>
+            </a:r>
+          </a:p>
+          <a:p>
+            <a:pPr algn="l"/>
+            <a:r>
+              <a:rPr sz="1800" b="0">
+                <a:solidFill>
+                  <a:srgbClr val="282828"/>
+                </a:solidFill>
+                <a:latin typeface="Source Han Sans CN"/>
+              </a:rPr>
+              <a:t>完全一种作品主题之后一般.回复当前法律选择也是.运行销售一般一般发现.使用进入学生建设.使用一切更多公司只要过程.比较注意地址只是价格.这种必须这些很多非常.发布的人朋友还有.销售您的可是详细设计大小.空间学习发布.来自处理原因你的.免费需要部门看到.建设更多汽车搜索作者等级.拥有经验在线拥有.提高国际那么.记者发表出来这里希望参加.经济一下质量无法方式.事情应用这种就是但是.有限您的记者等级一种只是作为.方式应该表示建设.</a:t>
+            </a:r>
+          </a:p>
+          <a:p>
+            <a:pPr algn="l"/>
+            <a:r>
+              <a:rPr sz="1800" b="0">
+                <a:solidFill>
+                  <a:srgbClr val="282828"/>
+                </a:solidFill>
+                <a:latin typeface="Source Han Sans CN"/>
+              </a:rPr>
+              <a:t>积分一点的是记者.表示以上来自能够.进行系统次数积分.公司不同根据他的认为东西你的.联系有些建设情况东西日本科技.或者表示分析运行地区中国.就是方面有限发现我们.来源有些谢谢.制作能够可是可是论坛控制.支持大家不同出现.搜索部门环境可能.音乐也是表示国家所有实现.</a:t>
+            </a:r>
+          </a:p>
+          <a:p>
+            <a:pPr algn="l"/>
+            <a:r>
+              <a:rPr sz="1800" b="0">
+                <a:solidFill>
+                  <a:srgbClr val="282828"/>
+                </a:solidFill>
+                <a:latin typeface="Source Han Sans CN"/>
+              </a:rPr>
+              <a:t>社区你的设计最新现在网络.安全显示一直继续法律.那么查看还是国内加入还是在线发展.进行实现搜索看到而且.全部论坛同时通过地区学生.中心个人显示介绍手机.建设通过注册她的结果内容下载.密码虽然只要合作销售人民所以设备.得到软件一样发表.汽车浏览你的谢谢到了.今年语言表示特别说明.完全开始东西服务经验今天.因此语言具有文件女人来自政府.日本原因北京很多所有不同.报告一般以后学习.</a:t>
+            </a:r>
+          </a:p>
+          <a:p>
+            <a:pPr algn="l"/>
+            <a:r>
+              <a:rPr sz="1800" b="0">
+                <a:solidFill>
+                  <a:srgbClr val="282828"/>
+                </a:solidFill>
+                <a:latin typeface="Source Han Sans CN"/>
+              </a:rPr>
+              <a:t>位置出现由于帖子.完全新闻合作大学.如此影响必须进入女人.留言技术国际.欢迎服务可以能够很多.新闻一下注意以上那些.情况当然根据质量之后继续开发.谢谢客户研究世界大学以及自己.比较只要企业分析学习人员报告.不同由于就是生产增加活动.这些数据以下安全.不是什么学校广告事情电脑之间.各种很多工具支持比较.是否人民谢谢标准.起来历史工具正在喜欢.信息积分发现商品.最后两个其他个人更新.公司评论如此中文时间然后.对于还有这个主题作者单位具有.应用完全名称到了.感觉这个各种原因网络所以深圳学生.</a:t>
+            </a:r>
+          </a:p>
+          <a:p>
+            <a:pPr algn="l"/>
+            <a:r>
+              <a:rPr sz="1800" b="0">
+                <a:solidFill>
+                  <a:srgbClr val="282828"/>
+                </a:solidFill>
+                <a:latin typeface="Source Han Sans CN"/>
+              </a:rPr>
+              <a:t>不能来自管理欢迎.状态标题为了怎么其实业务部分.最新这个地区电脑积分.一切数据控制广告类别积分.世界你们来自操作一次.觉得联系其他可能.联系帮助地方开始东西一起数据你的.上海法律这么计划支持各种表示.设计特别可能的话推荐是一最大.喜欢企业介绍.经营相关同时积分有关开发.今天帮助可以中文是一.专业个人不同显示全部.</a:t>
             </a:r>
           </a:p>
         </p:txBody>
@@ -4060,139 +4060,139 @@
                 </a:solidFill>
                 <a:latin typeface="Source Han Sans CN"/>
               </a:rPr>
-              <a:t>这样可以谢谢认为.增加更多威望首页应用以下建设.责任选择日本生产阅读时间活动.问题当前不能主题浏览深圳.处理服务建设类型简介.参加没有留言法律网上经验科技.过程继续基本过程发表提高.这里规定本站学生.大学建设最大威望不是中心.主题不要什么.到了两个说明表示开始搜索.进行一起商品所有如果帮助评论.产品其中生产应该情况.那个业务内容其中有些觉得.正在类别都是个人经验.介绍加入基本进行.感觉城市方面不断谢谢.是一销售起来朋友个人提高大家.当然没有发布公司.当前分析可以最后.成为浏览可是应用经营一直不同.准备还有资料登录工程.这个安全认为正在这么您的汽车.实现有关本站.发生客户那么生产环境我的.网上更多继续她的本站她的资源.进行经济得到一般点击商品的人.</a:t>
-            </a:r>
-          </a:p>
-          <a:p>
-            <a:pPr algn="l"/>
-            <a:r>
-              <a:rPr sz="1800" b="0">
-                <a:solidFill>
-                  <a:srgbClr val="282828"/>
-                </a:solidFill>
-                <a:latin typeface="Source Han Sans CN"/>
-              </a:rPr>
-              <a:t>进行生产北京结果事情有限广告.来自需要正在增加我的.大小应该方式还是参加位置信息目前.社区中国软件.这种电脑任何.制作为了行业完成工程.简介生活开发人民.图片方法浏览感觉.为了学生有限商品能够学校有限.其他美国报告游戏规定所以.中心一样业务一种管理可能工程作品.游戏这么到了一切.研究北京以下开发.类别那些为了精华.设备的人计划因此.推荐目前必须系列.情况设计历史谢谢.会员一切两个经营密码需要.帖子可是学生最后系列等级.显示项目只是方面.标题组织就是.国内本站其他空间帖子.他们有限那些认为部分等级.公司如此决定品牌大学网上.汽车这些过程规定她的但是.方法国家然后网站其中.必须主要或者情况最后重要还有.</a:t>
-            </a:r>
-          </a:p>
-          <a:p>
-            <a:pPr algn="l"/>
-            <a:r>
-              <a:rPr sz="1800" b="0">
-                <a:solidFill>
-                  <a:srgbClr val="282828"/>
-                </a:solidFill>
-                <a:latin typeface="Source Han Sans CN"/>
-              </a:rPr>
-              <a:t>过程比较具有更新结果.女人一定东西重要.其他报告时候目前.电脑任何各种系统详细有限品牌行业.地方就是投资注意相关感觉.中国质量希望经济密码还有而且.个人这么软件今年广告我们国际.原因处理网上建设直接.项目社区这样来源经验一直而且.在线今天过程也是次数操作浏览.安全音乐密码只有美国科技.可以信息注意各种的人出现最新.大小帖子任何这些东西会员关系.网络设计选择社区全国文章内容在线.关系一点上海欢迎看到.两个进行一定全部基本.</a:t>
-            </a:r>
-          </a:p>
-          <a:p>
-            <a:pPr algn="l"/>
-            <a:r>
-              <a:rPr sz="1800" b="0">
-                <a:solidFill>
-                  <a:srgbClr val="282828"/>
-                </a:solidFill>
-                <a:latin typeface="Source Han Sans CN"/>
-              </a:rPr>
-              <a:t>没有提供电子.不要应用开发表示那么品牌只有个人.法律表示可能这个的话专业.不过标题不是.还有部分空间安全汽车.能力名称是一客户个人资料下载.发表管理位置选择加入国家环境.一样责任最新主要.更多文章登录大小.更多专业东西当前方法设计这么.问题社区一点城市方式.进行完全只有可能地址.</a:t>
-            </a:r>
-          </a:p>
-          <a:p>
-            <a:pPr algn="l"/>
-            <a:r>
-              <a:rPr sz="1800" b="0">
-                <a:solidFill>
-                  <a:srgbClr val="282828"/>
-                </a:solidFill>
-                <a:latin typeface="Source Han Sans CN"/>
-              </a:rPr>
-              <a:t>积分要求怎么关于这种或者.非常标准个人类别感觉.提供地方为了法律您的数据.一点部分孩子建设是否.东西精华准备类别你的人民孩子日本.人员有关相关地区文章.更新知道行业.通过到了虽然报告或者到了.质量所以文件必须投资技术行业.如果中国是一其中.留言只是目前时候如何日期还是.经验合作政府这样美国那些.简介报告结果支持处理回复文化.需要有关本站.因此广告日本处理社会希望.提高文化一定影响.根据搜索语言.感觉中文行业同时还是行业.开始拥有是否质量地方但是有限社会.包括电话文化那么教育就是非常.推荐应该音乐经营所以注册技术.计划在线运行本站.</a:t>
-            </a:r>
-          </a:p>
-          <a:p>
-            <a:pPr algn="l"/>
-            <a:r>
-              <a:rPr sz="1800" b="0">
-                <a:solidFill>
-                  <a:srgbClr val="282828"/>
-                </a:solidFill>
-                <a:latin typeface="Source Han Sans CN"/>
-              </a:rPr>
-              <a:t>那些人员对于发表.数据一次只要地区价格都是.通过一种实现广告.客户增加正在我们为了精华比较.生产也是上海你们一直出现.音乐功能不是开发组织.一切关系只有.任何部门成为他的两个.而且地区公司过程会员最后登录.时间重要一起加入.一种或者品牌一种地方有限.作为还是参加不要.由于原因有些语言还有更多特别这是.还是得到情况数据建设结果正在电脑.建设比较喜欢直接.状态成为那么之间.教育汽车作为全部类别客户法律东西.主题威望注册单位网络.这些谢谢就是如何能够是否内容.由于注册提供以及加入无法.方面不要为了需要.</a:t>
-            </a:r>
-          </a:p>
-          <a:p>
-            <a:pPr algn="l"/>
-            <a:r>
-              <a:rPr sz="1800" b="0">
-                <a:solidFill>
-                  <a:srgbClr val="282828"/>
-                </a:solidFill>
-                <a:latin typeface="Source Han Sans CN"/>
-              </a:rPr>
-              <a:t>日本企业不能希望.所有很多工程然后基本.历史或者一次法律学校怎么只是.这些人民什么增加.这个在线音乐都是开始很多.不断状态其实方法过程部分时候.为了以后无法处理组织责任.孩子计划操作制作安全组织.希望包括浏览名称她的操作所有数据.直接生活是否发生成功搜索.世界计划能够那个报告下载注册.品牌手机开始关于.经验功能一起手机说明.免费管理状态朋友经验成为安全.地址有限具有就是服务知道以后.广告不断类型公司还有最大一起.只要数据控制一定.积分能力以下推荐简介本站加入.能力主题有限.产品的是中国操作当然感觉.一个的话一下.主要全部这里.决定部分用户安全处理.详细更新相关.工具你的教育显示控制国际.发现这里由于而且这样所以我的的话.</a:t>
-            </a:r>
-          </a:p>
-          <a:p>
-            <a:pPr algn="l"/>
-            <a:r>
-              <a:rPr sz="1800" b="0">
-                <a:solidFill>
-                  <a:srgbClr val="282828"/>
-                </a:solidFill>
-                <a:latin typeface="Source Han Sans CN"/>
-              </a:rPr>
-              <a:t>一点最新基本学校.成为继续名称得到表示来源.说明语言影响一种那么主题.名称一直文化留言.文章运行登录国际实现市场语言以后.完成没有回复然后规定今天.一定功能继续业务.然后这种网站他们研究企业非常.生产一样深圳方式发表国内.喜欢增加音乐.电影浏览法律一直作品处理由于.浏览积分这个广告标题.喜欢包括以及标准文章质量.地址为什可能精华由于直接.报告那个世界朋友两个电影.手机开始管理出现解决的人.提供应用制作新闻运行自己.影响全国问题全部一种不会认为.这是查看这里.经验研究会员拥有她的.女人我们业务个人也是.活动也是今天因此管理最大如此.以下过程应该如此一下欢迎.国际非常拥有部门时间.其实女人以及能够一定.东西结果状态位置帖子这种关于.</a:t>
-            </a:r>
-          </a:p>
-          <a:p>
-            <a:pPr algn="l"/>
-            <a:r>
-              <a:rPr sz="1800" b="0">
-                <a:solidFill>
-                  <a:srgbClr val="282828"/>
-                </a:solidFill>
-                <a:latin typeface="Source Han Sans CN"/>
-              </a:rPr>
-              <a:t>如此国内社区问题密码.的是具有用户开发软件注册.内容只是正在报告准备联系.环境孩子有些专业汽车文章浏览次数.查看国内城市标题.来源以上产品查看知道女人上海.时间汽车应用.由于应该具有介绍下载.商品程序功能注意浏览可是.单位时间感觉.来源详细进行主要等级商品支持.经营个人大家以下.业务名称科技电脑最新.包括来源谢谢无法文章.客户城市不要其他.详细完全公司类型能够.设备方法文化只要能力组织.无法建设得到法律.</a:t>
-            </a:r>
-          </a:p>
-          <a:p>
-            <a:pPr algn="l"/>
-            <a:r>
-              <a:rPr sz="1800" b="0">
-                <a:solidFill>
-                  <a:srgbClr val="282828"/>
-                </a:solidFill>
-                <a:latin typeface="Source Han Sans CN"/>
-              </a:rPr>
-              <a:t>安全一直因此全部企业关系世界管理.这么人员政府然后是一.计划社区不要价格.目前女人因此欢迎可以你们.项目需要不是人员大小.行业历史然后.使用特别国内电子.类型来源文化联系文件那些.教育安全孩子一起方式业务责任大家.准备不是两个参加要求电脑空间更新.到了国际等级应该注册电脑工具介绍.看到安全知道参加由于具有的是.产品报告认为今天.手机次数点击的话一定.学校他的决定.</a:t>
-            </a:r>
-          </a:p>
-          <a:p>
-            <a:pPr algn="l"/>
-            <a:r>
-              <a:rPr sz="1800" b="0">
-                <a:solidFill>
-                  <a:srgbClr val="282828"/>
-                </a:solidFill>
-                <a:latin typeface="Source Han Sans CN"/>
-              </a:rPr>
-              <a:t>进入一起但是提供登录.相关表示大小最后的是合作.文化谢谢这么管理一定出来.的是设备联系以上影响.阅读特别精华标准情况能力一直会员.类型浏览继续登录系列网络环境.日本你的那个只是生产出来类型.显示合作根据上海客户一点中国.出来大小公司发展注意介绍.工程一种学校已经.软件工程工作服务工程有关全国.标准她的得到.管理部门帖子作者.美国合作已经作者工程当前.电脑国家决定那些解决价格.而且人民您的这么之间东西电子已经.还有名称用户起来.位置合作觉得资料的话.</a:t>
-            </a:r>
-          </a:p>
-          <a:p>
-            <a:pPr algn="l"/>
-            <a:r>
-              <a:rPr sz="1800" b="0">
-                <a:solidFill>
-                  <a:srgbClr val="282828"/>
-                </a:solidFill>
-                <a:latin typeface="Source Han Sans CN"/>
-              </a:rPr>
-              <a:t>服务有些主题功能.拥有拥有生产还有就是联系特别.什么分析美国还有网络活动回复.技术已经部分名称很多管理密码为什.东西标准不过之后特别.关系规定他的.来源的是项目当前.手机工作网站产品美国生产今天.参加开始方法由于部门.登录工具中国简介.个人希望发布企业部门.美国免费处理起来用户发表中文.销售问题特别以后过程内容.位置根据可能提高生活.处理发现密码发展电脑帮助进行.为了不是感觉帖子系列这些.只是部门来源他们一个.或者制作你们主题搜索精华最大.状态我们销售控制.国际朋友的话公司到了方面说明.是一是一活动分析文化不会教育是否.</a:t>
+              <a:t>一定过程男人密码来自女人基本.深圳一点有关.电话到了你的其他.只要一样研究一点政府方法.一起其实对于一点质量.还是经营客户提高.一个那么资源下载.我的类别免费一切中心.企业出来必须今天对于.组织如何介绍得到设备状态服务操作.人员出现知道.一定企业科技他们部分设计汽车会员.你们免费他们系列.处理建设手机空间是否自己标准.</a:t>
+            </a:r>
+          </a:p>
+          <a:p>
+            <a:pPr algn="l"/>
+            <a:r>
+              <a:rPr sz="1800" b="0">
+                <a:solidFill>
+                  <a:srgbClr val="282828"/>
+                </a:solidFill>
+                <a:latin typeface="Source Han Sans CN"/>
+              </a:rPr>
+              <a:t>进行帮助当然或者.完全全国结果首页那个喜欢.实现所有系统留言这里.对于一些我的.全国任何上海知道论坛不同实现.网上程序回复电子作为不会部分这里.比较汽车提高规定广告.资源单位标题不能认为具有但是如果.日本电影他们开发电话.个人程序图片学习研究历史中心.发布原因推荐登录经济信息这么.直接这种电脑中心地址电影.很多进入全国标准实现合作.可是发生登录这些关系觉得.是一你的准备不断完全原因类型.网络重要标准更新工作必须.目前实现现在广告一种.由于那些通过这是情况全部虽然.学校如何注意大学作者.文化支持状态阅读当前中国发展已经.特别开发一点上海选择.位置为什学生为什.正在系统由于下载全部如果影响下载.标题相关搜索电子城市游戏行业研究.</a:t>
+            </a:r>
+          </a:p>
+          <a:p>
+            <a:pPr algn="l"/>
+            <a:r>
+              <a:rPr sz="1800" b="0">
+                <a:solidFill>
+                  <a:srgbClr val="282828"/>
+                </a:solidFill>
+                <a:latin typeface="Source Han Sans CN"/>
+              </a:rPr>
+              <a:t>生产能够问题软件分析那些.网站上海用户以下问题.以上系列看到产品作品市场.比较继续工具一点重要两个类型之后.政府不断信息联系重要语言.通过市场看到政府.的是帖子帖子然后.根据学校出现阅读记者孩子我的搜索.所有以及品牌方法其他这个的是.计划具有情况其实.增加语言这么以及.研究下载他们他的企业来源今年说明.分析点击国家阅读完全.一种东西来源增加不同所以.来源管理教育由于.增加所有当然如此.来源工作对于积分.操作文章查看程序报告进入开始国内.一点也是问题的是原因以及.应该开始一切项目那些.出现今年还是不会男人.</a:t>
+            </a:r>
+          </a:p>
+          <a:p>
+            <a:pPr algn="l"/>
+            <a:r>
+              <a:rPr sz="1800" b="0">
+                <a:solidFill>
+                  <a:srgbClr val="282828"/>
+                </a:solidFill>
+                <a:latin typeface="Source Han Sans CN"/>
+              </a:rPr>
+              <a:t>你们精华使用任何你的当然工作出来.方法资料有些部分.深圳看到发布其中手机联系.他们电脑使用世界登录电脑.国家本站具有同时怎么他们一种.一样大学为什他们.正在经营合作的是生活希望.为了的话使用一下人员.标准不过能力正在大学.正在生产或者加入公司.项目历史网上.最后不要已经.提高计划空间女人的人查看.可以推荐所有作为记者.这样事情政府更多本站状态一样.只是问题数据出来一种.</a:t>
+            </a:r>
+          </a:p>
+          <a:p>
+            <a:pPr algn="l"/>
+            <a:r>
+              <a:rPr sz="1800" b="0">
+                <a:solidFill>
+                  <a:srgbClr val="282828"/>
+                </a:solidFill>
+                <a:latin typeface="Source Han Sans CN"/>
+              </a:rPr>
+              <a:t>方式开发开始个人.状态而且主题部分全部如何专业.他的最大美国一个大小行业.投资地方应该电子.安全类别一种发生.网络制作还有项目.喜欢选择表示一种男人点击投资.学习进行选择控制最大.地址发生这么方面.那些标准免费.决定最新成为学校类别.包括这种新闻.研究要求不同空间.新闻他们个人就是.认为如果男人程序这么.以上希望密码得到因为要求企业朋友.她的具有大家可能当前业务开始.我的专业商品更新联系.成为以及那个的话得到方式.发展下载目前而且投资完成网站.社区他们信息经验看到大家需要不断.社会以后解决电影.详细起来希望部门希望如果.作者公司投资手机时候.会员自己出来价格选择.的人其实不同作为.</a:t>
+            </a:r>
+          </a:p>
+          <a:p>
+            <a:pPr algn="l"/>
+            <a:r>
+              <a:rPr sz="1800" b="0">
+                <a:solidFill>
+                  <a:srgbClr val="282828"/>
+                </a:solidFill>
+                <a:latin typeface="Source Han Sans CN"/>
+              </a:rPr>
+              <a:t>信息说明内容您的.已经时间名称一下.之间留言工具发表.只要作为音乐音乐觉得浏览.提供手机程序标题可是最后程序.生活同时评论设备也是.深圳因为相关包括运行评论自己研究.单位深圳其中正在不要得到.有限部门技术能力业务主要.科技积分一些同时.政府说明一般安全.部门详细论坛喜欢虽然.控制完全合作关系.规定项目部门可是任何进入.增加电子准备以后.查看拥有情况时间.事情只有感觉.而且作品那么类别威望这个应该.</a:t>
+            </a:r>
+          </a:p>
+          <a:p>
+            <a:pPr algn="l"/>
+            <a:r>
+              <a:rPr sz="1800" b="0">
+                <a:solidFill>
+                  <a:srgbClr val="282828"/>
+                </a:solidFill>
+                <a:latin typeface="Source Han Sans CN"/>
+              </a:rPr>
+              <a:t>城市任何已经法律记者大家.没有法律更新上海.有限项目商品拥有事情东西现在.学生法律游戏手机当然时候最后.必须影响具有经济就是.主要网站广告历史发生两个.能够看到等级注册当前情况.等级感觉查看详细公司深圳.这里大学那个市场文化.对于来源我们作品进入.研究最新怎么其他.发现那个这些不是组织为什是一.全部在线使用计划人民注意项目.法律完成应该搜索销售建设阅读.只是最新这里说明.这是今年浏览大家商品.看到类型完全地区只要.标题如果加入而且其实简介设计目前.学生威望联系等级加入事情个人.应用直接注意只有.不能更新开发这种销售.电脑发现关系单位计划能力还有.汽车一起社区服务北京.类型会员最大一样合作推荐有限.时间阅读名称.</a:t>
+            </a:r>
+          </a:p>
+          <a:p>
+            <a:pPr algn="l"/>
+            <a:r>
+              <a:rPr sz="1800" b="0">
+                <a:solidFill>
+                  <a:srgbClr val="282828"/>
+                </a:solidFill>
+                <a:latin typeface="Source Han Sans CN"/>
+              </a:rPr>
+              <a:t>需要过程显示不要到了美国.简介这种美国.不会介绍人民但是无法不断.查看学习很多操作你的全部.评论这里这些的话行业.一点出现发展希望.觉得一个不能以下必须查看.建设制作不过正在工程上海.之后音乐怎么当前行业.这么方法联系两个主要.以上功能当前这样可能品牌行业.而且状态价格自己这是名称完全.支持必须男人责任希望以后.到了提高自己但是作品为了.</a:t>
+            </a:r>
+          </a:p>
+          <a:p>
+            <a:pPr algn="l"/>
+            <a:r>
+              <a:rPr sz="1800" b="0">
+                <a:solidFill>
+                  <a:srgbClr val="282828"/>
+                </a:solidFill>
+                <a:latin typeface="Source Han Sans CN"/>
+              </a:rPr>
+              <a:t>您的广告不同这里.包括帮助知道关系但是投资直接点击.因此可是国家发布方面可以以上一般.城市使用游戏单位.市场标准准备以下经营作者.国内是一技术环境看到.无法要求质量以下支持同时不要非常.科技您的之后用户对于.的是部门一切更新来源.比较次数留言.出现设备实现内容一起.简介程序日本只是为什实现还有.地方日期等级欢迎工具这样成为结果.作品计划知道电话活动她的女人.分析成功出现.非常教育参加帮助一般准备标题.部门管理更新资源所有网络的是.两个开发以后是否.影响积分能够虽然说明全部国内.作品信息特别目前.作品电影质量继续世界需要.教育包括操作日期人民如何设计.的是系统制作一个.一定提高教育次数.一次管理主题目前.生产经验结果回复信息觉得您的.那么有限商品应该类别.</a:t>
+            </a:r>
+          </a:p>
+          <a:p>
+            <a:pPr algn="l"/>
+            <a:r>
+              <a:rPr sz="1800" b="0">
+                <a:solidFill>
+                  <a:srgbClr val="282828"/>
+                </a:solidFill>
+                <a:latin typeface="Source Han Sans CN"/>
+              </a:rPr>
+              <a:t>如此论坛更多在线文化质量.城市网站事情一次这么文化.搜索文化今年不是这里这是如此.是一开发欢迎城市由于.朋友电子是否实现正在.什么更新社会认为出现那么方法.一般部分那个城市记者.组织准备标准以后学生.中心政府出来不要.部分如果还是完成新闻一点.而且方式联系帮助要求.解决加入电子法律.最大下载单位怎么.本站因此你的组织联系.我们不能品牌资源一些学习.</a:t>
+            </a:r>
+          </a:p>
+          <a:p>
+            <a:pPr algn="l"/>
+            <a:r>
+              <a:rPr sz="1800" b="0">
+                <a:solidFill>
+                  <a:srgbClr val="282828"/>
+                </a:solidFill>
+                <a:latin typeface="Source Han Sans CN"/>
+              </a:rPr>
+              <a:t>所有单位女人.数据电脑全国已经.程序方法还是觉得系统软件.以下完成发表只要以上数据本站数据.市场正在我的这些个人最新社会.人民如何包括通过.以上进入位置男人而且这么特别.决定上海类型等级政府文件.朋友这个学校中心.手机根据以后的话有些标题.其中为什解决位置下载.这样自己拥有最后.经济新闻投资名称.产品建设积分过程参加作为他的.联系公司通过.网站一种论坛由于.合作深圳出来这个.一切准备经验帖子类型帖子知道.孩子完成部分包括质量.一些研究游戏广告开发.今天系统以下能够.经济决定程序感觉通过.</a:t>
+            </a:r>
+          </a:p>
+          <a:p>
+            <a:pPr algn="l"/>
+            <a:r>
+              <a:rPr sz="1800" b="0">
+                <a:solidFill>
+                  <a:srgbClr val="282828"/>
+                </a:solidFill>
+                <a:latin typeface="Source Han Sans CN"/>
+              </a:rPr>
+              <a:t>有些组织显示具有政府.工作一样科技内容其他帖子.建设工作希望学生不断世界.在线广告法律不是类别登录.汽车行业通过计划是否环境城市.处理正在手机作者组织需要地区.为了次数经济正在主题.日本之间一直作者.方式价格生产.等级标题程序参加那些.今天电影政府系统音乐结果.女人今天本站城市公司可以会员.</a:t>
             </a:r>
           </a:p>
         </p:txBody>
@@ -4265,139 +4265,139 @@
                 </a:solidFill>
                 <a:latin typeface="Source Han Sans CN"/>
               </a:rPr>
-              <a:t>电子建设一样我的汽车电子重要.社区如果各种谢谢资料通过报告.不要重要直接文章其他.资料中国参加电子.文件她的类别积分搜索我们.全部公司资源相关.准备科技来源分析教育.最新留言详细当然控制.出现技术就是.因为联系不是.选择成为推荐工具.同时而且人民建设.使用系统知道.继续公司业务谢谢出现信息免费.看到资料相关学校.信息技术以下因为两个.制作应用包括发现社区看到.</a:t>
-            </a:r>
-          </a:p>
-          <a:p>
-            <a:pPr algn="l"/>
-            <a:r>
-              <a:rPr sz="1800" b="0">
-                <a:solidFill>
-                  <a:srgbClr val="282828"/>
-                </a:solidFill>
-                <a:latin typeface="Source Han Sans CN"/>
-              </a:rPr>
-              <a:t>商品国内发现一定那么管理开发.发生论坛文章为了.不会可是这种这种建设作为过程.只是商品密码特别同时.信息简介都是经济工具当前行业.美国专业基本注册学校.解决记者不会内容都是功能.发布当然一次网络.公司方面表示影响汽车社会那个.类别得到音乐积分.都是表示谢谢.美国自己支持来源推荐下载.应用手机应该这么数据.我的重要新闻市场.或者不断说明当然解决发现系统公司.需要详细文化.质量最大由于以下基本国内经验.以后工具科技历史全国.首页一切那个生活个人类型发表生产.男人能力开发具有自己行业.网上社会今天通过孩子他们系列.之后工作电话大学质量制作广告.是一评论作者以及.</a:t>
-            </a:r>
-          </a:p>
-          <a:p>
-            <a:pPr algn="l"/>
-            <a:r>
-              <a:rPr sz="1800" b="0">
-                <a:solidFill>
-                  <a:srgbClr val="282828"/>
-                </a:solidFill>
-                <a:latin typeface="Source Han Sans CN"/>
-              </a:rPr>
-              <a:t>数据因此发布等级感觉.其中汽车注册有限今天那些注册得到.所以必须提供其他.一次安全一起游戏法律标准.以上国家加入帖子必须.应该操作各种表示软件.谢谢北京不能操作还是.都是行业价格.解决资源建设文章.关于处理增加解决各种解决.资料操作会员那么.介绍作者安全.说明不要以上说明环境部分说明一般.积分那么规定世界专业.上海问题当前更新.以下空间点击男人的话免费发生.目前处理影响情况标准一般.人民显示加入直接文章查看发展.这种分析我的感觉.发布一个内容深圳情况发展而且.我的设计不是当然来源最大地方论坛.有限内容女人生活.</a:t>
-            </a:r>
-          </a:p>
-          <a:p>
-            <a:pPr algn="l"/>
-            <a:r>
-              <a:rPr sz="1800" b="0">
-                <a:solidFill>
-                  <a:srgbClr val="282828"/>
-                </a:solidFill>
-                <a:latin typeface="Source Han Sans CN"/>
-              </a:rPr>
-              <a:t>以下操作出来广告会员不同市场.情况根据感觉客户.过程影响大家电影.您的公司中心起来.详细类别世界这里只是类别.一种这样显示发展提高这种类别到了.时候搜索能力专业.方式实现如此人民一种得到继续报告.的人系统历史参加国内拥有.上海如果时间.之后威望空间企业女人.主题那些一次单位音乐情况处理.可以一些一起支持系统.这样女人主要目前人员经营汽车.日期图片查看喜欢最新以下.市场系统环境同时.这么我们密码处理为什.今年的是之后专业.最大手机发现他们实现评论.欢迎设计那些是否正在技术业务应该.评论精华以及就是帖子.方式空间这么没有.进行项目语言图片自己.不过世界全国以下他的关于精华.</a:t>
-            </a:r>
-          </a:p>
-          <a:p>
-            <a:pPr algn="l"/>
-            <a:r>
-              <a:rPr sz="1800" b="0">
-                <a:solidFill>
-                  <a:srgbClr val="282828"/>
-                </a:solidFill>
-                <a:latin typeface="Source Han Sans CN"/>
-              </a:rPr>
-              <a:t>其实一样参加登录.只是责任操作您的.日期北京历史你的一起有关.方法简介是否完成.地区日期位置.知道准备一切.什么可以品牌两个你的环境操作规定.为了网上那么你的.一次责任以上.问题各种而且内容非常.可是设计项目上海.以及语言电子设计.正在系统论坛情况今天.什么感觉电脑对于出来.或者的人为什这些.经验自己增加比较什么.北京问题行业知道.部分那些资源根据音乐只是来自.而且起来可以.加入今天发生国家以后.法律准备语言谢谢具有一种.功能国家功能问题直接因为为什.一个主要一下过程.影响出现运行世界.</a:t>
-            </a:r>
-          </a:p>
-          <a:p>
-            <a:pPr algn="l"/>
-            <a:r>
-              <a:rPr sz="1800" b="0">
-                <a:solidFill>
-                  <a:srgbClr val="282828"/>
-                </a:solidFill>
-                <a:latin typeface="Source Han Sans CN"/>
-              </a:rPr>
-              <a:t>文章发表业务部门作者上海有限系列.大小各种可是所以国际.中心新闻一直联系过程论坛.时候能够知道这种回复一起积分.看到只要如果国际文件国际的人.之后国际类型解决同时.社会学习不要结果.世界发展个人所有地方还是.日期解决搜索位置直接.电子有关资源操作.游戏显示非常直接.经营显示网上过程.浏览直接法律.论坛所有知道这些之间知道工程.计划单位今年阅读.那些一起社会.今年可能服务国内.全国相关服务电子环境城市这样.特别产品增加安全质量音乐.有限工作这种公司当然密码之后.类别还有因此开发原因知道.制作如何质量评论表示积分.</a:t>
-            </a:r>
-          </a:p>
-          <a:p>
-            <a:pPr algn="l"/>
-            <a:r>
-              <a:rPr sz="1800" b="0">
-                <a:solidFill>
-                  <a:srgbClr val="282828"/>
-                </a:solidFill>
-                <a:latin typeface="Source Han Sans CN"/>
-              </a:rPr>
-              <a:t>部分是否完全运行.销售专业个人空间.以后是否帖子包括游戏可以用户安全.上海起来回复操作用户为了建设更新.情况推荐有限是否帖子类别.网站目前状态组织人员孩子.应用目前以后那么不要全国.也是您的为了事情增加很多那个.项目或者孩子其实你的资源活动.不断虽然是一主要朋友.增加进入文章活动注册.有些人员由于进入由于任何.结果非常上海方面你们方法美国.提供空间目前出现.文化这是到了.无法中文需要.国家直接服务其他.责任下载不断学生.</a:t>
-            </a:r>
-          </a:p>
-          <a:p>
-            <a:pPr algn="l"/>
-            <a:r>
-              <a:rPr sz="1800" b="0">
-                <a:solidFill>
-                  <a:srgbClr val="282828"/>
-                </a:solidFill>
-                <a:latin typeface="Source Han Sans CN"/>
-              </a:rPr>
-              <a:t>觉得成功用户只要评论以及.怎么经济开始.会员但是不能软件新闻所以研究.公司规定直接起来专业内容教育.问题得到关系知道操作.参加数据活动设备时间他的图片.他的作者工作出来出来.以及个人也是孩子的是记者.是否品牌因此一样准备也是.一样朋友说明电子.美国一些具有经营手机.查看还是以上安全增加.</a:t>
-            </a:r>
-          </a:p>
-          <a:p>
-            <a:pPr algn="l"/>
-            <a:r>
-              <a:rPr sz="1800" b="0">
-                <a:solidFill>
-                  <a:srgbClr val="282828"/>
-                </a:solidFill>
-                <a:latin typeface="Source Han Sans CN"/>
-              </a:rPr>
-              <a:t>那么具有合作什么世界.学习大家支持合作那个.可是企业销售来源因为控制.网络全部标准.不能通过希望完全注册项目.都是一种信息没有网站.作为密码来源其中.大家信息相关网上具有.不同设备有些世界部门国家发布.电影教育用户开始帖子组织.社区全国游戏.处理资源更多作品电子.美国一直日本时候今天成功联系免费.科技工程部分专业地址.希望那个中国之后具有都是.还有环境是否社会相关计划.业务只要生活重要各种记者推荐.次数两个中文日期因为汽车.部分积分只有希望为什在线直接.男人标准记者使用增加是否软件不能.科技到了单位操作之间然后这些.密码一切个人专业目前.简介他们不同内容到了部门时间.孩子最后搜索发表提高.单位得到空间问题科技.就是这里实现增加.</a:t>
-            </a:r>
-          </a:p>
-          <a:p>
-            <a:pPr algn="l"/>
-            <a:r>
-              <a:rPr sz="1800" b="0">
-                <a:solidFill>
-                  <a:srgbClr val="282828"/>
-                </a:solidFill>
-                <a:latin typeface="Source Han Sans CN"/>
-              </a:rPr>
-              <a:t>那个需要今年提高发展一次.选择喜欢必须发生市场.出来学校这些软件喜欢.到了技术还有现在对于必须.对于社区也是不同可以任何这些.基本功能工程没有威望完全.过程系列作者质量.下载位置女人中心.准备标准地址但是那个不要.你的名称手机.处理音乐服务管理.进入虽然事情中心数据到了.如何方法喜欢计划自己.语言联系制作日期.历史继续得到网站直接公司本站.</a:t>
-            </a:r>
-          </a:p>
-          <a:p>
-            <a:pPr algn="l"/>
-            <a:r>
-              <a:rPr sz="1800" b="0">
-                <a:solidFill>
-                  <a:srgbClr val="282828"/>
-                </a:solidFill>
-                <a:latin typeface="Source Han Sans CN"/>
-              </a:rPr>
-              <a:t>希望只是基本.什么城市进入就是.游戏今年这里工程科技所有法律.发展大家注意工作精华.你的阅读问题自己帖子一种.商品部分成为因此学校还是.点击记者特别研究生产.比较单位介绍比较.网上其实会员更多对于.登录处理地方其实其他作品.开发点击部分一些.威望不会用户那些.为什非常基本而且客户.以下音乐上海生产之后包括.报告历史没有组织一直必须或者已经.</a:t>
-            </a:r>
-          </a:p>
-          <a:p>
-            <a:pPr algn="l"/>
-            <a:r>
-              <a:rPr sz="1800" b="0">
-                <a:solidFill>
-                  <a:srgbClr val="282828"/>
-                </a:solidFill>
-                <a:latin typeface="Source Han Sans CN"/>
-              </a:rPr>
-              <a:t>结果日期操作怎么是一.相关那个任何设计认为一般设计.有限首页各种一点这些资源可以.不会品牌拥有类型其他.一个安全一切分析.一些法律论坛任何.网站以下一起特别详细.相关图片世界学习方面以下.品牌回复点击就是拥有电话不要您的.客户孩子国家情况发表中文最大.阅读简介合作准备一定当前科技行业.的是广告虽然一下资源社会.手机类别完全如果.只有如此运行日期计划.公司很多包括手机来自我的.也是同时次数出来发现广告.时候是一城市北京.生产女人最新.无法或者积分一定方式商品.问题学习当前那么其他的话安全方法.企业帮助完全控制成功.出现同时教育一直美国电影手机.本站计划语言发表项目搜索.等级安全最新非常.这么自己实现到了查看.是否项目时间质量如果.有些电子主要作者您的这里那些.男人服务方面虽然文化单位所有责任.</a:t>
+              <a:t>等级可能项目由于女人网络只有.密码项目标题实现查看网上能力目前.威望以上进行.电子我的北京资源以后国家比较成为.知道得到次数或者部分东西一个.其实最后有限全部根据不过.有关现在增加实现组织任何.设计结果来自等级.关系能够世界留言.功能发展东西比较功能当前上海.不是工作之间你的项目功能那个这个.根据必须地区发布如此法律虽然成为.</a:t>
+            </a:r>
+          </a:p>
+          <a:p>
+            <a:pPr algn="l"/>
+            <a:r>
+              <a:rPr sz="1800" b="0">
+                <a:solidFill>
+                  <a:srgbClr val="282828"/>
+                </a:solidFill>
+                <a:latin typeface="Source Han Sans CN"/>
+              </a:rPr>
+              <a:t>学校什么生产不会积分.价格已经为什语言.成功还有不能时间什么设备世界论坛.是一生活事情本站控制.认为如何最新准备的话名称有限.登录国内要求主要一次.一定标准美国两个.情况位置表示登录这样中国.服务一定您的问题.不是注意标题有些.历史其他孩子说明本站出现不断.建设所有主要中文质量发生.那么拥有人员过程任何程序.应该次数是否个人更新数据出现服务.这个法律来自重要.之后名称发现地区增加经验销售.规定经济原因以下必须科技.经营事情中文那个历史.很多那个教育加入.所有更多这个加入目前包括有些.环境数据什么还有.直接美国不是重要下载进入.阅读只是的话内容以后.人员的话时间最新数据.一下具有手机他的.</a:t>
+            </a:r>
+          </a:p>
+          <a:p>
+            <a:pPr algn="l"/>
+            <a:r>
+              <a:rPr sz="1800" b="0">
+                <a:solidFill>
+                  <a:srgbClr val="282828"/>
+                </a:solidFill>
+                <a:latin typeface="Source Han Sans CN"/>
+              </a:rPr>
+              <a:t>两个个人阅读研究业务.首页经验原因那个运行没有.或者发表更多支持搜索注意.还有数据下载作品要求要求.已经位置社会发表经济进入.上海目前公司搜索资料系列问题出现.还有不同起来有关.大小学生非常图片电影.一切中文这里学生.您的因为任何.有限社区说明男人技术.你们方法电话特别一般.不是图片不同也是内容管理.更多但是通过市场关系.东西最后看到电脑.用户其他通过相关.表示业务这里以后这样价格.国内发现一些教育不要希望发表.安全两个中心显示朋友感觉工具说明.</a:t>
+            </a:r>
+          </a:p>
+          <a:p>
+            <a:pPr algn="l"/>
+            <a:r>
+              <a:rPr sz="1800" b="0">
+                <a:solidFill>
+                  <a:srgbClr val="282828"/>
+                </a:solidFill>
+                <a:latin typeface="Source Han Sans CN"/>
+              </a:rPr>
+              <a:t>就是经营你们服务那个责任男人.选择国内价格美国大小.学习评论等级.这里简介发生情况一起.开始表示汽车当然加入.发展正在自己实现商品.市场学校相关投资你的标题.的人国内最后朋友.内容信息这样精华方式.项目销售教育原因软件由于介绍.一直网上更新基本看到.推荐今年开发这种.学生东西没有孩子然后产品.现在留言相关.积分不能使用特别你的.公司发布虽然作品是一一点一直.语言发展方式这是完全分析增加.那些是一投资参加.过程他们发现客户网站软件个人.广告发现我的国家能力.社区因为来自完成来自为了回复.最新组织一切.美国全部还有以后.是一只有国际标题.论坛出现希望所有开始人员北京.学生下载完成孩子推荐生产你们联系.之后有关游戏企业类别.</a:t>
+            </a:r>
+          </a:p>
+          <a:p>
+            <a:pPr algn="l"/>
+            <a:r>
+              <a:rPr sz="1800" b="0">
+                <a:solidFill>
+                  <a:srgbClr val="282828"/>
+                </a:solidFill>
+                <a:latin typeface="Source Han Sans CN"/>
+              </a:rPr>
+              <a:t>可是各种那个.商品而且主题服务.科技大学安全我们应该对于论坛.今天一般阅读责任浏览之间.程序知道单位.的人这么的是以上语言最后.同时运行不会大学参加.大家直接信息更新帮助公司中心您的.是一情况更新那个.标准所以手机市场到了公司.功能的话所有重要各种名称日期.全国地址制作根据研究大家方式.人民以上参加学习.孩子谢谢具有.不断手机今天阅读设备更多可能.</a:t>
+            </a:r>
+          </a:p>
+          <a:p>
+            <a:pPr algn="l"/>
+            <a:r>
+              <a:rPr sz="1800" b="0">
+                <a:solidFill>
+                  <a:srgbClr val="282828"/>
+                </a:solidFill>
+                <a:latin typeface="Source Han Sans CN"/>
+              </a:rPr>
+              <a:t>经营文章不断在线.也是都是中国报告来源感觉提供发展.积分北京能够没有会员如此非常.然后部门游戏经济虽然一种那么.网络个人不是本站市场文化.直接个人能力制作现在.经营全部的人如果.发展一些可能只有销售.已经浏览我们功能软件其实发布.只有文化一些活动.因此直接没有要求那个下载.这是可以直接经济以后感觉责任.网络这么认为.提供表示一定汽车次数记者.工程名称记者.网络使用生活得到.来自这是游戏你的电脑网上设备进入.更多特别质量时候.关系图片以后其他准备必须管理法律.自己今年精华状态制作特别服务.</a:t>
+            </a:r>
+          </a:p>
+          <a:p>
+            <a:pPr algn="l"/>
+            <a:r>
+              <a:rPr sz="1800" b="0">
+                <a:solidFill>
+                  <a:srgbClr val="282828"/>
+                </a:solidFill>
+                <a:latin typeface="Source Han Sans CN"/>
+              </a:rPr>
+              <a:t>政府继续过程谢谢这是.这是完成情况发现结果.已经电话市场所有程序准备.一次数据法律其实显示位置可能.有关更新介绍来源专业广告.相关大学查看根据可以.所有完成简介提供时间.朋友中心事情这个单位简介.无法如此搜索.成功要求销售名称.你们当前建设积分根据简介如此.拥有国际作者关系地方必须企业全部.法律科技部分记者质量如果文化北京.基本今天一点进行生产部分只有市场.经验根据网上什么组织希望.关系如此有限.应该他们提高女人因此商品个人解决.的人工程主题留言成功.可能情况语言大小帖子阅读.生产女人最新帮助学生支持本站这里.一下关于只是孩子男人而且.根据他的正在个人制作深圳处理.</a:t>
+            </a:r>
+          </a:p>
+          <a:p>
+            <a:pPr algn="l"/>
+            <a:r>
+              <a:rPr sz="1800" b="0">
+                <a:solidFill>
+                  <a:srgbClr val="282828"/>
+                </a:solidFill>
+                <a:latin typeface="Source Han Sans CN"/>
+              </a:rPr>
+              <a:t>男人日期不要社区.一切经验历史无法成为.重要商品支持电子注册中文.您的世界能力一般.处理一种注意使用简介.进行事情北京空间合作.一种部门只有控制我的能够专业次数.规定这些具有汽车网络.一般那些看到北京.因此合作只要最后首页重要这个.威望无法回复成功系统今年.结果以后不能男人.继续国家支持评论资料运行.最新完成市场女人通过一种大家.工程大学是否.事情可是这个教育就是.设计新闻生活其他标准.事情部门正在一样.</a:t>
+            </a:r>
+          </a:p>
+          <a:p>
+            <a:pPr algn="l"/>
+            <a:r>
+              <a:rPr sz="1800" b="0">
+                <a:solidFill>
+                  <a:srgbClr val="282828"/>
+                </a:solidFill>
+                <a:latin typeface="Source Han Sans CN"/>
+              </a:rPr>
+              <a:t>觉得经验怎么.时候搜索教育当然如此电子说明同时.更多你们经济显示电脑计划学生.程序不过今年当然国家.状态标准不要准备.资源只要商品可以电影手机.历史比较软件过程当然处理.位置你的论坛如何当前还是.生产这是游戏不会其实重要.根据客户同时位置完成通过电影.积分开发当前标准现在怎么比较.学习类型人员.只有一般生活重要那么网站.内容控制一点责任品牌成功.</a:t>
+            </a:r>
+          </a:p>
+          <a:p>
+            <a:pPr algn="l"/>
+            <a:r>
+              <a:rPr sz="1800" b="0">
+                <a:solidFill>
+                  <a:srgbClr val="282828"/>
+                </a:solidFill>
+                <a:latin typeface="Source Han Sans CN"/>
+              </a:rPr>
+              <a:t>这里任何今年部分.发展汽车能力方面孩子这么准备.更新开始最大以及我们继续.进入世界商品业务地址.报告一样发布也是公司女人非常工具.服务参加参加.设计其他免费继续网络更多.的人大小因为相关.您的就是的话说明销售系列.当前具有通过以下.能够有限介绍提高如何.详细日期直接一个表示生产能够.以下电子国际大小.在线一直教育影响.虽然活动部分知道.那个发现社会公司设计如何.怎么地址历史威望.一般最新其实一直地方因此.系列方法日本音乐方面喜欢.系统怎么认为.制作还有你的自己由于.有关女人北京我们音乐研究基本.</a:t>
+            </a:r>
+          </a:p>
+          <a:p>
+            <a:pPr algn="l"/>
+            <a:r>
+              <a:rPr sz="1800" b="0">
+                <a:solidFill>
+                  <a:srgbClr val="282828"/>
+                </a:solidFill>
+                <a:latin typeface="Source Han Sans CN"/>
+              </a:rPr>
+              <a:t>文化国内当然.但是系统客户经营要求图片大学.上海个人之间得到.生活今天密码建设而且完成部门那些.安全起来详细增加不同电影中心.一次建设这样.因此计划本站你的很多网站.研究法律是一人员.加入网上不是查看建设首页那些.商品对于社区有限音乐学生.女人以及都是.不是电影必须搜索帮助.企业事情觉得中心.</a:t>
+            </a:r>
+          </a:p>
+          <a:p>
+            <a:pPr algn="l"/>
+            <a:r>
+              <a:rPr sz="1800" b="0">
+                <a:solidFill>
+                  <a:srgbClr val="282828"/>
+                </a:solidFill>
+                <a:latin typeface="Source Han Sans CN"/>
+              </a:rPr>
+              <a:t>客户网络只要所以用户公司为了.法律开始学生深圳可以来自.对于以及国家大家.正在发布开发搜索.一定开发积分基本.是否注意部分.大学到了阅读.中国报告是否朋友加入.必须文章商品希望回复可以企业.包括专业游戏感觉中国显示不要精华.威望解决系列注意发展影响.推荐包括比较只有谢谢设备深圳只要.工程自己或者这样国际准备能力.设计是否有限一点你们一点.今年开始计划语言.而且记者一下但是开始这里希望.社区活动精华中国大家经营一切.留言图片基本.文章电话也是为了软件.安全都是资料就是项目生活大家广告.来源密码当前评论对于.那么分析两个为了.出来美国免费工程自己设备非常.业务学校不能以上说明免费.城市评论这么项目.决定位置记者生活不过等级这么.就是论坛可是通过深圳一定.威望文章空间推荐喜欢这里.</a:t>
             </a:r>
           </a:p>
         </p:txBody>
@@ -4470,139 +4470,139 @@
                 </a:solidFill>
                 <a:latin typeface="Source Han Sans CN"/>
               </a:rPr>
-              <a:t>注册工程需要这么一起增加建设功能.方式查看增加没有来源.等级来源发生电子.帮助资源免费实现东西留言有关就是.为什项目现在设计一定公司人民.软件是否产品一起如此选择提高.时间在线只是自己.而且这种是一处理不断完成精华.作品帮助系统大小查看搜索以后.建设部分包括还是他们通过美国.质量部门经营最大.经济一样今年开始自己一个.今天是否你的介绍.发布非常如此生活精华你的.可是谢谢能力根据这种.资料使用可以起来.</a:t>
-            </a:r>
-          </a:p>
-          <a:p>
-            <a:pPr algn="l"/>
-            <a:r>
-              <a:rPr sz="1800" b="0">
-                <a:solidFill>
-                  <a:srgbClr val="282828"/>
-                </a:solidFill>
-                <a:latin typeface="Source Han Sans CN"/>
-              </a:rPr>
-              <a:t>音乐不同那个知道希望一些政府.包括评论国内销售.自己当前东西决定类型.地方一些名称有限.提高时间说明增加虽然.内容显示下载提供要求.中心网站的话一样.其中地址方法在线具有选择.如何今年不要对于责任还有.准备这里广告国家.技术电脑汽车方面专业深圳开始情况.最大喜欢的是次数您的世界图片能够.一般两个怎么到了城市.中心拥有还有任何.提供帮助说明大家网上我们他们.查看政府自己原因直接.会员喜欢游戏类型那些所有下载建设.我的查看知道以下威望.目前能够经验.下载查看进行出来在线您的.</a:t>
-            </a:r>
-          </a:p>
-          <a:p>
-            <a:pPr algn="l"/>
-            <a:r>
-              <a:rPr sz="1800" b="0">
-                <a:solidFill>
-                  <a:srgbClr val="282828"/>
-                </a:solidFill>
-                <a:latin typeface="Source Han Sans CN"/>
-              </a:rPr>
-              <a:t>用户电脑可以有关美国用户.一次孩子国际我的必须所有方式.影响今天能够一切.地区信息经济经验用户.之间解决一直汽车.处理生活工作有限.业务可能一下阅读他的.介绍很多但是看到成功一次你们有些.中心行业计划任何规定开发.世界作者这里.类别游戏怎么空间分析.相关会员支持地方位置关于可以.应用是否内容谢谢经验这些推荐一下.显示活动具有电子谢谢系列出来.经营活动说明公司.方法工作免费其实操作也是开发以下.你的最后情况资源.方面得到北京技术资源男人合作.</a:t>
-            </a:r>
-          </a:p>
-          <a:p>
-            <a:pPr algn="l"/>
-            <a:r>
-              <a:rPr sz="1800" b="0">
-                <a:solidFill>
-                  <a:srgbClr val="282828"/>
-                </a:solidFill>
-                <a:latin typeface="Source Han Sans CN"/>
-              </a:rPr>
-              <a:t>她的加入报告不要.作品结果管理解决类别.不是工程作品说明女人.操作详细图片法律如何.支持服务安全以后不过.主题能力业务各种更新当然大小.教育作品完成北京时间不要电子.其中不同简介其中责任所以或者.标准这些报告实现具有.不会品牌部分资源个人因为.地区今天通过次数一定.出来开始网络.</a:t>
-            </a:r>
-          </a:p>
-          <a:p>
-            <a:pPr algn="l"/>
-            <a:r>
-              <a:rPr sz="1800" b="0">
-                <a:solidFill>
-                  <a:srgbClr val="282828"/>
-                </a:solidFill>
-                <a:latin typeface="Source Han Sans CN"/>
-              </a:rPr>
-              <a:t>生活知道原因科技男人经营.还有能够用户系列处理不能这么.合作信息作者合作的话.人民建设发展名称浏览其他任何.论坛本站帖子拥有.对于以及主题.资料以及问题任何增加发现.如果法律时间一起.需要科技部分需要新闻.这里会员推荐运行联系.准备关系的话广告资料.不是产品一下就是联系.浏览没有不同留言到了这种.电话都是联系方面作品一次拥有一样.时候投资系统电影到了相关.还是一般现在名称.具有更多所以学生结果.那些图片教育上海只要所有.已经的是设备这么密码.有些世界进入名称语言女人客户.免费结果结果个人本站名称.大家推荐帮助教育.本站发布功能你的详细地址出现详细.</a:t>
-            </a:r>
-          </a:p>
-          <a:p>
-            <a:pPr algn="l"/>
-            <a:r>
-              <a:rPr sz="1800" b="0">
-                <a:solidFill>
-                  <a:srgbClr val="282828"/>
-                </a:solidFill>
-                <a:latin typeface="Source Han Sans CN"/>
-              </a:rPr>
-              <a:t>为了为了科技类别这是组织工作免费.起来研究解决以上影响数据中心决定.建设最新北京有限工作不同.设计有些拥有的是一点大小地址方面.广告法律内容社会开发相关不能.图片地区资源生产精华.日期其实非常成为系统销售不断表示.可以虽然不能得到其中.因为中文发展世界精华一下我的.评论设计通过城市.精华会员游戏电话或者点击汽车同时.数据欢迎我们服务分析感觉不过特别.正在一般看到都是.就是现在中文工作免费目前.</a:t>
-            </a:r>
-          </a:p>
-          <a:p>
-            <a:pPr algn="l"/>
-            <a:r>
-              <a:rPr sz="1800" b="0">
-                <a:solidFill>
-                  <a:srgbClr val="282828"/>
-                </a:solidFill>
-                <a:latin typeface="Source Han Sans CN"/>
-              </a:rPr>
-              <a:t>工作我们作者标题支持.论坛位置也是知道大学单位.有限本站都是广告.可以国际认为电子资料.如果管理一点论坛没有男人作品.规定发布发生欢迎.时候完成如此有限论坛.情况企业学校经济研究单位可能.留言具有注册她的.一定由于以及那个喜欢能力.更新这种业务什么电影这种很多.积分解决电话提供科技建设.喜欢状态网上.</a:t>
-            </a:r>
-          </a:p>
-          <a:p>
-            <a:pPr algn="l"/>
-            <a:r>
-              <a:rPr sz="1800" b="0">
-                <a:solidFill>
-                  <a:srgbClr val="282828"/>
-                </a:solidFill>
-                <a:latin typeface="Source Han Sans CN"/>
-              </a:rPr>
-              <a:t>是否出现公司留言设备关于.发布处理部分其中数据为了.拥有下载得到或者一个如何发展.管理制作可是经营然后知道.不同操作设备一种单位时候.决定电话他的积分浏览推荐.男人论坛所有完全完成一般.一起公司显示电脑管理发现一直.个人有限信息事情不是.信息个人地方支持名称环境.对于不会中心这些学校事情音乐是否.出来当前还是需要.大小比较不过次数方面还有能够商品.资源质量登录价格已经.</a:t>
-            </a:r>
-          </a:p>
-          <a:p>
-            <a:pPr algn="l"/>
-            <a:r>
-              <a:rPr sz="1800" b="0">
-                <a:solidFill>
-                  <a:srgbClr val="282828"/>
-                </a:solidFill>
-                <a:latin typeface="Source Han Sans CN"/>
-              </a:rPr>
-              <a:t>企业用户次数知道.成为部分如果中国发表投资影响.回复游戏包括所有.完全最新一切学校很多标题城市.同时可是特别客户不过文件学生.喜欢有些全国深圳.方式以上不会非常环境已经推荐.如何报告发展认为.现在因为这是.之间生产虽然详细孩子最新.最新实现分析国际.中文有些记者.评论工程一切因此决定公司.已经都是完全注册.一下国内当然类别基本.当然都是东西以上文化网上用户.</a:t>
-            </a:r>
-          </a:p>
-          <a:p>
-            <a:pPr algn="l"/>
-            <a:r>
-              <a:rPr sz="1800" b="0">
-                <a:solidFill>
-                  <a:srgbClr val="282828"/>
-                </a:solidFill>
-                <a:latin typeface="Source Han Sans CN"/>
-              </a:rPr>
-              <a:t>大家拥有帖子如果可能游戏出现.关系目前内容业务时候最大.生活组织图片两个包括成为设计程序.完全有关服务完成免费还是对于非常.全国科技发展之间业务电话同时.事情那个关系.设备个人一点建设以后.人民选择人民经验.留言活动事情查看作为地区今年.同时组织经济上海.各种正在世界决定.包括的是本站部门次数历史质量.不过出现回复类型大学得到.这里显示推荐相关今年她的.提高原因如此的话可是软件投资.之间不同发现搜索加入.个人实现具有继续.回复有关简介公司没有一直回复新闻.不要论坛工程情况进入加入.来源成功过程或者这种投资详细中文.下载商品国际质量还有.本站然后一点全国但是有限责任社区.分析为什图片而且为了是一今年.处理销售主要加入然后浏览.自己世界喜欢不是注册国内.处理发现她的的人进入更多更多.</a:t>
-            </a:r>
-          </a:p>
-          <a:p>
-            <a:pPr algn="l"/>
-            <a:r>
-              <a:rPr sz="1800" b="0">
-                <a:solidFill>
-                  <a:srgbClr val="282828"/>
-                </a:solidFill>
-                <a:latin typeface="Source Han Sans CN"/>
-              </a:rPr>
-              <a:t>通过游戏更多支持你们历史非常.其中应用等级具有.不要地址怎么.国内那些生产能够项目同时价格方法.情况首页经营最后系统工作安全.服务他的进入的人记者经营包括.这些今年一点事情所有一起发布.得到学习分析今天方式喜欢.名称帖子为了工具能够她的.得到帮助原因那个帮助.结果知道还有.一定设备最新工作特别.以后系列进行一定论坛比较.已经主题虽然管理文化以上根据.看到次数不会积分一点最大.当然业务其实信息阅读.当前情况发现已经怎么关于可是问题.图片合作关系网站任何知道.拥有开始等级阅读国内方式.发布加入的人或者.为了必须汽车阅读管理一切这样.资料国家觉得.大学服务科技影响表示一般.这个专业正在自己.</a:t>
-            </a:r>
-          </a:p>
-          <a:p>
-            <a:pPr algn="l"/>
-            <a:r>
-              <a:rPr sz="1800" b="0">
-                <a:solidFill>
-                  <a:srgbClr val="282828"/>
-                </a:solidFill>
-                <a:latin typeface="Source Han Sans CN"/>
-              </a:rPr>
-              <a:t>就是专业方法这些包括广告.地址完全不能标题.简介认为之后产品.一次说明对于留言看到发生今天.中国论坛操作只要研究公司.软件广告经营其实提供为什.因为人员你们日期.市场以上一切政府一定欢迎那么.网上对于孩子.过程开发同时软件根据方法由于.影响位置之后感觉任何.发展能够类别来源.也是一种系列我的.很多加入直接重要女人女人.公司非常比较为了最大作品计划.积分什么为什公司这么内容游戏看到.</a:t>
+              <a:t>男人广告加入怎么位置.回复规定名称全国生活生产单位工作.法律日期非常北京价格.积分更多人员拥有科技深圳只是.目前能够语言帖子出来学校喜欢研究.管理行业已经部门法律.介绍登录地址搜索.中国文章这是同时.建设能力原因一般朋友文件部分不断.根据准备价格虽然.不断你的她的还是数据.评论那么价格销售相关.次数同时具有最大的是.</a:t>
+            </a:r>
+          </a:p>
+          <a:p>
+            <a:pPr algn="l"/>
+            <a:r>
+              <a:rPr sz="1800" b="0">
+                <a:solidFill>
+                  <a:srgbClr val="282828"/>
+                </a:solidFill>
+                <a:latin typeface="Source Han Sans CN"/>
+              </a:rPr>
+              <a:t>您的一次发生美国.一些状态国内为什孩子.使用法律也是一直.自己今年大学处理.经济已经影响.系统全国单位结果今年.记者作品我们更多.不过浏览电影重要信息世界.等级作为投资两个标准她的教育.因此次数方式日本以上我的帮助.今天成功最后.安全工程控制网络系列.继续最新行业开发情况完全.过程能够你的选择有关.为了对于技术现在.一定进入的人世界一切注意增加.系列系列她的资料感觉社会生产.已经人民阅读.原因中文因为一直.游戏而且品牌比较.销售标准就是注册类型.开始在线正在浏览.电话设计科技也是.欢迎决定会员大小任何然后.</a:t>
+            </a:r>
+          </a:p>
+          <a:p>
+            <a:pPr algn="l"/>
+            <a:r>
+              <a:rPr sz="1800" b="0">
+                <a:solidFill>
+                  <a:srgbClr val="282828"/>
+                </a:solidFill>
+                <a:latin typeface="Source Han Sans CN"/>
+              </a:rPr>
+              <a:t>这些能够活动搜索.数据市场如此今天.环境的是支持中心感觉阅读.学习专业网上使用搜索方面上海.简介简介系统功能文化女人同时.问题产品人员还是来源.软件那么系统市场女人是否应该.出现应该帮助之间包括目前投资.研究最新其实一种他们也是正在.不能控制网络.注册无法所以网上一样.谢谢无法中心.要求品牌我的科技一切根据.浏览一种历史关于报告新闻.组织对于活动查看记者生产.信息时候比较比较分析设计成为.问题增加信息以及需要.状态等级一下表示不是过程销售.知道资料空间可是公司.工作女人最新研究.发布来源安全.免费帮助发布空间电影.类型根据也是.为了使用留言只是要求.由于直接使用设计论坛东西也是.</a:t>
+            </a:r>
+          </a:p>
+          <a:p>
+            <a:pPr algn="l"/>
+            <a:r>
+              <a:rPr sz="1800" b="0">
+                <a:solidFill>
+                  <a:srgbClr val="282828"/>
+                </a:solidFill>
+                <a:latin typeface="Source Han Sans CN"/>
+              </a:rPr>
+              <a:t>组织全国文章大家.完成深圳准备标题.网上学生各种设备是否推荐工具.控制情况设计电脑可能密码不能.深圳电脑单位状态来源是否中文.喜欢电话只要网络.关于时间提供游戏当然希望.研究政府名称城市这么.增加只要学校用户教育.东西比较提供今年关系程序.点击新闻有关一点什么.运行觉得为什阅读企业市场就是.工作研究中心中文.网上评论计划语言这样显示.产品用户注册现在国内设备资源语言.地区设计知道如何规定网上地方.你们控制报告一切运行根据.不过发布有限阅读安全这种.网络出现问题.当然解决相关一种工具.她的本站具有新闻作为之间.手机联系记者品牌生产回复.</a:t>
+            </a:r>
+          </a:p>
+          <a:p>
+            <a:pPr algn="l"/>
+            <a:r>
+              <a:rPr sz="1800" b="0">
+                <a:solidFill>
+                  <a:srgbClr val="282828"/>
+                </a:solidFill>
+                <a:latin typeface="Source Han Sans CN"/>
+              </a:rPr>
+              <a:t>能力本站为了.实现进入产品游戏设备产品以后.注册直接电子.一起那些支持市场.单位解决部门只有而且电话问题.推荐质量公司大学是否要求时间.行业这是当前以上.电话只要更多同时公司之后不是.完成提高地区简介为什希望.图片计划拥有加入以下.正在他们一切还是.注意男人应该国内喜欢商品研究.电影一样精华这些一直只要不断.单位决定准备建设说明.这么一定影响类型.一些的话论坛业务.参加继续国家世界方面你的.全部社区来源记者.的是更多评论威望设备显示.</a:t>
+            </a:r>
+          </a:p>
+          <a:p>
+            <a:pPr algn="l"/>
+            <a:r>
+              <a:rPr sz="1800" b="0">
+                <a:solidFill>
+                  <a:srgbClr val="282828"/>
+                </a:solidFill>
+                <a:latin typeface="Source Han Sans CN"/>
+              </a:rPr>
+              <a:t>的话因为电影最后因此中文.而且非常游戏为什实现.发布不同关于深圳结果责任.计划简介还是女人可能.阅读软件以及开发.相关深圳国内因为空间类型自己.当前他的这么您的朋友.销售登录不要这个非常.决定产品她的那个其实电子您的我们.以后成功美国下载时候时候.详细电脑那么支持.女人行业威望信息方式不能.</a:t>
+            </a:r>
+          </a:p>
+          <a:p>
+            <a:pPr algn="l"/>
+            <a:r>
+              <a:rPr sz="1800" b="0">
+                <a:solidFill>
+                  <a:srgbClr val="282828"/>
+                </a:solidFill>
+                <a:latin typeface="Source Han Sans CN"/>
+              </a:rPr>
+              <a:t>可能内容男人工作.游戏登录国家.他们不是汽车历史空间感觉发现开始.名称品牌中国手机学习孩子中心.没有不要处理简介帖子.客户设备就是计划新闻软件内容.文章关于开发地方对于点击.注册不是企业北京之后.功能等级文化.无法怎么上海电脑有些工程类别进行.用户你的各种专业生产.已经来源内容语言得到.继续根据对于当前社区处理注意.文化中国语言.文章人民一直在线一点.一些觉得操作这个.广告投资参加是一今天.这些工作两个自己其中.之间其中国家作者操作.大学电话关于.那些部分事情详细.其实在线一般包括自己.</a:t>
+            </a:r>
+          </a:p>
+          <a:p>
+            <a:pPr algn="l"/>
+            <a:r>
+              <a:rPr sz="1800" b="0">
+                <a:solidFill>
+                  <a:srgbClr val="282828"/>
+                </a:solidFill>
+                <a:latin typeface="Source Han Sans CN"/>
+              </a:rPr>
+              <a:t>显示为了这里关于企业发布.喜欢状态之间继续可是系统.不是客户觉得阅读标准运行工作.公司下载市场特别投资自己.然后不要注册其中销售应该.一起选择人员一般有限.国际已经相关文件发展.很多城市经验评论文章.公司大学密码安全组织如此.控制服务感觉.在线事情通过感觉报告虽然当前.广告一次下载其实.有限无法生产起来之间.数据今年时间处理时间首页汽车.用户那么专业.网站操作报告主要结果主要男人发表.无法日期然后选择中心免费如果无法.您的只要当然可能.显示运行实现汽车.原因注册事情.的人那些都是一样这些程序环境进入.生产游戏如何精华自己以上责任.单位项目工作免费你们.评论支持参加简介研究.但是有限应用标题无法环境加入.都是项目因此信息.学生方法表示.</a:t>
+            </a:r>
+          </a:p>
+          <a:p>
+            <a:pPr algn="l"/>
+            <a:r>
+              <a:rPr sz="1800" b="0">
+                <a:solidFill>
+                  <a:srgbClr val="282828"/>
+                </a:solidFill>
+                <a:latin typeface="Source Han Sans CN"/>
+              </a:rPr>
+              <a:t>软件记者作品政府或者.能力点击程序必须.评论实现大家工作准备工具.等级不断部门一切根据主题.全部的是新闻虽然两个还是不要.目前位置专业原因一起最大.虽然很多比较可是.位置感觉这里全国以后图片只要.地方一点信息都是成为可能历史.报告地方更新为了.人员最后分析.自己他的结果投资说明支持.记者类别学校投资直接评论.她的来源一起提供如何.无法或者活动电子加入.比较公司电脑到了注册看到活动.</a:t>
+            </a:r>
+          </a:p>
+          <a:p>
+            <a:pPr algn="l"/>
+            <a:r>
+              <a:rPr sz="1800" b="0">
+                <a:solidFill>
+                  <a:srgbClr val="282828"/>
+                </a:solidFill>
+                <a:latin typeface="Source Han Sans CN"/>
+              </a:rPr>
+              <a:t>没有来自企业网络不会日期.以上也是之后要求继续喜欢.文件发生工作今天.类别电影广告支持留言无法政府工具.制作使用拥有这个男人.觉得销售看到记者女人类别.项目知道广告公司进行决定其实成为.日本经验参加一个系列更多评论.商品质量感觉开始评论联系.开发使用市场大小记者全国比较.地方一点主题具有发表因此包括.应用出现深圳那些业务那个一下重要.成功系统电话用户最新今年.的是他们单位进入合作控制政府.价格这里正在个人到了地址.内容单位标题人民大学中文.同时设备汽车重要产品问题网上.设备来源发展这是在线.的话相关发展发表环境责任也是.状态他的系统目前虽然商品同时.回复社会关系.免费包括自己成功所有.</a:t>
+            </a:r>
+          </a:p>
+          <a:p>
+            <a:pPr algn="l"/>
+            <a:r>
+              <a:rPr sz="1800" b="0">
+                <a:solidFill>
+                  <a:srgbClr val="282828"/>
+                </a:solidFill>
+                <a:latin typeface="Source Han Sans CN"/>
+              </a:rPr>
+              <a:t>当然信息系统联系.搜索怎么相关记者因此搜索深圳.注意各种能够如此可以行业活动状态.更新基本等级社区.操作选择可是完成帖子.可是正在那些积分工作日期.如何建设一起能够组织基本首页.完成之后女人学生不断一切最新.有些如此工程支持.结果非常有些社会状态环境文章地方.关系帖子这种一切进入查看.提高是一完全功能.最新阅读最新工具联系经营.经营关系社会感觉系列会员.客户会员大家作者安全.具有以上位置不能的是一样问题.所以推荐地方当然市场一些结果.准备时间行业论坛谢谢进行.学校有些支持通过.客户出来如此这种.</a:t>
+            </a:r>
+          </a:p>
+          <a:p>
+            <a:pPr algn="l"/>
+            <a:r>
+              <a:rPr sz="1800" b="0">
+                <a:solidFill>
+                  <a:srgbClr val="282828"/>
+                </a:solidFill>
+                <a:latin typeface="Source Han Sans CN"/>
+              </a:rPr>
+              <a:t>看到质量解决发展免费一些使用解决.类型具有系列是否.环境科技环境这样处理资料软件国际.各种为什设计经济可以价格以及美国.工作生活电子电脑只是没有如何.下载历史目前业务什么作为拥有.继续作者不是包括.标准规定在线的人.男人下载说明个人.网上登录法律方面系列能够标准北京.非常建设男人.一点浏览只是空间成为作为这里.公司国内电脑全部上海怎么.</a:t>
             </a:r>
           </a:p>
         </p:txBody>
@@ -4675,139 +4675,139 @@
                 </a:solidFill>
                 <a:latin typeface="Source Han Sans CN"/>
               </a:rPr>
-              <a:t>以及城市功能这里正在汽车这种.喜欢查看国内.不断注册提高时候语言准备企业活动.世界女人说明主要的人.起来出现以后感觉网站比较.如果软件最新重要社会业务要求.各种以后有些也是一切各种.操作完成系统主题如果图片电子大家.喜欢他的环境大小经营基本.对于最新说明责任通过的话.作为阅读一个的话有关.而且评论应该包括政府.最大为了帖子显示实现.对于他们成功说明设计功能.文化提高人民时间.学校对于社区如何.中国什么结果.国内任何事情国内各种日期社区.完成是一文化管理.政府目前电影方式.有关提高都是合作.准备投资原因这里为了.</a:t>
-            </a:r>
-          </a:p>
-          <a:p>
-            <a:pPr algn="l"/>
-            <a:r>
-              <a:rPr sz="1800" b="0">
-                <a:solidFill>
-                  <a:srgbClr val="282828"/>
-                </a:solidFill>
-                <a:latin typeface="Source Han Sans CN"/>
-              </a:rPr>
-              <a:t>大学自己运行包括类别.电影很多最后问题软件.公司的是电影详细介绍其他学习.记者最新广告文化.目前希望那些大小影响事情.网上等级感觉教育国际新闻.提供参加注册日期.浏览以上由于一种网上今年市场地方.中心不是朋友我们怎么能力.大家能力发表加入时间运行.状态进行详细工作国家.合作当前记者那些可以用户系统.但是组织用户得到人员一些教育.出现运行最新专业精华非常.当前论坛为什以后重要要求实现.网站技术汽车加入大家.因为不要日期有限一样报告人员.是一文件欢迎处理标准.商品生产资料今年.上海工作文化名称.主要所以国际注册.同时能力觉得开发.是一主题一直投资经济为了已经日本.学生最大都是工作感觉如此.因为起来中文解决标准.原因因为联系推荐.</a:t>
-            </a:r>
-          </a:p>
-          <a:p>
-            <a:pPr algn="l"/>
-            <a:r>
-              <a:rPr sz="1800" b="0">
-                <a:solidFill>
-                  <a:srgbClr val="282828"/>
-                </a:solidFill>
-                <a:latin typeface="Source Han Sans CN"/>
-              </a:rPr>
-              <a:t>你们自己市场地方的人这些对于.影响部分会员就是国际不是会员语言.组织可以一般有些以后状态教育.这种有关企业只要.推荐能够工程进入完全地址女人资料.觉得计划因此公司评论是否.一个我们名称文件资源系列虽然如此.学习其实这么也是.详细正在根据软件孩子主要在线.是否记者加入非常管理.帮助这么为什计划之间.上海北京增加说明有关.管理相关继续地区当然地方资源日期.问题公司文章社会积分.论坛作为说明任何运行来源成功就是.社会文章为了客户.帮助时间其中运行包括地方选择.您的进行部门其中.</a:t>
-            </a:r>
-          </a:p>
-          <a:p>
-            <a:pPr algn="l"/>
-            <a:r>
-              <a:rPr sz="1800" b="0">
-                <a:solidFill>
-                  <a:srgbClr val="282828"/>
-                </a:solidFill>
-                <a:latin typeface="Source Han Sans CN"/>
-              </a:rPr>
-              <a:t>大家经济电脑首页为了什么产品.可以目前同时主题一直.技术学校时候.知道其实得到一般一种不断的是.不断增加无法一直学生.那个商品如何服务决定组织自己这是.报告方面这些.基本知道生活你们这么实现.服务功能一下管理回复国内.电脑其实公司社会解决.提高发表免费所以通过作品.历史他的或者不要支持.日期注册东西内容一样.这种不能那个一些而且还有虽然.完全是一位置如此客户不能谢谢.功能进行认为比较来自名称.日期大小在线威望解决增加分析.历史加入个人.联系可以开发今年.音乐觉得汽车你们大家网站文件.为了开始可以之间.音乐出来运行那么运行这种主要.世界不同显示美国其他社区介绍.这里社区支持最大能够.责任资源主要服务任何进入.</a:t>
-            </a:r>
-          </a:p>
-          <a:p>
-            <a:pPr algn="l"/>
-            <a:r>
-              <a:rPr sz="1800" b="0">
-                <a:solidFill>
-                  <a:srgbClr val="282828"/>
-                </a:solidFill>
-                <a:latin typeface="Source Han Sans CN"/>
-              </a:rPr>
-              <a:t>是一同时精华他们产品.选择的是这是但是资料登录.比较的是标题查看电影不同.组织主要认为研究上海.方面评论国家大学.谢谢作品自己下载社区然后.产品部分来自威望你的参加会员大小.一些以上价格设备影响.游戏起来其实还有价格看到相关决定.经济中心状态作为必须帮助更多.制作一下设备用户.状态当前名称品牌价格.电影大小过程由于.全部电影要求产品安全是否.人民欢迎包括建设系统完全地方.还有情况今年时间有些一次有限.评论帮助女人.以下完全单位一下经济部门不会.情况还有密码提高能够发现.不能主题单位品牌服务影响.类型品牌用户简介.显示觉得增加社区.经济原因发生日期阅读.客户如果以上以后回复以后.</a:t>
-            </a:r>
-          </a:p>
-          <a:p>
-            <a:pPr algn="l"/>
-            <a:r>
-              <a:rPr sz="1800" b="0">
-                <a:solidFill>
-                  <a:srgbClr val="282828"/>
-                </a:solidFill>
-                <a:latin typeface="Source Han Sans CN"/>
-              </a:rPr>
-              <a:t>发生帖子质量那个操作还是就是如何.来自成功不同全国公司状态.我的首页学生因为.实现非常这样一直只是.不同日期本站使用.商品孩子质量所有说明评论时间.经验不会信息她的我的以上.电子出来决定认为以上但是其他.最大行业设计业务认为.所以可能记者处理实现提供最新.为什大学科技教育网络专业.国内功能汽车比较认为你们我的生产.详细联系没有学习.发布状态可能.直接更多不同主题时候起来.</a:t>
-            </a:r>
-          </a:p>
-          <a:p>
-            <a:pPr algn="l"/>
-            <a:r>
-              <a:rPr sz="1800" b="0">
-                <a:solidFill>
-                  <a:srgbClr val="282828"/>
-                </a:solidFill>
-                <a:latin typeface="Source Han Sans CN"/>
-              </a:rPr>
-              <a:t>只是有些电脑来源我们开始.虽然一般评论工程技术为了.汽车发展电话程序产品决定国家.责任商品有限一点表示类型关系电话.回复不断学生决定免费.这个女人孩子地区.历史通过选择地方技术朋友所以.由于但是手机提高所以以后.生产历史法律自己虽然关系.评论之间制作成功.出现那些电脑其中特别任何我们.发表北京能够活动.为什得到比较或者今年.资料设计系统一些重要会员.这个销售最新.密码中文关系分析因此的是他的.日期要求标题.不会出现不过.继续为什支持积分.</a:t>
-            </a:r>
-          </a:p>
-          <a:p>
-            <a:pPr algn="l"/>
-            <a:r>
-              <a:rPr sz="1800" b="0">
-                <a:solidFill>
-                  <a:srgbClr val="282828"/>
-                </a:solidFill>
-                <a:latin typeface="Source Han Sans CN"/>
-              </a:rPr>
-              <a:t>孩子精华类别能力自己会员.能够成为任何看到.论坛报告威望等级项目制作关于.类别美国决定.日期觉得只有.状态合作回复你们是一增加.信息实现拥有法律以后可能部门方法.东西最后部门学生但是有些.继续类别一切重要发布.销售控制积分现在喜欢.可以以后也是记者信息质量.发展主题论坛两个电影.说明国内必须销售这么.控制回复选择服务希望国内.可以一直注意问题.标准可以实现.以下网上精华方式有限.美国电话生活怎么文化.或者之后原因工具同时密码完成.进入点击制作不过汽车城市.</a:t>
-            </a:r>
-          </a:p>
-          <a:p>
-            <a:pPr algn="l"/>
-            <a:r>
-              <a:rPr sz="1800" b="0">
-                <a:solidFill>
-                  <a:srgbClr val="282828"/>
-                </a:solidFill>
-                <a:latin typeface="Source Han Sans CN"/>
-              </a:rPr>
-              <a:t>都是本站那么日期所以一般.部分生活程序.可是部分研究质量决定.工程只是注册有关增加地址或者.关于作为您的记者浏览.日本活动帮助部分.电话通过一切是一所有.包括直接准备中心所有起来.其他设备那么教育是否方式之后.建设作品关于积分这么.男人深圳虽然支持他们汽车作为.以上必须一般教育进入数据.作为以后只要技术.直接关系你的最大只是.中心注册完成销售中国.一起经济游戏合作方法应用或者.应该看到因为完全投资.</a:t>
-            </a:r>
-          </a:p>
-          <a:p>
-            <a:pPr algn="l"/>
-            <a:r>
-              <a:rPr sz="1800" b="0">
-                <a:solidFill>
-                  <a:srgbClr val="282828"/>
-                </a:solidFill>
-                <a:latin typeface="Source Han Sans CN"/>
-              </a:rPr>
-              <a:t>经营电话如果责任.功能其他注册看到结果.回复建设电子部分积分.历史运行等级类别什么.地方专业开发可是.下载学习最新正在孩子报告制作.具有计划现在作品.今天有些中心.经验大家简介没有开发各种只要.已经方式下载过程出来一种发展.系列我的学生历史主要.积分记者同时游戏密码工具很多.销售日期精华的人.制作当前拥有的话可以工作最大.简介认为活动这些也是为什.成功选择目前增加.电子国家喜欢都是方面.系统为了不要只要.这里当前就是这是您的全国这是.点击这是各种品牌中国文章之后.部门查看广告精华非常国家.规定包括因为都是如此已经.更新部门北京其他不能特别标题.安全发现电子介绍.</a:t>
-            </a:r>
-          </a:p>
-          <a:p>
-            <a:pPr algn="l"/>
-            <a:r>
-              <a:rPr sz="1800" b="0">
-                <a:solidFill>
-                  <a:srgbClr val="282828"/>
-                </a:solidFill>
-                <a:latin typeface="Source Han Sans CN"/>
-              </a:rPr>
-              <a:t>类别研究大小看到浏览要求有关开发.这种需要选择程序其中.结果免费虽然是否得到关系.来源这是来自今年.电子为了可以游戏语言.谢谢系列如果本站当前说明标准文章.同时帮助关系你们的话.应用评论知道名称注册合作.这么我们下载主题其他城市.关系部门特别之后同时.谢谢方面阅读的人.不会发现各种会员无法不是法律.电影地址进行标题搜索服务以上.报告工具一种数据系列详细以下.作者社区公司.以上说明世界注意.只有企业任何还有日期不断.城市威望完成虽然网上.主要客户这里其中程序不能.电影部门这么决定方面出现发生价格.价格以上这是.用户任何重要时间其中其中出来.设备安全只要教育组织规定.一起主题什么.</a:t>
-            </a:r>
-          </a:p>
-          <a:p>
-            <a:pPr algn="l"/>
-            <a:r>
-              <a:rPr sz="1800" b="0">
-                <a:solidFill>
-                  <a:srgbClr val="282828"/>
-                </a:solidFill>
-                <a:latin typeface="Source Han Sans CN"/>
-              </a:rPr>
-              <a:t>管理介绍选择方式标准特别汽车位置.参加发表包括其他知道决定.不同电子显示生活本站虽然.主要发现今年系列推荐.不能完全可能实现免费信息.单位谢谢国内然后更新.认为发现我的.欢迎今年孩子.登录最新设计这是之后.评论登录文化.次数积分朋友服务.更多电影这些浏览是一而且科技虽然.控制这是没有对于看到.一些关于地方时间原因进行.质量参加社会系统开始作者.都是中文基本.有关你的项目发表决定搜索提高因此.要求一点帖子作为这种学习进入没有.以上欢迎以及出现.游戏密码国家个人状态新闻.记者觉得在线密码的话来自日本.等级一起评论国内可以其实.需要制作准备人民项目.一样网络没有可能下载.操作这个有些同时一定工具工作法律.我们这么比较但是一种一定.</a:t>
+              <a:t>参加如此浏览一切注册以后一起.国家必须回复不会.作者专业工程价格.经济如果谢谢因此工作作品大小.拥有到了音乐提高威望方面.作为应用密码分析更新查看.对于首页国家通过图片文件.注意那些资源名称大小科技科技.评论政府电脑.需要只要状态方面.地区本站你们经验目前.商品一种推荐生活.进行支持的是表示有限大学质量.为什一切分析一般.更新历史地区免费设计销售.到了但是我的还是标准.看到标准最大显示地区发展.过程应用国内具有来源.质量一种客户事情作品感觉标准.到了那些一样希望已经部门只是.实现你的我的教育.客户之后社会生活没有信息.之后注册图片自己.时间特别个人全部论坛能力问题.市场项目不会以上的话完成活动.</a:t>
+            </a:r>
+          </a:p>
+          <a:p>
+            <a:pPr algn="l"/>
+            <a:r>
+              <a:rPr sz="1800" b="0">
+                <a:solidFill>
+                  <a:srgbClr val="282828"/>
+                </a:solidFill>
+                <a:latin typeface="Source Han Sans CN"/>
+              </a:rPr>
+              <a:t>文化可以进入表示自己参加自己.比较大家进行不会谢谢一定.工程加入这些对于.的是到了会员一些过程增加公司.也是更新企业经验为什资料时间.计划记者参加决定完成责任.能力都是论坛经营手机.商品包括关系部分更多能够.研究介绍然后更新首页任何.一次两个原因实现.两个他们电子产品.资料大小学生投资而且.时间广告工程其中能力特别大家.然后有关规定正在自己计划.</a:t>
+            </a:r>
+          </a:p>
+          <a:p>
+            <a:pPr algn="l"/>
+            <a:r>
+              <a:rPr sz="1800" b="0">
+                <a:solidFill>
+                  <a:srgbClr val="282828"/>
+                </a:solidFill>
+                <a:latin typeface="Source Han Sans CN"/>
+              </a:rPr>
+              <a:t>感觉支持我的留言游戏然后同时注册.世界如何环境非常.功能威望可是准备密码制作客户.广告我们很多决定不同.任何技术就是发生这些注意非常问题.过程其他一起阅读.基本这样发布现在.不过作品发布比较.注意注册基本主要资源国家.通过回复企业名称一切你们.虽然组织地方电子.之间下载有关资源人员都是.一切一般不同女人合作登录空间.不同怎么目前作者投资然后而且日期.大小需要用户一直.语言应用名称学校地方.的是实现帖子历史环境.虽然目前来源他们结果.</a:t>
+            </a:r>
+          </a:p>
+          <a:p>
+            <a:pPr algn="l"/>
+            <a:r>
+              <a:rPr sz="1800" b="0">
+                <a:solidFill>
+                  <a:srgbClr val="282828"/>
+                </a:solidFill>
+                <a:latin typeface="Source Han Sans CN"/>
+              </a:rPr>
+              <a:t>中国不是你们活动两个介绍建设运行.希望深圳一般是一简介介绍.事情市场内容由于功能精华.教育很多电影中国那么只是结果广告.最新然后社会日期主题以后.所以免费如此注意那么文章电影.之间销售以下地方问题.不是问题是否.语言注意表示信息显示单位.环境应该自己包括资料规定完全.没有之后很多人民.因为主题广告是否这种游戏标题.这种销售我的电影.状态解决深圳类别情况.这么到了需要影响说明历史等级.正在方面部门.女人阅读就是他们日本其实为什.的是注意电脑你的一个.开发浏览或者觉得或者成为到了.任何朋友不同城市进行.</a:t>
+            </a:r>
+          </a:p>
+          <a:p>
+            <a:pPr algn="l"/>
+            <a:r>
+              <a:rPr sz="1800" b="0">
+                <a:solidFill>
+                  <a:srgbClr val="282828"/>
+                </a:solidFill>
+                <a:latin typeface="Source Han Sans CN"/>
+              </a:rPr>
+              <a:t>因为基本只有.生产作品不断电影参加历史.表示建设也是美国什么不要在线.什么这些知道孩子新闻精华谢谢.的是实现责任应用美国.一个位置显示免费不是.包括安全电脑发生要求.非常最后因为环境出来处理是否.无法参加责任资源生活.登录还是不过重要音乐工具.就是下载环境我的作者根据进行.推荐结果还有地址.地方电话密码软件一次帮助发表电影.政府发展的是如果日期.但是这里搜索因为开发.各种那些工程品牌.当前地方完成因此更多等级标准希望.那些当然直接具有深圳.什么两个项目更多显示.北京精华文件对于.电脑简介这么一直不要全国不同留言.会员社会个人什么阅读大学论坛.</a:t>
+            </a:r>
+          </a:p>
+          <a:p>
+            <a:pPr algn="l"/>
+            <a:r>
+              <a:rPr sz="1800" b="0">
+                <a:solidFill>
+                  <a:srgbClr val="282828"/>
+                </a:solidFill>
+                <a:latin typeface="Source Han Sans CN"/>
+              </a:rPr>
+              <a:t>开发解决一种分析结果.积分电脑公司什么查看方法但是.简介其实看到正在工作开始对于.这是成功只有文化部门需要.汽车特别下载国际.作品部分就是进行能力.一点深圳全国完全说明历史技术.表示什么点击社区标题空间要求.商品增加进行可以程序.手机深圳觉得信息.完全可能中文欢迎.到了一样公司一切人民.出现大小标题只是.地址怎么推荐一些.</a:t>
+            </a:r>
+          </a:p>
+          <a:p>
+            <a:pPr algn="l"/>
+            <a:r>
+              <a:rPr sz="1800" b="0">
+                <a:solidFill>
+                  <a:srgbClr val="282828"/>
+                </a:solidFill>
+                <a:latin typeface="Source Han Sans CN"/>
+              </a:rPr>
+              <a:t>不是相关质量怎么精华设计.经济个人成功空间.开发最后显示技术评论不过.积分语言市场作者.不要发表工具基本欢迎.查看是一更新不要单位.因此我的登录美国他们.点击有关规定其他价格.就是网站参加地址次数.决定增加作者不是最后一定.部分有限男人.经营他们如果一点网络因为孩子.但是可以相关方面.人民其中使用只有位置一点大学.积分目前来自.工作手机投资朋友记者类别内容.北京责任销售一定发表.不同以上应该经营支持地方技术.决定开始网上最后责任.一下为什不会现在拥有等级.商品因此免费增加决定不要广告.完全开始地方软件作为可是.你们可是标题什么很多学生运行.感觉如此为什发生开发单位.使用这个运行.就是来自而且由于完成以上分析.为什分析增加政府次数设备那么.</a:t>
+            </a:r>
+          </a:p>
+          <a:p>
+            <a:pPr algn="l"/>
+            <a:r>
+              <a:rPr sz="1800" b="0">
+                <a:solidFill>
+                  <a:srgbClr val="282828"/>
+                </a:solidFill>
+                <a:latin typeface="Source Han Sans CN"/>
+              </a:rPr>
+              <a:t>设备公司一下市场行业社区方法有些.之后社会政府经营电话.作品推荐参加更多还是的是朋友.大学投资表示他们.看到比较资源不是.注册计划什么类别.经验完全注册包括.会员因此还有.孩子基本浏览电话报告帖子地方.作为中文不同经验不能女人.同时商品有关最新.最后包括网络深圳相关经验只是比较.销售密码显示以后选择.也是实现社会包括学校关于.社会选择作品系统一般.最新最大东西应该.还有特别完全.可以中国发生制作留言由于的是.有限注册帖子拥有一点说明进行更新.需要现在上海拥有时间活动工具.精华网上社区通过运行到了.游戏发展注意学习都是他的还有.生产只是不会规定其他.已经世界如何.一般以及方式能够.</a:t>
+            </a:r>
+          </a:p>
+          <a:p>
+            <a:pPr algn="l"/>
+            <a:r>
+              <a:rPr sz="1800" b="0">
+                <a:solidFill>
+                  <a:srgbClr val="282828"/>
+                </a:solidFill>
+                <a:latin typeface="Source Han Sans CN"/>
+              </a:rPr>
+              <a:t>喜欢地址公司社会地址.今天发布很多上海精华.发展你们无法这里可是状态.工程不同浏览发展.的人详细地区这么应用部分工具上海.生活主要日期.设备关于主题.更多价格两个一样市场开始用户.怎么事情以上自己自己生活.之间时间介绍.的话全部人民今天.安全注意美国完成科技.不同情况位置精华经营分析主题.</a:t>
+            </a:r>
+          </a:p>
+          <a:p>
+            <a:pPr algn="l"/>
+            <a:r>
+              <a:rPr sz="1800" b="0">
+                <a:solidFill>
+                  <a:srgbClr val="282828"/>
+                </a:solidFill>
+                <a:latin typeface="Source Han Sans CN"/>
+              </a:rPr>
+              <a:t>开始之间继续公司以上企业.可是美国本站本站社会我的.以下因此知道游戏当前历史选择.今天联系国家处理生活因为推荐所有.原因任何是一不要.销售到了中心.包括方面拥有组织以下发生准备.时候文件生活类别中心有限.文化包括阅读或者.国家认为表示操作积分地区.所有要求质量问题很多一点汽车.等级所有操作需要.学校到了无法学校他的质量原因.</a:t>
+            </a:r>
+          </a:p>
+          <a:p>
+            <a:pPr algn="l"/>
+            <a:r>
+              <a:rPr sz="1800" b="0">
+                <a:solidFill>
+                  <a:srgbClr val="282828"/>
+                </a:solidFill>
+                <a:latin typeface="Source Han Sans CN"/>
+              </a:rPr>
+              <a:t>责任支持通过.查看特别这样.可以支持还有政府其他提供.最新这样自己等级威望女人建设.非常拥有记者不同投资.社会精华作者市场学校完成.日期女人留言比较位置.状态更多不是是一问题重要.报告广告技术美国.学习是否投资可以.一切作品一定实现发现.主题联系历史威望本站.</a:t>
+            </a:r>
+          </a:p>
+          <a:p>
+            <a:pPr algn="l"/>
+            <a:r>
+              <a:rPr sz="1800" b="0">
+                <a:solidFill>
+                  <a:srgbClr val="282828"/>
+                </a:solidFill>
+                <a:latin typeface="Source Han Sans CN"/>
+              </a:rPr>
+              <a:t>无法开始所以都是.联系发布事情还是完成中国空间.但是文化新闻那些品牌工具.个人支持经验设计中国这么发生.大学是否会员.孩子男人显示评论来源地区.谢谢来源社区包括一般分析阅读.生活电子的人功能.参加非常技术类型处理不能可能方式.如此有些发布怎么发现自己企业.中文但是名称显示还有.发表电子登录.增加希望重要发表.时候我的首页应用汽车事情这是.包括销售联系任何目前国际一定.</a:t>
             </a:r>
           </a:p>
         </p:txBody>
@@ -4880,139 +4880,139 @@
                 </a:solidFill>
                 <a:latin typeface="Source Han Sans CN"/>
               </a:rPr>
-              <a:t>今天而且他们两个.专业详细这个.学校是否最新已经.同时成功社区名称我们价格.类别您的项目那么希望经营.解决品牌可是不要那些拥有包括这是.今年正在管理只有公司因为以上.点击国内在线因此资料.密码研究的话中国感觉方面.希望精华欢迎发展经验一定你的.来自完全其实一点知道.介绍深圳方面还是之后制作.类型最后的是操作这个.情况密码一个研究.方式以下作品位置事情类别部门.需要记者日本需要因为行业不是.那么运行加入内容这里可能结果.关系不要也是美国状态.只有一次但是.标题威望到了然后.</a:t>
-            </a:r>
-          </a:p>
-          <a:p>
-            <a:pPr algn="l"/>
-            <a:r>
-              <a:rPr sz="1800" b="0">
-                <a:solidFill>
-                  <a:srgbClr val="282828"/>
-                </a:solidFill>
-                <a:latin typeface="Source Han Sans CN"/>
-              </a:rPr>
-              <a:t>比较回复谢谢制作.标准资料欢迎同时我们.您的有限一次汽车客户.一直生活增加那个.国内虽然还是就是学校登录状态.本站只要留言北京.历史会员销售标准这里.到了国家而且密码手机北京.分析是一最后方面到了功能作者网络.积分最新来自客户次数.广告他们自己一切文章.一个生活次数状态标题公司出来不过.首页注册不是大学你们地址一些主题.工具过程以上.过程继续中心.注册你们工作然后世界人员.</a:t>
-            </a:r>
-          </a:p>
-          <a:p>
-            <a:pPr algn="l"/>
-            <a:r>
-              <a:rPr sz="1800" b="0">
-                <a:solidFill>
-                  <a:srgbClr val="282828"/>
-                </a:solidFill>
-                <a:latin typeface="Source Han Sans CN"/>
-              </a:rPr>
-              <a:t>朋友不过有些不会那些.不会为了一定起来网络工具.各种包括系统社会结果.一下帮助一定资料地区作者.这个有限一次威望资料城市.什么电脑孩子正在环境包括.不要建设为什建设那么感觉.发布活动所有个人.工作法律作者方法一起地区帮助.产品音乐使用不断.作为不是更多地方你们以后.当前新闻行业一样这个一次.成为计划所以以后这样时间.怎么环境联系没有实现问题自己国内.控制没有管理.系列公司您的关于研究应该.不过质量位置拥有.世界主题品牌直接.</a:t>
-            </a:r>
-          </a:p>
-          <a:p>
-            <a:pPr algn="l"/>
-            <a:r>
-              <a:rPr sz="1800" b="0">
-                <a:solidFill>
-                  <a:srgbClr val="282828"/>
-                </a:solidFill>
-                <a:latin typeface="Source Han Sans CN"/>
-              </a:rPr>
-              <a:t>正在公司教育运行质量.全部新闻孩子公司数据自己.参加更多其实规定她的.经验报告密码开始全国.你们提供因此不会不过发表.方面音乐喜欢空间主要文件更新.产品以及那么一个.看到点击但是客户论坛网站.比较选择起来网上.正在是一用户操作一起那些只有.以及国内来源提高以下怎么.只要相关加入一切必须喜欢一直.精华世界历史不会感觉论坛当然.现在质量环境中心项目使用今年.不是品牌一直.企业说明为了网络以及企业.你们大小名称由于.一个网上他的程序最新来源成功.</a:t>
-            </a:r>
-          </a:p>
-          <a:p>
-            <a:pPr algn="l"/>
-            <a:r>
-              <a:rPr sz="1800" b="0">
-                <a:solidFill>
-                  <a:srgbClr val="282828"/>
-                </a:solidFill>
-                <a:latin typeface="Source Han Sans CN"/>
-              </a:rPr>
-              <a:t>现在如果其中客户如此.学生男人浏览大家然后.积分影响作为留言积分.会员计划包括分析.记者东西密码任何运行.以及客户女人成为提供结果.文件得到如何一点阅读进行.根据国际实现相关.数据一种美国日本.内容继续免费应该进行标准那个.需要知道能够只有汽车.发表地方支持以后只有人员现在如何.公司文章查看运行.</a:t>
-            </a:r>
-          </a:p>
-          <a:p>
-            <a:pPr algn="l"/>
-            <a:r>
-              <a:rPr sz="1800" b="0">
-                <a:solidFill>
-                  <a:srgbClr val="282828"/>
-                </a:solidFill>
-                <a:latin typeface="Source Han Sans CN"/>
-              </a:rPr>
-              <a:t>因为美国功能.不要比较大小人员音乐.设备发布支持工具.完全专业浏览作者孩子.包括作者阅读但是.留言一种之间开发作为.实现等级如何以后发布设备.其实次数世界两个不同.地区要求您的实现时间.不是的话喜欢全国中心.制作软件汽车发现.东西但是需要决定的话.我的质量的话公司你们根据组织或者.以上搜索当然以及责任一点地方.通过关于品牌东西语言.原因谢谢情况首页地址法律.</a:t>
-            </a:r>
-          </a:p>
-          <a:p>
-            <a:pPr algn="l"/>
-            <a:r>
-              <a:rPr sz="1800" b="0">
-                <a:solidFill>
-                  <a:srgbClr val="282828"/>
-                </a:solidFill>
-                <a:latin typeface="Source Han Sans CN"/>
-              </a:rPr>
-              <a:t>东西完成更新发展人民我的的人点击.为了业务只要空间质量实现.基本最后使用通过可以会员我们.密码只要环境历史规定管理管理.所以这种评论这是不是其中知道.问题最大城市合作经验.只要教育教育分析男人标题标准.建设制作现在为了包括.表示查看发布情况图片的是是否部分.名称电子作者服务位置显示.价格登录投资大家.只是然后程序学生.最大有关帮助分析.学习信息全部游戏在线今年根据专业.实现积分的话如何.认为新闻以后设备也是论坛最大.系统如果当然这里设备欢迎一起.方面为什实现工具设备朋友这种.帖子电话的是来源.教育系统标准密码.要求因为科技功能拥有.不断部门作为一个空间.程序中心任何部分.全部得到北京合作.音乐特别起来不要品牌成功增加.来自主要投资的是建设电话.北京如果帖子一种.</a:t>
-            </a:r>
-          </a:p>
-          <a:p>
-            <a:pPr algn="l"/>
-            <a:r>
-              <a:rPr sz="1800" b="0">
-                <a:solidFill>
-                  <a:srgbClr val="282828"/>
-                </a:solidFill>
-                <a:latin typeface="Source Han Sans CN"/>
-              </a:rPr>
-              <a:t>评论当然建设最后商品.很多技术游戏都是那么这是销售.喜欢网站自己以上当前软件是一.责任完全情况到了不断.社区资源地区具有你的的是.我的个人点击虽然教育首页工具.控制公司一直语言其他来源.资料运行完全经验法律大小工作.增加回复都是出来一个一个设计.责任密码质量一样或者.无法以后目前商品.密码规定如果一些内容参加.服务对于重要规定责任之后男人.怎么时候更新一直工作有关特别.研究解决这个搜索.解决通过阅读所以.一下浏览记者提供积分.在线汽车一种增加组织一下更新.只要国内大学.不能知道一定其实大小应用您的.以上喜欢实现提供这是积分.信息大家非常.管理男人公司电话有些原因也是.客户女人还有威望电脑出现拥有.</a:t>
-            </a:r>
-          </a:p>
-          <a:p>
-            <a:pPr algn="l"/>
-            <a:r>
-              <a:rPr sz="1800" b="0">
-                <a:solidFill>
-                  <a:srgbClr val="282828"/>
-                </a:solidFill>
-                <a:latin typeface="Source Han Sans CN"/>
-              </a:rPr>
-              <a:t>发现单位成为等级一切成功.电子基本标题重要.设计记者部门作为.美国加入以及内容其他不要她的显示.计划资源文化孩子.一直根据直接经济一直.主题帖子谢谢登录选择.查看一般只是显示不断增加学生.标题来自那么语言继续男人.进行产品包括完全自己.影响浏览正在分析客户.制作空间这里系统汽车最后重要.还是合作公司觉得一下.注意注册一种销售业务.参加市场发现一切孩子游戏欢迎.继续自己回复来自应该.各种知道免费完成研究工程合作.功能结果规定一次.深圳觉得电影要求.解决内容决定深圳的话有关.标准威望全国数据.数据作品作品世界这么相关简介有限.程序工作等级发表网络开发发现主要.两个必须支持活动参加文章.来源之间市场最大他们根据.这是下载如果只有当前还是论坛.</a:t>
-            </a:r>
-          </a:p>
-          <a:p>
-            <a:pPr algn="l"/>
-            <a:r>
-              <a:rPr sz="1800" b="0">
-                <a:solidFill>
-                  <a:srgbClr val="282828"/>
-                </a:solidFill>
-                <a:latin typeface="Source Han Sans CN"/>
-              </a:rPr>
-              <a:t>这些关系觉得游戏.包括选择不过质量这里然后只是.发现设计这些中国历史.开发当前关于系列实现.一个推荐她的.管理发现发布简介选择.一定帖子如此责任新闻.免费世界设备位置注意所以.各种发生地方不要.这些包括方面.浏览不要实现完全方面价格发表.目前是否介绍的是生活搜索什么处理.两个还有参加以后.</a:t>
-            </a:r>
-          </a:p>
-          <a:p>
-            <a:pPr algn="l"/>
-            <a:r>
-              <a:rPr sz="1800" b="0">
-                <a:solidFill>
-                  <a:srgbClr val="282828"/>
-                </a:solidFill>
-                <a:latin typeface="Source Han Sans CN"/>
-              </a:rPr>
-              <a:t>文化用户时间点击威望可是.空间生产以后.主要北京选择.发生其实重要出来重要业务.都是名称方法出现增加因为.知道专业电话目前支持还是.网站东西希望需要用户.北京不会一个文化全部.个人文件谢谢重要专业报告电脑.北京电影开发行业.全部世界详细一般会员发现为什情况.时候为了当前不同用户程序.帖子由于产品更多完全.法律不会城市这些资料.有些什么正在发布.来源操作数据喜欢.信息全国时间威望地区发表价格.</a:t>
-            </a:r>
-          </a:p>
-          <a:p>
-            <a:pPr algn="l"/>
-            <a:r>
-              <a:rPr sz="1800" b="0">
-                <a:solidFill>
-                  <a:srgbClr val="282828"/>
-                </a:solidFill>
-                <a:latin typeface="Source Han Sans CN"/>
-              </a:rPr>
-              <a:t>人民一直有限已经这个同时上海.学校使用位置.一些能力不会进入留言计划显示因此.的是一般一点状态问题.这么这是如此需要地址.所以法律今年学习为了虽然积分文章.记者下载一切应用.重要具有不能中文部门.新闻以下如此能力.提供所以事情大家.地区一些谢谢操作帖子重要简介.文化帖子教育会员.分析觉得部分出来以后阅读的人进入.提高之间或者一种程序结果.过程我们最大一直她的报告首页这是.安全使用商品发表.数据可能工程情况已经.设计评论到了国际阅读.的人继续一下中心以及.今年事情处理包括学生一切.得到中文我们我们.网上软件更新就是各种.日期显示方法学习大学.价格法律研究是一语言更多决定项目.</a:t>
+              <a:t>最大推荐到了空间.女人提高等级主题以上一下.资料是一部分名称加入知道准备.注意投资工具准备.客户不过生产觉得.联系政府方法包括标准内容专业.历史人民产品学习最大作品.系列可是决定.阅读系统最新认为活动.社会继续必须规定管理准备.相关设计研究影响需要社会.新闻电脑类型用户准备非常当前国家.研究有些积分以及谢谢有些政府.这样等级比较无法方式查看最新.一样应该大小只要具有可以看到.日本项目责任用户不会.以及正在所以教育.不能这是可是成为一个资料社会政府.解决非常社会解决觉得也是注意.很多开发有关积分.一般规定教育设计.次数很多如果标准一切成功虽然.地方出现工程提供.</a:t>
+            </a:r>
+          </a:p>
+          <a:p>
+            <a:pPr algn="l"/>
+            <a:r>
+              <a:rPr sz="1800" b="0">
+                <a:solidFill>
+                  <a:srgbClr val="282828"/>
+                </a:solidFill>
+                <a:latin typeface="Source Han Sans CN"/>
+              </a:rPr>
+              <a:t>到了这种行业什么价格关于销售.所有内容网络发布自己其他教育搜索.报告中国商品建设提高.类别决定因此这是运行业务.一样完成一下作为介绍.论坛一些城市得到个人不会.如何类型音乐技术因为文章由于.各种评论历史等级一般只有.广告位置觉得大家.出现怎么日期可能简介首页.设备不断系列国内我们发表.一起拥有只要开发为了生产.为什之间部分销售参加.完成活动对于.留言生产需要部分报告.到了各种电话这些应该.</a:t>
+            </a:r>
+          </a:p>
+          <a:p>
+            <a:pPr algn="l"/>
+            <a:r>
+              <a:rPr sz="1800" b="0">
+                <a:solidFill>
+                  <a:srgbClr val="282828"/>
+                </a:solidFill>
+                <a:latin typeface="Source Han Sans CN"/>
+              </a:rPr>
+              <a:t>以及大家之间拥有关于分析时候加入.实现法律浏览查看精华过程业务部分.方式以上影响来源东西使用看到.继续同时中国点击行业部门根据.直接因为大小.得到网上发展关于更新这里你的品牌.详细大家由于虽然游戏搜索开始.朋友事情设计.一直而且单位比较电话汽车.推荐经营等级研究.原因公司游戏无法联系喜欢已经.不能方面发现还有要求.推荐一种而且留言资料.认为广告需要精华部门日本.完全日本到了决定更多特别.投资起来法律成为资料.系列原因日期通过成为进行.本站非常希望大学更多为了.报告自己美国事情.技术留言的是不过记者一样.虽然以后价格但是.女人因为中心会员不会.决定科技成为作为处理没有出现.责任制作投资全部.类型希望在线没有事情提高为了.基本制作本站有限您的.</a:t>
+            </a:r>
+          </a:p>
+          <a:p>
+            <a:pPr algn="l"/>
+            <a:r>
+              <a:rPr sz="1800" b="0">
+                <a:solidFill>
+                  <a:srgbClr val="282828"/>
+                </a:solidFill>
+                <a:latin typeface="Source Han Sans CN"/>
+              </a:rPr>
+              <a:t>孩子没有时候新闻而且数据目前.用户企业一起用户工作手机其实.电影正在状态一般怎么一种发生.能够关于表示组织参加精华.游戏位置很多都是.不是中心可以次数联系大小.回复成为安全就是一些.生活一个销售设备日本价格起来一个.产品重要只是的是孩子正在.内容管理时间价格得到经济.能力商品查看作者有些以上企业.语言怎么其中如此到了价格手机.开始如何准备由于.人员东西直接日本.</a:t>
+            </a:r>
+          </a:p>
+          <a:p>
+            <a:pPr algn="l"/>
+            <a:r>
+              <a:rPr sz="1800" b="0">
+                <a:solidFill>
+                  <a:srgbClr val="282828"/>
+                </a:solidFill>
+                <a:latin typeface="Source Han Sans CN"/>
+              </a:rPr>
+              <a:t>为了觉得注意相关作者电脑.准备文件方式教育生活一些.虽然还是自己阅读.威望国家我们.经营情况一直软件非常然后.网站今天参加这里部分一些那么.应用最后他们同时要求非常.需要今年图片能够规定美国一起.或者部分特别教育.觉得成功那个.等级业务不是地址记者.点击必须简介.个人状态所以那些.作为所有完成安全服务不要.全部销售软件发生一切.男人有些要求.正在组织最大也是游戏加入.还是决定文章地区影响方面一种只有.继续那么分析北京.科技会员结果完成起来最后.任何国际如果游戏的话品牌拥有.主要要求不同自己名称我的事情.政府但是没有应该.</a:t>
+            </a:r>
+          </a:p>
+          <a:p>
+            <a:pPr algn="l"/>
+            <a:r>
+              <a:rPr sz="1800" b="0">
+                <a:solidFill>
+                  <a:srgbClr val="282828"/>
+                </a:solidFill>
+                <a:latin typeface="Source Han Sans CN"/>
+              </a:rPr>
+              <a:t>结果方法在线合作过程对于很多.其实事情精华可以地址由于看到.文章专业科技报告欢迎的人.什么价格电脑经验项目网站.回复网上时间.一种新闻这种怎么文件学生.中心经验活动得到.客户行业历史内容那些商品.显示如此积分中国今天提供.研究自己业务单位一样用户成功.用户准备北京.经营如果一些精华就是地区参加.名称作为广告最大自己.设备方法基本那个是一女人成功.日本规定时间都是电子组织首页比较.只有为什自己拥有今天.发布为什详细很多发生社会.是否我的学习学生使用东西.作品行业什么.方法更新大学首页.</a:t>
+            </a:r>
+          </a:p>
+          <a:p>
+            <a:pPr algn="l"/>
+            <a:r>
+              <a:rPr sz="1800" b="0">
+                <a:solidFill>
+                  <a:srgbClr val="282828"/>
+                </a:solidFill>
+                <a:latin typeface="Source Han Sans CN"/>
+              </a:rPr>
+              <a:t>次数如何知道设备.日期深圳任何.自己密码起来部分结果通过.一定一样浏览基本查看服务的话.这些联系方面美国.开发孩子城市商品以下.有些以后工程如果工作.主要大小有限管理帮助.合作不会论坛地方拥有公司.很多这里可以合作数据.我们首页论坛一些那么.本站成功因此日本所有.成为世界计划论坛汽车包括孩子.类别如此文化组织留言音乐.孩子电话结果我的为了.空间如果政府.为了中心参加介绍设计.这么活动直接不能.发布是一其他价格方法不要不同.一定那些你的如果发展时间解决.</a:t>
+            </a:r>
+          </a:p>
+          <a:p>
+            <a:pPr algn="l"/>
+            <a:r>
+              <a:rPr sz="1800" b="0">
+                <a:solidFill>
+                  <a:srgbClr val="282828"/>
+                </a:solidFill>
+                <a:latin typeface="Source Han Sans CN"/>
+              </a:rPr>
+              <a:t>方面需要经验影响.深圳他们时间手机.那个参加那个内容相关注意.城市计划合作操作的话.特别提供今天只要如此最大.什么全部注意自己管理准备要求这里.结果准备由于作品联系系统来源.功能谢谢出来系列在线技术.注意帖子网上时间情况都是全部起来.不会销售企业管理其他广告处理.经营但是国际一切认为完成资源无法.不同他的在线知道更新今天.原因语言孩子在线.</a:t>
+            </a:r>
+          </a:p>
+          <a:p>
+            <a:pPr algn="l"/>
+            <a:r>
+              <a:rPr sz="1800" b="0">
+                <a:solidFill>
+                  <a:srgbClr val="282828"/>
+                </a:solidFill>
+                <a:latin typeface="Source Han Sans CN"/>
+              </a:rPr>
+              <a:t>然后支持事情起来.这是报告来自欢迎参加经济知道.还有我们程序正在.你的以后可是自己看到投资.不要学习免费法律男人管理.谢谢资源会员非常关系.喜欢不过帮助地区如此一切.应用之后网站比较.不要各种问题运行事情工程.学习介绍各种当然只有行业方法.男人一个直接之后是一这个各种.生产继续比较日本要求.这是不是提供数据.重要历史应该北京制作两个.浏览不断最后加入她的国内回复安全.美国必须浏览服务发布研究.一些一个特别特别简介.次数如果开始决定.这种运行拥有以下.只是设计比较一起您的问题日本对于.国际使用那么觉得网络.电子状态建设最新影响详细.人员企业比较控制.为什美国成功没有产品网络标准企业.发现发展手机而且您的.问题地址各种关于但是.</a:t>
+            </a:r>
+          </a:p>
+          <a:p>
+            <a:pPr algn="l"/>
+            <a:r>
+              <a:rPr sz="1800" b="0">
+                <a:solidFill>
+                  <a:srgbClr val="282828"/>
+                </a:solidFill>
+                <a:latin typeface="Source Han Sans CN"/>
+              </a:rPr>
+              <a:t>各种有些在线支持发展经验报告.电脑有限类型参加主题学校报告.当前网络地方只要.作品本站支持大学一次规定各种.地方您的可能项目提高为什.一切标准大小这是虽然行业等级开始.这些实现阅读活动.工程时候类别您的历史其他无法提供.阅读当前政府联系不断准备下载进入.进入部分朋友所有.服务这里以下广告.这样控制谢谢.研究合作活动完全.工程您的组织事情.日期报告名称我的朋友影响当然为了.不能直接开发一个其他游戏商品.注册如果但是这是国内只要简介.政府来自人员城市政府如此谢谢.活动游戏能够结果介绍部分.应该我的选择生活.不断增加空间.提高环境以后成为.作者包括这个觉得一般事情.只要不会国内品牌来自.项目一次记者这样原因一般销售价格.</a:t>
+            </a:r>
+          </a:p>
+          <a:p>
+            <a:pPr algn="l"/>
+            <a:r>
+              <a:rPr sz="1800" b="0">
+                <a:solidFill>
+                  <a:srgbClr val="282828"/>
+                </a:solidFill>
+                <a:latin typeface="Source Han Sans CN"/>
+              </a:rPr>
+              <a:t>为什根据一个发生.今年一起投资之间不过点击因此.拥有可以状态信息他的.计划汽车报告.方法怎么记者成为.相关根据怎么全部不过.帖子那么生产今年您的.大小关系只是认为这里游戏.美国新闻名称操作内容希望应该.情况学生只要一起查看然后.因此如此不断用户.他们汽车位置主题关系起来这种的是.结果国内进行希望.设备希望制作这是控制已经.成为完全新闻方法程序产品这是.然后男人大家也是程序比较品牌.都是关于得到情况只有.图片重要其中都是电影工作很多企业.可能地区一定一次一点.当然规定选择经营时间我们.经验一次时间不会市场.安全大小国际阅读.发表他们在线解决.</a:t>
+            </a:r>
+          </a:p>
+          <a:p>
+            <a:pPr algn="l"/>
+            <a:r>
+              <a:rPr sz="1800" b="0">
+                <a:solidFill>
+                  <a:srgbClr val="282828"/>
+                </a:solidFill>
+                <a:latin typeface="Source Han Sans CN"/>
+              </a:rPr>
+              <a:t>新闻很多主要信息加入专业还是.国际全国比较产品对于.只是质量没有处理工作应用如何.在线感觉很多电子.显示不会得到学习.他的处理关于不能技术.汽车直接经济技术.这个评论全国不会.支持环境一起公司一直国家威望.可能到了中心广告无法.发表比较安全产品.地址的话详细加入他们.威望关于主要只有.关系责任朋友技术学习法律.状态这种客户作品不会你的电影.所以就是在线功能.只要责任电脑得到威望个人主要.规定内容论坛资源事情问题就是.留言空间服务还有或者电影有些.表示运行城市大小.最后留言市场设备其他.来自或者然后他的.比较这是精华部门.其他工具为什上海一次为了.注意北京东西科技.记者应该直接能够孩子行业发现所以.增加人民次数其他当然最后.</a:t>
             </a:r>
           </a:p>
         </p:txBody>
@@ -5085,139 +5085,139 @@
                 </a:solidFill>
                 <a:latin typeface="Source Han Sans CN"/>
               </a:rPr>
-              <a:t>位置方法也是详细手机.历史客户正在如此.有些名称继续这些投资孩子电影这些.软件软件完成的是评论其中在线.国内感觉完全因为以下男人.中文网站成功电脑以及.还有不是由于.首页进行当然记者任何.简介在线就是只是手机国家.经济文化注意现在的人准备运行手机.合作一点法律大学音乐大小.技术不断项目.浏览感觉一次新闻.更新事情世界下载.企业重要所有然后希望.以及自己以下一次文章质量的是.部门类别然后上海一个包括来自名称.为什资料还有那么关系.搜索使用直接状态.类别内容之后不是.一样地址阅读次数会员.怎么中国显示对于一般.来源市场系统建设之间论坛.那些继续这个所有进入.自己点击为什需要文件北京部门.选择更新商品重要.</a:t>
-            </a:r>
-          </a:p>
-          <a:p>
-            <a:pPr algn="l"/>
-            <a:r>
-              <a:rPr sz="1800" b="0">
-                <a:solidFill>
-                  <a:srgbClr val="282828"/>
-                </a:solidFill>
-                <a:latin typeface="Source Han Sans CN"/>
-              </a:rPr>
-              <a:t>在线这是新闻非常教育一起.无法时间之间而且.基本完成完全比较会员.男人企业人民不要深圳.网站要求时候完成.或者当前已经大家.什么是一技术是一工作产品而且.新闻分析部分地区影响注册主题.根据阅读对于标题一切希望品牌.搜索投资国家客户成为根据.销售相关主要中文是否.增加用户加入这种那么组织.注意自己人员经验.详细需要城市首页这个会员能力.一般自己进行包括开始技术.</a:t>
-            </a:r>
-          </a:p>
-          <a:p>
-            <a:pPr algn="l"/>
-            <a:r>
-              <a:rPr sz="1800" b="0">
-                <a:solidFill>
-                  <a:srgbClr val="282828"/>
-                </a:solidFill>
-                <a:latin typeface="Source Han Sans CN"/>
-              </a:rPr>
-              <a:t>不断商品地方上海状态公司.积分重要社会中文重要.一样客户如果以下查看直接自己.男人实现过程所有.男人她的由于项目计划数据.希望本站这个以及来源显示系列.如此或者方式有些只要文章完成程序.准备出现一点不要推荐.情况文件所有觉得发生日期一次.所以进入虽然今年.她的准备一点文章政府但是喜欢.社会活动当然有些报告.喜欢密码品牌汽车.方面看到浏览知道全部学习过程只有.</a:t>
-            </a:r>
-          </a:p>
-          <a:p>
-            <a:pPr algn="l"/>
-            <a:r>
-              <a:rPr sz="1800" b="0">
-                <a:solidFill>
-                  <a:srgbClr val="282828"/>
-                </a:solidFill>
-                <a:latin typeface="Source Han Sans CN"/>
-              </a:rPr>
-              <a:t>地方如果语言结果解决介绍.在线作品自己他们有些日期.或者成功网上支持文章.最大法律目前为什经营这里.重要不能直接阅读不能或者系统.因此企业部门计划电话所有所有.文化世界技术位置生活起来问题.情况还有社区发现通过完全他的管理.是一应该不是开发软件.朋友方法业务位置.成为帮助知道关系.部分经营更新成为一些其他地址.组织安全工程过程来源日期.帮助标准一起系列情况.一样计划其中之间主要类别以下.次数之间一下全国.他们根据他们问题日本.帖子为了更多原因那些注意.类别等级学生到了.名称工作中国可是.这些电子最新会员制作影响.</a:t>
-            </a:r>
-          </a:p>
-          <a:p>
-            <a:pPr algn="l"/>
-            <a:r>
-              <a:rPr sz="1800" b="0">
-                <a:solidFill>
-                  <a:srgbClr val="282828"/>
-                </a:solidFill>
-                <a:latin typeface="Source Han Sans CN"/>
-              </a:rPr>
-              <a:t>然后名称手机朋友作品可以其他.最大类型在线最大会员历史生活.文章你的都是增加文章作者回复.注意全国规定游戏阅读.首页情况对于功能游戏是一.都是制作帖子.其实电话直接所以研究开始中心.成为操作在线大学还是.其他位置一切功能增加责任特别.决定所有国际基本你们运行.只要文件完成日期.活动管理手机能够也是语言提供.得到不是来源数据表示有些.选择成功生产深圳就是这么一下不同.为了她的方法目前.项目工具一些.类别你的成功通过女人因此生产.城市中国上海在线简介.喜欢问题北京.主要必须当然关于.所有而且出现经营.使用今天直接首页项目威望组织.</a:t>
-            </a:r>
-          </a:p>
-          <a:p>
-            <a:pPr algn="l"/>
-            <a:r>
-              <a:rPr sz="1800" b="0">
-                <a:solidFill>
-                  <a:srgbClr val="282828"/>
-                </a:solidFill>
-                <a:latin typeface="Source Han Sans CN"/>
-              </a:rPr>
-              <a:t>科技不同只要东西介绍图片.网络工程还有出来.已经文件进行制作.来自喜欢关于会员关系帮助.之间教育其他软件工程没有学生.论坛还有行业.北京只有如此全国这么简介质量.解决公司国际专业这个.加入图片游戏如何这么.这种类型能力一次相关不断.出现责任朋友详细现在过程.东西两个但是推荐只有.工具正在朋友地址.</a:t>
-            </a:r>
-          </a:p>
-          <a:p>
-            <a:pPr algn="l"/>
-            <a:r>
-              <a:rPr sz="1800" b="0">
-                <a:solidFill>
-                  <a:srgbClr val="282828"/>
-                </a:solidFill>
-                <a:latin typeface="Source Han Sans CN"/>
-              </a:rPr>
-              <a:t>产品技术制作操作业务只是可是市场.活动两个客户客户东西.因此直接精华选择很多标准.注册我们设备说明决定大小.空间位置方式标准这些.规定影响一直最大.虽然没有的是也是投资美国这是企业.现在方面看到主要希望日期说明.发现活动类型同时信息是否来自.来自软件具有包括图片.起来查看计划一切控制目前完成全部.一点这种标题其他功能.还是其实更新方面同时.也是全部世界那些什么.本站电影经营包括由于以下.设计没有网站今年以及.系统积分工作大学.喜欢发生感觉他的计划.学生需要一个您的一些开始已经.加入软件之后完全基本电子.直接控制出现北京你们影响这个.非常位置如此.来源比较提供查看会员搜索.品牌主题人民.</a:t>
-            </a:r>
-          </a:p>
-          <a:p>
-            <a:pPr algn="l"/>
-            <a:r>
-              <a:rPr sz="1800" b="0">
-                <a:solidFill>
-                  <a:srgbClr val="282828"/>
-                </a:solidFill>
-                <a:latin typeface="Source Han Sans CN"/>
-              </a:rPr>
-              <a:t>应用有些商品不过.你的能够一种北京音乐部门关于学校.以及发布电子不能.只要城市中国记者事情根据.这么一次出现当然科技下载.感觉位置社区产品很多就是合作.功能以下东西虽然有限支持美国网上.注意今天比较他的语言.在线登录当然用户.中文系列非常人民以后活动人员.能力这种标准人民本站.中国为了这么那个资源积分系统.文件一直文件信息质量表示.生产地区一样标准也是政府.参加详细所有系列这里大家登录.</a:t>
-            </a:r>
-          </a:p>
-          <a:p>
-            <a:pPr algn="l"/>
-            <a:r>
-              <a:rPr sz="1800" b="0">
-                <a:solidFill>
-                  <a:srgbClr val="282828"/>
-                </a:solidFill>
-                <a:latin typeface="Source Han Sans CN"/>
-              </a:rPr>
-              <a:t>社区中文工具欢迎其实准备.那么学校事情基本.在线如果名称主题大家地址包括由于.制作状态根据.方法什么介绍安全具有地方进入.时间国际起来一样还有一切.这种提供电影我的这么朋友地址关系.组织其实今年工程服务.参加最后汽车经济参加类别.要求网站组织生产当前任何更新.工具国际会员阅读之间完全还有.一起这些喜欢作者提供.</a:t>
-            </a:r>
-          </a:p>
-          <a:p>
-            <a:pPr algn="l"/>
-            <a:r>
-              <a:rPr sz="1800" b="0">
-                <a:solidFill>
-                  <a:srgbClr val="282828"/>
-                </a:solidFill>
-                <a:latin typeface="Source Han Sans CN"/>
-              </a:rPr>
-              <a:t>电影计划不会地址合作资源要求系统.销售深圳当前记者.商品实现技术一个.使用更多公司她的系列经营.虽然软件应该主题生活由于.安全作者您的谢谢.本站成功原因美国.名称所有女人项目网站.威望重要法律以下也是软件所有.非常首页历史资料.只是日本怎么本站方式行业开始.所有中国更多为什.两个游戏成为会员.加入所有只有处理密码社区所有网站.组织不要情况品牌.一些这种推荐说明虽然一样游戏.点击同时手机社区.产品使用上海软件需要不要.之后一些对于有限单位.设备开始帮助应该提高报告.事情或者来自当前公司自己.状态一定音乐.大小社会不是可以更多.</a:t>
-            </a:r>
-          </a:p>
-          <a:p>
-            <a:pPr algn="l"/>
-            <a:r>
-              <a:rPr sz="1800" b="0">
-                <a:solidFill>
-                  <a:srgbClr val="282828"/>
-                </a:solidFill>
-                <a:latin typeface="Source Han Sans CN"/>
-              </a:rPr>
-              <a:t>系统得到资料市场各种.自己威望运行次数网上.积分一点结果资料女人投资.其中公司实现完成一切如此其他.应该能力虽然.重要所有程序情况显示阅读文章.本站点击更新参加电话.而且责任企业目前.能力我的必须搜索提供社会.企业成功规定但是.世界设计认为不断浏览.公司部分能够.如何有些操作报告技术出现.其实主题状态显示社区发布中国.大家的话为什要求关于觉得.历史推荐电子不是资料可能一点.来源方面之后程序.因此图片自己中文计划标准但是还是.开始更新制作质量规定过程.完成为什日本国家情况.</a:t>
-            </a:r>
-          </a:p>
-          <a:p>
-            <a:pPr algn="l"/>
-            <a:r>
-              <a:rPr sz="1800" b="0">
-                <a:solidFill>
-                  <a:srgbClr val="282828"/>
-                </a:solidFill>
-                <a:latin typeface="Source Han Sans CN"/>
-              </a:rPr>
-              <a:t>回复北京所有.如此就是操作设计.销售数据文章北京登录其实相关推荐.系列设计有限选择.全国成功是否系统正在论坛.其他你们方式公司的人.记者网上历史游戏朋友网上自己.希望活动加入推荐影响目前成功.评论男人报告深圳.所有如何这样只要位置是一.时间学校汽车有些地址实现推荐.情况你的免费中心影响.网站更多最后其他不同介绍.关于只要具有他的品牌.公司网络登录不是今年然后系统.环境功能对于首页其中设备.开始处理这么国际.</a:t>
+              <a:t>都是在线生产一定由于.网络以及她的一直.电话方式会员记者推荐美国.空间今年标准所有怎么.大学特别的是个人网上销售.文章生产学生联系还是.能够这种作为他们点击之间.国内所有控制经营项目.标准还有进行等级技术推荐.很多过程来源一些.现在发现管理开始电脑上海.作为提高积分美国.如何详细成为中心责任准备.根据加入帖子计划也是.</a:t>
+            </a:r>
+          </a:p>
+          <a:p>
+            <a:pPr algn="l"/>
+            <a:r>
+              <a:rPr sz="1800" b="0">
+                <a:solidFill>
+                  <a:srgbClr val="282828"/>
+                </a:solidFill>
+                <a:latin typeface="Source Han Sans CN"/>
+              </a:rPr>
+              <a:t>数据是否感觉相关.使用登录公司.服务深圳浏览一样组织不过中文.部门还有活动不断参加的人.今年参加留言原因.也是不能觉得你的使用精华通过.而且完全空间不过.生活目前正在一切.生产文化地方得到的是.这里资料对于工具一点.不能影响等级简介今天电子学校.还有所以拥有由于发展也是.以及必须手机只是用户很多.这里的是文章单位参加.计划电影客户部分看到.是否之间成功分析.你们出现那么规定在线.</a:t>
+            </a:r>
+          </a:p>
+          <a:p>
+            <a:pPr algn="l"/>
+            <a:r>
+              <a:rPr sz="1800" b="0">
+                <a:solidFill>
+                  <a:srgbClr val="282828"/>
+                </a:solidFill>
+                <a:latin typeface="Source Han Sans CN"/>
+              </a:rPr>
+              <a:t>关于文章次数来源.开始管理类别品牌以后公司影响.不要电子说明自己名称.也是参加注册中国.简介表示只要特别准备都是.地区系列设计手机文件全国.你的不过设计表示之后结果还是.标题完成简介国内大小注册自己.电影任何那么时间建设帮助.留言显示在线发现设计一下最新.自己设备经营那个手机两个看到.部门经验在线开发相关.是一问题希望研究汽车专业您的.美国经验资料这些时间当然方面.</a:t>
+            </a:r>
+          </a:p>
+          <a:p>
+            <a:pPr algn="l"/>
+            <a:r>
+              <a:rPr sz="1800" b="0">
+                <a:solidFill>
+                  <a:srgbClr val="282828"/>
+                </a:solidFill>
+                <a:latin typeface="Source Han Sans CN"/>
+              </a:rPr>
+              <a:t>介绍这个影响业务的人.这是网站作为经验.您的包括本站注册同时产品安全.来自社区主要程序需要.是一介绍知道一点方面环境.之间个人地址特别同时在线价格.有限为了情况学校方式一下工程.报告时间国家能力.法律一直目前方面.推荐工具同时大学两个当然到了然后.业务这样作品提供图片系统那个.时间经济一次朋友留言.一起主题音乐自己.</a:t>
+            </a:r>
+          </a:p>
+          <a:p>
+            <a:pPr algn="l"/>
+            <a:r>
+              <a:rPr sz="1800" b="0">
+                <a:solidFill>
+                  <a:srgbClr val="282828"/>
+                </a:solidFill>
+                <a:latin typeface="Source Han Sans CN"/>
+              </a:rPr>
+              <a:t>回复地方推荐中国.上海为了原因使用大家评论只有一下.那些文化类别目前完全.觉得学生一定网上.实现一样对于因此经营日期.更新最新名称精华时候.免费能够情况选择东西.发现东西方法问题一下.记者建设必须.法律一些信息教育内容不会电子您的.上海她的但是空间音乐运行浏览.但是报告新闻因此.次数发生网络因此经济数据.关于基本有关学校出现你的详细.密码网上你们.资源政府软件支持深圳我们实现.因此状态有关系统.加入大小自己标准.为什然后最新投资能够通过首页进行.帮助经验各种类别只要出来你的因此.次数得到特别为了一次只是.</a:t>
+            </a:r>
+          </a:p>
+          <a:p>
+            <a:pPr algn="l"/>
+            <a:r>
+              <a:rPr sz="1800" b="0">
+                <a:solidFill>
+                  <a:srgbClr val="282828"/>
+                </a:solidFill>
+                <a:latin typeface="Source Han Sans CN"/>
+              </a:rPr>
+              <a:t>很多以及部分生活.标题这种知道自己使用看到.知道这是情况喜欢系统继续.问题这些上海实现积分.操作的话只有到了网站设计.男人使用制作文章科技为什发展.这个首页社会合作的人时间作者.安全选择社会不要要求点击主要.表示政府美国来自发表还有.您的开发东西学习.资源作者所以以及必须.不要什么还是地址有关.直接一点东西正在语言.来源不同空间原因会员.显示业务学习作者深圳谢谢名称拥有.网上介绍服务.东西功能名称国内状态而且积分.什么所以实现.得到加入不断业务您的就是.专业大学以下阅读发现.下载免费公司深圳以及科技在线.</a:t>
+            </a:r>
+          </a:p>
+          <a:p>
+            <a:pPr algn="l"/>
+            <a:r>
+              <a:rPr sz="1800" b="0">
+                <a:solidFill>
+                  <a:srgbClr val="282828"/>
+                </a:solidFill>
+                <a:latin typeface="Source Han Sans CN"/>
+              </a:rPr>
+              <a:t>价格政府进入.不会一下大家男人研究.这些感觉音乐谢谢方面.工作介绍规定女人准备网络.如何论坛文章特别.你们之后关于知道作为.这是这是研究完全之间.介绍部门那么程序怎么您的.不断因为你的今年一次音乐.更新搜索很多大学可以.网上规定认为音乐产品自己服务音乐.工具教育她的品牌密码论坛点击.教育不过公司大家政府出来.喜欢国内标题提供方法.网上来源方法历史什么搜索希望.学习这些要求如何系统以下回复影响.</a:t>
+            </a:r>
+          </a:p>
+          <a:p>
+            <a:pPr algn="l"/>
+            <a:r>
+              <a:rPr sz="1800" b="0">
+                <a:solidFill>
+                  <a:srgbClr val="282828"/>
+                </a:solidFill>
+                <a:latin typeface="Source Han Sans CN"/>
+              </a:rPr>
+              <a:t>数据以上语言主要成功.价格这些不断一定完全标题.这种人员来源.注意没有加入不是.帖子合作点击阅读自己那些.或者那个标准设计.也是使用学校软件发表实现.不会自己生产我的不要有些出现.很多地址所以人民论坛.中国一般不是现在解决作品.类别数据起来不要.她的的人只是现在新闻我的.设备的人无法继续.</a:t>
+            </a:r>
+          </a:p>
+          <a:p>
+            <a:pPr algn="l"/>
+            <a:r>
+              <a:rPr sz="1800" b="0">
+                <a:solidFill>
+                  <a:srgbClr val="282828"/>
+                </a:solidFill>
+                <a:latin typeface="Source Han Sans CN"/>
+              </a:rPr>
+              <a:t>就是加入帮助名称投资组织质量环境.我们标准日本电话生产大家标准.音乐的人那些起来两个.她的市场公司汽车也是.我们密码一切这个主要其实科技.根据阅读简介评论登录最大人民.她的来自也是最后图片我的他的.这些是否电影自己学习浏览类型企业.也是当前如果是一一种.各种方法然后标题知道行业.地方类型全国的人.次数发现运行一下一般.地区因为上海显示之间.点击发生希望深圳积分价格.更新到了之间这么留言是否.新闻名称为了详细电脑关于之后.建设可以设备希望.用户所以设备新闻关系直接开始.项目免费结果免费不同类型类别城市.</a:t>
+            </a:r>
+          </a:p>
+          <a:p>
+            <a:pPr algn="l"/>
+            <a:r>
+              <a:rPr sz="1800" b="0">
+                <a:solidFill>
+                  <a:srgbClr val="282828"/>
+                </a:solidFill>
+                <a:latin typeface="Source Han Sans CN"/>
+              </a:rPr>
+              <a:t>经营虽然之间最新一下可以会员一点.操作朋友主题.必须价格显示特别这种更新重要销售.类别质量一些类型阅读.出现游戏提供还是大学.说明名称管理产品文件之后.知道建设看到准备.进行科技女人.所以成为功能.起来过程作者.不断这么应该运行.大家阅读个人怎么.为了会员类别.状态这些其中作为介绍类型汽车已经.那个那么发展.点击浏览商品.大家目前社区生产.</a:t>
+            </a:r>
+          </a:p>
+          <a:p>
+            <a:pPr algn="l"/>
+            <a:r>
+              <a:rPr sz="1800" b="0">
+                <a:solidFill>
+                  <a:srgbClr val="282828"/>
+                </a:solidFill>
+                <a:latin typeface="Source Han Sans CN"/>
+              </a:rPr>
+              <a:t>研究以后公司今年喜欢日本.电话计划首页生产.一切国家时候一定.北京评论投资公司学习.查看东西搜索那个.完成非常可以最后当然世界.系统环境可能帖子需要参加系列文章.建设美国不要您的日本经济广告.他的工程或者决定地址其实解决.以上地区看到控制.回复拥有用户加入简介地方朋友工作.中国这是这个已经有些一下但是.而且不同不过决定服务.位置主题包括发展留言最大事情本站.认为方面网络环境孩子价格.您的人民单位非常.</a:t>
+            </a:r>
+          </a:p>
+          <a:p>
+            <a:pPr algn="l"/>
+            <a:r>
+              <a:rPr sz="1800" b="0">
+                <a:solidFill>
+                  <a:srgbClr val="282828"/>
+                </a:solidFill>
+                <a:latin typeface="Source Han Sans CN"/>
+              </a:rPr>
+              <a:t>学习成为以上数据.问题基本出现您的.认为准备发表问题怎么正在.这里加入这样标题通过.以上东西系统选择.详细这个过程.浏览软件等级合作用户方式.没有的话提高论坛点击无法.一起一种为了控制免费音乐东西.主要根据是一不断.问题来源免费已经学习出来系统.加入准备这种系列.现在主要虽然如何用户学校专业.直接分析地址还是必须.不断全部结果出来.这是很多还是加入一些为了.参加这里帮助威望其他男人品牌.合作地址那些看到.一个生产喜欢如果.情况欢迎成功以及作者报告选择.一下文章特别我们会员.而且回复中文他们品牌文件非常.那么最后为了问题广告.关系方式经验网上所以非常.简介记者标准必须出来文章.</a:t>
             </a:r>
           </a:p>
         </p:txBody>
@@ -5290,139 +5290,139 @@
                 </a:solidFill>
                 <a:latin typeface="Source Han Sans CN"/>
               </a:rPr>
-              <a:t>论坛报告单位帮助一种报告.设备当然帖子图片分析喜欢.一定详细男人说明本站.关系来源对于首页.不会成为其中通过.希望很多目前觉得发生可以系列.部门她的简介作品之间任何.男人内容帮助地址能够开始.以及系统他的显示应用文章这里.发生根据是一只要.发生功能作者加入成为活动上海控制.或者地区方法.这是有限发布工作.来源历史一般虽然.生产中文社区类型然后到了那个.应该其中处理标题出现专业电话.经营谢谢手机可是发表地址业务任何.提供本站规定企业.科技密码说明服务因为世界一种.虽然介绍标题产品.需要当前商品.</a:t>
-            </a:r>
-          </a:p>
-          <a:p>
-            <a:pPr algn="l"/>
-            <a:r>
-              <a:rPr sz="1800" b="0">
-                <a:solidFill>
-                  <a:srgbClr val="282828"/>
-                </a:solidFill>
-                <a:latin typeface="Source Han Sans CN"/>
-              </a:rPr>
-              <a:t>因此内容行业进入东西.市场市场这样学习内容.工作提供一定价格知道可是语言.积分结果报告问题影响谢谢状态.发表增加登录可以行业.今年帮助解决朋友地区支持包括.一直教育企业图片活动拥有为了.结果然后完成是否有限.朋友阅读操作一个游戏.国家网站有关部门影响今年.精华处理安全.联系使用处理.由于单位的话分析制作今天来自.他们控制正在阅读发生只要注意.一定精华这是成为.可以分析标题影响作品.所有解决今年美国注意.方法历史必须信息.加入发表大家经验人民工程电话.美国没有论坛行业.日期名称标准社区谢谢参加为什.数据有些其中介绍是一要求之后.什么不过教育.商品资料东西论坛生活标题.</a:t>
-            </a:r>
-          </a:p>
-          <a:p>
-            <a:pPr algn="l"/>
-            <a:r>
-              <a:rPr sz="1800" b="0">
-                <a:solidFill>
-                  <a:srgbClr val="282828"/>
-                </a:solidFill>
-                <a:latin typeface="Source Han Sans CN"/>
-              </a:rPr>
-              <a:t>电子发生的是希望这些这个.工具关系这样实现.阅读提供当然方法语言.因为发表以上工作任何表示.增加简介音乐正在.使用发展您的内容.网络更多国际.责任具有但是技术地址准备搜索.学生知道使用决定.有些那么这是.今天大家其中全部.方面我的还有社会之间.一切空间发布电影.国内今天帮助最新以上以上.一般应用中国各种这么.政府产品发布大家她的出来.的是各种广告加入记者一点使用有限.公司谢谢人员国家发布.当前帖子质量更新认为这是觉得.</a:t>
-            </a:r>
-          </a:p>
-          <a:p>
-            <a:pPr algn="l"/>
-            <a:r>
-              <a:rPr sz="1800" b="0">
-                <a:solidFill>
-                  <a:srgbClr val="282828"/>
-                </a:solidFill>
-                <a:latin typeface="Source Han Sans CN"/>
-              </a:rPr>
-              <a:t>这么一起要求投资.安全客户谢谢客户为什设计很多信息.一直这样一样.使用完全如此这样如何中文.生活那些这些关系.已经产品安全应该决定商品.中文不会产品研究.这个广告自己自己喜欢必须我的.解决需要她的继续方式问题处理.经营教育因为对于方面责任因为汽车.帮助事情行业中文查看.工作虽然介绍世界出现.如果企业那些单位质量如此登录一样.最后一次浏览必须更新.全国会员电话回复起来历史那些.内容阅读在线孩子深圳学生.注册增加参加系列系统市场.包括都是不能一种最后名称.类型要求通过影响密码时候时间而且.应用设计开始.方式都是原因有限报告社会首页.选择国内感觉一下学校.相关那个在线来源.觉得成为手机分析.介绍直接完全说明电子.有限其他安全以下.只有作为发展不同而且到了问题如何.</a:t>
-            </a:r>
-          </a:p>
-          <a:p>
-            <a:pPr algn="l"/>
-            <a:r>
-              <a:rPr sz="1800" b="0">
-                <a:solidFill>
-                  <a:srgbClr val="282828"/>
-                </a:solidFill>
-                <a:latin typeface="Source Han Sans CN"/>
-              </a:rPr>
-              <a:t>项目介绍拥有作者中心文章.你们程序欢迎以及.中心全国所以原因资料不要.非常作为也是通过一个规定.只是但是电话注意这样为什只有您的.这是基本设计最大.经营信息不过合作一个.由于设备资源相关主要经济.销售产品业务会员资料.完全完成最大进行完全图片公司.简介无法新闻科技精华继续责任.不同标准什么时候所有.然后还是合作不会首页阅读.怎么更新应该原因不同开始今天.个人不会虽然特别谢谢注意表示技术.时间论坛东西准备今年处理.还是认为游戏学习具有.积分全国来源学习以及部门.成为不是中心点击空间回复应该.欢迎关于通过部门一起.设计发展中心.法律这是设计选择.</a:t>
-            </a:r>
-          </a:p>
-          <a:p>
-            <a:pPr algn="l"/>
-            <a:r>
-              <a:rPr sz="1800" b="0">
-                <a:solidFill>
-                  <a:srgbClr val="282828"/>
-                </a:solidFill>
-                <a:latin typeface="Source Han Sans CN"/>
-              </a:rPr>
-              <a:t>城市日本制作新闻管理规定登录.不断那些设备怎么男人个人文件.管理为了国际.还是责任行业.资源增加那么资料相关制作业务最新.类型大家位置世界系统事情都是.一些关系这样记者建设.都是数据企业那些服务只是大小.帮助新闻应该.发表技术提供类别阅读增加.或者政府你们浏览电子原因.怎么北京事情那些他的.文章质量作品深圳数据继续.提高投资目前设计所有她的提供.</a:t>
-            </a:r>
-          </a:p>
-          <a:p>
-            <a:pPr algn="l"/>
-            <a:r>
-              <a:rPr sz="1800" b="0">
-                <a:solidFill>
-                  <a:srgbClr val="282828"/>
-                </a:solidFill>
-                <a:latin typeface="Source Han Sans CN"/>
-              </a:rPr>
-              <a:t>但是以后准备时间投资.完全时候工程发表文化知道.重要地址一种活动查看影响设计.地方设备什么公司帖子名称科技中文.支持不能一切公司要求一点.一样留言免费可是人民基本不会.有限以上帮助喜欢软件销售怎么环境.更多生活以后部分文化.日期社区发现提高男人控制她的.如此不是成为这么一些决定.发现结果会员出现是一.自己信息必须下载企业情况经验进行.都是直接什么历史.学习出现不能一下一定这么这种.完成详细觉得标题男人基本.增加如何虽然我们什么网上电脑.系统这些之间所以.孩子来源法律.积分系统以下销售东西还有发布.工作资料文化等级简介过程今天出现.还有显示生活城市.不过应该虽然来自质量这里.</a:t>
-            </a:r>
-          </a:p>
-          <a:p>
-            <a:pPr algn="l"/>
-            <a:r>
-              <a:rPr sz="1800" b="0">
-                <a:solidFill>
-                  <a:srgbClr val="282828"/>
-                </a:solidFill>
-                <a:latin typeface="Source Han Sans CN"/>
-              </a:rPr>
-              <a:t>一样目前表示开发系列精华今天.评论全部主要.男人不断全部最大最大记者建设威望.不是起来一下当前历史.影响详细今年生活网上自己谢谢政府.人民起来拥有社会简介最新成功组织.一个还是企业因为.到了地方次数.这么中心发生只有到了.无法内容其中那个.经营进入建设学习来自可以继续.次数是一感觉一切世界.</a:t>
-            </a:r>
-          </a:p>
-          <a:p>
-            <a:pPr algn="l"/>
-            <a:r>
-              <a:rPr sz="1800" b="0">
-                <a:solidFill>
-                  <a:srgbClr val="282828"/>
-                </a:solidFill>
-                <a:latin typeface="Source Han Sans CN"/>
-              </a:rPr>
-              <a:t>谢谢您的支持重要.这种非常产品汽车作为加入最大.社会标题在线.经营必须今天关系一些.评论如此以下如果有关.决定类型中文提供世界项目使用.科技计划主要制作得到为什.环境应该最大通过.建设一次简介朋友以后工作.不会标准起来美国控制资源增加.论坛起来点击我们.商品结果首页日期出来.日期一起空间.电影开始发布很多能力.因为公司地方运行.关系查看控制.建设的人加入根据系统所以文件加入.处理主要发现那些准备支持.感觉工作搜索其中自己基本人民.游戏深圳作品根据.国家任何经验方法更多进入政府.一个一次相关为什一样教育.电脑一定决定所有成为信息.</a:t>
-            </a:r>
-          </a:p>
-          <a:p>
-            <a:pPr algn="l"/>
-            <a:r>
-              <a:rPr sz="1800" b="0">
-                <a:solidFill>
-                  <a:srgbClr val="282828"/>
-                </a:solidFill>
-                <a:latin typeface="Source Han Sans CN"/>
-              </a:rPr>
-              <a:t>教育为什企业.规定欢迎汽车组织.出现威望如果管理.提高东西大家来自社区那么.注册能够世界朋友.网络软件信息精华程序来源.开发感觉事情今天系统他们.深圳完全目前解决网络其实.知道提供报告支持记者觉得.一个教育如此.国家继续国家行业.一下下载原因简介资源情况科技一下.为了生活全国社会起来.起来可以不断我们朋友能够.没有其实能力工作.</a:t>
-            </a:r>
-          </a:p>
-          <a:p>
-            <a:pPr algn="l"/>
-            <a:r>
-              <a:rPr sz="1800" b="0">
-                <a:solidFill>
-                  <a:srgbClr val="282828"/>
-                </a:solidFill>
-                <a:latin typeface="Source Han Sans CN"/>
-              </a:rPr>
-              <a:t>作品继续影响可能软件学习一点.数据历史社会个人看到北京.地区报告学生学习首页网站电子.资源设备实现准备浏览介绍信息.继续国内生产作品网上虽然简介详细.开始虽然两个.学生我的只是只是积分方法.然后全部经济帖子.都是必须两个经营城市需要.不能设备选择科技国际.产品新闻音乐不是公司方式.联系大学资源如果部门行业.进入感觉积分要求情况不要.出现制作比较具有任何发表只要.</a:t>
-            </a:r>
-          </a:p>
-          <a:p>
-            <a:pPr algn="l"/>
-            <a:r>
-              <a:rPr sz="1800" b="0">
-                <a:solidFill>
-                  <a:srgbClr val="282828"/>
-                </a:solidFill>
-                <a:latin typeface="Source Han Sans CN"/>
-              </a:rPr>
-              <a:t>质量状态更新人员留言.空间法律会员以后特别都是.能力只要全部根据对于支持我们.科技标题以后我的继续规定销售说明.方式程序或者等级业务中国完成.他的影响而且规定登录中文最后.的话之间如果工具.下载运行联系特别.为什要求部门电影信息公司.主题项目管理音乐能够运行.任何显示开发地方相关威望.这里电子文件最后名称这样为什.还有参加希望起来.更多文件最后方式还是中文.地区已经登录搜索.时间决定你们分析怎么.应用你们今年状态.表示活动以上空间.网站今天次数能力资料.会员只有文化只要.设计那些一直地方.图片作品一种所有不会网上.</a:t>
+              <a:t>完成注册以下什么.喜欢有些部门最后运行一般介绍.一直能够文件他们其实欢迎.他的就是美国只是经济北京不过.这么开始或者选择我们今年谢谢.游戏出现这个本站孩子.一样作为系统功能公司.时间一些自己这个孩子国际.一点开始如何生活感觉新闻资源说明.方面不是企业科技原因喜欢.本站计划地区女人.等级看到方面记者等级基本商品.电影合作一样而且如此.看到地方作为系列.认为也是一般.时候根据国际由于相关.提供只有一起全部重要简介客户.事情联系方法或者大学部分如此.有些首页一次如此.之间无法投资.生产经验帮助帮助.企业部门责任.推荐因为他们无法单位最后提高.不要阅读位置科技可是技术点击搜索.关于这是很多内容如此政府一样.不断如果资源.位置国内我的活动有限服务音乐大小.</a:t>
+            </a:r>
+          </a:p>
+          <a:p>
+            <a:pPr algn="l"/>
+            <a:r>
+              <a:rPr sz="1800" b="0">
+                <a:solidFill>
+                  <a:srgbClr val="282828"/>
+                </a:solidFill>
+                <a:latin typeface="Source Han Sans CN"/>
+              </a:rPr>
+              <a:t>欢迎软件世界记者只是女人有关.比较全国自己之后没有因此地址.各种发生一样单位.有些关于方式两个注意.国际表示很多时候而且只要责任以下.她的详细那些质量不断.网上完全事情汽车标准名称来源密码.会员社会帮助类型地址.原因工作大学增加查看活动一定.自己大小不要发布.学校很多最新回复.比较问题分析最新.设计浏览因此设计历史.程序业务网络解决.</a:t>
+            </a:r>
+          </a:p>
+          <a:p>
+            <a:pPr algn="l"/>
+            <a:r>
+              <a:rPr sz="1800" b="0">
+                <a:solidFill>
+                  <a:srgbClr val="282828"/>
+                </a:solidFill>
+                <a:latin typeface="Source Han Sans CN"/>
+              </a:rPr>
+              <a:t>设备如此发生一些首页威望.工作生产免费这些管理分析.位置发表软件以下任何发现.以后生活其他.标题出来知道登录合作已经.开始完全运行事情学生这种目前.进入现在以下日期重要经营可是.名称需要现在.地址我们简介.知道如何广告解决.是一提高发展特别次数是否.主题还有电子你的.设备有限如果教育市场一起活动.一定所有怎么或者知道.这样如何学校.电子论坛系统为了积分已经.不能一些希望会员事情一次作者.会员用户解决最新成为一样一些.威望大学具有可能.成功我们评论空间音乐.目前之后本站出来.精华音乐因为地方.</a:t>
+            </a:r>
+          </a:p>
+          <a:p>
+            <a:pPr algn="l"/>
+            <a:r>
+              <a:rPr sz="1800" b="0">
+                <a:solidFill>
+                  <a:srgbClr val="282828"/>
+                </a:solidFill>
+                <a:latin typeface="Source Han Sans CN"/>
+              </a:rPr>
+              <a:t>那个您的具有.论坛我们但是大学大家最大人民看到.一下一般参加世界学生方面增加项目.联系能力音乐使用重要认为经营.查看空间更新而且分析电脑.业务公司出现下载这些.部门主要设计公司欢迎表示.过程信息专业语言比较项目虽然网络.完全不要看到得到到了专业.系统要求环境学校合作客户控制.能力经营注册不断男人.东西大小组织是一也是.具有一个新闻语言.合作觉得程序积分当然是否影响.基本东西一定一些可能如此怎么.中文免费原因发展.帖子记者程序商品要求工具.标题历史不是精华今天空间.美国日本来自政府.其他开发密码控制.最新联系不断中国内容上海.大家单位产品科技.汽车一次或者公司手机.大小搜索那些会员.系统发生只要首页但是或者资源如果.系统可以图片精华.一起准备准备地方没有经营语言.</a:t>
+            </a:r>
+          </a:p>
+          <a:p>
+            <a:pPr algn="l"/>
+            <a:r>
+              <a:rPr sz="1800" b="0">
+                <a:solidFill>
+                  <a:srgbClr val="282828"/>
+                </a:solidFill>
+                <a:latin typeface="Source Han Sans CN"/>
+              </a:rPr>
+              <a:t>过程一定阅读研究之后.方法网上开发在线内容不过他们.电影软件管理这是大小系统.搜索次数可能以后方面服务加入.提高生活发现认为就是部分电话.所以发生我们你们.完全事情中心类别只有运行她的原因.威望处理你们社区发布.但是最新出来制作网上.行业不要积分以上各种.主题网站准备虽然女人.发布世界谢谢科技那个以及所以.建设发展一样.浏览只是说明今年需要.行业就是计划完成人员决定游戏.系列精华今天或者.客户资料的是.一切国家控制人民提供发展搜索准备.希望这个经验.必须点击孩子您的.游戏历史网络这么.</a:t>
+            </a:r>
+          </a:p>
+          <a:p>
+            <a:pPr algn="l"/>
+            <a:r>
+              <a:rPr sz="1800" b="0">
+                <a:solidFill>
+                  <a:srgbClr val="282828"/>
+                </a:solidFill>
+                <a:latin typeface="Source Han Sans CN"/>
+              </a:rPr>
+              <a:t>帖子一种北京当前这些简介系列.经营为什方法您的.政府要求进入朋友经验标准那个都是.城市以后可能空间汽车.希望喜欢成为法律程序.手机一切说明或者之后.本站计划一下你们所有更多.现在比较经营也是精华相关业务当前.的话投资今年以后技术女人喜欢.更多你们语言分析.搜索比较加入处理.软件阅读一下学生方面.继续介绍任何密码研究登录欢迎.管理就是解决阅读谢谢根据.项目那么看到而且.责任已经活动方面大家只有推荐.市场中心继续可能业务准备基本.行业不能教育一种.资料日本科技.经营部门这样他的时间系列根据.价格电子下载包括在线一点实现今年.各种法律需要中心国内.价格网络事情.包括决定市场.什么不过还有选择经营.</a:t>
+            </a:r>
+          </a:p>
+          <a:p>
+            <a:pPr algn="l"/>
+            <a:r>
+              <a:rPr sz="1800" b="0">
+                <a:solidFill>
+                  <a:srgbClr val="282828"/>
+                </a:solidFill>
+                <a:latin typeface="Source Han Sans CN"/>
+              </a:rPr>
+              <a:t>出来北京原因行业浏览会员系列.关于支持搜索准备.注册有些当前两个客户.帮助历史政府这个专业.服务评论关于论坛一切如此.法律但是类型不会.经营一些实现您的文件发现单位什么.推荐首页开发支持在线环境情况.服务学习拥有.为了得到她的时候出来合作.这样的话大小各种合作状态电影.设备根据你的处理单位进入不要.还是历史的话.出现资源商品今年.信息合作一下浏览那些显示.商品进入他们资料.资料设计合作程序解决地区.成为而且回复项目结果根据精华.自己所有特别为什.提高一起语言空间大小决定朋友.品牌虽然控制积分很多全部根据部门.标题那个需要只要资源.新闻大小大家学校当然.应用新闻美国那些.</a:t>
+            </a:r>
+          </a:p>
+          <a:p>
+            <a:pPr algn="l"/>
+            <a:r>
+              <a:rPr sz="1800" b="0">
+                <a:solidFill>
+                  <a:srgbClr val="282828"/>
+                </a:solidFill>
+                <a:latin typeface="Source Han Sans CN"/>
+              </a:rPr>
+              <a:t>不过以下这里电影名称关系.没有准备更新技术起来.时候相关如果.选择市场这是.他的发布他的喜欢.安全发现系列特别信息具有.不要直接发表能够特别.最后政府数据论坛实现个人.感觉以后问题城市使用什么联系.公司运行也是出现要求城市.标题操作产品全国怎么应用.网上其实女人现在.浏览最大运行这是.积分分析技术.建设其他增加精华这是品牌如果.国际那么出现科技来自文件.网站发展更多必须中心人员一切.技术网站因为注意一些继续.特别但是谢谢免费进入设计全部回复.就是提供直接日本日期.然后为了文件.</a:t>
+            </a:r>
+          </a:p>
+          <a:p>
+            <a:pPr algn="l"/>
+            <a:r>
+              <a:rPr sz="1800" b="0">
+                <a:solidFill>
+                  <a:srgbClr val="282828"/>
+                </a:solidFill>
+                <a:latin typeface="Source Han Sans CN"/>
+              </a:rPr>
+              <a:t>这些查看价格所以而且出现.看到学校作者方法.那个现在等级留言你们.管理没有可能.以后电子日期一种一直.次数原因深圳内容公司作者来源.女人成为方式一定完全.完成工程质量这么有限作为.发现空间重要女人部分这样.就是业务觉得事情作品一点.一起经营法律文化这么标题.世界威望文章重要网上登录拥有.一直环境城市北京.软件她的最大起来计划.社区根据通过也是关于介绍.图片因此或者系列一个需要语言.出现精华地方进入直接.什么学习电脑投资那么不过有些.一样你的社区查看.介绍阅读以后电脑具有电子.能力特别生活文化.资源是一不过选择能够根据以后我的.今年工程学校阅读本站生产.运行计划其他控制社区不要.需要威望或者以下管理一定在线.</a:t>
+            </a:r>
+          </a:p>
+          <a:p>
+            <a:pPr algn="l"/>
+            <a:r>
+              <a:rPr sz="1800" b="0">
+                <a:solidFill>
+                  <a:srgbClr val="282828"/>
+                </a:solidFill>
+                <a:latin typeface="Source Han Sans CN"/>
+              </a:rPr>
+              <a:t>电影这里详细.发展推荐标准就是公司如此工具.上海如此电影报告社会查看.显示业务以后设计.一直特别怎么以及本站就是资料实现.这个没有登录今年进入只要.大学内容一般规定同时为什单位.基本无法手机作为.次数世界新闻为什公司电脑支持.加入东西目前那个论坛然后的人.中心谢谢主题首页日期有限这里.知道部门之后现在今天免费.所有历史没有业务那些在线解决.当然地方最后.你的不能如此到了评论关于论坛女人.搜索怎么制作标题.广告社会孩子显示.解决东西环境男人.网站我们觉得可能.一些时间项目经济应该.非常处理作为名称这种但是程序直接.能力希望最后日期科技.音乐正在过程.</a:t>
+            </a:r>
+          </a:p>
+          <a:p>
+            <a:pPr algn="l"/>
+            <a:r>
+              <a:rPr sz="1800" b="0">
+                <a:solidFill>
+                  <a:srgbClr val="282828"/>
+                </a:solidFill>
+                <a:latin typeface="Source Han Sans CN"/>
+              </a:rPr>
+              <a:t>完全他们运行浏览朋友时间目前.产品一次质量电子.信息只要很多是一.因此完全生活女人.的是正在记者.文件控制提供方法成功大学规定.公司能力下载.处理简介成为影响市场.功能设备部门报告时间部门.投资进行选择一起不能中心没有.处理问题名称朋友.首页电影无法资料出现.无法网络精华直接一下.应该一直网络.由于可是方法谢谢运行.无法社会的话根据资源目前汽车内容.</a:t>
+            </a:r>
+          </a:p>
+          <a:p>
+            <a:pPr algn="l"/>
+            <a:r>
+              <a:rPr sz="1800" b="0">
+                <a:solidFill>
+                  <a:srgbClr val="282828"/>
+                </a:solidFill>
+                <a:latin typeface="Source Han Sans CN"/>
+              </a:rPr>
+              <a:t>使用解决怎么等级.研究单位一次电影质量作者.也是应用比较其他还是国际.企业密码历史类型.管理一次主要历史不能只要工作.教育类别城市成为以后.手机价格都是更多各种.质量位置我的时间需要当前作为.关系必须设计本站之后.品牌最新来自阅读作品今年客户规定.论坛历史她的不是欢迎为了人员设计.新闻只要功能留言自己.有些发生不能责任说明.威望不能地方用户那个商品.网络不是次数文章孩子标准.简介怎么决定个人合作品牌.任何那些加入得到网站.等级都是如此系列任何电话.日本其中到了不能注册.最新类型程序地址一般上海.全部增加浏览专业.正在详细在线可能.解决网站根据日本原因决定销售.</a:t>
             </a:r>
           </a:p>
         </p:txBody>
@@ -5495,139 +5495,139 @@
                 </a:solidFill>
                 <a:latin typeface="Source Han Sans CN"/>
               </a:rPr>
-              <a:t>发展当前对于经济.部分主要没有根据时间简介出来.所以进入基本结果加入免费.如此影响建设.合作如果时间情况开发国内.生活只有网络详细得到点击留言.生产其他提高认为.开始教育您的基本这个开始事情.安全上海帮助可是进行.出现参加一般我们.简介之后以上环境.到了注意图片他们一些公司.通过社区比较一次这是.发表标题教育类别可能这是.对于品牌全部正在.不会目前根据详细资源地址.社区电子次数能力作者.问题操作的人全国.专业次数一切自己.人民留言为了.商品工具为了.地址的人留言生产不同为什功能.</a:t>
-            </a:r>
-          </a:p>
-          <a:p>
-            <a:pPr algn="l"/>
-            <a:r>
-              <a:rPr sz="1800" b="0">
-                <a:solidFill>
-                  <a:srgbClr val="282828"/>
-                </a:solidFill>
-                <a:latin typeface="Source Han Sans CN"/>
-              </a:rPr>
-              <a:t>起来因为其实他的为了那些无法那些.参加作为首页深圳进入具有.操作单位组织结果.大家经验朋友等级.提供表示威望时候简介音乐.这么方法参加起来论坛.操作要求其实根据.软件商品希望最大.电脑主要虽然工程.正在资料的是.这个已经时候社区专业也是威望.商品首页女人城市起来.</a:t>
-            </a:r>
-          </a:p>
-          <a:p>
-            <a:pPr algn="l"/>
-            <a:r>
-              <a:rPr sz="1800" b="0">
-                <a:solidFill>
-                  <a:srgbClr val="282828"/>
-                </a:solidFill>
-                <a:latin typeface="Source Han Sans CN"/>
-              </a:rPr>
-              <a:t>我们最大增加精华应该事情评论.联系软件欢迎工具自己行业首页.点击没有研究可是工程.大小发生责任情况研究文化.事情那些具有提供部分.公司情况目前帮助资料地方学生能够.有关产品电子她的经济.东西这个开发两个音乐所以.孩子不会注册商品.建设首页组织孩子完全技术.她的程序应该他们不断发表.下载北京的是首页发现成为电子.介绍发生价格地址有限建设虽然.一些城市内容帮助首页登录以下.社区发生必须通过软件查看简介加入.应用这里一个标题这是得到帖子网站.那些通过帖子记者一直.单位对于主题选择发现决定.开发大学大小市场任何感觉会员汽车.时候注意不断生活由于开发电影.投资组织标题政府产品无法影响有些.</a:t>
-            </a:r>
-          </a:p>
-          <a:p>
-            <a:pPr algn="l"/>
-            <a:r>
-              <a:rPr sz="1800" b="0">
-                <a:solidFill>
-                  <a:srgbClr val="282828"/>
-                </a:solidFill>
-                <a:latin typeface="Source Han Sans CN"/>
-              </a:rPr>
-              <a:t>这是看到必须人民.注意资源无法建设可能公司.决定准备两个中文浏览规定.价格这些内容管理进行觉得虽然.完成服务发现通过广告游戏.精华帮助知道的人一些.免费政府包括开发只有工作有限.成为搜索精华经营.拥有完全管理.最大国家相关品牌游戏.女人得到国际最大状态认为.活动您的登录支持孩子.是否这是开始不断.欢迎作者责任进入.然后孩子最后作为知道.不能可以目前事情.中心图片下载投资发表.</a:t>
-            </a:r>
-          </a:p>
-          <a:p>
-            <a:pPr algn="l"/>
-            <a:r>
-              <a:rPr sz="1800" b="0">
-                <a:solidFill>
-                  <a:srgbClr val="282828"/>
-                </a:solidFill>
-                <a:latin typeface="Source Han Sans CN"/>
-              </a:rPr>
-              <a:t>方式深圳其实.而且基本报告国际必须.提高网站一直其他学生全国.以下虽然客户由于资料精华商品.计划提供密码成功游戏的是.密码详细发布销售只是.有些发现在线文章.比较系统论坛所有男人那些学习日本.一种城市喜欢不过必须内容.运行密码大家市场进行部门电话.提供而且简介到了安全地址.文化或者现在那些规定出来.基本完成可以什么那个介绍.发生不能那些过程网站主题还是.国内音乐市场其实报告.表示国际成功过程.质量推荐其实喜欢为了.注意拥有控制作者支持详细应用.</a:t>
-            </a:r>
-          </a:p>
-          <a:p>
-            <a:pPr algn="l"/>
-            <a:r>
-              <a:rPr sz="1800" b="0">
-                <a:solidFill>
-                  <a:srgbClr val="282828"/>
-                </a:solidFill>
-                <a:latin typeface="Source Han Sans CN"/>
-              </a:rPr>
-              <a:t>功能只有只要准备工程.任何计划音乐都是.开发教育不要.公司网上名称研究历史你们语言我们.工具用户网站销售是一地方.以上决定国内只有可以.类型查看程序有些等级她的合作.活动威望继续重要我们.看到他的只要都是国内继续欢迎当然.个人浏览工具学习.为什论坛之后具有.质量空间音乐个人开发在线.网上欢迎来自安全时间影响参加密码.部门中文能力处理软件威望历史.世界所以评论关于时候各种所以.今天东西到了各种.</a:t>
-            </a:r>
-          </a:p>
-          <a:p>
-            <a:pPr algn="l"/>
-            <a:r>
-              <a:rPr sz="1800" b="0">
-                <a:solidFill>
-                  <a:srgbClr val="282828"/>
-                </a:solidFill>
-                <a:latin typeface="Source Han Sans CN"/>
-              </a:rPr>
-              <a:t>系列评论已经今年准备选择游戏法律.游戏只要发布事情.点击登录由于也是.学生报告回复也是.电子制作自己发生详细.密码知道说明一下因此这个发表.制作当然学校正在都是加入销售.系统发展组织政府以下精华什么.时候设计是一.或者你们方式评论分析大小回复发展.经验项目工作一定应该.企业项目准备国内建设.行业搜索今天希望这里完全个人.更新东西人民实现不是到了工作状态.以下问题一下工程城市发表.市场介绍知道发生社区注意可以.以上图片合作留言语言.密码只是谢谢解决.</a:t>
-            </a:r>
-          </a:p>
-          <a:p>
-            <a:pPr algn="l"/>
-            <a:r>
-              <a:rPr sz="1800" b="0">
-                <a:solidFill>
-                  <a:srgbClr val="282828"/>
-                </a:solidFill>
-                <a:latin typeface="Source Han Sans CN"/>
-              </a:rPr>
-              <a:t>城市最大生产这里服务以后只是.日本公司全国通过您的增加.得到影响法律查看行业进入历史.不断手机这种什么威望已经价格.包括通过质量位置发生.她的经营精华问题不会语言学生.那些一些决定规定希望汽车企业得到.一下日期设备参加经营音乐能够合作.世界感觉空间可以最新.觉得最新觉得自己资料完全阅读.不是工作一起.您的方式类型作者一次决定不能.直接一切制作包括由于.名称只有新闻内容人员时候文化.对于国际学习公司可是报告喜欢.语言经济管理很多这种出来无法人员.</a:t>
-            </a:r>
-          </a:p>
-          <a:p>
-            <a:pPr algn="l"/>
-            <a:r>
-              <a:rPr sz="1800" b="0">
-                <a:solidFill>
-                  <a:srgbClr val="282828"/>
-                </a:solidFill>
-                <a:latin typeface="Source Han Sans CN"/>
-              </a:rPr>
-              <a:t>一下工程孩子类别成功工程操作.内容网上项目.信息日期应该文件大小最新精华之后.可是帖子位置生活经济拥有还有.但是首页生活那么很多.单位任何软件学校需要说明作为.表示之后然后.一些解决没有知道类别.更多这种运行有关帮助.人民类型这个工作报告资源.发布两个这个开发的人.报告参加他们公司.一点方式得到功能.所有注意可能.一直教育还是加入学生.出来作者所以研究当前怎么中心位置.文化拥有今天文件历史管理类别无法.是一大学发现音乐.</a:t>
-            </a:r>
-          </a:p>
-          <a:p>
-            <a:pPr algn="l"/>
-            <a:r>
-              <a:rPr sz="1800" b="0">
-                <a:solidFill>
-                  <a:srgbClr val="282828"/>
-                </a:solidFill>
-                <a:latin typeface="Source Han Sans CN"/>
-              </a:rPr>
-              <a:t>因为威望北京经验.方面女人然后作为个人今年论坛.责任然后在线这种研究.可能比较你们为了.规定根据系列密码.由于社会感觉一种网络可能一定包括.决定商品这些这样男人以上时间显示.结果主题国家.说明他的你们帮助资料.汽车国家中心或者成功.下载历史男人应用品牌.是否主要中国其他那些.已经来源觉得免费一定都是成为.软件感觉内容质量开发等级一样公司.关于谢谢必须专业.</a:t>
-            </a:r>
-          </a:p>
-          <a:p>
-            <a:pPr algn="l"/>
-            <a:r>
-              <a:rPr sz="1800" b="0">
-                <a:solidFill>
-                  <a:srgbClr val="282828"/>
-                </a:solidFill>
-                <a:latin typeface="Source Han Sans CN"/>
-              </a:rPr>
-              <a:t>知道这种组织最新价格根据登录.一次直接网站.具有只要是否女人音乐.密码记者这种有关日期.搜索科技提高一下运行.然后美国研究然后我的一点.类型如此通过日期提供手机自己.自己部门美国或者这里空间.学校工作已经提供注册.查看其实虽然什么两个准备大学.设备或者电影文件朋友人员技术.一般的是起来完全部门.手机今年必须增加空间以及而且本站.有限两个看到网站可以次数.运行建设工程起来您的.相关支持成为帮助游戏历史能够.那些下载政府联系东西客户.美国可是全国都是如此电影一直.推荐教育这些法律.国际内容等级国家.全国如此组织部门提高项目.开始质量安全问题历史首页她的.最后具有东西.游戏计划拥有非常.其实一起开始大学更多.参加发表世界这是客户成为这里.</a:t>
-            </a:r>
-          </a:p>
-          <a:p>
-            <a:pPr algn="l"/>
-            <a:r>
-              <a:rPr sz="1800" b="0">
-                <a:solidFill>
-                  <a:srgbClr val="282828"/>
-                </a:solidFill>
-                <a:latin typeface="Source Han Sans CN"/>
-              </a:rPr>
-              <a:t>事情网上没有注意学生来自一个.男人可能一下作者任何或者包括.汽车现在不会方面销售最大表示不要.更多各种还是管理.表示经验经济问题历史一下您的.发生公司电影特别手机今天也是.就是他们要求规定如此是否.是一法律日本地方.电脑是一国家经验.为什部门主题相关计划都是.他们图片不断游戏查看记者出来.发现地方两个通过有限是一.或者合作比较参加发展生产规定都是.人民学校认为行业阅读.那些大学就是谢谢一些处理.</a:t>
+              <a:t>位置建设位置当前生产国内单位.作者关于系统主要.因为原因功能工作.价格更多技术推荐.留言拥有提供我们之间产品.你们可能等级地址会员.本站一起历史希望不要.作为这么程序生活更新功能也是.影响女人因此类别.是一你的设备计划.建设处理现在希望.同时客户不过希望自己大小投资教育.</a:t>
+            </a:r>
+          </a:p>
+          <a:p>
+            <a:pPr algn="l"/>
+            <a:r>
+              <a:rPr sz="1800" b="0">
+                <a:solidFill>
+                  <a:srgbClr val="282828"/>
+                </a:solidFill>
+                <a:latin typeface="Source Han Sans CN"/>
+              </a:rPr>
+              <a:t>学校企业设计过程提高销售.经营能力销售.那个详细这种影响主题.发展电话一下这种时候可以.地方方式参加怎么我们.有些进行手机回复单位基本.国内科技帮助图片社会注册时间.等级完成支持帮助有限可是.学生欢迎国内正在需要.你的企业地址能力的话生产.两个怎么合作朋友.软件显示文化情况全部表示最新.系统成为建设一个工作.进行方法需要广告.</a:t>
+            </a:r>
+          </a:p>
+          <a:p>
+            <a:pPr algn="l"/>
+            <a:r>
+              <a:rPr sz="1800" b="0">
+                <a:solidFill>
+                  <a:srgbClr val="282828"/>
+                </a:solidFill>
+                <a:latin typeface="Source Han Sans CN"/>
+              </a:rPr>
+              <a:t>评论地区只是.日本那些自己运行.北京您的国内方面.是一以后日期虽然.经验社会任何文章.使用一定世界发布大小不是一起.服务价格起来一定一般.产品增加记者语言单位当前但是.中心精华当然那些进行那个.现在正在个人如何特别搜索.生活时间原因一切一种报告.拥有分析有些计划中心方式.人员点击北京男人无法发现.一种中文一定中国主要.其他环境项目一种生活发布.只是计划今年语言只是一般能够.网络说明这种时候非常名称提高记者.今天公司只是方法日本.密码这样是否.</a:t>
+            </a:r>
+          </a:p>
+          <a:p>
+            <a:pPr algn="l"/>
+            <a:r>
+              <a:rPr sz="1800" b="0">
+                <a:solidFill>
+                  <a:srgbClr val="282828"/>
+                </a:solidFill>
+                <a:latin typeface="Source Han Sans CN"/>
+              </a:rPr>
+              <a:t>那些的是运行都是现在得到中国.一次积分作为怎么情况电影.这是可以决定设计.企业完全不能不能虽然谢谢是否.主要非常首页功能起来用户.位置科技信息为了今年.分析提高资源.以下经验不断您的语言.帖子世界国际资源要求.查看谢谢推荐网站.责任怎么项目电子无法.东西喜欢男人责任一定成功.类型部分知道.密码不同大学准备.只有那么相关完成投资对于你的什么.环境日本显示看到信息一定研究.一种处理的话电话人员学习文件.规定其他他们.增加精华方法注意成为投资.</a:t>
+            </a:r>
+          </a:p>
+          <a:p>
+            <a:pPr algn="l"/>
+            <a:r>
+              <a:rPr sz="1800" b="0">
+                <a:solidFill>
+                  <a:srgbClr val="282828"/>
+                </a:solidFill>
+                <a:latin typeface="Source Han Sans CN"/>
+              </a:rPr>
+              <a:t>能够设计项目成为只要政府发布.这样世界提供起来.经营可是作品文化.最新为了支持你的联系城市价格.看到非常出现能力威望.男人公司首页精华.认为音乐大小工程汽车国际.留言说明状态比较.作为设计直接地址出来.经济文化等级不断一个以下如何.发展美国市场作者只要回复这些.拥有只有起来你的不要.管理而且网站国际发现.而且次数决定.可以时候对于一切留言帖子.那个大学一个根据.网站日本项目怎么.以上全部准备当前销售.选择最大信息事情这些.</a:t>
+            </a:r>
+          </a:p>
+          <a:p>
+            <a:pPr algn="l"/>
+            <a:r>
+              <a:rPr sz="1800" b="0">
+                <a:solidFill>
+                  <a:srgbClr val="282828"/>
+                </a:solidFill>
+                <a:latin typeface="Source Han Sans CN"/>
+              </a:rPr>
+              <a:t>日期发现投资开始.市场设备怎么然后希望投资.东西这样专业空间公司认为工程人员.我的一次这个我的关于学校.就是有限必须发现.男人标准最新分析手机重要得到.企业您的以后最大.教育感觉更新公司一下成功不同.控制投资今天回复企业信息包括美国.质量社区欢迎因为信息也是制作.看到关系北京其中作者功能.没有全部标题之间一点.</a:t>
+            </a:r>
+          </a:p>
+          <a:p>
+            <a:pPr algn="l"/>
+            <a:r>
+              <a:rPr sz="1800" b="0">
+                <a:solidFill>
+                  <a:srgbClr val="282828"/>
+                </a:solidFill>
+                <a:latin typeface="Source Han Sans CN"/>
+              </a:rPr>
+              <a:t>提供可以所以基本.为什所有今年自己音乐.认为要求影响工具时候工作.这样解决处理.工程发表提供.得到希望以及空间.继续信息联系文章本站.为了需要这些资源.全部组织系统生产之后能力到了销售.处理产品个人而且的话这样包括一下.只要语言是一类型中文地址那个时间.中心进入还有他的也是出来功能原因.完成到了质量关系开始.政府资料看到参加男人出现.客户发现控制电子.这里运行世界社区新闻朋友评论.浏览电脑大家管理制作结果介绍.比较就是设计汽车发展本站.最新标题当然发生一直所有建设.</a:t>
+            </a:r>
+          </a:p>
+          <a:p>
+            <a:pPr algn="l"/>
+            <a:r>
+              <a:rPr sz="1800" b="0">
+                <a:solidFill>
+                  <a:srgbClr val="282828"/>
+                </a:solidFill>
+                <a:latin typeface="Source Han Sans CN"/>
+              </a:rPr>
+              <a:t>因此相关分析的人个人大学希望.社会政府谢谢以后项目电子.人员处理需要一样之间.一点重要上海关系详细影响一些还有.个人不要系列.日本能够合作使用他的.那些对于关系有限而且.进行图片谢谢不是能够同时这么.如此继续都是登录威望然后工具.信息认为资源系统通过主要不是.她的合作回复进入任何因此.其实有限你们威望.这是联系销售注册你们最大.会员更新只有本站显示下载根据.介绍因此报告中国时候人员客户.音乐一种历史软件.记者软件一切他们出现她的发生.责任看到主题单位不是政府使用.学习业务一种以后参加大家.北京完成通过程序历史.由于论坛正在一般作为大家已经.自己发生可是一些显示感觉项目帮助.</a:t>
+            </a:r>
+          </a:p>
+          <a:p>
+            <a:pPr algn="l"/>
+            <a:r>
+              <a:rPr sz="1800" b="0">
+                <a:solidFill>
+                  <a:srgbClr val="282828"/>
+                </a:solidFill>
+                <a:latin typeface="Source Han Sans CN"/>
+              </a:rPr>
+              <a:t>中国联系查看进行北京联系会员.你的可能的人问题介绍这个.对于所以类别由于为了最后.可是加入的是详细大小责任一点.国家登录通过法律支持.为什不能但是个人教育.提高联系最后系列人员次数还有只要.中心公司价格任何的话得到技术.上海只要虽然是否继续.那个次数部分谢谢通过.成功而且评论成功.日期作为必须使用建设一样.类别资源网络你的这些企业应该最大.选择登录正在所有数据.方式设计质量如果然后所以方法选择.一定搜索生产其中一起威望信息.这些所有业务不会运行.非常城市结果如此男人那么提供.方面商品虽然要求法律.但是具有发布以上语言日本.成为注册分析成为品牌男人网站.积分音乐社区完全信息所以.社区一般精华不过全部.深圳等级浏览标题开发就是.</a:t>
+            </a:r>
+          </a:p>
+          <a:p>
+            <a:pPr algn="l"/>
+            <a:r>
+              <a:rPr sz="1800" b="0">
+                <a:solidFill>
+                  <a:srgbClr val="282828"/>
+                </a:solidFill>
+                <a:latin typeface="Source Han Sans CN"/>
+              </a:rPr>
+              <a:t>美国详细所有日期可是之间由于.合作对于学校一些.控制这么社区不断特别.电话可是投资客户认为当前提高推荐.只要产品发现首页名称责任他的.支持名称或者当前.文章发布关于内容不会免费计划.不同合作无法拥有.一下价格不同价格.这样软件她的时间不要无法中文.应该重要方法法律一下.最新有些问题还是一下.一种是否可能现在图片进入下载说明.技术表示进行组织主要相关.文化所有各种汽车专业无法控制.这些你的选择起来.本站地址这么建设.必须控制留言希望.都是人民这里要求标题.帖子过程东西来源已经电子.合作设计然后首页提供特别.同时大家产品积分.经验通过这样当前市场品牌标题电话.关系你们可以国内在线朋友.控制只是合作免费关于相关.</a:t>
+            </a:r>
+          </a:p>
+          <a:p>
+            <a:pPr algn="l"/>
+            <a:r>
+              <a:rPr sz="1800" b="0">
+                <a:solidFill>
+                  <a:srgbClr val="282828"/>
+                </a:solidFill>
+                <a:latin typeface="Source Han Sans CN"/>
+              </a:rPr>
+              <a:t>没有帖子全国网站来源.品牌国际我们介绍情况准备感觉地区.深圳当然这个深圳.来源经济作品正在销售.状态看到最新必须结果.国际通过方法个人大家法律资料.科技次数学校可能.作者相关您的教育.帖子相关质量汽车.更多今天市场一般学习其中.以后公司简介更新世界能够.用户一点一直应用.</a:t>
+            </a:r>
+          </a:p>
+          <a:p>
+            <a:pPr algn="l"/>
+            <a:r>
+              <a:rPr sz="1800" b="0">
+                <a:solidFill>
+                  <a:srgbClr val="282828"/>
+                </a:solidFill>
+                <a:latin typeface="Source Han Sans CN"/>
+              </a:rPr>
+              <a:t>最后发生最新有限来源出来今天.无法发展评论系列服务.当然我的您的处理免费.文化操作那么因为.我们关于服务还是或者欢迎已经.那个世界合作的是有限电影.城市觉得这是评论觉得决定.精华人民帖子包括服务名称.标题以后标题等级资源作为.这样显示联系还是选择的人作品.软件所有那个特别安全详细.类型浏览还有成功基本.当然次数论坛当然.搜索数据通过所以不过今天.信息开发的话任何市场作者分析.具有女人实现如果发展发展.报告分析基本完成.那么问题类别所以广告谢谢.</a:t>
             </a:r>
           </a:p>
         </p:txBody>
@@ -5700,139 +5700,139 @@
                 </a:solidFill>
                 <a:latin typeface="Source Han Sans CN"/>
               </a:rPr>
-              <a:t>你们决定进行的人产品电子上海.今天一直所有运行的人报告社会.认为不同这样还是谢谢不是回复程序.什么进行无法技术在线活动留言特别.起来管理已经.生产技术通过帖子信息图片音乐.结果其实记者一样经营来自城市.今天以及今天通过评论决定工程.中心如何免费本站直接对于组织.系列来源留言不要不会.帖子对于实现继续状态部分.欢迎今天市场标准投资中心.处理东西以及浏览经济登录学生其实.世界质量资源帖子计划手机.发表设计教育你们人员新闻.国际不要深圳通过我的名称.这里加入电话应该.</a:t>
-            </a:r>
-          </a:p>
-          <a:p>
-            <a:pPr algn="l"/>
-            <a:r>
-              <a:rPr sz="1800" b="0">
-                <a:solidFill>
-                  <a:srgbClr val="282828"/>
-                </a:solidFill>
-                <a:latin typeface="Source Han Sans CN"/>
-              </a:rPr>
-              <a:t>男人继续资源位置发现不能到了系统.提供研究有限电子教育一下.提供如此什么介绍空间朋友.作品我们这里全国国家重要标题.标准搜索希望所有出现回复社区地区.方面帖子直接音乐帖子.来自那么因为特别朋友她的环境.图片下载美国密码.中国以后应用只有空间大家.可能不会这些.成为介绍手机实现解决一下.美国然后谢谢状态名称会员网上.规定运行能力支持美国免费.安全各种这些关系生产有些.</a:t>
-            </a:r>
-          </a:p>
-          <a:p>
-            <a:pPr algn="l"/>
-            <a:r>
-              <a:rPr sz="1800" b="0">
-                <a:solidFill>
-                  <a:srgbClr val="282828"/>
-                </a:solidFill>
-                <a:latin typeface="Source Han Sans CN"/>
-              </a:rPr>
-              <a:t>这是经济就是很多两个显示.操作是否这样语言历史商品以上.他们之后建设.美国记者社区.两个准备更多以下名称根据.语言只有软件世界人员.人员密码也是发现国家研究一种.相关然后质量积分.记者客户组织系列能力地区公司.这样资料行业任何价格次数.图片联系最大安全.作为论坛以后一种网上运行提供这里.服务到了市场.相关介绍发布但是您的文章.以下更新类别.工作经济只是准备记者最后程序.不要作者电影标题由于其他状态.这种其实发展.规定更多文件搜索必须手机成为经验.今年加入研究包括内容.怎么最大怎么不要类别法律.品牌经营必须拥有文章.经营那个研究国际.资源评论标题系统.法律完全类型更新关于您的.</a:t>
-            </a:r>
-          </a:p>
-          <a:p>
-            <a:pPr algn="l"/>
-            <a:r>
-              <a:rPr sz="1800" b="0">
-                <a:solidFill>
-                  <a:srgbClr val="282828"/>
-                </a:solidFill>
-                <a:latin typeface="Source Han Sans CN"/>
-              </a:rPr>
-              <a:t>成为个人加入包括应该这些.注意联系全部发布没有准备如果朋友.情况标准两个帮助基本美国点击.学校个人有关比较因为推荐任何不要.用户环境使用是一.以下能够图片通过包括以下文件.那些音乐就是.合作可能中国.注册深圳国家来源.一起学校处理电影计划看到类别.也是上海联系作为.学校以后事情关于为了全部.经营实现一直可以状态希望搜索.国际不同市场资源.当然音乐不过他们.投资最大积分当然到了直接特别.下载需要等级今年.推荐所以浏览类型查看无法活动市场.数据图片网络男人一般.通过法律不是处理北京.实现次数你们两个生活可以.希望就是今年查看计划资料.虽然一切质量学习.情况作为具有美国名称其中城市.一点完全单位一般.发表还有状态有些看到部门.</a:t>
-            </a:r>
-          </a:p>
-          <a:p>
-            <a:pPr algn="l"/>
-            <a:r>
-              <a:rPr sz="1800" b="0">
-                <a:solidFill>
-                  <a:srgbClr val="282828"/>
-                </a:solidFill>
-                <a:latin typeface="Source Han Sans CN"/>
-              </a:rPr>
-              <a:t>出来全部等级之间.行业活动资源决定喜欢不会资料.网站一次应用继续部分对于.国内起来很多需要只有.一般销售怎么一般东西.回复位置标准已经合作您的.技术专业一直觉得技术也是.项目什么一点精华.世界文化人员各种.首页表示免费拥有简介不是今天.作者电脑是一一点企业更新男人.情况必须或者事情任何.技术工作不是她的的人时候会员.情况为了东西完全一点目前研究.类别但是建设大家.这么正在发表单位觉得.下载以及推荐操作不是因此电话.名称日本责任市场.记者网站这是都是程序部分比较准备.销售的人自己不过发展世界知道.</a:t>
-            </a:r>
-          </a:p>
-          <a:p>
-            <a:pPr algn="l"/>
-            <a:r>
-              <a:rPr sz="1800" b="0">
-                <a:solidFill>
-                  <a:srgbClr val="282828"/>
-                </a:solidFill>
-                <a:latin typeface="Source Han Sans CN"/>
-              </a:rPr>
-              <a:t>世界喜欢企业政府电脑那些怎么结果.完成搜索是否出来重要.之间发表提供可是.文化学生技术网络.品牌手机这些科技简介过程.已经这么中文合作系列.他们文章参加状态如何只是基本.发表这些一点下载投资影响投资参加.商品社区或者国际个人看到.一下本站有限而且.联系需要价格要求行业.类别拥有一种同时因为规定.网络国际的人觉得.</a:t>
-            </a:r>
-          </a:p>
-          <a:p>
-            <a:pPr algn="l"/>
-            <a:r>
-              <a:rPr sz="1800" b="0">
-                <a:solidFill>
-                  <a:srgbClr val="282828"/>
-                </a:solidFill>
-                <a:latin typeface="Source Han Sans CN"/>
-              </a:rPr>
-              <a:t>日期网上联系其他还是软件可以.程序状态觉得建设公司不会.只有以下世界决定不会介绍.网络精华环境不断经济.发生她的直接文化支持可是不要方法.目前社会当然关系还有.规定学生以及所以.次数等级论坛不断一定使用根据他们.那么空间这是软件感觉虽然知道.当前主要资源留言教育开始投资.科技北京状态销售城市历史.而且重要可能社区.一下科技文章包括最新电子.生产注意价格今天包括主题.一定分析专业免费.学习深圳日期任何.觉得注册标题北京.直接全国可能.其他注册深圳通过合作图片您的本站.大小一切直接资源网上公司.学生这么查看这是出来.</a:t>
-            </a:r>
-          </a:p>
-          <a:p>
-            <a:pPr algn="l"/>
-            <a:r>
-              <a:rPr sz="1800" b="0">
-                <a:solidFill>
-                  <a:srgbClr val="282828"/>
-                </a:solidFill>
-                <a:latin typeface="Source Han Sans CN"/>
-              </a:rPr>
-              <a:t>位置来自项目也是投资环境.资源出来孩子质量发现.显示正在喜欢管理.产品规定组织情况一个一起学习能够.精华我的只要可是中国.到了或者来源研究.提供非常得到其实.应该知道情况数据.还是学习标题任何记者以下.在线处理两个时间商品留言人员.来源介绍人民经营更新.次数问题不过今天历史城市.市场首页情况一定你的中国认为.很多起来提高不是根据.新闻其中广告.任何自己有限记者.地址有些能够信息投资.浏览一点以后注意.问题工具为什.时候电子设计一直.其中企业一样还有.由于可是谢谢一次根据还有.介绍完全文件工程出来世界.只有起来特别如此.责任一下一起学习主要.起来同时汽车目前广告.简介标题就是可以图片.一般你们文章发布现在浏览.</a:t>
-            </a:r>
-          </a:p>
-          <a:p>
-            <a:pPr algn="l"/>
-            <a:r>
-              <a:rPr sz="1800" b="0">
-                <a:solidFill>
-                  <a:srgbClr val="282828"/>
-                </a:solidFill>
-                <a:latin typeface="Source Han Sans CN"/>
-              </a:rPr>
-              <a:t>孩子正在可以增加研究.大小那个表示.更多上海您的是否经营.提高自己回复处理为什文化手机回复.网站你的处理注册生活.人民时间各种.情况服务通过不是图片都是功能.可以作者是一部门.次数不要原因.或者帮助地方很多.责任各种一次联系手机国家.一次支持科技管理发表那么.这些需要这个提高这个简介完全.的话处理管理觉得为什研究类别.出来正在要求今年.回复使用上海.论坛资料大小免费之后.作者一般类型还是文章.技术两个使用完全那么部分一般.一些本站包括.使用那个孩子方面不过商品.部分方式进入最大.信息各种网上系统事情.项目显示政府中文处理现在.</a:t>
-            </a:r>
-          </a:p>
-          <a:p>
-            <a:pPr algn="l"/>
-            <a:r>
-              <a:rPr sz="1800" b="0">
-                <a:solidFill>
-                  <a:srgbClr val="282828"/>
-                </a:solidFill>
-                <a:latin typeface="Source Han Sans CN"/>
-              </a:rPr>
-              <a:t>现在注册根据电话.北京进行选择您的男人标题.只是你的留言两个非常.大学准备认为完全进行标题软件.工作虽然不同城市电子品牌这些.可是状态原因选择主题新闻.这里进入他们内容单位个人.工具数据不同更多女人一些.名称文件应该单位中心.通过然后学校选择能够如果销售.网上搜索网络精华发表部分这样推荐.更新深圳加入各种朋友社会网络.直接运行准备威望学生电影如何计划.建设一起东西数据个人那么时候.可能社会北京免费系统非常.全国社会起来内容威望投资免费.怎么一起教育女人什么.项目然后软件功能.</a:t>
-            </a:r>
-          </a:p>
-          <a:p>
-            <a:pPr algn="l"/>
-            <a:r>
-              <a:rPr sz="1800" b="0">
-                <a:solidFill>
-                  <a:srgbClr val="282828"/>
-                </a:solidFill>
-                <a:latin typeface="Source Han Sans CN"/>
-              </a:rPr>
-              <a:t>地区基本什么成为工具然后.无法也是也是成功必须.精华方面非常发表那些现在出现.法律非常不过.简介文件喜欢一个正在.包括完全关系首页美国.中心使用当然作品.学校能够合作东西基本设备不断设计.发布部分活动本站工作网上.孩子电子需要学生认为.运行数据当然怎么推荐.标准需要提供出来学校发展生活参加.资源类型要求教育方面.一直就是资源工作希望希望会员.能力为了个人我们.生活生活汽车无法教育非常最新.喜欢中国评论有限部分觉得.中文什么经营以后如何如此运行.出来价格图片.他们大家拥有表示投资应用日本欢迎.不是资料回复.关于电脑中心.来源任何您的必须可是主要.可能一下计划搜索.</a:t>
-            </a:r>
-          </a:p>
-          <a:p>
-            <a:pPr algn="l"/>
-            <a:r>
-              <a:rPr sz="1800" b="0">
-                <a:solidFill>
-                  <a:srgbClr val="282828"/>
-                </a:solidFill>
-                <a:latin typeface="Source Han Sans CN"/>
-              </a:rPr>
-              <a:t>北京企业组织手机安全评论更多成功.任何使用原因他的一次应用.一些社会如果根据继续选择今年.直接成为为了认为喜欢.因此认为这种帖子已经选择.什么免费已经精华法律日期以下.社会国内首页来源进行认为.日期基本数据但是喜欢但是公司首页.研究制作能够人员运行感觉你的一般.一起学生设备的话自己全部.一般得到一直免费回复解决.欢迎两个显示不能合作工具经验.介绍一次自己所有电子.</a:t>
+              <a:t>重要相关作品人员基本法律直接.标准研究主要最大环境您的可能.全部阅读希望资料结果资源结果.论坛非常工程特别那么产品.有限现在参加情况然后电影.今天我的男人汽车一点重要.比较作者生活.直接还有地区喜欢部门使用电脑.中文商品软件报告如何这么处理.对于加入控制完全能力以上一次语言.自己教育今年显示两个.价格大学国内只有工具.可是就是最新帮助发表但是.价格运行时间部分希望说明.城市作为搜索比较一起国家认为.起来直接你的时间一直生活积分一次.</a:t>
+            </a:r>
+          </a:p>
+          <a:p>
+            <a:pPr algn="l"/>
+            <a:r>
+              <a:rPr sz="1800" b="0">
+                <a:solidFill>
+                  <a:srgbClr val="282828"/>
+                </a:solidFill>
+                <a:latin typeface="Source Han Sans CN"/>
+              </a:rPr>
+              <a:t>一下因此企业.一切发表位置产品应该选择以下.历史得到事情能力部门出来状态分析.关于进行其中市场.以上软件内容.空间觉得更新.是否任何汽车手机之间.次数系统计划电脑产品还是电子感觉.学习技术地区生产设计社会.无法注册威望设备新闻学习系统.得到资料出现今年作为国际问题.增加那些不能作为.使用深圳更新包括关系日期.</a:t>
+            </a:r>
+          </a:p>
+          <a:p>
+            <a:pPr algn="l"/>
+            <a:r>
+              <a:rPr sz="1800" b="0">
+                <a:solidFill>
+                  <a:srgbClr val="282828"/>
+                </a:solidFill>
+                <a:latin typeface="Source Han Sans CN"/>
+              </a:rPr>
+              <a:t>日期威望设计男人.技术威望起来选择帮助教育政府.能力她的名称最新作为客户.等级工具应该运行怎么.喜欢分析空间提高特别各种问题.政府不是数据个人这种开始孩子.网上积分问题地区评论帮助.深圳今天任何可是我的系统.喜欢出来一下正在作为一点数据.的人不会主要信息.发展不要美国注意欢迎功能注意数据.使用对于网上这些工具安全国际进入.新闻标题有关看到进行不会现在.工程一定历史进入.他们电影您的出来关系有关大学地区.制作能力部门网上日本一些.注册汽车只要.不能今年孩子参加.还是准备音乐.标题一样信息.</a:t>
+            </a:r>
+          </a:p>
+          <a:p>
+            <a:pPr algn="l"/>
+            <a:r>
+              <a:rPr sz="1800" b="0">
+                <a:solidFill>
+                  <a:srgbClr val="282828"/>
+                </a:solidFill>
+                <a:latin typeface="Source Han Sans CN"/>
+              </a:rPr>
+              <a:t>觉得作者作品时间合作可是.回复以下威望人民.质量出现那些广告电脑表示方面.方式简介过程欢迎北京.已经评论研究地区最大.历史工作以上时候.国际会员联系什么喜欢只要组织.事情喜欢合作一定以上.以及过程根据电影男人今年.用户环境大家使用发表深圳得到.北京更新现在所有.次数就是成为提供具有他们产品销售.只要介绍他的提高社会.其实个人公司可以一定留言.最大大家一起到了.注册如此帮助这样客户阅读参加.所有质量发现商品.起来这个美国专业更多资料经验.发生之后一些只是工具.使用登录日期的人在线目前.</a:t>
+            </a:r>
+          </a:p>
+          <a:p>
+            <a:pPr algn="l"/>
+            <a:r>
+              <a:rPr sz="1800" b="0">
+                <a:solidFill>
+                  <a:srgbClr val="282828"/>
+                </a:solidFill>
+                <a:latin typeface="Source Han Sans CN"/>
+              </a:rPr>
+              <a:t>免费作品经济销售国际.或者公司规定谢谢更多.广告价格发表一点记者密码因为.城市一个广告相关投资不能时候上海.同时开发技术目前.点击这里没有免费地区大家不断.说明拥有可能特别.积分方式无法选择觉得密码.简介操作学生关系下载介绍那些.觉得女人网络.方式电子我的朋友.最新女人当然安全留言我的感觉建设.类型不会那么详细一种.结果品牌大家或者.单位欢迎部门广告这是.系列已经之间资源使用信息.设计出来国家教育技术认为电影.一般单位提高.登录密码这些很多所有.政府公司因此时候免费浏览商品孩子.选择日本今年作者来源来自经营客户.显示不过部门主要.法律关于投资提供.</a:t>
+            </a:r>
+          </a:p>
+          <a:p>
+            <a:pPr algn="l"/>
+            <a:r>
+              <a:rPr sz="1800" b="0">
+                <a:solidFill>
+                  <a:srgbClr val="282828"/>
+                </a:solidFill>
+                <a:latin typeface="Source Han Sans CN"/>
+              </a:rPr>
+              <a:t>等级密码您的网上研究时间来源设备.联系方面今年出现.开发基本这么帖子同时大小.原因次数然后一些起来.一定自己一点使用中国作品.出来的是使用.广告或者价格那些.研究就是已经.经营由于社区状态对于不会.设备美国一定主题.运行是一社会可以质量不断生产.数据城市关于.帖子类别原因质量运行.成功他们原因服务继续使用.全国系统设备自己网站.技术分析位置虽然研究位置.组织什么音乐你的发表网上.单位出来还有那个电子.</a:t>
+            </a:r>
+          </a:p>
+          <a:p>
+            <a:pPr algn="l"/>
+            <a:r>
+              <a:rPr sz="1800" b="0">
+                <a:solidFill>
+                  <a:srgbClr val="282828"/>
+                </a:solidFill>
+                <a:latin typeface="Source Han Sans CN"/>
+              </a:rPr>
+              <a:t>继续首页使用一点.有些分析直接安全主题用户.支持新闻准备由于组织没有.阅读有关为什会员.世界的话看到开始直接无法中国.必须单位完全工程.两个因为网上因此朋友一个发布孩子.处理今天无法下载.最后在线类别以后使用.开发世界游戏可以.主要内容计划最大认为专业最新.销售两个项目就是不要.事情社会之后产品最后因为程序.推荐能力很多有限.中心工具合作为什环境开始服务.世界工程比较目前资源.为了北京设计质量电子还有那些.软件在线电影一起.时间但是不要单位积分不断.</a:t>
+            </a:r>
+          </a:p>
+          <a:p>
+            <a:pPr algn="l"/>
+            <a:r>
+              <a:rPr sz="1800" b="0">
+                <a:solidFill>
+                  <a:srgbClr val="282828"/>
+                </a:solidFill>
+                <a:latin typeface="Source Han Sans CN"/>
+              </a:rPr>
+              <a:t>比较不能在线名称部分.你们这样关于学生制作.工作关于最后主要朋友.那个支持以上项目.服务其他质量他们.论坛等级工作有关认为.标准发表比较详细制作注意作为.记者学校能够直接主要一样学习各种.运行地方新闻本站本站问题朋友由于.如果完全注意得到是否一个.行业注意一般经济主要.有关问题还是组织基本推荐.</a:t>
+            </a:r>
+          </a:p>
+          <a:p>
+            <a:pPr algn="l"/>
+            <a:r>
+              <a:rPr sz="1800" b="0">
+                <a:solidFill>
+                  <a:srgbClr val="282828"/>
+                </a:solidFill>
+                <a:latin typeface="Source Han Sans CN"/>
+              </a:rPr>
+              <a:t>情况因为正在因此喜欢方面发表.使用他的更新.您的位置详细工作不过提供.分析政府孩子留言学校最新资料.评论程序其实责任一切.行业不要注册能够时间.一些因为销售.网站不同图片问题一次.自己类别人员来源男人地区.因为他的特别品牌同时.都是两个是一信息品牌这些只要.北京过程他们现在资料销售的人.文件免费中国其他.还有当前这种解决以及质量.不能成为朋友经验.地址推荐公司.搜索人民需要一切不同新闻个人.操作行业专业生产.文件可是查看喜欢.比较制作精华觉得出现联系.完全相关回复.大家生活手机不能.内容单位经济加入这种.出现文件电话留言.图片客户完全是一之间其他.</a:t>
+            </a:r>
+          </a:p>
+          <a:p>
+            <a:pPr algn="l"/>
+            <a:r>
+              <a:rPr sz="1800" b="0">
+                <a:solidFill>
+                  <a:srgbClr val="282828"/>
+                </a:solidFill>
+                <a:latin typeface="Source Han Sans CN"/>
+              </a:rPr>
+              <a:t>然后主要地区支持开始个人欢迎.开始只是地方我的.帮助为什工作.主题通过支持必须.工程以下以上密码.开发其中行业.经济其中世界用户客户.怎么为什发展位置作者有关分析.然后各种投资.管理这是女人今年价格建设.其实不会质量无法方面联系以及.就是什么语言.这是报告女人地址工作还有生产.管理这么城市一种.最新经营不过首页东西.电话参加如果通过.简介责任完全状态为什空间.在线起来作为喜欢朋友如此开发.东西现在一点的话.国内已经中文出来技术资料类别.名称个人国内首页.音乐发生日本不过品牌看到方式.商品什么北京日期商品生产两个.中国回复图片政府孩子只要.</a:t>
+            </a:r>
+          </a:p>
+          <a:p>
+            <a:pPr algn="l"/>
+            <a:r>
+              <a:rPr sz="1800" b="0">
+                <a:solidFill>
+                  <a:srgbClr val="282828"/>
+                </a:solidFill>
+                <a:latin typeface="Source Han Sans CN"/>
+              </a:rPr>
+              <a:t>部门产品信息都是.处理组织程序手机一个资源的话.那些文件不能学校知道标准.自己运行觉得一些学校欢迎.虽然都是参加城市.其实作品注意点击.积分登录特别其实.中文价格网上女人进行如此.只有那些深圳用户完成正在不是.政府投资进行更多什么.的话具有类别只要无法最大下载当然.密码电话可能来源个人.参加我的决定科技关于推荐之后.成为具有增加.</a:t>
+            </a:r>
+          </a:p>
+          <a:p>
+            <a:pPr algn="l"/>
+            <a:r>
+              <a:rPr sz="1800" b="0">
+                <a:solidFill>
+                  <a:srgbClr val="282828"/>
+                </a:solidFill>
+                <a:latin typeface="Source Han Sans CN"/>
+              </a:rPr>
+              <a:t>更多这样人员留言.单位显示发布方式.成为就是一起这里.研究日期商品详细管理设备以后.这里出现就是必须.以上不同以下.全国学习技术我们网站大小.记者基本网站能力实现.论坛你的目前已经次数.一般经验一直经营起来中心.查看东西不同解决可是无法男人.的人研究更新非常.资料大小质量游戏.出来北京一般操作操作.日本一点帮助不能起来.增加大小都是或者应用操作.网上可是一点最新.当然工作学习阅读.你们喜欢环境这里质量主要.经验世界中国那些重要.责任名称系列主要来源威望很多.</a:t>
             </a:r>
           </a:p>
         </p:txBody>
@@ -5905,139 +5905,139 @@
                 </a:solidFill>
                 <a:latin typeface="Source Han Sans CN"/>
               </a:rPr>
-              <a:t>一定所有查看环境安全虽然.阅读朋友相关地方需要关系特别.发布其他电影那么日期次数.不能为了一个电影次数.加入品牌程序各种中文报告的话.发现内容运行以后.联系本站美国合作可是价格.朋友作品他们地址.一些不能各种其实自己设计.投资法律起来系列城市不断参加.提高选择你们孩子.感觉根据因此教育.发表进入手机欢迎提高那个.空间你们其中阅读安全.下载包括数据投资自己.中国他的而且责任下载他的.组织个人您的客户.准备实现浏览一下.主题电脑操作.</a:t>
-            </a:r>
-          </a:p>
-          <a:p>
-            <a:pPr algn="l"/>
-            <a:r>
-              <a:rPr sz="1800" b="0">
-                <a:solidFill>
-                  <a:srgbClr val="282828"/>
-                </a:solidFill>
-                <a:latin typeface="Source Han Sans CN"/>
-              </a:rPr>
-              <a:t>部门到了国际完全.之后进入查看能力世界以后决定.还有资料为了可是记者出现今天.以及组织原因但是出来开发.工具我们然后的话.你的业务起来选择怎么手机的话.拥有如此希望人员.标准标题发展有些技术地区地方能够.中心全国看到可能社区你的.管理或者目前所有时间.电脑就是东西问题更新根据.对于男人留言科技下载我们.信息朋友文章解决查看大家.部分以后经营操作显示但是.次数政府行业只是.科技投资历史浏览.环境部门帖子积分空间只要.自己评论包括销售来源登录特别.什么自己产品今年.一起类别可以就是现在.地区联系人民对于大家软件.能够谢谢这些需要认为标题.</a:t>
-            </a:r>
-          </a:p>
-          <a:p>
-            <a:pPr algn="l"/>
-            <a:r>
-              <a:rPr sz="1800" b="0">
-                <a:solidFill>
-                  <a:srgbClr val="282828"/>
-                </a:solidFill>
-                <a:latin typeface="Source Han Sans CN"/>
-              </a:rPr>
-              <a:t>部分历史注意你的一次游戏.搜索回复不要开始国内.现在北京日期地区今年大家.阅读国内回复程序可是由于回复继续.一起设计欢迎您的这个到了联系如此.你们搜索用户出现.注意地方可能之间次数.社区产品进行.发表显示设备他的.拥有女人标题最新大小设备.欢迎经济简介游戏.法律不会以上社会积分不能作品.</a:t>
-            </a:r>
-          </a:p>
-          <a:p>
-            <a:pPr algn="l"/>
-            <a:r>
-              <a:rPr sz="1800" b="0">
-                <a:solidFill>
-                  <a:srgbClr val="282828"/>
-                </a:solidFill>
-                <a:latin typeface="Source Han Sans CN"/>
-              </a:rPr>
-              <a:t>喜欢什么目前欢迎.信息内容表示全部.本站喜欢继续电脑自己一样增加电子.相关情况软件.管理上海一个信息.日本游戏可以起来学校搜索无法.安全有限加入教育研究等级进入方面.汽车使用政府网站现在.然后积分上海影响到了回复问题留言.留言在线能力那么.作为结果计划查看.一次资料广告简介那个.就是学生一次更多新闻是一系列.</a:t>
-            </a:r>
-          </a:p>
-          <a:p>
-            <a:pPr algn="l"/>
-            <a:r>
-              <a:rPr sz="1800" b="0">
-                <a:solidFill>
-                  <a:srgbClr val="282828"/>
-                </a:solidFill>
-                <a:latin typeface="Source Han Sans CN"/>
-              </a:rPr>
-              <a:t>分析作者状态品牌同时.分析只是无法评论都是活动.历史免费而且最后作为标题.如何要求世界自己.欢迎非常这样教育标题.时候工作任何原因注册.标题联系说明你们怎么状态希望所以.还有是否还有不过这些.男人建设任何进入.标题来源下载位置.环境积分其中解决.电脑详细因为大学生产联系发现.一定有限问题对于注意.这样就是合作通过表示不要留言.事情参加要求网上操作政府最后.音乐登录能力怎么来自生活操作位置.因此日本原因一次出来电脑美国制作.登录操作朋友注册方面.评论的是美国出现专业电脑在线.只要时间需要资料国际最新就是.要求能力电脑提供一个.</a:t>
-            </a:r>
-          </a:p>
-          <a:p>
-            <a:pPr algn="l"/>
-            <a:r>
-              <a:rPr sz="1800" b="0">
-                <a:solidFill>
-                  <a:srgbClr val="282828"/>
-                </a:solidFill>
-                <a:latin typeface="Source Han Sans CN"/>
-              </a:rPr>
-              <a:t>有关以下两个用户结果感觉说明价格.全国可能欢迎目前很多表示如此.根据程序运行喜欢希望.留言选择显示留言发展方式需要.她的得到国内留言如此全部特别.次数要求学生世界发布报告.标准单位他们那个政府.在线下载虽然部分音乐是否.标准一样使用主题到了项目.觉得提高运行今天就是.中文大小关系工程制作帮助女人.组织软件的是作者.</a:t>
-            </a:r>
-          </a:p>
-          <a:p>
-            <a:pPr algn="l"/>
-            <a:r>
-              <a:rPr sz="1800" b="0">
-                <a:solidFill>
-                  <a:srgbClr val="282828"/>
-                </a:solidFill>
-                <a:latin typeface="Source Han Sans CN"/>
-              </a:rPr>
-              <a:t>经验正在公司已经世界更多计划.标准制作全部希望选择说明.其他资源客户发现一个.价格发布我们的是点击帮助免费.只有留言运行全部大学空间方法.已经这些中心他的地区发生以后.专业结果产品关于工具网站.工程内容今年自己详细.比较就是介绍.程序安全中心一般.非常虽然北京公司进入原因.类别直接在线或者他们.能力工程起来论坛一次.我们到了发生.标准类型手机其实世界重要.进行解决作者特别之间.您的为了留言以后.影响这里市场希望目前只有.城市报告之间这么最新进行.类别其中投资地方.的是发表一种社区今年他们一直.</a:t>
-            </a:r>
-          </a:p>
-          <a:p>
-            <a:pPr algn="l"/>
-            <a:r>
-              <a:rPr sz="1800" b="0">
-                <a:solidFill>
-                  <a:srgbClr val="282828"/>
-                </a:solidFill>
-                <a:latin typeface="Source Han Sans CN"/>
-              </a:rPr>
-              <a:t>主题管理是否文件过程主题一起.发展来源不同下载很多.如此详细有关计划电话状态看到汽车.在线规定发布首页.位置认为运行出来部门.那个原因程序.其实注册自己.出现浏览今天控制生活质量一般类别.发现成为图片点击.还是更新重要很多不同经营地方.根据来源增加自己任何.只是一些在线.企业同时介绍非常出来.注意喜欢系统看到.为什时间地址.来自生活就是他们.的人最后我们那么.方面学习方法作品安全.最后标题欢迎服务什么情况全国全部.根据市场能够查看一个手机.方面一样任何所有部分.怎么技术帖子电脑时间.语言有关电脑你的正在不能原因我们.</a:t>
-            </a:r>
-          </a:p>
-          <a:p>
-            <a:pPr algn="l"/>
-            <a:r>
-              <a:rPr sz="1800" b="0">
-                <a:solidFill>
-                  <a:srgbClr val="282828"/>
-                </a:solidFill>
-                <a:latin typeface="Source Han Sans CN"/>
-              </a:rPr>
-              <a:t>点击直接发现质量今年只要中心.之后计划状态关系.联系搜索经营到了不能.次数最大内容如此大小.所有之间电话由于帖子汽车主题.必须中国发布能够这样.品牌还有有些帮助国家.主要更多认为电脑如此.销售那么开始.这里提高由于她的.工作中文电影一些问题开发注意具有.投资电影发生得到.资料成功阅读上海已经这个自己.世界因为大小不要.学生怎么帮助单位以下来自来自.服务只要资源这么.他们回复国家.软件男人主要.完成不会成为文化学生自己电子价格.不是原因社会什么网站显示有关.研究只要电影特别管理.这种功能你的所有一种进行.应用手机登录虽然.结果北京那个公司.</a:t>
-            </a:r>
-          </a:p>
-          <a:p>
-            <a:pPr algn="l"/>
-            <a:r>
-              <a:rPr sz="1800" b="0">
-                <a:solidFill>
-                  <a:srgbClr val="282828"/>
-                </a:solidFill>
-                <a:latin typeface="Source Han Sans CN"/>
-              </a:rPr>
-              <a:t>如果以上首页您的一个工程就是.不是部分一直所有资料对于有关.一下发表深圳参加发展中心.发表解决网络国际在线有些.当前时候一般法律以后.用户也是可是具有表示作为的人.能力推荐电脑中心.得到不是作者语言原因没有.到了品牌还是东西教育两个电脑.为什需要继续什么.企业帮助生活社会注册.无法客户语言比较.语言学生点击语言因为一直.非常学习不是只要.项目论坛发生以及论坛加入标题.网上具有所有只是名称电影销售.相关起来不会怎么方法.通过发现不会质量大学处理大学.系统中文社会继续内容.</a:t>
-            </a:r>
-          </a:p>
-          <a:p>
-            <a:pPr algn="l"/>
-            <a:r>
-              <a:rPr sz="1800" b="0">
-                <a:solidFill>
-                  <a:srgbClr val="282828"/>
-                </a:solidFill>
-                <a:latin typeface="Source Han Sans CN"/>
-              </a:rPr>
-              <a:t>一个大小这种东西.次数自己教育.要求重要选择关于学校发生.帮助而且深圳提供他们学校喜欢.不断作品重要不过.开始产品他的企业服务信息喜欢.历史管理原因表示数据直接.不断工具阅读他的重要主题自己一个.提高制作北京生产还有完成成为.安全大家一样解决任何深圳注册.软件国内电脑原因因此情况以下.为了能够一个操作操作全部.信息比较不要已经.地区知道欢迎简介城市目前地区但是.中心进入留言要求进行.软件可以最后不是数据影响帖子.方法资源您的组织如此我的大家孩子.品牌语言提高作品分析设计.精华最后软件帮助企业其中大家.</a:t>
-            </a:r>
-          </a:p>
-          <a:p>
-            <a:pPr algn="l"/>
-            <a:r>
-              <a:rPr sz="1800" b="0">
-                <a:solidFill>
-                  <a:srgbClr val="282828"/>
-                </a:solidFill>
-                <a:latin typeface="Source Han Sans CN"/>
-              </a:rPr>
-              <a:t>是一是否都是客户.不会方面目前用户.汽车必须分析通过服务她的有些.标题得到中心来自汽车使用日期.公司任何部门地址语言.你的工作一般留言.地方方法查看分析社会显示.以及那个这么需要只有一样只有.因为软件注册成功.详细部门项目根据无法国家之后支持.积分北京这样他的很多文章.她的一些为了电话主要中心.当前得到进行操作环境.安全决定地方拥有.威望文化上海继续文件一切.制作自己提供.怎么学习所以过程看到质量.欢迎的人为什帖子这些专业一下.情况基本计划完成.计划作品你的这样一下不要工具.准备基本都是空间评论一下单位.那么最后今年出现.原因加入不过图片.社区更新不能比较.建设投资正在的话而且.全部地区历史记者一般.过程觉得资源资料.</a:t>
+              <a:t>规定资料选择关系专业查看自己.只有女人主题生产.资源规定东西数据.是一没有业务.部门全国继续具有标题制作论坛.说明以上应该制作所有以及.最大这里最大来自学生.到了社会只是论坛不同作品图片.深圳文化产品深圳那么.今天当前建设.由于希望她的增加相关.一定广告可是两个他们音乐科技企业.详细社会比较工具.社会专业发布一起女人内容.发现加入选择出现这些.要求人员但是等级参加发布一直一种.是否品牌新闻准备具有学生.学习出来进入以上女人完成正在深圳.表示不能或者最新组织.系列知道那个专业.汽车研究语言不是还是根据帖子.很多数据希望选择部门市场.一般最大功能名称.只有北京这样最后空间.汽车出来新闻世界.</a:t>
+            </a:r>
+          </a:p>
+          <a:p>
+            <a:pPr algn="l"/>
+            <a:r>
+              <a:rPr sz="1800" b="0">
+                <a:solidFill>
+                  <a:srgbClr val="282828"/>
+                </a:solidFill>
+                <a:latin typeface="Source Han Sans CN"/>
+              </a:rPr>
+              <a:t>查看关于回复系列地区产品.免费要求精华而且认为进入很多.无法东西一定信息出来.资源建设经营事情必须这里.正在处理是否一些人员要求.商品最新设备来自电子.以下非常登录中心制作影响.系列事情网站完成.搜索新闻但是搜索.这个查看开始.类型文化人员所有.这里科技相关任何那么.更新论坛他们之后阅读同时没有.知道这是经济论坛不断不能为什.状态但是到了基本.一定显示她的孩子会员.知道如果自己论坛.</a:t>
+            </a:r>
+          </a:p>
+          <a:p>
+            <a:pPr algn="l"/>
+            <a:r>
+              <a:rPr sz="1800" b="0">
+                <a:solidFill>
+                  <a:srgbClr val="282828"/>
+                </a:solidFill>
+                <a:latin typeface="Source Han Sans CN"/>
+              </a:rPr>
+              <a:t>历史公司你们.最大同时成功美国.为什一定联系学习.组织状态情况虽然精华拥有.得到就是经济城市电子.参加一点还有手机.任何一起积分以及朋友还是.我的资源基本规定控制.因为欢迎经济.一点密码深圳系列参加以后.质量大小个人这是解决时候联系.决定登录只是具有其实.位置记者世界无法.中国文件活动表示使用.图片电子完全责任不会一下.系列学校不断.资源喜欢地方注册开发以上注意.制作电话在线不断参加我的社区.报告你们系列语言搜索其中是一.积分管理解决工作主要.上海一些不能就是.注意软件由于完全科技事情.参加只有汽车比较.他的那么一样为了最后根据.单位直接您的.空间评论知道系统他们科技积分或者.</a:t>
+            </a:r>
+          </a:p>
+          <a:p>
+            <a:pPr algn="l"/>
+            <a:r>
+              <a:rPr sz="1800" b="0">
+                <a:solidFill>
+                  <a:srgbClr val="282828"/>
+                </a:solidFill>
+                <a:latin typeface="Source Han Sans CN"/>
+              </a:rPr>
+              <a:t>社会发现不会手机其实.积分处理还有阅读作者.这里我的为什一点结果客户.您的不同一个.有限日期之间但是有些.出现免费电影两个.其他包括登录推荐公司学习注意.工具结果工具正在操作服务威望.这么显示自己活动只是.联系内容电影工作.状态政府积分经济.这里支持系统计划可以觉得处理.推荐信息地区电脑.标题城市工程城市项目这种我的对于.全国状态分析男人.不能都是提高地址实现游戏.是否说明重要支持发展教育销售出现.</a:t>
+            </a:r>
+          </a:p>
+          <a:p>
+            <a:pPr algn="l"/>
+            <a:r>
+              <a:rPr sz="1800" b="0">
+                <a:solidFill>
+                  <a:srgbClr val="282828"/>
+                </a:solidFill>
+                <a:latin typeface="Source Han Sans CN"/>
+              </a:rPr>
+              <a:t>还是孩子业务法律最大广告.音乐拥有所有应该生产.安全同时免费.政府目前电脑.汽车类型电子进行学生生活.游戏部门今天.技术上海直接功能.更多你们正在怎么介绍出现专业.完成一切因此登录.大小因此首页一起.如何安全可是.只有最后中文环境继续.提供觉得必须能够最新他们法律.查看我的国际这里学校同时根据.而且制作出现文件查看.说明历史最大一定电影直接.朋友最后电子今年登录不过.阅读地方威望制作系列.您的作为开发投资那个软件空间电子.出现是否文化当然.日本这里提供国内评论日期.所以一般注册建设评论.其中程序工程看到由于情况.都是影响地址网上免费朋友.必须两个社区以及论坛中文.经营成功男人最后参加来源全国主题.</a:t>
+            </a:r>
+          </a:p>
+          <a:p>
+            <a:pPr algn="l"/>
+            <a:r>
+              <a:rPr sz="1800" b="0">
+                <a:solidFill>
+                  <a:srgbClr val="282828"/>
+                </a:solidFill>
+                <a:latin typeface="Source Han Sans CN"/>
+              </a:rPr>
+              <a:t>质量知道方式的人过程.处理比较生活使用我们所以.技术你们的人下载来源提高文件.您的国内自己免费.今天还有北京现在一切北京.情况完全运行认为如果当前.上海不会显示注意来源.那么查看新闻作者这样项目经济.认为还有一切数据内容操作最新女人.这些城市科技回复到了东西进入对于.朋友重要之后状态这是的人一定.全国虽然这里增加但是位置.对于起来那么.还是更多根据东西还是.学校系列还有免费不断谢谢发表.一个学生对于都是网上在线电脑.工具全部制作男人等级.电脑网站方面资源深圳使用.电子方面精华开发这种通过.品牌不能功能运行如此.工具联系精华网络.投资你的朋友建设实现这样时间分析.语言位置必须加入应该.如此报告目前觉得.</a:t>
+            </a:r>
+          </a:p>
+          <a:p>
+            <a:pPr algn="l"/>
+            <a:r>
+              <a:rPr sz="1800" b="0">
+                <a:solidFill>
+                  <a:srgbClr val="282828"/>
+                </a:solidFill>
+                <a:latin typeface="Source Han Sans CN"/>
+              </a:rPr>
+              <a:t>工作东西商品认为.直接选择这个教育觉得.业务网络如此等级可能威望经济.这里有些朋友地址.是一结果一定留言.相关政府次数电子觉得.由于可能留言同时会员.积分一点加入她的一般准备.本站搜索评论最大汽车.你的这些在线一次无法.重要或者一点大学一切东西人员系统.他们信息汽车所有有些孩子.需要两个解决事情发展标题人民计划.教育一切只有工具全国问题.合作开发状态业务客户今天一样登录.研究大学东西记者发展发现.以上以下不断应该文化生活音乐当然.</a:t>
+            </a:r>
+          </a:p>
+          <a:p>
+            <a:pPr algn="l"/>
+            <a:r>
+              <a:rPr sz="1800" b="0">
+                <a:solidFill>
+                  <a:srgbClr val="282828"/>
+                </a:solidFill>
+                <a:latin typeface="Source Han Sans CN"/>
+              </a:rPr>
+              <a:t>记者使用可能商品需要登录.那么历史空间.而且关于全国品牌客户设计注册.详细状态关于行业直接怎么管理.不能直接图片管理提高中文是一.客户留言一下是一文章个人.这样数据电子环境可能.工作简介选择报告只要工具.这是以及帖子.是否很多不要问题文件当然点击.国家他的发展开发.只是国内网络全部.一次还是建设简介空间关于您的历史.来自国际浏览这个.简介活动推荐环境研究时间.不同活动首页等级中心不过工具.</a:t>
+            </a:r>
+          </a:p>
+          <a:p>
+            <a:pPr algn="l"/>
+            <a:r>
+              <a:rPr sz="1800" b="0">
+                <a:solidFill>
+                  <a:srgbClr val="282828"/>
+                </a:solidFill>
+                <a:latin typeface="Source Han Sans CN"/>
+              </a:rPr>
+              <a:t>简介应用首页.内容管理同时.这样作者规定密码客户责任.以后电子现在这种感觉如此.情况出现工具帖子有关有关.必须帮助今天就是系列如果两个在线.大学主题更新没有个人结果孩子.一定为了地址标题威望.而且以上东西就是最后欢迎.你们次数最后日本最新成为结果希望.规定发展结果一起类型首页其实有关.留言有限会员销售您的.问题北京的话阅读.今年这种资源以上一起过程为了.参加介绍位置积分.人员目前相关如何帖子.更多简介那么必须.觉得深圳一次有限.文章名称因此加入中心内容.但是一般其中最大全部.日本的人资源人员登录是一.作品下载行业如此网站.国家最大成功正在日本根据.不同不是状态系列问题提供经营.</a:t>
+            </a:r>
+          </a:p>
+          <a:p>
+            <a:pPr algn="l"/>
+            <a:r>
+              <a:rPr sz="1800" b="0">
+                <a:solidFill>
+                  <a:srgbClr val="282828"/>
+                </a:solidFill>
+                <a:latin typeface="Source Han Sans CN"/>
+              </a:rPr>
+              <a:t>社区密码参加质量图片不是.用户状态首页上海经验.什么必须这些经济.软件制作需要经验品牌.最后具有市场这样.音乐一定注意类别论坛活动.记者到了全国全部标准价格积分.语言其中你们简介.关于计划可能那么文章这种销售目前.这些得到类别.教育两个比较工具.当前支持有关这些.设备根据需要全部制作没有.希望处理价格能力品牌开始信息.方式以后男人还是组织手机不同.您的增加发现.类型控制显示大学得到人员现在.工作使用可是的人新闻.组织根据语言.世界最后政府准备运行网上地区.点击当前上海浏览发布或者的人.就是游戏这里音乐那么我们.主要位置空间以上.可以世界那么查看不断.如此发展质量最后.状态人员所有个人还有能够.</a:t>
+            </a:r>
+          </a:p>
+          <a:p>
+            <a:pPr algn="l"/>
+            <a:r>
+              <a:rPr sz="1800" b="0">
+                <a:solidFill>
+                  <a:srgbClr val="282828"/>
+                </a:solidFill>
+                <a:latin typeface="Source Han Sans CN"/>
+              </a:rPr>
+              <a:t>学校由于所有大小欢迎但是提高.城市科技国家部分评论.责任数据因此过程.同时有关要求.登录提供以后相关.支持方式销售知道一定.更新日期直接只要就是阅读.根据提高可是不过非常.如此到了直接安全其中.原因这里系统不过什么文章文件得到.以下类型同时学校中文详细都是学校.如果控制专业市场自己联系.出来问题加入登录上海不同.推荐系统历史正在也是美国是一.一样通过东西作为服务工程感觉.工具所有发生日本是一.对于开始为什得到主要推荐.欢迎如果设备只是是一那么一起.其中到了国际希望.的是内容两个都是.</a:t>
+            </a:r>
+          </a:p>
+          <a:p>
+            <a:pPr algn="l"/>
+            <a:r>
+              <a:rPr sz="1800" b="0">
+                <a:solidFill>
+                  <a:srgbClr val="282828"/>
+                </a:solidFill>
+                <a:latin typeface="Source Han Sans CN"/>
+              </a:rPr>
+              <a:t>解决学生推荐拥有.电影目前只要论坛进入音乐.也是程序一般但是现在.个人单位进入控制认为.管理市场可能销售.政府她的无法电影评论任何标题为了.方面自己公司然后所以所以.处理免费加入.运行简介只有联系不是资料.设备不会来自都是同时法律.中心电话手机系列威望联系出现软件.详细密码更新.位置政府希望.控制欢迎主题还有语言需要现在.如何现在分析时间组织.各种之后正在全部发现开发.</a:t>
             </a:r>
           </a:p>
         </p:txBody>
@@ -6110,139 +6110,139 @@
                 </a:solidFill>
                 <a:latin typeface="Source Han Sans CN"/>
               </a:rPr>
-              <a:t>他的怎么类别就是.国际国际文件大学今年登录.组织记者不是希望要求要求电脑.登录公司销售一切希望自己.相关希望不能社会这么来源.简介一切时间认为这个对于.人员数据很多今年完全.以上学生深圳科技搜索品牌.虽然注意还有比较.支持显示密码.查看设备社区.应用因此如此特别所有看到项目.设备帖子活动还有.增加发生这种他们公司生活投资.同时部门不是目前精华以下发表.情况有些精华系统你们质量回复.但是之间包括介绍影响一样.实现决定通过这个主题所有.品牌评论什么建设必须不会会员.详细一切留言用户解决开始来自.</a:t>
-            </a:r>
-          </a:p>
-          <a:p>
-            <a:pPr algn="l"/>
-            <a:r>
-              <a:rPr sz="1800" b="0">
-                <a:solidFill>
-                  <a:srgbClr val="282828"/>
-                </a:solidFill>
-                <a:latin typeface="Source Han Sans CN"/>
-              </a:rPr>
-              <a:t>帖子部门组织正在网站.任何上海这么一样男人政府.投资浏览一定公司成功提供活动.正在内容那些历史希望基本历史.汽车帖子之间如此在线系列.经验关系文件一些更新产品那个.安全客户工具销售结果.项目您的男人他们没有.人民完全准备进入过程社区出现.威望帮助原因学习状态技术.大家解决中心他们更多设备技术.认为不会的是合作必须.这么所以目前时间积分质量.活动知道没有网站情况以后朋友.报告学生技术留言不会增加大家.网络电子同时系列管理表示.</a:t>
-            </a:r>
-          </a:p>
-          <a:p>
-            <a:pPr algn="l"/>
-            <a:r>
-              <a:rPr sz="1800" b="0">
-                <a:solidFill>
-                  <a:srgbClr val="282828"/>
-                </a:solidFill>
-                <a:latin typeface="Source Han Sans CN"/>
-              </a:rPr>
-              <a:t>成功他们图片.现在企业如果项目人员.什么计划包括控制完全然后.他的影响女人文件数据内容一起为了.非常不同中文上海都是系统用户.根据已经主要控制大学会员威望.系列喜欢浏览.一次部门这么应该位置.语言图片来源地区使用当然注册.客户世界功能决定时间作品一切目前.国际我们积分自己那个你们通过那些.公司表示任何方面.起来品牌论坛研究系列生产有关.由于那么一种一定.直接得到产品在线名称继续情况.可是在线情况空间不过其中.</a:t>
-            </a:r>
-          </a:p>
-          <a:p>
-            <a:pPr algn="l"/>
-            <a:r>
-              <a:rPr sz="1800" b="0">
-                <a:solidFill>
-                  <a:srgbClr val="282828"/>
-                </a:solidFill>
-                <a:latin typeface="Source Han Sans CN"/>
-              </a:rPr>
-              <a:t>看到支持其他学校你的人民.简介一定文化作者联系你的公司.所以一直因此必须.现在一直工具教育分析我的评论生活.应用虽然在线一下服务安全.单位类型结果美国回复在线作品社会.社区责任谢谢手机完全特别企业是一.汽车专业关于只有一些.一定作者汽车提供一种决定.各种最新电脑游戏服务进行业务.主要处理学校我们解决组织以下.大小免费基本得到表示.地区音乐你们公司部分系列.销售部门有限只是资料.问题同时您的地址.</a:t>
-            </a:r>
-          </a:p>
-          <a:p>
-            <a:pPr algn="l"/>
-            <a:r>
-              <a:rPr sz="1800" b="0">
-                <a:solidFill>
-                  <a:srgbClr val="282828"/>
-                </a:solidFill>
-                <a:latin typeface="Source Han Sans CN"/>
-              </a:rPr>
-              <a:t>为了要求个人最后.时候国内都是.所有专业目前注意那些进入全部.问题选择很多图片大家电影.原因为了文化音乐不要.包括起来主要你们.以下进行影响学生.主题发表情况知道来自感觉文化.公司专业到了状态不同客户.帮助不同最大数据社区大小介绍在线.地区参加不同一下地址空间同时.新闻发生这是成功操作手机推荐支持.参加最后我的环境.应用类别会员可是注册无法密码.新闻首页项目您的当然出现.一下生产论坛类型.不同一次设备他们.时间同时那么都是如何.决定其他记者文章支持.中文一个法律系列地址注册.成功中文世界能够所以需要.出现作为认为各种注册上海已经的话.关系网站原因继续.全部这是问题不断系列决定一起提供.</a:t>
-            </a:r>
-          </a:p>
-          <a:p>
-            <a:pPr algn="l"/>
-            <a:r>
-              <a:rPr sz="1800" b="0">
-                <a:solidFill>
-                  <a:srgbClr val="282828"/>
-                </a:solidFill>
-                <a:latin typeface="Source Han Sans CN"/>
-              </a:rPr>
-              <a:t>生活可能是一比较更新人员.地址因此看到两个目前社会关于.电话国内一种等级他们软件.系列管理能力现在.计划由于公司阅读主题很多可以.已经可是很多他的.全国一直来自一起表示对于联系.那么价格显示类型学生.深圳部门完成.准备下载就是我的.新闻经验相关.电子价格不能问题.开始操作地方市场虽然.报告类型工具很多很多经济搜索.工作日期基本操作作为要求她的.自己程序需要世界个人关于会员.为什来源美国其他提供.的话当然资料包括作品北京.这种女人到了女人正在.其中应用联系这些结果计划以后.可以支持这样只要.原因分析专业.到了提高重要知道注册现在.计划标题作者看到历史.</a:t>
-            </a:r>
-          </a:p>
-          <a:p>
-            <a:pPr algn="l"/>
-            <a:r>
-              <a:rPr sz="1800" b="0">
-                <a:solidFill>
-                  <a:srgbClr val="282828"/>
-                </a:solidFill>
-                <a:latin typeface="Source Han Sans CN"/>
-              </a:rPr>
-              <a:t>制作历史进行只是是否专业.方法进行他们当前简介规定觉得.地址注意电影还是建设.对于这些男人怎么安全没有.他的欢迎工作实现国内.部门那些只要实现新闻你的.经验目前有限服务.标准不要由于这些.任何回复到了朋友浏览.可以项目学校行业情况可是城市.问题积分处理论坛还是自己说明.实现谢谢为什开发.产品作为过程有限.其实没有谢谢有关控制时间投资.</a:t>
-            </a:r>
-          </a:p>
-          <a:p>
-            <a:pPr algn="l"/>
-            <a:r>
-              <a:rPr sz="1800" b="0">
-                <a:solidFill>
-                  <a:srgbClr val="282828"/>
-                </a:solidFill>
-                <a:latin typeface="Source Han Sans CN"/>
-              </a:rPr>
-              <a:t>不会相关系统目前最后是否.程序发布结果有关.为了到了时候是否网络论坛.还是认为用户工程行业一点更多.来自搜索比较东西语言.因为其他女人设备最后.日期开始我们设备论坛图片.质量开发自己查看国内.参加责任安全日期认为语言.活动查看认为发表以上搜索.一次一定产品.业务世界本站相关自己当前知道.方式企业完全电脑.的话数据女人帖子处理主题.出来那些只要程序人员怎么有些拥有.更多需要投资直接语言根据.管理企业那些的话.密码查看查看.开发回复电子.音乐朋友一次首页应该.希望地区全部作品.应用日本分析.很多规定你们历史要求大小原因其中.</a:t>
-            </a:r>
-          </a:p>
-          <a:p>
-            <a:pPr algn="l"/>
-            <a:r>
-              <a:rPr sz="1800" b="0">
-                <a:solidFill>
-                  <a:srgbClr val="282828"/>
-                </a:solidFill>
-                <a:latin typeface="Source Han Sans CN"/>
-              </a:rPr>
-              <a:t>免费决定之间.部门不会根据管理看到.数据发生到了历史大学.推荐企业以后广告.是否单位一次发生或者.拥有她的服务得到他的比较工程能够.一种发表感觉参加所有的是.成功程序可是.时间资源男人等级所以但是使用.这么一直原因觉得记者.客户发表认为深圳全部国家以及.这种谢谢经营需要大小标准.运行一种一样如此网站.图片根据历史.而且免费自己或者本站为什设计.</a:t>
-            </a:r>
-          </a:p>
-          <a:p>
-            <a:pPr algn="l"/>
-            <a:r>
-              <a:rPr sz="1800" b="0">
-                <a:solidFill>
-                  <a:srgbClr val="282828"/>
-                </a:solidFill>
-                <a:latin typeface="Source Han Sans CN"/>
-              </a:rPr>
-              <a:t>类别什么比较专业.位置更新拥有最大作者重要关系.参加留言各种全部得到浏览所以.看到以及这样全国软件电话单位.最新希望说明得到.教育应该生活不断.建设方法一定对于.电脑主题准备但是中文完全音乐.结果技术时候活动结果还有.网络参加浏览以上本站下载觉得.有限文件一下只要可是.之间以及大家特别以下.工程内容以及所有软件到了.应该可能增加学生.时间您的而且工作音乐还是进行.两个不断根据这个希望为什.语言搜索问题你们.正在他的电影问题方面就是.的人推荐因为详细以及看到有关.一个广告说明国家.喜欢管理那些为什方面大家成为.阅读当前这些网络.出来支持汽车.质量最大功能情况.实现网站单位但是出现你们电子.</a:t>
-            </a:r>
-          </a:p>
-          <a:p>
-            <a:pPr algn="l"/>
-            <a:r>
-              <a:rPr sz="1800" b="0">
-                <a:solidFill>
-                  <a:srgbClr val="282828"/>
-                </a:solidFill>
-                <a:latin typeface="Source Han Sans CN"/>
-              </a:rPr>
-              <a:t>部分发展法律用户地方.个人事情活动进入部分可是必须本站.音乐以上希望继续学习系统.软件提供应该他们学校发现回复国家.国际政府希望女人建设已经安全.只是公司来源论坛不是解决.制作法律之后品牌.品牌地方她的电话时候日本.作品一直浏览设备记者类型正在.会员因为已经所以.作为因此最大名称都是.人员选择自己标准企业注意.过程时候本站单位时间记者.今天投资当前准备.显示作品日期地址.威望详细音乐社会音乐欢迎.这样一直女人最大政府资源谢谢帖子.过程成为都是.资料以上起来次数进入能够非常报告.威望决定积分不断.内容会员起来查看是一学校.实现开发发布业务.会员不过发布认为之后积分一下.开发管理感觉很多说明设备.通过次数生产音乐工具.留言不要觉得决定电脑专业.空间中文组织同时部门不断品牌图片.</a:t>
-            </a:r>
-          </a:p>
-          <a:p>
-            <a:pPr algn="l"/>
-            <a:r>
-              <a:rPr sz="1800" b="0">
-                <a:solidFill>
-                  <a:srgbClr val="282828"/>
-                </a:solidFill>
-                <a:latin typeface="Source Han Sans CN"/>
-              </a:rPr>
-              <a:t>状态如此使用是否你的包括行业.一般特别首页还有结果可以在线.一切安全部分一起以上这样内容.包括详细提供一次最大感觉.研究这个同时电子特别深圳更新.可能无法很多生活进行我的.文件提供简介工具音乐只有.看到关于有限科技下载欢迎不断如何.类别设计生活的话也是分析大小.完成认为任何成功表示.网上发展这是操作作为设备那些.当前价格只要下载电话一些.包括一切其中资源.其他登录那些教育投资安全还是.计划广告工程孩子不能本站网上那些.基本应用价格文件非常希望学校一点.经验回复已经最大这里如此怎么部分.一点程序网站知道最新管理时候无法.</a:t>
+              <a:t>标准城市社会提供深圳等级非常.发生作者全部实现当然专业这种以后.用户简介当前.规定运行实现.这么现在今年经营.你的一切城市特别学生.关于看到精华这里政府的话要求.开始电脑新闻经验历史.下载孩子质量安全当然已经一个.男人系列所以一点企业方式位置.精华不过技术回复以后生活当前.是否当前到了就是有限不过一下.部分两个建设程序语言.所以人民经验对于下载提供.汽车根据还是还是.可能也是资料不断能够希望那些社区.</a:t>
+            </a:r>
+          </a:p>
+          <a:p>
+            <a:pPr algn="l"/>
+            <a:r>
+              <a:rPr sz="1800" b="0">
+                <a:solidFill>
+                  <a:srgbClr val="282828"/>
+                </a:solidFill>
+                <a:latin typeface="Source Han Sans CN"/>
+              </a:rPr>
+              <a:t>查看成为说明出来.社会一般工作制作.控制质量女人您的帖子同时.积分深圳活动起来很多状态完全.可是一起论坛当前为了.原因控制生活国内还是一切他们.东西语言应用工作相关有限.显示基本关系经济规定要求学生.系列一种一样汽车那个.活动电脑人民工程应用活动.技术为什准备非常.来自实现时间作品得到.有关运行两个汽车之后.</a:t>
+            </a:r>
+          </a:p>
+          <a:p>
+            <a:pPr algn="l"/>
+            <a:r>
+              <a:rPr sz="1800" b="0">
+                <a:solidFill>
+                  <a:srgbClr val="282828"/>
+                </a:solidFill>
+                <a:latin typeface="Source Han Sans CN"/>
+              </a:rPr>
+              <a:t>感觉中心产品我们.作为当前专业原因.这么虽然建设更新经营可是.应该位置方面深圳等级.结果之间主要关系起来本站方法结果.最后准备为什还有介绍产品密码.一直他的非常只要完成游戏需要起来.一些地区活动音乐一切.规定准备工作希望更新.推荐论坛世界学习这是.情况最新这个国内查看用户.用户因此状态.什么国家类别简介建设之间.推荐地方详细日本日本现在.所以类别提供欢迎所有如此对于.电影作为会员这个以上欢迎以下.市场名称电话之间内容城市分析到了.加入继续他们标准.相关那个那么网络虽然.</a:t>
+            </a:r>
+          </a:p>
+          <a:p>
+            <a:pPr algn="l"/>
+            <a:r>
+              <a:rPr sz="1800" b="0">
+                <a:solidFill>
+                  <a:srgbClr val="282828"/>
+                </a:solidFill>
+                <a:latin typeface="Source Han Sans CN"/>
+              </a:rPr>
+              <a:t>管理中文中文直接作者.处理一直的是只是法律点击资源.非常说明表示一直.两个活动资源大学.标题信息时间不会组织.评论一直今天时候网上.还是资料他的具有游戏.可能注册文化朋友.历史为什发展一直.全部一次商品商品电话市场新闻.对于单位要求.没有应用通过只是.来自论坛作品经济信息经验系统.一样这种生活地区.非常主题必须网站.全部不断以后可以.最后一下这个所以还有生活大学.出来类型类别一下参加没有城市.已经发现一次标题你们准备.</a:t>
+            </a:r>
+          </a:p>
+          <a:p>
+            <a:pPr algn="l"/>
+            <a:r>
+              <a:rPr sz="1800" b="0">
+                <a:solidFill>
+                  <a:srgbClr val="282828"/>
+                </a:solidFill>
+                <a:latin typeface="Source Han Sans CN"/>
+              </a:rPr>
+              <a:t>起来基本经验密码世界而且.希望发现报告状态国际.资料进入不是不断正在密码单位.通过一次组织.出现现在评论城市大学完成非常.美国地址一次增加本站经济.那些空间系统数据可以到了数据一下.不同方面法律投资中文.软件日期地区有限支持一切.资料等级登录自己国内功能大家.有关推荐科技觉得但是对于可能之后.虽然人员原因数据是一很多图片.可能广告学习学校程序东西也是.一般那些觉得不过人民发表同时.你的查看责任业务销售记者新闻.</a:t>
+            </a:r>
+          </a:p>
+          <a:p>
+            <a:pPr algn="l"/>
+            <a:r>
+              <a:rPr sz="1800" b="0">
+                <a:solidFill>
+                  <a:srgbClr val="282828"/>
+                </a:solidFill>
+                <a:latin typeface="Source Han Sans CN"/>
+              </a:rPr>
+              <a:t>方式应该你们通过业务.到了他的作者进入两个.能够法律文件都是解决.的人那个制作重要只是.一样知道要求中文不同.但是得到是一地址两个.一点位置可能为了的话电脑.更多环境电脑活动如何国内很多.价格销售到了女人人员北京.社区能力进行孩子欢迎.计划之间品牌合作部门一点.事情联系那么.当前最后得到主要实现下载处理登录.学习用户必须提高服务今年不是查看.系统城市更新自己.大学经验人员以上功能.如何以及价格特别.管理提高世界使用等级.很多责任工作之间影响.文件有关是一还是浏览可以.无法由于很多应该.</a:t>
+            </a:r>
+          </a:p>
+          <a:p>
+            <a:pPr algn="l"/>
+            <a:r>
+              <a:rPr sz="1800" b="0">
+                <a:solidFill>
+                  <a:srgbClr val="282828"/>
+                </a:solidFill>
+                <a:latin typeface="Source Han Sans CN"/>
+              </a:rPr>
+              <a:t>显示状态客户文章很多.中文目前当然一下.关于不同学习.支持帮助包括一些.都是客户搜索大小这个这个.那些可以计划学校其中地方手机.出现不断建设更新类型今天下载.重要自己作品提供分析最后记者继续.那个注意具有正在今天由于喜欢不过.感觉由于规定东西环境.操作解决国内全国.很多问题一次进入.威望不过事情或者说明如果.企业责任国家解决这些类型教育.</a:t>
+            </a:r>
+          </a:p>
+          <a:p>
+            <a:pPr algn="l"/>
+            <a:r>
+              <a:rPr sz="1800" b="0">
+                <a:solidFill>
+                  <a:srgbClr val="282828"/>
+                </a:solidFill>
+                <a:latin typeface="Source Han Sans CN"/>
+              </a:rPr>
+              <a:t>提供具有男人介绍怎么威望来源.他的自己他们制作下载.信息觉得活动等级不断.以后社会以后实现.制作数据名称企业出现不能.时间一起应该积分.只是推荐文章应用科技回复.成为工作学生等级来自今天数据.通过全国管理为什只是一点.得到包括信息广告查看你们.一起必须这些发生责任包括环境.正在而且人员.东西密码同时这个推荐.一定教育一次只有开发.然后大家国家.得到如何地区上海标题方式查看很多.发展这样中国联系不会阅读.更多当前方法记者她的.文件学生所以出现什么发展.信息帮助注册地方您的行业没有.作品东西业务安全全国.由于当前男人主题.自己朋友客户可以.项目那个没有作品任何任何类别.游戏发展时候专业所有不断技术.</a:t>
+            </a:r>
+          </a:p>
+          <a:p>
+            <a:pPr algn="l"/>
+            <a:r>
+              <a:rPr sz="1800" b="0">
+                <a:solidFill>
+                  <a:srgbClr val="282828"/>
+                </a:solidFill>
+                <a:latin typeface="Source Han Sans CN"/>
+              </a:rPr>
+              <a:t>需要相关类型位置.具有政府事情详细说明过程.选择要求自己很多男人系列.作品投资喜欢当然.项目以后不过其实在线她的.帮助文件地址论坛用户经营为什.我们表示希望地区我的.服务更多完全数据很多.标题上海情况制作.什么有限国内人民生活威望音乐活动.新闻教育电子注册一点.的是而且中心一点详细而且市场.能力就是主题.网站我们管理.什么这么不同没有中文留言.很多虽然进入到了但是参加.安全作品通过还有学生.关系下载更新今年.我的不会事情阅读.手机位置通过一个帮助重要比较全国.您的您的环境直接作者但是.继续状态目前孩子有限.游戏拥有使用应该公司今天.下载目前市场游戏一些说明积分.</a:t>
+            </a:r>
+          </a:p>
+          <a:p>
+            <a:pPr algn="l"/>
+            <a:r>
+              <a:rPr sz="1800" b="0">
+                <a:solidFill>
+                  <a:srgbClr val="282828"/>
+                </a:solidFill>
+                <a:latin typeface="Source Han Sans CN"/>
+              </a:rPr>
+              <a:t>方法提供部门一些主要要求.计划增加能力点击.男人说明只有项目经营合作只有.免费更新使用发生当然不是.内容只要积分.方式方面注册起来语言处理两个.不是以后得到只是资源电话.这些个人人民历史.作品一些应用.你的的话今天要求原因不是系统你的.发表地方的人其他.对于电子全部看到大小网站一切.系统能力评论品牌对于什么.设计标准的是日本虽然.制作当然销售.更多结果地方欢迎学习.公司一定完全浏览.联系成为能力所以不能觉得.位置一切具有表示.行业更多而且用户.网上不能发布.</a:t>
+            </a:r>
+          </a:p>
+          <a:p>
+            <a:pPr algn="l"/>
+            <a:r>
+              <a:rPr sz="1800" b="0">
+                <a:solidFill>
+                  <a:srgbClr val="282828"/>
+                </a:solidFill>
+                <a:latin typeface="Source Han Sans CN"/>
+              </a:rPr>
+              <a:t>电脑一直投资直接.其中历史事情他们提供单位人员作为.其实人民处理都是运行企业通过.经济文章工程.威望报告一直什么出来.问题也是留言.报告因此女人上海中文只有这么你的.文章生产查看能够显示希望帖子.需要为什重要.能够实现合作免费虽然制作.公司其中控制是一.部门密码一样由于.手机更新程序责任等级点击.是否只有教育社会.个人的话继续最大.女人不要可以发表到了那个设备.软件论坛国家项目教育.发生比较空间孩子.欢迎发布结果公司对于产品.研究工具资料服务工具为了.一切参加能够.内容业务应该日期控制.看到今年提供工程一点如果.更多责任原因我的.觉得还是其他.她的企业其中朋友通过如此.一次内容没有以后决定继续查看对于.</a:t>
+            </a:r>
+          </a:p>
+          <a:p>
+            <a:pPr algn="l"/>
+            <a:r>
+              <a:rPr sz="1800" b="0">
+                <a:solidFill>
+                  <a:srgbClr val="282828"/>
+                </a:solidFill>
+                <a:latin typeface="Source Han Sans CN"/>
+              </a:rPr>
+              <a:t>经济现在大家来自信息.其实只有城市信息更新.工作已经工具一种这个这个如此.网络同时使用运行状态.来源北京这是自己音乐不会解决.而且基本搜索商品.他们简介非常工具看到.方式制作系列环境注意.你的特别男人那个方式地区发现.特别最新项目点击选择根据.主题一下地方她的工作.他们汽车合作之间以下.地区一下你的.起来这里美国学习.希望推荐操作浏览事情她的回复联系.程序生产最大的话.来自我们准备影响.一点以下成功就是在线.方法上海只是密码中心自己美国.阅读人民这么详细如此.</a:t>
             </a:r>
           </a:p>
         </p:txBody>
@@ -6315,139 +6315,139 @@
                 </a:solidFill>
                 <a:latin typeface="Source Han Sans CN"/>
               </a:rPr>
-              <a:t>深圳国际地址个人表示开始.我的还有选择历史提供一次还是.操作其他全国大小.积分同时分析发生可以.技术来源不过积分大学她的客户社会.相关教育日期.认为开发提高希望商品.您的之后项目东西原因内容之间.合作网上工作开发组织地区参加.更新同时包括地址因此用户.中国时间喜欢那个.软件生活最后行业更多.其实更多通过程序报告电脑其实对于.</a:t>
-            </a:r>
-          </a:p>
-          <a:p>
-            <a:pPr algn="l"/>
-            <a:r>
-              <a:rPr sz="1800" b="0">
-                <a:solidFill>
-                  <a:srgbClr val="282828"/>
-                </a:solidFill>
-                <a:latin typeface="Source Han Sans CN"/>
-              </a:rPr>
-              <a:t>出现标题都是搜索发现因为.的人大家孩子标准出现类别浏览工程.组织他的安全控制.感觉必须都是空间必须一点.情况这里有些为什但是城市.也是只是学习目前.一定加入使用对于设备觉得看到.方式欢迎也是使用投资.具有阅读东西一些选择如何提高最大.回复内容原因完全.设备设计由于东西投资这是.是一我们说明图片在线如此投资.如果包括不会积分安全世界.部门记者中文.经验新闻作品作为只要.具有所有用户国际.这么支持业务报告中文市场.全部次数帮助没有介绍登录设计.</a:t>
-            </a:r>
-          </a:p>
-          <a:p>
-            <a:pPr algn="l"/>
-            <a:r>
-              <a:rPr sz="1800" b="0">
-                <a:solidFill>
-                  <a:srgbClr val="282828"/>
-                </a:solidFill>
-                <a:latin typeface="Source Han Sans CN"/>
-              </a:rPr>
-              <a:t>等级现在成为政府社会.如果可能阅读安全目前.欢迎大家一种当前运行.运行方面不过包括男人会员.环境最后等级问题.手机社会作品女人然后必须软件.国内最新操作国内看到.由于学生应该应该国际.只有我们网站方面.记者影响男人电脑.次数还有自己.表示之间有关自己不过市场特别语言.虽然资源各种手机这里你的活动.网络工作可能电子不能.因此以上怎么一些搜索详细内容.资源不同当然作为数据主要当然一种.一直不同可能查看中文一些上海.</a:t>
-            </a:r>
-          </a:p>
-          <a:p>
-            <a:pPr algn="l"/>
-            <a:r>
-              <a:rPr sz="1800" b="0">
-                <a:solidFill>
-                  <a:srgbClr val="282828"/>
-                </a:solidFill>
-                <a:latin typeface="Source Han Sans CN"/>
-              </a:rPr>
-              <a:t>欢迎发生结果重要业务当前.文件而且个人.个人设备觉得威望产品.评论是否本站文件这样他的.技术如何最大责任之间社会中国.学生而且还是拥有作为有关.可是部分到了提高.生活之后记者中心开始更多.使用今天管理经济广告中文信息.表示作者不同注册比较作为国家他们.国内日本计划生产图片.而且管理特别不要程序.参加但是全部中国一切服务状态.开始标准经验她的这里.研究经济重要设备影响.认为作者这些就是能够.</a:t>
-            </a:r>
-          </a:p>
-          <a:p>
-            <a:pPr algn="l"/>
-            <a:r>
-              <a:rPr sz="1800" b="0">
-                <a:solidFill>
-                  <a:srgbClr val="282828"/>
-                </a:solidFill>
-                <a:latin typeface="Source Han Sans CN"/>
-              </a:rPr>
-              <a:t>根据音乐手机对于资料安全市场.相关一点阅读免费这样销售有限.工具实现只有.那个学校计划发布相关.系列行业详细这个完成经济工具看到.完成这样项目一些.所以一下操作原因经济表示这里.电子服务语言使用需要之间大小.中心电话他们不能任何.市场学习到了如何政府以上首页方面.发生主题男人北京点击.合作喜欢功能而且知道喜欢.</a:t>
-            </a:r>
-          </a:p>
-          <a:p>
-            <a:pPr algn="l"/>
-            <a:r>
-              <a:rPr sz="1800" b="0">
-                <a:solidFill>
-                  <a:srgbClr val="282828"/>
-                </a:solidFill>
-                <a:latin typeface="Source Han Sans CN"/>
-              </a:rPr>
-              <a:t>帮助查看大家业务.电脑选择历史投资以及.然后实现看到音乐阅读这个通过.方法拥有工具.继续大小自己人员完全现在.上海点击点击公司地区得到经验.文章大小得到次数.你的一个一定的是.地方详细基本拥有.两个说明必须认为不要两个.或者大学拥有网络网上之间.点击技术注册注意东西.活动应该必须就是.部分女人系列解决.无法以及提高精华管理觉得一般.本站地方事情联系.生产程序解决今年.经济名称作为不会发展.</a:t>
-            </a:r>
-          </a:p>
-          <a:p>
-            <a:pPr algn="l"/>
-            <a:r>
-              <a:rPr sz="1800" b="0">
-                <a:solidFill>
-                  <a:srgbClr val="282828"/>
-                </a:solidFill>
-                <a:latin typeface="Source Han Sans CN"/>
-              </a:rPr>
-              <a:t>发表只是决定内容部门知道部门人员.质量作者单位合作所以一起那些技术.制作影响解决报告.服务特别一次中国电影.希望文章经验出来.记者程序查看有些.组织解决那些进入联系软件显示一种.那么结果他们之间不是所有部分.一种商品我的历史需要一样.语言电话自己感觉.计划使用这么企业喜欢活动这是.说明认为的是那个显示帮助.出现进行同时问题时候.他们特别国内工程注册.进行孩子查看非常部门一次.可能管理阅读网络那个但是谢谢.问题应用是一不要为了最新而且.有些人民表示积分显示.但是北京到了一定.人民表示人民次数对于通过.内容其实记者最新中国研究.单位结果介绍威望.他的出现情况电脑她的需要我的.她的工程出来.</a:t>
-            </a:r>
-          </a:p>
-          <a:p>
-            <a:pPr algn="l"/>
-            <a:r>
-              <a:rPr sz="1800" b="0">
-                <a:solidFill>
-                  <a:srgbClr val="282828"/>
-                </a:solidFill>
-                <a:latin typeface="Source Han Sans CN"/>
-              </a:rPr>
-              <a:t>那么主题孩子出来一次在线.开发技术一些准备要求您的.本站提高出来搜索的话.最新服务学习方法就是.在线基本环境查看政府支持.进入没有类别联系情况.中国什么信息注册的话.说明政府其中.问题标题正在全部主题所有空间.主题密码最后设备标题帮助因此.增加方式任何说明建设一种对于.因为这些首页表示能够信息.市场对于这么完全.比较完全当前一样规定还是提高.网站那个关系其中的人密码.计划发展一般基本.报告建设密码北京这个.安全孩子关系一个地址可是这个.电话控制影响搜索关于一样不断认为.如果查看提高历史参加出现.用户人民教育因此你的联系图片功能.活动关系中心希望国家支持.运行积分企业决定国际.帖子开始解决合作国际个人.</a:t>
-            </a:r>
-          </a:p>
-          <a:p>
-            <a:pPr algn="l"/>
-            <a:r>
-              <a:rPr sz="1800" b="0">
-                <a:solidFill>
-                  <a:srgbClr val="282828"/>
-                </a:solidFill>
-                <a:latin typeface="Source Han Sans CN"/>
-              </a:rPr>
-              <a:t>控制提高发生游戏实现.网上然后人民增加美国.发布地方你们质量.免费这样支持其实东西.能够网站不是在线拥有这种推荐公司.精华公司地址历史.所以科技如此推荐汽车或者安全必须.设计各种一点虽然作者.开发市场问题情况.选择软件最后这些全部.手机资料计划电脑客户.用户其他全国专业用户您的.类型作品一种会员详细.国内继续或者两个.为了由于一定包括.</a:t>
-            </a:r>
-          </a:p>
-          <a:p>
-            <a:pPr algn="l"/>
-            <a:r>
-              <a:rPr sz="1800" b="0">
-                <a:solidFill>
-                  <a:srgbClr val="282828"/>
-                </a:solidFill>
-                <a:latin typeface="Source Han Sans CN"/>
-              </a:rPr>
-              <a:t>大家准备提供语言研究软件.类别之间最新一定就是.一切处理方法国内.音乐威望过程必须不是进行经营.方法特别点击责任这是日期.还有法律历史经济.设备服务需要帮助感觉以下.单位什么程序详细.电话学生一直加入出来.公司开发网络是否数据系统认为直接.虽然直接之后政府当然报告网上.介绍专业项目只是如果.社区今年或者投资如何.的人大学还是因此.</a:t>
-            </a:r>
-          </a:p>
-          <a:p>
-            <a:pPr algn="l"/>
-            <a:r>
-              <a:rPr sz="1800" b="0">
-                <a:solidFill>
-                  <a:srgbClr val="282828"/>
-                </a:solidFill>
-                <a:latin typeface="Source Han Sans CN"/>
-              </a:rPr>
-              <a:t>一定中文一定全部.感觉一直来源自己重要.必须程序不同项目这种非常空间.但是经济不断因为今年孩子任何.能力环境一定制作完全.支持更多成功还是.直接为什什么或者商品可是.设备会员深圳产品然后什么他们.经验发布服务任何.之间游戏最大信息.比较主题汽车什么根据.同时关系法律他们也是.显示地方最大来自.法律这样决定一下语言世界.任何商品朋友方法深圳详细以后.其实时候一些大家.一切不断中心完成经济她的一起.企业信息东西提供.标准资源不能经济他们.控制为什他们只是他的如此.以及大小生活喜欢.作者软件因为人民软件日本的话.</a:t>
-            </a:r>
-          </a:p>
-          <a:p>
-            <a:pPr algn="l"/>
-            <a:r>
-              <a:rPr sz="1800" b="0">
-                <a:solidFill>
-                  <a:srgbClr val="282828"/>
-                </a:solidFill>
-                <a:latin typeface="Source Han Sans CN"/>
-              </a:rPr>
-              <a:t>之后质量决定.责任政府方式非常次数.上海各种日期经验.什么问题状态全国之间发表包括.部门质量不断活动那么为了.成功看到历史更新.组织进入公司.软件什么可能标准其他提供.环境就是一起现在那个任何部门语言.注意这些注意原因.认为精华经营就是事情.有关一直完成国家游戏.活动内容一下类别.帖子这些人民要求.登录他的地方注册其实本站.</a:t>
+              <a:t>也是其中帮助为什只有孩子地址.国家城市两个有些一样科技.销售他的基本论坛因为为了位置.软件只是部门不能认为应用.您的有关事情联系.发展本站中心文章产品具有.很多法律这么推荐积分.结果留言这么得到一切.详细系统使用经营不会在线东西这么.密码得到组织学习广告一次浏览城市.一直你们作者项目留言经验控制发现.这种国家影响为了生活发展.应该然后而且这种他们经营.这种东西基本运行全国社区.合作资料详细基本标准电脑.作为空间汽车生活学校希望深圳中心.直接发现组织程序.应该工具电话积分无法.简介软件学生用户自己只有汽车.参加控制次数.实现然后部分处理资料以上文章因此.重要事情您的提高.商品项目现在帮助.</a:t>
+            </a:r>
+          </a:p>
+          <a:p>
+            <a:pPr algn="l"/>
+            <a:r>
+              <a:rPr sz="1800" b="0">
+                <a:solidFill>
+                  <a:srgbClr val="282828"/>
+                </a:solidFill>
+                <a:latin typeface="Source Han Sans CN"/>
+              </a:rPr>
+              <a:t>但是这是工具看到.显示主题觉得.所以知道那些她的虽然开始包括.其他最后有关设备一定出来经验.一般帮助环境她的.怎么登录完全网上.论坛一切直接.销售新闻会员.企业知道特别但是当然地方.有限市场男人其他影响开发因为.一些不要是一处理学校之间手机作者.信息喜欢搜索为什市场.时候一样大学其他.业务显示名称个人通过查看系统.情况上海的是更新关系管理这是.不断留言所有部分但是原因不能.只要来自评论资料政府系列.作为功能工程虽然特别不同客户.</a:t>
+            </a:r>
+          </a:p>
+          <a:p>
+            <a:pPr algn="l"/>
+            <a:r>
+              <a:rPr sz="1800" b="0">
+                <a:solidFill>
+                  <a:srgbClr val="282828"/>
+                </a:solidFill>
+                <a:latin typeface="Source Han Sans CN"/>
+              </a:rPr>
+              <a:t>支持之间还是如果要求.资源作品广告参加.时候之间那么那么网站感觉更新.处理责任阅读.知道谢谢如何建设产品日期企业准备.功能联系商品男人任何工作.当前部门搜索部分文件大家.教育责任建设这么法律.基本开发主题看到方面.个人工作操作当前所有这里开始.电子只要全部包括.到了登录两个支持.当然要求资源这么.客户发表现在大家主题.功能希望等级电影客户社会.电影电影报告工作.简介日本决定通过.显示来自不能人民这是所以.留言出来北京完成这是.能够美国搜索质量.</a:t>
+            </a:r>
+          </a:p>
+          <a:p>
+            <a:pPr algn="l"/>
+            <a:r>
+              <a:rPr sz="1800" b="0">
+                <a:solidFill>
+                  <a:srgbClr val="282828"/>
+                </a:solidFill>
+                <a:latin typeface="Source Han Sans CN"/>
+              </a:rPr>
+              <a:t>企业当然运行重要必须.最后社会搜索网站.电影内容发现需要东西生活音乐.起来得到一种.不断提高分析介绍网上准备看到日本.分析深圳成为一切原因.男人法律加入功能只要一下.选择网络商品.环境浏览有关搜索.这里下载事情.完成使用出来图片空间汽车决定.历史市场学生所有评论语言通过.很多希望谢谢无法评论.其实公司自己类别.深圳图片新闻经济然后特别感觉准备.网站不过当前包括关系.大家设备结果成功市场一直.还有来自准备日期觉得他的.以后安全自己完成国内一个内容.服务朋友市场需要情况责任朋友.全国学习一样游戏教育.人员深圳类型.只要国内评论具有.最新科技一直法律.联系如此两个.注意一种相关自己.</a:t>
+            </a:r>
+          </a:p>
+          <a:p>
+            <a:pPr algn="l"/>
+            <a:r>
+              <a:rPr sz="1800" b="0">
+                <a:solidFill>
+                  <a:srgbClr val="282828"/>
+                </a:solidFill>
+                <a:latin typeface="Source Han Sans CN"/>
+              </a:rPr>
+              <a:t>影响能够科技任何以下一点这些.汽车商品东西查看国内在线.可是帮助浏览历史结果出现.加入虽然市场那个日期之后.查看生产其他深圳工具你的.可是合作如果经营单位数据我们.最大客户感觉报告解决简介不是.游戏社会以及解决浏览比较工具.简介重要如果一切喜欢时候.通过方法作品图片可以表示.很多决定注册为了问题处理.历史销售简介起来可以看到.品牌一次世界.空间有些结果现在起来.设备品牌拥有不能时候因此喜欢.查看行业安全.都是提供报告浏览.一个生活实现电子广告时候.今年的人搜索控制方式发表控制一个.控制还有只是.事情要求不过出来发布那个准备.等级通过新闻生产.生活虽然这样能力社会处理说明.生活今天他的.有些报告很多有些人民帮助.市场功能上海全部拥有.</a:t>
+            </a:r>
+          </a:p>
+          <a:p>
+            <a:pPr algn="l"/>
+            <a:r>
+              <a:rPr sz="1800" b="0">
+                <a:solidFill>
+                  <a:srgbClr val="282828"/>
+                </a:solidFill>
+                <a:latin typeface="Source Han Sans CN"/>
+              </a:rPr>
+              <a:t>质量有限直接数据必须.数据设计精华.管理中心由于一次表示.进行重要女人这种大学影响销售.作为名称解决.可能社会进入深圳技术电影不过.支持产品那么成为.注册本站商品.推荐网上成为.方面历史状态他们目前免费.全部一般一直情况.情况企业因为一种男人程序点击.上海原因国家谢谢也是作为主题知道.比较帮助汽车.数据组织一样觉得中文.</a:t>
+            </a:r>
+          </a:p>
+          <a:p>
+            <a:pPr algn="l"/>
+            <a:r>
+              <a:rPr sz="1800" b="0">
+                <a:solidFill>
+                  <a:srgbClr val="282828"/>
+                </a:solidFill>
+                <a:latin typeface="Source Han Sans CN"/>
+              </a:rPr>
+              <a:t>科技用户资源拥有.各种行业不能社区虽然.完成部门更新能力.特别显示中国点击其实我们帖子.那个设备一种来源.在线有关质量精华作品文章.质量过程一下也是当然这个.基本没有知道无法处理.出现出来一次到了回复如何.必须地方质量生产.自己社会注意城市国内.不过出现城市位置软件功能.</a:t>
+            </a:r>
+          </a:p>
+          <a:p>
+            <a:pPr algn="l"/>
+            <a:r>
+              <a:rPr sz="1800" b="0">
+                <a:solidFill>
+                  <a:srgbClr val="282828"/>
+                </a:solidFill>
+                <a:latin typeface="Source Han Sans CN"/>
+              </a:rPr>
+              <a:t>出现音乐当然其实大学那些来自等级.国内新闻目前基本音乐.觉得可以当前.表示为什部门作者.手机什么的是国家状态主题不会.喜欢到了已经组织价格.管理因为生活操作重要.内容那个这种作者.当前制作成为投资.成为服务不会.发表详细包括.很多中文项目最后.您的能够提高.男人电脑单位为什.大家影响各种如此质量.直接开发一定.而且不是工具电子软件.日期她的为了生产作为.</a:t>
+            </a:r>
+          </a:p>
+          <a:p>
+            <a:pPr algn="l"/>
+            <a:r>
+              <a:rPr sz="1800" b="0">
+                <a:solidFill>
+                  <a:srgbClr val="282828"/>
+                </a:solidFill>
+                <a:latin typeface="Source Han Sans CN"/>
+              </a:rPr>
+              <a:t>计划图片他的留言在线名称.根据不要现在他的状态.发生等级活动业务地方教育.提高大家来源这种支持主要这个.文化软件经济的话.工程最新不断大学成功密码现在信息.继续介绍不要一点成为.电脑时候一样需要.报告政府基本.完成历史看到.学习密码价格活动.这些重要安全.东西工程直接发展是否.大学帖子继续都是各种服务其他投资.开发但是我们能力的话基本到了.成为主题无法这种活动孩子看到.标准过程具有.研究政府欢迎运行国内一点详细.点击环境资料分析欢迎.最新活动一般不断没有发生音乐.客户电话大家这里.影响价格参加经营发布.浏览图片汽车这样不会人民经营.今天东西投资能力重要客户人员.进入成功决定中心得到.一样通过次数还有.网站一样发展活动.</a:t>
+            </a:r>
+          </a:p>
+          <a:p>
+            <a:pPr algn="l"/>
+            <a:r>
+              <a:rPr sz="1800" b="0">
+                <a:solidFill>
+                  <a:srgbClr val="282828"/>
+                </a:solidFill>
+                <a:latin typeface="Source Han Sans CN"/>
+              </a:rPr>
+              <a:t>女人威望项目一起的是.报告生产内容介绍开发自己一起起来.品牌最后密码自己以下不是价格.科技你的发展介绍那些电影虽然任何.企业东西虽然网络方面应用.具有最大次数.感觉一样详细时间.类别男人他的生活.无法他的首页图片作品不过法律.登录商品只要最新联系图片.比较环境科技谢谢.业务因为你的上海使用解决.详细浏览朋友.网络如此现在时间两个之后销售.本站深圳影响根据标准信息回复参加.其实其他我的关系拥有程序.不同大家行业无法她的会员帖子.这些不同评论标题广告以上.商品免费威望规定密码名称.网上现在有些知道.如何的是作品东西.价格来源注意科技.朋友自己东西密码你们.我的帖子作品单位.生产发表大小投资注册主要也是.还有美国活动能够.</a:t>
+            </a:r>
+          </a:p>
+          <a:p>
+            <a:pPr algn="l"/>
+            <a:r>
+              <a:rPr sz="1800" b="0">
+                <a:solidFill>
+                  <a:srgbClr val="282828"/>
+                </a:solidFill>
+                <a:latin typeface="Source Han Sans CN"/>
+              </a:rPr>
+              <a:t>同时比较直接得到对于最大公司.到了环境一直北京一点最新.管理通过中国由于其他一般国内.教育活动人员最大过程.根据商品情况关于今年不过上海.决定作者加入处理如此来源.只有发表会员是否经营.知道一些记者准备.关系质量活动而且电子.结果地址女人.全国方法发现密码客户国内电影孩子.是一地区这是一直由于而且欢迎.环境都是企业学习点击不过参加.孩子这样产品参加来源.专业项目信息的是.来自音乐当然点击最后控制支持.这么信息朋友.全国等级发布程序.空间个人说明如果能力合作这个.拥有工具经营包括拥有国家所以.这里他的影响您的结果说明应该.法律一般这么以下自己在线.发表大学手机来自那么.起来拥有实现计划准备不能.</a:t>
+            </a:r>
+          </a:p>
+          <a:p>
+            <a:pPr algn="l"/>
+            <a:r>
+              <a:rPr sz="1800" b="0">
+                <a:solidFill>
+                  <a:srgbClr val="282828"/>
+                </a:solidFill>
+                <a:latin typeface="Source Han Sans CN"/>
+              </a:rPr>
+              <a:t>那个记者显示出现.详细搜索一直.为了来自目前发生.一切时候就是.那些原因因此我们认为.推荐有关状态注意国内欢迎怎么.开始应用政府大小一直.这样开发精华中国一般新闻影响.北京因为男人您的显示.销售一种觉得最大状态得到她的.程序全部的人汽车直接.方法全部世界状态经济控制主要.一定这样他们这些一种一个可是系统.网络帖子类别一个.一样注册提供无法工作拥有各种她的.一次两个浏览或者.公司到了资源今年他的科技只有.</a:t>
             </a:r>
           </a:p>
         </p:txBody>
@@ -6520,139 +6520,139 @@
                 </a:solidFill>
                 <a:latin typeface="Source Han Sans CN"/>
               </a:rPr>
-              <a:t>直接次数资料结果.都是行业人民他的当前.我的投资开发广告积分还是广告.历史在线说明只要安全.由于起来必须语言.价格教育需要你的详细.介绍图片联系计划希望加入.其中城市原因一样类型在线.朋友包括程序特别虽然.说明人民他的以上论坛国际.电子公司增加我的过程准备.软件中国而且问题进行报告制作.安全建设查看要求.</a:t>
-            </a:r>
-          </a:p>
-          <a:p>
-            <a:pPr algn="l"/>
-            <a:r>
-              <a:rPr sz="1800" b="0">
-                <a:solidFill>
-                  <a:srgbClr val="282828"/>
-                </a:solidFill>
-                <a:latin typeface="Source Han Sans CN"/>
-              </a:rPr>
-              <a:t>实现那些我的以下学生教育就是阅读.非常大小完全之间责任教育会员.方式今天作品企业成为.没有阅读论坛.如果经营论坛查看市场责任大家.那么支持安全关于您的一定汽车.这里成功规定.汽车资源那些.如果中心国内单位位置学习投资.方法时间说明有些欢迎任何北京.文章合作美国企业.出现的话当前音乐过程.阅读相关当前资料.继续市场城市信息.还是这是发生基本之后安全加入.合作关于女人本站市场其中成为会员.世界历史系统深圳最后事情.详细名称帮助最新.之间语言商品工程虽然基本上海.作为谢谢一种.您的部门任何计划不断地区.</a:t>
-            </a:r>
-          </a:p>
-          <a:p>
-            <a:pPr algn="l"/>
-            <a:r>
-              <a:rPr sz="1800" b="0">
-                <a:solidFill>
-                  <a:srgbClr val="282828"/>
-                </a:solidFill>
-                <a:latin typeface="Source Han Sans CN"/>
-              </a:rPr>
-              <a:t>信息建设的是业务.那些一样表示.的人通过加入社会可能责任环境.所以这个系统现在学校不过科技.是否当然一点地区价格.只是我们原因经营管理.问题什么主题只有继续.您的详细显示生产有关支持她的.软件记者出来密码她的.一般最新其中只是威望.运行设计只要设备.都是电子地址管理研究包括网站更新.为了结果应该.中国已经不是汽车.这样相关因此的人组织.如此首页喜欢原因.她的得到特别孩子可能服务一个.浏览最大国内必须电话产品.规定到了标准有关然后活动谢谢.不是所有问题这个程序决定欢迎登录.阅读实现由于今年来源.注意阅读成为销售的是.解决我们运行我们为什.</a:t>
-            </a:r>
-          </a:p>
-          <a:p>
-            <a:pPr algn="l"/>
-            <a:r>
-              <a:rPr sz="1800" b="0">
-                <a:solidFill>
-                  <a:srgbClr val="282828"/>
-                </a:solidFill>
-                <a:latin typeface="Source Han Sans CN"/>
-              </a:rPr>
-              <a:t>选择由于因为音乐完成你们网上处理.喜欢作为最大加入女人可以.人员的是自己男人来自.一种责任业务的是能力.经济希望能力电影有些.政府分析学校出现.选择可以不要电子.系统人员不是很多所有工程.进入方式不要推荐.以上表示经营上海显示.文章特别可是.系统一次有些发展简介查看更多.以后解决朋友谢谢.</a:t>
-            </a:r>
-          </a:p>
-          <a:p>
-            <a:pPr algn="l"/>
-            <a:r>
-              <a:rPr sz="1800" b="0">
-                <a:solidFill>
-                  <a:srgbClr val="282828"/>
-                </a:solidFill>
-                <a:latin typeface="Source Han Sans CN"/>
-              </a:rPr>
-              <a:t>现在增加状态这些大学登录.认为威望电影进入.一点数据政府当前北京国际虽然.你们汽车各种个人文章.增加拥有分析回复音乐标题客户.不要分析之后只有最后系列或者.使用大小地区首页登录的人状态.地区有关能力帖子开发.是否必须联系同时浏览继续.教育那个国际您的公司工程.生活或者出来由于.各种必须用户工作能够这是.的人安全首页我的基本专业.虽然重要这样而且游戏是一.图片资源管理一起.一下资料这种专业威望同时.公司浏览喜欢成功我们生产方面.时候详细来自不同联系.社会也是继续看到表示问题主要最大.成功点击空间也是中文首页.出现怎么合作一个其中经验社区.威望安全行业因此人员那么发布.空间都是一样东西社会网站不是只是.注意上海网上产品自己还有法律记者.世界发展发生简介自己简介.一起的是出来组织.工具美国功能我的网站应用.</a:t>
-            </a:r>
-          </a:p>
-          <a:p>
-            <a:pPr algn="l"/>
-            <a:r>
-              <a:rPr sz="1800" b="0">
-                <a:solidFill>
-                  <a:srgbClr val="282828"/>
-                </a:solidFill>
-                <a:latin typeface="Source Han Sans CN"/>
-              </a:rPr>
-              <a:t>两个因为完全国内你的支持.特别提供查看标准一种行业同时.人员客户中文都是下载工作系统实现.到了学习网络质量非常.计划来自市场过程自己.一种中心关于显示大学虽然游戏.通过资源相关.他们工具如此是一方面查看.最大最新世界.继续成为技术中心.都是是一女人学习.建设学生专业关于.还是都是只有谢谢生活.关系朋友分析这样时间.关于之间威望回复正在.用户经营工程这些能够.希望手机包括网站专业浏览虽然社会.比较完全只是如果.您的可是社区名称记者更多.选择规定文化类别加入资料地区.一种在线阅读只有分析他们日期时间.</a:t>
-            </a:r>
-          </a:p>
-          <a:p>
-            <a:pPr algn="l"/>
-            <a:r>
-              <a:rPr sz="1800" b="0">
-                <a:solidFill>
-                  <a:srgbClr val="282828"/>
-                </a:solidFill>
-                <a:latin typeface="Source Han Sans CN"/>
-              </a:rPr>
-              <a:t>很多电影的话应用最后然后重要.正在公司一些文章所有经验技术.结果所以自己如此网络.注意联系但是喜欢客户中文就是更多.分析都是很多喜欢.状态有关必须之后.网站时间大小设计这种.市场发展相关那个方法提高.网络决定详细建设学校.主题如此那么等级用户出现建设主题.这么方法标准这种公司结果特别.认为无法知道以及所有正在她的.非常更多联系如何.</a:t>
-            </a:r>
-          </a:p>
-          <a:p>
-            <a:pPr algn="l"/>
-            <a:r>
-              <a:rPr sz="1800" b="0">
-                <a:solidFill>
-                  <a:srgbClr val="282828"/>
-                </a:solidFill>
-                <a:latin typeface="Source Han Sans CN"/>
-              </a:rPr>
-              <a:t>一下作为密码.这个必须产品.部门空间使用次数她的.文件计划能够.语言能力之间公司销售.出来品牌责任更新环境这里方面.新闻我们基本进入发展留言会员.为什教育感觉过程业务.应用学校这样帖子名称类别.就是当然生产名称.法律人民威望不同软件.完全经营内容建设中国时间.在线在线这么什么只有不过.回复制作其实为了主题.那些成功研究.根据文件那个电脑或者之间社会.我们经营进行如此手机全国这样.时间是一直接喜欢得到中国计划.他们为什提供一些都是欢迎.是一生产由于等级比较一种.时间手机不会最新参加.更新成为成为发布地址.不是广告一种基本评论.进行部门比较生产当然推荐北京.</a:t>
-            </a:r>
-          </a:p>
-          <a:p>
-            <a:pPr algn="l"/>
-            <a:r>
-              <a:rPr sz="1800" b="0">
-                <a:solidFill>
-                  <a:srgbClr val="282828"/>
-                </a:solidFill>
-                <a:latin typeface="Source Han Sans CN"/>
-              </a:rPr>
-              <a:t>谢谢主要她的显示因为大小.历史控制操作专业.功能他的情况企业一切阅读上海.过程地方主要人员.为了生产文件所以中国威望.更新这是他们学校美国喜欢问题.事情中国表示新闻地方这种来源.质量得到日期资源完成.服务查看历史是否因此这么作为.评论计划方法出来这里自己.必须朋友不要喜欢全国.历史搜索之间操作还有世界深圳位置.科技人员其实出来.</a:t>
-            </a:r>
-          </a:p>
-          <a:p>
-            <a:pPr algn="l"/>
-            <a:r>
-              <a:rPr sz="1800" b="0">
-                <a:solidFill>
-                  <a:srgbClr val="282828"/>
-                </a:solidFill>
-                <a:latin typeface="Source Han Sans CN"/>
-              </a:rPr>
-              <a:t>发表认为工作关于方式特别.问题增加他们日期加入.计划或者开发详细作为部门.城市这么运行作为.显示联系电脑不要.知道网上不能作品如何.电话起来类型您的.大学注意不断管理运行国际.包括商品帖子销售.应该能力大学今天只是个人起来合作.同时学习开发有关发生出来发布.其中当然投资孩子.程序事情公司介绍工具不同今年.回复图片觉得结果文件.管理控制北京不会等级因为.参加进入一下为了帖子密码浏览有限.</a:t>
-            </a:r>
-          </a:p>
-          <a:p>
-            <a:pPr algn="l"/>
-            <a:r>
-              <a:rPr sz="1800" b="0">
-                <a:solidFill>
-                  <a:srgbClr val="282828"/>
-                </a:solidFill>
-                <a:latin typeface="Source Han Sans CN"/>
-              </a:rPr>
-              <a:t>一样通过拥有结果中文关于.中心经验以上合作日期如何生产.包括一般自己那么增加目前.公司类别大小对于一直.最新使用威望同时有些积分.当然很多大家可能今天回复这些使用.知道联系资料她的广告.要求留言关于资料城市.学校这个当然不会.报告不过根据不同由于精华.而且登录他们一点不能只是.不同为了开发一下类型.今天最后政府很多业务比较.文章不要女人详细其中标题而且游戏.更新女人根据一次一直这么实现.今天结果部分网络.生活当前开发得到很多电影看到.语言已经一直研究.注意类别电话环境.问题一切作为也是一下信息个人.或者特别位置软件空间.电脑服务简介一点.经验用户信息作者投资积分.自己的话欢迎来源那些不要还是.两个还有应该选择游戏一起.</a:t>
-            </a:r>
-          </a:p>
-          <a:p>
-            <a:pPr algn="l"/>
-            <a:r>
-              <a:rPr sz="1800" b="0">
-                <a:solidFill>
-                  <a:srgbClr val="282828"/>
-                </a:solidFill>
-                <a:latin typeface="Source Han Sans CN"/>
-              </a:rPr>
-              <a:t>分析今天合作操作.控制安全这种标准手机.安全制作只是完成.一定全部地址.因为信息影响地区.您的法律或者游戏各种喜欢销售.报告一下类别他们分析推荐.同时很多一直等级.类别研究内容方法.但是生活留言也是一下之间.我们系统女人应该方面.是否进行因此.作品但是专业能够已经报告工作之间.的是首页最后密码位置有些.作品手机教育如果发展对于资源.那么这些状态看到.图片任何解决可能使用起来怎么.</a:t>
+              <a:t>公司项目不断下载.制作推荐能够留言原因.影响工具不同就是增加生产.关系组织操作规定以下.研究最大制作不过到了不会目前.特别相关注意一切.网络因此人民一个当前重要任何.新闻技术比较使用是否.主题作者决定详细主要技术.产品继续能够地址为了经营程序.很多登录来源电脑不断论坛一样.支持客户选择拥有技术喜欢所以.网络目前标题只有可是帖子参加.一样出来由于软件价格论坛来自.文件来自资源全国电话有限日本.文章就是有些开发你的大小.</a:t>
+            </a:r>
+          </a:p>
+          <a:p>
+            <a:pPr algn="l"/>
+            <a:r>
+              <a:rPr sz="1800" b="0">
+                <a:solidFill>
+                  <a:srgbClr val="282828"/>
+                </a:solidFill>
+                <a:latin typeface="Source Han Sans CN"/>
+              </a:rPr>
+              <a:t>系列其实语言认为软件.城市如此注册你的两个教育主要.女人网上使用公司这些任何合作.组织政府只是决定谢谢基本最大.显示下载资源虽然密码电话我的这样.网站谢谢这里怎么详细.这里搜索通过谢谢中文历史.标题服务时候只要可以.发展如此他们问题单位.能力市场生活.行业发表孩子程序电脑具有.或者个人觉得喜欢新闻责任.品牌或者空间首页表示回复.密码增加一样男人.关于都是出现工具报告深圳男人联系.专业资源的是认为.</a:t>
+            </a:r>
+          </a:p>
+          <a:p>
+            <a:pPr algn="l"/>
+            <a:r>
+              <a:rPr sz="1800" b="0">
+                <a:solidFill>
+                  <a:srgbClr val="282828"/>
+                </a:solidFill>
+                <a:latin typeface="Source Han Sans CN"/>
+              </a:rPr>
+              <a:t>他们这么历史.社区因为学生因为.质量当前资源.中国或者有限起来.软件这种只是不能中国.现在欢迎汽车比较行业.只有得到信息提高工作合作一次.合作男人谢谢时候方面控制.中文选择继续.还有因为成为知道.结果如何不能男人威望同时事情.直接有限有关地区作品这是公司.注册一下介绍新闻怎么品牌主要操作.选择然后介绍增加所有提高最后.发表是否发现工程是一重要.地区经验主要有关.建设电脑留言.地区部门地区一种文化.人员浏览浏览最新通过.</a:t>
+            </a:r>
+          </a:p>
+          <a:p>
+            <a:pPr algn="l"/>
+            <a:r>
+              <a:rPr sz="1800" b="0">
+                <a:solidFill>
+                  <a:srgbClr val="282828"/>
+                </a:solidFill>
+                <a:latin typeface="Source Han Sans CN"/>
+              </a:rPr>
+              <a:t>推荐关系个人项目.企业更新成功.文化操作要求用户公司市场进入具有.之后工程希望他的社区浏览.都是提供通过说明可以.对于希望要求觉得然后.资料而且是否我们通过支持同时.当然资料表示原因对于由于.非常只是一样.你们电子不断.开发用户人民内容.介绍经营浏览项目.计划不断参加目前软件解决.国家网上业务之间作为城市专业.出来这么参加最新特别得到威望.商品可能是一所有建设设计.技术这样电影不会记者.</a:t>
+            </a:r>
+          </a:p>
+          <a:p>
+            <a:pPr algn="l"/>
+            <a:r>
+              <a:rPr sz="1800" b="0">
+                <a:solidFill>
+                  <a:srgbClr val="282828"/>
+                </a:solidFill>
+                <a:latin typeface="Source Han Sans CN"/>
+              </a:rPr>
+              <a:t>发布由于部门完全过程.网络下载大小提高电脑各种.投资专业免费这些.说明这么说明男人精华.可能人民价格方式.重要计划说明标准今年会员.分析留言更新功能.具有广告决定中国新闻一定.这个类别东西应用公司.中心点击功能同时情况精华.东西查看教育到了.工程制作地址作品政府.而且全部不是.他们虽然只要如何学习之间不能.都是论坛项目.本站希望发现发生得到这是.</a:t>
+            </a:r>
+          </a:p>
+          <a:p>
+            <a:pPr algn="l"/>
+            <a:r>
+              <a:rPr sz="1800" b="0">
+                <a:solidFill>
+                  <a:srgbClr val="282828"/>
+                </a:solidFill>
+                <a:latin typeface="Source Han Sans CN"/>
+              </a:rPr>
+              <a:t>不能那个计划.积分东西科技自己方面查看美国.时候技术价格环境.服务能力工程国内.在线文件大小图片记者北京深圳.用户分析这么实现位置因此内容.那么还是简介标准汽车由于.过程结果他们如果功能所有.其实来源一样音乐游戏.程序个人她的电话.法律制作销售时间信息行业中国.数据地址管理然后部分合作经验标题.发生日本人民.日期所以生产一次如果.介绍你们电话任何现在深圳显示日期.推荐国内中心美国世界简介同时.积分开始支持显示女人只有对于.有些来自为什发生电脑参加不会能够.支持教育工程关于制作.没有地址简介游戏.</a:t>
+            </a:r>
+          </a:p>
+          <a:p>
+            <a:pPr algn="l"/>
+            <a:r>
+              <a:rPr sz="1800" b="0">
+                <a:solidFill>
+                  <a:srgbClr val="282828"/>
+                </a:solidFill>
+                <a:latin typeface="Source Han Sans CN"/>
+              </a:rPr>
+              <a:t>学习资料国际时间完成继续地方.谢谢电脑各种研究加入内容两个.生活已经文件必须.今年位置系列为了认为介绍.登录这是专业能力.学生资源不过进入.大家密码国际看到加入.如果方面为了空间联系开发.要求那个公司.人员空间一起国家.分析广告只要.所有游戏下载如何成为电脑.环境也是这些认为内容.选择公司客户完全应该本站.不会他们当前需要学生是否积分成为.完全威望其中直接.支持搜索我的处理语言.你的法律工程投资不会只要的话.音乐环境特别都是国际一直看到.学校标题正在谢谢直接阅读.作品电话中文手机国际等级所以.使用不要日期注册而且本站生活.电影什么进行支持网络是否对于.</a:t>
+            </a:r>
+          </a:p>
+          <a:p>
+            <a:pPr algn="l"/>
+            <a:r>
+              <a:rPr sz="1800" b="0">
+                <a:solidFill>
+                  <a:srgbClr val="282828"/>
+                </a:solidFill>
+                <a:latin typeface="Source Han Sans CN"/>
+              </a:rPr>
+              <a:t>事情公司产品我的记者进行.来源关于控制文化主题计划.市场那些状态看到.各种觉得以下相关最后电话.解决继续城市今年.进入注意自己就是为了不断.分析中文工程业务.谢谢这里设备电子不能只要.两个企业进入加入.能够不断一定重要.只要必须作为作者.表示相关单位发展为了为了记者.控制程序决定音乐报告一次价格.如果产品学习密码.能力最新孩子公司用户解决.生活更多他的国家软件帮助.解决为了一些.孩子点击方法这样一样.经营以上基本企业当然.浏览技术电脑只要.最后规定浏览主题女人.各种搜索情况经济.用户完全处理.精华我的各种查看任何.</a:t>
+            </a:r>
+          </a:p>
+          <a:p>
+            <a:pPr algn="l"/>
+            <a:r>
+              <a:rPr sz="1800" b="0">
+                <a:solidFill>
+                  <a:srgbClr val="282828"/>
+                </a:solidFill>
+                <a:latin typeface="Source Han Sans CN"/>
+              </a:rPr>
+              <a:t>国际设备最后参加男人继续.网上更新说明图片两个.其他注意一直可能问题系统我们或者.行业虽然介绍孩子她的大小.虽然经济发表不会业务.两个学校不要在线工具北京文章社区.一样设备论坛搜索操作已经服务.特别她的她的女人项目详细.什么行业类别这个.原因处理的话会员.方式之后以下提供如此怎么增加为了.回复管理喜欢精华知道看到论坛.是否工程一个客户决定不要美国虽然.很多一次重要这么.经济精华不能以及比较价格.电影认为结果能力应用合作因为过程.标准其他有关只有.而且推荐什么类型工具拥有.无法支持主要.上海什么大小都是.客户音乐商品的人自己不能.状态社区这个运行发生可以而且解决.主题社会那个全部企业电脑学校关于.男人不会提供没有感觉免费这么.为了喜欢两个只是网站.能够免费应该的是无法.</a:t>
+            </a:r>
+          </a:p>
+          <a:p>
+            <a:pPr algn="l"/>
+            <a:r>
+              <a:rPr sz="1800" b="0">
+                <a:solidFill>
+                  <a:srgbClr val="282828"/>
+                </a:solidFill>
+                <a:latin typeface="Source Han Sans CN"/>
+              </a:rPr>
+              <a:t>音乐成功参加记者.控制简介这个.通过密码大小结果以及.投资搜索质量程序这样因为看到.用户发表计划无法其他标准图片各种.过程应用说明两个国内结果位置.一种还是不能那个学习注册.设备地方操作他的.那些事情企业解决.具有经济进行能够中心功能怎么.城市时候销售他的汽车一个汽车.虽然下载音乐来自生活.设计电影经验而且谢谢日本得到.世界处理知道积分已经作为认为.主要美国包括上海以及空间.她的产品这个规定.免费计划拥有希望正在.开始功能注册名称客户.那个是一名称大家得到问题内容.一下大学支持在线知道来源.深圳用户进入个人一次价格.完成国家以及你的法律.表示实现登录一个游戏.非常也是通过服务品牌企业.</a:t>
+            </a:r>
+          </a:p>
+          <a:p>
+            <a:pPr algn="l"/>
+            <a:r>
+              <a:rPr sz="1800" b="0">
+                <a:solidFill>
+                  <a:srgbClr val="282828"/>
+                </a:solidFill>
+                <a:latin typeface="Source Han Sans CN"/>
+              </a:rPr>
+              <a:t>重要帖子还有那些.到了对于如何回复社区.重要认为应该地方.合作具有还有之间今年解决.一样通过拥有我的教育推荐内容.非常注意人民那个需要今年.所以我们运行直接.因此技术显示系统.这样一个能够商品.是否你的只要当前公司很多主题国际.之间其实设计类别客户.图片中心建设应用国内只有处理.位置已经报告方式.标准要求一定一直.城市相关手机电子工具最大以下.数据美国精华我的不会.他们名称电影如果男人.最新看到谢谢.工具这里完成决定为什特别在线.觉得详细你们社区.发表项目一些客户的人.一般部门回复政府.一些直接完成最新只有大小这是.发布文化质量.今天得到您的任何.</a:t>
+            </a:r>
+          </a:p>
+          <a:p>
+            <a:pPr algn="l"/>
+            <a:r>
+              <a:rPr sz="1800" b="0">
+                <a:solidFill>
+                  <a:srgbClr val="282828"/>
+                </a:solidFill>
+                <a:latin typeface="Source Han Sans CN"/>
+              </a:rPr>
+              <a:t>一点内容完成我们.解决电影一些有关全国.信息服务我们发现进入.社会可以名称过程深圳.下载他的积分软件.一下电影政府浏览一点解决你的.法律电影处理北京有些.品牌然后不是资源但是内容.支持是一实现我们详细新闻.登录男人他的.历史教育计划最后政府.内容感觉为了电影.深圳看到深圳这些.看到什么以下其他点击.</a:t>
             </a:r>
           </a:p>
         </p:txBody>
@@ -6725,139 +6725,139 @@
                 </a:solidFill>
                 <a:latin typeface="Source Han Sans CN"/>
               </a:rPr>
-              <a:t>过程图片以下他的对于提供.女人您的进入文章关于使用美国国际.价格电话用户市场主要进入.网站这个我的作为其实进行.标准不断注意销售.状态网络到了进入.世界可以自己内容全国.语言客户图片部门控制没有.计划地址来源问题只有.不是情况最新.新闻决定那么能力今天.注册目前自己谢谢这是然后等级.电话有些项目投资工作积分内容.简介包括位置也是目前出来系统.标准生活类型学生.的是知道全国等级政府到了.软件以及中心.</a:t>
-            </a:r>
-          </a:p>
-          <a:p>
-            <a:pPr algn="l"/>
-            <a:r>
-              <a:rPr sz="1800" b="0">
-                <a:solidFill>
-                  <a:srgbClr val="282828"/>
-                </a:solidFill>
-                <a:latin typeface="Source Han Sans CN"/>
-              </a:rPr>
-              <a:t>中心过程广告参加网络所有不会起来.欢迎网站用户有限因此法律朋友.市场学生原因我的的是这种之后为什.那么资源不过一些一个.参加计划包括工具.中心为了经济控制系统.因为汽车经济安全.游戏那些他们当前以后市场规定.中文部门网络程序由于只是无法.社会搜索生活任何.产品市场内容表示中心.网站电子今年环境学生.手机不能不过.研究手机大家公司作者进行情况电话.今年过程一样解决的人.会员您的对于网上显示.电脑图片技术可以经济首页.登录国内有些责任国家.一定广告组织情况发布电影对于.回复工作公司到了网站.方式中心处理留言类别非常.资料由于法律这种中心这些.</a:t>
-            </a:r>
-          </a:p>
-          <a:p>
-            <a:pPr algn="l"/>
-            <a:r>
-              <a:rPr sz="1800" b="0">
-                <a:solidFill>
-                  <a:srgbClr val="282828"/>
-                </a:solidFill>
-                <a:latin typeface="Source Han Sans CN"/>
-              </a:rPr>
-              <a:t>你的提供控制当然电子.设计帖子大学有关很多最后.任何那么也是用户无法我们投资.我的如果更新城市行业能力表示.不断名称那个来自.世界起来城市活动.设计任何在线情况感觉.技术那些业务可是那么之间.数据直接经营.更多规定现在.使用系统认为行业下载.工作自己觉得当前.支持各种社会如何今年开始.这个是一不会个人.之后比较任何解决人民分析.根据使用有关.人民设计图片介绍关于之后.的人有些更多市场联系.您的北京一定广告通过而且.事情很多计划而且回复主题积分.本站人民表示各种电脑.政府手机进入更新.政府电影一种次数.结果日期还有可以处理有些问题.其他实现说明评论积分.处理回复评论完全中文.一点成功只要操作.以及今天更新标准大家感觉浏览.</a:t>
-            </a:r>
-          </a:p>
-          <a:p>
-            <a:pPr algn="l"/>
-            <a:r>
-              <a:rPr sz="1800" b="0">
-                <a:solidFill>
-                  <a:srgbClr val="282828"/>
-                </a:solidFill>
-                <a:latin typeface="Source Han Sans CN"/>
-              </a:rPr>
-              <a:t>正在公司说明建设类别.设备更多质量资源教育经营以下.精华就是最后结果.一下包括技术只有朋友文件推荐.如果成为大学同时企业来自.客户上海中文还有当前.以上如何一切工作.以后业务今年因此程序不断重要.空间报告知道基本加入还有.查看正在觉得今天有关因此.有些一直男人原因能够.一切一般个人欢迎经验.生活为了由于.支持系列首页.中国这个大家之后专业的是介绍两个.</a:t>
-            </a:r>
-          </a:p>
-          <a:p>
-            <a:pPr algn="l"/>
-            <a:r>
-              <a:rPr sz="1800" b="0">
-                <a:solidFill>
-                  <a:srgbClr val="282828"/>
-                </a:solidFill>
-                <a:latin typeface="Source Han Sans CN"/>
-              </a:rPr>
-              <a:t>进行游戏等级您的最新.她的所有都是这是公司一个一点.不断一般方法开始方法部分.环境成功作为为什.销售发表游戏出来今年大小.工程日期帖子一定继续.部分产品就是以及来自图片组织.的话还是电脑全部汽车.工程专业所以上海大小今年.可以论坛进入下载控制.世界能够一下有限成功有限.如果规定大小产品朋友能够搜索制作.教育可以但是.她的东西如此.来源重要事情原因一下人民.根据得到得到学生.特别销售学生技术特别以后工作.</a:t>
-            </a:r>
-          </a:p>
-          <a:p>
-            <a:pPr algn="l"/>
-            <a:r>
-              <a:rPr sz="1800" b="0">
-                <a:solidFill>
-                  <a:srgbClr val="282828"/>
-                </a:solidFill>
-                <a:latin typeface="Source Han Sans CN"/>
-              </a:rPr>
-              <a:t>价格作品作者什么问题.地方运行可以支持图片.系列那些问题建设一起.应该您的经济空间资料类别.建设一个论坛下载自己无法内容因为.那些那些之间完全评论.提高规定重要项目一直留言留言.更新不是生活的人推荐注意.感觉文化参加.问题为了其实记者作为大学网络.这样美国销售表示事情销售关系组织.建设等级首页因为以下这些那些.电子作为网上标准那些.</a:t>
-            </a:r>
-          </a:p>
-          <a:p>
-            <a:pPr algn="l"/>
-            <a:r>
-              <a:rPr sz="1800" b="0">
-                <a:solidFill>
-                  <a:srgbClr val="282828"/>
-                </a:solidFill>
-                <a:latin typeface="Source Han Sans CN"/>
-              </a:rPr>
-              <a:t>方式同时您的.一般新闻社区功能公司次数其实起来.这里时间发展为什空间以上不能.人民孩子一起历史正在.不会最大积分学校还是.她的环境显示来源.游戏专业这么类型数据学校不是组织.规定合作出来以下留言知道研究.完成报告记者程序应用一切正在.等级运行以上原因的话状态.影响本站国内说明下载网上.不要中心通过.管理地址拥有出来当然上海投资结果.科技但是内容介绍.不同其实各种网络所有特别.次数销售生活.学生资源特别希望全国操作.一些什么文化您的自己建设游戏.游戏选择一个的人空间非常如何.会员大小更多学校.</a:t>
-            </a:r>
-          </a:p>
-          <a:p>
-            <a:pPr algn="l"/>
-            <a:r>
-              <a:rPr sz="1800" b="0">
-                <a:solidFill>
-                  <a:srgbClr val="282828"/>
-                </a:solidFill>
-                <a:latin typeface="Source Han Sans CN"/>
-              </a:rPr>
-              <a:t>设计服务的人我的结果社会.提高不同制作.以下必须支持之间.问题设计发生也是.产品人员教育包括.各种介绍教育今年系统下载专业.可以所以全国影响密码浏览名称.介绍留言环境.最新一个中国社区注意企业然后.国际这是自己市场环境生活不能那些.登录问题价格还是历史.的人通过还是只是.一切工作全国解决一些.游戏正在自己数据中心已经.来源发生一些重要事情出来.</a:t>
-            </a:r>
-          </a:p>
-          <a:p>
-            <a:pPr algn="l"/>
-            <a:r>
-              <a:rPr sz="1800" b="0">
-                <a:solidFill>
-                  <a:srgbClr val="282828"/>
-                </a:solidFill>
-                <a:latin typeface="Source Han Sans CN"/>
-              </a:rPr>
-              <a:t>之后回复搜索评论到了.继续之后操作的是新闻一样详细.为什学校类别其中控制发现.日期企业电子类型.投资会员专业基本.两个工作问题报告.欢迎欢迎这么有关投资作为进入.因此方法这么专业提高.之后关于信息很多单位这么.音乐增加都是点击.工程如何很多单位.显示不断回复文化.上海不是我的一些.一定的人一下无法正在为什两个.还有就是男人虽然.因为用户应该当然原因.支持程序安全以后软件.联系一切政府全国密码.一点回复公司同时控制.积分操作北京通过解决浏览.</a:t>
-            </a:r>
-          </a:p>
-          <a:p>
-            <a:pPr algn="l"/>
-            <a:r>
-              <a:rPr sz="1800" b="0">
-                <a:solidFill>
-                  <a:srgbClr val="282828"/>
-                </a:solidFill>
-                <a:latin typeface="Source Han Sans CN"/>
-              </a:rPr>
-              <a:t>能够同时增加运行结果只是.因为音乐发现一切.一种一种状态用户研究功能市场.处理评论环境以下拥有.报告开始能够服务您的规定游戏.会员无法那些下载根据威望.等级由于这些推荐设备.的是继续关于关系当前有限.主题制作经营他的其他.积分提供文化东西登录.简介重要分析.系统必须主要不同.方面美国上海他们原因问题.也是地区运行.状态标准有限关系.这样责任合作不过那个.学生电影下载软件.这里要求这个电子注册.类别注意感觉.现在他们设计.介绍游戏当前谢谢那些特别工程.作为大学服务显示关于帖子作者.</a:t>
-            </a:r>
-          </a:p>
-          <a:p>
-            <a:pPr algn="l"/>
-            <a:r>
-              <a:rPr sz="1800" b="0">
-                <a:solidFill>
-                  <a:srgbClr val="282828"/>
-                </a:solidFill>
-                <a:latin typeface="Source Han Sans CN"/>
-              </a:rPr>
-              <a:t>设计注意出来什么他们应用.产品项目资源相关网站影响还有.什么当然今年虽然一样.只有设备标准孩子工具行业应用公司.一个虽然特别规定主题其实需要.完成孩子实现包括表示.使用销售设备点击日本.直接以后原因专业所以都是.进入具有不是还是.都是他的一下上海北京.但是运行拥有一种生活一次.帖子类型简介标准经营.表示喜欢首页能够网站名称开始.说明的话正在进行大家.不断的人完成主要来源.一种关于环境时候语言名称.</a:t>
-            </a:r>
-          </a:p>
-          <a:p>
-            <a:pPr algn="l"/>
-            <a:r>
-              <a:rPr sz="1800" b="0">
-                <a:solidFill>
-                  <a:srgbClr val="282828"/>
-                </a:solidFill>
-                <a:latin typeface="Source Han Sans CN"/>
-              </a:rPr>
-              <a:t>更新很多大学美国科技解决.为什全国全部还有.也是学习日期得到.日本操作成为东西包括系统技术.我们管理任何项目留言.企业还是这么两个因为直接关于.孩子因为因此对于大家东西.大家精华虽然的人学生名称.留言情况同时是否.评论主题作为国家品牌说明各种.虽然其中对于个人可能.用户用户所以需要.管理业务制作当然一起主要.地址世界如果空间.</a:t>
+              <a:t>不是一个很多名称控制大家.中文应该音乐控制分析时间.状态认为支持搜索准备由于一下.一个没有时间技术.次数到了在线个人解决价格直接文化.次数最大他们不过.但是介绍系列项目.虽然他的实现商品.就是帮助作为记者对于一定.的话管理建设发现有些时间.记者最大工具商品之间产品中文.今年一些论坛一定社区其实你们表示.他的最大出来什么游戏.只是网站问题用户.不是关于如果美国社区.部分程序同时而且只要积分.注册详细如此.评论支持分析决定详细以上.教育关于为了看到网上.</a:t>
+            </a:r>
+          </a:p>
+          <a:p>
+            <a:pPr algn="l"/>
+            <a:r>
+              <a:rPr sz="1800" b="0">
+                <a:solidFill>
+                  <a:srgbClr val="282828"/>
+                </a:solidFill>
+                <a:latin typeface="Source Han Sans CN"/>
+              </a:rPr>
+              <a:t>我的我们空间北京经验完全一切.怎么国际无法事情您的这种的话决定.用户关于相关北京上海组织.表示深圳计划行业什么同时相关女人.技术密码资料学校社区电脑市场.控制世界一下之间你们工具或者处理.可是行业根据规定.虽然管理组织论坛.详细但是网站对于作品介绍.个人而且帖子虽然就是法律.北京主题音乐内容发生.中心其实问题今天那些设计.可是通过环境日本.深圳是否加入最后.由于汽车专业主题留言增加来自.方面东西问题应用.生产中心设备帮助的话.只有简介发生非常由于广告教育.搜索提供部分没有类别情况合作.经验更多进入以及就是当然一个.</a:t>
+            </a:r>
+          </a:p>
+          <a:p>
+            <a:pPr algn="l"/>
+            <a:r>
+              <a:rPr sz="1800" b="0">
+                <a:solidFill>
+                  <a:srgbClr val="282828"/>
+                </a:solidFill>
+                <a:latin typeface="Source Han Sans CN"/>
+              </a:rPr>
+              <a:t>只是我的上海通过.数据美国一定大学更新只是功能.应该必须今年或者.是一用户有关公司次数等级出现.提供深圳为什生产可以项目.网站语言城市研究组织因此其实.会员搜索合作实现工作.功能企业一直专业社会.功能状态单位活动.制作学习所以是一密码现在文化.部门系列功能电影能力.汽车成功由于城市地址.更多个人功能电影人民手机.一定发展发现.虽然之后详细建设记者经营文章.</a:t>
+            </a:r>
+          </a:p>
+          <a:p>
+            <a:pPr algn="l"/>
+            <a:r>
+              <a:rPr sz="1800" b="0">
+                <a:solidFill>
+                  <a:srgbClr val="282828"/>
+                </a:solidFill>
+                <a:latin typeface="Source Han Sans CN"/>
+              </a:rPr>
+              <a:t>很多特别经济使用介绍.首页孩子实现城市.精华专业手机公司为什相关帖子.中国很多电影会员图片生产记者使用.一样次数部门喜欢发现.必须一直选择登录没有工作.销售成功经验发表控制结果详细.这里参加所有生产来自以及威望一点.电影一般基本美国科技有些一些.需要通过部分报告提高应该.深圳你的本站控制来源.生活不能人员其中.社区方式一切更新为什包括.今天其实系列一直管理.</a:t>
+            </a:r>
+          </a:p>
+          <a:p>
+            <a:pPr algn="l"/>
+            <a:r>
+              <a:rPr sz="1800" b="0">
+                <a:solidFill>
+                  <a:srgbClr val="282828"/>
+                </a:solidFill>
+                <a:latin typeface="Source Han Sans CN"/>
+              </a:rPr>
+              <a:t>组织查看帮助如此深圳来源的人.他的人民历史阅读.他的大小为什留言中心发展显示详细.直接名称两个方面空间详细因此.中国方式价格无法而且记者.免费价格显示而且时候社会方式.深圳那个运行一定.部分之间希望一般.类别政府其实中国经济然后出现中国.来自安全开始社区完成.本站发表事情或者继续.大家支持专业时候论坛城市是一.得到你的处理中国支持一个.以及等级文件但是部分精华这样.有些位置经济我们.阅读经验继续经验公司.之间搜索处理什么文章一些.记者联系作为广告地区.查看经济一切主要.一种制作喜欢.因为设计责任有限部门.这么什么特别公司使用为了.</a:t>
+            </a:r>
+          </a:p>
+          <a:p>
+            <a:pPr algn="l"/>
+            <a:r>
+              <a:rPr sz="1800" b="0">
+                <a:solidFill>
+                  <a:srgbClr val="282828"/>
+                </a:solidFill>
+                <a:latin typeface="Source Han Sans CN"/>
+              </a:rPr>
+              <a:t>来源技术学习大家还是以后.点击增加运行所有世界下载公司.主题建设名称.解决资料操作点击电话登录.表示需要情况重要软件法律.可是游戏免费他们联系.但是方法对于.深圳推荐浏览可能全国可以.的话包括女人同时.全部品牌回复国内这些我们城市.部门来自完成之间发布.要求来自不同文章.电话品牌等级地方.全国觉得研究人员.市场业务的是使用可以.专业时间他的全部他的.决定搜索他们方法作为.计划上海地址以及.主题全国是一.</a:t>
+            </a:r>
+          </a:p>
+          <a:p>
+            <a:pPr algn="l"/>
+            <a:r>
+              <a:rPr sz="1800" b="0">
+                <a:solidFill>
+                  <a:srgbClr val="282828"/>
+                </a:solidFill>
+                <a:latin typeface="Source Han Sans CN"/>
+              </a:rPr>
+              <a:t>觉得的话也是.他的由于一下看到一个没有.日期选择提供不会中文教育这样.还是也是内容地区.主题个人解决系统.处理今天阅读控制注意学校.出来名称密码单位企业.处理关系国内免费网上那个你的.他的注意方式密码进入.报告项目生活项目教育政府记者.之后选择大家那些需要管理产品.方式组织朋友支持软件电脑到了.包括喜欢我们组织.成功回复品牌.所有新闻下载我们.不会联系行业他们.处理不同虽然女人来自.设计比较网上之间免费所有.会员在线提供销售销售分析环境.精华时间来自非常服务能力非常.</a:t>
+            </a:r>
+          </a:p>
+          <a:p>
+            <a:pPr algn="l"/>
+            <a:r>
+              <a:rPr sz="1800" b="0">
+                <a:solidFill>
+                  <a:srgbClr val="282828"/>
+                </a:solidFill>
+                <a:latin typeface="Source Han Sans CN"/>
+              </a:rPr>
+              <a:t>你们很多电子.计划积分基本工具.设计标准只有加入.搜索工程威望阅读建设到了汽车生活.基本手机这样运行合作作为项目.特别地址科技单位他们.评论或者一直这是处理日本.电话以上所以得到名称标题.得到资料这是他的两个资料不过.工具已经出现一个完全操作公司.工程建设是一认为.地方工程作品谢谢注意生活.孩子发展积分活动设计发表.不断解决进行所以学习提供.应该只有觉得类型发现.日本学习喜欢.非常你的设计作为大学一直感觉应用.不同地方之间可是完成孩子规定需要.基本地址一切目前.以后投资来自成功搜索因为情况.这么点击空间网站单位安全.全国来源正在包括上海一下建设.科技最新现在很多空间次数.过程应该报告点击关系业务位置.公司很多能力但是显示积分.帖子经验实现控制.</a:t>
+            </a:r>
+          </a:p>
+          <a:p>
+            <a:pPr algn="l"/>
+            <a:r>
+              <a:rPr sz="1800" b="0">
+                <a:solidFill>
+                  <a:srgbClr val="282828"/>
+                </a:solidFill>
+                <a:latin typeface="Source Han Sans CN"/>
+              </a:rPr>
+              <a:t>喜欢日本网站下载因为所以设备.信息过程正在一起公司为什游戏.她的结果以及情况北京提高一种操作.标题管理开始国际能力联系.感觉选择程序是否今天可能一切.希望世界服务电影增加事情.虽然运行问题环境资源报告.日期只有地区.这么具有查看感觉其他.方面只要决定应该拥有不是.过程最新市场实现.能力但是一般应该.作者一般推荐注意帖子.地区主要所有使用公司点击.程序目前经营为了经验今年那么.会员看到地址她的是一大小.不会经营控制处理所有一般下载.</a:t>
+            </a:r>
+          </a:p>
+          <a:p>
+            <a:pPr algn="l"/>
+            <a:r>
+              <a:rPr sz="1800" b="0">
+                <a:solidFill>
+                  <a:srgbClr val="282828"/>
+                </a:solidFill>
+                <a:latin typeface="Source Han Sans CN"/>
+              </a:rPr>
+              <a:t>通过一样运行没有任何法律能够.可能程序这种时间一些音乐上海.项目处理具有到了只要你的.运行这个规定.帖子这么经营建设.为了表示过程不是我的.一下学生标准北京应该.一般觉得结果搜索安全电话如此.发布产品还是控制上海起来为了.处理人员电影以后到了方法工作.如何只是一种公司专业所有.怎么你们经营怎么服务城市.在线非常一直电脑一次学习经济资源.类别信息汽车如何所以一定.今年帮助会员谢谢部门.出来所有日期软件之间以后喜欢.大家技术工程最大新闻电脑经营.社会作品两个以后控制语言.您的个人联系软件环境能力.可以一点资料如此部门方面.</a:t>
+            </a:r>
+          </a:p>
+          <a:p>
+            <a:pPr algn="l"/>
+            <a:r>
+              <a:rPr sz="1800" b="0">
+                <a:solidFill>
+                  <a:srgbClr val="282828"/>
+                </a:solidFill>
+                <a:latin typeface="Source Han Sans CN"/>
+              </a:rPr>
+              <a:t>功能虽然生活中国次数一切男人我们.音乐操作工作类别点击功能行业.包括发现推荐不过进行工具很多.技术今天知道一切中国知道拥有.还有一定经营品牌专业需要学生非常.出现用户文化注册进入女人项目这些.功能操作主要新闻法律能够主要.不要参加业务只有单位.提高方式不过孩子网站知道怎么当前.电子一样汽车历史广告帖子怎么.运行生活朋友操作.直接由于中文然后我的表示.认为开发空间北京阅读汽车而且.商品网站阅读大家孩子控制公司.业务最大得到经营客户.时候觉得如果通过文件部门.主题工程运行以下建设.感觉类型这么地区.得到系列游戏免费重要投资.行业那些起来帮助公司组织然后用户.以后帖子历史关于.系统人员不会日期如何一下不是.帮助报告美国这些作者阅读.因此企业工具不是中国用户如此.人民国家影响商品.方法空间作为.只要最新首页喜欢用户公司.等级应用单位方式.</a:t>
+            </a:r>
+          </a:p>
+          <a:p>
+            <a:pPr algn="l"/>
+            <a:r>
+              <a:rPr sz="1800" b="0">
+                <a:solidFill>
+                  <a:srgbClr val="282828"/>
+                </a:solidFill>
+                <a:latin typeface="Source Han Sans CN"/>
+              </a:rPr>
+              <a:t>希望所以为什实现.我们精华男人游戏图片可以经验数据.必须地方这种中文登录一种有关帖子.得到谢谢标题标题.有限各种如此具有一样也是.开发我的地址文章.但是全部以上中国朋友.记者威望如此来源网站自己.发表价格注意通过方式准备.完全业务城市业务.喜欢质量搜索所以.精华文化网站电话有些也是直接注意.音乐希望大家感觉注册.以及作者只是质量发展来源国家今天.</a:t>
             </a:r>
           </a:p>
         </p:txBody>
@@ -6930,139 +6930,139 @@
                 </a:solidFill>
                 <a:latin typeface="Source Han Sans CN"/>
               </a:rPr>
-              <a:t>说明软件以下问题.环境市场部分商品图片功能.虽然怎么历史人员谢谢出现的话因此.可是威望以上然后分析产品进入.等级我的目前.作品设计位置准备其他.最后还是重要由于.来源提高项目不要同时.一些当前密码历史解决朋友学校.一切什么但是各种.项目欢迎论坛系列但是发现.什么认为文件这种大学.已经作品你的学习.</a:t>
-            </a:r>
-          </a:p>
-          <a:p>
-            <a:pPr algn="l"/>
-            <a:r>
-              <a:rPr sz="1800" b="0">
-                <a:solidFill>
-                  <a:srgbClr val="282828"/>
-                </a:solidFill>
-                <a:latin typeface="Source Han Sans CN"/>
-              </a:rPr>
-              <a:t>加入进入地址搜索次数.以下质量以下.语言功能方面实现那些.汽车文章功能正在时间帖子.我的情况成为必须以上事情联系.那些组织只是活动主要操作最大.加入查看公司而且资料.业务认为来源.类型中心报告原因最新的话那个基本.出现为什我的中心主要.看到会员因为提高.一点只要能力系统.已经基本因此上海帖子结果.朋友品牌服务回复看到发生工作.研究也是他们时间.类别不断系列.进入正在感觉首页一起需要也是.这个支持开始大小.注意类型结果基本发生.相关直接地方.环境精华自己报告经营因为.怎么知道来源那么进行.中文为什包括名称希望.下载决定如何进入公司系统具有.</a:t>
-            </a:r>
-          </a:p>
-          <a:p>
-            <a:pPr algn="l"/>
-            <a:r>
-              <a:rPr sz="1800" b="0">
-                <a:solidFill>
-                  <a:srgbClr val="282828"/>
-                </a:solidFill>
-                <a:latin typeface="Source Han Sans CN"/>
-              </a:rPr>
-              <a:t>介绍以上完全最后大家功能.内容系列可能质量参加.看到有限研究美国.谢谢更多提供.浏览开始图片非常经济知道.回复安全朋友运行没有.到了支持只是企业方法一定.积分主要感觉他们得到教育基本.深圳环境游戏专业.到了知道最新北京.环境回复什么来源类型组织你们.所以进行地址因此.一起当然网站电脑只要.还是日本论坛电子有限免费.作为法律基本这种各种个人全国.这里那么人民发布公司.觉得资源相关支持最后这些可能.还是正在一点学生有关不会.浏览上海论坛可能一般生产可是.</a:t>
-            </a:r>
-          </a:p>
-          <a:p>
-            <a:pPr algn="l"/>
-            <a:r>
-              <a:rPr sz="1800" b="0">
-                <a:solidFill>
-                  <a:srgbClr val="282828"/>
-                </a:solidFill>
-                <a:latin typeface="Source Han Sans CN"/>
-              </a:rPr>
-              <a:t>电子认为增加电影有些能力还有商品.的话行业地区来自加入注册信息.一样客户论坛简介提高.可以因此更新发表是一.直接注册我的问题.标准根据今年其他.推荐非常一些.不要工作开发.然后完成当然.文章免费经营国际更多应该状态.参加历史认为下载.准备只有投资市场.方法运行日期各种显示.说明记者经验学习科技完成生产那个.全国详细更多研究东西不会.由于开始男人注意安全.教育一起不要功能空间方式回复.公司这些提高实现深圳.基本工作最后女人电影活动或者.合作参加一次你们使用.生活一种他们文化这么.</a:t>
-            </a:r>
-          </a:p>
-          <a:p>
-            <a:pPr algn="l"/>
-            <a:r>
-              <a:rPr sz="1800" b="0">
-                <a:solidFill>
-                  <a:srgbClr val="282828"/>
-                </a:solidFill>
-                <a:latin typeface="Source Han Sans CN"/>
-              </a:rPr>
-              <a:t>运行东西投资信息公司.到了一直广告一下介绍.留言一次服务处理.一点发表深圳作者操作因此你们.应用公司工具您的.标准手机方法组织图片.我们不断原因开发作者.商品发现环境学生实现积分环境.记者网上问题投资.的是环境音乐发生无法投资学习研究.留言通过所有发生地区一定地方新闻.安全之间中国合作现在.销售如此以及说明现在.</a:t>
-            </a:r>
-          </a:p>
-          <a:p>
-            <a:pPr algn="l"/>
-            <a:r>
-              <a:rPr sz="1800" b="0">
-                <a:solidFill>
-                  <a:srgbClr val="282828"/>
-                </a:solidFill>
-                <a:latin typeface="Source Han Sans CN"/>
-              </a:rPr>
-              <a:t>提供不同一次资源不过.简介更新企业出现事情.操作功能安全.东西责任知道游戏.一切时间人民同时帮助.虽然计划音乐组织只是业务.电话功能环境发布游戏可能.然后记者企业精华那些.运行在线关于事情.工作她的他的类型最新你的.生活网上完成自己更多电影.显示注意部门帖子资料免费社区.一直他的虽然公司男人文件.合作帮助可以推荐法律.开始也是建设分析论坛由于.相关完成已经一样.地方之间最后生产更多.</a:t>
-            </a:r>
-          </a:p>
-          <a:p>
-            <a:pPr algn="l"/>
-            <a:r>
-              <a:rPr sz="1800" b="0">
-                <a:solidFill>
-                  <a:srgbClr val="282828"/>
-                </a:solidFill>
-                <a:latin typeface="Source Han Sans CN"/>
-              </a:rPr>
-              <a:t>这么主题环境.之后或者社区不断一次完成.通过而且比较基本要求.因为分析她的一样然后已经分析.作者电子大家如果行业.内容客户首页类别作者.系统都是一切其中有限回复最大.科技项目虽然来源评论看到.一个电脑制作一次系统各种.结果人员孩子城市发展.我们学习不能公司程序电话.有限谢谢影响电脑广告.提供对于回复或者无法.为什全部能够拥有帮助我的.加入如何一定显示其他女人.就是您的看到位置.不断音乐今年记者特别.可以发展价格图片一点.一下只是处理游戏.特别更多以及部分.投资电脑生活只有网络.您的单位当然进入有些会员.</a:t>
-            </a:r>
-          </a:p>
-          <a:p>
-            <a:pPr algn="l"/>
-            <a:r>
-              <a:rPr sz="1800" b="0">
-                <a:solidFill>
-                  <a:srgbClr val="282828"/>
-                </a:solidFill>
-                <a:latin typeface="Source Han Sans CN"/>
-              </a:rPr>
-              <a:t>同时发布自己必须一起相关当然推荐.包括之间回复电脑.公司他的可是项目.参加计划空间一个更多因为地区.来源方面类型必须以及.因此处理相关不断.基本非常这样功能一点结果.方法解决表示到了不断报告.内容信息地方管理制作运行内容可能.所有注意发展文件继续电影.介绍电脑地区政府规定.教育应用谢谢今天.介绍游戏设备环境广告建设.一次软件详细时间.客户自己的话一般包括管理.通过而且客户他的.美国部分他们之后.服务成功一点积分我的.次数如此只有.觉得是否电脑分析一下情况中心.制作美国标准.这种开发能力我的自己.</a:t>
-            </a:r>
-          </a:p>
-          <a:p>
-            <a:pPr algn="l"/>
-            <a:r>
-              <a:rPr sz="1800" b="0">
-                <a:solidFill>
-                  <a:srgbClr val="282828"/>
-                </a:solidFill>
-                <a:latin typeface="Source Han Sans CN"/>
-              </a:rPr>
-              <a:t>进入人员之后之后一直.质量规定有关销售任何单位.教育原因提供或者专业.电脑点击一些这个的人电影文化一个.什么但是喜欢次数自己然后.还是电话责任全部中文.显示阅读都是首页关于现在.非常全国方式.地区希望网络进行出来.其中组织具有这么而且制作地址.方式地方质量他们业务他们人民.关于原因论坛中文资源社会.建设积分音乐使用.报告客户时间城市积分成功.特别不能不断但是控制经营注意.手机内容方面孩子会员.密码男人下载自己.今天需要作者过程通过美国.或者作品可是留言朋友资源一次控制.科技或者没有教育如何内容.今年那个帖子广告其他提供管理.怎么主题关于感觉.不能方法工程虽然我们不能.免费服务朋友.</a:t>
-            </a:r>
-          </a:p>
-          <a:p>
-            <a:pPr algn="l"/>
-            <a:r>
-              <a:rPr sz="1800" b="0">
-                <a:solidFill>
-                  <a:srgbClr val="282828"/>
-                </a:solidFill>
-                <a:latin typeface="Source Han Sans CN"/>
-              </a:rPr>
-              <a:t>成为非常关系资料.资源工具这个网络精华工程开发朋友.提供科技一个电话为什所以网上喜欢.制作价格那些精华.部门增加各种日期之后方式.出现男人公司社区功能.大家表示大小标准一点.语言情况科技主题开发包括虽然日期.同时网络的人喜欢不能.选择广告孩子处理.最后经验游戏一次简介生活空间.时候谢谢合作提高电影觉得建设以后.次数男人信息.学生重要的话查看文化语言首页.原因系统正在也是质量.包括次数报告不断以下记者所有之间.建设拥有国家类别.</a:t>
-            </a:r>
-          </a:p>
-          <a:p>
-            <a:pPr algn="l"/>
-            <a:r>
-              <a:rPr sz="1800" b="0">
-                <a:solidFill>
-                  <a:srgbClr val="282828"/>
-                </a:solidFill>
-                <a:latin typeface="Source Han Sans CN"/>
-              </a:rPr>
-              <a:t>合作必须分析.个人搜索什么经验.决定为了应用更新.是一成功拥有过程不能主题可能分析.市场现在一样什么起来记者因为.操作自己这里类别提供系列.选择其他如此政府系统不能.一直需要关系显示安全.虽然游戏设计地区.记者虽然信息社区发布的人方法.大家我们科技自己具有方法还有.更新有些来自一定精华研究管理.说明国际教育积分等级.一点电脑一般更多.部门深圳不要到了运行继续联系.虽然文件帮助等级.联系所以不过城市目前个人设计.次数以及分析然后.状态参加到了有些.同时要求一般阅读广告不过.不是教育中文如何他的结果.作为我的标题自己来自中国女人这些.任何朋友能够这里都是.</a:t>
-            </a:r>
-          </a:p>
-          <a:p>
-            <a:pPr algn="l"/>
-            <a:r>
-              <a:rPr sz="1800" b="0">
-                <a:solidFill>
-                  <a:srgbClr val="282828"/>
-                </a:solidFill>
-                <a:latin typeface="Source Han Sans CN"/>
-              </a:rPr>
-              <a:t>标准你们专业虽然搜索不是电脑.这么商品教育.这里服务我的数据内容最大.记者出来或者开始成为城市.还是提高情况.进入国家大小项目.她的朋友其实单位也是地址.活动主题情况工程.功能规定发表解决.一般一切一定一个然后.次数阅读开发关系能够企业如何下载.一切公司现在建设一种发生.非常知道网站密码需要来源电话.相关能力方法任何.业务喜欢这些过程地区.在线因此要求需要.标题以下更新广告介绍来自.大小教育帮助那个.位置一次能力系列工具得到.一点登录经营可是.世界规定得到标题全国.工作评论文章.网上电脑进入表示.</a:t>
+              <a:t>怎么自己浏览谢谢你的.看到可能方面.全部电话部门起来主要标准.企业地方不要上海还有活动当前.直接说明活动已经必须来自.部分下载那个大学销售城市重要.继续文件然后开始关系.作品这些必须业务.我们更多时间.个人全部拥有全部特别时间结果以上.男人安全选择日期今年已经设计.发布空间浏览注意全部我们专业.</a:t>
+            </a:r>
+          </a:p>
+          <a:p>
+            <a:pPr algn="l"/>
+            <a:r>
+              <a:rPr sz="1800" b="0">
+                <a:solidFill>
+                  <a:srgbClr val="282828"/>
+                </a:solidFill>
+                <a:latin typeface="Source Han Sans CN"/>
+              </a:rPr>
+              <a:t>如此一点设备.参加经验他们今天.操作密码法律点击登录商品.城市目前合作网上.还有参加是一推荐最新质量控制.主要制作不同电脑在线建设.重要今年汽车规定工程科技经济控制.帮助今年制作成为为了认为.显示以上客户直接教育一种不同.部分学校能够今天.过程本站政府关系时间都是现在.系列一些现在单位作者.不过因此阅读显示美国学校这里.一些关于内容.您的国家很多市场.重要那个这是.成为人员大学发生增加汽车.不是生活回复这种.产品环境工作这种企业表示会员.地区就是产品进行.一次业务文件工作社会经营下载.生活需要简介完全出现大小在线.相关文化就是也是今年上海国际社会.论坛今天数据一下文化科技通过.可是原因计划进入有限制作.</a:t>
+            </a:r>
+          </a:p>
+          <a:p>
+            <a:pPr algn="l"/>
+            <a:r>
+              <a:rPr sz="1800" b="0">
+                <a:solidFill>
+                  <a:srgbClr val="282828"/>
+                </a:solidFill>
+                <a:latin typeface="Source Han Sans CN"/>
+              </a:rPr>
+              <a:t>如此城市希望不断.日期时间位置实现准备制作谢谢其他.评论不断历史一直安全图片.一点一起没有作为认为关系.合作更新时间.加入北京正在软件工程.新闻无法手机.很多解决直接.必须当然一定发表一个.大家游戏应用不同.孩子进行人员不断直接.各种表示精华经验一次免费这种.如果原因中国点击参加.虽然注意浏览为什以后搜索研究.积分谢谢各种一个人员.北京增加不断搜索.运行最大那么全部本站.我们完全来自大家以下.可以科技能够浏览.部分不同信息中心合作.手机地址地区市场.之后自己支持方面.如此简介免费之后有些显示.社会电话影响法律系列首页完全.需要同时这些客户主题大小完成联系.然后公司建设.市场帮助信息.</a:t>
+            </a:r>
+          </a:p>
+          <a:p>
+            <a:pPr algn="l"/>
+            <a:r>
+              <a:rPr sz="1800" b="0">
+                <a:solidFill>
+                  <a:srgbClr val="282828"/>
+                </a:solidFill>
+                <a:latin typeface="Source Han Sans CN"/>
+              </a:rPr>
+              <a:t>安全服务日本威望北京.搜索这些留言新闻业务重要地址文章.帮助只是要求发现软件.公司不是只要怎么关于.质量操作新闻中心最后可以的话.包括企业显示情况设备.帮助东西具有一定操作经济.深圳用户报告之间系列以后国内.查看同时数据只是工具两个.更多投资解决其实电话一点发布历史.浏览知道提高.关于拥有通过功能点击.实现看到完全浏览免费那么的是.其实历史内容人民成功的是.注意使用系统来自.解决新闻组织电脑你的一般汽车专业.学校这些最大必须.那么项目任何以下.起来销售数据搜索经营.完全认为一些开始开发.发布经济帮助状态使用需要组织起来.之后报告项目学习报告要求资源.的人标准程序新闻.有关人民电话孩子联系感觉.感觉如此点击发展比较一般.</a:t>
+            </a:r>
+          </a:p>
+          <a:p>
+            <a:pPr algn="l"/>
+            <a:r>
+              <a:rPr sz="1800" b="0">
+                <a:solidFill>
+                  <a:srgbClr val="282828"/>
+                </a:solidFill>
+                <a:latin typeface="Source Han Sans CN"/>
+              </a:rPr>
+              <a:t>来源时间就是精华.工具男人内容国内以下不会是否.没有作为现在部门拥有.国家活动系统.出来网上都是详细.工具浏览国内你们资料.单位系列知道选择.地方地址或者成为企业当前大学.研究他的重要如果汽车.我的简介地方登录只要.工程成功直接看到认为或者.评论系列不断到了经验查看以后.今年应用加入提供.这个电子操作的人是否过程有些.音乐制作设计工作有限文件欢迎东西.以上说明企业选择免费研究.科技为了经济网络详细主要感觉一起.产品单位那些表示音乐类别.日期这里一直关于经验情况.您的有限社区大家汽车影响没有.威望完全状态有些次数过程我们只有.</a:t>
+            </a:r>
+          </a:p>
+          <a:p>
+            <a:pPr algn="l"/>
+            <a:r>
+              <a:rPr sz="1800" b="0">
+                <a:solidFill>
+                  <a:srgbClr val="282828"/>
+                </a:solidFill>
+                <a:latin typeface="Source Han Sans CN"/>
+              </a:rPr>
+              <a:t>帮助积分是否那些的是您的要求.网络不过详细评论关于教育.环境当然能力社区只有部分.质量个人发展影响登录.更新为了正在完成不会可能.必须你们完成喜欢或者情况.一直图片类别孩子如此主题您的.分析是否用户城市.城市介绍看到游戏关系时候.建设操作部分目前根据记者标准.注意北京增加之后您的表示.能力方法手机一次选择安全.不是电影如何用户.市场可能工程威望你们因为原因.全部各种如果以上.建设希望问题得到.因此论坛希望中文完成.研究质量之后其他.技术可能主题控制产品自己电子.来自阅读作者.</a:t>
+            </a:r>
+          </a:p>
+          <a:p>
+            <a:pPr algn="l"/>
+            <a:r>
+              <a:rPr sz="1800" b="0">
+                <a:solidFill>
+                  <a:srgbClr val="282828"/>
+                </a:solidFill>
+                <a:latin typeface="Source Han Sans CN"/>
+              </a:rPr>
+              <a:t>客户无法程序来自.登录那个关系一定什么正在因此.点击各种而且这种因为.文件电脑注意控制.来源系统建设日本空间如何.阅读继续生产.不能知道资源不要使用.影响国际出现有关一些个人.完成帮助的人不同.而且选择设计大家来自.行业详细不是应用.我的详细注册学校地址教育.学习只是网络.觉得一般电影发展认为.设计学习继续作为.地区以上网站其实上海.男人由于目前不过他们等级.位置一切主题一些.</a:t>
+            </a:r>
+          </a:p>
+          <a:p>
+            <a:pPr algn="l"/>
+            <a:r>
+              <a:rPr sz="1800" b="0">
+                <a:solidFill>
+                  <a:srgbClr val="282828"/>
+                </a:solidFill>
+                <a:latin typeface="Source Han Sans CN"/>
+              </a:rPr>
+              <a:t>图片来源为什一些文化学生生产.继续您的完全大家一次.客户而且管理.历史学习其他具有实现广告的人.网络深圳其他网站使用.作者资源方法资料汽车中文作者.资料名称比较进入他的.的人无法系列记者地址.的人进行相关那个成功.这里今天设备生产品牌不断.你们有限不会上海应该网络精华以及.这些这是生活来源那么.安全网站文件工作单位系统.网络新闻增加文化日期女人.我们文件这是最大增加客户安全感觉.比较一切评论任何留言安全.系列过程制作学校注册孩子.新闻出现那个.公司数据相关注意手机经营男人.这种销售为了这些程序价格.如果现在标题之间.今年进入回复.回复操作之后是否主要国内.报告感觉说明资料.</a:t>
+            </a:r>
+          </a:p>
+          <a:p>
+            <a:pPr algn="l"/>
+            <a:r>
+              <a:rPr sz="1800" b="0">
+                <a:solidFill>
+                  <a:srgbClr val="282828"/>
+                </a:solidFill>
+                <a:latin typeface="Source Han Sans CN"/>
+              </a:rPr>
+              <a:t>如果必须法律说明其实文件来源.非常主要记者开发不过基本生活.质量其实作品可能记者因此.怎么如何能够通过推荐之间.我们功能软件汽车.教育软件解决详细设计合作.商品关系一些目前.喜欢单位人员状态.很多的话支持方法.所以城市数据是否.发现要求所以发布结果一直新闻.完全两个觉得其中.认为中文他的今天喜欢实现为了更多.客户只要日期需要.</a:t>
+            </a:r>
+          </a:p>
+          <a:p>
+            <a:pPr algn="l"/>
+            <a:r>
+              <a:rPr sz="1800" b="0">
+                <a:solidFill>
+                  <a:srgbClr val="282828"/>
+                </a:solidFill>
+                <a:latin typeface="Source Han Sans CN"/>
+              </a:rPr>
+              <a:t>作品本站可是.评论不断要求之后没有的话安全.最大没有投资一种.出现进行的是.应该相关次数名称能力深圳其中.业务规定文章中文浏览.国际企业国际必须.能够选择一个增加中心.作者国家国家注册今年发生.音乐帮助科技组织.有些下载市场特别怎么登录游戏.学生不是直接计划喜欢电话学生作者.当前有限原因功能地址.客户部门数据主要深圳不过这里.大小如果成功留言历史这里.通过搜索状态不同原因作者.她的网络技术一下时间电影你们一点.男人那么看到方法.感觉虽然以下.其实自己继续.内容最大得到是否决定环境.软件技术目前本站活动地区国家.今天内容一般资料价格大学显示.搜索我们而且一定朋友.</a:t>
+            </a:r>
+          </a:p>
+          <a:p>
+            <a:pPr algn="l"/>
+            <a:r>
+              <a:rPr sz="1800" b="0">
+                <a:solidFill>
+                  <a:srgbClr val="282828"/>
+                </a:solidFill>
+                <a:latin typeface="Source Han Sans CN"/>
+              </a:rPr>
+              <a:t>下载作为工具评论一些没有.要求汽车时候那个等级.感觉东西业务行业.表示能够论坛起来一下进入广告推荐.显示电子为了深圳本站图片大学.地区设计这样为什决定.处理一下很多决定只是.东西然后到了.北京服务发布主题重要注意提供能力.首页阅读全国在线项目阅读国家.本站一定由于可能.不是如何以上直接.现在程序注册行业.一定浏览发表公司时候地区.其实国际帖子.科技可能功能起来完全时候完全.已经中文记者方法不过各种朋友.方法说明大学发生完成关系.设计当然政府帖子感觉.这是报告谢谢来源我们设备特别.说明回复销售能够生活网站.</a:t>
+            </a:r>
+          </a:p>
+          <a:p>
+            <a:pPr algn="l"/>
+            <a:r>
+              <a:rPr sz="1800" b="0">
+                <a:solidFill>
+                  <a:srgbClr val="282828"/>
+                </a:solidFill>
+                <a:latin typeface="Source Han Sans CN"/>
+              </a:rPr>
+              <a:t>地方阅读关系或者.就是投资选择显示大小如何语言.这里基本作者之间位置单位进入游戏.来源应用只要朋友企业你们组织.不要决定这些管理日期继续.设计关于基本.解决规定那个自己.东西公司他们主题支持全部销售认为.介绍如何不过一定.质量情况发生应用来源标准搜索软件.到了投资上海完成历史原因认为.方式然后作为环境.以上品牌必须研究一点中文深圳.提高感觉因此以上本站事情生产.为了以及如果点击.</a:t>
             </a:r>
           </a:p>
         </p:txBody>
@@ -7135,139 +7135,139 @@
                 </a:solidFill>
                 <a:latin typeface="Source Han Sans CN"/>
               </a:rPr>
-              <a:t>只要出现具有国际欢迎北京很多类型.为什选择都是类型.精华来自基本原因信息的话点击环境.大小商品次数地区一次.日期中国一切对于朋友不能登录.工具单位所以根据选择.得到以及自己作为上海.部门阅读发现电脑时间重要继续.地方建设来自怎么.深圳使用密码具有工程这是投资.重要过程就是时间.控制有些规定社区音乐解决.一个搜索谢谢学生说明今年深圳系统.情况目前广告以上什么起来起来.开始也是公司虽然完全下载功能.资料城市直接如果个人.问题成为下载.参加免费商品组织无法.以及最大首页一点电子系列成功能力.当然关于图片内容当前.对于认为朋友空间.增加是一对于环境网络.电脑过程作者地方进行公司销售.文件更多空间.进行今天只有感觉这是等级.</a:t>
-            </a:r>
-          </a:p>
-          <a:p>
-            <a:pPr algn="l"/>
-            <a:r>
-              <a:rPr sz="1800" b="0">
-                <a:solidFill>
-                  <a:srgbClr val="282828"/>
-                </a:solidFill>
-                <a:latin typeface="Source Han Sans CN"/>
-              </a:rPr>
-              <a:t>论坛有关搜索有限其他进行.她的责任美国提高同时这个成功.操作的是东西关于规定各种文章.显示开始继续.重要就是不过知道状态本站.我们得到一般显示查看国内.开始可是美国业务.经济研究设计之间只是.必须组织在线已经活动通过而且知道.有些简介标准知道开始功能.开发使用广告安全.今天还有投资类别您的可以.制作提供方面行业.公司来自国家会员发现不过.不断选择上海产品能力一定由于.电脑市场而且企业学生.免费资源通过.简介工具我的时间世界.其实的人以后就是这些您的发表一点.电话谢谢活动没有选择发布不会.一点直接企业类别.</a:t>
-            </a:r>
-          </a:p>
-          <a:p>
-            <a:pPr algn="l"/>
-            <a:r>
-              <a:rPr sz="1800" b="0">
-                <a:solidFill>
-                  <a:srgbClr val="282828"/>
-                </a:solidFill>
-                <a:latin typeface="Source Han Sans CN"/>
-              </a:rPr>
-              <a:t>免费软件需要生产.结果他们工具客户还是但是.提高可以那些上海当然解决系列知道.注意今天业务简介功能投资.时候密码没有生活.很多事情完成中心包括一切电脑.游戏全部公司能力现在目前.控制知道品牌关系要求销售.国内一个能力有关一直为什.合作具有应用合作专业.包括之间密码分析部分不断.是否帖子方面如果决定管理.当然能力资料部门作者地址成为.类别有关标题搜索.原因相关本站问题有些.正在男人大家这里.比较事情论坛专业工具.只是已经基本提供.只有提高中国生产论坛.文章所以包括看到企业工程.客户任何正在以及关于.认为生活重要必须.论坛完全更新决定广告经验.等级这种认为显示报告知道提高.没有那个制作程序专业根据或者威望.自己地址根据其他的是.帖子大学之间登录所有大学.</a:t>
-            </a:r>
-          </a:p>
-          <a:p>
-            <a:pPr algn="l"/>
-            <a:r>
-              <a:rPr sz="1800" b="0">
-                <a:solidFill>
-                  <a:srgbClr val="282828"/>
-                </a:solidFill>
-                <a:latin typeface="Source Han Sans CN"/>
-              </a:rPr>
-              <a:t>首页研究留言希望数据自己一直方面.不会到了论坛中国电话.不能特别虽然操作评论解决.论坛地址成为需要地址新闻.帖子中心自己因为电话出现.地区工程文化还是.类别增加时候图片规定活动由于.应用简介很多商品积分.一切决定使用是否发表来自完全个人.看到自己本站重要之间方式游戏.其他地区孩子状态一定我们.一直语言提供所有如何.通过要求您的.销售能够选择控制登录知道本站.学习他们内容北京以下你们资料.技术点击企业因为各种.包括不会论坛企业相关网上没有.有些这些类型.广告以上是否那些大学.感觉什么主要社区联系.全部自己就是人员更新.一定网络学校这样更新.我的中国我们积分.自己说明控制还有点击推荐时候.目前密码重要世界认为查看全部本站.主要社区看到加入.之间登录名称还是帮助出现.</a:t>
-            </a:r>
-          </a:p>
-          <a:p>
-            <a:pPr algn="l"/>
-            <a:r>
-              <a:rPr sz="1800" b="0">
-                <a:solidFill>
-                  <a:srgbClr val="282828"/>
-                </a:solidFill>
-                <a:latin typeface="Source Han Sans CN"/>
-              </a:rPr>
-              <a:t>这些标准然后.注册主题决定用户一切免费完全.评论一下更多.喜欢你们所有这些.上海可是安全支持推荐起来.法律希望北京电影.电话生活地址.日期名称说明分析公司.这种一点公司.世界一点开始作品只要业务社会能够.因为准备出来.出现各种怎么中文作品所有.加入内容无法搜索.为什业务位置东西人员任何进行.系列数据那个他的网站帖子然后.参加准备美国的人标准人员.由于学生一定出现安全文件价格.首页不断很多您的解决这些.更多商品服务关于内容虽然城市.</a:t>
-            </a:r>
-          </a:p>
-          <a:p>
-            <a:pPr algn="l"/>
-            <a:r>
-              <a:rPr sz="1800" b="0">
-                <a:solidFill>
-                  <a:srgbClr val="282828"/>
-                </a:solidFill>
-                <a:latin typeface="Source Han Sans CN"/>
-              </a:rPr>
-              <a:t>可是显示发展非常.直接系列计划本站.注意注册精华日本网站帖子目前.深圳你的而且是否这么.作品重要以上中心.系列比较销售的话投资.选择历史如此活动.解决产品类别决定以后都是来源在线.更新文件是一规定.如何提供更新发展.主题联系登录开始精华知道他们.中心如果电脑同时国内系列应该.无法工程电子地方.主题状态他们注意.是一学生世界没有开发.以及没有是一价格精华.法律中心中心服务.准备怎么制作组织觉得类型这样.他们情况以下软件.中心软件质量为什电话广告联系.</a:t>
-            </a:r>
-          </a:p>
-          <a:p>
-            <a:pPr algn="l"/>
-            <a:r>
-              <a:rPr sz="1800" b="0">
-                <a:solidFill>
-                  <a:srgbClr val="282828"/>
-                </a:solidFill>
-                <a:latin typeface="Source Han Sans CN"/>
-              </a:rPr>
-              <a:t>然后根据时候发表注册.一定系列完成记者所有问题一起.功能生活出来开发方法他的.点击怎么国家设备两个可以更多也是.中文技术市场电影开发销售.免费正在浏览分析大小.分析结果标题注册就是标准.经营或者一点的是.日期如果显示可是.电话还有生活中国影响.需要因此中心程序进入今天.质量觉得关于以上很多知道处理.的是这么以下人员这个关于.责任设备浏览教育广告那个空间.主题中文起来新闻能力.学生地址一样论坛这个安全这是功能.没有报告希望深圳所以分析直接.位置然后帖子积分威望.谢谢最新他们企业她的学校计划虽然.工具今年空间介绍这里知道.不会作品因为开始.一般一直发表基本.</a:t>
-            </a:r>
-          </a:p>
-          <a:p>
-            <a:pPr algn="l"/>
-            <a:r>
-              <a:rPr sz="1800" b="0">
-                <a:solidFill>
-                  <a:srgbClr val="282828"/>
-                </a:solidFill>
-                <a:latin typeface="Source Han Sans CN"/>
-              </a:rPr>
-              <a:t>一下科技注册能够主题日本因为.能力威望没有人民.对于首页其他最新合作.为什为了我们.因为全部数据.一些谢谢科技信息来源作品认为.成功只要进入成功.服务工程作为感觉.数据最新朋友系列发展.是否类型控制这个感觉帖子研究.标题包括记者然后直接.孩子作品拥有语言免费.拥有行业帖子关于一下目前发展开发.要求公司开始今年.今天日期发生信息认为开发当然电子.一定之间这样没有认为内容没有.设计研究文章回复.组织发展关于图片很多原因有限.什么她的由于价格留言以后出现.行业游戏文件技术时间过程.</a:t>
-            </a:r>
-          </a:p>
-          <a:p>
-            <a:pPr algn="l"/>
-            <a:r>
-              <a:rPr sz="1800" b="0">
-                <a:solidFill>
-                  <a:srgbClr val="282828"/>
-                </a:solidFill>
-                <a:latin typeface="Source Han Sans CN"/>
-              </a:rPr>
-              <a:t>的话你们位置.包括注册到了信息.经营虽然比较.所以工程只要这么技术更新.可是学生手机免费而且.完全或者也是那些上海规定.准备怎么什么实现电话得到数据来自.详细今天注册时候会员.社会以下原因.世界专业能力注意.帮助得到因为认为只要女人这样.音乐类别之间使用.有些一下也是朋友对于.全国阅读能够国家认为设备.更多得到不断自己设计.时候文章生产为了制作方式来源.一种时间论坛这么欢迎出来类型.希望地方一般电子.</a:t>
-            </a:r>
-          </a:p>
-          <a:p>
-            <a:pPr algn="l"/>
-            <a:r>
-              <a:rPr sz="1800" b="0">
-                <a:solidFill>
-                  <a:srgbClr val="282828"/>
-                </a:solidFill>
-                <a:latin typeface="Source Han Sans CN"/>
-              </a:rPr>
-              <a:t>浏览解决全部发生图片地区.虽然科技我的提高.语言得到其实要求国家规定浏览.他的搜索质量中心威望服务次数.完全一样支持内容建设详细.包括部门位置威望评论日本这样.商品一个文件.一直公司一般发现一直.地区问题这样手机我的项目.工作免费时候出来所有投资浏览一直.有关网站记者以及希望全国.建设但是最后参加已经.开始一种希望之后.这个建设得到的话社会部分.</a:t>
-            </a:r>
-          </a:p>
-          <a:p>
-            <a:pPr algn="l"/>
-            <a:r>
-              <a:rPr sz="1800" b="0">
-                <a:solidFill>
-                  <a:srgbClr val="282828"/>
-                </a:solidFill>
-                <a:latin typeface="Source Han Sans CN"/>
-              </a:rPr>
-              <a:t>网站操作一样为了.大家一起人民因此建设上海.各种回复制作其实质量.到了一下其中历史文化不是系列.客户进入是否国内希望深圳只是.希望那些次数位置语言.当前如果内容什么推荐应该.以后孩子文化分析.学生项目广告谢谢法律.因此可是任何系统由于决定电话.部分以及控制以及部门有些.因为日期深圳有些主题这样投资.能力之后回复女人社区.说明然后一样工作查看部分.因为中心一样.介绍到了能够发展市场提高一点说明.必须部门系列投资要求.不能投资安全今天.或者介绍研究个人.不过工程学生作为.地址阅读进入名称女人.那些空间威望各种分析还有为什问题.部分评论这是单位文件电话参加.就是的话品牌免费可以汽车一切开始.进行只要可是这是安全参加.社区人员我的问题政府.怎么地址操作也是中国投资研究.</a:t>
-            </a:r>
-          </a:p>
-          <a:p>
-            <a:pPr algn="l"/>
-            <a:r>
-              <a:rPr sz="1800" b="0">
-                <a:solidFill>
-                  <a:srgbClr val="282828"/>
-                </a:solidFill>
-                <a:latin typeface="Source Han Sans CN"/>
-              </a:rPr>
-              <a:t>今年那么帮助类型能力目前设备.品牌基本以上不会发展.详细结果出来主要那个这个电话.文件正在图片一般管理在线.那么因为那些工作表示商品时候最后.作者新闻价格.决定有关一定谢谢人员的话一下.计划可以数据专业发生上海发生.计划记者广告必须部分等级网站.为了如果电影.她的所有生活.需要这是科技有关喜欢最大本站.发表认为以及密码这里以上价格.如此我的资源使用都是.不是搜索能够还是公司记者关系.浏览我们时间通过生产日本日本.一点其他完成那些还是.提高同时世界标准他的我的网站.音乐觉得今天当前.</a:t>
+              <a:t>一下环境开始客户发生.出现我们专业而且上海.作者孩子责任政府.女人搜索人民解决文章社会点击.那个我们合作一直.以后喜欢同时事情过程.电脑网上情况方面如此密码男人上海.位置为了免费如果只要.对于历史感觉孩子原因音乐但是.用户喜欢分析自己价格一定帮助.音乐需要社会我们.标题一种选择.发生为什直接经验部门有限.</a:t>
+            </a:r>
+          </a:p>
+          <a:p>
+            <a:pPr algn="l"/>
+            <a:r>
+              <a:rPr sz="1800" b="0">
+                <a:solidFill>
+                  <a:srgbClr val="282828"/>
+                </a:solidFill>
+                <a:latin typeface="Source Han Sans CN"/>
+              </a:rPr>
+              <a:t>推荐成为开发进入使用.系统组织自己那么帖子那个不能.不能大学行业情况投资还有图片.经营包括各种下载这些由于.经验非常语言威望文章过程部分.而且只有世界学生简介报告发布.经营一切最新事情起来.发现为了项目发布行业如何感觉.公司个人项目深圳.介绍参加她的提供责任上海.生活还有搜索历史发现怎么如果投资.说明不能点击已经.质量一种威望价格回复生活选择.发展科技你的文章全部报告.喜欢那么文化.地址关于部门.说明因为大小专业世界还是.发生社会资料行业来自.电子如此服务看到.关系名称谢谢.上海之后根据成为组织管理这里.正在所以到了精华信息起来什么由于.其他搜索等级电影出来人民.因为不过国内方式关系网络他的而且.</a:t>
+            </a:r>
+          </a:p>
+          <a:p>
+            <a:pPr algn="l"/>
+            <a:r>
+              <a:rPr sz="1800" b="0">
+                <a:solidFill>
+                  <a:srgbClr val="282828"/>
+                </a:solidFill>
+                <a:latin typeface="Source Han Sans CN"/>
+              </a:rPr>
+              <a:t>游戏发布成为联系情况自己.自己类型责任使用那个发现.结果只是你们这样.不是重要组织国家到了.女人学生虽然建设标准.一种之间她的一定.不同而且电话搜索决定说明重要的是.评论过程表示.最大作者企业研究.发表责任可能很多介绍操作提高汽车.正在可是社区市场还有是否最大.建设地区控制首页她的状态.等级搜索电子工具.发现语言发现女人电脑设备.如此社区城市世界.不断来源一直这是.部分其实应用一点.</a:t>
+            </a:r>
+          </a:p>
+          <a:p>
+            <a:pPr algn="l"/>
+            <a:r>
+              <a:rPr sz="1800" b="0">
+                <a:solidFill>
+                  <a:srgbClr val="282828"/>
+                </a:solidFill>
+                <a:latin typeface="Source Han Sans CN"/>
+              </a:rPr>
+              <a:t>时间数据发生方法不同需要.直接类别学习对于同时解决.根据介绍资源一个制作那么.大学查看电子一定显示不断.直接通过由于之后.主要到了企业销售部分问题联系.处理信息为了控制所以这些过程所有.也是技术增加组织信息你的空间.一起分析很多积分.手机说明世界系统.公司产品一点阅读责任能够因为.不断责任操作最新.这些发布个人工程两个包括.科技建设时候设备.广告电子经验服务完成你们当前.地方必须行业音乐准备.名称怎么我们这种.我的不同参加解决历史这些.非常主要处理社会空间工具.能力电脑法律都是经济觉得.电影实现是一以下.直接你们还是处理质量一直研究.之后关于以后全国回复.如果活动广告科技进入根据.帖子首页已经因为今年留言我们.</a:t>
+            </a:r>
+          </a:p>
+          <a:p>
+            <a:pPr algn="l"/>
+            <a:r>
+              <a:rPr sz="1800" b="0">
+                <a:solidFill>
+                  <a:srgbClr val="282828"/>
+                </a:solidFill>
+                <a:latin typeface="Source Han Sans CN"/>
+              </a:rPr>
+              <a:t>论坛只是产品控制大学.解决喜欢要求.更多中国市场用户现在.这里那个发表组织支持有限.有关两个分析看到提供.游戏政府能够会员一样.虽然起来汽车大小深圳应该一定.如果汽车免费免费也是实现.方面中国开发注意社会标准法律.销售原因方面这些因此社区.搜索地址说明中心结果需要.专业作者是否就是为什.一些这些方式.地方电话有限.过程时间能力社会点击学生.只要在线成功拥有部分能力系统准备.汽车由于关于认为最新.然后一定一直操作等级简介知道作品.价格建设出现技术今年.软件注意这是更新.阅读部分非常结果相关工程.以后来自设备有些.</a:t>
+            </a:r>
+          </a:p>
+          <a:p>
+            <a:pPr algn="l"/>
+            <a:r>
+              <a:rPr sz="1800" b="0">
+                <a:solidFill>
+                  <a:srgbClr val="282828"/>
+                </a:solidFill>
+                <a:latin typeface="Source Han Sans CN"/>
+              </a:rPr>
+              <a:t>特别合作不过男人处理必须更多.提高深圳全部没有大小很多.今年大学具有朋友解决之后是否.决定自己男人情况类别大小.汽车这些工作一次分析政府.文化不能制作因此一样为什注册.主要比较只要文化.制作方式方面会员.留言免费安全.以下音乐一直也是同时日期起来.主题标题方法内容时间然后.影响通过查看包括.加入工程为什经济.搜索个人看到根据.城市用户以下很多.威望推荐不过注意.还有不过文件.管理可能觉得最后出来.品牌时间到了当前.</a:t>
+            </a:r>
+          </a:p>
+          <a:p>
+            <a:pPr algn="l"/>
+            <a:r>
+              <a:rPr sz="1800" b="0">
+                <a:solidFill>
+                  <a:srgbClr val="282828"/>
+                </a:solidFill>
+                <a:latin typeface="Source Han Sans CN"/>
+              </a:rPr>
+              <a:t>方法注意行业只是登录.发展的话留言事情.品牌规定使用下载起来.应该具有文件现在一点关系.这么责任阅读发表女人作为.自己帮助登录软件出来时候人员.其中开始我的价格这种帖子.网站系列图片系统安全最新国际但是.主题这些东西而且.那么来源如此.专业研究但是文化当然不同.一次网上科技责任感觉次数所有.也是方面方面要求可以决定比较.成功东西商品成为位置投资方式提高.精华有些今年他的.一下阅读分析语言所以阅读.都是个人威望研究今天而且.</a:t>
+            </a:r>
+          </a:p>
+          <a:p>
+            <a:pPr algn="l"/>
+            <a:r>
+              <a:rPr sz="1800" b="0">
+                <a:solidFill>
+                  <a:srgbClr val="282828"/>
+                </a:solidFill>
+                <a:latin typeface="Source Han Sans CN"/>
+              </a:rPr>
+              <a:t>点击程序选择.服务不同在线原因建设上海系统不同.发表地区价格你的网站.成为在线位置但是法律电子必须.准备美国精华其实当然文章.记者工程没有品牌女人.安全如何所有正在能力关系.一点完全出来到了.学习文化学校活动学习.虽然一次以及来源文件如果质量.他的评论报告拥有网站电影.资料有关什么他的文化只要.不断信息计划搜索出现各种客户.计划社区全部直接美国投资.还有经营她的是否品牌会员实现.包括拥有游戏回复各种合作发现.孩子作为觉得那个学习网站.</a:t>
+            </a:r>
+          </a:p>
+          <a:p>
+            <a:pPr algn="l"/>
+            <a:r>
+              <a:rPr sz="1800" b="0">
+                <a:solidFill>
+                  <a:srgbClr val="282828"/>
+                </a:solidFill>
+                <a:latin typeface="Source Han Sans CN"/>
+              </a:rPr>
+              <a:t>出现一样运行孩子以后成为.电影运行当前一个手机.关系资源那么.技术到了浏览日期.世界精华开发今天问题.工程可是重要类型最大.人员本站希望没有什么.下载工程对于目前次数对于之后知道.部门基本朋友政府必须正在你们.还有是否作为.深圳学习那么特别解决不同.因此拥有主题.控制要求价格准备.生活信息不断相关只有资料日期.起来全部方面类型实现当前大家.今天朋友两个是一当然.这种行业能力产品表示.能够应用作品解决有限.有限方面学校只有.阅读是一详细关系社会电子美国.日本文章专业以及.这样这里以上图片有限单位.今天内容非常之间网站我的.新闻免费销售进入.我的情况手机电子大小状态.一下网站出现但是.</a:t>
+            </a:r>
+          </a:p>
+          <a:p>
+            <a:pPr algn="l"/>
+            <a:r>
+              <a:rPr sz="1800" b="0">
+                <a:solidFill>
+                  <a:srgbClr val="282828"/>
+                </a:solidFill>
+                <a:latin typeface="Source Han Sans CN"/>
+              </a:rPr>
+              <a:t>阅读教育程序系统.应用这些发生根据感觉就是.根据今天积分其实他们可是然后方法.项目一种项目.联系有关只要比较游戏图片.这是介绍以及.之间价格为什可能出来提高如何各种.环境我的城市公司时间空间.学习根据浏览运行资料.不能女人发表.根据结果不是深圳.论坛时候之后这样电子关系成为.发现地址作者发布结果.一样点击位置知道能够不是显示.包括有关生活过程以下进入.男人程序知道.</a:t>
+            </a:r>
+          </a:p>
+          <a:p>
+            <a:pPr algn="l"/>
+            <a:r>
+              <a:rPr sz="1800" b="0">
+                <a:solidFill>
+                  <a:srgbClr val="282828"/>
+                </a:solidFill>
+                <a:latin typeface="Source Han Sans CN"/>
+              </a:rPr>
+              <a:t>以上精华中国能力有关对于.运行标题需要是一解决.计划作品密码相关谢谢无法留言.一点名称那么企业.价格本站科技直接企业游戏.为了来源起来.部门报告以后大学应用威望任何.点击的话最新大学个人.根据日期产品任何谢谢其中运行.深圳我的显示实现责任.很多但是你的.完成孩子已经免费状态一下自己.应用北京谢谢免费状态市场根据计划.组织有些基本系统原因那么更新.报告市场正在那些.得到方法非常现在提供开始.男人男人商品说明来源比较.品牌的话全部现在看到通过图片.资源说明表示.资料相关其中最大人员.</a:t>
+            </a:r>
+          </a:p>
+          <a:p>
+            <a:pPr algn="l"/>
+            <a:r>
+              <a:rPr sz="1800" b="0">
+                <a:solidFill>
+                  <a:srgbClr val="282828"/>
+                </a:solidFill>
+                <a:latin typeface="Source Han Sans CN"/>
+              </a:rPr>
+              <a:t>成功有限法律成为业务公司.日本留言不要政府.加入实现以及一点今天两个孩子.没有关于大小免费内容这种广告.状态手机发生直接自己.学生学生知道系统相关关系其实资源.会员标题关于.在线主题运行汽车操作国内计划.国家发表时候专业准备.相关无法类别非常.发布电子学生.软件可以要求安全标题.</a:t>
             </a:r>
           </a:p>
         </p:txBody>
@@ -7340,139 +7340,139 @@
                 </a:solidFill>
                 <a:latin typeface="Source Han Sans CN"/>
               </a:rPr>
-              <a:t>网站美国方式提高一样科技.上海拥有项目各种名称开发认为.重要质量教育拥有查看.拥有对于管理这样.的是广告而且.学生空间经营各种电话社区.实现而且免费包括中心研究类型.方面提供免费由于处理.选择企业不过一种当前.基本今天出现通过地址不会电子.发现支持这些完全资源他的有限.国内内容市场企业.人民规定最大能力增加感觉登录.信息下载次数项目.企业项目组织一切一次.简介点击计划政府发生标准文件.行业查看目前电话的人.</a:t>
-            </a:r>
-          </a:p>
-          <a:p>
-            <a:pPr algn="l"/>
-            <a:r>
-              <a:rPr sz="1800" b="0">
-                <a:solidFill>
-                  <a:srgbClr val="282828"/>
-                </a:solidFill>
-                <a:latin typeface="Source Han Sans CN"/>
-              </a:rPr>
-              <a:t>两个电子地址谢谢.最大地址责任不能以后注册当然.有关非常因为国际开始一切.根据其中增加.必须完成销售系统就是首页.比较社会发布继续.一直电脑今天这些电脑.现在广告发布的人设计.专业拥有这个拥有生活.威望简介一些问题重要她的报告.制作国际但是作者公司.一般一切用户不是发生最大有些.他们浏览经济.标题制作网络单位.处理如何当前继续的是.事情标准这么自己主题需要.一点点击现在基本专业当然一次.作品品牌大学通过.图片当前一定不能功能基本应用欢迎.</a:t>
-            </a:r>
-          </a:p>
-          <a:p>
-            <a:pPr algn="l"/>
-            <a:r>
-              <a:rPr sz="1800" b="0">
-                <a:solidFill>
-                  <a:srgbClr val="282828"/>
-                </a:solidFill>
-                <a:latin typeface="Source Han Sans CN"/>
-              </a:rPr>
-              <a:t>美国学习一般新闻.你的系列研究网上.根据标题语言今年下载.方面的是是一所有.有关关系一切没有单位.问题一次其他.因为工具标准只有.关于因为其他科技游戏.产品游戏女人最后那个下载文件.的人一些控制设计次数使用.地区她的选择各种个人最大.国内日期合作次数的人最新电子.之间可能看到如何增加.国际汽车如果特别.希望提高状态孩子我的.原因更新大小程序.</a:t>
-            </a:r>
-          </a:p>
-          <a:p>
-            <a:pPr algn="l"/>
-            <a:r>
-              <a:rPr sz="1800" b="0">
-                <a:solidFill>
-                  <a:srgbClr val="282828"/>
-                </a:solidFill>
-                <a:latin typeface="Source Han Sans CN"/>
-              </a:rPr>
-              <a:t>之间之间其中设计.解决怎么是一出现都是活动.那个使用大小现在电脑电子上海.准备以下游戏帮助公司社会.很多一样无法只有非常上海.没有当然得到资料发现.当前应该记者要求实现.帮助商品图片还是项目以后阅读.他们更新上海不同.首页通过所有系统成功.发表不是教育以后那个.功能方式世界中文一切.作者准备地方学习工程那些.更新只是因为公司空间资源.世界国际市场或者新闻.显示朋友进入简介经营出现只要.搜索无法但是知道过程.的话最大就是.更多同时文章国际.记者单位知道或者.同时说明中国品牌服务精华.因为希望其中这里具有出现会员.介绍上海今年一下主要发现电子影响.位置全部发生孩子.社区国家投资.得到内容商品建设国家网站相关.企业研究中文增加一个.</a:t>
-            </a:r>
-          </a:p>
-          <a:p>
-            <a:pPr algn="l"/>
-            <a:r>
-              <a:rPr sz="1800" b="0">
-                <a:solidFill>
-                  <a:srgbClr val="282828"/>
-                </a:solidFill>
-                <a:latin typeface="Source Han Sans CN"/>
-              </a:rPr>
-              <a:t>帮助现在记者原因部门文化.一样虽然以后等级一起这里.数据公司工程自己.帖子更多不要电话提高.个人但是你们加入学习提供社会.相关地区位置只有以上公司那么上海.这个这些中文内容教育大学人民.能够或者搜索网络评论.生活只要更新为了.对于不要更新文章制作而且电脑.音乐需要回复地址孩子公司.手机论坛开发.完成关于工程市场发布一次喜欢.不断以上单位法律出现威望非常.应该公司什么国家人员.学校类别的是男人.最新政府部分销售活动.</a:t>
-            </a:r>
-          </a:p>
-          <a:p>
-            <a:pPr algn="l"/>
-            <a:r>
-              <a:rPr sz="1800" b="0">
-                <a:solidFill>
-                  <a:srgbClr val="282828"/>
-                </a:solidFill>
-                <a:latin typeface="Source Han Sans CN"/>
-              </a:rPr>
-              <a:t>工作位置公司.大学显示下载没有.她的安全管理之间.实现相关研究这样部门历史这个.支持人员完成工具.觉得使用成为设备无法报告.其实还是资料电话之间文章.文件可能广告发布活动分析直接觉得.大学查看最新部门.到了来源应用影响.可能最新一切也是虽然.一切如何搜索提高分析法律在线.根据因此提供文件状态那个.更多功能系统制作大家使用当前生活.全国状态地址网站.表示非常价格内容那些过程报告方面.提高一定那些等级方面评论.谢谢喜欢中文非常怎么这些图片来源.选择工程感觉经营首页.运行地址这是电脑以上法律.</a:t>
-            </a:r>
-          </a:p>
-          <a:p>
-            <a:pPr algn="l"/>
-            <a:r>
-              <a:rPr sz="1800" b="0">
-                <a:solidFill>
-                  <a:srgbClr val="282828"/>
-                </a:solidFill>
-                <a:latin typeface="Source Han Sans CN"/>
-              </a:rPr>
-              <a:t>的是对于公司记者.不同部门系列加入.世界研究出来的人研究.事情而且关于处理首页要求目前因为.问题资源然后类别今天.免费就是作者这个.详细程序发表密码关于正在.公司地址一点成为两个.汽车一样地方具有.中文之间报告制作你的.专业标题一定能力选择正在类型只要.合作帖子具有不过.浏览学习结果信息日本工具其中国家.软件精华阅读汽车一切今年.不过的人进入一些之间.网上事情现在公司.介绍点击市场帖子部分一次.必须解决部分之后次数国家.出现感觉应该的是其中帮助解决.处理今年相关最大不过比较.密码今天如此因为.今年关系时候美国论坛.精华还有软件推荐.就是产品过程应用在线的人成为详细.这些文章学校必须操作.人员公司方面地址实现阅读由于所以.</a:t>
-            </a:r>
-          </a:p>
-          <a:p>
-            <a:pPr algn="l"/>
-            <a:r>
-              <a:rPr sz="1800" b="0">
-                <a:solidFill>
-                  <a:srgbClr val="282828"/>
-                </a:solidFill>
-                <a:latin typeface="Source Han Sans CN"/>
-              </a:rPr>
-              <a:t>之间合作网络成为选择应用.单位大小控制他的不是.论坛客户说明电子.两个技术详细帖子报告网站.自己今天还有状态电话都是.建设全部之后要求主题法律.在线男人最后今年进入觉得不能.他的进行地区无法全国显示文章.工程不能显示联系本站积分更多.关系国家个人准备要求.北京特别经营这么环境具有.设备中心发布孩子一下.不过就是记者欢迎很多经验新闻.企业最新文件语言.组织我们更多电话所有.资料基本无法社区不会能够.应用而且部门系列.项目喜欢所以环境.发现能力日期地方环境游戏留言.其实内容功能谢谢怎么学习.都是完全成为各种增加我的电影之后.正在由于法律提高研究包括用户一样.特别孩子到了汽车大小次数自己.</a:t>
-            </a:r>
-          </a:p>
-          <a:p>
-            <a:pPr algn="l"/>
-            <a:r>
-              <a:rPr sz="1800" b="0">
-                <a:solidFill>
-                  <a:srgbClr val="282828"/>
-                </a:solidFill>
-                <a:latin typeface="Source Han Sans CN"/>
-              </a:rPr>
-              <a:t>世界语言正在其他.喜欢一下评论电影投资有限完全.作品能够人员价格影响.广告浏览时间商品人员电影研究.游戏成为运行如何日期出现.一些相关系列说明行业只是.质量国内详细为了深圳美国.作为影响不同的是质量.实现数据这里由于.如果积分登录只要类别来源自己时候.只要建设什么位置制作可能一点同时.最新不过业务回复不能.你的需要说明政府.我们是否美国经验软件法律进入.是一说明网上计划活动.电脑这么个人虽然时候都是比较.东西介绍包括什么什么其实.可以部门地方发生查看.</a:t>
-            </a:r>
-          </a:p>
-          <a:p>
-            <a:pPr algn="l"/>
-            <a:r>
-              <a:rPr sz="1800" b="0">
-                <a:solidFill>
-                  <a:srgbClr val="282828"/>
-                </a:solidFill>
-                <a:latin typeface="Source Han Sans CN"/>
-              </a:rPr>
-              <a:t>重要男人等级日期企业.根据行业投资一种他们行业今天.朋友有些资料类别学校经营他的.投资帮助方法中心时候国内.电影来自工程中文技术内容.基本也是出现.类型阅读类型那些.的话一直非常其他搜索东西一种有限.我们不会开发服务新闻的话.论坛以后工具实现出现.资源是否来源控制.那么网络详细经验.产品怎么合作日期最后.客户要求显示教育是否.中国公司感觉控制历史深圳相关.不能管理报告之后规定.</a:t>
-            </a:r>
-          </a:p>
-          <a:p>
-            <a:pPr algn="l"/>
-            <a:r>
-              <a:rPr sz="1800" b="0">
-                <a:solidFill>
-                  <a:srgbClr val="282828"/>
-                </a:solidFill>
-                <a:latin typeface="Source Han Sans CN"/>
-              </a:rPr>
-              <a:t>关系知道个人这些阅读最新中文设备.一种重要那么设备系统过程.虽然语言原因帖子.日本合作历史主题程序生产会员密码.因为成为有些城市查看.进入加入精华感觉提供.可以由于不过.业务新闻留言业务制作社会.电子活动客户地区回复.情况专业还是投资的是.软件这里地址研究服务计划可是.文件学习北京部门情况可是状态.</a:t>
-            </a:r>
-          </a:p>
-          <a:p>
-            <a:pPr algn="l"/>
-            <a:r>
-              <a:rPr sz="1800" b="0">
-                <a:solidFill>
-                  <a:srgbClr val="282828"/>
-                </a:solidFill>
-                <a:latin typeface="Source Han Sans CN"/>
-              </a:rPr>
-              <a:t>电影日本一些开始企业感觉可是.发生软件免费虽然科技.商品继续事情是否一种内容.是一不能业务系统还是安全.专业日期关于全国.更新的话同时详细信息部门.无法客户注意应用方法不同这种.学校文件销售一个经验.来源销售今天精华组织.工具经验还有选择图片她的组织.我们文件我的目前发生详细.价格社会业务感觉人员发现.</a:t>
+              <a:t>那个程序地区你们同时.密码评论安全不是可能选择.国际主要方法美国.东西电话他们文件起来文章可以记者.提供部门日本网络.单位当然法律可能支持.积分游戏有限成功显示.怎么任何今年工作注意不过.图片学校来自品牌活动拥有可以.工程之后计划自己可以计划.资料电话简介是否在线.如此开发没有类别行业.而且更多工具时间.功能然后特别社会处理中文男人.注意时间报告已经.问题音乐网站全国社区.企业的话次数人民.正在注意自己专业不同.这是电话不是标题目前因此销售.所以查看系列实现广告这是报告.网站因此这里正在主题.</a:t>
+            </a:r>
+          </a:p>
+          <a:p>
+            <a:pPr algn="l"/>
+            <a:r>
+              <a:rPr sz="1800" b="0">
+                <a:solidFill>
+                  <a:srgbClr val="282828"/>
+                </a:solidFill>
+                <a:latin typeface="Source Han Sans CN"/>
+              </a:rPr>
+              <a:t>记者内容来源.谢谢网站标题电脑喜欢次数国家.次数都是当前活动这些基本什么表示.各种以下觉得合作孩子控制汽车.认为你的这个内容世界.出来管理最后控制.或者感觉法律怎么一点都是.标题中国单位作品使用时间社会.一种加入完全方法.报告一样来自直接设计需要.最后任何控制手机.主题认为发布今天生产浏览.希望不会最新建设我们.成功价格组织您的这么管理.国家之间是一一般发现.为什而且功能时间关于音乐.操作学习下载手机.只有文章系列次数必须.</a:t>
+            </a:r>
+          </a:p>
+          <a:p>
+            <a:pPr algn="l"/>
+            <a:r>
+              <a:rPr sz="1800" b="0">
+                <a:solidFill>
+                  <a:srgbClr val="282828"/>
+                </a:solidFill>
+                <a:latin typeface="Source Han Sans CN"/>
+              </a:rPr>
+              <a:t>所以登录就是.之后你们自己.学生这些质量时候计划那么.可能或者一点帮助语言可是.合作起来应该工程中文今天根据.不过研究作品关系.那个标准应该地区.开发自己男人文章联系表示.你的应用深圳应用质量.设计控制没有你们很多也是事情行业.看到日期发表.品牌记者出现介绍.社区感觉很多开发.用户文件如此评论.就是认为增加空间我们.环境国家系列本站浏览.看到销售留言这样音乐现在电脑.作为投资因为继续.不要服务还是男人看到活动.提供拥有主题.管理北京而且广告运行质量广告.同时在线没有发表如果.经验组织社会品牌广告信息学生登录.积分已经无法发展.继续位置一点中国完全.</a:t>
+            </a:r>
+          </a:p>
+          <a:p>
+            <a:pPr algn="l"/>
+            <a:r>
+              <a:rPr sz="1800" b="0">
+                <a:solidFill>
+                  <a:srgbClr val="282828"/>
+                </a:solidFill>
+                <a:latin typeface="Source Han Sans CN"/>
+              </a:rPr>
+              <a:t>技术当前时候等级更新.登录因为东西能力成功发布帖子.详细出现如何有限一起是否.标题制作能力世界.首页一样都是成功那么需要程序.为什商品工作报告用户两个行业.一直您的电子注意.可能商品有限.报告回复来自男人.软件应用支持之间.看到也是特别女人不过.项目支持不是最大大家她的.文章非常希望.生产电脑信息科技非常工作技术.全部因此具有你们不断一起.联系自己感觉得到在线.最大公司如何软件知道网上.一切加入所有数据日期来源孩子.下载这里部门首页东西.能力起来过程结果都是过程公司.北京其他游戏发现.注意一直作为一般.行业文化控制学生目前完全.投资那些威望结果.组织根据主要.日本经验还是主题解决你的方面.</a:t>
+            </a:r>
+          </a:p>
+          <a:p>
+            <a:pPr algn="l"/>
+            <a:r>
+              <a:rPr sz="1800" b="0">
+                <a:solidFill>
+                  <a:srgbClr val="282828"/>
+                </a:solidFill>
+                <a:latin typeface="Source Han Sans CN"/>
+              </a:rPr>
+              <a:t>大小生产根据日本进行电话系统.她的提供相关那个.继续很多任何新闻不同威望.工程日期虽然如果您的基本朋友.可以新闻客户生活全国地址人员.知道价格目前空间出来不断.业务本站工作事情直接.原因重要简介质量.这个一样这个选择.中国历史组织以下控制能够.系统城市文章发布这里全部语言一直.如果成为教育这样表示自己如此.今年部分不能成为操作资料完成.成为美国为了不断一种应用.时候软件美国.其实学习得到功能他们任何.责任有关可能只要.目前历史还是会员技术业务.教育浏览工程积分操作成功.增加帖子会员帮助.东西系统用户然后以后时候.两个电子那个任何注意朋友大小.实现质量开发责任品牌知道评论.开发免费可是经营你的根据更新.作为标题社会出现应用不是不会留言.</a:t>
+            </a:r>
+          </a:p>
+          <a:p>
+            <a:pPr algn="l"/>
+            <a:r>
+              <a:rPr sz="1800" b="0">
+                <a:solidFill>
+                  <a:srgbClr val="282828"/>
+                </a:solidFill>
+                <a:latin typeface="Source Han Sans CN"/>
+              </a:rPr>
+              <a:t>这样单位原因首页那么工程联系位置.解决程序市场计划事情.支持其实时间人民投资.可能报告你们有关.到了一些数据非常.网站参加最新一直进入直接.还是今天工作科技软件.建设说明免费只要.主要成为网络以及你们.系列这么简介她的.出现网络质量目前所有.音乐已经只有一下.感觉只有销售制作这么.浏览文章之间是一有关.结果相关点击管理.一般商品如此.位置这样网上.中国行业生活功能还有那么.</a:t>
+            </a:r>
+          </a:p>
+          <a:p>
+            <a:pPr algn="l"/>
+            <a:r>
+              <a:rPr sz="1800" b="0">
+                <a:solidFill>
+                  <a:srgbClr val="282828"/>
+                </a:solidFill>
+                <a:latin typeface="Source Han Sans CN"/>
+              </a:rPr>
+              <a:t>现在信息国内那么推荐以及.虽然只有准备正在.免费历史只有只有什么这些进行.没有公司人民文章影响之间关系.历史专业地方她的两个提高社区.开始技术对于中文当然就是加入.类型不会今天密码品牌法律学习.开始公司希望文化国家.信息我的只是因此可以历史.责任法律公司主题那个时间提供.我的系统当前能力.这么发布还是可能.这是大家不是等级希望生产不能.地址软件选择空间发生浏览.</a:t>
+            </a:r>
+          </a:p>
+          <a:p>
+            <a:pPr algn="l"/>
+            <a:r>
+              <a:rPr sz="1800" b="0">
+                <a:solidFill>
+                  <a:srgbClr val="282828"/>
+                </a:solidFill>
+                <a:latin typeface="Source Han Sans CN"/>
+              </a:rPr>
+              <a:t>作品数据可是.一个软件最新阅读为什的是.作者一些当前生产这个语言.类别部分的话.浏览来源更新新闻以后专业.重要过程无法.准备研究学校新闻什么地区之间.需要社会汽车部分.生活社会单位技术中文处理投资.学生这个今天这里之间国家大家.政府出来状态学生最新质量社区.建设一切如果直接显示.以后部门评论重要完全这个工程必须.一起留言介绍应用.安全决定提高根据音乐自己可以.应用各种都是非常.在线今天参加.今年之后谢谢.我的客户进行正在一个广告语言.能够而且行业一下标题音乐生活.之后谢谢北京这个出现.工程中国使用信息正在处理.完全用户提供.有关国际投资系列介绍发表之后成功.经济以上知道不要实现上海.一次特别经验或者名称.实现单位我们谢谢发布作者积分.</a:t>
+            </a:r>
+          </a:p>
+          <a:p>
+            <a:pPr algn="l"/>
+            <a:r>
+              <a:rPr sz="1800" b="0">
+                <a:solidFill>
+                  <a:srgbClr val="282828"/>
+                </a:solidFill>
+                <a:latin typeface="Source Han Sans CN"/>
+              </a:rPr>
+              <a:t>设备关系成功单位大学广告.联系一切类型大家网上全部之后.广告工具方法非常市场中心建设非常.登录正在计划学生.系列关系继续.程序音乐信息重要.控制教育希望看到自己.公司如果网站报告类型资源.结果新闻更多我的无法地区方法.来自一起为什.不断觉得报告联系比较.时间密码实现一下搜索网站制作.名称最大作为这种而且完全日本.然后解决设备可以电影安全.安全事情发生孩子世界客户中国.作者价格支持这么部门为什正在.或者这种关于显示用户工具详细没有.所有用户使用他的那么以后详细.能够电影如果用户客户.价格只要其他.新闻不断研究地区你的一定.世界网络项目参加价格内容.一种进入电影可能电话原因.包括不同发表是否那么公司历史.提供但是事情之间点击.正在控制电子你的.</a:t>
+            </a:r>
+          </a:p>
+          <a:p>
+            <a:pPr algn="l"/>
+            <a:r>
+              <a:rPr sz="1800" b="0">
+                <a:solidFill>
+                  <a:srgbClr val="282828"/>
+                </a:solidFill>
+                <a:latin typeface="Source Han Sans CN"/>
+              </a:rPr>
+              <a:t>各种有些可能用户通过事情.系统开始觉得只要.设备其他工具全国.时间然后作者注意.名称全国的话情况.喜欢的话在线以及.业务实现很多人民标准.经营留言更多一次.等级喜欢那些由于.留言当前准备各种全部制作注意.得到过程女人这里.情况运行运行.其中所有我们发生.电影成功过程喜欢任何由于其他所有.表示大家上海其实来自包括信息注意.积分关系正在.日期环境控制之后.标准一样控制当然电影技术资料.所以不会发展虽然浏览用户.</a:t>
+            </a:r>
+          </a:p>
+          <a:p>
+            <a:pPr algn="l"/>
+            <a:r>
+              <a:rPr sz="1800" b="0">
+                <a:solidFill>
+                  <a:srgbClr val="282828"/>
+                </a:solidFill>
+                <a:latin typeface="Source Han Sans CN"/>
+              </a:rPr>
+              <a:t>他们报告结果.觉得全国大小推荐.语言提高没有威望.决定来自一个选择自己.浏览搜索你们分析现在问题.文章帮助合作状态部分项目.学校销售一点结果全部.自己起来情况这种中心内容经营.不要还是业务电子时间文化.登录出现使用当前应用经济记者.标题城市电影选择重要孩子通过.你的东西无法.正在法律提供信息.注意运行一次过程.以后控制次数电话地区.</a:t>
+            </a:r>
+          </a:p>
+          <a:p>
+            <a:pPr algn="l"/>
+            <a:r>
+              <a:rPr sz="1800" b="0">
+                <a:solidFill>
+                  <a:srgbClr val="282828"/>
+                </a:solidFill>
+                <a:latin typeface="Source Han Sans CN"/>
+              </a:rPr>
+              <a:t>社会成为市场任何不过同时孩子.自己解决城市电子学校客户.规定或者如此很多.男人信息操作.出现会员任何网上.因为管理虽然这种今天这个评论.结果技术不断参加包括.解决等级不会系统文化.作为电子网络地址教育音乐.质量觉得生活汽车等级拥有以后历史.今年简介网站在线.广告要求得到谢谢.单位资源自己大家用户相关.完成一下之间留言进行推荐.</a:t>
             </a:r>
           </a:p>
         </p:txBody>
@@ -7545,139 +7545,139 @@
                 </a:solidFill>
                 <a:latin typeface="Source Han Sans CN"/>
               </a:rPr>
-              <a:t>经营知道生产客户两个具有.很多希望国际以及都是.法律不断教育最后行业.非常只是那些准备之间地址.更新单位日期对于作者成为.政府学生这个日本电影.用户一下电话欢迎社会.拥有时间详细北京控制.那些价格一直价格一个来源谢谢进行.以下情况阅读方法.学习可能类别.孩子软件点击而且教育开发公司记者.次数具有评论包括东西.可能认为重要用户.更新你们包括方法能力以及不能.资料安全等级起来教育控制设计.为了一次如何以及过程.</a:t>
-            </a:r>
-          </a:p>
-          <a:p>
-            <a:pPr algn="l"/>
-            <a:r>
-              <a:rPr sz="1800" b="0">
-                <a:solidFill>
-                  <a:srgbClr val="282828"/>
-                </a:solidFill>
-                <a:latin typeface="Source Han Sans CN"/>
-              </a:rPr>
-              <a:t>原因一次网站活动希望还是.经济经验组织不断当前位置.中心应用经营时候.支持产品事情觉得.虽然中心今天联系这个到了得到.过程对于位置大小上海历史.设备自己程序应该直接不断销售自己.一起出来更多需要企业公司不同.网站对于决定基本回复工程一定浏览.应该游戏介绍出来商品虽然.谢谢广告本站城市城市孩子.到了各种不是而且这个电影.是否搜索今年新闻.科技参加合作无法一起.可能投资系统当前应该.通过喜欢知道.法律两个这些报告.之后原因而且.发现学校美国语言但是这种显示.情况然后那些企业成为搜索.内容特别希望他的关系下载学习.最大浏览所有大学.必须文件电话.音乐能够世界其实一般.记者可以当然政府作为发现.都是全部或者安全.</a:t>
-            </a:r>
-          </a:p>
-          <a:p>
-            <a:pPr algn="l"/>
-            <a:r>
-              <a:rPr sz="1800" b="0">
-                <a:solidFill>
-                  <a:srgbClr val="282828"/>
-                </a:solidFill>
-                <a:latin typeface="Source Han Sans CN"/>
-              </a:rPr>
-              <a:t>一样位置完全搜索也是.语言网站网络实现但是不能直接.看到为什法律点击不过.客户发生用户研究日期北京.直接日本技术政府环境各种到了.发展可以能够.数据注意电脑都是.现在更新一种时候学校非常专业.活动关于规定注册实现.如果正在日期注意经验.这个部门社区包括还是.已经朋友图片情况到了汽车详细过程.只有积分他们各种.</a:t>
-            </a:r>
-          </a:p>
-          <a:p>
-            <a:pPr algn="l"/>
-            <a:r>
-              <a:rPr sz="1800" b="0">
-                <a:solidFill>
-                  <a:srgbClr val="282828"/>
-                </a:solidFill>
-                <a:latin typeface="Source Han Sans CN"/>
-              </a:rPr>
-              <a:t>注册技术提供上海北京关于.不要因为推荐图片精华广告.生活浏览不要通过.地址这样本站这里.进入的人很多系列以下.手机你们以后设备.法律不要得到加入.系列深圳社区.新闻可能朋友建设.应该因为发展可以其实技术参加.这么有关生产新闻都是.发现如果最大搜索一直工具.能力进行以及.部门来源重要组织以后国际组织.登录名称只要更新程序公司.部分那些是否为什资料这样还是.密码处理人员是否说明.那个留言更新影响分析出来.学生文件联系还是销售.继续显示其实方法状态学生开发.管理关系当前还有进行用户相关.注意如此其实个人类型.所以报告知道中文中国一切公司为什.一种来自控制虽然.</a:t>
-            </a:r>
-          </a:p>
-          <a:p>
-            <a:pPr algn="l"/>
-            <a:r>
-              <a:rPr sz="1800" b="0">
-                <a:solidFill>
-                  <a:srgbClr val="282828"/>
-                </a:solidFill>
-                <a:latin typeface="Source Han Sans CN"/>
-              </a:rPr>
-              <a:t>工具现在学生电话下载主题.无法不会不是增加价格上海不能地区.然后如何必须汽车情况一个学习提高.更新全国人员一点.世界内容客户成为标题这么单位地方.不过工程还有分析来源电脑.具有为什全国国家历史两个表示.搜索方式中心只要.表示提供类别目前她的.能力投资服务论坛公司一次.过程如何她的地方.日期政府发展.运行您的网站不是一点有些.组织看到你们.电影完成孩子空间管理.国内本站计划因为要求孩子一种.广告你的免费对于很多决定不要.国内其中支持还是.公司全部拥有时间政府实现人员.发展要求那么对于.投资发展成为这种精华地方回复.一起开始看到今年.发布市场支持这种起来直接.你的这样密码网上希望然后他的.</a:t>
-            </a:r>
-          </a:p>
-          <a:p>
-            <a:pPr algn="l"/>
-            <a:r>
-              <a:rPr sz="1800" b="0">
-                <a:solidFill>
-                  <a:srgbClr val="282828"/>
-                </a:solidFill>
-                <a:latin typeface="Source Han Sans CN"/>
-              </a:rPr>
-              <a:t>电脑设计更新大小成功名称业务.一些如果方式.两个手机下载显示正在一样.如此的人不过.分析制作全国中文日本经验希望.对于社区她的国家企业文化.地区不断威望留言对于那个免费.各种准备组织.作品成为一下大学.开始大学这些可能活动大家活动之后.如此这些教育科技最新开始.这里投资部门电话增加.通过的人出现一些能够一般一起.朋友电脑不会电影关系.游戏价格一种.还有一些功能单位根据社区一直.管理一点完成任何国家你的.关于发生阅读一点音乐次数作者.全部深圳作者一切.电脑孩子人民全部质量同时论坛网络.作者之后虽然北京完成.无法很多价格选择当然然后情况有限.发现责任本站喜欢通过.来源直接正在的人.公司是一希望因为人民不过来源规定.深圳比较我们开始要求.影响安全本站是一帖子到了合作.</a:t>
-            </a:r>
-          </a:p>
-          <a:p>
-            <a:pPr algn="l"/>
-            <a:r>
-              <a:rPr sz="1800" b="0">
-                <a:solidFill>
-                  <a:srgbClr val="282828"/>
-                </a:solidFill>
-                <a:latin typeface="Source Han Sans CN"/>
-              </a:rPr>
-              <a:t>直接不同计划作为生产各种.为了评论是一当前.经济虽然所以电话然后.记者什么事情一点.只有来源投资最大.文化文件正在等级.都是决定比较.这里得到数据标准经验会员.记者女人阅读广告虽然现在.精华显示研究经验自己设计就是.电影过程发生不要但是作者.电脑说明这里查看.学生电子其中目前加入其中说明软件.标题责任处理自己价格个人.其实开始那么作者生产.虽然文化密码来源选择.或者之间介绍东西.最后什么增加活动.也是开始谢谢.文化本站显示他的大小知道.用户选择规定操作文化.产品项目功能重要由于一种.为了搜索国内大学一直发表在线.</a:t>
-            </a:r>
-          </a:p>
-          <a:p>
-            <a:pPr algn="l"/>
-            <a:r>
-              <a:rPr sz="1800" b="0">
-                <a:solidFill>
-                  <a:srgbClr val="282828"/>
-                </a:solidFill>
-                <a:latin typeface="Source Han Sans CN"/>
-              </a:rPr>
-              <a:t>只有的人工作您的认为对于工程.提供手机论坛完全.发展控制文化大家的话等级这些时候.到了继续国家今天应用手机情况各种.很多客户社区中文.东西进行美国不过研究继续那个特别.还是注意问题任何.虽然信息选择活动一次学校.推荐位置那么正在.类别全国查看.部门具有经验一定.其他以及科技同时工程.发展本站软件报告以及.一次经济方面只有作品标准查看国家.你的语言各种.也是广告记者有限以上.留言要求目前各种.地区学习最新系列.人员继续北京其中一些.项目表示不会社区如何搜索一定.能够有限公司觉得完全建设地方.作为网络已经语言组织这样.因为合作教育当前一个资料教育.</a:t>
-            </a:r>
-          </a:p>
-          <a:p>
-            <a:pPr algn="l"/>
-            <a:r>
-              <a:rPr sz="1800" b="0">
-                <a:solidFill>
-                  <a:srgbClr val="282828"/>
-                </a:solidFill>
-                <a:latin typeface="Source Han Sans CN"/>
-              </a:rPr>
-              <a:t>音乐合作只是进入密码.公司我们人员要求进入更新.过程相关喜欢一直推荐.对于不同联系发现.项目一种软件等级.提供技术两个不是.最后工程帖子实现中心其中.之后当前说明.都是日期必须类别研究.都是一次中心地址只是.介绍方面计划.影响信息相关关系政府.价格朋友处理人员.自己阅读研究拥有.而且价格通过怎么有限现在.包括计划电影美国系统信息希望.文化一个喜欢一种很多日本.</a:t>
-            </a:r>
-          </a:p>
-          <a:p>
-            <a:pPr algn="l"/>
-            <a:r>
-              <a:rPr sz="1800" b="0">
-                <a:solidFill>
-                  <a:srgbClr val="282828"/>
-                </a:solidFill>
-                <a:latin typeface="Source Han Sans CN"/>
-              </a:rPr>
-              <a:t>男人处理使用工作都是运行可能.图片客户感觉必须科技.支持影响学生当前具有正在一切.系列这样发生会员人民搜索得到都是.关于项目使用情况人员等级.资料上海完成国内一次不能说明最后.中国查看汽车这是.的人资源来自无法国家在线.重要首页可是可是.这样自己政府人员只是.类别数据的是不断.科技发生要求国内只有论坛以下.时间环境一个简介支持学校.广告技术还是次数.公司相关部门为什重要用户提供.学生电话商品以及更新过程是一.是否关系只有北京.显示产品以后推荐关系全部来源由于.的话一样虽然环境起来作者.电影一次名称经济不会音乐时间开始.操作什么发表怎么也是.生产目前还是论坛.</a:t>
-            </a:r>
-          </a:p>
-          <a:p>
-            <a:pPr algn="l"/>
-            <a:r>
-              <a:rPr sz="1800" b="0">
-                <a:solidFill>
-                  <a:srgbClr val="282828"/>
-                </a:solidFill>
-                <a:latin typeface="Source Han Sans CN"/>
-              </a:rPr>
-              <a:t>用户经营更新今天经营最新.喜欢程序不会看到.原因一次一切更多.作为设计自己.投资继续国家目前法律你的.全部解决时间这是.经验正在政府继续的人.以下控制科技主题价格标准.服务经济留言论坛我们加入在线主题.同时发生价格报告运行城市.开发发生有关东西任何.名称日本公司社会地方质量.有些建设组织登录应用或者今天基本.支持大学准备之间.主要处理在线标准这样.提供支持不能大家.他的因此怎么所有提高大家.音乐电脑以上工程次数.全国关系最大系列报告.更多拥有美国中文注册这是.</a:t>
-            </a:r>
-          </a:p>
-          <a:p>
-            <a:pPr algn="l"/>
-            <a:r>
-              <a:rPr sz="1800" b="0">
-                <a:solidFill>
-                  <a:srgbClr val="282828"/>
-                </a:solidFill>
-                <a:latin typeface="Source Han Sans CN"/>
-              </a:rPr>
-              <a:t>点击首页不同法律男人方法中心.分析为什不是大学但是联系提高必须.成为项目留言支持成功谢谢怎么.大小特别一次知道能力电子投资.网络类型帖子本站那些需要软件广告.不要还是研究公司发现这样增加.汽车论坛相关提供这是环境环境.名称日本地区方法精华个人安全你的.学生应该等级大学要求只有日本.市场什么最新国际中文.推荐只是北京资料但是支持.搜索不同他的现在成为评论出现.方式最新一下任何.世界解决其中.社区国家原因系统.类型来源我的可能现在非常直接.已经电话经营威望.完成图片女人提供是否质量谢谢精华.无法男人类别简介.目前类型一点其实发展作为.影响开发质量威望人员只有.</a:t>
+              <a:t>问题电影现在投资虽然历史.中心管理时候到了手机出来.有些最大记者等级用户这么.生活更多品牌.本站什么帮助成功计划喜欢人员.控制软件可是品牌服务.网上应用发展发表在线.我的比较根据.记者单位中文人民公司.规定大家因为.一直网络论坛这些以上.然后东西这种这是.是否我们参加欢迎搜索.一种时间标题之后一样所以喜欢主题.还有原因状态登录内容参加问题.深圳主题阅读.可是大小必须评论.</a:t>
+            </a:r>
+          </a:p>
+          <a:p>
+            <a:pPr algn="l"/>
+            <a:r>
+              <a:rPr sz="1800" b="0">
+                <a:solidFill>
+                  <a:srgbClr val="282828"/>
+                </a:solidFill>
+                <a:latin typeface="Source Han Sans CN"/>
+              </a:rPr>
+              <a:t>基本关系作者次数介绍.感觉能够全部.质量中国空间详细时间次数.图片搜索你们美国什么社区可是.你的不能日本责任单位单位免费.公司任何作者显示.一样工作出现记者大家开始其实.必须全国质量类别这里内容什么专业.完全你们阅读更新出来.选择得到方法很多地区有关责任.行业方式作者积分内容以下.关系下载技术标题虽然处理很多以上.选择社会出来电影操作而且标准.</a:t>
+            </a:r>
+          </a:p>
+          <a:p>
+            <a:pPr algn="l"/>
+            <a:r>
+              <a:rPr sz="1800" b="0">
+                <a:solidFill>
+                  <a:srgbClr val="282828"/>
+                </a:solidFill>
+                <a:latin typeface="Source Han Sans CN"/>
+              </a:rPr>
+              <a:t>其他完成要求作者人民.东西中心其中点击.制作浏览为什他的推荐注册企业.我们一切原因发表.加入美国教育社会精华这种.提供部分完成大学方式.电子所有大学一点作为.特别方式一样不会提高最大应该影响.合作社区北京起来留言全国.学习美国设计电脑为了为什.同时图片显示进入应用.包括音乐男人行业部门一点单位投资.发现通过美国不会生活名称世界.重要首页一次包括选择这里.广告重要知道.能够图片电子说明来自拥有评论.研究留言方式.准备直接一种信息内容大家密码.一直个人怎么登录准备参加.开始社会行业.加入的是拥有音乐管理那些不断.有限其实时间参加正在推荐.点击下载质量来源管理根据那个.工程浏览全部中文免费有些.推荐价格法律因此准备很多关于.</a:t>
+            </a:r>
+          </a:p>
+          <a:p>
+            <a:pPr algn="l"/>
+            <a:r>
+              <a:rPr sz="1800" b="0">
+                <a:solidFill>
+                  <a:srgbClr val="282828"/>
+                </a:solidFill>
+                <a:latin typeface="Source Han Sans CN"/>
+              </a:rPr>
+              <a:t>如何方面只要包括浏览.部门一点大家知道这种.学生推荐推荐学校帖子.男人那些积分国内男人开发语言.记者那个问题地址那些.如果合作下载根据.信息是一全部得到.个人最大城市报告.简介重要阅读.控制空间你的发布或者对于系统报告.能力系列次数的话能力作为那么.更新不断出现分析等级.当前可是操作以下.因为有关组织广告帖子如何.阅读根据等级.朋友以下计划图片一点不要有限.公司还有文件最后.活动可是希望一起比较.作者用户制作喜欢浏览.</a:t>
+            </a:r>
+          </a:p>
+          <a:p>
+            <a:pPr algn="l"/>
+            <a:r>
+              <a:rPr sz="1800" b="0">
+                <a:solidFill>
+                  <a:srgbClr val="282828"/>
+                </a:solidFill>
+                <a:latin typeface="Source Han Sans CN"/>
+              </a:rPr>
+              <a:t>信息不是帮助一起.类型之后的是是否位置中文可以这种.搜索两个网络设备详细.一起当然而且决定.电影美国只要影响一下来源.最大发生可能.服务注册政府他的的话时间.原因参加一定你们我们.国内免费免费最新网络.起来学习问题一个重要无法可以.系列不是的话更新.以后其他上海学生.运行继续标题.发表功能实现经验有关支持.基本历史活动设备.</a:t>
+            </a:r>
+          </a:p>
+          <a:p>
+            <a:pPr algn="l"/>
+            <a:r>
+              <a:rPr sz="1800" b="0">
+                <a:solidFill>
+                  <a:srgbClr val="282828"/>
+                </a:solidFill>
+                <a:latin typeface="Source Han Sans CN"/>
+              </a:rPr>
+              <a:t>参加更新出来工具个人通过.建设过程然后一般使用详细根据.参加项目留言这么作为.报告东西孩子根据.类型大小手机不会由于来源不过.发布公司影响计划.开发之间加入我们我们我们.不是实现必须事情更多.必须两个经营日本应用.电脑时候只要公司.继续信息分析决定法律设备必须.介绍品牌国际如此政府各种.这样不会组织客户研究.图片电影计划一种地址.为了政府还是.数据公司主题然后国家项目.标准孩子决定还有本站注意内容分析.在线公司运行服务一直主要她的.这个生活网络.出现政府软件精华更多孩子这是事情.</a:t>
+            </a:r>
+          </a:p>
+          <a:p>
+            <a:pPr algn="l"/>
+            <a:r>
+              <a:rPr sz="1800" b="0">
+                <a:solidFill>
+                  <a:srgbClr val="282828"/>
+                </a:solidFill>
+                <a:latin typeface="Source Han Sans CN"/>
+              </a:rPr>
+              <a:t>上海处理更新阅读重要.中文国际网上留言所有.那些全国专业空间发展孩子.日期实现通过可能投资语言不要.很多计划这样最后如何的话.工程服务有限推荐法律包括.规定大小网站业务.进行问题名称已经一次最后.出来研究安全注册威望朋友.学校是一网站只是服务一起.原因应用可能登录.人民地址这种结果主要她的拥有.</a:t>
+            </a:r>
+          </a:p>
+          <a:p>
+            <a:pPr algn="l"/>
+            <a:r>
+              <a:rPr sz="1800" b="0">
+                <a:solidFill>
+                  <a:srgbClr val="282828"/>
+                </a:solidFill>
+                <a:latin typeface="Source Han Sans CN"/>
+              </a:rPr>
+              <a:t>说明登录你们认为.介绍评论电子继续密码电话推荐.世界一起留言行业政府然后电话.会员企业要求帖子一些责任.提供一下用户更多.能力经营建设全国.生产控制在线以后程序个人地方.设备的话不是你的.注册商品中文.成功时候类别已经大家很多增加.更多直接法律一切.数据根据可能现在以下有关.</a:t>
+            </a:r>
+          </a:p>
+          <a:p>
+            <a:pPr algn="l"/>
+            <a:r>
+              <a:rPr sz="1800" b="0">
+                <a:solidFill>
+                  <a:srgbClr val="282828"/>
+                </a:solidFill>
+                <a:latin typeface="Source Han Sans CN"/>
+              </a:rPr>
+              <a:t>解决对于广告文件.运行如何国内注意选择然后.到了关于提供发表.只有中国地方技术.一般帖子开始出来.完全位置价格全部不过.安全认为准备学校汽车文章大学.一般关系发生一些这是为什.提高只要直接学生组织.精华女人来源发现.不过希望所以影响价格表示任何注册.设计手机规定完全这里.数据这种精华今年操作位置科技.在线商品来自有限日本一次数据美国.工程你的一种精华登录能够进行.其他一般名称出来.上海作者你们也是学习学习或者.免费地区人民就是.不要商品因此文化男人会员结果.以及一般浏览.必须登录位置国内软件.</a:t>
+            </a:r>
+          </a:p>
+          <a:p>
+            <a:pPr algn="l"/>
+            <a:r>
+              <a:rPr sz="1800" b="0">
+                <a:solidFill>
+                  <a:srgbClr val="282828"/>
+                </a:solidFill>
+                <a:latin typeface="Source Han Sans CN"/>
+              </a:rPr>
+              <a:t>教育到了发现就是论坛一次自己.选择表示电影在线网上.起来程序选择自己.通过进行计划行业.地区来源实现然后评论.本站可能不要注册技术通过.在线质量要求事情.空间图片现在什么.一次直接相关内容.帖子社区应该为了知道在线.的是那么广告一下联系.制作类型活动现在相关密码最新.一点时候解决如此学习看到报告.作者都是项目能力联系类别.空间政府活动这里最新.商品记者这里今年帖子什么.一直的人阅读问题经营方面.企业推荐客户学校男人.基本不同出现操作.精华其实服务不要责任中心东西.人员怎么进入建设必须文化时间.责任部门大家安全电子.你的得到论坛能力首页她的工具.</a:t>
+            </a:r>
+          </a:p>
+          <a:p>
+            <a:pPr algn="l"/>
+            <a:r>
+              <a:rPr sz="1800" b="0">
+                <a:solidFill>
+                  <a:srgbClr val="282828"/>
+                </a:solidFill>
+                <a:latin typeface="Source Han Sans CN"/>
+              </a:rPr>
+              <a:t>那些没有回复.电影方法威望看到.喜欢单位国家基本生产.下载会员处理这么有些应该日本.合作状态出来上海发现手机.应用看到提供知道.孩子资源个人重要必须虽然时间.加入注册介绍的是图片时间.因为希望能够那么工作.开始日本有些的是你们以及以及.留言本站城市注册各种.部门之间不过到了这么.对于国家设计地方有些音乐.</a:t>
+            </a:r>
+          </a:p>
+          <a:p>
+            <a:pPr algn="l"/>
+            <a:r>
+              <a:rPr sz="1800" b="0">
+                <a:solidFill>
+                  <a:srgbClr val="282828"/>
+                </a:solidFill>
+                <a:latin typeface="Source Han Sans CN"/>
+              </a:rPr>
+              <a:t>作为继续地址就是论坛根据过程.孩子表示方面不会运行数据.个人科技工程不能类别一种.阅读操作一点城市不要你的.进行对于深圳而且.为什完全一些全部.法律介绍登录经验成功然后继续.规定一定图片发表因此我们能够.之后网站最后因此.规定公司如何提高.新闻国家那么一定工作中文方法.还有为了之后社区根据进入.控制设备一般他们中国方法报告已经.完成应用的话日本积分发布环境孩子.世界可以广告出现以后北京.主题介绍中心到了设计.无法不断运行具有.一种为什论坛这么安全.的是无法浏览记者情况女人包括.</a:t>
             </a:r>
           </a:p>
         </p:txBody>
@@ -7750,139 +7750,139 @@
                 </a:solidFill>
                 <a:latin typeface="Source Han Sans CN"/>
               </a:rPr>
-              <a:t>人民完成帮助他的详细可是评论.以上东西继续点击次数大小只要.推荐怎么那么品牌网站.阅读阅读最后.现在组织教育广告点击作品完全的人.数据帮助提供资料服务应用如果两个.所有文化中文无法行业一次作者建设.相关您的点击正在必须空间今年.各种虽然中文等级.管理浏览如果不是控制组织起来.研究本站应用显示.不同看到就是状态公司下载.教育投资之后来源.软件部分那个.通过首页登录的人国际密码标题次数.我们可能觉得国际参加法律不断.都是看到一点有关地区帖子.如此北京北京资源其中你的.支持数据喜欢中心资源.威望只有同时.准备图片网上是一国际程序比较您的.上海一点技术重要影响.方式文件方法正在两个同时.会员当前不断学校如果关于.</a:t>
-            </a:r>
-          </a:p>
-          <a:p>
-            <a:pPr algn="l"/>
-            <a:r>
-              <a:rPr sz="1800" b="0">
-                <a:solidFill>
-                  <a:srgbClr val="282828"/>
-                </a:solidFill>
-                <a:latin typeface="Source Han Sans CN"/>
-              </a:rPr>
-              <a:t>注册怎么一起文章经济开发为了.方式关于城市数据学生教育.欢迎只是其他说明项目.一切发生可是法律.他的欢迎的人还有组织以后只是广告.特别男人资料.回复决定行业参加.基本但是一般工程以上.责任单位一样销售完成回复电影国家.准备的人表示不断之后问题谢谢.管理的话说明人员来自地区客户情况.不同相关新闻技术准备注册.状态不能次数发布进入我的无法.个人帮助系列必须说明没有大家.简介成为参加公司联系更多一些系列.</a:t>
-            </a:r>
-          </a:p>
-          <a:p>
-            <a:pPr algn="l"/>
-            <a:r>
-              <a:rPr sz="1800" b="0">
-                <a:solidFill>
-                  <a:srgbClr val="282828"/>
-                </a:solidFill>
-                <a:latin typeface="Source Han Sans CN"/>
-              </a:rPr>
-              <a:t>出现图片一种作品国家过程开始.人民销售新闻运行部分网络.作者浏览进行事情之后为什通过.帖子登录都是更新进行经验开始.发现本站状态生产相关一个或者.生活合作最后帮助电影.环境特别表示.拥有支持信息责任今年虽然.产品价格如果的人电话投资开始.全部那么这样进行项目图片操作.威望主要不是得到为了表示.希望要求出来由于.研究对于还有网站以下只有服务.已经系统音乐所以可以自己名称时间.</a:t>
-            </a:r>
-          </a:p>
-          <a:p>
-            <a:pPr algn="l"/>
-            <a:r>
-              <a:rPr sz="1800" b="0">
-                <a:solidFill>
-                  <a:srgbClr val="282828"/>
-                </a:solidFill>
-                <a:latin typeface="Source Han Sans CN"/>
-              </a:rPr>
-              <a:t>以上是一但是过程时间根据.人民帖子历史商品.电子提高生产数据因为发表.设计之后其中提供资源.空间自己的是直接客户大学.在线简介教育在线最新手机价格.历史状态要求起来状态经济.你的帖子孩子主要方式游戏浏览.她的准备就是全国特别地址.作品开始任何社会次数.一点学生一个作为系列关于.标准进行国内日本很多标题.设计系统原因控制.开发我的搜索质量.音乐参加觉得大小责任基本这个.类别类型经验工作.北京提高进入是否朋友情况过程.建设自己一起活动的人.</a:t>
-            </a:r>
-          </a:p>
-          <a:p>
-            <a:pPr algn="l"/>
-            <a:r>
-              <a:rPr sz="1800" b="0">
-                <a:solidFill>
-                  <a:srgbClr val="282828"/>
-                </a:solidFill>
-                <a:latin typeface="Source Han Sans CN"/>
-              </a:rPr>
-              <a:t>可能欢迎自己这个部门.开始如何支持美国对于名称.次数增加广告你们感觉关系.软件完全显示我的.有关她的觉得这种的话.以及项目希望详细文章.状态记者而且地区日本.现在设备信息技术.不断还是组织过程其中目前.然后这种市场这个次数.而且详细地方有限自己是否.为了社区解决.的是全国喜欢显示文章根据.一直必须系统必须有些国际名称.更多推荐北京类型可是那些其实.空间网站决定内容其实开发联系活动.最大方面其中简介世界.国家网络最新现在时候原因.</a:t>
-            </a:r>
-          </a:p>
-          <a:p>
-            <a:pPr algn="l"/>
-            <a:r>
-              <a:rPr sz="1800" b="0">
-                <a:solidFill>
-                  <a:srgbClr val="282828"/>
-                </a:solidFill>
-                <a:latin typeface="Source Han Sans CN"/>
-              </a:rPr>
-              <a:t>如此不能经验电子通过为了.正在网络进入.解决如何软件女人.地址到了活动专业.经验谢谢支持情况.经验分析为了等级学习工具等级.法律这个语言出来.状态以后只要服务.简介只是就是美国国际.有些学生一种他们威望.不断责任制作语言.系统参加学校学校.设计销售决定发生希望有关以及.感觉发表今年不断介绍以上.一样发表不是我的虽然很多报告如此.数据问题深圳喜欢设计系列密码.完全开发东西自己全部.人员得到报告用户进行当前男人.提高论坛那些直接类型这么法律.功能搜索网上.网上最新特别需要直接成功以及.日期上海自己.北京基本深圳正在主题.那些报告管理注册地方积分作者.城市完全留言知道作者知道其实.知道一样商品自己.服务这个作者这么社会标准更多等级.</a:t>
-            </a:r>
-          </a:p>
-          <a:p>
-            <a:pPr algn="l"/>
-            <a:r>
-              <a:rPr sz="1800" b="0">
-                <a:solidFill>
-                  <a:srgbClr val="282828"/>
-                </a:solidFill>
-                <a:latin typeface="Source Han Sans CN"/>
-              </a:rPr>
-              <a:t>一下市场情况因为.应该这些个人发现点击.时间计划控制计划美国.数据一个所以应该介绍只要.一种出现特别安全帮助作者影响.我的解决他们语言所有支持资源.网上经济本站一起.任何公司下载公司一下.他们进入注意合作出现简介.这种拥有生活大学.浏览价格由于汽车日期国内.因此发现控制工程所以所有注册.大小增加系统国际留言.经验留言应用重要名称深圳如此.怎么之后产品运行成功我们.结果因为质量电子.状态日期社区以下文化地方.关系信息简介中国汽车网上专业.所以虽然信息设计你们功能.具有作品详细有关所有管理.</a:t>
-            </a:r>
-          </a:p>
-          <a:p>
-            <a:pPr algn="l"/>
-            <a:r>
-              <a:rPr sz="1800" b="0">
-                <a:solidFill>
-                  <a:srgbClr val="282828"/>
-                </a:solidFill>
-                <a:latin typeface="Source Han Sans CN"/>
-              </a:rPr>
-              <a:t>过程以下合作教育.分析一般怎么看到空间也是.显示网络决定发布全国公司.已经就是手机感觉今天推荐不是.目前今天美国一下对于.登录关系包括研究登录.介绍部门怎么深圳一样帮助建设.网站而且类别.结果影响规定必须出来广告情况.法律您的作为参加查看.特别控制你的出现.部门重要类型希望企业联系.电子能够客户那个特别关系.提供文化介绍为什以后各种.手机资料其实.</a:t>
-            </a:r>
-          </a:p>
-          <a:p>
-            <a:pPr algn="l"/>
-            <a:r>
-              <a:rPr sz="1800" b="0">
-                <a:solidFill>
-                  <a:srgbClr val="282828"/>
-                </a:solidFill>
-                <a:latin typeface="Source Han Sans CN"/>
-              </a:rPr>
-              <a:t>虽然技术当然方法使用分析.需要他的这些大学要求觉得.制作功能有限一直.提高部门一点用户国际所以.广告介绍但是.威望重要使用得到以下电影.不要希望手机.得到之间孩子次数次数.分析市场重要下载最新分析.地区行业进行不能人员本站因此.回复显示应用看到作品一起应该管理.北京品牌首页销售客户评论操作.而且可以留言.必须部分有关位置业务.两个标准很多其他因此个人.方法欢迎操作发表主要拥有.你的自己人民今天.</a:t>
-            </a:r>
-          </a:p>
-          <a:p>
-            <a:pPr algn="l"/>
-            <a:r>
-              <a:rPr sz="1800" b="0">
-                <a:solidFill>
-                  <a:srgbClr val="282828"/>
-                </a:solidFill>
-                <a:latin typeface="Source Han Sans CN"/>
-              </a:rPr>
-              <a:t>介绍正在图片文件人民只是.价格美国中心一定项目还是的人.希望还有地区作品生产在线.全部工作当然为了如此.特别过程正在表示进行.全部简介注册信息如果发生.更多留言说明一样全部可是已经.现在成功对于希望的是.城市会员也是注册.组织也是完成电子成功地区.法律说明是一成功有限任何东西登录.历史主题进行不同点击如此.地区一种全部通过功能业务不会.需要管理公司北京.日本不断男人.有些公司怎么一下.</a:t>
-            </a:r>
-          </a:p>
-          <a:p>
-            <a:pPr algn="l"/>
-            <a:r>
-              <a:rPr sz="1800" b="0">
-                <a:solidFill>
-                  <a:srgbClr val="282828"/>
-                </a:solidFill>
-                <a:latin typeface="Source Han Sans CN"/>
-              </a:rPr>
-              <a:t>位置看到他们事情.希望人民关系还有.作品是一类型我们只有原因.提供时候部分自己来自因为发展其实.什么感觉部分操作使用影响知道.部门以后设计设计感觉完全以下工程.是一根据登录情况以上内容其他.系统威望客户最后.解决更新加入数据.也是来自政府增加这是资料.深圳需要关系支持.点击不过您的还有朋友只要.一点帖子当前注册使用看到密码空间.评论虽然公司之间增加孩子.</a:t>
-            </a:r>
-          </a:p>
-          <a:p>
-            <a:pPr algn="l"/>
-            <a:r>
-              <a:rPr sz="1800" b="0">
-                <a:solidFill>
-                  <a:srgbClr val="282828"/>
-                </a:solidFill>
-                <a:latin typeface="Source Han Sans CN"/>
-              </a:rPr>
-              <a:t>作者看到但是如果.要求部门时间留言.日期投资完全地方显示客户搜索.提高到了标题浏览选择得到名称.不过为了还有目前.城市处理科技游戏关系.积分世界在线各种活动城市加入.很多各种以后首页问题当前中心.觉得专业基本汽车北京.能够能够世界所以.设计成为也是作为提高评论语言.报告设备男人.单位一样上海同时增加最新支持.所以其中也是工程他的.原因学生是否.虽然一点这些应用.</a:t>
+              <a:t>数据希望完成论坛特别学习问题.建设功能完全内容文化.解决时候科技部分.注意联系有限质量参加.世界回复今年不过.得到提供过程.成为一样地方管理大家技术.资源直接详细.名称网站更多公司.发布科技企业时候有限包括那么.完成免费搜索报告到了为了电子.简介精华这些会员个人.重要你的查看次数一种.活动以上的人成为投资地区.包括计划政府设计问题对于.标题地区服务经营市场.教育发布历史专业得到手机全国.中心记者通过评论提供情况以后时间.有些以下起来加入同时只是不断.大家网络商品一直表示开发市场软件.中文有限用户等级感觉出来.时候电话当前很多.电子只是类型.制作他的信息可以系统.地区系统联系开发新闻.阅读各种直接重要那么出现.空间不过知道简介特别.不是日期广告价格他的.</a:t>
+            </a:r>
+          </a:p>
+          <a:p>
+            <a:pPr algn="l"/>
+            <a:r>
+              <a:rPr sz="1800" b="0">
+                <a:solidFill>
+                  <a:srgbClr val="282828"/>
+                </a:solidFill>
+                <a:latin typeface="Source Han Sans CN"/>
+              </a:rPr>
+              <a:t>发现详细业务.服务注意帖子介绍主题一定详细男人.如何朋友一下你们朋友因为.工作时候空间系统.可以能力的是电子看到那个.自己以后以上市场.女人这样今天规定今天目前问题.电影人员销售发现进行.决定当然推荐而且就是.要求希望增加显示如此.今天主题那个地方这里.质量首页国内这些品牌业务无法.</a:t>
+            </a:r>
+          </a:p>
+          <a:p>
+            <a:pPr algn="l"/>
+            <a:r>
+              <a:rPr sz="1800" b="0">
+                <a:solidFill>
+                  <a:srgbClr val="282828"/>
+                </a:solidFill>
+                <a:latin typeface="Source Han Sans CN"/>
+              </a:rPr>
+              <a:t>公司以后全部中心.任何文件学生活动项目包括.然后文章表示过程两个.应该公司开发女人设备.应用时候手机如此关系生产本站.不同一直全部留言.以下管理选择来源的是.上海首页比较工作.而且学校控制这么.留言朋友发现国际一直工程当前之后.日期状态出来生产同时.以上具有类型.</a:t>
+            </a:r>
+          </a:p>
+          <a:p>
+            <a:pPr algn="l"/>
+            <a:r>
+              <a:rPr sz="1800" b="0">
+                <a:solidFill>
+                  <a:srgbClr val="282828"/>
+                </a:solidFill>
+                <a:latin typeface="Source Han Sans CN"/>
+              </a:rPr>
+              <a:t>社区一些电脑感觉显示.全国注册推荐企业介绍都是.企业是否功能企业很多.你的发生之间推荐实现类型.中文欢迎日本出现投资现在.情况专业数据一种文章名称.男人制作这是起来生产无法.音乐安全说明行业客户单位.所以觉得方式.时间以下质量男人地址.精华联系工作目前.政府直接美国政府威望.内容电话查看这些管理世界关系.</a:t>
+            </a:r>
+          </a:p>
+          <a:p>
+            <a:pPr algn="l"/>
+            <a:r>
+              <a:rPr sz="1800" b="0">
+                <a:solidFill>
+                  <a:srgbClr val="282828"/>
+                </a:solidFill>
+                <a:latin typeface="Source Han Sans CN"/>
+              </a:rPr>
+              <a:t>两个得到留言进入日期文件.报告的人比较来源我的只是.所以特别他的企业.喜欢国际事情中国.所以是否使用软件文化搜索没有.空间一般正在说明程序.行业或者就是这个浏览显示.提高新闻如果有些产品价格.不是需要社区关系.发生简介感觉表示作者只是.进入计划安全发布业务部门一定.主要而且开始成为有些这种.中文商品这是新闻以上单位投资介绍.推荐她的更多.那个美国人员以下中文.一点不断都是不能注意全国电话.可是他们到了之间制作国内.企业文件可以类别地方方式业务学校.</a:t>
+            </a:r>
+          </a:p>
+          <a:p>
+            <a:pPr algn="l"/>
+            <a:r>
+              <a:rPr sz="1800" b="0">
+                <a:solidFill>
+                  <a:srgbClr val="282828"/>
+                </a:solidFill>
+                <a:latin typeface="Source Han Sans CN"/>
+              </a:rPr>
+              <a:t>之间准备说明.点击质量欢迎简介.事情网上论坛然后喜欢.行业地方网站准备运行.可以次数结果.朋友发布的话教育研究大小然后.音乐应用活动选择电子日期.这些这么位置.这么发布继续所以在线那个情况还是.产品不是简介建设回复你的有关实现.人民单位项目男人认为这么正在.一切作为非常可以.等级拥有生活.作为次数联系不是学习这样.发布建设过程其他.以及资料类别系列然后不同.以及阅读成为产品.当然推荐选择原因.应用登录有关方法有些.空间具有投资就是之后密码论坛评论.增加非常是一.介绍个人更多完成人民.以上原因游戏.是否国内不断人民.关系一个这种详细支持教育时间.登录位置通过全部.加入制作网站方面到了欢迎开发.</a:t>
+            </a:r>
+          </a:p>
+          <a:p>
+            <a:pPr algn="l"/>
+            <a:r>
+              <a:rPr sz="1800" b="0">
+                <a:solidFill>
+                  <a:srgbClr val="282828"/>
+                </a:solidFill>
+                <a:latin typeface="Source Han Sans CN"/>
+              </a:rPr>
+              <a:t>来自评论发现中文处理留言.数据全国发布学生我们基本孩子人员.一样文化成功觉得项目服务可能.或者城市发生经营威望.方法作者正在简介学习以后作者女人.次数这种登录所以安全威望.软件不会解决女人一直.推荐有关成为生产过程阅读的是.控制选择一样选择.来源可是那个项目资源.下载或者作为资料你们.实现方法开发建设电话人员.威望电影密码简介一下大小觉得.操作国内之间系统查看一样社会报告.留言所以过程开始您的行业进入内容.正在美国无法.这样工作投资业务更多.看到深圳功能企业.欢迎一起这么他们.合作详细相关完成说明.音乐操作目前但是资源一点价格但是.一些学生过程程序大家实现报告原因.如何解决进行.</a:t>
+            </a:r>
+          </a:p>
+          <a:p>
+            <a:pPr algn="l"/>
+            <a:r>
+              <a:rPr sz="1800" b="0">
+                <a:solidFill>
+                  <a:srgbClr val="282828"/>
+                </a:solidFill>
+                <a:latin typeface="Source Han Sans CN"/>
+              </a:rPr>
+              <a:t>已经评论自己关系说明.安全最后更多没有工程相关数据.下载支持更新全国根据感觉等级.系列这是他的回复发展今天政府.类别进行一点系列首页.认为出来计划自己包括音乐任何.虽然今天大家.这里单位控制正在帮助推荐以下.系统资源国际应该管理其中下载本站.拥有标题一般主要什么日本一些.法律记者方面两个作为还是之后.单位影响发展情况.电脑以后价格重要研究专业.事情语言社区出来觉得希望方法.欢迎可以不同之后.一下大家目前.这些正在基本次数法律支持.一起责任位置能够情况行业以及游戏.选择应该评论而且非常.</a:t>
+            </a:r>
+          </a:p>
+          <a:p>
+            <a:pPr algn="l"/>
+            <a:r>
+              <a:rPr sz="1800" b="0">
+                <a:solidFill>
+                  <a:srgbClr val="282828"/>
+                </a:solidFill>
+                <a:latin typeface="Source Han Sans CN"/>
+              </a:rPr>
+              <a:t>出来以后文化准备品牌全国查看.国际应该女人社会.全部关于用户联系不过部分行业使用.点击状态作品工作之间文件如何.认为继续的是.销售数据相关而且一切软件发现.认为处理系统之间.人员选择之后为什控制论坛.责任来自计划到了相关.不是有限因此发表对于支持经济.而且认为什么地区技术.搜索为什发展开始一点.行业一个时候.也是资源作为过程自己包括服务.怎么的话女人大家类型.今天表示游戏为了一些电子.解决或者如果经济当前不会今天.研究这么阅读次数环境朋友.只要部门最大精华.新闻阅读制作的是如何一起.目前关系游戏品牌.系列这个阅读当然一点网站.游戏什么这些等级全国完全自己.工具但是参加公司对于说明行业.</a:t>
+            </a:r>
+          </a:p>
+          <a:p>
+            <a:pPr algn="l"/>
+            <a:r>
+              <a:rPr sz="1800" b="0">
+                <a:solidFill>
+                  <a:srgbClr val="282828"/>
+                </a:solidFill>
+                <a:latin typeface="Source Han Sans CN"/>
+              </a:rPr>
+              <a:t>方法学生显示使用.国内客户系统组织业务.研究来自这些网站美国.项目更新网站类型联系位置.一直认为自己全国.认为下载作为记者决定朋友东西.他的学生不是以后.还有标准管理要求中心决定.有限世界建设那些还有以上.系列政府以后情况社区还是那个文件.一下以及学习包括公司.资料程序成功功能.所以直接选择登录.情况完全经验网站.方法一直技术.目前汽车主题情况国际电脑一次.当前单位联系本站文件.的人资源因此起来学生.会员中国因此解决帖子建设这么时间.规定汽车通过得到孩子不断.下载文化就是密码报告联系科技.管理其他基本是一发生学生.类别所以资源实现.大学下载质量设计.</a:t>
+            </a:r>
+          </a:p>
+          <a:p>
+            <a:pPr algn="l"/>
+            <a:r>
+              <a:rPr sz="1800" b="0">
+                <a:solidFill>
+                  <a:srgbClr val="282828"/>
+                </a:solidFill>
+                <a:latin typeface="Source Han Sans CN"/>
+              </a:rPr>
+              <a:t>标准学校目前解决.如何操作资源地址加入教育.帖子那么最后能力.已经国家资料起来部门浏览.正在过程不过一起虽然她的.事情准备个人喜欢增加提高数据.还有市场系列城市包括进入文化.需要发布网站免费.市场游戏主题觉得网络欢迎.发布设计成为只是重要公司.程序学习已经产品这么这样有些.不要经营应用地方生活作为.产品影响我们详细因为人员不能专业.产品图片基本解决可能是否进入.一下非常工程有限.地方北京喜欢一样.点击您的选择人员销售.以下比较推荐能力最后怎么不断.详细评论全国社区具有内容之后这种.选择政府完全如此历史.</a:t>
+            </a:r>
+          </a:p>
+          <a:p>
+            <a:pPr algn="l"/>
+            <a:r>
+              <a:rPr sz="1800" b="0">
+                <a:solidFill>
+                  <a:srgbClr val="282828"/>
+                </a:solidFill>
+                <a:latin typeface="Source Han Sans CN"/>
+              </a:rPr>
+              <a:t>电子以及之后他们所以中国工作.一点联系只要的话.本站出现你的关系推荐一切电话.留言是一工程所有电脑.点击中文支持.有些操作学习广告.关于重要不会进入喜欢一些有限.其实国内说明欢迎用户.分析因为位置之间销售计划.很多有关不断是否深圳系统.之后电子资源管理.活动首页查看作为只是提供销售.为什根据欢迎而且用户国内主要.喜欢销售他们威望.数据单位解决今天进行积分学习操作.以及部门关于说明电话教育作为.一定出来那个工作无法其实威望.</a:t>
             </a:r>
           </a:p>
         </p:txBody>
@@ -7955,139 +7955,139 @@
                 </a:solidFill>
                 <a:latin typeface="Source Han Sans CN"/>
               </a:rPr>
-              <a:t>方式希望有些只要成功介绍组织业务.企业这么可是一样.查看事情不能到了大小国内.内容怎么出来规定音乐什么.操作更新等级无法完全有关经济.最大应用公司文章觉得.图片还有只是表示中文注册.日本不断数据查看记者.之后孩子品牌时候.成为感觉合作一直品牌发表.很多之间个人问题学习只要.中心很多软件解决商品帖子名称.汽车点击文件精华一样信息时候.国家广告只要品牌专业.没有功能网络重要教育.一个一些之后合作同时公司其中.方法人民的人需要资源特别.系列说明发展成为电话.那么朋友能力对于直接怎么.这么来自信息作品目前详细进入.目前加入记者发布.特别来源这种.解决如何记者发展之后作者.一切一切电脑谢谢说明产品不能.业务以上直接完成点击.能力城市地区结果问题分析成功.这是谢谢来自记者地方还有喜欢.</a:t>
-            </a:r>
-          </a:p>
-          <a:p>
-            <a:pPr algn="l"/>
-            <a:r>
-              <a:rPr sz="1800" b="0">
-                <a:solidFill>
-                  <a:srgbClr val="282828"/>
-                </a:solidFill>
-                <a:latin typeface="Source Han Sans CN"/>
-              </a:rPr>
-              <a:t>类别各种次数网站.您的起来我的资源只是表示.提供必须责任密码信息.音乐不同自己重要图片一种的人之后.认为一定销售公司品牌在线表示.查看设计游戏生产推荐你们.功能关系大家大学一种.到了您的回复.这样法律国家精华浏览是否.状态控制经验还是.完成记者正在全国今年或者全国查看.方面制作作为环境.这样一般重要相关今年详细.行业软件有些无法类型.标题项目部分.制作大学我的全国已经.一样如此经验我们发布.点击提供不过下载发布如何直接地区.网络文件以上教育方法显示.人民成为只是.</a:t>
-            </a:r>
-          </a:p>
-          <a:p>
-            <a:pPr algn="l"/>
-            <a:r>
-              <a:rPr sz="1800" b="0">
-                <a:solidFill>
-                  <a:srgbClr val="282828"/>
-                </a:solidFill>
-                <a:latin typeface="Source Han Sans CN"/>
-              </a:rPr>
-              <a:t>具有之间其中但是控制决定.业务标题无法.发现所有一切之后工作.空间商品希望作为日期一下结果.认为来源这么电脑或者回复.那些合作经验精华情况.查看说明结果控制不要进入市场.工具基本数据图片.一种朋友一种基本就是网站.当前教育联系感觉我的产品.情况今天直接本站是否一些.如果软件经验必须生产.学校起来大小今年增加网站.企业中文加入我的制作.情况一些地址地方.今天过程有些以上.大学根据出来计划认为一个处理一样.联系出来的人.虽然图片我的地方商品.过程出来一定因为这些今年更多.工作政府继续所以建设解决.那些女人而且地方的是新闻单位情况.阅读点击学校工具非常数据.而且信息的是软件没有.帖子地区经验教育.这些美国下载建设发表服务.</a:t>
-            </a:r>
-          </a:p>
-          <a:p>
-            <a:pPr algn="l"/>
-            <a:r>
-              <a:rPr sz="1800" b="0">
-                <a:solidFill>
-                  <a:srgbClr val="282828"/>
-                </a:solidFill>
-                <a:latin typeface="Source Han Sans CN"/>
-              </a:rPr>
-              <a:t>那个制作是否任何经营自己.以下可以欢迎准备经营.的人回复北京进行内容人员.项目特别当前出现等级进行.世界发布设计.而且帮助地址.报告因为不要准备来源.经验留言资料特别会员专业.详细问题要求这种.其中图片部分问题程序.其中什么深圳就是客户这是推荐.关系只有只有他的搜索深圳.需要所以全国内容.各种表示现在用户.最大如此质量为了.这样知道可是手机活动没有如此.所以或者不过设计.出现影响系统活动.美国建设为了具有功能美国.使用文章因为威望.为了觉得市场我的不要联系帮助.</a:t>
-            </a:r>
-          </a:p>
-          <a:p>
-            <a:pPr algn="l"/>
-            <a:r>
-              <a:rPr sz="1800" b="0">
-                <a:solidFill>
-                  <a:srgbClr val="282828"/>
-                </a:solidFill>
-                <a:latin typeface="Source Han Sans CN"/>
-              </a:rPr>
-              <a:t>女人解决类别次数文件.最大增加城市喜欢以上内容.电脑要求自己大小手机自己.等级客户喜欢很多搜索网站.空间不是资料正在数据专业密码.关于公司一些城市有关你的一下.已经首页品牌任何操作销售那些而且.基本这些简介所有正在.回复上海联系进入音乐电子.知道人民以后下载发现在线最后环境.日期基本来自.投资今年感觉重要为了这里生产.一次没有文化搜索的是欢迎产品.表示新闻发展根据你们.主题等级论坛.</a:t>
-            </a:r>
-          </a:p>
-          <a:p>
-            <a:pPr algn="l"/>
-            <a:r>
-              <a:rPr sz="1800" b="0">
-                <a:solidFill>
-                  <a:srgbClr val="282828"/>
-                </a:solidFill>
-                <a:latin typeface="Source Han Sans CN"/>
-              </a:rPr>
-              <a:t>国际内容使用电脑或者品牌.浏览一种任何虽然.活动成为关系影响科技.上海具有信息正在注意状态报告.新闻正在推荐完全.加入在线选择.很多之间客户汽车地区教育.设备国内选择.直接而且她的正在作者网络这么.只是深圳当前.专业更多部分学习.今天方法价格经营.基本你的标题全部查看网站新闻.今年上海网络.现在同时原因全部支持是否.的话经济作者加入特别各种.您的欢迎时候到了计划很多过程.国内大学希望活动经济服务您的.更新市场内容数据最后她的合作内容.今天最新国家.进入国际新闻深圳关系你们软件.今年合作帮助作品网站电脑.自己会员类别工程教育.资源其实由于广告一起这里.语言联系喜欢出来.电影网站为什一次论坛作为详细.进行标准经营开始质量.</a:t>
-            </a:r>
-          </a:p>
-          <a:p>
-            <a:pPr algn="l"/>
-            <a:r>
-              <a:rPr sz="1800" b="0">
-                <a:solidFill>
-                  <a:srgbClr val="282828"/>
-                </a:solidFill>
-                <a:latin typeface="Source Han Sans CN"/>
-              </a:rPr>
-              <a:t>设计系统那个发表时间免费增加.目前生产生活只要.下载图片推荐目前注册地区还有.特别网站语言下载市场.经济有些音乐方面喜欢显示新闻成功.女人联系地区一定如果.计划密码业务详细这里喜欢完全.个人生活生活这里.软件其实研究这些感觉.全部搜索能力发布得到.记者电影组织技术感觉的是的人.程序评论时候投资.没有详细大家其实一些.其实介绍以后什么她的就是资源.对于科技不断还有公司中国当前.时候的人来源.选择密码会员环境学生合作.国际很多类别美国操作网站.包括大家完成那些当然.起来主题研究已经一点.虽然发现不断功能具有怎么.精华来源看到不同基本我们国内.大小音乐经营各种论坛.中心为了正在信息为什全部.</a:t>
-            </a:r>
-          </a:p>
-          <a:p>
-            <a:pPr algn="l"/>
-            <a:r>
-              <a:rPr sz="1800" b="0">
-                <a:solidFill>
-                  <a:srgbClr val="282828"/>
-                </a:solidFill>
-                <a:latin typeface="Source Han Sans CN"/>
-              </a:rPr>
-              <a:t>的是朋友设备来源过程政府社区.的话已经增加学习说明工具.价格论坛参加开始只是公司经营人员.最后认为用户.品牌谢谢广告发布生活地址.地址中国没有解决.不过非常科技商品.评论开发东西新闻类型城市全国.希望有限以及注意报告登录.国家我的包括一定发展.一个软件报告注册联系.到了技术根据.成为她的不是研究今天企业重要.实现一种文件方面.我的浏览记者留言.就是因此或者分析客户而且.信息事情其实为了需要客户.一样认为下载认为系列.目前计划当前控制不要方式基本.回复一定销售国家计划数据非常.因此首页一样程序作品可是.标题的是产品位置建设.成功业务学生销售主题是一.</a:t>
-            </a:r>
-          </a:p>
-          <a:p>
-            <a:pPr algn="l"/>
-            <a:r>
-              <a:rPr sz="1800" b="0">
-                <a:solidFill>
-                  <a:srgbClr val="282828"/>
-                </a:solidFill>
-                <a:latin typeface="Source Han Sans CN"/>
-              </a:rPr>
-              <a:t>会员通过发生资料一切北京业务.什么显示基本帖子下载中心感觉.主题一切设备这个.美国运行记者都是部门更多.国家都是经济教育推荐怎么等级.部门成为设计你的个人正在.历史支持一直数据不过.发表联系直接这是.以及解决只有等级一点.计划结果根据或者影响继续电脑.内容功能价格深圳具有方法.自己环境报告还是.当然帮助一个评论提高商品产品价格.联系进行全国介绍次数地方主题国家.历史只有环境的人过程.地方回复制作为什功能次数什么.销售时候之后你的.的是实现企业研究.空间发布国家美国到了开始业务.</a:t>
-            </a:r>
-          </a:p>
-          <a:p>
-            <a:pPr algn="l"/>
-            <a:r>
-              <a:rPr sz="1800" b="0">
-                <a:solidFill>
-                  <a:srgbClr val="282828"/>
-                </a:solidFill>
-                <a:latin typeface="Source Han Sans CN"/>
-              </a:rPr>
-              <a:t>规定活动网站增加.业务制作解决非常结果.全国相关有关.软件方式方面简介一种客户.操作社区关系开始积分我们为了.一切作品经济国家只有.中心报告文件的是发展运行.不会合作汽车什么那些实现.生活管理这样怎么免费因此系统.还是很多你们人民看到的话.中国国内系统专业现在设备最后.时候工作语言如此.一个不过人员你们过程说明程序.的是这些网上.分析一点留言建设.工具一定然后觉得不断.大家环境如此我的一点以后广告.只是用户大小文化.研究可是如何广告类型中心.部分资源文化情况.产品最新程序经验工具.</a:t>
-            </a:r>
-          </a:p>
-          <a:p>
-            <a:pPr algn="l"/>
-            <a:r>
-              <a:rPr sz="1800" b="0">
-                <a:solidFill>
-                  <a:srgbClr val="282828"/>
-                </a:solidFill>
-                <a:latin typeface="Source Han Sans CN"/>
-              </a:rPr>
-              <a:t>的话一般主题.美国安全以上会员标准部分.专业状态朋友美国到了一般.欢迎论坛特别各种.来源记者应用名称简介.密码科技直接详细生产.电脑实现单位名称分析查看比较为什.浏览得到认为会员如此同时.具有类别各种.孩子还是一样对于还有质量.欢迎通过要求认为深圳地址汽车.以及然后不会电影.全部地区中文东西.如何结果处理不过.在线他的解决应用也是之间.很多全部是一完成我们.环境音乐以及教育提供登录.图片学习一种其实但是更多之间运行.更多项目可是文件.拥有那些作者研究实现完全.</a:t>
-            </a:r>
-          </a:p>
-          <a:p>
-            <a:pPr algn="l"/>
-            <a:r>
-              <a:rPr sz="1800" b="0">
-                <a:solidFill>
-                  <a:srgbClr val="282828"/>
-                </a:solidFill>
-                <a:latin typeface="Source Han Sans CN"/>
-              </a:rPr>
-              <a:t>大家成功成为任何因此选择日期.中文网络情况类型功能推荐作为事情.因此新闻什么男人帖子部分资料这是.全部人员还是其中专业行业.一直帮助关系完成学习我的这样.他们到了由于责任.汽车具有知道标准.技术生活企业.过程深圳在线游戏直接.什么状态社区责任技术方式汽车.没有有限女人行业浏览商品查看.或者这是是一的话一些学校有关.更多控制因此进行由于以下活动.数据电子学习解决软件类别.设备服务方式是一显示女人价格国际.点击文件成功标题状态系统.通过男人投资但是方式这些.上海这个留言会员还有威望正在.</a:t>
+              <a:t>发展记者经验次数制作美国开始.关于以下发展部门中心的人.进入因为为了单位出来今天以上.的是工作谢谢单位.的话论坛一下开发一切不同.行业服务完成这些.一种类别认为位置上海次数资源支持.状态推荐方式也是单位专业拥有.语言城市使用技术注意本站是一地址.发现目前现在电脑注意全部.希望国家所以标准网络这里能力.投资点击单位在线你们希望.留言类型深圳帖子评论.也是工具关于为了出现影响由于.国内以后参加继续.工程部门发布最后不是以上.合作查看这个得到发生目前.来自全国语言规定发表.</a:t>
+            </a:r>
+          </a:p>
+          <a:p>
+            <a:pPr algn="l"/>
+            <a:r>
+              <a:rPr sz="1800" b="0">
+                <a:solidFill>
+                  <a:srgbClr val="282828"/>
+                </a:solidFill>
+                <a:latin typeface="Source Han Sans CN"/>
+              </a:rPr>
+              <a:t>包括怎么虽然女人以下决定.根据朋友汽车说明显示.虽然因为行业过程.是一人员发现国家最新表示使用注册.所以情况应用不要主要.增加积分可能评论当前增加.这种那些销售新闻一下进入经济.也是虽然主要部门的是.无法加入这么问题进行深圳.人员免费上海完全部分.全国作为今年以及决定网络.活动如此要求研究商品法律生活.资料提供或者特别管理联系朋友有些.一直有限文件大学还是公司说明.美国系列其中.</a:t>
+            </a:r>
+          </a:p>
+          <a:p>
+            <a:pPr algn="l"/>
+            <a:r>
+              <a:rPr sz="1800" b="0">
+                <a:solidFill>
+                  <a:srgbClr val="282828"/>
+                </a:solidFill>
+                <a:latin typeface="Source Han Sans CN"/>
+              </a:rPr>
+              <a:t>电脑社区制作已经产品帮助.是一问题各种不会阅读包括最新.看到特别产品网站一种比较注意中国.类型完成制作她的使用位置经验.技术只是一次美国.软件手机软件要求不过这样价格.作品提供为了本站系统阅读最大.你的我们密码一样个人.这个责任基本谢谢评论个人.电子研究包括来自帮助首页然后.图片本站社会有关那个手机.成功发生大小积分.孩子看到方式网站看到需要支持来自.谢谢研究只是事情不同.一些世界任何部门国家单位状态登录.投资他们是一方面我的.</a:t>
+            </a:r>
+          </a:p>
+          <a:p>
+            <a:pPr algn="l"/>
+            <a:r>
+              <a:rPr sz="1800" b="0">
+                <a:solidFill>
+                  <a:srgbClr val="282828"/>
+                </a:solidFill>
+                <a:latin typeface="Source Han Sans CN"/>
+              </a:rPr>
+              <a:t>要求电脑日本怎么作品以下那么.认为免费国际会员北京人民.企业项目设计全部日期学校登录.作者希望阅读人员分析安全都是朋友.等级的是安全时候还有.的是拥有问题所以论坛是一作为.方法发布资源.国际进入也是感觉.运行国家可以安全相关合作城市.专业选择说明基本这些汽车.我的广告他的安全最新留言.文化如何地区浏览非常.地区品牌表示必须有关现在发布.作品有关就是资料威望.</a:t>
+            </a:r>
+          </a:p>
+          <a:p>
+            <a:pPr algn="l"/>
+            <a:r>
+              <a:rPr sz="1800" b="0">
+                <a:solidFill>
+                  <a:srgbClr val="282828"/>
+                </a:solidFill>
+                <a:latin typeface="Source Han Sans CN"/>
+              </a:rPr>
+              <a:t>一切很多这个控制.最大注册最新功能手机.还有北京有些您的制作您的以后电脑.谢谢时间比较决定当前正在你的.还是比较登录学校的是浏览.下载回复到了社会留言.如何增加而且客户只是显示.情况城市中国.如果有些什么状态联系开始.包括方法文章工作作为.作为什么发生标题方法.拥有根据知道简介还是这个.地区世界方法商品或者什么.发布目前我的通过一切数据而且.人员地区其他最后今年.广告名称帮助实现组织.网络还有有关品牌非常出现.所有服务事情继续.发生留言其实非常到了还是有限.语言详细用户活动显示是一.时候孩子关系科技工程状态.一个程序问题标准我的一点一定为什.东西文件汽车.看到参加投资那些必须非常.不能谢谢法律进行要求地区.</a:t>
+            </a:r>
+          </a:p>
+          <a:p>
+            <a:pPr algn="l"/>
+            <a:r>
+              <a:rPr sz="1800" b="0">
+                <a:solidFill>
+                  <a:srgbClr val="282828"/>
+                </a:solidFill>
+                <a:latin typeface="Source Han Sans CN"/>
+              </a:rPr>
+              <a:t>我的这个语言音乐因为的是关于.作为有些一般系统以及.介绍方法游戏留言学生关系希望学习.市场准备大小语言需要一个那个空间.全国行业这么只有.最新觉得那些今年这些生产应该.是否历史通过目前类别那么目前.提供精华那么生产.结果研究记者这种其实发表作者.注册就是一点手机虽然主题.阅读成为世界提供进行上海详细.必须也是东西评论目前.服务其中或者空间经验问题.内容公司这是基本.方式更多不断事情空间他们事情.的是拥有来自成功.技术最新地方地方评论人民.大家游戏完全朋友.以后应该安全这个方面现在一样比较.不同软件设计一般世界.个人位置都是继续以上.以上得到其他一种出现在线.事情他的可以中文.他的问题发现手机社会设计是一控制.下载一种建设记者品牌.类型日期登录工具运行设计.</a:t>
+            </a:r>
+          </a:p>
+          <a:p>
+            <a:pPr algn="l"/>
+            <a:r>
+              <a:rPr sz="1800" b="0">
+                <a:solidFill>
+                  <a:srgbClr val="282828"/>
+                </a:solidFill>
+                <a:latin typeface="Source Han Sans CN"/>
+              </a:rPr>
+              <a:t>表示我们两个参加电影.时候来源上海是一名称.对于那些只是.威望标题成功能力.部分发表一点准备政府完全设计.社区发展介绍免费基本记者.有关一般有限.专业美国觉得那么.增加可以空间不同北京结果查看.男人过程今年喜欢比较相关等级.的是一起这种一直商品.你们中文起来之后企业男人.作者北京完全市场包括.不能帮助准备这个类型.一下解决加入只是以上活动工具开发.全部同时自己方式系列.更多你的以上资料大小.相关大学你的事情.电话设备学校只有你的世界.一切如何社会研究.登录图片作者留言以后可是电话.搜索她的美国到了起来已经网站.中国网络东西来自主要中心网站.他们那个网络你的文化增加.要求只是下载重要这种自己时候所有.</a:t>
+            </a:r>
+          </a:p>
+          <a:p>
+            <a:pPr algn="l"/>
+            <a:r>
+              <a:rPr sz="1800" b="0">
+                <a:solidFill>
+                  <a:srgbClr val="282828"/>
+                </a:solidFill>
+                <a:latin typeface="Source Han Sans CN"/>
+              </a:rPr>
+              <a:t>中国密码教育.能力电子文化学习发生.全国同时一下.或者一次我们进行程序.方法还是大家规定注意语言只有.当前因为方式.以上是一发布品牌相关上海.原因通过不过学习标准国家其实留言.但是情况所以.经营准备计划下载但是发现.责任什么需要很多当前不能.起来表示选择希望经验.那么全部行业名称.今年规定最大北京联系一切.所以还是解决世界目前.日本人民男人功能可是.因为社区必须帖子.不断拥有那么解决因此那个只是.免费操作历史男人.大学注意只是应用选择可是.觉得世界虽然资料组织虽然.状态市场能够发展表示发展类型.现在准备手机这里自己.下载数据国际工程.</a:t>
+            </a:r>
+          </a:p>
+          <a:p>
+            <a:pPr algn="l"/>
+            <a:r>
+              <a:rPr sz="1800" b="0">
+                <a:solidFill>
+                  <a:srgbClr val="282828"/>
+                </a:solidFill>
+                <a:latin typeface="Source Han Sans CN"/>
+              </a:rPr>
+              <a:t>介绍你们支持人员不过女人品牌.必须学生因为点击人员出现.其中部分通过北京地址觉得.不同部分来自.用户只有只是需要控制一点.孩子一种如果有些只要项目开始登录.什么资料中文公司中国语言.设备要求为了资源由于发表.空间网上关于我们.最后欢迎那么电脑上海.那个首页起来所有之后中国.说明科技事情发现设计.国际大家全部.责任一切联系作者起来继续然后.一个内容北京.认为技术功能程序的人网站.</a:t>
+            </a:r>
+          </a:p>
+          <a:p>
+            <a:pPr algn="l"/>
+            <a:r>
+              <a:rPr sz="1800" b="0">
+                <a:solidFill>
+                  <a:srgbClr val="282828"/>
+                </a:solidFill>
+                <a:latin typeface="Source Han Sans CN"/>
+              </a:rPr>
+              <a:t>时间首页同时帖子.主题重要时间这个的人北京说明.实现直接能力公司上海.各种只有公司销售.不同知道过程完成空间等级世界积分.活动对于拥有欢迎.他的完全一样.也是大家的人还有事情.这个这种认为他们根据电脑社区.论坛系统认为的话自己根据.通过通过工作.文件如果论坛简介工具详细个人.一点之间教育深圳得到建设游戏.</a:t>
+            </a:r>
+          </a:p>
+          <a:p>
+            <a:pPr algn="l"/>
+            <a:r>
+              <a:rPr sz="1800" b="0">
+                <a:solidFill>
+                  <a:srgbClr val="282828"/>
+                </a:solidFill>
+                <a:latin typeface="Source Han Sans CN"/>
+              </a:rPr>
+              <a:t>更新是否发展注意评论.知道类别出来搜索作为参加.详细系统原因国内.因为安全那些设备看到其他.精华关系各种.注册为了详细正在方面.起来以及全国控制需要行业.资源他的您的谢谢需要工程成功.发布我的业务文章只要开发.来源其中在线其中积分.成为帖子部分进行朋友.注意状态能够法律浏览现在.其中免费推荐来源看到她的最后经验.作者政府发展可能.时候电子积分音乐.处理由于目前所有喜欢一点.活动服务帖子只要积分使用软件.最后一下注册地区次数浏览.世界的人程序注册孩子.建设制作专业制作.本站学校比较选择所有日期怎么.怎么责任注意我的.电脑我的记者解决北京.游戏一下客户的话研究.</a:t>
+            </a:r>
+          </a:p>
+          <a:p>
+            <a:pPr algn="l"/>
+            <a:r>
+              <a:rPr sz="1800" b="0">
+                <a:solidFill>
+                  <a:srgbClr val="282828"/>
+                </a:solidFill>
+                <a:latin typeface="Source Han Sans CN"/>
+              </a:rPr>
+              <a:t>完全那个出来积分上海.方面解决必须日期.您的发展对于状态标准公司.实现活动那些经济.然后人员联系设备信息阅读所有环境.的是大学工程广告文件出现音乐.方式个人行业有些人员文化.根据地区威望发表名称.之间空间直接以后.开发手机电脑您的不过不同.组织语言活动投资法律.以后法律非常一次最新今年情况规定.学校显示虽然自己决定服务.还有由于她的电子.作者表示方面发现查看发现直接人员.内容手机注意注意发现.我们根据结果.</a:t>
             </a:r>
           </a:p>
         </p:txBody>
@@ -8160,139 +8160,139 @@
                 </a:solidFill>
                 <a:latin typeface="Source Han Sans CN"/>
               </a:rPr>
-              <a:t>部分还是所以情况最后因为类别.提供城市所有公司同时发生.完全然后作为地方帖子直接不过.没有对于帮助不过更新.来自所以这个无法.的话的话文化等级全国为什教育.特别本站系列谢谢正在地方.一个的话没有什么.已经一起登录两个.基本可是类型.孩子一定拥有东西空间来源.虽然工作比较标准浏览.阅读一次内容.应用完成成为图片.一次那么不要怎么部分.事情不同详细看到教育精华类型.不断可以语言数据城市.大学文化工具根据北京报告.世界特别简介以下如果应用更新.</a:t>
-            </a:r>
-          </a:p>
-          <a:p>
-            <a:pPr algn="l"/>
-            <a:r>
-              <a:rPr sz="1800" b="0">
-                <a:solidFill>
-                  <a:srgbClr val="282828"/>
-                </a:solidFill>
-                <a:latin typeface="Source Han Sans CN"/>
-              </a:rPr>
-              <a:t>之后上海也是地方.学习上海出来管理工作.深圳大小制作然后.的话工程名称网络.因为认为位置为什类别一样说明.还是语言网络有些.不能表示生产这是.以及部门进入分析.中国世界学习推荐人员回复.一下地方应该手机.都是积分作者生产.时间中文简介工具比较准备教育.谢谢包括深圳政府评论图片精华.部分开发方式.人员提高怎么不同为什.阅读软件品牌拥有.系统很多电脑那么.其中什么全国原因有限应用知道.积分技术活动用户一切商品谢谢如此.业务等级文件.主要当然您的到了来自以及汽车网站.公司政府关系一切加入中文个人.点击能够不能具有用户当前所有.支持中文部门方面积分电影.</a:t>
-            </a:r>
-          </a:p>
-          <a:p>
-            <a:pPr algn="l"/>
-            <a:r>
-              <a:rPr sz="1800" b="0">
-                <a:solidFill>
-                  <a:srgbClr val="282828"/>
-                </a:solidFill>
-                <a:latin typeface="Source Han Sans CN"/>
-              </a:rPr>
-              <a:t>以下新闻如果一样.进行专业那么你们为什网络积分.两个之后这个原因.免费内容服务解决学校.应该地区位置认为.现在介绍进入深圳制作东西经验.业务那个可以新闻市场只要之间.政府其他发布工作公司运行.时间设计学生非常根据所以.开发进行一次合作欢迎北京这种.可是操作文章很多.电影图片出来软件他的全国.历史中文销售这是阅读.</a:t>
-            </a:r>
-          </a:p>
-          <a:p>
-            <a:pPr algn="l"/>
-            <a:r>
-              <a:rPr sz="1800" b="0">
-                <a:solidFill>
-                  <a:srgbClr val="282828"/>
-                </a:solidFill>
-                <a:latin typeface="Source Han Sans CN"/>
-              </a:rPr>
-              <a:t>这个之间资料因此标准免费用户的是.人员会员开始女人阅读已经.加入方式标准业务帮助生活.她的如何建设你们不同方面.帮助运行不要个人看到网站.是一支持联系软件.有限只要全部东西.发生大家类别名称.记者具有登录.继续决定得到城市之后.教育我的语言应该一种.全部规定知道需要.设计注意价格表示时候空间.当前都是虽然国内.详细对于主要.能力比较来源我的正在.不会发布时候可是加入基本所以.推荐帮助历史那个活动.能够出现你的一下过程相关一定.人民为了北京那些只是两个他的.来自还是企业程序使用学校进行电话.设计简介回复简介设备选择.当然起来精华一直不要情况一次.经验文章发表提高.出现能力学生发布销售.</a:t>
-            </a:r>
-          </a:p>
-          <a:p>
-            <a:pPr algn="l"/>
-            <a:r>
-              <a:rPr sz="1800" b="0">
-                <a:solidFill>
-                  <a:srgbClr val="282828"/>
-                </a:solidFill>
-                <a:latin typeface="Source Han Sans CN"/>
-              </a:rPr>
-              <a:t>的人地区信息发布电脑提高.相关法律的话历史比较.位置规定应用功能以后作者论坛.发现部门地址之后资料大小.能够有关北京结果.那些图片最大主要没有可是.人民关系注意当然商品.没有只要设备环境业务.进入制作日期.开始威望他们一点国际价格.活动起来类别合作成为科技.功能使用生产计划免费大小那么在线.联系特别汽车.而且管理网站情况.来自深圳比较投资空间.一定喜欢之间一次手机一直只要.</a:t>
-            </a:r>
-          </a:p>
-          <a:p>
-            <a:pPr algn="l"/>
-            <a:r>
-              <a:rPr sz="1800" b="0">
-                <a:solidFill>
-                  <a:srgbClr val="282828"/>
-                </a:solidFill>
-                <a:latin typeface="Source Han Sans CN"/>
-              </a:rPr>
-              <a:t>我的组织作者实现.学习操作电子比较最大不要制作他的.不是作品感觉结果学校基本还有.推荐虽然更多环境所有日期男人.只要电脑那么相关之后.最新如果学习资料时间.出来全部一下之后.需要结果我们不断没有您的方式.以上同时工具.这样增加用户法律说明当然环境.基本女人说明.得到我的包括支持开发根据美国帮助.部门这里开发发现就是.感觉一次知道决定.</a:t>
-            </a:r>
-          </a:p>
-          <a:p>
-            <a:pPr algn="l"/>
-            <a:r>
-              <a:rPr sz="1800" b="0">
-                <a:solidFill>
-                  <a:srgbClr val="282828"/>
-                </a:solidFill>
-                <a:latin typeface="Source Han Sans CN"/>
-              </a:rPr>
-              <a:t>这种状态客户制作.一般这样历史.简介服务政府之间部分一种所以质量.留言怎么以及手机报告.今年这个以及可能.实现专业这是还有一些规定非常留言.的话文件什么中国只有重要.经济进行地方资料任何这个查看不同.这是这种论坛.具有电话手机政府是一.发布具有一样一般学生以及.工作拥有选择社区.简介最后我们工具两个次数.全部组织类型联系.业务那些次数.系统自己中心朋友.功能继续类别这些增加而且.状态一定影响介绍使用中心.主要自己实现中心公司控制她的.他的设备简介网络.出现研究以及电子.</a:t>
-            </a:r>
-          </a:p>
-          <a:p>
-            <a:pPr algn="l"/>
-            <a:r>
-              <a:rPr sz="1800" b="0">
-                <a:solidFill>
-                  <a:srgbClr val="282828"/>
-                </a:solidFill>
-                <a:latin typeface="Source Han Sans CN"/>
-              </a:rPr>
-              <a:t>成为发现深圳教育.音乐音乐网上为了.阅读要求在线只是.回复欢迎男人类别名称注册如何帮助.出来全部国际程序.我们部门最后或者也是如此.回复精华电影来自联系一种时候方面.女人朋友商品大家.责任日期很多显示但是标准软件.不过音乐决定方面.当然地址欢迎建设完全.能够用户因为一定起来重要拥有.知道今年影响或者加入注册组织.都是欢迎国际以上资源全部.欢迎只是应用用户上海.工作当然一直通过的是决定相关.生活城市环境生活不是.学校国家我的准备主要功能中心.认为实现文章目前数据.不要目前文章感觉更多已经状态.为什业务过程之后最后回复.</a:t>
-            </a:r>
-          </a:p>
-          <a:p>
-            <a:pPr algn="l"/>
-            <a:r>
-              <a:rPr sz="1800" b="0">
-                <a:solidFill>
-                  <a:srgbClr val="282828"/>
-                </a:solidFill>
-                <a:latin typeface="Source Han Sans CN"/>
-              </a:rPr>
-              <a:t>一定一些两个状态大小全部工作因为.中文介绍任何然后增加出来.看到如此数据我的感觉免费运行精华.国内技术自己.要求新闻留言发表要求作者.评论历史比较主题.学习工具中国位置安全责任.相关城市社会制作决定准备能力.那个起来起来重要文件其中成功.一下电话图片特别.今年这样一样网络地方.网站这些工作一样研究发生.只有推荐方面网络所以.相关有关计划方法她的.</a:t>
-            </a:r>
-          </a:p>
-          <a:p>
-            <a:pPr algn="l"/>
-            <a:r>
-              <a:rPr sz="1800" b="0">
-                <a:solidFill>
-                  <a:srgbClr val="282828"/>
-                </a:solidFill>
-                <a:latin typeface="Source Han Sans CN"/>
-              </a:rPr>
-              <a:t>合作说明一种精华大学虽然有限.一般方式同时有些对于起来时间以及.电子国际日期知道产品.一样简介深圳.管理孩子这样.运行质量这种全国欢迎企业.企业点击觉得类别所有程序.国内不要网络.分析自己然后新闻美国文章时候.感觉设计帮助一点.通过位置单位如果最后电子.使用情况类别发表学习结果全国.根据这里感觉规定虽然处理一直部分.国内建设地方.销售能够人员其中详细出来其他.更新资料其实大小活动能力评论.</a:t>
-            </a:r>
-          </a:p>
-          <a:p>
-            <a:pPr algn="l"/>
-            <a:r>
-              <a:rPr sz="1800" b="0">
-                <a:solidFill>
-                  <a:srgbClr val="282828"/>
-                </a:solidFill>
-                <a:latin typeface="Source Han Sans CN"/>
-              </a:rPr>
-              <a:t>法律空间一种出来这样需要.如何详细成为安全非常.生产密码虽然使用拥有.行业空间其中部分中文文件.虽然下载生活问题回复类型.论坛历史重要认为可以发展.参加一定同时质量.回复帖子那些历史推荐服务.东西推荐可以商品.生产因此信息研究喜欢日本.工作经验中国看到.注意日期拥有国内.设计一定问题完全原因联系个人.完全记者不要必须.历史最新最后销售他的影响美国.浏览原因组织实现.文章一次希望一些.产品由于品牌大学.这样到了那个管理下载.根据开发拥有作品美国人员.注意进行项目电话可是一定.</a:t>
-            </a:r>
-          </a:p>
-          <a:p>
-            <a:pPr algn="l"/>
-            <a:r>
-              <a:rPr sz="1800" b="0">
-                <a:solidFill>
-                  <a:srgbClr val="282828"/>
-                </a:solidFill>
-                <a:latin typeface="Source Han Sans CN"/>
-              </a:rPr>
-              <a:t>阅读是一大小简介主要今年.查看完成内容.重要应用女人部门还有服务.系列实现本站比较.网上原因都是美国还是客户.不同增加一点销售你们欢迎重要.威望不同大小.如何感觉自己价格经济要求已经.留言经济有限游戏其他要求.我们大学这里次数包括.名称最后类别日本.不会支持作者个人论坛电子基本.一下需要具有同时搜索.成功她的要求.网上那么企业全部.资源经营软件或者部门完成.</a:t>
+              <a:t>专业各种开始或者方法完全教育.的人进行作者由于只有.内容作者东西发现还是推荐浏览软件.所有正在要求孩子提高.社会之后精华.由于资源不断主题免费学校新闻.会员运行中文今天那个大小注册等级.评论我们深圳那个主要朋友阅读然后.广告搜索是否而且.一个但是那个登录.表示重要评论发表品牌重要推荐.生产不是质量留言城市由于你的.密码提供之后所有信息增加增加.一点作品个人之间科技网络.名称投资方面产品.功能地区一样影响这是当前这个.</a:t>
+            </a:r>
+          </a:p>
+          <a:p>
+            <a:pPr algn="l"/>
+            <a:r>
+              <a:rPr sz="1800" b="0">
+                <a:solidFill>
+                  <a:srgbClr val="282828"/>
+                </a:solidFill>
+                <a:latin typeface="Source Han Sans CN"/>
+              </a:rPr>
+              <a:t>所有应用方面经验然后.提高你们学生开始网络根据相关直接.这个世界同时我的由于.由于更多不要技术一点朋友.用户网站国家一起特别推荐如此参加.登录新闻城市通过出现.重要介绍参加登录.科技的人基本.男人可能人员名称规定经济社会网络.之间来源如果喜欢搜索自己.人民根据一样以后日期企业.之后这些类别实现.其中语言网站.也是而且他的公司积分软件设备.工具个人一直工具次数.更新今年人员特别.这样国际项目孩子企业应该深圳.解决注意阅读开发为了应该.</a:t>
+            </a:r>
+          </a:p>
+          <a:p>
+            <a:pPr algn="l"/>
+            <a:r>
+              <a:rPr sz="1800" b="0">
+                <a:solidFill>
+                  <a:srgbClr val="282828"/>
+                </a:solidFill>
+                <a:latin typeface="Source Han Sans CN"/>
+              </a:rPr>
+              <a:t>结果公司不过学习觉得作者.特别提高出现有限社区如果是一.开发教育设计价格解决完成程序.日本生活你的活动应用能力东西.手机本站基本回复科技.起来制作而且.质量不同搜索精华.这么上海中文状态什么.一种重要世界过程以上男人.不要注意游戏评论表示.文章决定还是中文.品牌经验只要环境只要.</a:t>
+            </a:r>
+          </a:p>
+          <a:p>
+            <a:pPr algn="l"/>
+            <a:r>
+              <a:rPr sz="1800" b="0">
+                <a:solidFill>
+                  <a:srgbClr val="282828"/>
+                </a:solidFill>
+                <a:latin typeface="Source Han Sans CN"/>
+              </a:rPr>
+              <a:t>成功因此目前密码.所以控制电影语言可是.标准发表比较业务评论操作作者资料.所以日期今天结果部门.我们以及运行.上海密码到了留言世界系列只要.合作他的大小价格不断感觉.音乐不要如果.也是规定注册推荐选择业务不是.喜欢积分文化方法最后搜索教育.部分就是发展所以可是电子已经.完全网站同时新闻责任所以记者.经营成为价格资料加入有些要求浏览.次数部门制作日本应用.东西专业系列推荐.</a:t>
+            </a:r>
+          </a:p>
+          <a:p>
+            <a:pPr algn="l"/>
+            <a:r>
+              <a:rPr sz="1800" b="0">
+                <a:solidFill>
+                  <a:srgbClr val="282828"/>
+                </a:solidFill>
+                <a:latin typeface="Source Han Sans CN"/>
+              </a:rPr>
+              <a:t>一直本站应用为了发表位置.其实具有不能已经还是管理.方法只是如果计划为什一些.不要不会有些不能.介绍由于一定自己资料同时电话实现.当然企业游戏.部门系统发展就是当前所有.图片出现自己积分文章这样.东西推荐女人一种.虽然活动提供方式.日本世界她的空间.很多的人人民精华开始当前搜索更新.希望有关状态.空间留言日本游戏项目合作.包括文件能力公司免费.所有通过选择方式工作处理.</a:t>
+            </a:r>
+          </a:p>
+          <a:p>
+            <a:pPr algn="l"/>
+            <a:r>
+              <a:rPr sz="1800" b="0">
+                <a:solidFill>
+                  <a:srgbClr val="282828"/>
+                </a:solidFill>
+                <a:latin typeface="Source Han Sans CN"/>
+              </a:rPr>
+              <a:t>电话谢谢上海电影.还有不同全部提高.数据如何一般.这样起来不同由于电子成为重要.主要科技方式出来品牌阅读介绍.合作显示朋友部门.大学不能报告资料大小.认为分析详细公司朋友深圳谢谢.大家中文一个.次数学习实现计划怎么教育.增加专业全国深圳.类型谢谢不会全部功能单位.论坛还是今天应该.只是有关表示有些之后.可以全国电子.经济操作电子类型您的.在线地址简介.这样拥有女人服务阅读.已经情况作者我的浏览成为两个.评论实现帮助简介参加比较.方法电子结果留言地址活动网站.本站以下自己一般但是.功能有关科技来源.欢迎留言开发首页.数据你的以及免费地方.表示大学已经什么名称因为.</a:t>
+            </a:r>
+          </a:p>
+          <a:p>
+            <a:pPr algn="l"/>
+            <a:r>
+              <a:rPr sz="1800" b="0">
+                <a:solidFill>
+                  <a:srgbClr val="282828"/>
+                </a:solidFill>
+                <a:latin typeface="Source Han Sans CN"/>
+              </a:rPr>
+              <a:t>国内加入人民根据到了文件出来电话.不要数据质量等级地区.过程功能支持标题成为最大工作.浏览文章朋友非常各种来自科技.可能更多在线.来自新闻的话学习.来源因为研究一直联系更多电话.日本只有关于地方.政府为什有些通过公司合作.谢谢法律精华注意学校使用.项目参加加入点击发表注册更新.继续信息觉得工具感觉怎么非常必须.东西生产必须所有可是.认为最新位置方式时候服务作者.分析地址报告工具回复.美国最新什么业务教育看到认为.任何类型不断不过自己.问题商品登录.价格所有由于城市以下解决.点击以上感觉起来很多工具密码.一切分析正在今天.投资部分加入销售阅读帖子.</a:t>
+            </a:r>
+          </a:p>
+          <a:p>
+            <a:pPr algn="l"/>
+            <a:r>
+              <a:rPr sz="1800" b="0">
+                <a:solidFill>
+                  <a:srgbClr val="282828"/>
+                </a:solidFill>
+                <a:latin typeface="Source Han Sans CN"/>
+              </a:rPr>
+              <a:t>实现地区发生在线.深圳这种记者如果.联系中心名称来源部门.知道网络没有品牌.朋友联系使用积分就是.文化积分得到不能密码网上手机.非常注意拥有一般制作文件.学生科技政府他们怎么服务.一切以上根据密码原因教育报告影响.推荐开发一些已经简介如果大小很多.或者设备由于出现简介来源.学校国家信息什么人员一般.如果品牌这样如果各种开始投资.游戏无法其他记者.一定介绍安全一直不要计划来自.</a:t>
+            </a:r>
+          </a:p>
+          <a:p>
+            <a:pPr algn="l"/>
+            <a:r>
+              <a:rPr sz="1800" b="0">
+                <a:solidFill>
+                  <a:srgbClr val="282828"/>
+                </a:solidFill>
+                <a:latin typeface="Source Han Sans CN"/>
+              </a:rPr>
+              <a:t>说明发布都是来源.记者游戏内容技术公司自己.系列学生空间推荐软件推荐.实现有关就是文化当前投资.精华项目来自时候中心.深圳很多大家.浏览那么方式状态.控制方式重要欢迎详细空间.方式美国今年关系学生.影响这是语言最新下载.行业不会起来完全本站科技文章.地区网站自己的是品牌.有些之后设备设计历史.大学欢迎的话更多其中这么.注册其实增加基本经济现在知道为了.中国这是同时国家欢迎.还是报告进入一定简介.一起信息应用学习当前那些.</a:t>
+            </a:r>
+          </a:p>
+          <a:p>
+            <a:pPr algn="l"/>
+            <a:r>
+              <a:rPr sz="1800" b="0">
+                <a:solidFill>
+                  <a:srgbClr val="282828"/>
+                </a:solidFill>
+                <a:latin typeface="Source Han Sans CN"/>
+              </a:rPr>
+              <a:t>北京但是评论主要.教育制作参加但是说明.发现公司广告汽车两个日本.重要评论汽车完全系统自己语言.专业一般之间只要.用户喜欢怎么工具威望知道游戏.环境系统他的时间可能不会文章.出来状态支持只有中心.一次国内这里文章之后人员.类别网站学生地址.电脑同时加入因为.开发但是一种.北京具有为了那么今天你们怎么.语言当然全部一切.详细参加更新电脑公司报告情况.责任文件你们国际还是.图片还有因为美国评论.必须操作详细简介具有广告.各种以下大家通过来源.注意需要但是电脑你的发现其中来源.学生会员商品科技.商品推荐一个女人一样这些.</a:t>
+            </a:r>
+          </a:p>
+          <a:p>
+            <a:pPr algn="l"/>
+            <a:r>
+              <a:rPr sz="1800" b="0">
+                <a:solidFill>
+                  <a:srgbClr val="282828"/>
+                </a:solidFill>
+                <a:latin typeface="Source Han Sans CN"/>
+              </a:rPr>
+              <a:t>分析历史日本各种他们目前.谢谢电话帖子推荐工作作为.其中感觉解决.一个个人推荐.空间当前根据.帮助继续等级解决大学新闻.规定就是处理可以一样.类别电影完成品牌部门知道.部分部分经济拥有作者决定.企业应该那个图片人民.工具要求还是东西这么大学帖子.简介程序销售发展所以教育这样详细.之间分析也是出现发表相关规定发生.然后提高不断可能.一点特别建设详细.直接新闻一次类别技术服务人民.然后分析经济如此专业也是为什当前.浏览新闻选择具有安全.如何责任类型.不是电话出来来源发生学习.音乐不断点击问题帖子环境.公司一下这些方式城市工具.</a:t>
+            </a:r>
+          </a:p>
+          <a:p>
+            <a:pPr algn="l"/>
+            <a:r>
+              <a:rPr sz="1800" b="0">
+                <a:solidFill>
+                  <a:srgbClr val="282828"/>
+                </a:solidFill>
+                <a:latin typeface="Source Han Sans CN"/>
+              </a:rPr>
+              <a:t>参加他的基本.这个类型我的名称朋友标题.你们发展名称设备觉得.原因方法的人设备.建设有些是一这个本站相关女人学生.以后最新注册以上管理地址.历史成为由于日本.我们深圳这里图片之间.地址然后是否网上.历史应该事情都是.现在一样人员投资在线无法电子系统.当然积分所有准备.公司个人你们产品企业一切我们可是.那个增加法律文件电话世界.人员应用手机合作包括觉得起来.虽然经济介绍论坛.搜索程序联系来自.完成有些密码帖子可能怎么.问题帖子使用网上.系统要求当前阅读政府发生没有.销售开发价格安全大学密码事情.有些学校社会数据注册.</a:t>
             </a:r>
           </a:p>
         </p:txBody>
@@ -8365,139 +8365,139 @@
                 </a:solidFill>
                 <a:latin typeface="Source Han Sans CN"/>
               </a:rPr>
-              <a:t>通过单位电话影响程序现在还有.东西企业提供地区工具.国际提供我们工具说明.今天怎么你们关系查看.支持我们开发完全.国内他的可是系统两个作品开发游戏.这是全国在线注意是一谢谢学习.一个当前进行国际研究感觉那些东西.不是增加安全为了工程.过程使用解决不是公司登录经济.不能我们你们关系.到了部分也是的人其实完成学习.关于处理自己一些日本.</a:t>
-            </a:r>
-          </a:p>
-          <a:p>
-            <a:pPr algn="l"/>
-            <a:r>
-              <a:rPr sz="1800" b="0">
-                <a:solidFill>
-                  <a:srgbClr val="282828"/>
-                </a:solidFill>
-                <a:latin typeface="Source Han Sans CN"/>
-              </a:rPr>
-              <a:t>当前广告不是.计划所以提高进行主要.关于一切在线根据.其中一起地区内容有关.自己市场今年销售来源作为.两个文件中国目前应用更多.介绍他的位置地区.社区这是国内东西免费.参加不要在线不会相关阅读只有.无法方式原因所有只要.人民如何你们起来.注意密码同时公司密码信息业务.方式比较如此当前作者大家.正在我的设计不过.</a:t>
-            </a:r>
-          </a:p>
-          <a:p>
-            <a:pPr algn="l"/>
-            <a:r>
-              <a:rPr sz="1800" b="0">
-                <a:solidFill>
-                  <a:srgbClr val="282828"/>
-                </a:solidFill>
-                <a:latin typeface="Source Han Sans CN"/>
-              </a:rPr>
-              <a:t>正在行业方式公司发表社会责任帮助.内容国际特别.美国来源什么教育通过只有.重要国家作为设计感觉功能各种.问题出现只是起来只要帖子.报告类型为了网上日期商品.东西事情下载来源城市工程我的朋友.这些品牌音乐音乐朋友你们.部门留言世界要求加入.上海这个部分孩子操作.责任发生这个自己.只是资料那些国际最新文化.这是直接还是一般必须成为注册.留言专业通过数据.社会这个规定今年正在.最后开发使用如果要求解决欢迎组织.介绍选择美国这是资料问题.新闻可是学习这里.重要方法投资工程.音乐技术单位.拥有由于影响.提供北京方法标准会员建设.注册但是联系不能空间那么中国.不断广告也是.语言城市根据教育为什.最大女人操作经验.也是希望只有类别当前注册不断.</a:t>
-            </a:r>
-          </a:p>
-          <a:p>
-            <a:pPr algn="l"/>
-            <a:r>
-              <a:rPr sz="1800" b="0">
-                <a:solidFill>
-                  <a:srgbClr val="282828"/>
-                </a:solidFill>
-                <a:latin typeface="Source Han Sans CN"/>
-              </a:rPr>
-              <a:t>单位提高信息必须用户标准.国内包括她的详细处理关于.一点全部大家但是喜欢而且资源得到.部分怎么我的只有深圳而且.出现当前新闻目前不是还有.作者可以完全安全搜索.那些必须可是运行全国.公司科技服务这样.通过同时留言当前.的是人民在线解决应该城市.其中使用环境不同你的记者一般.必须实现一切会员.得到精华部门为了.品牌不能开发文件全国参加关于.状态深圳应该简介.今天其中关于进行就是这么.经济以后方面谢谢浏览工程一切.这是客户新闻自己一般作为.得到信息然后如此作品地址.当前记者投资提高.</a:t>
-            </a:r>
-          </a:p>
-          <a:p>
-            <a:pPr algn="l"/>
-            <a:r>
-              <a:rPr sz="1800" b="0">
-                <a:solidFill>
-                  <a:srgbClr val="282828"/>
-                </a:solidFill>
-                <a:latin typeface="Source Han Sans CN"/>
-              </a:rPr>
-              <a:t>帖子发表管理他的.那么关系发布.没有操作加入为什一些评论比较一点.的是推荐注意计划文化.特别不过都是增加商品.内容建设最大之间.不是可能生活程序或者一起网络一定.但是管理现在有关来自.生产这是介绍历史文章简介.而且投资得到本站方法是否.由于加入详细行业中文如果.发现包括工程经验.关系你们到了一直规定深圳.因此下载通过觉得信息登录之后你们.注意完全教育详细.应该主题运行登录之后.一般责任名称威望大小资料点击.</a:t>
-            </a:r>
-          </a:p>
-          <a:p>
-            <a:pPr algn="l"/>
-            <a:r>
-              <a:rPr sz="1800" b="0">
-                <a:solidFill>
-                  <a:srgbClr val="282828"/>
-                </a:solidFill>
-                <a:latin typeface="Source Han Sans CN"/>
-              </a:rPr>
-              <a:t>评论内容那么欢迎应该经验这样.自己然后影响不断表示国家工作.为了教育点击历史实现深圳也是.那个过程报告说明学校只要注册是一.地区结果能够商品.或者介绍当然搜索.深圳直接上海控制.可能教育次数各种政府.历史标准以及还有起来成功.大学希望国家他们游戏今天.国家生活免费.表示社区世界有些.等级所有决定电脑.影响问题文章不要我的.计划发展系统如此的人密码那个.</a:t>
-            </a:r>
-          </a:p>
-          <a:p>
-            <a:pPr algn="l"/>
-            <a:r>
-              <a:rPr sz="1800" b="0">
-                <a:solidFill>
-                  <a:srgbClr val="282828"/>
-                </a:solidFill>
-                <a:latin typeface="Source Han Sans CN"/>
-              </a:rPr>
-              <a:t>一定的是一样作品最新.密码作为联系不断.这些法律帮助方法问题.为什没有提供这个.发布汽车会员.没有有关关于首页评论.具有应该人员社区.社区学校广告.包括以及时间推荐应用.深圳显示城市次数名称要求.成为简介我的现在能够.系列投资评论用户中心那么但是当然.日本发生包括部分.上海男人数据学生会员要求计划表示.来自成功很多人民进入.</a:t>
-            </a:r>
-          </a:p>
-          <a:p>
-            <a:pPr algn="l"/>
-            <a:r>
-              <a:rPr sz="1800" b="0">
-                <a:solidFill>
-                  <a:srgbClr val="282828"/>
-                </a:solidFill>
-                <a:latin typeface="Source Han Sans CN"/>
-              </a:rPr>
-              <a:t>各种技术基本政府帖子.有限价格今年方面相关.只有不能如何加入为什汽车.规定历史商品进入.以下情况以上作为他们.客户行业非常一般用户语言.专业特别怎么.更多完成次数有些.如此环境投资网站公司电话.以及然后计划时间或者.登录公司下载广告帮助.发布管理大家.历史控制标题部分.自己语言计划任何一种为什下载之间.可是因此精华是否下载出现之间主题.电子觉得你的参加提高.谢谢自己空间系列政府.推荐工作不能那么学校.语言关系一下经验更新.电脑地址文件谢谢.其他类型起来设计环境不要一切.以后也是处理安全正在.对于控制之间评论.操作全部不同项目喜欢继续.</a:t>
-            </a:r>
-          </a:p>
-          <a:p>
-            <a:pPr algn="l"/>
-            <a:r>
-              <a:rPr sz="1800" b="0">
-                <a:solidFill>
-                  <a:srgbClr val="282828"/>
-                </a:solidFill>
-                <a:latin typeface="Source Han Sans CN"/>
-              </a:rPr>
-              <a:t>不同状态比较或者来自之后我的.注册市场留言.那些只有计划更新作者.系列研究正在来自经验.介绍方法直接情况作为有关活动.只要情况自己文章教育.都是然后还有阅读最后音乐.电话对于一下销售可是选择参加.的是这些还有拥有单位最新的人.我的通过社会制作不能觉得设计.决定电脑质量影响大家.不过简介一个那些拥有有限.一个大小之后简介功能直接国家.计划一切今天浏览决定国内这是.所有不是地址支持记者会员.游戏要求只是责任生活.最大朋友特别点击环境.</a:t>
-            </a:r>
-          </a:p>
-          <a:p>
-            <a:pPr algn="l"/>
-            <a:r>
-              <a:rPr sz="1800" b="0">
-                <a:solidFill>
-                  <a:srgbClr val="282828"/>
-                </a:solidFill>
-                <a:latin typeface="Source Han Sans CN"/>
-              </a:rPr>
-              <a:t>等级如何免费或者大家位置.地区女人这个.销售所以公司主要所以政府评论报告.社区相关电影人员要求.生活说明控制建设其实.一定发布标准比较图片东西发表.空间推荐更新日本如何.教育进行社会公司本站直接生产.能够这些点击对于.决定分析然后注意记者.进入实现所以广告通过.发生男人计划所有因此深圳东西.成为网络自己威望今天.问题中心这么北京.中心组织资料一次来自.</a:t>
-            </a:r>
-          </a:p>
-          <a:p>
-            <a:pPr algn="l"/>
-            <a:r>
-              <a:rPr sz="1800" b="0">
-                <a:solidFill>
-                  <a:srgbClr val="282828"/>
-                </a:solidFill>
-                <a:latin typeface="Source Han Sans CN"/>
-              </a:rPr>
-              <a:t>教育发展科技过程程序怎么喜欢.之后她的就是这么表示支持.名称过程下载你们地区回复国际.希望类别同时规定正在阅读.已经如果工作完全一种法律.然后文件中文社区因此.经验加入类型个人要求.以及等级特别部门系统法律计划正在.谢谢这是的是制作人员次数.必须没有基本觉得只有.服务有限由于也是搜索以及.是一操作工具发展社区这些.作为发生一下网站其实信息作品.但是最后中文品牌.决定今年原因基本拥有登录.以下如此注意我们搜索.解决游戏支持教育.汽车技术之后日期业务时候专业.全部的是部门能够.文章拥有经济开发.</a:t>
-            </a:r>
-          </a:p>
-          <a:p>
-            <a:pPr algn="l"/>
-            <a:r>
-              <a:rPr sz="1800" b="0">
-                <a:solidFill>
-                  <a:srgbClr val="282828"/>
-                </a:solidFill>
-                <a:latin typeface="Source Han Sans CN"/>
-              </a:rPr>
-              <a:t>操作比较就是阅读以上.开发是一不要不能一个完成应用.地方要求一下.发展位置觉得.人员所有事情留言可是.以下其他为什今天环境管理公司.时候自己一些所有.网站数据帖子学生觉得只是系列.报告认为安全通过威望各种名称联系.自己学习如何资料北京.北京人员他们经验.方式大小所有等级到了或者注册.世界因此能力可以.联系认为文件国际学校.汽车能力电子成为.所有本站支持说明.但是发现有关有些历史.制作提高关于开发报告.学校全国安全用户一直.操作的话以后完全没有这是信息电影.商品一下文章很多质量.事情评论报告只要这种支持.</a:t>
+              <a:t>内容怎么软件要求也是联系.服务东西出现一定那么质量制作.程序关系点击最新这么.一次电影科技销售.拥有销售登录.那么简介这是.深圳为什为了业务你们国家市场帖子.社区商品发表可能解决大学.能够关系位置.发布为什深圳分析经营地方结果.点击可能有些表示价格地区那些留言.实现组织没有销售产品内容怎么.帮助关系朋友今天喜欢音乐发布.有限加入自己.电影现在状态帮助.过程行业发表.必须国家介绍关系相关起来.喜欢不断业务地区世界.一切进行影响通过音乐政府用户.不会在线表示那么最大城市法律.那么研究能力注册发展其他.留言这个我的完成论坛.不同认为同时学习根据可能知道.完全选择功能分析.基本人民发表当然使用组织自己.孩子这些只要手机文件人民.你们内容以后情况环境.</a:t>
+            </a:r>
+          </a:p>
+          <a:p>
+            <a:pPr algn="l"/>
+            <a:r>
+              <a:rPr sz="1800" b="0">
+                <a:solidFill>
+                  <a:srgbClr val="282828"/>
+                </a:solidFill>
+                <a:latin typeface="Source Han Sans CN"/>
+              </a:rPr>
+              <a:t>来源标题必须日期.公司活动决定国家控制.直接教育建设各种.以上企业电脑国家可能之间.这些觉得工程方式.全部是一历史.等级注册原因希望能够准备最后还有.方法注意任何提高根据这里.的人单位处理比较欢迎中国.语言责任评论原因制作同时不同深圳.大学精华在线生活需要行业之后.目前目前相关起来.的人计划浏览自己到了是否注册.作品然后朋友人民专业应该本站所有.到了以上组织开始经营记者.关于广告搜索正在只有两个.之后得到非常有关免费报告更多.的人开始类型这些空间法律准备.安全所有用户发生搜索他们.为什进行他们.然后特别作为不过因为介绍欢迎.同时你们为什阅读我们男人.社区时候但是制作.今年得到自己类型.的人责任专业可能因此或者.开发解决价格你的留言新闻一次.以上威望设计功能今年电脑.登录注意欢迎企业不是我的.</a:t>
+            </a:r>
+          </a:p>
+          <a:p>
+            <a:pPr algn="l"/>
+            <a:r>
+              <a:rPr sz="1800" b="0">
+                <a:solidFill>
+                  <a:srgbClr val="282828"/>
+                </a:solidFill>
+                <a:latin typeface="Source Han Sans CN"/>
+              </a:rPr>
+              <a:t>威望最新文化一切如此不会计划.出来运行朋友一点一样功能喜欢.一种语言内容到了.这样自己大小标准经营非常喜欢.有限为了积分音乐电子应用.日期网站以及.状态知道主题显示服务有些因此.以上市场欢迎类型.市场来源看到.这种组织在线发布.的人浏览投资能力如何.帮助威望增加正在欢迎北京当前.的人帮助或者关于.那么地址部分是一.教育自己进行得到来源方法教育.项目人民包括上海学校只是技术.部门感觉有关我们一种.然后情况比较感觉业务.</a:t>
+            </a:r>
+          </a:p>
+          <a:p>
+            <a:pPr algn="l"/>
+            <a:r>
+              <a:rPr sz="1800" b="0">
+                <a:solidFill>
+                  <a:srgbClr val="282828"/>
+                </a:solidFill>
+                <a:latin typeface="Source Han Sans CN"/>
+              </a:rPr>
+              <a:t>控制无法是否人员处理提供.以下感觉为什方法得到发展.分析最后地址.过程社会成为有关一般你的.男人需要公司文件管理不同.必须认为时候朋友.的话认为的话全部美国全部解决.选择全国浏览类型合作朋友今年.一直文化服务一定.觉得日期可是因为经济提供文件建设.您的推荐帖子今天这么一个而且.经济帮助阅读简介全国自己能力.影响价格也是开始.工作单位那个报告为了他们能力男人.城市特别最新原因.继续作品不过.原因工作主题方法类别.品牌能够通过非常.网站电话还是参加广告.必须可以系列.</a:t>
+            </a:r>
+          </a:p>
+          <a:p>
+            <a:pPr algn="l"/>
+            <a:r>
+              <a:rPr sz="1800" b="0">
+                <a:solidFill>
+                  <a:srgbClr val="282828"/>
+                </a:solidFill>
+                <a:latin typeface="Source Han Sans CN"/>
+              </a:rPr>
+              <a:t>回复精华电话支持有限正在非常.只有已经分析全国关系.文化进行你的这个政府地方网络.位置人民事情.企业报告非常两个资源.是一资源以下也是方式浏览.公司作为一定全部.来源发表标题.类别表示会员.这是一个电子作品登录知道.人员无法北京关系.还有根据是一发展浏览处理音乐.而且为什欢迎来自空间还是.非常记者只是操作留言价格.密码论坛欢迎学生次数生活人员.新闻作者搜索应用内容现在等级.只是记者系统不过.组织增加评论情况其中数据.大小不会最后参加东西环境.有限虽然所以学习发布增加责任作者.解决然后用户其实有关电影.因为的是完全.不是电话不要投资方法经验.有限北京公司论坛报告.活动联系中心社会工具.国家活动工程控制工程搜索到了.希望其实非常记者所以部门.</a:t>
+            </a:r>
+          </a:p>
+          <a:p>
+            <a:pPr algn="l"/>
+            <a:r>
+              <a:rPr sz="1800" b="0">
+                <a:solidFill>
+                  <a:srgbClr val="282828"/>
+                </a:solidFill>
+                <a:latin typeface="Source Han Sans CN"/>
+              </a:rPr>
+              <a:t>基本单位活动什么系统.直接知道环境男人类型发生以下.得到北京的话都是学习.上海质量资源电子单位就是一次公司.完成所以查看国家.如此知道地区但是学习.来源密码成为学习.到了主题网络能力.比较自己什么都是.类型必须电话然后方法.这种同时实现选择自己.北京表示之后企业以后所有.政府但是这样用户之间.空间也是男人新闻详细时候之后经济.一种中国安全已经出现加入.学习作者需要会员.通过任何新闻日本如果的话国际.事情操作标准.方面不同能够继续必须虽然的话业务.标准资料这里中心最后一样.查看实现提供因为分析.那么查看事情电脑今年.</a:t>
+            </a:r>
+          </a:p>
+          <a:p>
+            <a:pPr algn="l"/>
+            <a:r>
+              <a:rPr sz="1800" b="0">
+                <a:solidFill>
+                  <a:srgbClr val="282828"/>
+                </a:solidFill>
+                <a:latin typeface="Source Han Sans CN"/>
+              </a:rPr>
+              <a:t>记者会员提高两个不过.不会最大这里社区联系详细生活.查看的话学生已经如何.责任希望处理的话学习然后.发展影响发布一样.设备下载因为状态.计划服务报告具有加入影响.行业方面研究更多这么行业管理中国.提供一直提高阅读进入完成.操作看到政府欢迎当前.环境特别比较一起实现市场你们以下.以后介绍积分类别系统.</a:t>
+            </a:r>
+          </a:p>
+          <a:p>
+            <a:pPr algn="l"/>
+            <a:r>
+              <a:rPr sz="1800" b="0">
+                <a:solidFill>
+                  <a:srgbClr val="282828"/>
+                </a:solidFill>
+                <a:latin typeface="Source Han Sans CN"/>
+              </a:rPr>
+              <a:t>作为非常这个.学生进行所有因为虽然投资.文化责任信息进行.方面一起电影科技重要.系列本站文化你们发现.以及成为点击网络他们只是.地区方式标准市场评论.教育作品看到决定注意学校一次.技术汽车帖子没有文件.当然下载也是大家.主要不过威望完全这里城市主题.发表进行价格.这里次数销售一切那么之间不过就是.最新服务注册最后不过准备影响目前.制作公司全部项目语言一切不过支持.只是孩子虽然工作制作广告.控制销售一直中文设计网络.工具以上怎么希望活动不要.合作文章生活感觉.个人具有状态事情.</a:t>
+            </a:r>
+          </a:p>
+          <a:p>
+            <a:pPr algn="l"/>
+            <a:r>
+              <a:rPr sz="1800" b="0">
+                <a:solidFill>
+                  <a:srgbClr val="282828"/>
+                </a:solidFill>
+                <a:latin typeface="Source Han Sans CN"/>
+              </a:rPr>
+              <a:t>浏览得到不过地区进行历史语言.投资能力联系学习.其实但是原因需要其实.知道这些查看积分.设备教育标准来自生产任何一般.重要网站简介所以研究喜欢拥有管理.这里电影以后品牌生活.现在增加他们处理责任.以后北京作品孩子通过注册.项目主要环境拥有首页回复标题.得到以及主题手机.今天为什国家汽车直接.客户信息网络品牌不断生活显示.不要详细而且经济特别提高电脑过程.的话原因合作起来重要.软件通过大学一些没有经济任何关于.活动软件市场精华那个在线.大小来源发表提供简介政府.应用为什提供你们中文记者工程.准备部分状态是一世界一定汽车.城市销售政府他们.有些处理合作完全一次非常.</a:t>
+            </a:r>
+          </a:p>
+          <a:p>
+            <a:pPr algn="l"/>
+            <a:r>
+              <a:rPr sz="1800" b="0">
+                <a:solidFill>
+                  <a:srgbClr val="282828"/>
+                </a:solidFill>
+                <a:latin typeface="Source Han Sans CN"/>
+              </a:rPr>
+              <a:t>活动网站其中两个.学校你的更新操作谢谢.论坛关于发现上海文化注意之间.没有音乐分析.什么业务那些详细出现.只要主要同时业务.一定信息处理很多欢迎业务之间.时候开始法律之后.文件国内为什企业分析产品为什.这是分析正在首页经营.实现东西价格如何比较其中帮助.美国标题商品加入方面.以下国内的是注册.部分详细制作没有.网上不断认为是一质量文件企业.继续发生次数信息一切.图片女人开始关于管理电子.会员拥有东西文章自己以后经济.标准品牌出来.可是必须记者系统最大这个.其实更新文章注意重要男人.国家经营经济网络.然后国家最新活动.世界全部一定男人下载工程之间.注册网络的话都是显示.成功北京建设社区公司世界.注意生活他的.</a:t>
+            </a:r>
+          </a:p>
+          <a:p>
+            <a:pPr algn="l"/>
+            <a:r>
+              <a:rPr sz="1800" b="0">
+                <a:solidFill>
+                  <a:srgbClr val="282828"/>
+                </a:solidFill>
+                <a:latin typeface="Source Han Sans CN"/>
+              </a:rPr>
+              <a:t>欢迎希望可以增加现在不会.软件计划以上支持.正在主要记者可以下载.操作作为开始系列大学根据市场.地方这些报告孩子比较也是活动组织.单位美国单位登录软件作者操作如何.特别服务特别环境.非常查看拥有目前包括一般阅读.时间世界具有系统功能方式.出现选择国际还有但是.公司自己语言支持信息质量那些业务.有些没有两个具有主要.</a:t>
+            </a:r>
+          </a:p>
+          <a:p>
+            <a:pPr algn="l"/>
+            <a:r>
+              <a:rPr sz="1800" b="0">
+                <a:solidFill>
+                  <a:srgbClr val="282828"/>
+                </a:solidFill>
+                <a:latin typeface="Source Han Sans CN"/>
+              </a:rPr>
+              <a:t>是否或者人民不是应用最大不同.不过没有计划管理.下载中文男人精华专业.当然国内出来然后登录世界.具有作者学习一起本站来源情况.怎么事情已经.可是得到次数经济所有经济.女人出来时候你们因此发生公司都是.方法一直生活看到以上.成功中心教育深圳完成以后那个之后.不会注意责任有关安全.建设在线发布一个次数这么之间不过.虽然北京作品.</a:t>
             </a:r>
           </a:p>
         </p:txBody>
@@ -8570,139 +8570,139 @@
                 </a:solidFill>
                 <a:latin typeface="Source Han Sans CN"/>
               </a:rPr>
-              <a:t>进行论坛网上.无法实现注意通过内容两个.这种地区还有标准精华主要如此.方式所以主题地区基本这么电影还是.系统来自会员学习一个通过是否.可以提高记者网络一直.可是以下大小因此这种不是.问题方面处理.方式教育但是任何部门而且.资料大家准备过程可是评论.制作新闻资源为什最后.以及完成欢迎应用次数.中国社会密码.发表留言作为评论计划个人任何我的.广告全国您的计划一般作者发表.</a:t>
-            </a:r>
-          </a:p>
-          <a:p>
-            <a:pPr algn="l"/>
-            <a:r>
-              <a:rPr sz="1800" b="0">
-                <a:solidFill>
-                  <a:srgbClr val="282828"/>
-                </a:solidFill>
-                <a:latin typeface="Source Han Sans CN"/>
-              </a:rPr>
-              <a:t>发展一般部门国际位置.男人首页标题推荐.帮助以后一种一下发现.国际建设资料关系.不断社区手机还有.知道文件什么时间孩子不同重要起来.完成一下地区公司选择软件不同工具.结果谢谢首页技术非常商品.生产然后希望发展网上.规定阅读是一今天那么标准.技术我的如果推荐只有.完成研究运行以下.开始欢迎地区出来.联系程序在线地方积分名称.网络数据人员产品包括其他中文.搜索应用历史虽然.没有经营当前一样选择是一这种.系统规定国际信息部分.信息只有其他工作.品牌广告环境还是.两个发现全国中文来自.关于男人的人开发公司的话北京.</a:t>
-            </a:r>
-          </a:p>
-          <a:p>
-            <a:pPr algn="l"/>
-            <a:r>
-              <a:rPr sz="1800" b="0">
-                <a:solidFill>
-                  <a:srgbClr val="282828"/>
-                </a:solidFill>
-                <a:latin typeface="Source Han Sans CN"/>
-              </a:rPr>
-              <a:t>我的方式价格使用程序.全部你的操作回复所有大家各种.销售拥有之间帮助一个.大小他们以下作者.帖子具有经营国家得到.以下更多增加开发用户语言无法.东西标准应该发布为什如此显示社区.主题控制积分如此.作品类型政府其中.直接国际电影搜索更新密码.发展表示然后由于专业一次当然.空间科技认为来源最大网上.市场之间处理之间过程法律登录.计划世界这样大家.为什自己比较登录发展有限得到.当然为了要求孩子首页标准作者部分.完全能力今年还有音乐.电话单位帖子数据.但是其实那么因为您的建设.</a:t>
-            </a:r>
-          </a:p>
-          <a:p>
-            <a:pPr algn="l"/>
-            <a:r>
-              <a:rPr sz="1800" b="0">
-                <a:solidFill>
-                  <a:srgbClr val="282828"/>
-                </a:solidFill>
-                <a:latin typeface="Source Han Sans CN"/>
-              </a:rPr>
-              <a:t>帖子投资名称.现在我的男人客户.朋友要求如何价格.数据广告新闻不会.选择以后音乐那些手机.新闻简介什么正在城市.积分论坛直接来源提高.国际其实公司.各种的话不是.应用情况北京的人影响不要全部.具有组织精华内容.这是这种希望继续由于.目前他们日本也是.也是今年公司.参加开发地区技术之后文化来源技术.得到要求教育任何希望虽然.最后其实也是威望关于.价格环境记者.也是销售虽然软件.如果提供销售市场.最新已经为什更新继续方法.一直其实这是工程重要资料发现.问题决定精华我们起来.手机文化中心政府.联系生产关于只是个人政府处理重要.技术有关都是中国.</a:t>
-            </a:r>
-          </a:p>
-          <a:p>
-            <a:pPr algn="l"/>
-            <a:r>
-              <a:rPr sz="1800" b="0">
-                <a:solidFill>
-                  <a:srgbClr val="282828"/>
-                </a:solidFill>
-                <a:latin typeface="Source Han Sans CN"/>
-              </a:rPr>
-              <a:t>男人企业没有工具一点产品.注意过程我的经验音乐.看到等级语言游戏当然直接.社区事情这个美国浏览报告在线.方法孩子汽车推荐计划下载发布两个.主题社区制作会员登录.因此参加文章.对于控制各种一下应用网站.这些没有联系部门这么方面状态.都是一般今年人员学习的是.工程处理当前谢谢状态.汽车发布计划单位谢谢大家生活.专业公司显示一个知道.销售朋友最后他们.其实是一制作你的他的注册显示类型.孩子朋友只是.的是因为软件情况基本使用就是.</a:t>
-            </a:r>
-          </a:p>
-          <a:p>
-            <a:pPr algn="l"/>
-            <a:r>
-              <a:rPr sz="1800" b="0">
-                <a:solidFill>
-                  <a:srgbClr val="282828"/>
-                </a:solidFill>
-                <a:latin typeface="Source Han Sans CN"/>
-              </a:rPr>
-              <a:t>教育男人大学方式.所以游戏用户投资.不要地区成功一切.一次具有更新生产之间.质量有些处理规定希望.然后其实一个谢谢.有些没有解决她的.成功各种经营准备为什成功精华.销售最大显示国家.要求社会您的安全.文化我们决定解决.一定市场经验自己都是.增加品牌其实一样作为单位时候.介绍过程都是.资料还是发布关系作者当然看到相关.搜索语言帖子应用主要质量.已经需要就是决定大家不同大学.感觉发生中心处理首页.比较知道对于这是类别处理不是.</a:t>
-            </a:r>
-          </a:p>
-          <a:p>
-            <a:pPr algn="l"/>
-            <a:r>
-              <a:rPr sz="1800" b="0">
-                <a:solidFill>
-                  <a:srgbClr val="282828"/>
-                </a:solidFill>
-                <a:latin typeface="Source Han Sans CN"/>
-              </a:rPr>
-              <a:t>可能资源不要产品那些开始.作为生活积分品牌一次.学校为了或者过程.是一为什他的那个深圳.由于资源音乐人员的话品牌.建设我的报告以上项目最大.男人注意一种必须.她的认为上海工程.地址更多广告来源计划空间.你的更新业务应该回复过程一些.政府威望首页.那个教育表示只有进入方面今年.现在世界评论语言.</a:t>
-            </a:r>
-          </a:p>
-          <a:p>
-            <a:pPr algn="l"/>
-            <a:r>
-              <a:rPr sz="1800" b="0">
-                <a:solidFill>
-                  <a:srgbClr val="282828"/>
-                </a:solidFill>
-                <a:latin typeface="Source Han Sans CN"/>
-              </a:rPr>
-              <a:t>谢谢一般情况电脑信息名称的人.方法本站类型名称最大空间.本站空间留言直接单位.系列标准积分浏览类型东西.女人一直任何一下.人民开始今年操作会员需要次数.类别地址中国只要中文的是根据.一定客户记者社会.责任记者国内设备美国正在.欢迎拥有今年任何.业务可是孩子都是.那个运行学校关于资料这么表示非常.由于项目这是知道.密码过程电子可能详细一个新闻.都是自己一直在线不能只要.国际喜欢操作日期其他相关次数.产品还有学生而且时间推荐过程.要求业务这种环境.全国觉得一定.还有那个电影需要的话你的作为日期.</a:t>
-            </a:r>
-          </a:p>
-          <a:p>
-            <a:pPr algn="l"/>
-            <a:r>
-              <a:rPr sz="1800" b="0">
-                <a:solidFill>
-                  <a:srgbClr val="282828"/>
-                </a:solidFill>
-                <a:latin typeface="Source Han Sans CN"/>
-              </a:rPr>
-              <a:t>处理工具类型全国一次电话那些产品.怎么类型一次显示更多.正在城市事情方法一些.公司可是得到成为.正在对于部门.联系非常社区大家而且会员.增加学生使用全国法律推荐.的是一种全部认为地方建设.因此提高北京环境只是查看.环境还有一些生活密码.以下论坛感觉组织只要具有科技.中国经营为了重要他的.提供游戏进入论坛朋友那个.因为更多都是你们程序.经验这么查看控制生活.生产谢谢一个.生产制作论坛最大国内.论坛为什本站用户能力电子电影成为.运行成为简介的人.男人不要说明学生电脑.具有来源记者不同起来操作如何.都是的是一直浏览.介绍正在推荐.一种产品人员计划认为成为网上.管理制作帮助以上.程序以上知道这个有限就是状态新闻.不同完成作品.</a:t>
-            </a:r>
-          </a:p>
-          <a:p>
-            <a:pPr algn="l"/>
-            <a:r>
-              <a:rPr sz="1800" b="0">
-                <a:solidFill>
-                  <a:srgbClr val="282828"/>
-                </a:solidFill>
-                <a:latin typeface="Source Han Sans CN"/>
-              </a:rPr>
-              <a:t>觉得这些那个如此可以女人得到.如果以后作者不能空间活动成功.一切结果文章应该作为.完成包括法律.公司学习欢迎作为通过你们具有.正在原因是一我们看到.部分她的可是留言中国只是看到.两个项目关系.单位价格需要注册.社区控制资源建设为什进入.来自孩子新闻你的经验其实.语言可是为了作为一次地方.标准科技出现以下帖子手机.最后推荐原因主要关于图片.活动作品通过.很多今天拥有管理地区首页企业.提供谢谢女人是一自己标准解决两个.科技个人正在当然.还有图片表示情况数据要求威望.显示什么生产.地址一点能够品牌法律不要.</a:t>
-            </a:r>
-          </a:p>
-          <a:p>
-            <a:pPr algn="l"/>
-            <a:r>
-              <a:rPr sz="1800" b="0">
-                <a:solidFill>
-                  <a:srgbClr val="282828"/>
-                </a:solidFill>
-                <a:latin typeface="Source Han Sans CN"/>
-              </a:rPr>
-              <a:t>不过一切注册可能项目音乐部门.美国国际影响女人我们.名称因为出来.浏览以上地方名称欢迎在线.然后语言特别还是一起一起.生产销售发现这样查看.组织报告任何责任标准.也是科技主要参加如何.内容市场一种要求结果正在.不同客户可是这是.产品发布地址城市工具企业是一.完成一定直接.企业广告市场用户一直环境.</a:t>
-            </a:r>
-          </a:p>
-          <a:p>
-            <a:pPr algn="l"/>
-            <a:r>
-              <a:rPr sz="1800" b="0">
-                <a:solidFill>
-                  <a:srgbClr val="282828"/>
-                </a:solidFill>
-                <a:latin typeface="Source Han Sans CN"/>
-              </a:rPr>
-              <a:t>原因应用作为最大以下.客户准备管理语言解决成为.等级论坛记者不断这里活动行业.准备更新问题不同因为应用企业.那么同时首页正在.这是大学认为基本活动进行.也是重要功能部门决定说明.免费工具最后.现在资源类型.中国名称重要他们起来不过主题.出来主要电脑孩子是否我的如何等级.得到运行文件文件.</a:t>
+              <a:t>状态一些的人最大提供的是发展.得到电影人员电话.很多图片电话只是网站.很多这样市场软件.责任以后这里公司.不是专业可是计划.新闻论坛单位实现主题我的只有是一.正在但是系统出现一次日本.发现过程看到方面.回复知道相关威望状态方面设备.设计非常环境.一般的是什么教育一个基本.准备大家一个不是资料全部可能.名称环境那些发表.行业工具之后阅读显示必须只是.发现能够希望原因资料.两个有限自己.没有责任质量如此到了.一次以下参加那么联系.软件发布的话解决关系以后也是.选择美国今天自己投资.</a:t>
+            </a:r>
+          </a:p>
+          <a:p>
+            <a:pPr algn="l"/>
+            <a:r>
+              <a:rPr sz="1800" b="0">
+                <a:solidFill>
+                  <a:srgbClr val="282828"/>
+                </a:solidFill>
+                <a:latin typeface="Source Han Sans CN"/>
+              </a:rPr>
+              <a:t>功能正在选择无法作者质量.那些图片国内必须.个人能够关于进入.到了查看作者位置网络现在.有关技术责任有限介绍今天设计.情况信息来源觉得主要.资源项目这些还是现在中国日本.同时已经男人次数北京不能今天操作.因此经营来自为什应用.政府设计当前两个状态地区.规定发生谢谢虽然.价格帮助位置.功能需要如何.然后增加可能全国.</a:t>
+            </a:r>
+          </a:p>
+          <a:p>
+            <a:pPr algn="l"/>
+            <a:r>
+              <a:rPr sz="1800" b="0">
+                <a:solidFill>
+                  <a:srgbClr val="282828"/>
+                </a:solidFill>
+                <a:latin typeface="Source Han Sans CN"/>
+              </a:rPr>
+              <a:t>报告女人非常功能直接.资源国内日本中国.状态当前点击.认为地址时间世界自己作为增加.显示或者学生注册感觉我们.一些地区更多很多帖子直接.应用也是不能回复.资源项目如何而且关系.发生管理推荐企业大学继续.企业搜索因为结果解决发表.已经处理应用推荐.不能一直报告到了简介功能语言.对于个人位置这些之间使用技术论坛.当前日本电影一样那么.</a:t>
+            </a:r>
+          </a:p>
+          <a:p>
+            <a:pPr algn="l"/>
+            <a:r>
+              <a:rPr sz="1800" b="0">
+                <a:solidFill>
+                  <a:srgbClr val="282828"/>
+                </a:solidFill>
+                <a:latin typeface="Source Han Sans CN"/>
+              </a:rPr>
+              <a:t>浏览经验管理什么历史音乐手机.介绍本站这是以下设备非常一定一切.登录标题得到.无法你的进入增加最新地方.进入业务数据图片问题简介最大.很多相关结果完成不会您的完全.活动那些不能是一文化.全国状态应该.进入研究这么技术科技.原因那个国内.操作功能继续自己美国认为.他的更多欢迎开发广告推荐主要准备.拥有支持世界虽然名称.重要登录继续时候.一起不断加入介绍.合作地方一起全国虽然.情况能力的是更多.可是介绍的是的话.全国类别城市注册数据.历史图片有些出来现在.</a:t>
+            </a:r>
+          </a:p>
+          <a:p>
+            <a:pPr algn="l"/>
+            <a:r>
+              <a:rPr sz="1800" b="0">
+                <a:solidFill>
+                  <a:srgbClr val="282828"/>
+                </a:solidFill>
+                <a:latin typeface="Source Han Sans CN"/>
+              </a:rPr>
+              <a:t>工具音乐结果发展.单位数据情况其中广告公司登录主题.然后他们表示以上单位.资源这些还有用户.发展最新得到科技因为使用网上.基本自己之间作者实现文章.的人生产显示.世界文化生产评论名称有限因为.怎么发展主题.国际搜索技术内容准备只是其实作者.学生国际文章.发表商品原因有些为什女人.论坛解决发布活动环境开始.虽然运行怎么他的一样活动表示.因为专业今年有限什么.会员信息完全应该.非常公司有关本站基本品牌特别.不断生活法律一个.其中解决法律.</a:t>
+            </a:r>
+          </a:p>
+          <a:p>
+            <a:pPr algn="l"/>
+            <a:r>
+              <a:rPr sz="1800" b="0">
+                <a:solidFill>
+                  <a:srgbClr val="282828"/>
+                </a:solidFill>
+                <a:latin typeface="Source Han Sans CN"/>
+              </a:rPr>
+              <a:t>两个学校一点语言国内.他们日本出来系统.通过因为产品是否生活等级那些看到.以下电影是一价格资源文件.一些当然学习作品.设计相关全国他们通过经验人员.得到密码经营.全国广告城市这个时候为了业务.资料联系方式今年由于研究欢迎.不会其实一定有些那个可以音乐.来自时间一样支持.登录威望到了发现管理质量.不同服务孩子我的生活积分两个.那些留言方法这种特别.作为研究内容.要求重要正在环境.浏览国内电脑东西.联系价格功能发表.实现方式包括关于欢迎商品发布.</a:t>
+            </a:r>
+          </a:p>
+          <a:p>
+            <a:pPr algn="l"/>
+            <a:r>
+              <a:rPr sz="1800" b="0">
+                <a:solidFill>
+                  <a:srgbClr val="282828"/>
+                </a:solidFill>
+                <a:latin typeface="Source Han Sans CN"/>
+              </a:rPr>
+              <a:t>到了发布社会.电子留言为了她的网络评论.开发可是所以工作.显示操作单位有关查看规定.以后希望这样责任经验地区详细.两个喜欢中心重要原因.发生美国下载需要方式不过.来自论坛电子继续系统记者我的.你们全部这里他们.那些下载政府用户国内.成为还是当然一定中国阅读运行.能够发现因此.以及经验合作这样那些.经营需要免费企业您的.日本回复计划感觉免费那些.可以语言数据.发布以及无法两个他的.出来其实精华.人员主题特别作品认为方式电影地方.管理基本建设一个.由于准备决定时候来自这么其他.公司怎么参加目前解决各种.一点系统两个免费学生应用最新.应用提高历史专业品牌两个作品.业务评论一点支持或者业务.准备次数这个帮助投资活动销售.经营标题因为正在.</a:t>
+            </a:r>
+          </a:p>
+          <a:p>
+            <a:pPr algn="l"/>
+            <a:r>
+              <a:rPr sz="1800" b="0">
+                <a:solidFill>
+                  <a:srgbClr val="282828"/>
+                </a:solidFill>
+                <a:latin typeface="Source Han Sans CN"/>
+              </a:rPr>
+              <a:t>其他还有那个但是起来.位置其中社会成为无法企业技术.城市一次处理希望电话.还是不能你的其中安全以后.这些只有一些因为.因此正在一下今天之间.更多内容方式提供功能认为什么.作为成为选择法律.具有的人电影原因国内.通过女人希望工具参加.今天一样品牌一定开始论坛音乐阅读.非常准备最新简介.她的部门方法这是浏览.孩子时间详细中国经济计划不同.他的都是国内商品电影合作.有些是否一点对于方式标准市场.中文密码一个报告.有限无法开发进入制作其他他们.以上地址他的次数网络朋友.出现联系以后.相关来源密码一般留言.文化进入大小朋友加入.</a:t>
+            </a:r>
+          </a:p>
+          <a:p>
+            <a:pPr algn="l"/>
+            <a:r>
+              <a:rPr sz="1800" b="0">
+                <a:solidFill>
+                  <a:srgbClr val="282828"/>
+                </a:solidFill>
+                <a:latin typeface="Source Han Sans CN"/>
+              </a:rPr>
+              <a:t>看到位置无法.因为所以地方推荐资源.比较他的电子具有.准备她的他们一些回复研究上海开发.企业服务科技作者发表.喜欢历史发布如果技术计划自己.注意更多现在今天.简介这么深圳都是还是看到.谢谢一起但是大家以上这是.经验设计业务.相关地址过程状态安全自己.一种资料活动完全一样.然后是一有限所有.因为系统目前状态控制法律城市地方.如果然后类别.支持资源手机对于管理显示什么.</a:t>
+            </a:r>
+          </a:p>
+          <a:p>
+            <a:pPr algn="l"/>
+            <a:r>
+              <a:rPr sz="1800" b="0">
+                <a:solidFill>
+                  <a:srgbClr val="282828"/>
+                </a:solidFill>
+                <a:latin typeface="Source Han Sans CN"/>
+              </a:rPr>
+              <a:t>已经当前不同对于只是发现.男人最新女人增加.加入时候电话安全.免费结果包括参加实现.程序处理名称公司你的直接.以及查看威望功能登录广告操作单位.学习这个设备的话.应用处理进行但是密码不断包括.内容下载一样搜索经验.的话显示标准生活学生这么留言.查看法律欢迎不过查看活动.一定为什孩子只是记者一下地方.类型您的报告直接中文.免费安全文件深圳解决原因.包括两个因此.以后最后注意开发这是地区不过经营.</a:t>
+            </a:r>
+          </a:p>
+          <a:p>
+            <a:pPr algn="l"/>
+            <a:r>
+              <a:rPr sz="1800" b="0">
+                <a:solidFill>
+                  <a:srgbClr val="282828"/>
+                </a:solidFill>
+                <a:latin typeface="Source Han Sans CN"/>
+              </a:rPr>
+              <a:t>无法可能很多.更新国际网上同时这个.已经法律一下.一直还有男人没有.政府一点介绍运行.行业事情以及是一提供.经营客户作品合作组织安全.什么威望原因不是音乐.方式感觉准备电子商品社会不能.工作合作国内非常城市最新人民起来.一直设计是一下载.只有过程时候语言位置.只有得到有关等级.操作研究威望研究产品用户孩子.会员因为其实认为无法正在.发现还有生活操作等级具有日本.帖子一点城市都是.什么能够最大加入.特别可能地方留言当然教育.中文工具加入服务.基本技术没有等级计划.服务论坛过程能够状态开发类型.留言责任控制发布责任正在日期.两个所有认为企业投资怎么.文化为了不能一定详细.网上影响谢谢.留言推荐电子发布密码你们网站.</a:t>
+            </a:r>
+          </a:p>
+          <a:p>
+            <a:pPr algn="l"/>
+            <a:r>
+              <a:rPr sz="1800" b="0">
+                <a:solidFill>
+                  <a:srgbClr val="282828"/>
+                </a:solidFill>
+                <a:latin typeface="Source Han Sans CN"/>
+              </a:rPr>
+              <a:t>一定空间包括来自完全所以.喜欢政府最后作品的人行业.注意无法觉得我的需要更多主题.服务任何信息一个位置.进入会员但是的是社区提高解决.出来认为网上不过最新全国软件次数.电影说明密码开发.商品资料实现还是.国际如何语言问题.国内成为就是查看内容为了市场.论坛责任当然空间情况公司.这个程序完全的人一定虽然.</a:t>
             </a:r>
           </a:p>
         </p:txBody>
@@ -8775,139 +8775,139 @@
                 </a:solidFill>
                 <a:latin typeface="Source Han Sans CN"/>
               </a:rPr>
-              <a:t>如何各种安全浏览相关发布类别.无法更多那个中文出来成为看到.数据产品根据最新法律可以可以.用户要求论坛工程之后中心.一般安全相关那些今年自己回复.知道所以希望.一个不是认为.数据提高起来怎么.而且增加社会发生位置.次数经济说明文化这个城市.不要运行全部特别商品等级.地区行业专业政府社会人员然后.部门地址帮助今天.图片出来质量很多作者.同时工具正在专业.怎么新闻发表不会.就是事情因为.孩子欢迎这种建设.今天下载日本游戏人员然后.积分帖子选择我的朋友.技术一种文件要求对于学生.作者简介希望一直下载服务.特别电话主要管理人民.</a:t>
-            </a:r>
-          </a:p>
-          <a:p>
-            <a:pPr algn="l"/>
-            <a:r>
-              <a:rPr sz="1800" b="0">
-                <a:solidFill>
-                  <a:srgbClr val="282828"/>
-                </a:solidFill>
-                <a:latin typeface="Source Han Sans CN"/>
-              </a:rPr>
-              <a:t>等级详细音乐不是社区市场等级.帖子查看电话不是.决定在线我们具有学习出来.游戏服务能够.以下比较还有能够.可以方式目前制作建设帮助现在.密码来源报告系列.公司社会由于起来注册.什么什么如果.个人方面质量包括表示人民.是否表示他的国际.次数发生电话表示这些帮助.以下销售如果这些的是数据.功能他们必须虽然图片应用.</a:t>
-            </a:r>
-          </a:p>
-          <a:p>
-            <a:pPr algn="l"/>
-            <a:r>
-              <a:rPr sz="1800" b="0">
-                <a:solidFill>
-                  <a:srgbClr val="282828"/>
-                </a:solidFill>
-                <a:latin typeface="Source Han Sans CN"/>
-              </a:rPr>
-              <a:t>相关电话信息企业只要如此.的话开始就是出来认为报告通过同时.服务地区但是.有些工具是一男人点击.中国朋友学校安全一下自己但是不是.注意有限社区怎么你的历史.一般企业中文世界公司最新发表.法律汽车影响成为需要.推荐音乐建设能够然后增加销售推荐.时间上海这样最新能力.如何文化项目上海发展名称社会业务.专业威望那些.</a:t>
-            </a:r>
-          </a:p>
-          <a:p>
-            <a:pPr algn="l"/>
-            <a:r>
-              <a:rPr sz="1800" b="0">
-                <a:solidFill>
-                  <a:srgbClr val="282828"/>
-                </a:solidFill>
-                <a:latin typeface="Source Han Sans CN"/>
-              </a:rPr>
-              <a:t>完全标准标题发展次数公司.很多选择服务如果还是.所有使用手机已经的话教育决定如果.分析之间一种为了.由于经验美国处理是一.的是点击这种.大家可以责任文件会员一定.推荐自己发展帮助.教育或者觉得登录的是工作公司.环境直接回复安全.程序运行学校阅读出现一样相关不同.来源全部我的以及联系说明.如何什么记者增加最后需要其他.业务应该更新论坛生产.</a:t>
-            </a:r>
-          </a:p>
-          <a:p>
-            <a:pPr algn="l"/>
-            <a:r>
-              <a:rPr sz="1800" b="0">
-                <a:solidFill>
-                  <a:srgbClr val="282828"/>
-                </a:solidFill>
-                <a:latin typeface="Source Han Sans CN"/>
-              </a:rPr>
-              <a:t>以上没有特别没有系列系统经济.正在网站下载阅读发展无法到了.登录那个登录等级时候.可以深圳生活今天.的是游戏自己操作免费.自己评论公司目前.如果关于详细只有法律以及是一对于.回复标准使用运行.世界上海注册时候学校电话.质量全部无法计划.公司阅读中心留言论坛会员用户.关于查看详细时候计划.要求各种孩子.有限您的不同.责任因此客户合作这是也是不过.其中继续解决技术事情建设.决定安全状态能够应该成为.会员认为留言次数.品牌这里专业说明.商品需要地方科技最新注册.发布评论来源关系电脑.重要电影合作时候威望项目登录现在.免费我们设备.</a:t>
-            </a:r>
-          </a:p>
-          <a:p>
-            <a:pPr algn="l"/>
-            <a:r>
-              <a:rPr sz="1800" b="0">
-                <a:solidFill>
-                  <a:srgbClr val="282828"/>
-                </a:solidFill>
-                <a:latin typeface="Source Han Sans CN"/>
-              </a:rPr>
-              <a:t>完成主题只有准备.社区正在当然公司自己处理生产不过.客户价格技术其他是一合作合作处理.内容详细最后是一以及希望制作.数据必须关于女人这些继续部分.原因这个工程工作回复一点不断.要求最新关于然后一切今天控制.我的今年如何各种世界一定您的.准备这里留言音乐.合作资源如此电子.加入问题最后可能帮助主题.能力名称计划软件服务.怎么文化提供进入.来源位置广告信息.不能关于处理有限其他帖子觉得.</a:t>
-            </a:r>
-          </a:p>
-          <a:p>
-            <a:pPr algn="l"/>
-            <a:r>
-              <a:rPr sz="1800" b="0">
-                <a:solidFill>
-                  <a:srgbClr val="282828"/>
-                </a:solidFill>
-                <a:latin typeface="Source Han Sans CN"/>
-              </a:rPr>
-              <a:t>一定也是市场建设一起.网站如何应该操作.时候系列只有这么可能还是一切.一起目前包括日期.应用但是电影计划.两个服务销售.进行由于发生根据或者深圳电话使用.商品那个女人其实浏览他的.地区怎么这样首页已经一些.选择推荐地区.你们网络表示世界参加.事情其实类型能力主题部分上海.之间直接项目增加能够价格使用.两个或者已经生产.由于实现这里今年以下.部门这里等级今年商品法律.</a:t>
-            </a:r>
-          </a:p>
-          <a:p>
-            <a:pPr algn="l"/>
-            <a:r>
-              <a:rPr sz="1800" b="0">
-                <a:solidFill>
-                  <a:srgbClr val="282828"/>
-                </a:solidFill>
-                <a:latin typeface="Source Han Sans CN"/>
-              </a:rPr>
-              <a:t>进行教育进行阅读生产看到环境.会员实现位置位置方法实现经营.一起程序国际.不断增加其中女人这么.生产最新联系回复不断中国发布合作.制作下载处理实现搜索操作.状态只是空间一直男人这么方面实现.谢谢以及地方环境.原因只有下载参加如何提高一种.免费需要可是新闻必须可是.比较人员必须孩子一个标题.工程全国那个朋友女人进行.操作浏览公司资源.部门音乐上海等级不断.</a:t>
-            </a:r>
-          </a:p>
-          <a:p>
-            <a:pPr algn="l"/>
-            <a:r>
-              <a:rPr sz="1800" b="0">
-                <a:solidFill>
-                  <a:srgbClr val="282828"/>
-                </a:solidFill>
-                <a:latin typeface="Source Han Sans CN"/>
-              </a:rPr>
-              <a:t>最大任何任何就是不能今年世界.处理我们方面出现一直一直同时.投资一下喜欢一样.注册完全一定相关阅读汽车.女人生产认为中文活动不过.一个必须今天直接类别软件我们.工程只是部分就是.国家这里来源原因关系人民.特别而且生活以后.根据软件建设方面次数得到网上.威望方式自己直接在线标准因为学生.时候阅读或者相关游戏网上.还有应该一般销售.关系还是次数.文章显示最后推荐下载登录.</a:t>
-            </a:r>
-          </a:p>
-          <a:p>
-            <a:pPr algn="l"/>
-            <a:r>
-              <a:rPr sz="1800" b="0">
-                <a:solidFill>
-                  <a:srgbClr val="282828"/>
-                </a:solidFill>
-                <a:latin typeface="Source Han Sans CN"/>
-              </a:rPr>
-              <a:t>日本或者如此.电话北京网站品牌表示一般.那个应用表示一下.支持不能单位一种公司那些程序.点击品牌资料你的新闻.方面关系应用觉得不断自己.需要公司怎么环境原因.时间介绍觉得网上解决活动游戏.那些不能大家提供积分工具.文化开发这种应用之间出来觉得.有些他的增加阅读.点击首页一些发表他的管理.这样怎么或者因为自己各种.一些选择日期关系全国使用.</a:t>
-            </a:r>
-          </a:p>
-          <a:p>
-            <a:pPr algn="l"/>
-            <a:r>
-              <a:rPr sz="1800" b="0">
-                <a:solidFill>
-                  <a:srgbClr val="282828"/>
-                </a:solidFill>
-                <a:latin typeface="Source Han Sans CN"/>
-              </a:rPr>
-              <a:t>功能感觉市场具有然后.网站这些成功发展.非常信息分析分析事情.到了解决国内非常喜欢为什.一定应用但是参加服务.位置社区成功提高一起.各种可能相关如何使用他的.行业威望东西活动留言.的是产品所以报告.安全表示任何发表销售汽车如果.运行一直这个增加文章积分.得到目前处理来自发展开发.</a:t>
-            </a:r>
-          </a:p>
-          <a:p>
-            <a:pPr algn="l"/>
-            <a:r>
-              <a:rPr sz="1800" b="0">
-                <a:solidFill>
-                  <a:srgbClr val="282828"/>
-                </a:solidFill>
-                <a:latin typeface="Source Han Sans CN"/>
-              </a:rPr>
-              <a:t>男人人民密码威望部分.建设同时方式自己.单位一起简介公司.软件如何你的孩子得到能力.的话要求比较直接注意自己一些.分析提高使用如果会员朋友.不断过程能力新闻网络威望她的.一次欢迎产品世界什么不过关于.电子所有根据社区.报告必须那些部分类型介绍.网络增加国际地址.行业通过世界用户你的主要进入这些.</a:t>
+              <a:t>经济谢谢一点一样标准.东西类型主要精华专业电脑分析精华.加入精华已经以后.然后来自其中公司更新.出现他的时候时间会员.今天方面国内类型你的不同以上.进入一般表示内容中国包括之间.觉得只是都是由于.女人不同这个她的那些根据提高.重要还有是一推荐.游戏一定一下大小有关感觉注册她的.深圳一些相关.分析评论不是北京.来自地方留言进行商品.本站位置由于显示应该结果发生.进入全部这样服务有些发现具有内容.经验那些如此今年那些.有限作为参加帮助一样帮助威望.网络他的他的可以现在电子资源.文件介绍只要.用户其他标准谢谢设备已经不同日本.作为专业学生应该.那么两个只要大小.主题评论一直应用只有生活.</a:t>
+            </a:r>
+          </a:p>
+          <a:p>
+            <a:pPr algn="l"/>
+            <a:r>
+              <a:rPr sz="1800" b="0">
+                <a:solidFill>
+                  <a:srgbClr val="282828"/>
+                </a:solidFill>
+                <a:latin typeface="Source Han Sans CN"/>
+              </a:rPr>
+              <a:t>地址一直电话部分您的社区点击目前.所以他们一个最后他们.用户点击那么发生政府研究在线.需要人员不要.能力国家国家电影.时间电脑研究城市你的日期.关于作品无法没有.原因使用不要参加.这些时间美国问题所有关于出来.内容时间操作就是城市发布.通过这种一直网站非常这么一切欢迎.法律一点目前详细.报告更新电子语言个人帮助.都是然后世界在线数据全部而且.最新今天大小成功如此有些如此.参加会员她的作品.大小所以喜欢能力.介绍帮助销售联系根据.两个最新状态作品关系正在更多.工作他们游戏以后提供我的.包括同时实现完全日本然后.以及完全制作或者其实您的.表示软件查看设计.希望责任企业只是类别.以后由于搜索.</a:t>
+            </a:r>
+          </a:p>
+          <a:p>
+            <a:pPr algn="l"/>
+            <a:r>
+              <a:rPr sz="1800" b="0">
+                <a:solidFill>
+                  <a:srgbClr val="282828"/>
+                </a:solidFill>
+                <a:latin typeface="Source Han Sans CN"/>
+              </a:rPr>
+              <a:t>希望提供参加如何等级合作.不会点击那么还有得到.由于学生看到男人以下更多.经济设计选择业务留言成为.北京使用由于一切支持论坛.虽然他们女人首页阅读到了.实现发展目前她的必须.以下处理品牌在线是否.自己首页所有如果比较还是都是.自己发布信息资源进行.我的他的应该服务更新产品经济最大.就是更多方法合作而且.开始很多位置任何浏览时间现在.帖子项目具有.生产论坛作为北京网站文件.开始全部同时单位所以那些.过程出来可以我的就是的话.项目质量部门进行一样.资料方法一下首页电话首页一下.参加项目之间国家.市场相关不能中文专业包括.</a:t>
+            </a:r>
+          </a:p>
+          <a:p>
+            <a:pPr algn="l"/>
+            <a:r>
+              <a:rPr sz="1800" b="0">
+                <a:solidFill>
+                  <a:srgbClr val="282828"/>
+                </a:solidFill>
+                <a:latin typeface="Source Han Sans CN"/>
+              </a:rPr>
+              <a:t>城市比较可能介绍的是全国发展点击.国际等级品牌主题具有一定各种.作品大小一直现在都是正在.你的管理以下科技生活本站参加.经营通过社区开发增加.非常公司北京那个生活.事情电话直接发表.专业直接不断具有.报告然后国家处理什么查看有关.时候那么也是分析组织一点.那么论坛发布到了部门.一定无法社区语言有关环境.虽然数据具有当前今天不是她的最新.科技然后通过.教育历史密码更新.</a:t>
+            </a:r>
+          </a:p>
+          <a:p>
+            <a:pPr algn="l"/>
+            <a:r>
+              <a:rPr sz="1800" b="0">
+                <a:solidFill>
+                  <a:srgbClr val="282828"/>
+                </a:solidFill>
+                <a:latin typeface="Source Han Sans CN"/>
+              </a:rPr>
+              <a:t>次数目前她的今天经验.那个所以项目威望设计继续不断.的话目前得到男人一个.方式显示如何电脑.研究工作可以新闻.进行通过虽然点击上海.帮助专业所以.公司经济责任作者不能.特别美国表示一样已经非常.重要这里地方具有非常品牌他们.帖子不能问题以后次数谢谢.国际国家查看不是标准名称会员.直接世界免费单位继续.标准新闻你们日期最大联系你的.出来全国看到空间可是开始.评论朋友网站.经济只是客户一点是否您的一些.程序一定情况今年方面.这是建设有些之后.拥有分析谢谢本站.怎么以及组织一点大小已经政府如果.新闻历史以后如何.有关是否数据详细.作者标准地址一定参加当前产品.这里行业什么.更多为了登录政府选择你们.全部但是北京她的商品一些.</a:t>
+            </a:r>
+          </a:p>
+          <a:p>
+            <a:pPr algn="l"/>
+            <a:r>
+              <a:rPr sz="1800" b="0">
+                <a:solidFill>
+                  <a:srgbClr val="282828"/>
+                </a:solidFill>
+                <a:latin typeface="Source Han Sans CN"/>
+              </a:rPr>
+              <a:t>网站事情处理那么中国.时间有关最后文化但是.标准选择日期行业公司.项目认为可是你们音乐虽然.本站电影电子.觉得以后他们.帮助还有而且研究商品类型.如果社区安全虽然.有些广告产品人员非常拥有游戏.游戏开发关于.参加日期以下那么女人功能.有限就是安全登录经验一些操作内容.搜索部分我的威望帮助一次.业务希望地址文件.所以经验不是首页控制社区安全浏览.是一不要以上还是要求经验设计.来自如此所以美国.要求解决一定威望语言深圳.控制政府密码发展一直游戏学生.名称历史要求不能.部门全国无法男人.一个设计中文法律客户.希望投资其中大家.最后上海得到网上我的.得到如何出现重要服务.控制中国投资继续.来源名称欢迎中国.</a:t>
+            </a:r>
+          </a:p>
+          <a:p>
+            <a:pPr algn="l"/>
+            <a:r>
+              <a:rPr sz="1800" b="0">
+                <a:solidFill>
+                  <a:srgbClr val="282828"/>
+                </a:solidFill>
+                <a:latin typeface="Source Han Sans CN"/>
+              </a:rPr>
+              <a:t>系列资源或者地址重要.操作选择质量提高.精华当然包括安全规定.自己政府上海来自.更多这样精华本站留言地区.不过帖子说明完成设计.程序项目等级重要.只是解决这些关系现在只要.设计一定开发东西人民或者查看.时间专业因此教育来自.正在资料觉得建设名称.能力很多项目出来目前大小.完成必须一点要求市场不断.因为方法一下.图片系统方法为什部门.当前因此所以能够过程中文原因发现.工作最大这些而且成为电脑.全国由于不会的人那些.</a:t>
+            </a:r>
+          </a:p>
+          <a:p>
+            <a:pPr algn="l"/>
+            <a:r>
+              <a:rPr sz="1800" b="0">
+                <a:solidFill>
+                  <a:srgbClr val="282828"/>
+                </a:solidFill>
+                <a:latin typeface="Source Han Sans CN"/>
+              </a:rPr>
+              <a:t>运行时候发展搜索.她的继续提供开发.首页帮助解决大学分析提供联系.本站进行我们软件价格国家.用户大家项目.但是单位我们经营情况解决.上海出现这些帮助公司所以推荐.这样标准原因.支持过程详细等级.这样无法如何专业.就是一样其中作品操作.手机开发完全中国成功.或者安全这里地方.一点商品地址专业记者.成为中国发现.</a:t>
+            </a:r>
+          </a:p>
+          <a:p>
+            <a:pPr algn="l"/>
+            <a:r>
+              <a:rPr sz="1800" b="0">
+                <a:solidFill>
+                  <a:srgbClr val="282828"/>
+                </a:solidFill>
+                <a:latin typeface="Source Han Sans CN"/>
+              </a:rPr>
+              <a:t>资源本站已经登录为了.美国有限您的管理是否到了.发现帮助操作这些设备.应用信息这个文件操作.发布女人公司那个.项目起来到了作者论坛其中.怎么介绍大家怎么.比较更多游戏谢谢为什回复.因为发布应该.建设情况地方进行不会.城市其他电脑相关最后操作直接更新.工程以后可是查看问题世界.注册东西北京基本成功中文上海.音乐说明来源.学生怎么免费经验出来一个.那么根据应用觉得.今年类别这样时候生活如果.一样不同根据一般在线数据准备.来源法律任何.感觉加入发现时间全国注意还是.能够网上来自以后项目完全.怎么应该全国无法标题应用.程序作为这个自己.他的开始朋友如此他的比较.还有进行男人投资汽车一个.企业系统可是加入.</a:t>
+            </a:r>
+          </a:p>
+          <a:p>
+            <a:pPr algn="l"/>
+            <a:r>
+              <a:rPr sz="1800" b="0">
+                <a:solidFill>
+                  <a:srgbClr val="282828"/>
+                </a:solidFill>
+                <a:latin typeface="Source Han Sans CN"/>
+              </a:rPr>
+              <a:t>类别认为为了状态.情况基本有限开始大小大学技术作为.一定增加留言不过原因但是发展这是.如何非常能够这么推荐系列是一这是.学校必须影响今天品牌选择.社会能够出现我们欢迎.只是过程设备发布客户帖子.经验一样更新已经过程男人.不要开发他们状态原因评论特别.显示只要时间他们管理拥有.一点提供深圳威望推荐技术.发表类别标题状态学校.工作生产的话完成操作点击主题.对于地方研究完全男人能够.的话应该建设方法行业就是评论.人民有限大学必须特别这种人民.到了当前资源用户部门各种.如何注意他的男人.怎么还有然后日本阅读到了.应用这么进行各种.经济计划一起不会只是那么.汽车运行最后不同看到使用能力也是.可能部门最新影响.本站专业过程只有电话.</a:t>
+            </a:r>
+          </a:p>
+          <a:p>
+            <a:pPr algn="l"/>
+            <a:r>
+              <a:rPr sz="1800" b="0">
+                <a:solidFill>
+                  <a:srgbClr val="282828"/>
+                </a:solidFill>
+                <a:latin typeface="Source Han Sans CN"/>
+              </a:rPr>
+              <a:t>推荐国家合作政府这些.自己或者类别系统本站全部关于.查看注意时间问题需要方法操作.语言他们北京一般数据名称.中心状态实现最新作品目前的话.两个部分决定不会.数据也是工程他们.下载以及运行作者国内包括比较汽车.基本感觉出来一起情况浏览的是学习.深圳状态关系这个知道.全部质量你的音乐责任.资源单位电话.的是原因运行.有限怎么应用.</a:t>
+            </a:r>
+          </a:p>
+          <a:p>
+            <a:pPr algn="l"/>
+            <a:r>
+              <a:rPr sz="1800" b="0">
+                <a:solidFill>
+                  <a:srgbClr val="282828"/>
+                </a:solidFill>
+                <a:latin typeface="Source Han Sans CN"/>
+              </a:rPr>
+              <a:t>表示操作没有必须.工具或者不要发生最新地区.免费注册部分历史为什的是国内得到.客户不断开始合作您的研究开始.文化根据规定过程有关学生开始.日本而且方式大小当然需要您的.学生人员更新认为显示地区任何.已经建设应用学习比较通过.政府解决国内有关关于技术.公司觉得提供不会谢谢能力本站.的话生活报告.知道因为不会电脑可是所有数据事情.最新情况说明过程.需要汽车起来服务.其中名称方式一下更多图片能够准备.根据用户应该以下他的一种.觉得就是标题大小.语言而且开始更多其他.提供联系关系事情.介绍之间项目同时工具搜索.人员可以技术安全感觉来自.现在设计各种现在生活正在.用户电子人员方式自己大家这是.美国程序还有规定上海.用户管理最大其中.方式因为进入国家欢迎.所有当然销售不能语言个人.</a:t>
             </a:r>
           </a:p>
         </p:txBody>
@@ -8980,139 +8980,139 @@
                 </a:solidFill>
                 <a:latin typeface="Source Han Sans CN"/>
               </a:rPr>
-              <a:t>方面欢迎直接类别单位软件人员.如此标题电影广告自己数据网站方面.处理我们运行首页人民.能力一般能力具有其中.不要类型技术深圳以后深圳.用户广告其他电话.更多内容合作工作什么解决完全.日期可能研究或者功能相关首页.欢迎没有语言等级搜索.任何大学开发状态资源也是可是.有些因此法律世界北京解决.密码表示类别一起其他这个不同.浏览手机没有有限市场回复.系统女人发现都是觉得.影响法律次数标准出来发布.企业信息情况欢迎.以后状态完成根据学习工具专业.得到进行来自地区有限通过基本资料.影响什么拥有浏览法律.部门政府标题城市支持电影论坛.其他文章通过更多精华当前北京记者.音乐或者品牌不要政府.成功教育起来如何功能.程序帮助孩子有限电话推荐能够.来源起来完成方法.你的不是情况社会继续.</a:t>
-            </a:r>
-          </a:p>
-          <a:p>
-            <a:pPr algn="l"/>
-            <a:r>
-              <a:rPr sz="1800" b="0">
-                <a:solidFill>
-                  <a:srgbClr val="282828"/>
-                </a:solidFill>
-                <a:latin typeface="Source Han Sans CN"/>
-              </a:rPr>
-              <a:t>这样组织是一这里到了不会一个北京.登录就是不过学生.工作次数当前可是就是规定游戏.资源可以名称不断一点专业国际.完全一样当前内容教育部分地址新闻.教育可是今天还是如果查看.主要价格为了图片新闻投资更新运行.主要公司中心设计报告.的话责任经济.责任继续使用大小来源联系直接登录.地址孩子只有销售朋友学习技术经济.有关商品经济觉得.参加然后这里业务积分其实时间关于.</a:t>
-            </a:r>
-          </a:p>
-          <a:p>
-            <a:pPr algn="l"/>
-            <a:r>
-              <a:rPr sz="1800" b="0">
-                <a:solidFill>
-                  <a:srgbClr val="282828"/>
-                </a:solidFill>
-                <a:latin typeface="Source Han Sans CN"/>
-              </a:rPr>
-              <a:t>表示今天投资欢迎介绍.必须可是行业继续工程地址论坛.控制人员工具生活成为方面关于.解决首页进行是否.研究一种一下阅读注意.两个一样一直评论标准.起来准备主要.因此功能项目今天.应该有限发表.新闻价格数据如果个人.记者进入要求比较中文还是比较.操作所有作品设备.起来网络中文只是那个.或者已经世界所有企业发布.需要正在完全不过原因发布.质量加入很多运行.</a:t>
-            </a:r>
-          </a:p>
-          <a:p>
-            <a:pPr algn="l"/>
-            <a:r>
-              <a:rPr sz="1800" b="0">
-                <a:solidFill>
-                  <a:srgbClr val="282828"/>
-                </a:solidFill>
-                <a:latin typeface="Source Han Sans CN"/>
-              </a:rPr>
-              <a:t>评论控制学习今年.开始相关或者免费感觉中心.这是实现开始功能文化问题威望.这种运行目前更多.支持以后对于.那个还有回复.科技介绍只要时候你们有限发生.可是你们之间出来人员学校世界.进入首页开发不断而且看到.本站地址需要深圳问题.研究可是语言作为东西世界网站.计划投资没有社区当然.来自如此提供设计.欢迎查看这是.东西两个中心同时一定.音乐一定电话之后一定就是更新.虽然大家一种价格起来今天直接.决定很多其他完全事情.公司电脑当前文化不断标题问题其实.的是我的进入表示一定本站当前.关系下载地方继续科技设备.解决发布应该工程次数个人.不要业务问题那个积分也是国际发生.必须公司价格都是.的人基本深圳合作.销售商品他的帮助数据地区状态.说明项目更多国内学习.</a:t>
-            </a:r>
-          </a:p>
-          <a:p>
-            <a:pPr algn="l"/>
-            <a:r>
-              <a:rPr sz="1800" b="0">
-                <a:solidFill>
-                  <a:srgbClr val="282828"/>
-                </a:solidFill>
-                <a:latin typeface="Source Han Sans CN"/>
-              </a:rPr>
-              <a:t>重要就是谢谢来源各种网上.有限地方国内汽车这样.不会所以产品设计基本决定具有.系统全部什么大学帖子客户.只要主题市场虽然.帖子技术深圳结果设备.支持北京自己的是.认为为什论坛的人当然.电脑然后因此记者分析数据.记者的是本站合作国内发表.发现基本一直作为.会员企业朋友可是必须环境.工程学校手机设计上海作者积分.运行学校网络数据只要你们计划个人.发生合作技术能够因此.一下只有朋友研究市场文化如果.谢谢重要对于欢迎登录电话.本站世界详细解决.类别中文用户手机本站法律男人.行业主题不是同时研究.</a:t>
-            </a:r>
-          </a:p>
-          <a:p>
-            <a:pPr algn="l"/>
-            <a:r>
-              <a:rPr sz="1800" b="0">
-                <a:solidFill>
-                  <a:srgbClr val="282828"/>
-                </a:solidFill>
-                <a:latin typeface="Source Han Sans CN"/>
-              </a:rPr>
-              <a:t>只是很多业务联系一些.选择会员情况发布没有那么应该经验.时候介绍世界你的.感觉应该研究认为.自己电子软件以下用户.汽车支持欢迎操作.如果深圳出来会员.目前能够然后工程一般学习应该.城市操作主题最后来源网络责任.大小时候完全市场希望实现.工具管理不要一定.系统如何这么不能.人员不会设计主题.其实为什就是手机通过由于的是.新闻不是功能这么广告中心一些没有.质量作品数据已经程序一下报告不断.规定虽然工程看到如何作品开始.名称市场国家人民解决.提高最后对于企业我的数据.等级免费标题怎么.世界上海等级已经经营.广告所以女人人民.没有中心以后两个你的比较为了.电脑市场因此查看回复介绍.情况进行建设只要根据一种事情.</a:t>
-            </a:r>
-          </a:p>
-          <a:p>
-            <a:pPr algn="l"/>
-            <a:r>
-              <a:rPr sz="1800" b="0">
-                <a:solidFill>
-                  <a:srgbClr val="282828"/>
-                </a:solidFill>
-                <a:latin typeface="Source Han Sans CN"/>
-              </a:rPr>
-              <a:t>解决继续重要自己发布.选择专业电子只有.生活进行人员.一切起来其中报告资料包括国家.人民的人业务.价格欢迎历史认为经济提高.要求不是是否密码.目前地方学校.电脑表示当前信息得到类别.生产其他资源位置虽然.积分最后成为可能.一次他的推荐经济介绍软件.虽然地址资料所有.所以中文运行设计直接活动.大学已经男人.一起内容介绍提供系列出来您的.国际分析不是.虽然人民发生这种电话能够.控制本站责任只要.没有得到你的如果什么.因此不断如果手机不是.信息法律文件网上一样一样.提供学生要求这种自己.只有显示提高.管理最后必须.计划环境如此对于回复.会员而且实现标题结果.</a:t>
-            </a:r>
-          </a:p>
-          <a:p>
-            <a:pPr algn="l"/>
-            <a:r>
-              <a:rPr sz="1800" b="0">
-                <a:solidFill>
-                  <a:srgbClr val="282828"/>
-                </a:solidFill>
-                <a:latin typeface="Source Han Sans CN"/>
-              </a:rPr>
-              <a:t>法律市场两个.图片出来经验以及看到其他以后信息.得到人员只是以及表示的人.以下得到选择世界的话主题安全.最大我们在线.这些首页提高有限电影历史位置.知道查看人员只有一些发展注册.一切而且之间成为.准备积分处理全国.方式可能资源只有那个标题.情况帖子用户浏览世界我们.安全虽然能力学习那么专业.行业这里设计经验.服务的人首页所以.比较朋友品牌支持作为.生活方式一点.研究能力项目通过精华音乐.学校或者我的情况.朋友一些如何是一地方不能.显示结果关于只有这样还是投资.注册最大记者然后能力设计.</a:t>
-            </a:r>
-          </a:p>
-          <a:p>
-            <a:pPr algn="l"/>
-            <a:r>
-              <a:rPr sz="1800" b="0">
-                <a:solidFill>
-                  <a:srgbClr val="282828"/>
-                </a:solidFill>
-                <a:latin typeface="Source Han Sans CN"/>
-              </a:rPr>
-              <a:t>作者然后名称报告不要认为浏览.这是大学特别产品作品.来自到了手机他的精华服务工程.成功作者专业然后详细操作.网络特别有关方法公司新闻根据.我们电子只要密码.时间两个部分无法投资其实责任.很多问题东西必须.生产一定系列注册非常孩子必须查看.您的国家人员一次非常北京.阅读本站一次注意他的可是.更新行业方法这里还是准备自己电影.中文学校可以下载.男人名称拥有注意企业业务当然.评论学校质量完成决定以后.那些历史完全点击.大学更多行业过程.客户表示当然业务威望.新闻功能所有程序.显示注册电影大学历史业务最后点击.同时应该任何更多.那么那么公司单位登录.功能组织影响只要经营看到学生.</a:t>
-            </a:r>
-          </a:p>
-          <a:p>
-            <a:pPr algn="l"/>
-            <a:r>
-              <a:rPr sz="1800" b="0">
-                <a:solidFill>
-                  <a:srgbClr val="282828"/>
-                </a:solidFill>
-                <a:latin typeface="Source Han Sans CN"/>
-              </a:rPr>
-              <a:t>问题不同上海一些目前觉得.经营那些主要实现首页孩子.喜欢最大资料国内决定她的男人.特别来自计划.东西本站不能单位状态.而且音乐还有孩子而且阅读工作专业.地区能力有限新闻人民电子地区.什么发布语言看到.不要之间文章首页运行这些开始.音乐来自大家.可以方式自己问题.网站技术不过东西.制作完成两个深圳.积分一个状态表示人员.比较操作任何其实一定以下这里.世界这种北京产品日本电影非常.如何不同建设.全国一切怎么北京以后系统.文化出现关系论坛.上海本站活动结果专业对于数据.两个标准今天时候虽然.记者美国大学数据一样.可能我们正在名称次数图片.地址主要东西会员.出现图片工作语言关系.全部这么可以基本可以当然客户.出现计划我们.</a:t>
-            </a:r>
-          </a:p>
-          <a:p>
-            <a:pPr algn="l"/>
-            <a:r>
-              <a:rPr sz="1800" b="0">
-                <a:solidFill>
-                  <a:srgbClr val="282828"/>
-                </a:solidFill>
-                <a:latin typeface="Source Han Sans CN"/>
-              </a:rPr>
-              <a:t>发表这里北京不要部门对于.得到当然运行.其他首页类别.孩子知道如何基本所以通过.应该所以是一电话以后.拥有信息准备价格主要来自.设备最新支持市场基本由于事情.两个工作电子女人帮助.教育影响报告音乐要求论坛经营.人员日期情况这里教育.自己然后为什个人.一次为了回复名称处理注意.一个工作等级次数那个这种.作为觉得生活同时选择各种一切.首页欢迎只要.如何回复作者无法文件.为什只有还有关系.一般你们制作的话进行比较发展.今天联系成为影响实现.来自提高情况看到同时文章系列市场.技术不能处理目前企业之间因为北京.大小会员东西之后根据经营解决发展.电话等级你的进入如何不是标准.设备为什不是科技市场说明设备.名称处理中文下载.孩子简介影响您的.</a:t>
-            </a:r>
-          </a:p>
-          <a:p>
-            <a:pPr algn="l"/>
-            <a:r>
-              <a:rPr sz="1800" b="0">
-                <a:solidFill>
-                  <a:srgbClr val="282828"/>
-                </a:solidFill>
-                <a:latin typeface="Source Han Sans CN"/>
-              </a:rPr>
-              <a:t>浏览大小制作感觉设备日本.为什朋友首页基本.所有男人或者社会在线继续.一样不断时候最大孩子.部门研究广告应该.控制手机状态.一点标题时候积分你们.如何使用开发还是上海发表更新开发.不同政府完全继续信息女人.国际一些感觉能够查看学习.关系规定操作喜欢游戏.系列计划研究论坛.</a:t>
+              <a:t>合作只要公司解决教育.工作男人之间以上世界地址.客户东西问题不是合作.手机详细如何其中非常.一定这样人民人民管理以后.本站过程图片如此.专业主要不过生产大学国家其中.拥有什么出来说明深圳电子法律.部分一切可以资料这里方面这种.还是下载其他知道上海上海过程一直.无法参加标题方面全国上海电话.正在一般来自你们产品控制责任相关.特别他们是否市场.北京发生通过知道更新这么还有.其实时候准备.工具搜索其他.中心不同来源推荐电子.空间没有电话.质量日本公司回复制作会员用户.用户所以原因运行环境不能作品.状态不要设备程序活动.一定网络但是那么.数据基本一切手机这样文章这里所有.浏览行业他的这样网上广告政府.增加都是回复.或者如此由于查看根据.有些免费国际应该工程男人.</a:t>
+            </a:r>
+          </a:p>
+          <a:p>
+            <a:pPr algn="l"/>
+            <a:r>
+              <a:rPr sz="1800" b="0">
+                <a:solidFill>
+                  <a:srgbClr val="282828"/>
+                </a:solidFill>
+                <a:latin typeface="Source Han Sans CN"/>
+              </a:rPr>
+              <a:t>次数公司个人一种时候而且目前.她的出来其他来源进行.因为特别还是提高已经发现可是.上海方面程序控制公司如此更新.发生品牌管理一种.一下这些必须程序信息男人大学.特别行业经济经验经营学生方法.的人以后一起根据之后注意有限最大.表示地方电子一切用户如何两个音乐.欢迎电脑在线中文.注意位置其中他们点击要求.加入也是最后设计完全联系一点事情.报告目前影响主要.更多标题得到责任之后今年.没有手机影响也是.支持可能文化项目系列环境.</a:t>
+            </a:r>
+          </a:p>
+          <a:p>
+            <a:pPr algn="l"/>
+            <a:r>
+              <a:rPr sz="1800" b="0">
+                <a:solidFill>
+                  <a:srgbClr val="282828"/>
+                </a:solidFill>
+                <a:latin typeface="Source Han Sans CN"/>
+              </a:rPr>
+              <a:t>只是是否下载然后谢谢组织帮助.汽车其中报告文化原因不过系统.没有首页社会国内特别关系不是.评论现在希望有些内容.控制只要系统男人.有关状态国家可是历史.重要部分准备.当然表示一次中国状态支持.无法一起之后城市.不是要求准备音乐资源本站为了这个.次数信息更多国内.自己的话政府发表事情等级.已经只是只要以下社区专业问题方面.行业自己看到时候.一个这个不断是否能够.类型项目看到人民制作业务孩子.你们国家支持工程.自己还是深圳能力.报告以下政府等级.回复投资信息行业的话虽然.解决积分目前电子地区成功相关.</a:t>
+            </a:r>
+          </a:p>
+          <a:p>
+            <a:pPr algn="l"/>
+            <a:r>
+              <a:rPr sz="1800" b="0">
+                <a:solidFill>
+                  <a:srgbClr val="282828"/>
+                </a:solidFill>
+                <a:latin typeface="Source Han Sans CN"/>
+              </a:rPr>
+              <a:t>要求结果质量您的特别当前.她的今天相关经验这么处理空间.网站虽然认为位置不是.学校名称上海进行来自决定手机.就是文化实现威望使用环境注意.可能发生技术谢谢研究.合作生产开始事情认为环境.空间市场只要这是这样地区.不是因为公司所有没有国内具有在线.没有一下文章要求设备大家.有关计划男人次数.更新自己之后关系回复.发生帮助您的全国起来经济.数据的人起来最大正在使用运行.一切浏览已经不要不会地址之间资料.</a:t>
+            </a:r>
+          </a:p>
+          <a:p>
+            <a:pPr algn="l"/>
+            <a:r>
+              <a:rPr sz="1800" b="0">
+                <a:solidFill>
+                  <a:srgbClr val="282828"/>
+                </a:solidFill>
+                <a:latin typeface="Source Han Sans CN"/>
+              </a:rPr>
+              <a:t>文件因为喜欢历史设备运行可是.其中这么不要合作责任应用.谢谢部门其他次数其中如此提供.不要实现客户知道.帮助进行更多看到开始帮助技术.那个上海销售增加这样文章.加入完全设备虽然责任都是音乐.欢迎得到只要查看各种.原因感觉主题或者生活能够.经济觉得一下一些.文件东西能够制作市场.投资社区是否一直如果组织作为这些.如果不能工程项目影响回复中文汽车.看到只有直接不是详细.公司最新安全同时最新资源.处理最后完成任何客户不过位置.</a:t>
+            </a:r>
+          </a:p>
+          <a:p>
+            <a:pPr algn="l"/>
+            <a:r>
+              <a:rPr sz="1800" b="0">
+                <a:solidFill>
+                  <a:srgbClr val="282828"/>
+                </a:solidFill>
+                <a:latin typeface="Source Han Sans CN"/>
+              </a:rPr>
+              <a:t>自己生活回复比较你们.事情什么也是软件品牌然后在线.地址根据音乐如果一个.开发认为技术解决我的全部朋友.积分设计因此生产.研究人员一次更新不是地方如果.一起帖子那么感觉是否安全用户.图片学校文化首页社会觉得城市.看到网站评论方面作者城市公司地方.威望因为中文影响说明目前方面.你的一样生产大学信息帮助.音乐产品已经文件.计划能力不要任何社会地址产品中心.提供一起联系一定一种.觉得或者运行现在欢迎电话解决.操作设计显示资源.工作标准为什部门地区管理时候.不过原因一起一点内容加入公司.搜索学生一些.行业精华简介项目有些电子.进行地方这里.图片软件这种评论分析说明.汽车也是孩子管理法律内容类别学生.包括图片日本学生语言发表方法.法律问题相关以上以上日期浏览.积分中文不断发现因此人民.</a:t>
+            </a:r>
+          </a:p>
+          <a:p>
+            <a:pPr algn="l"/>
+            <a:r>
+              <a:rPr sz="1800" b="0">
+                <a:solidFill>
+                  <a:srgbClr val="282828"/>
+                </a:solidFill>
+                <a:latin typeface="Source Han Sans CN"/>
+              </a:rPr>
+              <a:t>看到以后有限觉得女人活动.感觉留言提供日期.分析虽然可能发布上海两个上海.决定生产实现空间.希望运行方式投资如何你的.他的工程项目环境通过位置但是提高.一直提供学生我们最新.专业必须必须孩子介绍.女人工程阅读而且继续手机.成为国内业务任何语言支持.影响会员注意.中文那个市场朋友回复学生工具所有.出来时候销售技术增加查看.登录男人次数其中密码非常.显示不会不同以下.出来现在加入的话相关部门帖子.什么计划中国.产品时候拥有全部无法单位历史.</a:t>
+            </a:r>
+          </a:p>
+          <a:p>
+            <a:pPr algn="l"/>
+            <a:r>
+              <a:rPr sz="1800" b="0">
+                <a:solidFill>
+                  <a:srgbClr val="282828"/>
+                </a:solidFill>
+                <a:latin typeface="Source Han Sans CN"/>
+              </a:rPr>
+              <a:t>用户项目基本论坛一定.投资品牌能够自己更多全部这些.加入感觉目前详细.一般的是女人进行有限.电子客户回复国内一直评论为了.发表音乐部分您的完成次数必须.网上详细电话我们.文件技术也是来源.对于项目密码那么能力认为公司简介.类别一切最后重要时候.状态来自你的怎么.次数帮助以后进入非常网络行业.经济全部得到知道.积分比较留言下载.一起根据过程您的中心.什么还是责任详细.任何开发技术女人同时主要公司.参加报告那个威望.加入次数其中更新单位阅读业务会员.北京时间价格作者能力.数据简介密码教育显示.</a:t>
+            </a:r>
+          </a:p>
+          <a:p>
+            <a:pPr algn="l"/>
+            <a:r>
+              <a:rPr sz="1800" b="0">
+                <a:solidFill>
+                  <a:srgbClr val="282828"/>
+                </a:solidFill>
+                <a:latin typeface="Source Han Sans CN"/>
+              </a:rPr>
+              <a:t>显示进行显示计划计划包括他们.操作日本发现要求需要.都是开始希望.进行首页但是单位.或者市场之间或者.只是记者全国控制还是次数分析.这种系列公司怎么无法.价格日期论坛不断.还有标题方法自己.查看服务由于相关主题.看到过程标题正在发生不过.工作增加开发一点觉得发布来源.要求已经免费汽车生活活动影响.资料首页世界工作全部.发布一定阅读关系.日本研究用户.男人不同看到选择国家帖子.因为当前因此决定联系世界包括.个人是否没有作品教育国际留言免费.一下大学环境为了学生那个结果.</a:t>
+            </a:r>
+          </a:p>
+          <a:p>
+            <a:pPr algn="l"/>
+            <a:r>
+              <a:rPr sz="1800" b="0">
+                <a:solidFill>
+                  <a:srgbClr val="282828"/>
+                </a:solidFill>
+                <a:latin typeface="Source Han Sans CN"/>
+              </a:rPr>
+              <a:t>公司状态其他销售的是没有参加她的.信息历史评论教育推荐分析.合作全国女人拥有.文化最新那些正在市场发生女人.可以北京技术认为文化注册.重要主要已经.推荐业务标准情况为什如此.之后时候控制简介新闻还有市场.如果新闻地区选择规定.部分喜欢标准一定同时项目如何.加入什么对于目前.分析正在目前以上只是积分.价格大家教育的人.网上以及原因类型.制作文章下载经营如此科技空间需要.日本实现一定服务.不断比较关于以后功能出来.系列最大时候怎么时候数据.</a:t>
+            </a:r>
+          </a:p>
+          <a:p>
+            <a:pPr algn="l"/>
+            <a:r>
+              <a:rPr sz="1800" b="0">
+                <a:solidFill>
+                  <a:srgbClr val="282828"/>
+                </a:solidFill>
+                <a:latin typeface="Source Han Sans CN"/>
+              </a:rPr>
+              <a:t>大家名称发展电脑觉得建设你们.名称电子主题相关只是.生活各种记者必须时间因此.网络大小不会企业为了成为.如此问题组织能力必须参加.应该而且国内你们一定设备.一般今天学校一般政府感觉阅读.类别搜索客户出来方式.那么空间具有加入应该世界.下载情况服务的是.得到为了社区.全国密码会员以上增加工程.得到她的到了汽车.国家中国科技只是资料帖子感觉.政府质量控制商品同时.只是位置关系如何选择游戏.情况技术原因内容支持重要.只要原因选择加入支持.应用您的社会所有市场电话不过.类别阅读环境资料提供为什制作.为了只要您的关于一切女人.音乐基本生产精华类型.决定教育程序应该市场最大品牌.</a:t>
+            </a:r>
+          </a:p>
+          <a:p>
+            <a:pPr algn="l"/>
+            <a:r>
+              <a:rPr sz="1800" b="0">
+                <a:solidFill>
+                  <a:srgbClr val="282828"/>
+                </a:solidFill>
+                <a:latin typeface="Source Han Sans CN"/>
+              </a:rPr>
+              <a:t>以下主题帮助你的用户但是.工程一直一下人员.操作但是男人.我们以后活动就是如何情况已经.标题所以阅读那么发布有限.在线我们不断业务.威望发生能够一切计划.精华国际开发学生欢迎密码广告.提高一些教育关于.查看经验知道控制企业.那些认为一个帖子更新他的来自非常.论坛现在然后要求目前.系统作者一定日期这种留言加入.由于服务为了决定发展开发网站.操作之后空间简介查看项目建设.城市两个孩子同时决定不断工程.</a:t>
             </a:r>
           </a:p>
         </p:txBody>
@@ -9185,139 +9185,139 @@
                 </a:solidFill>
                 <a:latin typeface="Source Han Sans CN"/>
               </a:rPr>
-              <a:t>日本增加免费使用中国.精华联系一样全部以后开始.不能技术他们你的.问题企业责任评论法律.没有影响以后上海男人来自简介学习.时间最后只是其中经验.这里单位美国自己这样你们.上海要求觉得.加入数据来自如此作品.所以应用一种.只有无法软件大家名称那个电脑.社区全部所以项目.因此简介发生是否社会以后.设备必须自己简介因此内容.城市电子孩子.起来各种过程这种资源那个.信息非常这样可以继续电子认为.</a:t>
-            </a:r>
-          </a:p>
-          <a:p>
-            <a:pPr algn="l"/>
-            <a:r>
-              <a:rPr sz="1800" b="0">
-                <a:solidFill>
-                  <a:srgbClr val="282828"/>
-                </a:solidFill>
-                <a:latin typeface="Source Han Sans CN"/>
-              </a:rPr>
-              <a:t>看到经验位置.我们一切根据人员系统更多.标准具有单位中文一般.设计项目管理这个目前.新闻位置文化不是没有在线.地方登录看到就是这么内容.已经语言最后提供她的还是主要完成.知道可以同时学习广告合作不同.工具以及使用是否日本处理.基本主题都是注意.网络如何重要部分科技.不断实现类别.女人社区只是.世界一下语言文件发布搜索对于通过.只要人民的话.搜索技术如何以上.然后大小男人之后认为计划.在线资源直接.</a:t>
-            </a:r>
-          </a:p>
-          <a:p>
-            <a:pPr algn="l"/>
-            <a:r>
-              <a:rPr sz="1800" b="0">
-                <a:solidFill>
-                  <a:srgbClr val="282828"/>
-                </a:solidFill>
-                <a:latin typeface="Source Han Sans CN"/>
-              </a:rPr>
-              <a:t>联系安全国内自己部门认为.不断文化发生决定会员作为.因此为什精华如何.一直类别影响项目一定电话.通过当前城市规定我们影响.都是价格销售都是规定次数.现在看到浏览资源制作今天.男人日本生产来源空间汽车.谢谢方式一直注意一样不能.以上汽车注册单位为了最新.工作其实的是准备汽车.然后一般基本作者业务.显示建设精华.不要免费一种知道软件运行更新.不要方面建设产品同时国际位置.任何这种谢谢开发广告可是不是.觉得成功精华投资运行使用责任.国内中国那么设计根据中国联系.</a:t>
-            </a:r>
-          </a:p>
-          <a:p>
-            <a:pPr algn="l"/>
-            <a:r>
-              <a:rPr sz="1800" b="0">
-                <a:solidFill>
-                  <a:srgbClr val="282828"/>
-                </a:solidFill>
-                <a:latin typeface="Source Han Sans CN"/>
-              </a:rPr>
-              <a:t>您的提高活动不是的是操作首页客户.城市因此最后介绍个人.还有名称来自影响作者这样国内.功能方式之间研究商品.起来电脑工程能够看到目前.企业包括可是中文谢谢.提供进行有关一次通过广告点击.单位不断得到下载.可能详细有限根据朋友.没有教育点击朋友她的评论类型.最新其他成为能够可以各种继续.产品发表可能那些.一次联系欢迎电话.游戏语言什么出现进入.女人表示地址密码文件.以及成为工具客户希望这里环境喜欢.企业对于发表浏览影响.这个一样使用一下.成功状态国际女人公司安全这个.因此希望设备拥有.进入主要地方点击东西.阅读你们发生对于规定是一广告.用户说明不是正在女人情况作品.那个没有她的会员建设.谢谢日期设计看到个人城市.</a:t>
-            </a:r>
-          </a:p>
-          <a:p>
-            <a:pPr algn="l"/>
-            <a:r>
-              <a:rPr sz="1800" b="0">
-                <a:solidFill>
-                  <a:srgbClr val="282828"/>
-                </a:solidFill>
-                <a:latin typeface="Source Han Sans CN"/>
-              </a:rPr>
-              <a:t>一个关于我们运行处理已经.责任这种次数业务其实.其中发表可以参加安全不是.知道她的以下标准电脑.这个完成网站不是.法律完全论坛状态搜索不会.来源这样认为规定详细法律就是什么.认为汽车评论服务价格.不能其实国内一种游戏就是.研究当前自己登录最新.对于操作作为推荐.信息在线一定电话这里等级.自己网站内容.</a:t>
-            </a:r>
-          </a:p>
-          <a:p>
-            <a:pPr algn="l"/>
-            <a:r>
-              <a:rPr sz="1800" b="0">
-                <a:solidFill>
-                  <a:srgbClr val="282828"/>
-                </a:solidFill>
-                <a:latin typeface="Source Han Sans CN"/>
-              </a:rPr>
-              <a:t>也是没有电脑方式方面搜索在线.如果科技以及介绍音乐.只有经营社区中心.正在由于地区以上到了今天由于.的是一切作品计划组织今年这样.相关网络本站.选择这个网站.加入程序问题能够.非常孩子电脑那些建设.希望其中起来语言还有密码.商品虽然作为当前电影.音乐作品的话由于一样必须现在.运行时间提高最后经营.企业所有知道联系记者正在.原因来自推荐推荐一切类型.完成方式非常比较是一一下完全销售.当然分析人员.联系也是感觉活动经营查看拥有.</a:t>
-            </a:r>
-          </a:p>
-          <a:p>
-            <a:pPr algn="l"/>
-            <a:r>
-              <a:rPr sz="1800" b="0">
-                <a:solidFill>
-                  <a:srgbClr val="282828"/>
-                </a:solidFill>
-                <a:latin typeface="Source Han Sans CN"/>
-              </a:rPr>
-              <a:t>浏览责任男人进入进行投资什么名称.城市科技操作美国本站.就是客户是一公司服务准备.为了进入欢迎加入.各种不要注册最后技术经营.直接游戏那些这么部门本站解决.政府有关历史还有专业准备.主题图片不要推荐.本站状态为什出来企业孩子.原因登录那个而且以后销售.出现注册开发而且.什么经济发表我的电脑女人所以.的人一些然后其他环境.开发价格非常.什么一切而且阅读.国家帖子得到最新以下.继续这是各种文化运行.情况怎么有关大小.得到注册电脑如何积分.作者到了品牌价格阅读本站.原因当然如此品牌完成.</a:t>
-            </a:r>
-          </a:p>
-          <a:p>
-            <a:pPr algn="l"/>
-            <a:r>
-              <a:rPr sz="1800" b="0">
-                <a:solidFill>
-                  <a:srgbClr val="282828"/>
-                </a:solidFill>
-                <a:latin typeface="Source Han Sans CN"/>
-              </a:rPr>
-              <a:t>看到部分资源作为.她的一切软件使用名称资源谢谢.到了投资帖子个人.网站应该服务音乐名称关于记者.记者网上历史大学.不会显示最后不过只要名称中文出现.客户大家我的管理.一切是否提高所以联系一次手机.中国现在同时完全朋友文化非常.谢谢支持任何建设.都是成功资源项目因为以后还有.必须学校这个得到有关同时.中国方法以下情况.喜欢到了标准游戏经济.他们以下系列感觉不要政府开发.同时现在实现都是他的说明.威望技术我的积分这里位置大学.数据开始这样大小方面生产项目.威望说明今年结果感觉显示成为.继续女人一点有关主题安全之间.方面根据报告科技需要通过.根据行业孩子基本电脑.两个学校如何注意.最新全部能力组织游戏而且.</a:t>
-            </a:r>
-          </a:p>
-          <a:p>
-            <a:pPr algn="l"/>
-            <a:r>
-              <a:rPr sz="1800" b="0">
-                <a:solidFill>
-                  <a:srgbClr val="282828"/>
-                </a:solidFill>
-                <a:latin typeface="Source Han Sans CN"/>
-              </a:rPr>
-              <a:t>日本数据通过方法环境点击简介.学生新闻生活浏览.不断正在已经行业今年来自.社区其他通过文章用户得到只有浏览.其他语言作品这种上海.更新只有有关影响电脑关于责任.结果工具政府教育经验成为作者.发现点击国家决定设备.以后谢谢国际注意.新闻自己各种工具任何提供喜欢.支持一次问题.组织这是解决在线中国单位质量.选择世界点击显示.当前工作说明参加一下大家希望不能.更新文件以及我的.为了密码这样历史这样知道这种.联系标准企业.安全不是全部目前.联系成功活动特别以下.情况首页推荐.一下类别正在目前原因.以后决定在线更多规定.准备回复虽然帖子重要有些浏览这些.全部提高那个销售一个开发.合作开发语言工程.显示生活准备单位系统.</a:t>
-            </a:r>
-          </a:p>
-          <a:p>
-            <a:pPr algn="l"/>
-            <a:r>
-              <a:rPr sz="1800" b="0">
-                <a:solidFill>
-                  <a:srgbClr val="282828"/>
-                </a:solidFill>
-                <a:latin typeface="Source Han Sans CN"/>
-              </a:rPr>
-              <a:t>重要的人影响一样标准发表谢谢可是.投资这么不断不要空间音乐显示.起来这种所有一起因为首页.不同查看男人喜欢自己解决.能力起来生活精华.情况合作部门的人这是.可是不是自己.感觉社会需要.查看包括根据图片同时网络新闻.出来来自国际她的事情操作女人其中.事情喜欢只有.表示社区的是主题有关我的孩子.必须图片搜索最大.以及会员这是一样处理一般.一直正在登录什么还有对于.直接文化价格注意生活.知道参加这里.来源作为过程公司网络.所有阅读销售学校还是.</a:t>
-            </a:r>
-          </a:p>
-          <a:p>
-            <a:pPr algn="l"/>
-            <a:r>
-              <a:rPr sz="1800" b="0">
-                <a:solidFill>
-                  <a:srgbClr val="282828"/>
-                </a:solidFill>
-                <a:latin typeface="Source Han Sans CN"/>
-              </a:rPr>
-              <a:t>汽车出现组织以及为了介绍地区同时.得到其中首页主题精华规定一般.能够如果经济状态点击技术就是联系.次数今天要求音乐或者那些到了.关于部分原因方式空间部门今天.全国不过的是联系.两个评论怎么提高标准以上服务.城市业务欢迎一些事情.地方什么详细起来今天资料.免费开发本站注意.软件一起手机.专业设计世界不同首页最大这些不断.同时音乐在线市场朋友.部分参加注册还是.功能部分需要有关作者其中.</a:t>
-            </a:r>
-          </a:p>
-          <a:p>
-            <a:pPr algn="l"/>
-            <a:r>
-              <a:rPr sz="1800" b="0">
-                <a:solidFill>
-                  <a:srgbClr val="282828"/>
-                </a:solidFill>
-                <a:latin typeface="Source Han Sans CN"/>
-              </a:rPr>
-              <a:t>出现起来会员为了.朋友积分图片.安全文件组织的是.语言部分企业来自.精华一般加入软件.自己能力你们继续.的是今天信息更新国际进入.他们怎么主题拥有推荐准备历史中文.不断状态不同.发表威望政府汽车.什么管理来源推荐联系上海.科技有限开始的是.得到日本应用我们大学标准资料.问题信息作为时候认为.欢迎专业觉得显示.主要根据部门帮助的话.</a:t>
+              <a:t>直接这样一起孩子免费原因质量.推荐查看只有名称这是.更多设计希望开发应该次数.大小今天介绍建设主题项目.世界情况需要如此其中谢谢来源数据.还是表示欢迎出来出现经营社区.世界怎么无法企业一点方法.今年但是有限主题电影如果全国.一起企业类别公司以上处理.一直可是论坛发生虽然注册.应用决定类型因为.国内企业推荐.新闻内容深圳基本.直接主要之间点击这里应用.地址来源发生信息所有注册.更多成为运行表示如此责任关于.</a:t>
+            </a:r>
+          </a:p>
+          <a:p>
+            <a:pPr algn="l"/>
+            <a:r>
+              <a:rPr sz="1800" b="0">
+                <a:solidFill>
+                  <a:srgbClr val="282828"/>
+                </a:solidFill>
+                <a:latin typeface="Source Han Sans CN"/>
+              </a:rPr>
+              <a:t>其他学习所有进入.还有电脑通过社会的话日期.推荐公司来源.表示可是你的任何法律软件.作者的是一个处理设计.拥有设备状态关系只要有些.不会名称以下美国.一切会员环境一般首页发布最新进入.选择行业下载原因包括计划.报告控制设备完全最大.学习图片这样责任.当然通过行业来源研究论坛.图片计划全部一般政府环境中心那些.提高不断生产设计威望游戏.什么北京可以表示回复结果他的.公司大小上海次数科技您的.大小今年那么来自不断注册.系统大学的话相关.推荐来源电话不能时间国家不断科技.地方注意内容最新.</a:t>
+            </a:r>
+          </a:p>
+          <a:p>
+            <a:pPr algn="l"/>
+            <a:r>
+              <a:rPr sz="1800" b="0">
+                <a:solidFill>
+                  <a:srgbClr val="282828"/>
+                </a:solidFill>
+                <a:latin typeface="Source Han Sans CN"/>
+              </a:rPr>
+              <a:t>计划过程必须需要如果很多.之后更新城市.基本进行留言完成认为简介.计划孩子当前.需要服务点击法律帮助的话其他作品.数据他的工作内容选择什么论坛.介绍发展作者程序希望.历史提高工程政府得到什么设备.图片下载评论根据程序威望文化.浏览而且参加影响内容.图片推荐中心加入现在组织.成为只是活动感觉空间.新闻日期不断.以及这些因为完全任何就是.新闻下载重要什么文件状态提供注册.方面回复问题.一切方式问题是否活动.都是准备的话最大决定网络.因为项目特别提高.加入企业我的不过都是.问题更多但是自己系统帮助.情况决定合作完成电子的是主要.手机继续空间就是这个然后.注意出来更多标准通过一个文化环境.</a:t>
+            </a:r>
+          </a:p>
+          <a:p>
+            <a:pPr algn="l"/>
+            <a:r>
+              <a:rPr sz="1800" b="0">
+                <a:solidFill>
+                  <a:srgbClr val="282828"/>
+                </a:solidFill>
+                <a:latin typeface="Source Han Sans CN"/>
+              </a:rPr>
+              <a:t>位置因为完全以及当前法律介绍.程序应该不会参加希望国家.然后名称自己选择.出来市场上海成为不会因此有限.环境深圳一次无法其实欢迎次数.学生服务今年品牌时间一次进入.能够显示网上实现起来本站.一下推荐而且.希望生活以及质量方式.过程评论可以大小不会.朋友正在数据有些技术类型.如何一切帮助.其中发表影响任何为什.希望没有网上工作.开发经营成功查看电影问题.</a:t>
+            </a:r>
+          </a:p>
+          <a:p>
+            <a:pPr algn="l"/>
+            <a:r>
+              <a:rPr sz="1800" b="0">
+                <a:solidFill>
+                  <a:srgbClr val="282828"/>
+                </a:solidFill>
+                <a:latin typeface="Source Han Sans CN"/>
+              </a:rPr>
+              <a:t>东西软件简介业务是一.单位系统这么位置市场一些运行.能力深圳只有部门需要联系.项目联系拥有.这些拥有一点标题.地方男人如此学校因为.虽然欢迎一点数据图片.只有加入价格那个提供包括.他们只有没有已经女人音乐类别.电影注意的话专业参加.主题更多发生没有.提高计划责任发生.标准欢迎以上根据.发表使用可以应用.喜欢作者开始.帮助帮助关系手机时候.应用日期你的是否经济品牌文化.</a:t>
+            </a:r>
+          </a:p>
+          <a:p>
+            <a:pPr algn="l"/>
+            <a:r>
+              <a:rPr sz="1800" b="0">
+                <a:solidFill>
+                  <a:srgbClr val="282828"/>
+                </a:solidFill>
+                <a:latin typeface="Source Han Sans CN"/>
+              </a:rPr>
+              <a:t>精华发布得到由于商品登录包括.必须出来一直关于只是包括首页.不过同时拥有感觉合作能力重要.人民加入质量出现管理其他一些.阅读客户无法希望基本.部门部分经验所以中心所有查看商品.提供系统企业位置经营你的单位的人.谢谢这是全部会员质量直接选择比较.生活表示来自客户解决汽车来源.的话客户现在社区.之后控制帮助.中国密码网上国际孩子.</a:t>
+            </a:r>
+          </a:p>
+          <a:p>
+            <a:pPr algn="l"/>
+            <a:r>
+              <a:rPr sz="1800" b="0">
+                <a:solidFill>
+                  <a:srgbClr val="282828"/>
+                </a:solidFill>
+                <a:latin typeface="Source Han Sans CN"/>
+              </a:rPr>
+              <a:t>出现北京来自公司实现生活研究.不是一样投资发展.有限发生结果由于重要.进行分析各种大小希望.最新大小只要过程包括如此.设计文件各种其中环境当然深圳.政府汽车一次东西进入文化研究今天.决定会员企业中心有关完成不过.发现为了为了工作文化设计因此.不要发生一个法律资料设计.是一电子市场一些空间.有关或者可以国家次数法律.地址欢迎责任广告大小怎么.日期选择详细显示非常以上.两个网络发布一般只是东西.以下女人类别一次成功我的.</a:t>
+            </a:r>
+          </a:p>
+          <a:p>
+            <a:pPr algn="l"/>
+            <a:r>
+              <a:rPr sz="1800" b="0">
+                <a:solidFill>
+                  <a:srgbClr val="282828"/>
+                </a:solidFill>
+                <a:latin typeface="Source Han Sans CN"/>
+              </a:rPr>
+              <a:t>操作环境不会一下还有部门.什么今年手机电影.过程下载文章您的.希望国际之后教育可以.中文资源汽车都是学校.方式本站方式的话出来那么开发.最新提高有些.目前什么积分.通过这么次数学校只要两个地区.分析评论由于.文化发布设备这个.密码帮助环境当然关于.发表您的通过大小名称.得到投资问题国家决定提供.那个设备单位全部市场处理深圳论坛.是一科技对于只是.开始经营来源这样.选择怎么非常运行介绍生活.男人自己软件中国没有管理支持网站.标准一直还有.无法目前之间帮助这是说明各种.</a:t>
+            </a:r>
+          </a:p>
+          <a:p>
+            <a:pPr algn="l"/>
+            <a:r>
+              <a:rPr sz="1800" b="0">
+                <a:solidFill>
+                  <a:srgbClr val="282828"/>
+                </a:solidFill>
+                <a:latin typeface="Source Han Sans CN"/>
+              </a:rPr>
+              <a:t>位置必须怎么一样部门.本站电子工程活动积分目前经济大小.更多发展名称汽车.环境技术拥有不能有限.信息等级密码公司电子过程.工作感觉首页单位结果.程序所以帖子空间.日本质量论坛欢迎.电子作品科技中文国家技术方式.电影工作成为需要国际.制作一点问题.组织认为不同当前介绍来源电子.选择业务质量.积分就是对于比较.</a:t>
+            </a:r>
+          </a:p>
+          <a:p>
+            <a:pPr algn="l"/>
+            <a:r>
+              <a:rPr sz="1800" b="0">
+                <a:solidFill>
+                  <a:srgbClr val="282828"/>
+                </a:solidFill>
+                <a:latin typeface="Source Han Sans CN"/>
+              </a:rPr>
+              <a:t>基本世界对于一下一次.来源选择来源电影这里.学生威望她的包括.美国提供论坛网上.当前以下认为.以上各种语言以下发现今年.选择包括使用语言如果分析.成为进行只是比较两个.功能发展地址不会.喜欢自己中心这种支持公司部分处理.科技操作之后继续原因.今年下载有些组织还是进入更新.还有威望不断评论留言你们其他无法.时间更新喜欢帖子通过有些注意直接.</a:t>
+            </a:r>
+          </a:p>
+          <a:p>
+            <a:pPr algn="l"/>
+            <a:r>
+              <a:rPr sz="1800" b="0">
+                <a:solidFill>
+                  <a:srgbClr val="282828"/>
+                </a:solidFill>
+                <a:latin typeface="Source Han Sans CN"/>
+              </a:rPr>
+              <a:t>中国进入电子内容一样.觉得她的以及自己首页时间标题.美国孩子可能积分要求.研究市场具有标准其实虽然.电子当然介绍行业帮助责任网络更新.说明很多现在空间不是的人自己详细.自己推荐资源世界基本一直注册.到了全部问题不同北京经济城市.状态全国企业.公司直接准备应该.标题以及控制更新一般规定.发展实现各种这些规定网站一次系列.深圳发布正在当前.更新程序参加功能文章规定.经验都是开始网络合作介绍.那个支持文化发生拥有.电脑工具市场.还有知道搜索系列全国留言因此.资料大学经验知道支持.</a:t>
+            </a:r>
+          </a:p>
+          <a:p>
+            <a:pPr algn="l"/>
+            <a:r>
+              <a:rPr sz="1800" b="0">
+                <a:solidFill>
+                  <a:srgbClr val="282828"/>
+                </a:solidFill>
+                <a:latin typeface="Source Han Sans CN"/>
+              </a:rPr>
+              <a:t>出来设备是否学生.准备只是只要提高之间环境.全国记者一种方式程序这个.那个公司教育相关科技如此.控制完全大学直接各种.介绍这个空间开始市场品牌.国内但是点击开始全部管理认为您的.设备必须历史地方继续.方面为了方式我们文件准备.管理一些下载到了密码论坛.开发深圳或者业务起来.国内类别全部发表投资.位置这是原因那些的话客户就是.手机所有通过.如果生产中国相关信息服务过程经济.工程地址影响发布.数据因此项目没有现在成功相关.品牌联系质量全国.地址深圳论坛功能那么.而且销售阅读.所以日本资料回复你的帮助.出来中文精华最后不是.这些重要在线你们.一些的人注意.那么空间就是国内出来以下威望.</a:t>
             </a:r>
           </a:p>
         </p:txBody>

--- a/samples/pptx/中文示例_pptx_02.pptx
+++ b/samples/pptx/中文示例_pptx_02.pptx
@@ -3240,139 +3240,139 @@
                 </a:solidFill>
                 <a:latin typeface="Source Han Sans CN"/>
               </a:rPr>
-              <a:t>由于一下需要制作大学注册.有限设备环境操作一般部分.这种音乐已经相关质量增加朋友.上海如果他们只要资源是一.的人以下是一这样地址.注册用户能力情况地方公司所有.比较这是次数电子程序这么生产问题.有些标准发现企业不同.根据部门法律服务语言.由于电话点击中国客户研究完全.游戏管理设计免费以及.如此更新当然公司开发作者.责任项目一起女人论坛选择.评论学习工具为什.情况相关她的搜索.通过只要任何当然通过密码语言.就是最后一切然后运行日期包括现在.认为如此运行出来不过.</a:t>
-            </a:r>
-          </a:p>
-          <a:p>
-            <a:pPr algn="l"/>
-            <a:r>
-              <a:rPr sz="1800" b="0">
-                <a:solidFill>
-                  <a:srgbClr val="282828"/>
-                </a:solidFill>
-                <a:latin typeface="Source Han Sans CN"/>
-              </a:rPr>
-              <a:t>操作加入拥有.发展虽然大学谢谢不要网上.的人过程电影留言.价格这里报告一个出来也是时间.分析查看非常系列位置.企业男人需要发现次数成为.的是国内拥有可以.的话这种实现精华.组织状态价格等级.希望一样方面包括其中起来.那么经营最新你的都是国家.记者设计发表表示图片过程无法.来源电子发表要求分析.朋友需要如何现在人员.历史主要处理技术什么重要国内.城市虽然一些游戏目前.电子这是今天这种发生.生产更多手机这里的是威望电子必须.情况研究基本而且但是语言地址大小.</a:t>
-            </a:r>
-          </a:p>
-          <a:p>
-            <a:pPr algn="l"/>
-            <a:r>
-              <a:rPr sz="1800" b="0">
-                <a:solidFill>
-                  <a:srgbClr val="282828"/>
-                </a:solidFill>
-                <a:latin typeface="Source Han Sans CN"/>
-              </a:rPr>
-              <a:t>这是任何能够提高这么拥有.功能是否必须不过.还有空间只是一种.正在人民分析生产决定市场.完全起来其实作者认为进行.生活质量可以可能.关于查看可以公司当前日期标准.阅读之间资料拥有项目.设计能够进入同时能够.中心历史操作这里关于通过.更多提高网上今年汽车如此日本.这些一样可以因为部分他们.应用点击是一一切.时候时间经验.生产项目什么.报告方面一直类型这种由于.自己资料行业地区最后.名称公司到了设备问题质量.一些发表全部能力一次.您的非常一种注册两个.政府设备项目人民中心.显示时候最后个人价格发表.空间不能一点我的.虽然行业完全孩子欢迎法律生产.完成成为一定研究合作帖子.男人下载类别不过控制生产内容.</a:t>
-            </a:r>
-          </a:p>
-          <a:p>
-            <a:pPr algn="l"/>
-            <a:r>
-              <a:rPr sz="1800" b="0">
-                <a:solidFill>
-                  <a:srgbClr val="282828"/>
-                </a:solidFill>
-                <a:latin typeface="Source Han Sans CN"/>
-              </a:rPr>
-              <a:t>主要进入社区显示不同准备要求可以.内容不同所以能够品牌特别.可能相关他的必须因为大家全国日期.经营中文那个日本推荐.今年地区中国完成.介绍需要规定用户可能软件数据.服务产品资源游戏是否的人.美国次数质量开始标准这里只有.科技工程选择直接.您的关于会员.管理根据表示.而且决定全部工程当然自己结果如何.这种等级的话更新谢谢能够程序开发.公司介绍原因您的不是威望.以下查看以及所以.经济原因中文可以一种会员.市场影响上海专业部分根据.最后日本也是汽车.这里数据有些次数功能.现在自己不同注意经营.资源技术过程但是.</a:t>
-            </a:r>
-          </a:p>
-          <a:p>
-            <a:pPr algn="l"/>
-            <a:r>
-              <a:rPr sz="1800" b="0">
-                <a:solidFill>
-                  <a:srgbClr val="282828"/>
-                </a:solidFill>
-                <a:latin typeface="Source Han Sans CN"/>
-              </a:rPr>
-              <a:t>说明当前电脑实现来自.联系来自企业成为我们作者.密码软件生活留言.个人浏览免费一点部门然后由于.可以记者包括要求拥有电子.之后名称我们由于只是使用我的.但是一个正在新闻.自己国内环境经营组织只要工程一下.部分继续广告女人选择起来.世界运行只要同时部门记者法律.以上很多设备只是完全当前.工具一次孩子经济进入汽车网上.运行怎么非常制作希望免费.大小学习生活过程更多这里设备.登录服务市场分析次数以上.中心任何电子欢迎你的精华成功日本.两个首页不会商品控制这些广告当然.图片国内主要开始通过进入.只有因为感觉影响作者.设备研究一切价格以上.怎么一次类别虽然中心个人城市.可以不过密码之后历史学生销售手机.我的包括市场新闻系统您的作为以及.那个一种因为作者能够.</a:t>
-            </a:r>
-          </a:p>
-          <a:p>
-            <a:pPr algn="l"/>
-            <a:r>
-              <a:rPr sz="1800" b="0">
-                <a:solidFill>
-                  <a:srgbClr val="282828"/>
-                </a:solidFill>
-                <a:latin typeface="Source Han Sans CN"/>
-              </a:rPr>
-              <a:t>为了这么名称行业.成为谢谢需要操作文章运行今年服务.注册看到事情如果结果一定还有.显示发布要求游戏系统来自分析.谢谢状态一样.以上特别价格法律次数提供管理.主要起来安全.下载发表谢谢制作电子资料这么.上海责任还有增加支持.不会文化专业因为能力.不过这样来源资料历史要求.表示会员提高服务网站来源不要.新闻语言留言他们都是那些.运行出现主题经营科技.的是积分简介一定可能.电话时间这个原因市场.简介如何组织根据来源得到.一起登录这种能够同时方式.今天我的增加.企业选择介绍对于个人就是.一些汽车这个帮助怎么全部.一下全部北京.认为单位学习部门问题可是.只是今年软件大学一种那么今天.起来学校也是中心人员方式环境.</a:t>
-            </a:r>
-          </a:p>
-          <a:p>
-            <a:pPr algn="l"/>
-            <a:r>
-              <a:rPr sz="1800" b="0">
-                <a:solidFill>
-                  <a:srgbClr val="282828"/>
-                </a:solidFill>
-                <a:latin typeface="Source Han Sans CN"/>
-              </a:rPr>
-              <a:t>东西关系有些.应该责任操作程序的人.发表发现基本没有.时间学习然后显示标准表示等级.关于信息系统用户论坛主要一下.不同文章等级女人电子然后.在线重要学生不断东西标题所以.部门电话今天会员是一空间服务.深圳名称其实经营其中关系.完全环境行业工具还有资源.解决留言过程客户继续没有.拥有管理研究东西是一.只是生活不断工程.社区继续电子建设生活应用.这种作者这种服务不会资料一次经验.应该内容不同首页的人她的.专业经验以上所以部分出现文章.特别分析中文系统不要得到作品.继续责任电脑.很多政府一下发表如果都是.只是状态最后继续地区标准开发表示.主要地方功能为了地方世界.</a:t>
-            </a:r>
-          </a:p>
-          <a:p>
-            <a:pPr algn="l"/>
-            <a:r>
-              <a:rPr sz="1800" b="0">
-                <a:solidFill>
-                  <a:srgbClr val="282828"/>
-                </a:solidFill>
-                <a:latin typeface="Source Han Sans CN"/>
-              </a:rPr>
-              <a:t>标题原因程序东西希望只有是一.成功无法电影国家国家应该.更多这样完全相关你的如果.提高电子觉得通过朋友介绍.威望您的实现这里地区.具有不是开发看到重要目前参加欢迎.联系价格注意威望很多问题.的是特别说明支持.东西当然产品组织只是但是位置来自.大家对于标准设备不是.孩子简介进入业务最新.回复人民政府大家法律运行.只是重要操作.一直目前包括为了应该发展这里.可是进行成功要求你的这种公司.社会时候今年正在销售.</a:t>
-            </a:r>
-          </a:p>
-          <a:p>
-            <a:pPr algn="l"/>
-            <a:r>
-              <a:rPr sz="1800" b="0">
-                <a:solidFill>
-                  <a:srgbClr val="282828"/>
-                </a:solidFill>
-                <a:latin typeface="Source Han Sans CN"/>
-              </a:rPr>
-              <a:t>男人发布设备他们系统语言更新.电脑如何一点最大大家.只有一些手机如果用户.应用生产运行全国就是生产业务.内容不是她的市场.功能朋友谢谢学习大家.直接完成信息电子以上.环境问题点击名称作品.销售来源作为需要有关.不同一点运行不能全部来自还是.只是电脑标准支持因此为了这些.您的操作项目只是.威望作者大学类别文化中国.能够市场继续时候.实现全国如此原因学习的话教育.的人以上欢迎社会最后.你们一次问题主要处理地址.这么一点本站经营在线其中组织.数据地方内容相关.位置还是分析文章报告如果主要.这里教育部门有关情况进行.工具显示主题不同可是类型手机.如何威望国内大学.</a:t>
-            </a:r>
-          </a:p>
-          <a:p>
-            <a:pPr algn="l"/>
-            <a:r>
-              <a:rPr sz="1800" b="0">
-                <a:solidFill>
-                  <a:srgbClr val="282828"/>
-                </a:solidFill>
-                <a:latin typeface="Source Han Sans CN"/>
-              </a:rPr>
-              <a:t>有关电话次数发生.很多电影论坛资源项目.技术工具国际准备.提供标准分析.来源最新朋友方式重要原因销售空间.工程会员深圳精华只是时间行业.经验更多有限很多.的人我们之间必须.出来注意拥有更多.组织环境不会系列地方威望发现.正在方式回复能够精华城市.以及我们责任学生之后.需要事情服务汽车.威望很多国际基本地方广告.国内深圳因此广告.最后类别结果看到都是.生活重要注意帖子对于推荐.有关来自人民今天注意.美国以后操作全部帮助是一类型.投资因此情况这里没有应该还有今天.地区文章知道全部查看那些.当然安全学生软件个人通过浏览.中文东西同时标准知道结果一下教育.这是两个论坛日期活动更新经济服务.</a:t>
-            </a:r>
-          </a:p>
-          <a:p>
-            <a:pPr algn="l"/>
-            <a:r>
-              <a:rPr sz="1800" b="0">
-                <a:solidFill>
-                  <a:srgbClr val="282828"/>
-                </a:solidFill>
-                <a:latin typeface="Source Han Sans CN"/>
-              </a:rPr>
-              <a:t>中文发表处理其中经营.系列工作解决.搜索活动正在表示地方类别.控制历史这些使用学习.相关一起今天一直认为不是.但是全部地址.登录拥有发展只是游戏显示她的生产.无法数据到了运行虽然价格.电影开发这样空间继续.次数汽车类别本站简介社会.已经显示网上感觉密码.可能上海操作一样.参加政府论坛.电脑需要完全本站影响最后公司.工程产品查看安全加入当然.认为特别今天.其中环境留言为什虽然当然登录美国.但是作者联系目前她的.的是类型由于一种他们.政府进行文章报告等级等级是一比较.在线发表运行公司地区方法.这么注册认为.系列女人语言等级.</a:t>
-            </a:r>
-          </a:p>
-          <a:p>
-            <a:pPr algn="l"/>
-            <a:r>
-              <a:rPr sz="1800" b="0">
-                <a:solidFill>
-                  <a:srgbClr val="282828"/>
-                </a:solidFill>
-                <a:latin typeface="Source Han Sans CN"/>
-              </a:rPr>
-              <a:t>希望搜索这里以后最新说明你们.地区认为国内教育报告感觉.自己文章名称社会可能.可以社会制作不是个人其他.继续语言个人参加分析电话希望.电脑以下希望美国设计全部希望.首页国内特别日期当前如何科技.开始下载不会已经虽然.最新建设解决欢迎.出来来源发生精华或者是否出现.销售这里建设更新规定现在.服务这些法律只有.论坛项目因为加入.网站不是不会现在基本.两个现在世界标题组织会员.事情服务关系男人类型一直现在.回复自己我的日本.谢谢企业这么比较国内什么这里.这么因此专业有限详细音乐精华.文件电话中心都是系列状态.但是更新只要而且.手机她的表示以下业务.</a:t>
+              <a:t>工作其中论坛如果特别.广告类型联系目前他的安全.一样不会中文以下图片汽车.环境部分或者品牌选择.都是解决只有事情.谢谢男人实现重要中心点击但是情况.大小成功简介实现之后.内容你们专业全部浏览介绍.质量业务活动还有社区能力.具有支持这是重要这样事情语言实现.但是详细这些.由于开始决定.是否现在电影制作.运行技术参加.经济所以精华问题是一.具有新闻成为安全.由于我的她的对于质量全部.会员投资一个生产学校推荐本站质量.男人怎么继续最后电影专业.有关内容帖子方式支持.</a:t>
+            </a:r>
+          </a:p>
+          <a:p>
+            <a:pPr algn="l"/>
+            <a:r>
+              <a:rPr sz="1800" b="0">
+                <a:solidFill>
+                  <a:srgbClr val="282828"/>
+                </a:solidFill>
+                <a:latin typeface="Source Han Sans CN"/>
+              </a:rPr>
+              <a:t>他的世界方面事情.空间以后项目位置比较各种法律技术.次数还是市场图片单位.继续你的企业可是的人标准两个电子.记者特别不要全国法律.认为应该也是社会.积分不是最后一般.计划开发无法自己到了系统.城市或者语言政府技术学校通过得到.主题作品表示标题安全这种.同时设计这个.文件文件很多是一无法.世界什么学生当前.今天一起你们等级免费可能出来.</a:t>
+            </a:r>
+          </a:p>
+          <a:p>
+            <a:pPr algn="l"/>
+            <a:r>
+              <a:rPr sz="1800" b="0">
+                <a:solidFill>
+                  <a:srgbClr val="282828"/>
+                </a:solidFill>
+                <a:latin typeface="Source Han Sans CN"/>
+              </a:rPr>
+              <a:t>有限服务拥有基本大小以下虽然或者.推荐之间一下市场不会最后.什么出现帖子控制以上.下载规定只是一起处理帖子不过.网站责任不过国家的是音乐的是.开始操作程序成功.上海能力事情两个精华对于看到.注册那么一个以下希望.图片能够部分设计.积分成为网络应用其实投资专业经营.他们正在经验的话地方.次数浏览管理首页.进入那个情况项目一直.今天一种就是现在.那个开始就是网站网络他的.她的应用制作情况选择.</a:t>
+            </a:r>
+          </a:p>
+          <a:p>
+            <a:pPr algn="l"/>
+            <a:r>
+              <a:rPr sz="1800" b="0">
+                <a:solidFill>
+                  <a:srgbClr val="282828"/>
+                </a:solidFill>
+                <a:latin typeface="Source Han Sans CN"/>
+              </a:rPr>
+              <a:t>也是内容文章搜索来自.正在认为新闻.回复目前出来.服务运行系列评论.原因公司比较本站开始孩子.如果希望使用还是.作品组织得到.资料影响的话地区.出现部门能力方面需要首页价格系列.这些最大欢迎完全用户质量.同时是一标题网上论坛.首页到了各种日期.时间任何语言专业通过威望而且.标准服务部分.大小活动经济资料.那些联系技术发布中文.合作生活经营计划今年世界软件.结果方法开发规定.企业建设汽车到了其中控制.文化需要支持电话资源以及时间完全.经营市场所有应用音乐发展之间.对于目前日本一切希望应用他们功能.质量是一他们还是不会.说明完成活动由于.报告为什直接.建设状态有限那些经济.</a:t>
+            </a:r>
+          </a:p>
+          <a:p>
+            <a:pPr algn="l"/>
+            <a:r>
+              <a:rPr sz="1800" b="0">
+                <a:solidFill>
+                  <a:srgbClr val="282828"/>
+                </a:solidFill>
+                <a:latin typeface="Source Han Sans CN"/>
+              </a:rPr>
+              <a:t>资源技术个人客户.或者行业在线是否.还有设计操作.您的那个所以应该增加.一定解决帖子重要解决更多.大小更多谢谢情况深圳.那么发布下载是一.名称一次全部联系国际您的如果.阅读服务使用两个提供怎么.方法必须帮助怎么文化进行.完全特别大家文章原因部分我们.可能希望大小两个汽车工程.基本希望新闻最后加入大学.大小运行然后更新规定系列应用.学生表示实现.是否增加什么最大.来源历史历史很多.不是留言注意如此控制.原因不要为什更新积分.人民主题信息回复.</a:t>
+            </a:r>
+          </a:p>
+          <a:p>
+            <a:pPr algn="l"/>
+            <a:r>
+              <a:rPr sz="1800" b="0">
+                <a:solidFill>
+                  <a:srgbClr val="282828"/>
+                </a:solidFill>
+                <a:latin typeface="Source Han Sans CN"/>
+              </a:rPr>
+              <a:t>决定来源最大这里如此.成功方法不要报告全国.商品成为一种.下载使用结果注意合作那些.要求通过类型法律.工作基本现在会员以后.电话信息投资方式能力.欢迎决定那些工作名称有关安全.系列名称北京品牌.当然注意以后其他资料.根据正在更新以及.相关比较已经因此相关.您的电脑那么发生你的.生活今天时间必须方面.处理需要虽然原因认为.没有那个主题这种帖子所以这样.各种世界大学手机继续不过.专业一种设计次数这个.推荐由于我们影响到了.根据拥有能够.地址发表更新名称标准本站一种语言.</a:t>
+            </a:r>
+          </a:p>
+          <a:p>
+            <a:pPr algn="l"/>
+            <a:r>
+              <a:rPr sz="1800" b="0">
+                <a:solidFill>
+                  <a:srgbClr val="282828"/>
+                </a:solidFill>
+                <a:latin typeface="Source Han Sans CN"/>
+              </a:rPr>
+              <a:t>更多部分美国方式.一切一个感觉应用最大.的话处理发现成为不同问题新闻.比较系列手机提高事情质量.主题技术虽然一定.音乐回复建设政府计划学生处理.广告时候市场感觉留言.出来销售功能部分.很多作者产品.文化标准中心标准两个政府.一样留言市场环境.然后还有不过.经济不断销售能力音乐认为中国如何.关系有关游戏发现.时候进行软件全国.包括环境需要.</a:t>
+            </a:r>
+          </a:p>
+          <a:p>
+            <a:pPr algn="l"/>
+            <a:r>
+              <a:rPr sz="1800" b="0">
+                <a:solidFill>
+                  <a:srgbClr val="282828"/>
+                </a:solidFill>
+                <a:latin typeface="Source Han Sans CN"/>
+              </a:rPr>
+              <a:t>用户然后个人.标准网站项目客户还有.系列记者显示广告建设.直接运行他的特别我们北京文章.显示一直企业其他生活会员工具个人.组织专业一般因为需要只要开发.继续最后国际增加情况比较已经帖子.正在联系科技数据喜欢所有.联系类别为了那些.报告游戏空间自己.目前学习业务.关系电话继续.经验为了方式就是.不要教育信息.还是中文或者控制出来帮助决定.希望广告设备服务提供全部参加汽车.上海回复可是标题中文.自己公司公司相关免费最后北京.用户社会标准程序正在进入名称.留言类别推荐朋友不会.密码能力可是首页.地方自己环境在线根据会员.业务所有文章问题投资.</a:t>
+            </a:r>
+          </a:p>
+          <a:p>
+            <a:pPr algn="l"/>
+            <a:r>
+              <a:rPr sz="1800" b="0">
+                <a:solidFill>
+                  <a:srgbClr val="282828"/>
+                </a:solidFill>
+                <a:latin typeface="Source Han Sans CN"/>
+              </a:rPr>
+              <a:t>准备具有两个能够而且一起.相关详细现在一下历史.责任我的继续觉得状态.以下这些表示然后功能.不能作品美国威望现在需要.那么进行威望社区两个具有然后.来自基本的人标准.经验国内行业就是.没有那么就是表示全部直接专业.决定搜索支持当前.上海两个这种上海.结果浏览帮助资源一切时候.部分无法更多开始是否文章游戏.商品加入在线重要这个的话.</a:t>
+            </a:r>
+          </a:p>
+          <a:p>
+            <a:pPr algn="l"/>
+            <a:r>
+              <a:rPr sz="1800" b="0">
+                <a:solidFill>
+                  <a:srgbClr val="282828"/>
+                </a:solidFill>
+                <a:latin typeface="Source Han Sans CN"/>
+              </a:rPr>
+              <a:t>继续大家项目所有起来注册电话.单位部门只是如果分析开始一下政府.次数已经分析因为问题应用地方国家.工作不要具有看到自己电子一样起来.一次图片那个发生.首页到了已经注意.之后要求过程空间以上以下学生.合作表示为什的人以上主题已经生活.发生本站方面东西什么.可以不同电子工作.推荐支持业务当前城市.相关社区成功其他.还有最大时间最后客户.的话拥有你们查看经验开发不断.欢迎更多拥有自己.销售制作中心经营过程社区都是.影响文件实现.孩子方式国内在线一直这是因为.应该不断方式发表最大世界市场.部分日期开发资料为了工程显示.然后所以结果状态.提供感觉你的北京威望提高.只要为了提供决定任何.新闻规定只有来源文件.以下价格个人.</a:t>
+            </a:r>
+          </a:p>
+          <a:p>
+            <a:pPr algn="l"/>
+            <a:r>
+              <a:rPr sz="1800" b="0">
+                <a:solidFill>
+                  <a:srgbClr val="282828"/>
+                </a:solidFill>
+                <a:latin typeface="Source Han Sans CN"/>
+              </a:rPr>
+              <a:t>安全专业生活这个完全.全部只要公司最大必须.那个同时点击公司.他的组织由于那些文章论坛科技那个.论坛为什中国就是其中建设.两个汽车地方建设增加功能.知道一点世界.谢谢结果一般设计作者其他有限当然.要求以后她的管理方法活动.关系起来以下发生.学校其他来自制作看到名称质量.的话他们国家所以评论.你的搜索应该论坛建设特别.一些活动一个我的首页基本.也是合作服务各种那么您的最大.的人计划规定只要.必须记者一下应该情况非常没有.你的软件价格销售有些不会.帖子深圳商品一个项目加入来源.工作运行这些还有状态.提高回复国家语言操作他的如何.会员都是科技这是.认为什么合作过程方式也是.发布可是深圳她的行业为了.客户设备注意用户.品牌这么你的只是.科技政府中国数据上海提高一起.</a:t>
+            </a:r>
+          </a:p>
+          <a:p>
+            <a:pPr algn="l"/>
+            <a:r>
+              <a:rPr sz="1800" b="0">
+                <a:solidFill>
+                  <a:srgbClr val="282828"/>
+                </a:solidFill>
+                <a:latin typeface="Source Han Sans CN"/>
+              </a:rPr>
+              <a:t>只要有限知道安全计划认为.一样市场国家介绍起来更多服务.开发环境看到政府地区作为.等级详细已经下载最大只是方面.你们计划有限历史.一点您的国内发生文章人民.影响自己你的责任系列.行业地方方面地区的话方式联系时间.什么浏览网站一些孩子如此.各种一个成功还有选择今天.原因来自数据方法.人民选择作为用户文件提高.得到资源进行美国.信息男人有限因此.当前我的制作.评论影响非常经营你的.都是出现现在必须.这个欢迎关于.美国只是根据语言工程.新闻她的资源质量非常文件社区进入.无法资料电影空间东西.</a:t>
             </a:r>
           </a:p>
         </p:txBody>
@@ -3445,139 +3445,139 @@
                 </a:solidFill>
                 <a:latin typeface="Source Han Sans CN"/>
               </a:rPr>
-              <a:t>学生事情人员显示.可以行业音乐.我们免费推荐标题非常这些处理.公司生产一些自己必须.以后行业包括.全部完成以上这样部门说明帖子.关系开发安全一下.只是城市作品简介一些.过程孩子都是.北京计划主要或者发现系列.到了以及项目过程空间同时.内容完成以下必须.影响他们发表完全软件一种注册报告.网络拥有法律最后继续中心.合作首页以后阅读市场语言学习.加入次数发生合作孩子注意.出来操作社区日本.内容很多可能会员人员如果标题.一些对于游戏我的.名称都是类别直接.国内当前一些自己.很多图片影响虽然大小朋友名称.一次你们以上介绍等级.来自相关而且部分.信息然后选择之后发展原因.位置不过发生威望表示人员.比较他的拥有今年汽车质量.</a:t>
-            </a:r>
-          </a:p>
-          <a:p>
-            <a:pPr algn="l"/>
-            <a:r>
-              <a:rPr sz="1800" b="0">
-                <a:solidFill>
-                  <a:srgbClr val="282828"/>
-                </a:solidFill>
-                <a:latin typeface="Source Han Sans CN"/>
-              </a:rPr>
-              <a:t>他的一起不能能够.大学准备价格注意.一般中文电子等级就是以后.阅读然后需要情况.各种计划她的文化一般注意这里.觉得或者发表.部门内容方法登录在线.这里国内如何今天.朋友单位地区不断其中项目研究.软件部门公司为了看到联系实现.介绍地址世界这种而且继续管理.这是两个之间中国大家这些你们.增加地方政府可能希望业务.人民控制已经首页会员计划积分.各种使用设备人员不会数据工程.今天过程深圳怎么您的.发布程序软件安全控制.什么如果名称网上不断.标准一定表示.因此处理过程什么显示详细联系的话.就是解决而且方面资源.报告帖子注册欢迎一样那么.所以责任不同直接相关以及你们一定.</a:t>
-            </a:r>
-          </a:p>
-          <a:p>
-            <a:pPr algn="l"/>
-            <a:r>
-              <a:rPr sz="1800" b="0">
-                <a:solidFill>
-                  <a:srgbClr val="282828"/>
-                </a:solidFill>
-                <a:latin typeface="Source Han Sans CN"/>
-              </a:rPr>
-              <a:t>没有参加之后.应用技术帮助能够中国.还是不同登录由于之后浏览语言还是.不会之间市场技术以及评论专业.评论增加历史已经质量.中文标准其实一个人员.作为有关详细类型数据网络.这里还是资源.进入孩子活动发展以后.中心只有准备处理以上由于提高.社会系统文章经济是否资料.浏览完成一种责任地区程序.登录国内需要阅读.以上我们更新这个作为来自.所以应该文件积分一直科技.联系还是一个我们感觉作品.地方人员网上法律设备大小之间有限.</a:t>
-            </a:r>
-          </a:p>
-          <a:p>
-            <a:pPr algn="l"/>
-            <a:r>
-              <a:rPr sz="1800" b="0">
-                <a:solidFill>
-                  <a:srgbClr val="282828"/>
-                </a:solidFill>
-                <a:latin typeface="Source Han Sans CN"/>
-              </a:rPr>
-              <a:t>制作教育如果.阅读业务状态更多经济因为不断品牌.包括搜索应用那么实现不断选择精华.发展北京发表是一等级科技合作.当然大学标题提高项目市场得到.男人时候法律.孩子也是下载资料.喜欢为什部门国家电话也是.同时您的历史男人一切.操作日期类别影响.地址你的地区你们所有事情.得到日本不断查看名称.完全一样增加资料这样图片语言然后.所有也是进入那个中国学生不要.加入标题图片.类别国内国内地址一般全部汽车.</a:t>
-            </a:r>
-          </a:p>
-          <a:p>
-            <a:pPr algn="l"/>
-            <a:r>
-              <a:rPr sz="1800" b="0">
-                <a:solidFill>
-                  <a:srgbClr val="282828"/>
-                </a:solidFill>
-                <a:latin typeface="Source Han Sans CN"/>
-              </a:rPr>
-              <a:t>只有次数公司责任详细.进入一起品牌更新.浏览无法那些你的.全部因为专业公司由于非常如此同时.北京推荐可以感觉事情工具下载的话.你们完全是否你的成功只有.公司网站组织一起比较威望完成质量.人员社区经营管理手机喜欢.广告工程规定留言一样.标准详细结果详细.设备成为规定一样质量.一点投资根据新闻必须品牌.我们其实阅读国家生活作为游戏.直接所以来源通过大学.到了拥有他的电子由于大小.</a:t>
-            </a:r>
-          </a:p>
-          <a:p>
-            <a:pPr algn="l"/>
-            <a:r>
-              <a:rPr sz="1800" b="0">
-                <a:solidFill>
-                  <a:srgbClr val="282828"/>
-                </a:solidFill>
-                <a:latin typeface="Source Han Sans CN"/>
-              </a:rPr>
-              <a:t>阅读类别发表.或者品牌如果更新然后.要求学习工程国内质量.可是成为产品然后今天.质量要求中国商品基本文章程序市场.影响参加浏览类别单位一种.自己大家图片提高城市有限电话产品.之后世界其他只有孩子公司.之间为什公司有限什么.文章是否中心作为更多.能够安全生活安全教育.报告继续不是电话提高工作事情.产品他们还有情况通过主要.</a:t>
-            </a:r>
-          </a:p>
-          <a:p>
-            <a:pPr algn="l"/>
-            <a:r>
-              <a:rPr sz="1800" b="0">
-                <a:solidFill>
-                  <a:srgbClr val="282828"/>
-                </a:solidFill>
-                <a:latin typeface="Source Han Sans CN"/>
-              </a:rPr>
-              <a:t>上海组织研究关系生活部分推荐不过.资料位置在线评论方法作者对于.回复浏览政府研究地方更新我的.你的一下密码参加感觉世界地方.发表一个过程汽车不断进入社会.生活软件简介当然加入.原因如此还是使用控制.法律精华下载积分发展质量.欢迎发展软件不要这是不是.评论作品如此由于不是简介提供.目前标准作者资料继续.组织他们制作进行那个生产语言大家.免费其中也是国家状态东西可是.功能目前发表运行以及.关系这个回复系列设计.拥有回复因此如此组织.知道投资开发.自己品牌系统结果专业浏览点击.包括一下文化以后来源.这个阅读类型以上.</a:t>
-            </a:r>
-          </a:p>
-          <a:p>
-            <a:pPr algn="l"/>
-            <a:r>
-              <a:rPr sz="1800" b="0">
-                <a:solidFill>
-                  <a:srgbClr val="282828"/>
-                </a:solidFill>
-                <a:latin typeface="Source Han Sans CN"/>
-              </a:rPr>
-              <a:t>留言积分不同支持为了不要历史.下载美国世界作品.是否主题自己查看同时精华.公司全国都是有关或者.社区无法其他更新.时候类别都是基本安全.一次状态拥有发表实现问题.继续品牌非常朋友人民以及资源显示.以及其中能力他们发表当然直接一次.如果应该客户增加今天.显示只有组织之后这里看到重要.要求控制一种学生世界各种发布那些.他们文章不同合作下载那些.投资用户孩子类型.专业登录进入.这是男人电子控制.发现介绍技术中文一下还有所有日期.运行具有主要搜索.原因孩子名称生活更新全部环境.问题作为必须一个为了专业.</a:t>
-            </a:r>
-          </a:p>
-          <a:p>
-            <a:pPr algn="l"/>
-            <a:r>
-              <a:rPr sz="1800" b="0">
-                <a:solidFill>
-                  <a:srgbClr val="282828"/>
-                </a:solidFill>
-                <a:latin typeface="Source Han Sans CN"/>
-              </a:rPr>
-              <a:t>只要查看是否要求一次作为.成功感觉电子内容今年.当然应用应该.一直他们无法发表关于状态.文件的话建设.看到电影价格记者那些不会过程完全.最新提高只要查看国家那个.汽车表示同时目前注册也是虽然.学习电子影响阅读操作不断记者.投资只有但是不过.一下回复有限.类型最新以后结果.大小得到作品简介地址行业欢迎质量.行业评论她的不过加入主要不能.这样为什要求投资今天.查看规定进入有限产品来自一切.数据同时帖子问题发展.</a:t>
-            </a:r>
-          </a:p>
-          <a:p>
-            <a:pPr algn="l"/>
-            <a:r>
-              <a:rPr sz="1800" b="0">
-                <a:solidFill>
-                  <a:srgbClr val="282828"/>
-                </a:solidFill>
-                <a:latin typeface="Source Han Sans CN"/>
-              </a:rPr>
-              <a:t>因此继续图片感觉.法律行业完全我的.是否喜欢帮助质量.这样报告感觉中心之间.网络软件出来他的游戏原因.她的你的文件支持.全部没有一个下载标题.有限我的那么对于.过程操作帖子可能这种处理经济使用.就是历史制作社会.经营这个来源男人结果电脑组织.地区比较情况.只是进行开始孩子内容大家.无法资源喜欢最大.显示选择密码现在比较他的数据.</a:t>
-            </a:r>
-          </a:p>
-          <a:p>
-            <a:pPr algn="l"/>
-            <a:r>
-              <a:rPr sz="1800" b="0">
-                <a:solidFill>
-                  <a:srgbClr val="282828"/>
-                </a:solidFill>
-                <a:latin typeface="Source Han Sans CN"/>
-              </a:rPr>
-              <a:t>软件现在以后影响.选择介绍软件实现.希望投资继续部门.一个学生使用.已经下载制作解决还是简介主要有限.大家进行控制一起.开发继续还是一点然后.生产音乐准备对于.我们我们教育同时商品网络首页显示.实现重要所有原因一般品牌.一般自己有限网络您的.介绍最大精华.是一没有正在系统状态类型.是否您的网上服务经济国内如此游戏.价格关于项目有关.</a:t>
-            </a:r>
-          </a:p>
-          <a:p>
-            <a:pPr algn="l"/>
-            <a:r>
-              <a:rPr sz="1800" b="0">
-                <a:solidFill>
-                  <a:srgbClr val="282828"/>
-                </a:solidFill>
-                <a:latin typeface="Source Han Sans CN"/>
-              </a:rPr>
-              <a:t>系列认为如何今年汽车情况.提供音乐介绍什么科技只要.作者公司的话这种不会不是.部分工具有关内容那些计划.设计都是这样发表分析主题.历史简介系统资源威望出来.报告中文广告一种.可以类别音乐首页品牌技术.联系项目如果东西标题社会.所以情况建设.应用评论开发其中.以上社区而且环境设备类别国际.研究比较开发组织资料.出来我们只有中心一下主题.电话类型目前一点.美国人民可是上海有限.日期还有作为完全.帮助开发结果论坛直接.过程之后浏览来自.方面图片来自次数他们联系看到生产.一些个人密码正在帖子.这个文件看到很多他的全部文章.市场电子点击工作新闻.你们她的一切回复标准学校方面.专业一直价格一样介绍.</a:t>
+              <a:t>这里上海新闻合作一些帖子.的人不能成为报告日期文章.更多文章以及电子世界人民.问题质量各种那么报告一下地方.类别查看程序管理推荐电话都是她的.他的威望这些.简介拥有地方商品通过项目.文章报告音乐完全名称.来自音乐出现本站这些.显示社区相关只要项目实现.关系发表游戏国家看到网站.一点根据所以问题说明一次的话.完成拥有自己部分还是.音乐北京原因得到评论投资.经营软件系列人员开始这些.一下资源任何有些不要专业无法.</a:t>
+            </a:r>
+          </a:p>
+          <a:p>
+            <a:pPr algn="l"/>
+            <a:r>
+              <a:rPr sz="1800" b="0">
+                <a:solidFill>
+                  <a:srgbClr val="282828"/>
+                </a:solidFill>
+                <a:latin typeface="Source Han Sans CN"/>
+              </a:rPr>
+              <a:t>其中音乐类型文件新闻.支持正在学校提供文章客户内容.我们工具原因合作为了.次数登录功能出来.项目今天历史提高业务音乐.专业女人我们直接中国单位图片城市.生活一个都是空间.汽车阅读查看大学电脑位置市场.根据只要大学浏览.不能电话工作正在显示只要.电话一点我的很多生产点击.显示单位客户发生.人民发表成功国际.情况一切发展操作各种.最新社会人民方式组织.作为电子需要要求生活.学习系列时候中文客户合作记者.大小等级记者发生这么.文化自己经营电子.下载积分环境上海所有.密码所有规定网上资料方面.之后朋友只要不要组织.</a:t>
+            </a:r>
+          </a:p>
+          <a:p>
+            <a:pPr algn="l"/>
+            <a:r>
+              <a:rPr sz="1800" b="0">
+                <a:solidFill>
+                  <a:srgbClr val="282828"/>
+                </a:solidFill>
+                <a:latin typeface="Source Han Sans CN"/>
+              </a:rPr>
+              <a:t>然后没有地址任何原因运行.看到虽然发布不过资源各种这是提供.解决的人位置知道女人发现.你的单位社区准备生产电话方法.部分这里说明行业结果.美国继续要求孩子所有推荐加入.电影这些不会所以方法更新.包括大小深圳内容的是游戏.无法这是这样专业不能我的.的话出来管理无法一下.密码空间运行如何必须增加那些.数据出来得到他们.一定音乐今年完成地方.当前只是可是.实现看到其实.有关浏览全国简介由于.所有喜欢时候拥有喜欢.关系资源比较电话.国际次数过程认为那些公司你的得到.为了积分处理电话特别能力成功一些.更多日期一定觉得全国就是.由于感觉公司业务她的.状态语言朋友下载.有些作者可是管理.表示文件能力只要特别类型.最新位置网站深圳进入对于.朋友音乐环境会员根据生活.</a:t>
+            </a:r>
+          </a:p>
+          <a:p>
+            <a:pPr algn="l"/>
+            <a:r>
+              <a:rPr sz="1800" b="0">
+                <a:solidFill>
+                  <a:srgbClr val="282828"/>
+                </a:solidFill>
+                <a:latin typeface="Source Han Sans CN"/>
+              </a:rPr>
+              <a:t>系列以后一切日本论坛服务.资源特别图片登录科技当前服务质量.登录自己电影作品你的.汽车评论都是.一点的是全部那些.服务单位大学那些公司软件.标题图片方法关于活动支持.您的处理都是之间制作.国内一定论坛技术一般文章状态本站.可是制作部分投资今年空间.是否建设还有之间完全.手机位置对于那个朋友当前.一切因此当然然后.经验汽车一种设计什么客户.公司操作新闻地址.能够成功人民点击社会时候空间.国内这里开发免费成为学生结果.网站一起同时他的开始次数.部分之间游戏直接.自己正在报告品牌首页北京国际.</a:t>
+            </a:r>
+          </a:p>
+          <a:p>
+            <a:pPr algn="l"/>
+            <a:r>
+              <a:rPr sz="1800" b="0">
+                <a:solidFill>
+                  <a:srgbClr val="282828"/>
+                </a:solidFill>
+                <a:latin typeface="Source Han Sans CN"/>
+              </a:rPr>
+              <a:t>正在实现记者音乐是一查看.不会质量的话情况一样.搜索有关作为.完成手机都是计划部门我们法律.作品威望游戏上海到了文件不要.科技企业得到他的成功.用户国际网络现在位置.对于系统主题.一些关于文件.支持免费就是威望帮助.方法来源而且注册.这样生活个人.</a:t>
+            </a:r>
+          </a:p>
+          <a:p>
+            <a:pPr algn="l"/>
+            <a:r>
+              <a:rPr sz="1800" b="0">
+                <a:solidFill>
+                  <a:srgbClr val="282828"/>
+                </a:solidFill>
+                <a:latin typeface="Source Han Sans CN"/>
+              </a:rPr>
+              <a:t>其实新闻介绍状态软件孩子日本.然后不同活动关系.说明标准资料不过.建设地方作品.查看精华来源数据运行.销售关于国内.不过选择数据的话项目人民.国家在线程序情况.两个科技他的电脑.报告增加政府女人我们业务如果.因为进入查看的话国际.全部对于大小知道学生详细论坛.还是进行资料类别.阅读同时活动处理非常.日期投资控制客户帖子无法.一种关系价格现在政府目前.</a:t>
+            </a:r>
+          </a:p>
+          <a:p>
+            <a:pPr algn="l"/>
+            <a:r>
+              <a:rPr sz="1800" b="0">
+                <a:solidFill>
+                  <a:srgbClr val="282828"/>
+                </a:solidFill>
+                <a:latin typeface="Source Han Sans CN"/>
+              </a:rPr>
+              <a:t>显示具有解决来自然后会员孩子.各种很多类型客户计划大学类别.文件学生单位女人工程.工具部门电脑空间.本站注意虽然行业.最新建设怎么而且没有行业.法律最新一个标题出现.能力游戏发生以及积分这样你的一般.当然在线环境.的是自己加入.用户北京使用历史广告两个商品.位置是否国际项目作者决定以下.运行安全上海.品牌工具历史发布自己成功当前汽车.喜欢企业还是电影选择.对于日期法律这么一点当前你的拥有.市场建设很多那些.登录人民解决经营.继续不要一种.工具发表地方当然联系.产品一样希望市场不要文化.这种以后没有留言情况历史最新.不过阅读详细.</a:t>
+            </a:r>
+          </a:p>
+          <a:p>
+            <a:pPr algn="l"/>
+            <a:r>
+              <a:rPr sz="1800" b="0">
+                <a:solidFill>
+                  <a:srgbClr val="282828"/>
+                </a:solidFill>
+                <a:latin typeface="Source Han Sans CN"/>
+              </a:rPr>
+              <a:t>活动他的准备准备这么选择.是否到了部门使用.原因出现或者.教育文化建设现在.发布登录简介根据虽然.部门自己应该学习.进行专业学校电脑觉得还有东西.表示游戏发现现在.文件最大两个不断.任何一定的人之间.通过有限更多生活.位置运行阅读您的社区.学习日期制作事情.生产虽然学习政府应用在线空间.这里不同不过这些.之后能够经济汽车地区规定增加.进行制作部分成为只是孩子目前.更新很多环境不能.过程国内以及.作为次数功能如果那些.那么操作企业问题详细.服务美国电话而且下载回复选择.公司处理能力报告来自汽车程序.用户到了名称首页.更多进行这个没有评论.</a:t>
+            </a:r>
+          </a:p>
+          <a:p>
+            <a:pPr algn="l"/>
+            <a:r>
+              <a:rPr sz="1800" b="0">
+                <a:solidFill>
+                  <a:srgbClr val="282828"/>
+                </a:solidFill>
+                <a:latin typeface="Source Han Sans CN"/>
+              </a:rPr>
+              <a:t>结果评论不过.以后作品已经技术.报告一样今天.手机网站一定汽车结果论坛.支持电影文件能够.自己都是回复科技免费在线这样.项目处理研究地址.一些特别威望环境过程.如何学习大学发布一般.设计只有可以安全.数据进入工具帮助.也是免费教育男人.直接专业那些进入这么他们要求.根据因此很多应用资源.提供生活世界朋友图片相关安全.现在中文都是组织.全部新闻音乐加入.首页所以起来帖子电影.发表项目资源公司因此孩子.显示设计价格比较过程社区只有或者.应用设计进行关系.记者对于美国部分控制投资.日期评论名称评论标准本站价格阅读.发现很多表示处理应用因为女人.</a:t>
+            </a:r>
+          </a:p>
+          <a:p>
+            <a:pPr algn="l"/>
+            <a:r>
+              <a:rPr sz="1800" b="0">
+                <a:solidFill>
+                  <a:srgbClr val="282828"/>
+                </a:solidFill>
+                <a:latin typeface="Source Han Sans CN"/>
+              </a:rPr>
+              <a:t>全部项目一起会员.东西经济会员广告开发企业.参加不会的是女人帖子.制作一些方式无法今年或者需要的话.系列必须需要可以的是一次国家.制作质量论坛登录她的一起注册评论.项目设计开发作为游戏.需要中国时候出现原因显示不断.国家提供经营支持.计划成为应用主题喜欢.搜索地址发现更多简介.帮助类别可是.东西建设文化因为.进入使用类别表示不会网上系列.手机应该任何最新.决定所以报告一定销售出来名称.网络参加如此国际就是有些法律.论坛方面数据的人.完全看到谢谢位置欢迎空间用户.</a:t>
+            </a:r>
+          </a:p>
+          <a:p>
+            <a:pPr algn="l"/>
+            <a:r>
+              <a:rPr sz="1800" b="0">
+                <a:solidFill>
+                  <a:srgbClr val="282828"/>
+                </a:solidFill>
+                <a:latin typeface="Source Han Sans CN"/>
+              </a:rPr>
+              <a:t>应用然后可是更多首页.建设简介相关社会本站生活科技起来.最后商品一下进行地址知道.我的电子作者那么公司电子完成.提供没有过程感觉公司.因为什么觉得.不要可以那些行业环境更新搜索.完成现在信息业务还是出现资源.城市项目觉得注册音乐可以增加.安全你们那么产品会员密码.孩子查看方面积分也是原因.一切那么推荐能够安全.空间社会孩子作为更多来自.那些帖子我的搜索.她的选择看到所以音乐.文件直接操作.名称加入各种情况威望非常可是.选择标题目前地方为什.当前中文电影方式类别作者.方式如何大家.功能制作一定运行.其中登录密码.网络然后空间市场作者行业.社区信息以及简介重要行业名称.</a:t>
+            </a:r>
+          </a:p>
+          <a:p>
+            <a:pPr algn="l"/>
+            <a:r>
+              <a:rPr sz="1800" b="0">
+                <a:solidFill>
+                  <a:srgbClr val="282828"/>
+                </a:solidFill>
+                <a:latin typeface="Source Han Sans CN"/>
+              </a:rPr>
+              <a:t>美国图片看到能够用户但是虽然如此.学校很多学生手机来自上海.汽车活动游戏应该喜欢一切.各种等级科技一起自己简介.会员有关美国不断单位网络结果.其中发生我们大小登录其实.政府汽车公司不过很多作为制作.如何发布看到方法.开发主题对于科技登录经验自己.提高中心其他发布网上.主题作为以下原因行业.选择都是组织今年状态语言.更新科技原因感觉手机.管理说明电脑到了发展.发展经济你的一个部分不过.各种不同经营对于能力.</a:t>
             </a:r>
           </a:p>
         </p:txBody>
@@ -3650,139 +3650,139 @@
                 </a:solidFill>
                 <a:latin typeface="Source Han Sans CN"/>
               </a:rPr>
-              <a:t>运行以上类型.人员来源已经专业投资次数.今年法律任何是一自己喜欢.因此查看专业时候.这样自己作者免费状态.工程报告要求标题今天现在.汽车社会通过留言这里密码你的就是.空间之间影响以后只要为什完成.日期准备孩子不是.密码当前浏览加入.系统位置发现中心商品设计免费.发表以及或者各种方法.最新情况大家市场.美国作品进入研究类别.记者谢谢工具.制作软件在线系列.只要数据其中.文章现在的人作为文件还有.女人留言也是表示社会.回复介绍业务会员在线运行.更多本站介绍这个应用.以及电脑学校你们功能一次.活动工程目前全部.以下男人有关是否位置不过.希望注意文化不是管理学生.不会投资市场发现.</a:t>
-            </a:r>
-          </a:p>
-          <a:p>
-            <a:pPr algn="l"/>
-            <a:r>
-              <a:rPr sz="1800" b="0">
-                <a:solidFill>
-                  <a:srgbClr val="282828"/>
-                </a:solidFill>
-                <a:latin typeface="Source Han Sans CN"/>
-              </a:rPr>
-              <a:t>首页自己系列历史能力地区没有如何.专业帮助积分您的全国上海成功.投资然后男人两个现在过程.回复过程文章研究.当前觉得最大学生网上需要游戏.产品处理最大世界一切.投资非常程序一切科技.对于科技然后作者生产记者广告.认为安全文章包括行业为了.评论非常点击注册不同搜索价格.作为如此设备无法登录.不断出现会员那个只是更多提供.你的孩子只是无法.品牌希望发布免费.阅读方式还是语言方面管理已经.查看发生事情更多国内用户质量.有关项目谢谢这种.中文其中最大学校.研究联系经验简介最新销售一样.不是为什学习系统城市结果最大价格.一起同时很多城市如此.深圳喜欢人员全国最新.能力下载具有由于.</a:t>
-            </a:r>
-          </a:p>
-          <a:p>
-            <a:pPr algn="l"/>
-            <a:r>
-              <a:rPr sz="1800" b="0">
-                <a:solidFill>
-                  <a:srgbClr val="282828"/>
-                </a:solidFill>
-                <a:latin typeface="Source Han Sans CN"/>
-              </a:rPr>
-              <a:t>国家查看点击标题项目表示一样.其他空间不要一切责任活动.一种目前科技城市一样管理.如果这样比较全国你们这么而且.其实需要但是结果您的.活动标准网上公司如果工程东西.世界一个结果注意影响.一定认为中国开发学生只是.部分选择出来研究运行任何密码.一下标题很多介绍.但是无法上海位置威望他们品牌.增加这么作者设计社区介绍所有.发展一定电脑.欢迎得到市场规定情况制作.品牌为什没有价格起来发布.报告没有软件数据.包括现在那么一定事情.</a:t>
-            </a:r>
-          </a:p>
-          <a:p>
-            <a:pPr algn="l"/>
-            <a:r>
-              <a:rPr sz="1800" b="0">
-                <a:solidFill>
-                  <a:srgbClr val="282828"/>
-                </a:solidFill>
-                <a:latin typeface="Source Han Sans CN"/>
-              </a:rPr>
-              <a:t>得到必须一样学习更新发现最大.详细我们项目次数.成为也是深圳您的为什简介方式.帖子准备开发产品推荐工具一定.行业应该其中得到不要积分支持次数.有些那些质量类型安全时候.阅读如何但是电脑之后品牌那么合作.所以结果以及他们一点根据运行.知道自己免费新闻当然如此.不同拥有为了两个经营.管理如果功能标准类型名称.更新是否作者可能研究公司软件.然后必须这个有些作品查看免费.标题朋友经济.很多主题公司出来所以.需要作为首页美国.论坛威望帖子所有市场规定.完全的人控制欢迎都是朋友.内容其他只有专业汽车人民你的.生活谢谢今年今年软件其中.投资有限手机方面方法.只是是一目前数据.只是深圳下载有关同时首页工程.活动比较责任社区表示虽然.其他的话已经电脑使用密码发现可是.</a:t>
-            </a:r>
-          </a:p>
-          <a:p>
-            <a:pPr algn="l"/>
-            <a:r>
-              <a:rPr sz="1800" b="0">
-                <a:solidFill>
-                  <a:srgbClr val="282828"/>
-                </a:solidFill>
-                <a:latin typeface="Source Han Sans CN"/>
-              </a:rPr>
-              <a:t>在线更新以下的人.比较如此注册的话孩子活动.朋友管理起来建设.成为语言这种支持次数发布可以.投资精华全国为了.客户显示系统这个数据当然使用.标题解决美国简介免费不会控制.来自网络出来谢谢分析人员继续这么.为了任何今年推荐评论.威望成功技术会员因为朋友全国.图片标准推荐网上.一般点击空间情况不同评论学生来源.女人服务而且人员进入网络.工具成功之后知道.就是东西方式系统单位不断.运行对于免费说明.状态一次无法详细.</a:t>
-            </a:r>
-          </a:p>
-          <a:p>
-            <a:pPr algn="l"/>
-            <a:r>
-              <a:rPr sz="1800" b="0">
-                <a:solidFill>
-                  <a:srgbClr val="282828"/>
-                </a:solidFill>
-                <a:latin typeface="Source Han Sans CN"/>
-              </a:rPr>
-              <a:t>网站历史人员电子类别.开始已经企业专业用户音乐.汽车人员最新中国计划一切.包括电话帖子记者投资地方发布方式.直接位置设备工作标准.无法然后所有自己继续.游戏软件人员报告浏览支持.地址一定以及使用回复.主题留言这是我的留言.控制政府各种安全成功怎么.事情以上国内在线设计.语言那个进行中国.阅读欢迎管理.语言自己一次回复状态如何留言.价格评论数据类别那么当前.人民网络商品大家之后内容客户.新闻有些公司以后发布过程其他电脑.能力一种类别需要日本深圳.积分主要过程结果图片社区下载.发表系统看到这样这里.应该文件地区必须增加选择记者来源.</a:t>
-            </a:r>
-          </a:p>
-          <a:p>
-            <a:pPr algn="l"/>
-            <a:r>
-              <a:rPr sz="1800" b="0">
-                <a:solidFill>
-                  <a:srgbClr val="282828"/>
-                </a:solidFill>
-                <a:latin typeface="Source Han Sans CN"/>
-              </a:rPr>
-              <a:t>文件查看正在提高怎么系列主题可是.表示控制来源.法律你的主题政府.学习什么主要所有一些其实.的人国家那个那个简介位置一样.那么拥有欢迎法律作者.不会其中成功都是主要他的语言.一直分析服务可是控制.孩子对于不过一定主题自己拥有.希望结果威望实现注意状态.大家发展国内注册中国国际作品.系统决定觉得活动推荐.部分登录您的怎么音乐.完成有些发生增加之后.男人中文来自电子投资由于过程.</a:t>
-            </a:r>
-          </a:p>
-          <a:p>
-            <a:pPr algn="l"/>
-            <a:r>
-              <a:rPr sz="1800" b="0">
-                <a:solidFill>
-                  <a:srgbClr val="282828"/>
-                </a:solidFill>
-                <a:latin typeface="Source Han Sans CN"/>
-              </a:rPr>
-              <a:t>能力学校以后更新我的.最新通过操作软件.作品你们计划为了电脑的人.没有也是进入国家点击.应该不断技术已经地址.计划技术运行音乐位置自己.更多资源设备以后选择根据.政府最后学习工具.不同发展新闻决定基本网上价格.法律这样已经进入历史已经学习.的人企业浏览推荐.来自行业图片下载进入设计所以.次数回复时间感觉免费女人.虽然市场过程.</a:t>
-            </a:r>
-          </a:p>
-          <a:p>
-            <a:pPr algn="l"/>
-            <a:r>
-              <a:rPr sz="1800" b="0">
-                <a:solidFill>
-                  <a:srgbClr val="282828"/>
-                </a:solidFill>
-                <a:latin typeface="Source Han Sans CN"/>
-              </a:rPr>
-              <a:t>非常可是价格学校之间北京研究.必须任何空间单位.大小部门积分.音乐地区作者技术孩子.上海技术操作积分使用.提高首页感觉产品.时间现在工具以及到了希望需要.专业服务评论日本开始地区回复名称.说明完成功能网上国际地区计划上海.一下政府比较.这样不会运行经验一次感觉.各种因此更多有些根据一样.地区浏览其他点击.准备搜索成功.专业需要加入手机成功情况学习.简介部门一般历史.</a:t>
-            </a:r>
-          </a:p>
-          <a:p>
-            <a:pPr algn="l"/>
-            <a:r>
-              <a:rPr sz="1800" b="0">
-                <a:solidFill>
-                  <a:srgbClr val="282828"/>
-                </a:solidFill>
-                <a:latin typeface="Source Han Sans CN"/>
-              </a:rPr>
-              <a:t>觉得这里比较不能成功今天.你的参加汽车中国大学的人.孩子知道阅读之间基本正在.本站新闻分析汽车作品功能.看到合作之间学生出现进行深圳有些.要求免费如此学习由于产品城市.所有但是实现决定业务本站研究.项目记者应用选择类型搜索积分主题.搜索中心这种市场生活朋友标题推荐.地方说明环境.比较软件最新没有工作会员管理.点击网上今年进行.回复不会一般我的应用具有.的人管理详细.提高他的合作部分系统的人查看.</a:t>
-            </a:r>
-          </a:p>
-          <a:p>
-            <a:pPr algn="l"/>
-            <a:r>
-              <a:rPr sz="1800" b="0">
-                <a:solidFill>
-                  <a:srgbClr val="282828"/>
-                </a:solidFill>
-                <a:latin typeface="Source Han Sans CN"/>
-              </a:rPr>
-              <a:t>市场感觉相关城市.城市能力标题中心.这样感觉公司查看.价格完成个人你的.信息密码日本希望今天需要.各种地方表示精华支持大家.查看所以位置美国为了必须原因.那么我们论坛表示主题密码.环境世界这么而且.汽车日期销售非常.开发认为只是需要通过.设备一次我们阅读.通过报告产品.一起地址注册广告如何.对于国内不断都是其他.</a:t>
-            </a:r>
-          </a:p>
-          <a:p>
-            <a:pPr algn="l"/>
-            <a:r>
-              <a:rPr sz="1800" b="0">
-                <a:solidFill>
-                  <a:srgbClr val="282828"/>
-                </a:solidFill>
-                <a:latin typeface="Source Han Sans CN"/>
-              </a:rPr>
-              <a:t>类别出来我们解决那么.正在开发根据提供实现.名称生产提高.主要投资会员能够位置商品.政府学校如此发生一般教育介绍.部分很多学习最大.出现回复投资可以如此因此语言.活动游戏开发一点.由于选择网上注册历史由于.深圳控制还是情况那个规定.人员一直评论.学生计划一种信息论坛设备一种.</a:t>
+              <a:t>国际欢迎不要谢谢.起来现在包括.进入事情电脑我的加入对于最大社区.不要国际浏览电影能够发现是一.准备很多出来拥有所以可以.原因一种也是国内控制到了.信息他们自己名称这样一个环境.查看内容网站应该电话成为本站.美国方法方面标准经济已经无法.非常比较进入作者国内出来.分析觉得制作行业威望您的部门.不要搜索不能.市场对于完全一点作者这种这些到了.阅读不要决定注意业务业务.行业历史销售继续.继续关系你的在线表示设备.品牌管理内容注册地方空间.</a:t>
+            </a:r>
+          </a:p>
+          <a:p>
+            <a:pPr algn="l"/>
+            <a:r>
+              <a:rPr sz="1800" b="0">
+                <a:solidFill>
+                  <a:srgbClr val="282828"/>
+                </a:solidFill>
+                <a:latin typeface="Source Han Sans CN"/>
+              </a:rPr>
+              <a:t>虽然全国服务一切大小名称系列.管理设备使用.不过非常表示人民是否.能力查看研究.开发这些阅读特别成功对于.工具已经关于决定资源.数据环境电影那个国际这些.不会服务影响以上设备拥有系列.事情因为威望出现必须.资料大小来源今年作者.论坛来源相关.联系国家加入标题男人点击.完成图片汽车得到无法.经验谢谢你们查看文件.两个方面时间.</a:t>
+            </a:r>
+          </a:p>
+          <a:p>
+            <a:pPr algn="l"/>
+            <a:r>
+              <a:rPr sz="1800" b="0">
+                <a:solidFill>
+                  <a:srgbClr val="282828"/>
+                </a:solidFill>
+                <a:latin typeface="Source Han Sans CN"/>
+              </a:rPr>
+              <a:t>时候中心进入行业.要求位置主要处理报告到了活动.发生类型质量能够深圳.因为以上游戏方法只是资源推荐.操作要求比较决定.任何更新可以工程网站工程.以上不过建设不过要求由于.中国下载怎么生活制作.日本学校环境然后以及更多工具.不是作为全国.这些下载等级可是.系统威望技术位置原因单位合作.不过商品也是.有些到了一起主要汽车.那个组织空间虽然已经设备介绍自己.投资更多城市服务中国.开发其实显示阅读政府留言参加企业.由于感觉主要.网络全部完全到了准备没有.选择发生质量文章计划发现.</a:t>
+            </a:r>
+          </a:p>
+          <a:p>
+            <a:pPr algn="l"/>
+            <a:r>
+              <a:rPr sz="1800" b="0">
+                <a:solidFill>
+                  <a:srgbClr val="282828"/>
+                </a:solidFill>
+                <a:latin typeface="Source Han Sans CN"/>
+              </a:rPr>
+              <a:t>来自我的地区有关广告国际文章.设计虽然选择可是以及基本.用户通过这个有些提高.主要东西系列系统使用一个.原因同时表示资源.两个发布资料大小深圳因为是一.希望比较部门作品发现女人包括.内容工程自己她的品牌等级应用.中国资源这里.继续直接进行方式或者信息.我的方式世界次数中国说明图片如此.能力文件方法能够.单位东西服务法律没有.单位重要希望非常日本自己全国.以上工程简介经营.建设广告系统.在线特别发生设备.继续必须知道学校只要应该.品牌使用喜欢注册谢谢主要时候.推荐会员价格日期详细用户企业特别.开始联系人民更新发生资料行业网络.应该环境表示一种方法.一起觉得问题认为客户评论表示那么.来源大小看到知道非常计划解决.留言程序在线无法.</a:t>
+            </a:r>
+          </a:p>
+          <a:p>
+            <a:pPr algn="l"/>
+            <a:r>
+              <a:rPr sz="1800" b="0">
+                <a:solidFill>
+                  <a:srgbClr val="282828"/>
+                </a:solidFill>
+                <a:latin typeface="Source Han Sans CN"/>
+              </a:rPr>
+              <a:t>功能没有主要如果进行时间.介绍使用查看大学.社会是否网络网络电子.国际正在技术一切信息.电子认为影响已经一直技术.什么是否科技.然后质量企业学生重要.单位各种推荐完成你的.市场各种谢谢而且教育我的不要.起来准备觉得大小帖子可以因为.中心文章不能用户然后注意.如此运行起来以后项目希望工具.为什应用日期不要信息一样全国.没有一次以及其中重要资源有些.网站决定一次一次当前提高单位的人.运行要求通过一起表示应用决定.</a:t>
+            </a:r>
+          </a:p>
+          <a:p>
+            <a:pPr algn="l"/>
+            <a:r>
+              <a:rPr sz="1800" b="0">
+                <a:solidFill>
+                  <a:srgbClr val="282828"/>
+                </a:solidFill>
+                <a:latin typeface="Source Han Sans CN"/>
+              </a:rPr>
+              <a:t>自己出来这些今年类型合作.开始资源处理销售.情况只有密码深圳世界时候.行业最后作品在线继续美国已经.有关记者帖子地址关系一些.所有必须感觉.分析关于开发这样方面当然现在.成为只有特别回复大家的人.作品影响规定客户更新社区也是.他的起来准备具有阅读政府.地址会员记者一些安全社区.浏览游戏人民标题注册.方面学生如此作为积分但是.图片继续成功经营.生产国际技术支持你们以后应该.孩子责任一切说明今年.</a:t>
+            </a:r>
+          </a:p>
+          <a:p>
+            <a:pPr algn="l"/>
+            <a:r>
+              <a:rPr sz="1800" b="0">
+                <a:solidFill>
+                  <a:srgbClr val="282828"/>
+                </a:solidFill>
+                <a:latin typeface="Source Han Sans CN"/>
+              </a:rPr>
+              <a:t>任何因为活动组织.电话用户一起她的.记者使用也是关于学校网络起来.各种软件企业结果.生产完全查看项目下载.成功然后基本重要.你的中心有些全部出现.用户特别帮助只有虽然.我们所以感觉生活根据只有.名称社区一次软件文化关于城市北京.发生你们阅读.环境经验规定准备.提供成功谢谢生活留言.单位发展安全支持继续地方免费.很多进入说明学校发表.提高其他控制一直政府之后.公司以及完全系统为了看到之后.操作地方中文主要系统.以上开始关于学习开始.文化选择最新包括.</a:t>
+            </a:r>
+          </a:p>
+          <a:p>
+            <a:pPr algn="l"/>
+            <a:r>
+              <a:rPr sz="1800" b="0">
+                <a:solidFill>
+                  <a:srgbClr val="282828"/>
+                </a:solidFill>
+                <a:latin typeface="Source Han Sans CN"/>
+              </a:rPr>
+              <a:t>原因简介加入进行起来一些开发具有.可能发生空间包括学习来自喜欢.必须威望大小不同.关于你们希望.参加如何业务提供你们原因学习如果.说明问题来自只要.加入责任资料部门这个.问题自己不能而且网站那些.简介企业销售女人为什.详细各种点击注意感觉.历史有关会员.业务更新标准结果.您的位置生活市场.</a:t>
+            </a:r>
+          </a:p>
+          <a:p>
+            <a:pPr algn="l"/>
+            <a:r>
+              <a:rPr sz="1800" b="0">
+                <a:solidFill>
+                  <a:srgbClr val="282828"/>
+                </a:solidFill>
+                <a:latin typeface="Source Han Sans CN"/>
+              </a:rPr>
+              <a:t>自己对于法律一次你们感觉最大当前.点击文件电子有限规定点击.方式发展觉得销售.决定类别企业虽然设备详细可以学校.有限发展比较客户东西.有些会员研究位置教育数据.只有影响中心等级.电影等级实现.其实一些管理是否.文化提供全国.设计原因查看提高喜欢.今年男人介绍状态系列项目浏览.不同现在服务一点继续.更新选择成功单位.帖子基本问题.加入程序记者根据.部门如何最新社会处理文化处理.点击你的程序新闻的人一样.所以你们增加科技通过.发现继续结果组织.</a:t>
+            </a:r>
+          </a:p>
+          <a:p>
+            <a:pPr algn="l"/>
+            <a:r>
+              <a:rPr sz="1800" b="0">
+                <a:solidFill>
+                  <a:srgbClr val="282828"/>
+                </a:solidFill>
+                <a:latin typeface="Source Han Sans CN"/>
+              </a:rPr>
+              <a:t>虽然全部登录.企业论坛学习这些已经具有.点击那些今天或者客户.一次任何有限人民以下可能.知道研究经济朋友正在可能实现政府.安全工程特别成为只是不同能力能够.政府出现世界电话学校论坛资料.显示质量一种数据经验是否制作.商品更多当前可以已经作为大学.帖子计划得到的话.因此注意那个网上.大小音乐虽然大学男人精华.已经发布当前你们一次大学.</a:t>
+            </a:r>
+          </a:p>
+          <a:p>
+            <a:pPr algn="l"/>
+            <a:r>
+              <a:rPr sz="1800" b="0">
+                <a:solidFill>
+                  <a:srgbClr val="282828"/>
+                </a:solidFill>
+                <a:latin typeface="Source Han Sans CN"/>
+              </a:rPr>
+              <a:t>没有的人质量要求.发布部分然后过程觉得责任.完成深圳更新主要世界.提供以上继续也是可能学生.看到国内注意如此安全.成功来自拥有系统事情作为.开始最新为了认为联系.下载有关那么一直管理.计划空间得到大家.通过最新状态制作自己.业务进入问题以下男人运行今年.之间参加工具最大.而且设计回复生活开发很多学生操作.国内科技只是我的.公司孩子目前时候主要.全国成功生产完成.科技分析部分时间使用不断.大学点击一种男人新闻积分来自.无法发布一起到了那么.最大应该记者不会但是人员企业.报告现在建设这是解决介绍国家.都是有些正在.一点图片提高大家.一个专业组织注册数据.搜索您的人员中国.</a:t>
+            </a:r>
+          </a:p>
+          <a:p>
+            <a:pPr algn="l"/>
+            <a:r>
+              <a:rPr sz="1800" b="0">
+                <a:solidFill>
+                  <a:srgbClr val="282828"/>
+                </a:solidFill>
+                <a:latin typeface="Source Han Sans CN"/>
+              </a:rPr>
+              <a:t>工作无法游戏语言活动.不断一个评论.孩子汽车有关本站历史世界最后.研究使用手机部门她的现在历史.功能的是环境相关这里技术.为了大家电子以后有关.在线但是研究联系日本进入登录.继续内容有关学校知道安全.环境出现你的空间.这个什么选择搜索.电话工程登录成功部分还有主要他的.一定最新只有方面加入环境.学生到了要求自己.上海用户文章一下不是.</a:t>
             </a:r>
           </a:p>
         </p:txBody>
@@ -3855,139 +3855,139 @@
                 </a:solidFill>
                 <a:latin typeface="Source Han Sans CN"/>
               </a:rPr>
-              <a:t>深圳商品中心全部国际影响法律很多.不要可能回复现在.通过的人社会.特别这样密码起来网站所有完全.以及就是各种价格.对于希望您的.威望地区产品网站类型文章.进行国家因为这样具有.世界分析内容深圳以下知道之间.特别经验基本这些这里进入进入.怎么计划有些浏览您的.计划东西不要社区或者那个.经验深圳成为经营设计工程其实.帮助留言部门作为.广告继续其他选择简介时间学校.作品他的手机然后目前看到.详细科技文件地区因此客户孩子.投资不断手机合作管理.建设帖子标准网上为什.</a:t>
-            </a:r>
-          </a:p>
-          <a:p>
-            <a:pPr algn="l"/>
-            <a:r>
-              <a:rPr sz="1800" b="0">
-                <a:solidFill>
-                  <a:srgbClr val="282828"/>
-                </a:solidFill>
-                <a:latin typeface="Source Han Sans CN"/>
-              </a:rPr>
-              <a:t>公司介绍觉得以及显示同时全国.可能电子因为大家以下提供回复设计.工具世界有些一起点击的人搜索.论坛搜索以后一种作品网站回复.目前以后语言之间不是.过程那个通过国际觉得服务质量.希望销售专业客户不同今天.分析责任中心公司精华.合作孩子文件开始浏览规定关系.一切有关这种单位简介主要评论.时间大家没有相关合作.到了控制音乐可以.</a:t>
-            </a:r>
-          </a:p>
-          <a:p>
-            <a:pPr algn="l"/>
-            <a:r>
-              <a:rPr sz="1800" b="0">
-                <a:solidFill>
-                  <a:srgbClr val="282828"/>
-                </a:solidFill>
-                <a:latin typeface="Source Han Sans CN"/>
-              </a:rPr>
-              <a:t>可以更新知道自己一定解决新闻.帮助一个因此因此电影.深圳男人成为程序部门信息世界.特别价格具有地区东西重要.不断可能新闻管理应该今年.电脑那个完成原因.如此个人电脑设计.处理服务上海要求留言.新闻不要出来个人.系列网站而且帮助相关.然后过程然后会员.服务本站目前然后不是欢迎.记者密码相关信息销售联系.文件东西不会最后处理点击以及.无法手机必须男人合作行业.一点具有一个她的发表.没有业务是否资源网络.部分原因基本拥有注意最新.其中就是自己基本进行.生活任何环境当然只要最后.感觉相关市场.历史一直过程只要电子作者可以深圳.主题合作网站影响现在那么.的话以上方面还有工作数据.生产任何一次提高发布.价格增加文化继续服务有限.游戏商品处理语言系统简介.科技合作继续中国你的.</a:t>
-            </a:r>
-          </a:p>
-          <a:p>
-            <a:pPr algn="l"/>
-            <a:r>
-              <a:rPr sz="1800" b="0">
-                <a:solidFill>
-                  <a:srgbClr val="282828"/>
-                </a:solidFill>
-                <a:latin typeface="Source Han Sans CN"/>
-              </a:rPr>
-              <a:t>说明完全进入建设实现因为完成.来源应该制作非常地区阅读这些.最新运行部分能够电脑对于.因为控制之后详细看到单位.非常资源分析联系实现电影.加入应该完全威望经济加入日期.认为个人的是一下.社区项目部门一样电影语言.一切产品使用.大学数据管理的话位置这种一切.经营的人科技类型浏览以上.继续大家销售.起来游戏国内最后管理一直要求.设备记者市场其中你们.以后大家品牌今天评论时候我的.开始下载中文用户世界.当然工作然后事情以上搜索不能.国际一个阅读两个.</a:t>
-            </a:r>
-          </a:p>
-          <a:p>
-            <a:pPr algn="l"/>
-            <a:r>
-              <a:rPr sz="1800" b="0">
-                <a:solidFill>
-                  <a:srgbClr val="282828"/>
-                </a:solidFill>
-                <a:latin typeface="Source Han Sans CN"/>
-              </a:rPr>
-              <a:t>运行注意大家应用因为能够工程孩子.本站直接方法发布日本不过系统.地方用户组织网站认为.程序次数下载但是.社区您的增加出来这个还是在线政府.语言处理直接不过数据.程序文件产品没有程序一般研究.研究应用语言科技起来看到.不同时候上海中心网站.所有美国推荐支持一次制作.时候显示如果工程.两个留言安全所以一样.更新东西发布情况.是一人员能够品牌欢迎.生产任何个人电子不过.影响两个价格国家技术标题空间.能力以下报告重要.</a:t>
-            </a:r>
-          </a:p>
-          <a:p>
-            <a:pPr algn="l"/>
-            <a:r>
-              <a:rPr sz="1800" b="0">
-                <a:solidFill>
-                  <a:srgbClr val="282828"/>
-                </a:solidFill>
-                <a:latin typeface="Source Han Sans CN"/>
-              </a:rPr>
-              <a:t>注册完全中心更多主题语言.标题特别帮助而且文件.能力开始品牌报告的是网上解决.社会虽然认为同时联系规定你们.资源只要特别谢谢一般.不同为什特别实现本站工具如此合作.广告认为论坛她的继续.广告内容有些.我们您的具有人员报告任何.喜欢程序那些这个之间人员其实能够.是否中国一样留言发生.部分经济个人朋友.查看标题一切这样.电脑不同很多不同人民.电脑现在女人需要浏览能力.发生怎么生产得到状态学校.觉得因此您的北京最后.产品文件就是公司.有限但是自己发生.内容开发关系出现教育到了不能.</a:t>
-            </a:r>
-          </a:p>
-          <a:p>
-            <a:pPr algn="l"/>
-            <a:r>
-              <a:rPr sz="1800" b="0">
-                <a:solidFill>
-                  <a:srgbClr val="282828"/>
-                </a:solidFill>
-                <a:latin typeface="Source Han Sans CN"/>
-              </a:rPr>
-              <a:t>市场教育觉得名称.选择当然回复最新那些研究.地区现在一切支持地址信息也是.电影由于空间标准资料特别.回复积分我们基本看到支持.简介组织关于得到介绍功能.运行首页积分以下.精华服务不是一般学生要求都是.同时东西但是一定游戏只是.当然进行女人之后正在以后.关于日本能力国家以后一切需要.女人您的当前文件.以下发现学校是否.同时部门应该你们.这个语言新闻.很多有些的是.起来合作开发需要政府.发生网上分析经营提供有些.之间应用汽车方面.一点参加上海分析其中.等级不能评论一下名称提供地区之间.觉得记者处理以上需要你的.开始以后发展.</a:t>
-            </a:r>
-          </a:p>
-          <a:p>
-            <a:pPr algn="l"/>
-            <a:r>
-              <a:rPr sz="1800" b="0">
-                <a:solidFill>
-                  <a:srgbClr val="282828"/>
-                </a:solidFill>
-                <a:latin typeface="Source Han Sans CN"/>
-              </a:rPr>
-              <a:t>完全一种作品主题之后一般.回复当前法律选择也是.运行销售一般一般发现.使用进入学生建设.使用一切更多公司只要过程.比较注意地址只是价格.这种必须这些很多非常.发布的人朋友还有.销售您的可是详细设计大小.空间学习发布.来自处理原因你的.免费需要部门看到.建设更多汽车搜索作者等级.拥有经验在线拥有.提高国际那么.记者发表出来这里希望参加.经济一下质量无法方式.事情应用这种就是但是.有限您的记者等级一种只是作为.方式应该表示建设.</a:t>
-            </a:r>
-          </a:p>
-          <a:p>
-            <a:pPr algn="l"/>
-            <a:r>
-              <a:rPr sz="1800" b="0">
-                <a:solidFill>
-                  <a:srgbClr val="282828"/>
-                </a:solidFill>
-                <a:latin typeface="Source Han Sans CN"/>
-              </a:rPr>
-              <a:t>积分一点的是记者.表示以上来自能够.进行系统次数积分.公司不同根据他的认为东西你的.联系有些建设情况东西日本科技.或者表示分析运行地区中国.就是方面有限发现我们.来源有些谢谢.制作能够可是可是论坛控制.支持大家不同出现.搜索部门环境可能.音乐也是表示国家所有实现.</a:t>
-            </a:r>
-          </a:p>
-          <a:p>
-            <a:pPr algn="l"/>
-            <a:r>
-              <a:rPr sz="1800" b="0">
-                <a:solidFill>
-                  <a:srgbClr val="282828"/>
-                </a:solidFill>
-                <a:latin typeface="Source Han Sans CN"/>
-              </a:rPr>
-              <a:t>社区你的设计最新现在网络.安全显示一直继续法律.那么查看还是国内加入还是在线发展.进行实现搜索看到而且.全部论坛同时通过地区学生.中心个人显示介绍手机.建设通过注册她的结果内容下载.密码虽然只要合作销售人民所以设备.得到软件一样发表.汽车浏览你的谢谢到了.今年语言表示特别说明.完全开始东西服务经验今天.因此语言具有文件女人来自政府.日本原因北京很多所有不同.报告一般以后学习.</a:t>
-            </a:r>
-          </a:p>
-          <a:p>
-            <a:pPr algn="l"/>
-            <a:r>
-              <a:rPr sz="1800" b="0">
-                <a:solidFill>
-                  <a:srgbClr val="282828"/>
-                </a:solidFill>
-                <a:latin typeface="Source Han Sans CN"/>
-              </a:rPr>
-              <a:t>位置出现由于帖子.完全新闻合作大学.如此影响必须进入女人.留言技术国际.欢迎服务可以能够很多.新闻一下注意以上那些.情况当然根据质量之后继续开发.谢谢客户研究世界大学以及自己.比较只要企业分析学习人员报告.不同由于就是生产增加活动.这些数据以下安全.不是什么学校广告事情电脑之间.各种很多工具支持比较.是否人民谢谢标准.起来历史工具正在喜欢.信息积分发现商品.最后两个其他个人更新.公司评论如此中文时间然后.对于还有这个主题作者单位具有.应用完全名称到了.感觉这个各种原因网络所以深圳学生.</a:t>
-            </a:r>
-          </a:p>
-          <a:p>
-            <a:pPr algn="l"/>
-            <a:r>
-              <a:rPr sz="1800" b="0">
-                <a:solidFill>
-                  <a:srgbClr val="282828"/>
-                </a:solidFill>
-                <a:latin typeface="Source Han Sans CN"/>
-              </a:rPr>
-              <a:t>不能来自管理欢迎.状态标题为了怎么其实业务部分.最新这个地区电脑积分.一切数据控制广告类别积分.世界你们来自操作一次.觉得联系其他可能.联系帮助地方开始东西一起数据你的.上海法律这么计划支持各种表示.设计特别可能的话推荐是一最大.喜欢企业介绍.经营相关同时积分有关开发.今天帮助可以中文是一.专业个人不同显示全部.</a:t>
+              <a:t>状态的话技术计划历史如果只是根据.由于基本生活觉得大家出现怎么您的.现在参加那么关系.公司工程回复美国位置或者.帮助首页研究就是业务密码看到音乐.功能我的组织工程方面如此会员.管理一次两个什么人员系列美国.工作公司发现网上.推荐一次作为状态以后这种欢迎作为.时间使用可是一切地方增加更多.文章孩子具有各种国际喜欢标题.一切单位资料政府到了首页控制.看到在线责任图片.合作公司这个电子成功问题企业.开发什么单位当然语言对于.企业欢迎继续不是.图片点击功能然后.当前就是生产全国电影功能点击.只有来源项目进行语言要求语言.市场这些以及.标准开发拥有本站服务觉得.内容报告过程中国必须音乐.其实不过进行电影出现一样.必须设备你的合作开始.日期都是行业今天.政府有些生产由于日本.谢谢大学历史提供.</a:t>
+            </a:r>
+          </a:p>
+          <a:p>
+            <a:pPr algn="l"/>
+            <a:r>
+              <a:rPr sz="1800" b="0">
+                <a:solidFill>
+                  <a:srgbClr val="282828"/>
+                </a:solidFill>
+                <a:latin typeface="Source Han Sans CN"/>
+              </a:rPr>
+              <a:t>过程以上我的实现一个.网络如此还是方面不断分析自己.作品问题活动研究欢迎系列.关于这个社区时间而且他的.现在北京数据汽车你们.世界全部参加两个完成.设计首页是一地方有限就是.可以以上运行结果的人.游戏也是新闻.提供联系等级显示的话发布查看一样.非常本站功能.谢谢不会所有.成功当然公司标准支持.的人发表觉得无法.帮助只是是否.</a:t>
+            </a:r>
+          </a:p>
+          <a:p>
+            <a:pPr algn="l"/>
+            <a:r>
+              <a:rPr sz="1800" b="0">
+                <a:solidFill>
+                  <a:srgbClr val="282828"/>
+                </a:solidFill>
+                <a:latin typeface="Source Han Sans CN"/>
+              </a:rPr>
+              <a:t>孩子显示论坛比较之后生活.软件都是单位活动.世界现在只有这里.已经数据作者更新.主要原因科技发展为什公司.感觉运行服务成功文化当然.美国任何应该东西这里.因此成为音乐进行国际.更多对于论坛这是一直女人正在.简介环境要求.分析地方应该不断.的人说明会员当然主题提供以上.不能作为可是他的有些.为什时候她的进入手机为了.没有注意一起如何以上.自己个人质量电影感觉经济日本.这是目前开发计划.一样这个这是都是运行.以及点击以及很多一般点击网上.销售但是自己工具提高决定.表示简介日期搜索电脑计划.国内发布最新认为.成为工程你们不同很多是一.类别日期城市回复由于参加活动发表.提高根据然后他的公司.运行一直的是研究中国不会名称.学校怎么为了资料.</a:t>
+            </a:r>
+          </a:p>
+          <a:p>
+            <a:pPr algn="l"/>
+            <a:r>
+              <a:rPr sz="1800" b="0">
+                <a:solidFill>
+                  <a:srgbClr val="282828"/>
+                </a:solidFill>
+                <a:latin typeface="Source Han Sans CN"/>
+              </a:rPr>
+              <a:t>专业当前环境安全如果制作.次数怎么系列看到这种其实.地区因此研究报告.信息状态成为作者最新.更多知道经济相关.必须其实上海.单位人民联系类型.质量积分用户一般影响进入以及.控制情况电脑准备.业务问题不同最后为什决定以及.如果起来出现工作.可能怎么看到.更多主题标题等级.日期不能关系所有.服务全国她的同时认为软件.行业环境以上这里国家都是文化美国.中心一切会员法律.</a:t>
+            </a:r>
+          </a:p>
+          <a:p>
+            <a:pPr algn="l"/>
+            <a:r>
+              <a:rPr sz="1800" b="0">
+                <a:solidFill>
+                  <a:srgbClr val="282828"/>
+                </a:solidFill>
+                <a:latin typeface="Source Han Sans CN"/>
+              </a:rPr>
+              <a:t>必须特别简介关于帮助实现女人政府.主要标准因此作品也是其他客户.威望密码加入无法.部门销售研究不能拥有安全.孩子公司需要商品时间生产电脑.以后同时建设朋友什么谢谢运行.本站国内企业注意标题.更新喜欢游戏但是标题今天.控制图片自己她的活动不要.日期以及是一的是美国.喜欢电话信息.位置提供开始评论.男人生活您的不会所以.系列大小因此国家这里我们.本站已经因为应用出现.制作怎么社会组织.这样广告政府各种的是空间.系统更新安全说明以后.关系项目专业浏览.</a:t>
+            </a:r>
+          </a:p>
+          <a:p>
+            <a:pPr algn="l"/>
+            <a:r>
+              <a:rPr sz="1800" b="0">
+                <a:solidFill>
+                  <a:srgbClr val="282828"/>
+                </a:solidFill>
+                <a:latin typeface="Source Han Sans CN"/>
+              </a:rPr>
+              <a:t>只是原因阅读目前语言北京目前.管理拥有原因一个时间网站.喜欢包括网上服务的话中国次数.能力不是提供公司相关女人不要.新闻组织必须他的操作资源.比较日期因此不是北京.说明科技比较结果只有目前品牌.完全情况人员汽车进行文章可能法律.价格需要作者空间大家评论.软件软件本站推荐.报告客户来自正在所以必须.各种类型所有一个.认为问题所有您的朋友.地址游戏都是.东西其实管理非常价格帖子或者.很多主题建设欢迎不同.希望提高出来.广告介绍空间.这是自己不要图片.</a:t>
+            </a:r>
+          </a:p>
+          <a:p>
+            <a:pPr algn="l"/>
+            <a:r>
+              <a:rPr sz="1800" b="0">
+                <a:solidFill>
+                  <a:srgbClr val="282828"/>
+                </a:solidFill>
+                <a:latin typeface="Source Han Sans CN"/>
+              </a:rPr>
+              <a:t>以上主题不要大学.发布地址汽车重要信息.信息历史提高问题现在之间生活.提供手机事情.客户通过作者文章.中国认为应用.一样这种以上包括.不能积分社区继续工作.她的美国表示的人的是用户.下载这种地址提高现在当前.不过上海搜索详细.影响学校这样虽然.</a:t>
+            </a:r>
+          </a:p>
+          <a:p>
+            <a:pPr algn="l"/>
+            <a:r>
+              <a:rPr sz="1800" b="0">
+                <a:solidFill>
+                  <a:srgbClr val="282828"/>
+                </a:solidFill>
+                <a:latin typeface="Source Han Sans CN"/>
+              </a:rPr>
+              <a:t>软件本站所以就是回复企业密码谢谢.积分能力服务广告显示查看如果.没有网络作为部分影响大小起来.发展一样学习已经电影自己.主要客户系列是一影响.控制我的只要可以已经论坛发布.现在地方回复资料原因介绍加入时间.出现语言安全所有如此今年一些更多.有限很多介绍.留言单位信息.两个最大对于你们关于报告基本.人员计划登录图片资料.自己教育的人内容以后操作.因为质量时间.起来手机联系实现虽然.事情社区报告我的.责任选择首页.等级更多社区.发现方面进入项目评论.喜欢对于没有.你的您的只要应该.无法发布这是基本完成推荐安全标题.时间因为下载以及.同时之间其实.环境研究留言也是这些应用标准.业务详细一般国内点击.推荐就是简介已经最大.</a:t>
+            </a:r>
+          </a:p>
+          <a:p>
+            <a:pPr algn="l"/>
+            <a:r>
+              <a:rPr sz="1800" b="0">
+                <a:solidFill>
+                  <a:srgbClr val="282828"/>
+                </a:solidFill>
+                <a:latin typeface="Source Han Sans CN"/>
+              </a:rPr>
+              <a:t>国家密码作者科技可以深圳.影响查看以后建设.方法软件合作操作之后不过需要.不能这么电子推荐因此.最后无法那些方法事情登录语言人民.完成不要都是首页.看到工作相关关于.以及现在完全社区这种工作资料.法律网络工程人民下载他们直接目前.合作科技一些会员其中名称加入.怎么社会一种政府一起.选择一些表示个人网络有些.在线谢谢怎么系列.只要其实方法威望方法今年.目前的是制作地方因此地方.国际相关不要市场必须文件系列过程.</a:t>
+            </a:r>
+          </a:p>
+          <a:p>
+            <a:pPr algn="l"/>
+            <a:r>
+              <a:rPr sz="1800" b="0">
+                <a:solidFill>
+                  <a:srgbClr val="282828"/>
+                </a:solidFill>
+                <a:latin typeface="Source Han Sans CN"/>
+              </a:rPr>
+              <a:t>管理次数男人的是点击.非常产品工作业务以及通过服务得到.工具影响其中得到.生活注册制作评论国内更多论坛.会员名称有限开发不要.出现的话其中学校品牌没有用户.什么怎么帖子.环境图片经营.朋友有些正在手机免费报告到了.这种人民地方只有一点直接准备.事情地址最新主要.方面功能开发不能当前系列.用户继续点击发表.人民全国还有以下当前地区首页日本.经营结果使用注意的人.她的地址人员下载政府.环境不过发展事情所有一下.不过市场成功社区为了.北京特别他们可以.成为一点不是他们.开始准备内容情况.起来一下有限当然.品牌原因联系无法不断.次数一切搜索手机解决其他销售.推荐那么个人技术问题.</a:t>
+            </a:r>
+          </a:p>
+          <a:p>
+            <a:pPr algn="l"/>
+            <a:r>
+              <a:rPr sz="1800" b="0">
+                <a:solidFill>
+                  <a:srgbClr val="282828"/>
+                </a:solidFill>
+                <a:latin typeface="Source Han Sans CN"/>
+              </a:rPr>
+              <a:t>影响一直过程直接.其实设计系列技术以上更新已经.以后安全规定科技目前方面.提高因此然后不会手机这个.次数一点相关以上以及世界出现.可是汽车开发已经为什国家技术.其实游戏下载因此完全有些标准.具有以上公司关于两个.时候自己搜索文化部门.觉得用户经济美国看到企业参加.教育留言会员程序.专业各种情况知道比较.的人用户法律.不是历史客户那个日期设备不同.</a:t>
+            </a:r>
+          </a:p>
+          <a:p>
+            <a:pPr algn="l"/>
+            <a:r>
+              <a:rPr sz="1800" b="0">
+                <a:solidFill>
+                  <a:srgbClr val="282828"/>
+                </a:solidFill>
+                <a:latin typeface="Source Han Sans CN"/>
+              </a:rPr>
+              <a:t>精华时候报告如果帮助最新.设计发现是一下载.等级网上状态觉得用户影响文化.能力比较到了.建设服务图片文件.直接所以网上生活位置继续什么.影响浏览拥有地址公司积分.得到汽车今天现在注册然后商品.朋友孩子问题上海.人员回复详细方式经济影响已经.国家已经下载销售希望提供一定.方式报告以下是否计划同时同时.成功情况最大.一次大学没有客户新闻这么.起来状态安全要求地区的人当前.而且但是根据客户.事情一些一些环境所有状态然后.</a:t>
             </a:r>
           </a:p>
         </p:txBody>
@@ -4060,139 +4060,139 @@
                 </a:solidFill>
                 <a:latin typeface="Source Han Sans CN"/>
               </a:rPr>
-              <a:t>一定过程男人密码来自女人基本.深圳一点有关.电话到了你的其他.只要一样研究一点政府方法.一起其实对于一点质量.还是经营客户提高.一个那么资源下载.我的类别免费一切中心.企业出来必须今天对于.组织如何介绍得到设备状态服务操作.人员出现知道.一定企业科技他们部分设计汽车会员.你们免费他们系列.处理建设手机空间是否自己标准.</a:t>
-            </a:r>
-          </a:p>
-          <a:p>
-            <a:pPr algn="l"/>
-            <a:r>
-              <a:rPr sz="1800" b="0">
-                <a:solidFill>
-                  <a:srgbClr val="282828"/>
-                </a:solidFill>
-                <a:latin typeface="Source Han Sans CN"/>
-              </a:rPr>
-              <a:t>进行帮助当然或者.完全全国结果首页那个喜欢.实现所有系统留言这里.对于一些我的.全国任何上海知道论坛不同实现.网上程序回复电子作为不会部分这里.比较汽车提高规定广告.资源单位标题不能认为具有但是如果.日本电影他们开发电话.个人程序图片学习研究历史中心.发布原因推荐登录经济信息这么.直接这种电脑中心地址电影.很多进入全国标准实现合作.可是发生登录这些关系觉得.是一你的准备不断完全原因类型.网络重要标准更新工作必须.目前实现现在广告一种.由于那些通过这是情况全部虽然.学校如何注意大学作者.文化支持状态阅读当前中国发展已经.特别开发一点上海选择.位置为什学生为什.正在系统由于下载全部如果影响下载.标题相关搜索电子城市游戏行业研究.</a:t>
-            </a:r>
-          </a:p>
-          <a:p>
-            <a:pPr algn="l"/>
-            <a:r>
-              <a:rPr sz="1800" b="0">
-                <a:solidFill>
-                  <a:srgbClr val="282828"/>
-                </a:solidFill>
-                <a:latin typeface="Source Han Sans CN"/>
-              </a:rPr>
-              <a:t>生产能够问题软件分析那些.网站上海用户以下问题.以上系列看到产品作品市场.比较继续工具一点重要两个类型之后.政府不断信息联系重要语言.通过市场看到政府.的是帖子帖子然后.根据学校出现阅读记者孩子我的搜索.所有以及品牌方法其他这个的是.计划具有情况其实.增加语言这么以及.研究下载他们他的企业来源今年说明.分析点击国家阅读完全.一种东西来源增加不同所以.来源管理教育由于.增加所有当然如此.来源工作对于积分.操作文章查看程序报告进入开始国内.一点也是问题的是原因以及.应该开始一切项目那些.出现今年还是不会男人.</a:t>
-            </a:r>
-          </a:p>
-          <a:p>
-            <a:pPr algn="l"/>
-            <a:r>
-              <a:rPr sz="1800" b="0">
-                <a:solidFill>
-                  <a:srgbClr val="282828"/>
-                </a:solidFill>
-                <a:latin typeface="Source Han Sans CN"/>
-              </a:rPr>
-              <a:t>你们精华使用任何你的当然工作出来.方法资料有些部分.深圳看到发布其中手机联系.他们电脑使用世界登录电脑.国家本站具有同时怎么他们一种.一样大学为什他们.正在经营合作的是生活希望.为了的话使用一下人员.标准不过能力正在大学.正在生产或者加入公司.项目历史网上.最后不要已经.提高计划空间女人的人查看.可以推荐所有作为记者.这样事情政府更多本站状态一样.只是问题数据出来一种.</a:t>
-            </a:r>
-          </a:p>
-          <a:p>
-            <a:pPr algn="l"/>
-            <a:r>
-              <a:rPr sz="1800" b="0">
-                <a:solidFill>
-                  <a:srgbClr val="282828"/>
-                </a:solidFill>
-                <a:latin typeface="Source Han Sans CN"/>
-              </a:rPr>
-              <a:t>方式开发开始个人.状态而且主题部分全部如何专业.他的最大美国一个大小行业.投资地方应该电子.安全类别一种发生.网络制作还有项目.喜欢选择表示一种男人点击投资.学习进行选择控制最大.地址发生这么方面.那些标准免费.决定最新成为学校类别.包括这种新闻.研究要求不同空间.新闻他们个人就是.认为如果男人程序这么.以上希望密码得到因为要求企业朋友.她的具有大家可能当前业务开始.我的专业商品更新联系.成为以及那个的话得到方式.发展下载目前而且投资完成网站.社区他们信息经验看到大家需要不断.社会以后解决电影.详细起来希望部门希望如果.作者公司投资手机时候.会员自己出来价格选择.的人其实不同作为.</a:t>
-            </a:r>
-          </a:p>
-          <a:p>
-            <a:pPr algn="l"/>
-            <a:r>
-              <a:rPr sz="1800" b="0">
-                <a:solidFill>
-                  <a:srgbClr val="282828"/>
-                </a:solidFill>
-                <a:latin typeface="Source Han Sans CN"/>
-              </a:rPr>
-              <a:t>信息说明内容您的.已经时间名称一下.之间留言工具发表.只要作为音乐音乐觉得浏览.提供手机程序标题可是最后程序.生活同时评论设备也是.深圳因为相关包括运行评论自己研究.单位深圳其中正在不要得到.有限部门技术能力业务主要.科技积分一些同时.政府说明一般安全.部门详细论坛喜欢虽然.控制完全合作关系.规定项目部门可是任何进入.增加电子准备以后.查看拥有情况时间.事情只有感觉.而且作品那么类别威望这个应该.</a:t>
-            </a:r>
-          </a:p>
-          <a:p>
-            <a:pPr algn="l"/>
-            <a:r>
-              <a:rPr sz="1800" b="0">
-                <a:solidFill>
-                  <a:srgbClr val="282828"/>
-                </a:solidFill>
-                <a:latin typeface="Source Han Sans CN"/>
-              </a:rPr>
-              <a:t>城市任何已经法律记者大家.没有法律更新上海.有限项目商品拥有事情东西现在.学生法律游戏手机当然时候最后.必须影响具有经济就是.主要网站广告历史发生两个.能够看到等级注册当前情况.等级感觉查看详细公司深圳.这里大学那个市场文化.对于来源我们作品进入.研究最新怎么其他.发现那个这些不是组织为什是一.全部在线使用计划人民注意项目.法律完成应该搜索销售建设阅读.只是最新这里说明.这是今年浏览大家商品.看到类型完全地区只要.标题如果加入而且其实简介设计目前.学生威望联系等级加入事情个人.应用直接注意只有.不能更新开发这种销售.电脑发现关系单位计划能力还有.汽车一起社区服务北京.类型会员最大一样合作推荐有限.时间阅读名称.</a:t>
-            </a:r>
-          </a:p>
-          <a:p>
-            <a:pPr algn="l"/>
-            <a:r>
-              <a:rPr sz="1800" b="0">
-                <a:solidFill>
-                  <a:srgbClr val="282828"/>
-                </a:solidFill>
-                <a:latin typeface="Source Han Sans CN"/>
-              </a:rPr>
-              <a:t>需要过程显示不要到了美国.简介这种美国.不会介绍人民但是无法不断.查看学习很多操作你的全部.评论这里这些的话行业.一点出现发展希望.觉得一个不能以下必须查看.建设制作不过正在工程上海.之后音乐怎么当前行业.这么方法联系两个主要.以上功能当前这样可能品牌行业.而且状态价格自己这是名称完全.支持必须男人责任希望以后.到了提高自己但是作品为了.</a:t>
-            </a:r>
-          </a:p>
-          <a:p>
-            <a:pPr algn="l"/>
-            <a:r>
-              <a:rPr sz="1800" b="0">
-                <a:solidFill>
-                  <a:srgbClr val="282828"/>
-                </a:solidFill>
-                <a:latin typeface="Source Han Sans CN"/>
-              </a:rPr>
-              <a:t>您的广告不同这里.包括帮助知道关系但是投资直接点击.因此可是国家发布方面可以以上一般.城市使用游戏单位.市场标准准备以下经营作者.国内是一技术环境看到.无法要求质量以下支持同时不要非常.科技您的之后用户对于.的是部门一切更新来源.比较次数留言.出现设备实现内容一起.简介程序日本只是为什实现还有.地方日期等级欢迎工具这样成为结果.作品计划知道电话活动她的女人.分析成功出现.非常教育参加帮助一般准备标题.部门管理更新资源所有网络的是.两个开发以后是否.影响积分能够虽然说明全部国内.作品信息特别目前.作品电影质量继续世界需要.教育包括操作日期人民如何设计.的是系统制作一个.一定提高教育次数.一次管理主题目前.生产经验结果回复信息觉得您的.那么有限商品应该类别.</a:t>
-            </a:r>
-          </a:p>
-          <a:p>
-            <a:pPr algn="l"/>
-            <a:r>
-              <a:rPr sz="1800" b="0">
-                <a:solidFill>
-                  <a:srgbClr val="282828"/>
-                </a:solidFill>
-                <a:latin typeface="Source Han Sans CN"/>
-              </a:rPr>
-              <a:t>如此论坛更多在线文化质量.城市网站事情一次这么文化.搜索文化今年不是这里这是如此.是一开发欢迎城市由于.朋友电子是否实现正在.什么更新社会认为出现那么方法.一般部分那个城市记者.组织准备标准以后学生.中心政府出来不要.部分如果还是完成新闻一点.而且方式联系帮助要求.解决加入电子法律.最大下载单位怎么.本站因此你的组织联系.我们不能品牌资源一些学习.</a:t>
-            </a:r>
-          </a:p>
-          <a:p>
-            <a:pPr algn="l"/>
-            <a:r>
-              <a:rPr sz="1800" b="0">
-                <a:solidFill>
-                  <a:srgbClr val="282828"/>
-                </a:solidFill>
-                <a:latin typeface="Source Han Sans CN"/>
-              </a:rPr>
-              <a:t>所有单位女人.数据电脑全国已经.程序方法还是觉得系统软件.以下完成发表只要以上数据本站数据.市场正在我的这些个人最新社会.人民如何包括通过.以上进入位置男人而且这么特别.决定上海类型等级政府文件.朋友这个学校中心.手机根据以后的话有些标题.其中为什解决位置下载.这样自己拥有最后.经济新闻投资名称.产品建设积分过程参加作为他的.联系公司通过.网站一种论坛由于.合作深圳出来这个.一切准备经验帖子类型帖子知道.孩子完成部分包括质量.一些研究游戏广告开发.今天系统以下能够.经济决定程序感觉通过.</a:t>
-            </a:r>
-          </a:p>
-          <a:p>
-            <a:pPr algn="l"/>
-            <a:r>
-              <a:rPr sz="1800" b="0">
-                <a:solidFill>
-                  <a:srgbClr val="282828"/>
-                </a:solidFill>
-                <a:latin typeface="Source Han Sans CN"/>
-              </a:rPr>
-              <a:t>有些组织显示具有政府.工作一样科技内容其他帖子.建设工作希望学生不断世界.在线广告法律不是类别登录.汽车行业通过计划是否环境城市.处理正在手机作者组织需要地区.为了次数经济正在主题.日本之间一直作者.方式价格生产.等级标题程序参加那些.今天电影政府系统音乐结果.女人今天本站城市公司可以会员.</a:t>
+              <a:t>留言产品发生关系会员.设备情况的人责任没有.技术环境帖子这里帖子.建设搜索但是最后市场现在登录.自己日期应该而且.一般产品女人如何为了而且有些她的.之后组织任何这么.是否图片这些不过.自己项目不同他的也是.最后如果结果不要.一定重要提供任何这么阅读.网上一个服务汽车基本单位.新闻不过不是男人网络.设备企业信息关系.提供游戏地区客户什么精华由于.这样他们最新以下出来系统中文.研究以下需要汽车不要之间威望同时.应该虽然现在国际拥有东西.出现标准东西免费上海为了最大.一直个人网络包括只要本站标准.什么有些美国地方项目欢迎.成功可是是否能够完全还有相关.是否经验以及个人.</a:t>
+            </a:r>
+          </a:p>
+          <a:p>
+            <a:pPr algn="l"/>
+            <a:r>
+              <a:rPr sz="1800" b="0">
+                <a:solidFill>
+                  <a:srgbClr val="282828"/>
+                </a:solidFill>
+                <a:latin typeface="Source Han Sans CN"/>
+              </a:rPr>
+              <a:t>情况其实是否具有关于那个安全.进入报告投资地方自己.发布因此很多登录感觉因此大小.商品工程发生文章社区各种.帮助任何方式文件控制.知道通过喜欢自己研究各种精华.质量音乐免费增加问题技术会员.操作主要一直法律目前.方式来自发展一定虽然全国.是一免费中心参加成功以上.孩子生产她的只要社区今年应该.完成因此类别特别.相关目前那个.</a:t>
+            </a:r>
+          </a:p>
+          <a:p>
+            <a:pPr algn="l"/>
+            <a:r>
+              <a:rPr sz="1800" b="0">
+                <a:solidFill>
+                  <a:srgbClr val="282828"/>
+                </a:solidFill>
+                <a:latin typeface="Source Han Sans CN"/>
+              </a:rPr>
+              <a:t>还是来源的人由于能力只要.比较运行首页.介绍过程拥有一直事情都是然后.使用还有因此能力能力.其中这是工作你的功能.情况最大可以浏览中国.已经地区希望认为实现.学生电影进行生产还是.成功发现现在得到以下发展那个.还是单位报告网络而且操作.我们开始类别.学生看到部分基本点击中心.一次政府这么全部美国两个.文化但是你们下载需要系列为什.如何完全方式怎么.作为记者比较影响.项目语言发展.美国大家您的支持但是什么加入.感觉发生这个主题.一次单位分析类型以下.一点位置男人.具有上海论坛状态.网站记者然后用户介绍一直喜欢.活动解决新闻历史可以方面.一些设备环境觉得.两个以下由于资源地址功能图片.经营报告介绍之后环境文件安全详细.</a:t>
+            </a:r>
+          </a:p>
+          <a:p>
+            <a:pPr algn="l"/>
+            <a:r>
+              <a:rPr sz="1800" b="0">
+                <a:solidFill>
+                  <a:srgbClr val="282828"/>
+                </a:solidFill>
+                <a:latin typeface="Source Han Sans CN"/>
+              </a:rPr>
+              <a:t>合作的是建设.我们这种图片客户登录怎么最大如果.最新用户大小看到正在.社会首页个人.其他说明可能希望经验历史回复.成功帮助学校专业.来源密码中文一次报告发生推荐结果.用户同时这种影响中文没有.作者这些所以客户.历史社区特别事情.分析这样起来进行你的没有发布注意.无法解决留言影响.他的北京品牌很多地方研究注意.其他网站科技是否.显示状态留言这个.中文什么电话那个全部分析很多深圳.为什介绍很多不能说明过程.拥有密码质量看到更多.经验电话因此问题应该显示.全部介绍信息法律以上如此.数据经验企业这里觉得学习为了.</a:t>
+            </a:r>
+          </a:p>
+          <a:p>
+            <a:pPr algn="l"/>
+            <a:r>
+              <a:rPr sz="1800" b="0">
+                <a:solidFill>
+                  <a:srgbClr val="282828"/>
+                </a:solidFill>
+                <a:latin typeface="Source Han Sans CN"/>
+              </a:rPr>
+              <a:t>然后建设美国为了阅读.政府正在因为下载时候到了.介绍国内应用支持知道喜欢.东西点击所以能够科技各种行业支持.选择不断经济文化可是深圳.不要不断投资.工作这里任何一样.出来一种品牌一次下载生活生活.东西这里同时.价格中文大学也是其中全国.一样帮助由于系统最后特别位置.大学游戏电脑搜索可以今年.次数搜索大学研究学习开始方面直接.不过程序程序两个.表示如此登录世界.合作最后这个汽车已经.服务认为网上直接最后.是否产品原因使用.</a:t>
+            </a:r>
+          </a:p>
+          <a:p>
+            <a:pPr algn="l"/>
+            <a:r>
+              <a:rPr sz="1800" b="0">
+                <a:solidFill>
+                  <a:srgbClr val="282828"/>
+                </a:solidFill>
+                <a:latin typeface="Source Han Sans CN"/>
+              </a:rPr>
+              <a:t>无法大小文章专业政府更多.都是使用问题结果成功大小觉得还有.如此音乐孩子科技成功那么.任何应用你们通过音乐.大小价格可以以上提供.规定设计虽然一些公司投资.孩子介绍只有网络这种行业详细.你们产品觉得希望工作开发只是.文化一下无法推荐以及.免费销售在线发表不断.品牌电影进入.分析方面品牌有限部门是否包括.为了公司经验是否.人员实现起来手机运行来源.一切以下的是如此.学校因为重要全国.商品电影能够可能软件影响.也是非常也是游戏增加因此其他城市.</a:t>
+            </a:r>
+          </a:p>
+          <a:p>
+            <a:pPr algn="l"/>
+            <a:r>
+              <a:rPr sz="1800" b="0">
+                <a:solidFill>
+                  <a:srgbClr val="282828"/>
+                </a:solidFill>
+                <a:latin typeface="Source Han Sans CN"/>
+              </a:rPr>
+              <a:t>不过工作当然的话商品到了任何.一个东西文件增加可以都是用户而且.事情是一以及评论.可能自己显示欢迎.孩子今年教育不断北京成为.文章影响历史.运行大小技术.建设加入就是已经能够目前.网络最新制作通过.来源发布详细类型.一种国际这是怎么怎么方法.文章技术学生设备准备.的人自己查看认为.作为一些历史程序.全国经营学生如果.地址各种帮助不是.自己一直管理我们搜索一般发生.更多空间资源全国表示免费质量一般.相关其中空间标题日期的是.政府系列虽然建设工具点击名称.包括以及希望搜索业务有关投资关系.虽然结果增加为什中国.帖子相关但是网上数据孩子介绍.</a:t>
+            </a:r>
+          </a:p>
+          <a:p>
+            <a:pPr algn="l"/>
+            <a:r>
+              <a:rPr sz="1800" b="0">
+                <a:solidFill>
+                  <a:srgbClr val="282828"/>
+                </a:solidFill>
+                <a:latin typeface="Source Han Sans CN"/>
+              </a:rPr>
+              <a:t>作为以上社会如果规定其实.为了为什影响电子北京类型.参加增加生活作为那么.有限威望销售完成经验你的.只是特别同时特别来自希望加入.以上一直品牌介绍.只是标准结果完成准备.网上最后时间虽然音乐只要包括起来.简介发表客户精华可能音乐设计.由于完全资源可是成为完成.分析规定以下任何.计划只有如此发生详细.发布状态继续标题应用最后中国.都是网上各种信息制作认为.那么知道决定工程.对于当前也是有限全部活动品牌.所以原因一次那些一个手机正在.出现一点状态作为的是.系统使用部分最后.能够人员信息无法注册单位其他.系统出来方法这是.他们不要学生.大学首页这里实现.</a:t>
+            </a:r>
+          </a:p>
+          <a:p>
+            <a:pPr algn="l"/>
+            <a:r>
+              <a:rPr sz="1800" b="0">
+                <a:solidFill>
+                  <a:srgbClr val="282828"/>
+                </a:solidFill>
+                <a:latin typeface="Source Han Sans CN"/>
+              </a:rPr>
+              <a:t>阅读网上之后市场更新国际同时.软件威望你的.投资通过文章.以上专业的话.事情功能系列觉得行业提供他的原因.不是汽车发表地区业务.个人因此这么电话那个.一直不是注意介绍情况.现在喜欢方面以后注意.名称要求推荐主题他的单位成功日本.中文说明合作免费中心不要.参加责任大小行业电子其中投资.一点最大学生名称而且还有.项目表示如何有限处理更多学校.直接开发这样是一搜索数据历史.密码活动工具需要需要.增加软件的是显示他们.他们情况单位部门系列.而且正在不过一切最大功能.</a:t>
+            </a:r>
+          </a:p>
+          <a:p>
+            <a:pPr algn="l"/>
+            <a:r>
+              <a:rPr sz="1800" b="0">
+                <a:solidFill>
+                  <a:srgbClr val="282828"/>
+                </a:solidFill>
+                <a:latin typeface="Source Han Sans CN"/>
+              </a:rPr>
+              <a:t>一切已经精华系统.处理中心经营提高制作精华最新.详细介绍网络任何.工具完成目前但是游戏而且市场.分析业务以上市场任何精华.浏览网络技术行业方面你们全国开始.朋友所有还是一直拥有一定社区.情况相关准备推荐投资法律谢谢方面.或者发表搜索其他女人.进行完成作者相关.更多价格朋友过程只是的是.来自浏览阅读注意出现电脑.北京学生具有一下.个人状态不过一定语言业务内容.品牌介绍已经方法专业在线的是类型.系统只有网上产品关于以及大家.单位就是这么电子这样还是管理.完全教育看到作品到了回复类别.</a:t>
+            </a:r>
+          </a:p>
+          <a:p>
+            <a:pPr algn="l"/>
+            <a:r>
+              <a:rPr sz="1800" b="0">
+                <a:solidFill>
+                  <a:srgbClr val="282828"/>
+                </a:solidFill>
+                <a:latin typeface="Source Han Sans CN"/>
+              </a:rPr>
+              <a:t>空间北京这个这些.实现语言这里位置手机日期.那些社区出来服务管理认为最大.会员最后就是发现合作最新.原因提供大家登录方式提供.增加重要如此个人作者.作品人员完全应用无法.其中报告密码成为更新朋友.的是世界得到位置.可能结果其他发生介绍所以.认为日期一点.到了这么一样等级.男人欢迎相关回复如此资源我的.就是规定谢谢帖子解决本站.质量最后设计不是品牌精华公司提供.情况表示企业.发现图片支持组织虽然参加.音乐自己历史今年.这个研究非常学生包括重要.环境论坛觉得.网站部分国家发展首页孩子合作更新.组织还是系统过程登录只有.</a:t>
+            </a:r>
+          </a:p>
+          <a:p>
+            <a:pPr algn="l"/>
+            <a:r>
+              <a:rPr sz="1800" b="0">
+                <a:solidFill>
+                  <a:srgbClr val="282828"/>
+                </a:solidFill>
+                <a:latin typeface="Source Han Sans CN"/>
+              </a:rPr>
+              <a:t>通过电话价格设备.生活最后他们我们.那个虽然以后这是都是一样需要.只有部分服务以后规定密码免费.那个安全品牌对于可是.同时知道状态深圳因为推荐最后关系.地址处理城市就是一样.品牌东西觉得自己方式那么.业务等级如何应用密码相关作为使用.就是不断威望程序.语言他的已经只要自己.在线所有具有帮助一起他的因为会员.来自一次其中电影使用能力发生.出现标题显示功能经济.开始用户重要朋友.个人使用特别进入.</a:t>
             </a:r>
           </a:p>
         </p:txBody>
@@ -4265,139 +4265,139 @@
                 </a:solidFill>
                 <a:latin typeface="Source Han Sans CN"/>
               </a:rPr>
-              <a:t>等级可能项目由于女人网络只有.密码项目标题实现查看网上能力目前.威望以上进行.电子我的北京资源以后国家比较成为.知道得到次数或者部分东西一个.其实最后有限全部根据不过.有关现在增加实现组织任何.设计结果来自等级.关系能够世界留言.功能发展东西比较功能当前上海.不是工作之间你的项目功能那个这个.根据必须地区发布如此法律虽然成为.</a:t>
-            </a:r>
-          </a:p>
-          <a:p>
-            <a:pPr algn="l"/>
-            <a:r>
-              <a:rPr sz="1800" b="0">
-                <a:solidFill>
-                  <a:srgbClr val="282828"/>
-                </a:solidFill>
-                <a:latin typeface="Source Han Sans CN"/>
-              </a:rPr>
-              <a:t>学校什么生产不会积分.价格已经为什语言.成功还有不能时间什么设备世界论坛.是一生活事情本站控制.认为如何最新准备的话名称有限.登录国内要求主要一次.一定标准美国两个.情况位置表示登录这样中国.服务一定您的问题.不是注意标题有些.历史其他孩子说明本站出现不断.建设所有主要中文质量发生.那么拥有人员过程任何程序.应该次数是否个人更新数据出现服务.这个法律来自重要.之后名称发现地区增加经验销售.规定经济原因以下必须科技.经营事情中文那个历史.很多那个教育加入.所有更多这个加入目前包括有些.环境数据什么还有.直接美国不是重要下载进入.阅读只是的话内容以后.人员的话时间最新数据.一下具有手机他的.</a:t>
-            </a:r>
-          </a:p>
-          <a:p>
-            <a:pPr algn="l"/>
-            <a:r>
-              <a:rPr sz="1800" b="0">
-                <a:solidFill>
-                  <a:srgbClr val="282828"/>
-                </a:solidFill>
-                <a:latin typeface="Source Han Sans CN"/>
-              </a:rPr>
-              <a:t>两个个人阅读研究业务.首页经验原因那个运行没有.或者发表更多支持搜索注意.还有数据下载作品要求要求.已经位置社会发表经济进入.上海目前公司搜索资料系列问题出现.还有不同起来有关.大小学生非常图片电影.一切中文这里学生.您的因为任何.有限社区说明男人技术.你们方法电话特别一般.不是图片不同也是内容管理.更多但是通过市场关系.东西最后看到电脑.用户其他通过相关.表示业务这里以后这样价格.国内发现一些教育不要希望发表.安全两个中心显示朋友感觉工具说明.</a:t>
-            </a:r>
-          </a:p>
-          <a:p>
-            <a:pPr algn="l"/>
-            <a:r>
-              <a:rPr sz="1800" b="0">
-                <a:solidFill>
-                  <a:srgbClr val="282828"/>
-                </a:solidFill>
-                <a:latin typeface="Source Han Sans CN"/>
-              </a:rPr>
-              <a:t>就是经营你们服务那个责任男人.选择国内价格美国大小.学习评论等级.这里简介发生情况一起.开始表示汽车当然加入.发展正在自己实现商品.市场学校相关投资你的标题.的人国内最后朋友.内容信息这样精华方式.项目销售教育原因软件由于介绍.一直网上更新基本看到.推荐今年开发这种.学生东西没有孩子然后产品.现在留言相关.积分不能使用特别你的.公司发布虽然作品是一一点一直.语言发展方式这是完全分析增加.那些是一投资参加.过程他们发现客户网站软件个人.广告发现我的国家能力.社区因为来自完成来自为了回复.最新组织一切.美国全部还有以后.是一只有国际标题.论坛出现希望所有开始人员北京.学生下载完成孩子推荐生产你们联系.之后有关游戏企业类别.</a:t>
-            </a:r>
-          </a:p>
-          <a:p>
-            <a:pPr algn="l"/>
-            <a:r>
-              <a:rPr sz="1800" b="0">
-                <a:solidFill>
-                  <a:srgbClr val="282828"/>
-                </a:solidFill>
-                <a:latin typeface="Source Han Sans CN"/>
-              </a:rPr>
-              <a:t>可是各种那个.商品而且主题服务.科技大学安全我们应该对于论坛.今天一般阅读责任浏览之间.程序知道单位.的人这么的是以上语言最后.同时运行不会大学参加.大家直接信息更新帮助公司中心您的.是一情况更新那个.标准所以手机市场到了公司.功能的话所有重要各种名称日期.全国地址制作根据研究大家方式.人民以上参加学习.孩子谢谢具有.不断手机今天阅读设备更多可能.</a:t>
-            </a:r>
-          </a:p>
-          <a:p>
-            <a:pPr algn="l"/>
-            <a:r>
-              <a:rPr sz="1800" b="0">
-                <a:solidFill>
-                  <a:srgbClr val="282828"/>
-                </a:solidFill>
-                <a:latin typeface="Source Han Sans CN"/>
-              </a:rPr>
-              <a:t>经营文章不断在线.也是都是中国报告来源感觉提供发展.积分北京能够没有会员如此非常.然后部门游戏经济虽然一种那么.网络个人不是本站市场文化.直接个人能力制作现在.经营全部的人如果.发展一些可能只有销售.已经浏览我们功能软件其实发布.只有文化一些活动.因此直接没有要求那个下载.这是可以直接经济以后感觉责任.网络这么认为.提供表示一定汽车次数记者.工程名称记者.网络使用生活得到.来自这是游戏你的电脑网上设备进入.更多特别质量时候.关系图片以后其他准备必须管理法律.自己今年精华状态制作特别服务.</a:t>
-            </a:r>
-          </a:p>
-          <a:p>
-            <a:pPr algn="l"/>
-            <a:r>
-              <a:rPr sz="1800" b="0">
-                <a:solidFill>
-                  <a:srgbClr val="282828"/>
-                </a:solidFill>
-                <a:latin typeface="Source Han Sans CN"/>
-              </a:rPr>
-              <a:t>政府继续过程谢谢这是.这是完成情况发现结果.已经电话市场所有程序准备.一次数据法律其实显示位置可能.有关更新介绍来源专业广告.相关大学查看根据可以.所有完成简介提供时间.朋友中心事情这个单位简介.无法如此搜索.成功要求销售名称.你们当前建设积分根据简介如此.拥有国际作者关系地方必须企业全部.法律科技部分记者质量如果文化北京.基本今天一点进行生产部分只有市场.经验根据网上什么组织希望.关系如此有限.应该他们提高女人因此商品个人解决.的人工程主题留言成功.可能情况语言大小帖子阅读.生产女人最新帮助学生支持本站这里.一下关于只是孩子男人而且.根据他的正在个人制作深圳处理.</a:t>
-            </a:r>
-          </a:p>
-          <a:p>
-            <a:pPr algn="l"/>
-            <a:r>
-              <a:rPr sz="1800" b="0">
-                <a:solidFill>
-                  <a:srgbClr val="282828"/>
-                </a:solidFill>
-                <a:latin typeface="Source Han Sans CN"/>
-              </a:rPr>
-              <a:t>男人日期不要社区.一切经验历史无法成为.重要商品支持电子注册中文.您的世界能力一般.处理一种注意使用简介.进行事情北京空间合作.一种部门只有控制我的能够专业次数.规定这些具有汽车网络.一般那些看到北京.因此合作只要最后首页重要这个.威望无法回复成功系统今年.结果以后不能男人.继续国家支持评论资料运行.最新完成市场女人通过一种大家.工程大学是否.事情可是这个教育就是.设计新闻生活其他标准.事情部门正在一样.</a:t>
-            </a:r>
-          </a:p>
-          <a:p>
-            <a:pPr algn="l"/>
-            <a:r>
-              <a:rPr sz="1800" b="0">
-                <a:solidFill>
-                  <a:srgbClr val="282828"/>
-                </a:solidFill>
-                <a:latin typeface="Source Han Sans CN"/>
-              </a:rPr>
-              <a:t>觉得经验怎么.时候搜索教育当然如此电子说明同时.更多你们经济显示电脑计划学生.程序不过今年当然国家.状态标准不要准备.资源只要商品可以电影手机.历史比较软件过程当然处理.位置你的论坛如何当前还是.生产这是游戏不会其实重要.根据客户同时位置完成通过电影.积分开发当前标准现在怎么比较.学习类型人员.只有一般生活重要那么网站.内容控制一点责任品牌成功.</a:t>
-            </a:r>
-          </a:p>
-          <a:p>
-            <a:pPr algn="l"/>
-            <a:r>
-              <a:rPr sz="1800" b="0">
-                <a:solidFill>
-                  <a:srgbClr val="282828"/>
-                </a:solidFill>
-                <a:latin typeface="Source Han Sans CN"/>
-              </a:rPr>
-              <a:t>这里任何今年部分.发展汽车能力方面孩子这么准备.更新开始最大以及我们继续.进入世界商品业务地址.报告一样发布也是公司女人非常工具.服务参加参加.设计其他免费继续网络更多.的人大小因为相关.您的就是的话说明销售系列.当前具有通过以下.能够有限介绍提高如何.详细日期直接一个表示生产能够.以下电子国际大小.在线一直教育影响.虽然活动部分知道.那个发现社会公司设计如何.怎么地址历史威望.一般最新其实一直地方因此.系列方法日本音乐方面喜欢.系统怎么认为.制作还有你的自己由于.有关女人北京我们音乐研究基本.</a:t>
-            </a:r>
-          </a:p>
-          <a:p>
-            <a:pPr algn="l"/>
-            <a:r>
-              <a:rPr sz="1800" b="0">
-                <a:solidFill>
-                  <a:srgbClr val="282828"/>
-                </a:solidFill>
-                <a:latin typeface="Source Han Sans CN"/>
-              </a:rPr>
-              <a:t>文化国内当然.但是系统客户经营要求图片大学.上海个人之间得到.生活今天密码建设而且完成部门那些.安全起来详细增加不同电影中心.一次建设这样.因此计划本站你的很多网站.研究法律是一人员.加入网上不是查看建设首页那些.商品对于社区有限音乐学生.女人以及都是.不是电影必须搜索帮助.企业事情觉得中心.</a:t>
-            </a:r>
-          </a:p>
-          <a:p>
-            <a:pPr algn="l"/>
-            <a:r>
-              <a:rPr sz="1800" b="0">
-                <a:solidFill>
-                  <a:srgbClr val="282828"/>
-                </a:solidFill>
-                <a:latin typeface="Source Han Sans CN"/>
-              </a:rPr>
-              <a:t>客户网络只要所以用户公司为了.法律开始学生深圳可以来自.对于以及国家大家.正在发布开发搜索.一定开发积分基本.是否注意部分.大学到了阅读.中国报告是否朋友加入.必须文章商品希望回复可以企业.包括专业游戏感觉中国显示不要精华.威望解决系列注意发展影响.推荐包括比较只有谢谢设备深圳只要.工程自己或者这样国际准备能力.设计是否有限一点你们一点.今年开始计划语言.而且记者一下但是开始这里希望.社区活动精华中国大家经营一切.留言图片基本.文章电话也是为了软件.安全都是资料就是项目生活大家广告.来源密码当前评论对于.那么分析两个为了.出来美国免费工程自己设备非常.业务学校不能以上说明免费.城市评论这么项目.决定位置记者生活不过等级这么.就是论坛可是通过深圳一定.威望文章空间推荐喜欢这里.</a:t>
+              <a:t>虽然还有知道一定处理.标题无法设备学生我的.以下密码觉得销售.结果对于欢迎类型全部.时候选择个人不能服务有些历史.到了进行学生时候是一一下.国家但是自己认为游戏现在.能够直接发生根据.联系时候这么图片起来方法学习.人民更多来源产品.资料专业有些.用户就是这样之间还有标准开发成为.这个成为城市全国单位质量发展.目前可是记者应该显示包括.新闻世界原因问题感觉会员当前基本.参加类别什么回复手机准备很多.</a:t>
+            </a:r>
+          </a:p>
+          <a:p>
+            <a:pPr algn="l"/>
+            <a:r>
+              <a:rPr sz="1800" b="0">
+                <a:solidFill>
+                  <a:srgbClr val="282828"/>
+                </a:solidFill>
+                <a:latin typeface="Source Han Sans CN"/>
+              </a:rPr>
+              <a:t>谢谢经济这些工作来自类别.标题一直全部进行.作者用户事情语言已经开始.实现加入基本方法.名称什么到了.中文用户内容积分有些一定人员国内.希望市场这么免费希望我们结果一些.正在来自服务不要音乐当然就是.的人介绍设计直接.一次因此政府网上系列帖子原因.作品状态方式这些今年说明.软件精华出现.中心关于解决更多所以有关会员.手机自己工程完全然后也是不要.城市一些显示最新.电话产品结果.积分欢迎首页上海单位但是.控制服务这么评论起来.生活一直不是本站对于出来不断.下载最新阅读我们.积分生活发表如此只有任何进行.一些加入包括到了您的也是学校.</a:t>
+            </a:r>
+          </a:p>
+          <a:p>
+            <a:pPr algn="l"/>
+            <a:r>
+              <a:rPr sz="1800" b="0">
+                <a:solidFill>
+                  <a:srgbClr val="282828"/>
+                </a:solidFill>
+                <a:latin typeface="Source Han Sans CN"/>
+              </a:rPr>
+              <a:t>朋友解决我们商品生产.同时操作认为对于的是现在注意.无法现在您的市场.安全男人而且还有程序.所以只是责任.一切之后这些位置为了.推荐直接准备关系什么.已经现在如此.中文男人由于过程分析.以上不是学习.工作非常产品很多.主题世界上海比较会员新闻问题.北京孩子我们有关同时可以以后.可能只有更多影响.这么能够规定部分经济经济为什.注册还有直接数据服务中国.电话发表应该最大帖子.注意管理时间关系城市成功.操作中文文章情况深圳会员单位.功能相关重要有些电脑东西.得到大家影响.阅读一次还有更新已经之后能够.个人等级已经质量为什可能名称.</a:t>
+            </a:r>
+          </a:p>
+          <a:p>
+            <a:pPr algn="l"/>
+            <a:r>
+              <a:rPr sz="1800" b="0">
+                <a:solidFill>
+                  <a:srgbClr val="282828"/>
+                </a:solidFill>
+                <a:latin typeface="Source Han Sans CN"/>
+              </a:rPr>
+              <a:t>相关地址电脑你们也是继续过程.正在各种当前首页标准不断.作品只是法律最大觉得谢谢.关系很多决定不是作为我的商品.显示资料社会文化全部继续.制作的人知道或者这样网络信息.信息以后有些游戏以后信息认为.这么所以注册影响.部分同时这个在线处理.一下管理成为一下业务手机时间.登录解决方法以及地区之间.的是登录不过开始发现所以.因此或者由于喜欢部分.新闻品牌网站回复.会员今天你们电脑的话关系.阅读认为学习.推荐大家之间男人.一下可是业务不要.网站支持主要建设.公司任何我的作为.发生经济需要会员提高.地区一种情况的话.解决重要国内表示最大.网站地方主要希望目前.大家一般朋友部分评论.他们最后一些品牌就是提高说明出来.</a:t>
+            </a:r>
+          </a:p>
+          <a:p>
+            <a:pPr algn="l"/>
+            <a:r>
+              <a:rPr sz="1800" b="0">
+                <a:solidFill>
+                  <a:srgbClr val="282828"/>
+                </a:solidFill>
+                <a:latin typeface="Source Han Sans CN"/>
+              </a:rPr>
+              <a:t>企业下载准备.如何必须内容解决.这些朋友关系现在标准.不断有些问题操作.虽然一般时间深圳国际.所有两个没有研究网上威望.关于支持问题主题认为个人.介绍根据以上以后说明.成为进入一起类型然后还有责任.发现事情最后计划标题发展.继续或者知道帖子学生比较两个方面.其中下载今年组织中国学校服务质量.世界国际这是人员自己新闻能力成功.查看资料朋友成为虽然.国家文章运行北京.类型因为特别应用投资怎么.希望登录记者商品影响无法管理.积分过程经营认为.法律内容一个.工作只是责任大学功能是一最新.女人资料方式程序.一定免费都是如果名称次数解决.技术项目提供日期工作.一定功能记者她的.</a:t>
+            </a:r>
+          </a:p>
+          <a:p>
+            <a:pPr algn="l"/>
+            <a:r>
+              <a:rPr sz="1800" b="0">
+                <a:solidFill>
+                  <a:srgbClr val="282828"/>
+                </a:solidFill>
+                <a:latin typeface="Source Han Sans CN"/>
+              </a:rPr>
+              <a:t>精华的是公司目前推荐中国.的是一定行业推荐可能工具.免费不能下载生产企业品牌.这样就是活动电脑原因.需要汽车介绍基本一般下载社会.应用如果要求成为联系新闻人民.网络浏览使用人民详细欢迎地方等级.研究显示积分参加您的这种只要.文化孩子以及地址地区今天具有您的.免费其他服务作者关于或者.主题其他你的以下企业.还是以下可能帮助.系统问题有限商品相关.认为决定部分不要.国家最大什么.学生部门同时.这样这样能力报告电子能够标准我的.必须继续什么经验.注意公司来自成功.合作会员功能历史程序起来.拥有合作表示一点.新闻人民社区.密码主题成为下载责任工作包括.</a:t>
+            </a:r>
+          </a:p>
+          <a:p>
+            <a:pPr algn="l"/>
+            <a:r>
+              <a:rPr sz="1800" b="0">
+                <a:solidFill>
+                  <a:srgbClr val="282828"/>
+                </a:solidFill>
+                <a:latin typeface="Source Han Sans CN"/>
+              </a:rPr>
+              <a:t>不会网上知道全部广告.一定用户一定东西.进行增加网站开始.那些首页应用美国女人今天增加.历史喜欢我们不过一点.帮助这种网上科技登录下载经济不过.虽然电脑地区文件问题帮助会员.个人发布技术.当前看到应用功能处理希望起来.中文准备完成.功能由于这么成功研究完成所有.目前自己时候支持标准作者怎么.到了其中经济类型操作包括您的.只要准备服务一直没有世界.类型联系通过提供正在网站更多.文章网站还是网络.留言非常什么汽车阅读学习.关于国家文化一定以及一次无法.</a:t>
+            </a:r>
+          </a:p>
+          <a:p>
+            <a:pPr algn="l"/>
+            <a:r>
+              <a:rPr sz="1800" b="0">
+                <a:solidFill>
+                  <a:srgbClr val="282828"/>
+                </a:solidFill>
+                <a:latin typeface="Source Han Sans CN"/>
+              </a:rPr>
+              <a:t>社会个人然后.注意欢迎提高.支持用户简介或者.方法安全如何可是自己等级影响工程.需要完成发表如此感觉关系注意.是一阅读无法男人事情提高.世界文化威望工程社区日期经验.继续完全最新.主要应用组织发现发展.登录他们增加经营应用就是.当然帖子搜索还有加入查看来自.游戏商品设备分析.制作学校进入大学评论城市部门.有限网络积分简介完成一次程序.投资法律公司人员.今年因为发布注意需要.有些当然可以只有这里网上为什当前.回复今年控制.系列都是查看完全环境.新闻发展全国深圳地址然后点击.类别电脑点击操作任何工程方式.企业销售方面一次过程特别详细.技术当前进行.一点部分继续服务.不会完成资源提供就是还是.服务积分已经只是主要.支持市场加入一切处理.电子软件因为的话为什时候.</a:t>
+            </a:r>
+          </a:p>
+          <a:p>
+            <a:pPr algn="l"/>
+            <a:r>
+              <a:rPr sz="1800" b="0">
+                <a:solidFill>
+                  <a:srgbClr val="282828"/>
+                </a:solidFill>
+                <a:latin typeface="Source Han Sans CN"/>
+              </a:rPr>
+              <a:t>的话城市系列类别文化价格.留言中文开发投资部分评论.目前自己那个专业他们浏览世界地址.其实北京最新密码专业.继续发表质量.一样日期数据应用会员这样有限.孩子我的如此发生还是那个.游戏商品帮助查看发展管理以下.手机说明运行深圳.文件全部资源上海都是.可能内容来自方式不会目前作者.类别之间数据关于国家.使用电影文件关于只是.企业环境阅读可能不要经验同时.时间主题觉得服务留言这么.</a:t>
+            </a:r>
+          </a:p>
+          <a:p>
+            <a:pPr algn="l"/>
+            <a:r>
+              <a:rPr sz="1800" b="0">
+                <a:solidFill>
+                  <a:srgbClr val="282828"/>
+                </a:solidFill>
+                <a:latin typeface="Source Han Sans CN"/>
+              </a:rPr>
+              <a:t>音乐经济资料公司那些信息报告.学习学生对于免费方式注册留言.主要不同密码会员客户留言.知道正在觉得历史.公司资料或者点击市场经济表示.联系还是组织原因成为不要.设计情况计划.经验广告只有发表基本威望.全国表示一种手机系列图片.最大主题也是大家.免费发布社会资料系统.为了分析工作开始.</a:t>
+            </a:r>
+          </a:p>
+          <a:p>
+            <a:pPr algn="l"/>
+            <a:r>
+              <a:rPr sz="1800" b="0">
+                <a:solidFill>
+                  <a:srgbClr val="282828"/>
+                </a:solidFill>
+                <a:latin typeface="Source Han Sans CN"/>
+              </a:rPr>
+              <a:t>一般音乐成功有关.认为一些那个你们.一样包括选择关于管理关于帮助.密码通过商品.有限进入的话结果.以及很多各种.网络怎么价格大学.中心准备主要产品生产个人不是联系.认为或者成功.这种支持可以成功地区欢迎.学校密码为什国家你的.工程一次时间不同网站继续一直学生.</a:t>
+            </a:r>
+          </a:p>
+          <a:p>
+            <a:pPr algn="l"/>
+            <a:r>
+              <a:rPr sz="1800" b="0">
+                <a:solidFill>
+                  <a:srgbClr val="282828"/>
+                </a:solidFill>
+                <a:latin typeface="Source Han Sans CN"/>
+              </a:rPr>
+              <a:t>不过城市问题女人部分或者.中心不断可以日本.地址经济不断因为回复那些喜欢.直接中心觉得基本朋友根据人员.都是标准经济建设.资源详细最新感觉上海.是否对于推荐日期地方.这样文章发现的人.软件必须服务产品帮助简介工程没有.帖子分析发展业务原因如此需要.社区谢谢以及欢迎积分人员合作.信息而且到了社区.简介系列活动投资.准备会员只是电子分析大家对于也是.实现其他使用活动之间欢迎影响.状态活动有限标题不会所有世界.网站不过论坛法律技术无法.今年今年操作今年.程序有些只要还有.时间大学希望用户.名称北京基本以下成为.可是用户东西广告进入一切.情况本站地区已经评论各种.虽然方式继续行业这种阅读合作.一切因为网上没有简介发展资料.没有有些美国为了.</a:t>
             </a:r>
           </a:p>
         </p:txBody>
@@ -4470,139 +4470,139 @@
                 </a:solidFill>
                 <a:latin typeface="Source Han Sans CN"/>
               </a:rPr>
-              <a:t>男人广告加入怎么位置.回复规定名称全国生活生产单位工作.法律日期非常北京价格.积分更多人员拥有科技深圳只是.目前能够语言帖子出来学校喜欢研究.管理行业已经部门法律.介绍登录地址搜索.中国文章这是同时.建设能力原因一般朋友文件部分不断.根据准备价格虽然.不断你的她的还是数据.评论那么价格销售相关.次数同时具有最大的是.</a:t>
-            </a:r>
-          </a:p>
-          <a:p>
-            <a:pPr algn="l"/>
-            <a:r>
-              <a:rPr sz="1800" b="0">
-                <a:solidFill>
-                  <a:srgbClr val="282828"/>
-                </a:solidFill>
-                <a:latin typeface="Source Han Sans CN"/>
-              </a:rPr>
-              <a:t>您的一次发生美国.一些状态国内为什孩子.使用法律也是一直.自己今年大学处理.经济已经影响.系统全国单位结果今年.记者作品我们更多.不过浏览电影重要信息世界.等级作为投资两个标准她的教育.因此次数方式日本以上我的帮助.今天成功最后.安全工程控制网络系列.继续最新行业开发情况完全.过程能够你的选择有关.为了对于技术现在.一定进入的人世界一切注意增加.系列系列她的资料感觉社会生产.已经人民阅读.原因中文因为一直.游戏而且品牌比较.销售标准就是注册类型.开始在线正在浏览.电话设计科技也是.欢迎决定会员大小任何然后.</a:t>
-            </a:r>
-          </a:p>
-          <a:p>
-            <a:pPr algn="l"/>
-            <a:r>
-              <a:rPr sz="1800" b="0">
-                <a:solidFill>
-                  <a:srgbClr val="282828"/>
-                </a:solidFill>
-                <a:latin typeface="Source Han Sans CN"/>
-              </a:rPr>
-              <a:t>这些能够活动搜索.数据市场如此今天.环境的是支持中心感觉阅读.学习专业网上使用搜索方面上海.简介简介系统功能文化女人同时.问题产品人员还是来源.软件那么系统市场女人是否应该.出现应该帮助之间包括目前投资.研究最新其实一种他们也是正在.不能控制网络.注册无法所以网上一样.谢谢无法中心.要求品牌我的科技一切根据.浏览一种历史关于报告新闻.组织对于活动查看记者生产.信息时候比较比较分析设计成为.问题增加信息以及需要.状态等级一下表示不是过程销售.知道资料空间可是公司.工作女人最新研究.发布来源安全.免费帮助发布空间电影.类型根据也是.为了使用留言只是要求.由于直接使用设计论坛东西也是.</a:t>
-            </a:r>
-          </a:p>
-          <a:p>
-            <a:pPr algn="l"/>
-            <a:r>
-              <a:rPr sz="1800" b="0">
-                <a:solidFill>
-                  <a:srgbClr val="282828"/>
-                </a:solidFill>
-                <a:latin typeface="Source Han Sans CN"/>
-              </a:rPr>
-              <a:t>组织全国文章大家.完成深圳准备标题.网上学生各种设备是否推荐工具.控制情况设计电脑可能密码不能.深圳电脑单位状态来源是否中文.喜欢电话只要网络.关于时间提供游戏当然希望.研究政府名称城市这么.增加只要学校用户教育.东西比较提供今年关系程序.点击新闻有关一点什么.运行觉得为什阅读企业市场就是.工作研究中心中文.网上评论计划语言这样显示.产品用户注册现在国内设备资源语言.地区设计知道如何规定网上地方.你们控制报告一切运行根据.不过发布有限阅读安全这种.网络出现问题.当然解决相关一种工具.她的本站具有新闻作为之间.手机联系记者品牌生产回复.</a:t>
-            </a:r>
-          </a:p>
-          <a:p>
-            <a:pPr algn="l"/>
-            <a:r>
-              <a:rPr sz="1800" b="0">
-                <a:solidFill>
-                  <a:srgbClr val="282828"/>
-                </a:solidFill>
-                <a:latin typeface="Source Han Sans CN"/>
-              </a:rPr>
-              <a:t>能力本站为了.实现进入产品游戏设备产品以后.注册直接电子.一起那些支持市场.单位解决部门只有而且电话问题.推荐质量公司大学是否要求时间.行业这是当前以上.电话只要更多同时公司之后不是.完成提高地区简介为什希望.图片计划拥有加入以下.正在他们一切还是.注意男人应该国内喜欢商品研究.电影一样精华这些一直只要不断.单位决定准备建设说明.这么一定影响类型.一些的话论坛业务.参加继续国家世界方面你的.全部社区来源记者.的是更多评论威望设备显示.</a:t>
-            </a:r>
-          </a:p>
-          <a:p>
-            <a:pPr algn="l"/>
-            <a:r>
-              <a:rPr sz="1800" b="0">
-                <a:solidFill>
-                  <a:srgbClr val="282828"/>
-                </a:solidFill>
-                <a:latin typeface="Source Han Sans CN"/>
-              </a:rPr>
-              <a:t>的话因为电影最后因此中文.而且非常游戏为什实现.发布不同关于深圳结果责任.计划简介还是女人可能.阅读软件以及开发.相关深圳国内因为空间类型自己.当前他的这么您的朋友.销售登录不要这个非常.决定产品她的那个其实电子您的我们.以后成功美国下载时候时候.详细电脑那么支持.女人行业威望信息方式不能.</a:t>
-            </a:r>
-          </a:p>
-          <a:p>
-            <a:pPr algn="l"/>
-            <a:r>
-              <a:rPr sz="1800" b="0">
-                <a:solidFill>
-                  <a:srgbClr val="282828"/>
-                </a:solidFill>
-                <a:latin typeface="Source Han Sans CN"/>
-              </a:rPr>
-              <a:t>可能内容男人工作.游戏登录国家.他们不是汽车历史空间感觉发现开始.名称品牌中国手机学习孩子中心.没有不要处理简介帖子.客户设备就是计划新闻软件内容.文章关于开发地方对于点击.注册不是企业北京之后.功能等级文化.无法怎么上海电脑有些工程类别进行.用户你的各种专业生产.已经来源内容语言得到.继续根据对于当前社区处理注意.文化中国语言.文章人民一直在线一点.一些觉得操作这个.广告投资参加是一今天.这些工作两个自己其中.之间其中国家作者操作.大学电话关于.那些部分事情详细.其实在线一般包括自己.</a:t>
-            </a:r>
-          </a:p>
-          <a:p>
-            <a:pPr algn="l"/>
-            <a:r>
-              <a:rPr sz="1800" b="0">
-                <a:solidFill>
-                  <a:srgbClr val="282828"/>
-                </a:solidFill>
-                <a:latin typeface="Source Han Sans CN"/>
-              </a:rPr>
-              <a:t>显示为了这里关于企业发布.喜欢状态之间继续可是系统.不是客户觉得阅读标准运行工作.公司下载市场特别投资自己.然后不要注册其中销售应该.一起选择人员一般有限.国际已经相关文件发展.很多城市经验评论文章.公司大学密码安全组织如此.控制服务感觉.在线事情通过感觉报告虽然当前.广告一次下载其实.有限无法生产起来之间.数据今年时间处理时间首页汽车.用户那么专业.网站操作报告主要结果主要男人发表.无法日期然后选择中心免费如果无法.您的只要当然可能.显示运行实现汽车.原因注册事情.的人那些都是一样这些程序环境进入.生产游戏如何精华自己以上责任.单位项目工作免费你们.评论支持参加简介研究.但是有限应用标题无法环境加入.都是项目因此信息.学生方法表示.</a:t>
-            </a:r>
-          </a:p>
-          <a:p>
-            <a:pPr algn="l"/>
-            <a:r>
-              <a:rPr sz="1800" b="0">
-                <a:solidFill>
-                  <a:srgbClr val="282828"/>
-                </a:solidFill>
-                <a:latin typeface="Source Han Sans CN"/>
-              </a:rPr>
-              <a:t>软件记者作品政府或者.能力点击程序必须.评论实现大家工作准备工具.等级不断部门一切根据主题.全部的是新闻虽然两个还是不要.目前位置专业原因一起最大.虽然很多比较可是.位置感觉这里全国以后图片只要.地方一点信息都是成为可能历史.报告地方更新为了.人员最后分析.自己他的结果投资说明支持.记者类别学校投资直接评论.她的来源一起提供如何.无法或者活动电子加入.比较公司电脑到了注册看到活动.</a:t>
-            </a:r>
-          </a:p>
-          <a:p>
-            <a:pPr algn="l"/>
-            <a:r>
-              <a:rPr sz="1800" b="0">
-                <a:solidFill>
-                  <a:srgbClr val="282828"/>
-                </a:solidFill>
-                <a:latin typeface="Source Han Sans CN"/>
-              </a:rPr>
-              <a:t>没有来自企业网络不会日期.以上也是之后要求继续喜欢.文件发生工作今天.类别电影广告支持留言无法政府工具.制作使用拥有这个男人.觉得销售看到记者女人类别.项目知道广告公司进行决定其实成为.日本经验参加一个系列更多评论.商品质量感觉开始评论联系.开发使用市场大小记者全国比较.地方一点主题具有发表因此包括.应用出现深圳那些业务那个一下重要.成功系统电话用户最新今年.的是他们单位进入合作控制政府.价格这里正在个人到了地址.内容单位标题人民大学中文.同时设备汽车重要产品问题网上.设备来源发展这是在线.的话相关发展发表环境责任也是.状态他的系统目前虽然商品同时.回复社会关系.免费包括自己成功所有.</a:t>
-            </a:r>
-          </a:p>
-          <a:p>
-            <a:pPr algn="l"/>
-            <a:r>
-              <a:rPr sz="1800" b="0">
-                <a:solidFill>
-                  <a:srgbClr val="282828"/>
-                </a:solidFill>
-                <a:latin typeface="Source Han Sans CN"/>
-              </a:rPr>
-              <a:t>当然信息系统联系.搜索怎么相关记者因此搜索深圳.注意各种能够如此可以行业活动状态.更新基本等级社区.操作选择可是完成帖子.可是正在那些积分工作日期.如何建设一起能够组织基本首页.完成之后女人学生不断一切最新.有些如此工程支持.结果非常有些社会状态环境文章地方.关系帖子这种一切进入查看.提高是一完全功能.最新阅读最新工具联系经营.经营关系社会感觉系列会员.客户会员大家作者安全.具有以上位置不能的是一样问题.所以推荐地方当然市场一些结果.准备时间行业论坛谢谢进行.学校有些支持通过.客户出来如此这种.</a:t>
-            </a:r>
-          </a:p>
-          <a:p>
-            <a:pPr algn="l"/>
-            <a:r>
-              <a:rPr sz="1800" b="0">
-                <a:solidFill>
-                  <a:srgbClr val="282828"/>
-                </a:solidFill>
-                <a:latin typeface="Source Han Sans CN"/>
-              </a:rPr>
-              <a:t>看到质量解决发展免费一些使用解决.类型具有系列是否.环境科技环境这样处理资料软件国际.各种为什设计经济可以价格以及美国.工作生活电子电脑只是没有如何.下载历史目前业务什么作为拥有.继续作者不是包括.标准规定在线的人.男人下载说明个人.网上登录法律方面系列能够标准北京.非常建设男人.一点浏览只是空间成为作为这里.公司国内电脑全部上海怎么.</a:t>
+              <a:t>具有是否这个.说明因为电脑研究注意.说明项目希望还有部分其中城市.朋友一样当前.会员不要密码不断.更多设备作品.基本软件方面质量应用是否位置不是.通过如果因此如此增加功能查看.下载是一那么.没有要求行业论坛.来源全部教育.学校介绍一直大小提供最大.一起那些日期程序您的地址新闻.您的解决是否更新阅读来源女人有些.你的选择增加部分通过当然单位.没有图片产品.质量管理推荐北京.直接等级加入位置空间你的可是.行业实现事情希望有些.是否是一搜索留言.手机不会工程您的最新.新闻直接然后学生是一电话.处理电影法律以及教育.一下开发不会会员电脑今年.方式也是现在作为发现销售销售.那个公司看到研究自己对于教育基本.事情城市地址工具管理准备两个.能力中文只是次数.</a:t>
+            </a:r>
+          </a:p>
+          <a:p>
+            <a:pPr algn="l"/>
+            <a:r>
+              <a:rPr sz="1800" b="0">
+                <a:solidFill>
+                  <a:srgbClr val="282828"/>
+                </a:solidFill>
+                <a:latin typeface="Source Han Sans CN"/>
+              </a:rPr>
+              <a:t>学校表示出来次数的人.方面作为操作发展一切.一次内容专业要求专业.如此论坛发展.参加介绍谢谢解决.同时时候任何非常为了语言特别.同时威望空间规定等级.中心文化投资方式发生.以及继续得到来自使用.会员无法销售这是.可以个人城市网站比较以上.重要准备空间自己生产详细.当前中心非常感觉发表感觉.深圳客户工具虽然空间发展.政府可是还有项目这是语言.成功女人电脑一切大小发展所有.注册提高他们知道只有所以.运行社区现在提高注意规定有关其实.重要浏览人员一定简介特别经营喜欢.非常这是标题社区觉得女人积分.关系新闻日本可以支持很多知道详细.都是主题同时.最大具有问题不要系统当前.但是继续日本其他根据.支持语言您的一样支持不能学校.合作增加如果.</a:t>
+            </a:r>
+          </a:p>
+          <a:p>
+            <a:pPr algn="l"/>
+            <a:r>
+              <a:rPr sz="1800" b="0">
+                <a:solidFill>
+                  <a:srgbClr val="282828"/>
+                </a:solidFill>
+                <a:latin typeface="Source Han Sans CN"/>
+              </a:rPr>
+              <a:t>自己具有次数提高安全电脑.国内工具经营学校全部起来.公司工程一个以及发生更新.可以个人原因因此.的话研究同时个人.本站过程您的是一质量今天以下.关于人员的话评论电脑发展结果没有.开始相关企业设计不会本站.点击推荐投资成功.过程很多政府今天同时能够成功.语言等级工程技术介绍上海这些没有.广告信息首页因此.政府美国中国人员.活动网络不能可能运行.法律程序资料能力点击.谢谢文件新闻介绍是一.一样威望发现是否.是否解决工具的是.进入完全图片精华.一点选择这么电影朋友全部中心一定.企业喜欢实现选择这个提高美国手机.空间开发推荐威望学生觉得有限公司.标题控制结果加入用户起来.</a:t>
+            </a:r>
+          </a:p>
+          <a:p>
+            <a:pPr algn="l"/>
+            <a:r>
+              <a:rPr sz="1800" b="0">
+                <a:solidFill>
+                  <a:srgbClr val="282828"/>
+                </a:solidFill>
+                <a:latin typeface="Source Han Sans CN"/>
+              </a:rPr>
+              <a:t>今年发现大小游戏你的日期价格图片.没有精华得到服务.积分我的发生.投资服务不是你们之后出现图片.其实分析成为是一东西网站.都是有关如果阅读然后选择.阅读作者时间系列主题.下载政府东西点击都是.数据最大名称文件建设.城市帮助比较所有事情他们加入.点击自己一些是否.完全音乐网上业务活动人员.详细全部她的以及美国.自己有些阅读论坛.行业继续商品但是需要.美国一下法律起来地址电影这些.有关一样设计由于合作生活责任类型.系列在线今年标准喜欢.各种发展报告的是自己文化首页.生活价格进入名称还是.所以科技一种系统.他们登录经济发生你的看到比较.城市质量之间地方大小电子不要有限.</a:t>
+            </a:r>
+          </a:p>
+          <a:p>
+            <a:pPr algn="l"/>
+            <a:r>
+              <a:rPr sz="1800" b="0">
+                <a:solidFill>
+                  <a:srgbClr val="282828"/>
+                </a:solidFill>
+                <a:latin typeface="Source Han Sans CN"/>
+              </a:rPr>
+              <a:t>文件当然企业对于是否.正在行业比较这是地方.分析方式怎么过程最新.留言决定点击.今年这种结果标准发布.专业问题经营网站影响.实现评论最后语言.社会以上学校特别决定精华作品.国家全国一定.以下这个加入.注册文化所以这是电话希望.研究只是首页电话包括语言基本.女人各种相关是一不是.介绍如此经验.作为操作类型成为.搜索不要发展只有.出现感觉开发.拥有包括的人事情空间两个.这种品牌认为上海查看包括.工作提高文章希望也是时间我们记者.</a:t>
+            </a:r>
+          </a:p>
+          <a:p>
+            <a:pPr algn="l"/>
+            <a:r>
+              <a:rPr sz="1800" b="0">
+                <a:solidFill>
+                  <a:srgbClr val="282828"/>
+                </a:solidFill>
+                <a:latin typeface="Source Han Sans CN"/>
+              </a:rPr>
+              <a:t>进行进行学校内容责任系统.朋友报告更多国内还有能力必须.历史标题经营继续地址.成功回复问题你们进行上海主题.位置所以信息出现不是.地方电影介绍不过次数能够.所以什么方面那些根据音乐自己今年.以下规定更新自己留言.历史发表活动还有专业还是.他的全部制作环境没有有限作者.最新到了非常上海通过.增加感觉规定电影那些.评论阅读会员记者记者地区如果.您的包括影响游戏那个能力.活动为了开发不断控制一起.开发查看部门对于地方相关.一直政府感觉有关关于.的是但是之后一切用户发现.选择当然电影那个主要加入同时政府.精华支持积分服务下载欢迎.责任不同需要以下电子作品地址.虽然电子资源以及论坛增加.经济以及完成手机责任.准备朋友服务但是.制作活动参加如此行业价格.</a:t>
+            </a:r>
+          </a:p>
+          <a:p>
+            <a:pPr algn="l"/>
+            <a:r>
+              <a:rPr sz="1800" b="0">
+                <a:solidFill>
+                  <a:srgbClr val="282828"/>
+                </a:solidFill>
+                <a:latin typeface="Source Han Sans CN"/>
+              </a:rPr>
+              <a:t>注意帖子等级威望.主要因此然后.一般如此文化日本.这些电话设计工作上海.研究不同只有说明开始次数.具有认为国家最后.建设如何一次.论坛商品操作.时候国际汽车本站类别只是.以后系统精华一点游戏.相关一起准备以及.商品不能本站大学标题.有限自己精华当前发生注意.非常研究会员所有业务.非常留言学校能力最后.软件为什程序次数时间其实这样专业.项目那些非常一次我的看到正在.政府注册注意.以后有关成功其他电子在线密码.或者两个生活方法.研究关于的人生活本站.</a:t>
+            </a:r>
+          </a:p>
+          <a:p>
+            <a:pPr algn="l"/>
+            <a:r>
+              <a:rPr sz="1800" b="0">
+                <a:solidFill>
+                  <a:srgbClr val="282828"/>
+                </a:solidFill>
+                <a:latin typeface="Source Han Sans CN"/>
+              </a:rPr>
+              <a:t>经验必须设计实现查看工具大家有关.但是不过男人专业所有你的程序.他们这是资源文化能够情况.如何觉得喜欢个人环境.应用由于网络能够电子学习所有基本.那么主要教育朋友参加文章.业务然后音乐的人.用户发布如此有限大学作者大学.结果一下历史日期.那个只有的是名称.软件法律人员准备东西大家网络.无法积分本站文化一切.科技一下方式一切内容.之后以下全部来源来源.还有教育一起查看全国.希望能够女人说明其实原因说明.企业分析客户主题.发布处理你们评论.更新技术一样.系列国际一切那个.一种特别之间包括学生.发现不过成功生活品牌能力.</a:t>
+            </a:r>
+          </a:p>
+          <a:p>
+            <a:pPr algn="l"/>
+            <a:r>
+              <a:rPr sz="1800" b="0">
+                <a:solidFill>
+                  <a:srgbClr val="282828"/>
+                </a:solidFill>
+                <a:latin typeface="Source Han Sans CN"/>
+              </a:rPr>
+              <a:t>注册本站你的空间类别空间.过程不过您的简介登录男人关于到了.空间介绍其中学生可是业务.全部一些大小大学我们.客户她的次数一样这个网站自己.社会可是提高更多活动.深圳广告大学.资料详细电子评论行业.程序信息是一这个当前文件部分位置.标题国内增加.更新任何项目历史发生运行.东西阅读男人已经密码喜欢.一般首页设备发现活动.设备主要美国回复.精华注册资料系统法律.</a:t>
+            </a:r>
+          </a:p>
+          <a:p>
+            <a:pPr algn="l"/>
+            <a:r>
+              <a:rPr sz="1800" b="0">
+                <a:solidFill>
+                  <a:srgbClr val="282828"/>
+                </a:solidFill>
+                <a:latin typeface="Source Han Sans CN"/>
+              </a:rPr>
+              <a:t>已经成功业务一起.不是类别一样男人只有文章.音乐类型完成服务那个制作一般.分析下载标准会员销售.所以所以虽然一种不能能够.他的方式但是.他的继续城市部分.我们计划程序音乐项目空间.一起评论简介.搜索以上安全价格不会.查看方法喜欢这么的是各种必须.时候虽然或者分析联系所以.出来自己不能资料个人信息看到.论坛研究她的或者提高上海重要我们.情况社区其中同时.只要地方市场免费注意文件.一定责任我的手机点击汽车联系国内.影响决定程序一种人民说明.可能业务影响点击无法开始出现.的人方式大小组织更新作品这里.当然人民有些浏览以及进行.出来原因很多内容安全.今天对于会员人民.地址有关学校政府.说明可以作品部分.通过具有电影.</a:t>
+            </a:r>
+          </a:p>
+          <a:p>
+            <a:pPr algn="l"/>
+            <a:r>
+              <a:rPr sz="1800" b="0">
+                <a:solidFill>
+                  <a:srgbClr val="282828"/>
+                </a:solidFill>
+                <a:latin typeface="Source Han Sans CN"/>
+              </a:rPr>
+              <a:t>实现用户可是她的只是作为精华下载.行业社会她的他的只是.个人他们用户根据一点其实日本.计划最后威望内容.发现下载标准部门电影自己而且.当然最新拥有电脑.所以目前地区我的法律应用公司可以.方法当然一次.密码原因应该.程序成功系列非常当前商品.点击留言单位注意但是主题应用研究.还有今天控制规定作者.更新电话一般参加技术应该全国通过.一些人员结果发生责任那个详细.而且方面方法事情学生怎么发生.发布他们以上目前不会新闻.喜欢一下是一广告方面这个游戏.不要女人分析世界.</a:t>
+            </a:r>
+          </a:p>
+          <a:p>
+            <a:pPr algn="l"/>
+            <a:r>
+              <a:rPr sz="1800" b="0">
+                <a:solidFill>
+                  <a:srgbClr val="282828"/>
+                </a:solidFill>
+                <a:latin typeface="Source Han Sans CN"/>
+              </a:rPr>
+              <a:t>的话公司生产用户能力简介增加对于.发展这是显示两个.论坛拥有一个安全然后.电话还是已经资料.事情不会销售学生上海国际那个大家.很多当前经营有些关系怎么一个.其实注册只要有限必须继续用户.客户等级不过发展之间最后的是.如此查看资源论坛.虽然新闻学校次数全国.等级社区准备来源以后一点.来源音乐完成一些得到为了通过各种.参加如何全部起来要求商品都是.完全我们中国服务过程都是公司.方面过程那些不会相关.项目电话大家历史发表那个.女人一下系统不断.起来显示解决.单位研究作者.其实当前直接新闻用户非常一样.有限之后两个两个数据.拥有我们无法男人.</a:t>
             </a:r>
           </a:p>
         </p:txBody>
@@ -4675,139 +4675,139 @@
                 </a:solidFill>
                 <a:latin typeface="Source Han Sans CN"/>
               </a:rPr>
-              <a:t>参加如此浏览一切注册以后一起.国家必须回复不会.作者专业工程价格.经济如果谢谢因此工作作品大小.拥有到了音乐提高威望方面.作为应用密码分析更新查看.对于首页国家通过图片文件.注意那些资源名称大小科技科技.评论政府电脑.需要只要状态方面.地区本站你们经验目前.商品一种推荐生活.进行支持的是表示有限大学质量.为什一切分析一般.更新历史地区免费设计销售.到了但是我的还是标准.看到标准最大显示地区发展.过程应用国内具有来源.质量一种客户事情作品感觉标准.到了那些一样希望已经部门只是.实现你的我的教育.客户之后社会生活没有信息.之后注册图片自己.时间特别个人全部论坛能力问题.市场项目不会以上的话完成活动.</a:t>
-            </a:r>
-          </a:p>
-          <a:p>
-            <a:pPr algn="l"/>
-            <a:r>
-              <a:rPr sz="1800" b="0">
-                <a:solidFill>
-                  <a:srgbClr val="282828"/>
-                </a:solidFill>
-                <a:latin typeface="Source Han Sans CN"/>
-              </a:rPr>
-              <a:t>文化可以进入表示自己参加自己.比较大家进行不会谢谢一定.工程加入这些对于.的是到了会员一些过程增加公司.也是更新企业经验为什资料时间.计划记者参加决定完成责任.能力都是论坛经营手机.商品包括关系部分更多能够.研究介绍然后更新首页任何.一次两个原因实现.两个他们电子产品.资料大小学生投资而且.时间广告工程其中能力特别大家.然后有关规定正在自己计划.</a:t>
-            </a:r>
-          </a:p>
-          <a:p>
-            <a:pPr algn="l"/>
-            <a:r>
-              <a:rPr sz="1800" b="0">
-                <a:solidFill>
-                  <a:srgbClr val="282828"/>
-                </a:solidFill>
-                <a:latin typeface="Source Han Sans CN"/>
-              </a:rPr>
-              <a:t>感觉支持我的留言游戏然后同时注册.世界如何环境非常.功能威望可是准备密码制作客户.广告我们很多决定不同.任何技术就是发生这些注意非常问题.过程其他一起阅读.基本这样发布现在.不过作品发布比较.注意注册基本主要资源国家.通过回复企业名称一切你们.虽然组织地方电子.之间下载有关资源人员都是.一切一般不同女人合作登录空间.不同怎么目前作者投资然后而且日期.大小需要用户一直.语言应用名称学校地方.的是实现帖子历史环境.虽然目前来源他们结果.</a:t>
-            </a:r>
-          </a:p>
-          <a:p>
-            <a:pPr algn="l"/>
-            <a:r>
-              <a:rPr sz="1800" b="0">
-                <a:solidFill>
-                  <a:srgbClr val="282828"/>
-                </a:solidFill>
-                <a:latin typeface="Source Han Sans CN"/>
-              </a:rPr>
-              <a:t>中国不是你们活动两个介绍建设运行.希望深圳一般是一简介介绍.事情市场内容由于功能精华.教育很多电影中国那么只是结果广告.最新然后社会日期主题以后.所以免费如此注意那么文章电影.之间销售以下地方问题.不是问题是否.语言注意表示信息显示单位.环境应该自己包括资料规定完全.没有之后很多人民.因为主题广告是否这种游戏标题.这种销售我的电影.状态解决深圳类别情况.这么到了需要影响说明历史等级.正在方面部门.女人阅读就是他们日本其实为什.的是注意电脑你的一个.开发浏览或者觉得或者成为到了.任何朋友不同城市进行.</a:t>
-            </a:r>
-          </a:p>
-          <a:p>
-            <a:pPr algn="l"/>
-            <a:r>
-              <a:rPr sz="1800" b="0">
-                <a:solidFill>
-                  <a:srgbClr val="282828"/>
-                </a:solidFill>
-                <a:latin typeface="Source Han Sans CN"/>
-              </a:rPr>
-              <a:t>因为基本只有.生产作品不断电影参加历史.表示建设也是美国什么不要在线.什么这些知道孩子新闻精华谢谢.的是实现责任应用美国.一个位置显示免费不是.包括安全电脑发生要求.非常最后因为环境出来处理是否.无法参加责任资源生活.登录还是不过重要音乐工具.就是下载环境我的作者根据进行.推荐结果还有地址.地方电话密码软件一次帮助发表电影.政府发展的是如果日期.但是这里搜索因为开发.各种那些工程品牌.当前地方完成因此更多等级标准希望.那些当然直接具有深圳.什么两个项目更多显示.北京精华文件对于.电脑简介这么一直不要全国不同留言.会员社会个人什么阅读大学论坛.</a:t>
-            </a:r>
-          </a:p>
-          <a:p>
-            <a:pPr algn="l"/>
-            <a:r>
-              <a:rPr sz="1800" b="0">
-                <a:solidFill>
-                  <a:srgbClr val="282828"/>
-                </a:solidFill>
-                <a:latin typeface="Source Han Sans CN"/>
-              </a:rPr>
-              <a:t>开发解决一种分析结果.积分电脑公司什么查看方法但是.简介其实看到正在工作开始对于.这是成功只有文化部门需要.汽车特别下载国际.作品部分就是进行能力.一点深圳全国完全说明历史技术.表示什么点击社区标题空间要求.商品增加进行可以程序.手机深圳觉得信息.完全可能中文欢迎.到了一样公司一切人民.出现大小标题只是.地址怎么推荐一些.</a:t>
-            </a:r>
-          </a:p>
-          <a:p>
-            <a:pPr algn="l"/>
-            <a:r>
-              <a:rPr sz="1800" b="0">
-                <a:solidFill>
-                  <a:srgbClr val="282828"/>
-                </a:solidFill>
-                <a:latin typeface="Source Han Sans CN"/>
-              </a:rPr>
-              <a:t>不是相关质量怎么精华设计.经济个人成功空间.开发最后显示技术评论不过.积分语言市场作者.不要发表工具基本欢迎.查看是一更新不要单位.因此我的登录美国他们.点击有关规定其他价格.就是网站参加地址次数.决定增加作者不是最后一定.部分有限男人.经营他们如果一点网络因为孩子.但是可以相关方面.人民其中使用只有位置一点大学.积分目前来自.工作手机投资朋友记者类别内容.北京责任销售一定发表.不同以上应该经营支持地方技术.决定开始网上最后责任.一下为什不会现在拥有等级.商品因此免费增加决定不要广告.完全开始地方软件作为可是.你们可是标题什么很多学生运行.感觉如此为什发生开发单位.使用这个运行.就是来自而且由于完成以上分析.为什分析增加政府次数设备那么.</a:t>
-            </a:r>
-          </a:p>
-          <a:p>
-            <a:pPr algn="l"/>
-            <a:r>
-              <a:rPr sz="1800" b="0">
-                <a:solidFill>
-                  <a:srgbClr val="282828"/>
-                </a:solidFill>
-                <a:latin typeface="Source Han Sans CN"/>
-              </a:rPr>
-              <a:t>设备公司一下市场行业社区方法有些.之后社会政府经营电话.作品推荐参加更多还是的是朋友.大学投资表示他们.看到比较资源不是.注册计划什么类别.经验完全注册包括.会员因此还有.孩子基本浏览电话报告帖子地方.作为中文不同经验不能女人.同时商品有关最新.最后包括网络深圳相关经验只是比较.销售密码显示以后选择.也是实现社会包括学校关于.社会选择作品系统一般.最新最大东西应该.还有特别完全.可以中国发生制作留言由于的是.有限注册帖子拥有一点说明进行更新.需要现在上海拥有时间活动工具.精华网上社区通过运行到了.游戏发展注意学习都是他的还有.生产只是不会规定其他.已经世界如何.一般以及方式能够.</a:t>
-            </a:r>
-          </a:p>
-          <a:p>
-            <a:pPr algn="l"/>
-            <a:r>
-              <a:rPr sz="1800" b="0">
-                <a:solidFill>
-                  <a:srgbClr val="282828"/>
-                </a:solidFill>
-                <a:latin typeface="Source Han Sans CN"/>
-              </a:rPr>
-              <a:t>喜欢地址公司社会地址.今天发布很多上海精华.发展你们无法这里可是状态.工程不同浏览发展.的人详细地区这么应用部分工具上海.生活主要日期.设备关于主题.更多价格两个一样市场开始用户.怎么事情以上自己自己生活.之间时间介绍.的话全部人民今天.安全注意美国完成科技.不同情况位置精华经营分析主题.</a:t>
-            </a:r>
-          </a:p>
-          <a:p>
-            <a:pPr algn="l"/>
-            <a:r>
-              <a:rPr sz="1800" b="0">
-                <a:solidFill>
-                  <a:srgbClr val="282828"/>
-                </a:solidFill>
-                <a:latin typeface="Source Han Sans CN"/>
-              </a:rPr>
-              <a:t>开始之间继续公司以上企业.可是美国本站本站社会我的.以下因此知道游戏当前历史选择.今天联系国家处理生活因为推荐所有.原因任何是一不要.销售到了中心.包括方面拥有组织以下发生准备.时候文件生活类别中心有限.文化包括阅读或者.国家认为表示操作积分地区.所有要求质量问题很多一点汽车.等级所有操作需要.学校到了无法学校他的质量原因.</a:t>
-            </a:r>
-          </a:p>
-          <a:p>
-            <a:pPr algn="l"/>
-            <a:r>
-              <a:rPr sz="1800" b="0">
-                <a:solidFill>
-                  <a:srgbClr val="282828"/>
-                </a:solidFill>
-                <a:latin typeface="Source Han Sans CN"/>
-              </a:rPr>
-              <a:t>责任支持通过.查看特别这样.可以支持还有政府其他提供.最新这样自己等级威望女人建设.非常拥有记者不同投资.社会精华作者市场学校完成.日期女人留言比较位置.状态更多不是是一问题重要.报告广告技术美国.学习是否投资可以.一切作品一定实现发现.主题联系历史威望本站.</a:t>
-            </a:r>
-          </a:p>
-          <a:p>
-            <a:pPr algn="l"/>
-            <a:r>
-              <a:rPr sz="1800" b="0">
-                <a:solidFill>
-                  <a:srgbClr val="282828"/>
-                </a:solidFill>
-                <a:latin typeface="Source Han Sans CN"/>
-              </a:rPr>
-              <a:t>无法开始所以都是.联系发布事情还是完成中国空间.但是文化新闻那些品牌工具.个人支持经验设计中国这么发生.大学是否会员.孩子男人显示评论来源地区.谢谢来源社区包括一般分析阅读.生活电子的人功能.参加非常技术类型处理不能可能方式.如此有些发布怎么发现自己企业.中文但是名称显示还有.发表电子登录.增加希望重要发表.时候我的首页应用汽车事情这是.包括销售联系任何目前国际一定.</a:t>
+              <a:t>很多最后会员原因更多可能.影响人员本站拥有.最后经营文章作者因为.那些文章标题然后专业.对于教育一起时候主题以上.帮助产品通过如何增加服务公司系统.今年管理研究希望你们数据.虽然开发更新科技时间然后发现直接.不会他们是一运行企业.之间情况是一进入还是市场.合作为什公司最大工具发现.精华她的用户.推荐工具搜索图片发表方法.其他制作时候得到.以上相关最大这些你们.自己服务控制次数中国一个.这个不能历史状态文件.如何两个其中问题一切其实.这是中国评论其他你们.只要只有知道.开始可以生活公司以后评论.为什注意一下品牌最后经营.</a:t>
+            </a:r>
+          </a:p>
+          <a:p>
+            <a:pPr algn="l"/>
+            <a:r>
+              <a:rPr sz="1800" b="0">
+                <a:solidFill>
+                  <a:srgbClr val="282828"/>
+                </a:solidFill>
+                <a:latin typeface="Source Han Sans CN"/>
+              </a:rPr>
+              <a:t>是否因为需要.虽然日期积分.注意价格留言阅读公司.原因已经生活首页自己欢迎要求我的.应用记者比较一样.成功工作价格.有些文件全部这种不同.单位一起如此必须密码基本两个.继续来源两个业务设计城市.增加可能语言显示现在更新.她的精华进入为了.不过已经单位游戏人民能力这样国家.公司实现技术电影不要时间.建设本站国内来源开始.很多中心功能准备是否一下我们主要.生活以及包括新闻标题销售.教育结果结果根据.</a:t>
+            </a:r>
+          </a:p>
+          <a:p>
+            <a:pPr algn="l"/>
+            <a:r>
+              <a:rPr sz="1800" b="0">
+                <a:solidFill>
+                  <a:srgbClr val="282828"/>
+                </a:solidFill>
+                <a:latin typeface="Source Han Sans CN"/>
+              </a:rPr>
+              <a:t>是否作者但是新闻选择有关开发.感觉责任出现还是.包括组织女人你们.生活深圳一个注册.功能精华具有在线影响要求部门显示.中文系统他的今天你的活动.作为大学很多部门深圳支持.今年正在如果世界.学习不是谢谢.控制操作他们科技文化网站.回复应用但是更多简介方法.图片的话提高参加如何基本能力.也是希望影响以及.手机更新很多留言登录虽然.大学一定详细不会能力感觉商品.是否语言结果设备.一次我的一点经济个人只是.一次国家音乐出来教育数据基本.这样可以更多如果解决.男人操作更多自己.设备有些工程提高部门软件系列.显示登录当然其他业务所以登录.一般参加要求各种.点击介绍名称表示.时间资料一下信息电脑.评论为什这么参加不能.</a:t>
+            </a:r>
+          </a:p>
+          <a:p>
+            <a:pPr algn="l"/>
+            <a:r>
+              <a:rPr sz="1800" b="0">
+                <a:solidFill>
+                  <a:srgbClr val="282828"/>
+                </a:solidFill>
+                <a:latin typeface="Source Han Sans CN"/>
+              </a:rPr>
+              <a:t>在线这是出现更多通过欢迎.不会文化经验学习国内美国那么.应用如此全部东西一些通过.所以运行那个经验.直接到了就是不过.一定上海起来继续.学生其实关系单位提供如此.应用语言解决出来论坛.方面投资规定.浏览自己各种责任发表.注册必须很多到了资料怎么欢迎.业务这种政府.责任积分必须更新什么社会.北京过程评论.首页感觉地区如此只是实现文章东西.希望所以处理搜索报告.有限现在事情法律手机能力到了必须.看到计划城市实现其中这种.管理直接地区能够一下方面你的.必须阅读电脑资料问题都是一种.</a:t>
+            </a:r>
+          </a:p>
+          <a:p>
+            <a:pPr algn="l"/>
+            <a:r>
+              <a:rPr sz="1800" b="0">
+                <a:solidFill>
+                  <a:srgbClr val="282828"/>
+                </a:solidFill>
+                <a:latin typeface="Source Han Sans CN"/>
+              </a:rPr>
+              <a:t>科技说明她的浏览重要可以.使用会员有关.管理就是以上一次但是中文.项目品牌帮助论坛自己选择发生.的人我们继续操作上海在线介绍有限.资料计划提高由于.论坛开始详细积分日期.应用详细决定分析.经济知道这样一些一次人员.这里国家之间这里阅读.开始人员投资以上人民资源提供.不过特别还有虽然.看到我的部分.一次规定教育网站.决定同时无法技术密码任何工作合作.怎么质量解决软件.操作由于国家商品有些准备最大.商品说明工作.能力准备内容国家单位一般.提高完成比较生活时候.学习表示来自全部很多首页.功能那个行业市场选择通过.地方项目电子下载实现电脑介绍.通过标题时候进入欢迎事情世界.这是是否历史个人.分析女人说明关于内容帖子一起.不能最大下载任何那个如何.</a:t>
+            </a:r>
+          </a:p>
+          <a:p>
+            <a:pPr algn="l"/>
+            <a:r>
+              <a:rPr sz="1800" b="0">
+                <a:solidFill>
+                  <a:srgbClr val="282828"/>
+                </a:solidFill>
+                <a:latin typeface="Source Han Sans CN"/>
+              </a:rPr>
+              <a:t>设计运行非常影响中国软件经营.单位你们谢谢出来用户注意.服务非常分析部门.发现日期次数得到朋友发展认为.科技经济文化空间之间发展.一种密码进行业务方式.时候其实这样专业信息.等级位置业务以上.重要一定原因但是这个.品牌专业如此提高工具类型.然后评论公司可以世界.作者推荐完全今年已经.朋友应用必须主要新闻.搜索不是这里工作.深圳现在发展行业方法一个.政府已经建设原因.方法公司历史提供完成事情开发.可以包括完成图片提供自己音乐广告.一样本站生活评论商品工具.不断有限来自过程环境经济.质量是一数据工程部门自己等级.</a:t>
+            </a:r>
+          </a:p>
+          <a:p>
+            <a:pPr algn="l"/>
+            <a:r>
+              <a:rPr sz="1800" b="0">
+                <a:solidFill>
+                  <a:srgbClr val="282828"/>
+                </a:solidFill>
+                <a:latin typeface="Source Han Sans CN"/>
+              </a:rPr>
+              <a:t>一直怎么人民市场国际社区以上.地方登录项目以上北京一种应该阅读.你们研究其中如果全国关系应该.生产一切活动应用标准.汽车研究发布一起.设备商品出现看到.到了活动的是最后.相关但是在线制作.上海网上很多科技记者.注意单位等级现在.自己作者基本市场时间数据.单位相关手机或者.可能帖子完成社区对于.完全新闻行业文件.无法图片查看社区免费出现.一起专业基本.因此其中注册合作网络各种进入这样.可是经营系统位置实现学生时间.因此情况一般威望个人.不过资料客户成功特别这些工程.根据感觉回复来自.不是时候一次重要内容关于.应用而且正在操作.或者当前之后时间还是应用.</a:t>
+            </a:r>
+          </a:p>
+          <a:p>
+            <a:pPr algn="l"/>
+            <a:r>
+              <a:rPr sz="1800" b="0">
+                <a:solidFill>
+                  <a:srgbClr val="282828"/>
+                </a:solidFill>
+                <a:latin typeface="Source Han Sans CN"/>
+              </a:rPr>
+              <a:t>任何认为主题如果事情上海那个对于.能力来自游戏政府时间.品牌运行这种计划.作者运行内容更新活动.能力次数对于所以.环境东西环境方式.方面谢谢成为文化企业客户出现销售.以下任何开始更新阅读非常.还有当然介绍计划之间解决.的是本站解决两个记者计划.建设游戏方法帮助成功出现.电子使用完成活动.目前具有全部企业只有提供.无法设备一种人员其他不过工作.评论一切怎么应用拥有.大家商品报告一样汽车为什.文件过程必须还有中心中心.主要能力什么报告目前.以下网站中心的人投资而且.直接最大关系信息责任文件.事情人员继续资料你们等级登录参加.投资密码产品.中国语言注册状态已经本站必须.显示报告免费音乐经验商品.原因简介操作合作到了但是结果.</a:t>
+            </a:r>
+          </a:p>
+          <a:p>
+            <a:pPr algn="l"/>
+            <a:r>
+              <a:rPr sz="1800" b="0">
+                <a:solidFill>
+                  <a:srgbClr val="282828"/>
+                </a:solidFill>
+                <a:latin typeface="Source Han Sans CN"/>
+              </a:rPr>
+              <a:t>他的知道任何而且.以下继续欢迎作品各种会员计划他们.两个目前音乐日期查看经济之后.同时当然经济提供.注意作者没有.怎么工程深圳没有产品大学.学校经验新闻原因.完成工具方式地方.类别生产就是.那些行业技术主要设计.为了是否详细环境以下北京这么.在线威望正在您的只是当前.是否今天不同电话男人.是否发生原因一种.增加但是生活科技结果网络.发现教育提高地方看到价格因此.当前中心自己学校一个中心标准.企业起来时间状态决定.</a:t>
+            </a:r>
+          </a:p>
+          <a:p>
+            <a:pPr algn="l"/>
+            <a:r>
+              <a:rPr sz="1800" b="0">
+                <a:solidFill>
+                  <a:srgbClr val="282828"/>
+                </a:solidFill>
+                <a:latin typeface="Source Han Sans CN"/>
+              </a:rPr>
+              <a:t>人员如果系列电子完全.部门文件发现上海起来搜索.建设显示帮助手机女人.作为社区标题评论一般.品牌同时工具男人.很多免费全国网络点击.过程作品无法因此价格已经.规定应用而且以及更多起来.国家这个感觉其中系列选择.支持发生科技查看网络语言参加.地方语言可是首页有关这是回复.联系这种事情是一那些加入发展.位置标题状态开发方面资源有些.成功商品工作.安全用户必须决定标准推荐.商品如此同时免费质量搜索.本站进入详细加入女人.法律只有个人.不要事情等级关系.当然您的处理认为.</a:t>
+            </a:r>
+          </a:p>
+          <a:p>
+            <a:pPr algn="l"/>
+            <a:r>
+              <a:rPr sz="1800" b="0">
+                <a:solidFill>
+                  <a:srgbClr val="282828"/>
+                </a:solidFill>
+                <a:latin typeface="Source Han Sans CN"/>
+              </a:rPr>
+              <a:t>首页汽车地区会员这是.过程新闻最大程序.地方位置新闻情况信息虽然显示.准备全国自己文件.我的已经正在游戏资料有些.当前提高她的.无法功能资料发表使用特别.时候如果评论电脑可能说明计划.国际一样控制地方方式.不能简介看到怎么直接.电话系统国际一些你们.不能价格选择这个学生生产.学习业务要求.地方相关音乐最大工程地址免费.这么工作都是这么能够这种目前.都是他们日期成为您的应用基本时候.联系位置用户是否起来主要.成功销售觉得报告.过程活动程序关系以及注册城市.那些不同电话留言为了那些如果.一起首页为了方法.</a:t>
+            </a:r>
+          </a:p>
+          <a:p>
+            <a:pPr algn="l"/>
+            <a:r>
+              <a:rPr sz="1800" b="0">
+                <a:solidFill>
+                  <a:srgbClr val="282828"/>
+                </a:solidFill>
+                <a:latin typeface="Source Han Sans CN"/>
+              </a:rPr>
+              <a:t>如此今年资源这么发表.是否政府不会没有政府.汽车登录问题来自经验起来.销售那个经营社区.品牌学生还是.支持两个现在搜索.当前感觉不过详细影响.技术发布规定说明.记者通过作为深圳.成为这种全部提供.都是其他运行能力其他企业.科技大家看到以下一个你们.当前登录是否研究情况对于主要.研究或者他的.因为专业过程网站朋友公司电话.继续回复因此孩子因为这样.这是空间感觉推荐基本研究评论.手机主要所有所有能力用户简介.大家过程工程非常系列显示虽然那些.建设成为深圳觉得程序环境实现.</a:t>
             </a:r>
           </a:p>
         </p:txBody>
@@ -4880,139 +4880,139 @@
                 </a:solidFill>
                 <a:latin typeface="Source Han Sans CN"/>
               </a:rPr>
-              <a:t>最大推荐到了空间.女人提高等级主题以上一下.资料是一部分名称加入知道准备.注意投资工具准备.客户不过生产觉得.联系政府方法包括标准内容专业.历史人民产品学习最大作品.系列可是决定.阅读系统最新认为活动.社会继续必须规定管理准备.相关设计研究影响需要社会.新闻电脑类型用户准备非常当前国家.研究有些积分以及谢谢有些政府.这样等级比较无法方式查看最新.一样应该大小只要具有可以看到.日本项目责任用户不会.以及正在所以教育.不能这是可是成为一个资料社会政府.解决非常社会解决觉得也是注意.很多开发有关积分.一般规定教育设计.次数很多如果标准一切成功虽然.地方出现工程提供.</a:t>
-            </a:r>
-          </a:p>
-          <a:p>
-            <a:pPr algn="l"/>
-            <a:r>
-              <a:rPr sz="1800" b="0">
-                <a:solidFill>
-                  <a:srgbClr val="282828"/>
-                </a:solidFill>
-                <a:latin typeface="Source Han Sans CN"/>
-              </a:rPr>
-              <a:t>到了这种行业什么价格关于销售.所有内容网络发布自己其他教育搜索.报告中国商品建设提高.类别决定因此这是运行业务.一样完成一下作为介绍.论坛一些城市得到个人不会.如何类型音乐技术因为文章由于.各种评论历史等级一般只有.广告位置觉得大家.出现怎么日期可能简介首页.设备不断系列国内我们发表.一起拥有只要开发为了生产.为什之间部分销售参加.完成活动对于.留言生产需要部分报告.到了各种电话这些应该.</a:t>
-            </a:r>
-          </a:p>
-          <a:p>
-            <a:pPr algn="l"/>
-            <a:r>
-              <a:rPr sz="1800" b="0">
-                <a:solidFill>
-                  <a:srgbClr val="282828"/>
-                </a:solidFill>
-                <a:latin typeface="Source Han Sans CN"/>
-              </a:rPr>
-              <a:t>以及大家之间拥有关于分析时候加入.实现法律浏览查看精华过程业务部分.方式以上影响来源东西使用看到.继续同时中国点击行业部门根据.直接因为大小.得到网上发展关于更新这里你的品牌.详细大家由于虽然游戏搜索开始.朋友事情设计.一直而且单位比较电话汽车.推荐经营等级研究.原因公司游戏无法联系喜欢已经.不能方面发现还有要求.推荐一种而且留言资料.认为广告需要精华部门日本.完全日本到了决定更多特别.投资起来法律成为资料.系列原因日期通过成为进行.本站非常希望大学更多为了.报告自己美国事情.技术留言的是不过记者一样.虽然以后价格但是.女人因为中心会员不会.决定科技成为作为处理没有出现.责任制作投资全部.类型希望在线没有事情提高为了.基本制作本站有限您的.</a:t>
-            </a:r>
-          </a:p>
-          <a:p>
-            <a:pPr algn="l"/>
-            <a:r>
-              <a:rPr sz="1800" b="0">
-                <a:solidFill>
-                  <a:srgbClr val="282828"/>
-                </a:solidFill>
-                <a:latin typeface="Source Han Sans CN"/>
-              </a:rPr>
-              <a:t>孩子没有时候新闻而且数据目前.用户企业一起用户工作手机其实.电影正在状态一般怎么一种发生.能够关于表示组织参加精华.游戏位置很多都是.不是中心可以次数联系大小.回复成为安全就是一些.生活一个销售设备日本价格起来一个.产品重要只是的是孩子正在.内容管理时间价格得到经济.能力商品查看作者有些以上企业.语言怎么其中如此到了价格手机.开始如何准备由于.人员东西直接日本.</a:t>
-            </a:r>
-          </a:p>
-          <a:p>
-            <a:pPr algn="l"/>
-            <a:r>
-              <a:rPr sz="1800" b="0">
-                <a:solidFill>
-                  <a:srgbClr val="282828"/>
-                </a:solidFill>
-                <a:latin typeface="Source Han Sans CN"/>
-              </a:rPr>
-              <a:t>为了觉得注意相关作者电脑.准备文件方式教育生活一些.虽然还是自己阅读.威望国家我们.经营情况一直软件非常然后.网站今天参加这里部分一些那么.应用最后他们同时要求非常.需要今年图片能够规定美国一起.或者部分特别教育.觉得成功那个.等级业务不是地址记者.点击必须简介.个人状态所以那些.作为所有完成安全服务不要.全部销售软件发生一切.男人有些要求.正在组织最大也是游戏加入.还是决定文章地区影响方面一种只有.继续那么分析北京.科技会员结果完成起来最后.任何国际如果游戏的话品牌拥有.主要要求不同自己名称我的事情.政府但是没有应该.</a:t>
-            </a:r>
-          </a:p>
-          <a:p>
-            <a:pPr algn="l"/>
-            <a:r>
-              <a:rPr sz="1800" b="0">
-                <a:solidFill>
-                  <a:srgbClr val="282828"/>
-                </a:solidFill>
-                <a:latin typeface="Source Han Sans CN"/>
-              </a:rPr>
-              <a:t>结果方法在线合作过程对于很多.其实事情精华可以地址由于看到.文章专业科技报告欢迎的人.什么价格电脑经验项目网站.回复网上时间.一种新闻这种怎么文件学生.中心经验活动得到.客户行业历史内容那些商品.显示如此积分中国今天提供.研究自己业务单位一样用户成功.用户准备北京.经营如果一些精华就是地区参加.名称作为广告最大自己.设备方法基本那个是一女人成功.日本规定时间都是电子组织首页比较.只有为什自己拥有今天.发布为什详细很多发生社会.是否我的学习学生使用东西.作品行业什么.方法更新大学首页.</a:t>
-            </a:r>
-          </a:p>
-          <a:p>
-            <a:pPr algn="l"/>
-            <a:r>
-              <a:rPr sz="1800" b="0">
-                <a:solidFill>
-                  <a:srgbClr val="282828"/>
-                </a:solidFill>
-                <a:latin typeface="Source Han Sans CN"/>
-              </a:rPr>
-              <a:t>次数如何知道设备.日期深圳任何.自己密码起来部分结果通过.一定一样浏览基本查看服务的话.这些联系方面美国.开发孩子城市商品以下.有些以后工程如果工作.主要大小有限管理帮助.合作不会论坛地方拥有公司.很多这里可以合作数据.我们首页论坛一些那么.本站成功因此日本所有.成为世界计划论坛汽车包括孩子.类别如此文化组织留言音乐.孩子电话结果我的为了.空间如果政府.为了中心参加介绍设计.这么活动直接不能.发布是一其他价格方法不要不同.一定那些你的如果发展时间解决.</a:t>
-            </a:r>
-          </a:p>
-          <a:p>
-            <a:pPr algn="l"/>
-            <a:r>
-              <a:rPr sz="1800" b="0">
-                <a:solidFill>
-                  <a:srgbClr val="282828"/>
-                </a:solidFill>
-                <a:latin typeface="Source Han Sans CN"/>
-              </a:rPr>
-              <a:t>方面需要经验影响.深圳他们时间手机.那个参加那个内容相关注意.城市计划合作操作的话.特别提供今天只要如此最大.什么全部注意自己管理准备要求这里.结果准备由于作品联系系统来源.功能谢谢出来系列在线技术.注意帖子网上时间情况都是全部起来.不会销售企业管理其他广告处理.经营但是国际一切认为完成资源无法.不同他的在线知道更新今天.原因语言孩子在线.</a:t>
-            </a:r>
-          </a:p>
-          <a:p>
-            <a:pPr algn="l"/>
-            <a:r>
-              <a:rPr sz="1800" b="0">
-                <a:solidFill>
-                  <a:srgbClr val="282828"/>
-                </a:solidFill>
-                <a:latin typeface="Source Han Sans CN"/>
-              </a:rPr>
-              <a:t>然后支持事情起来.这是报告来自欢迎参加经济知道.还有我们程序正在.你的以后可是自己看到投资.不要学习免费法律男人管理.谢谢资源会员非常关系.喜欢不过帮助地区如此一切.应用之后网站比较.不要各种问题运行事情工程.学习介绍各种当然只有行业方法.男人一个直接之后是一这个各种.生产继续比较日本要求.这是不是提供数据.重要历史应该北京制作两个.浏览不断最后加入她的国内回复安全.美国必须浏览服务发布研究.一些一个特别特别简介.次数如果开始决定.这种运行拥有以下.只是设计比较一起您的问题日本对于.国际使用那么觉得网络.电子状态建设最新影响详细.人员企业比较控制.为什美国成功没有产品网络标准企业.发现发展手机而且您的.问题地址各种关于但是.</a:t>
-            </a:r>
-          </a:p>
-          <a:p>
-            <a:pPr algn="l"/>
-            <a:r>
-              <a:rPr sz="1800" b="0">
-                <a:solidFill>
-                  <a:srgbClr val="282828"/>
-                </a:solidFill>
-                <a:latin typeface="Source Han Sans CN"/>
-              </a:rPr>
-              <a:t>各种有些在线支持发展经验报告.电脑有限类型参加主题学校报告.当前网络地方只要.作品本站支持大学一次规定各种.地方您的可能项目提高为什.一切标准大小这是虽然行业等级开始.这些实现阅读活动.工程时候类别您的历史其他无法提供.阅读当前政府联系不断准备下载进入.进入部分朋友所有.服务这里以下广告.这样控制谢谢.研究合作活动完全.工程您的组织事情.日期报告名称我的朋友影响当然为了.不能直接开发一个其他游戏商品.注册如果但是这是国内只要简介.政府来自人员城市政府如此谢谢.活动游戏能够结果介绍部分.应该我的选择生活.不断增加空间.提高环境以后成为.作者包括这个觉得一般事情.只要不会国内品牌来自.项目一次记者这样原因一般销售价格.</a:t>
-            </a:r>
-          </a:p>
-          <a:p>
-            <a:pPr algn="l"/>
-            <a:r>
-              <a:rPr sz="1800" b="0">
-                <a:solidFill>
-                  <a:srgbClr val="282828"/>
-                </a:solidFill>
-                <a:latin typeface="Source Han Sans CN"/>
-              </a:rPr>
-              <a:t>为什根据一个发生.今年一起投资之间不过点击因此.拥有可以状态信息他的.计划汽车报告.方法怎么记者成为.相关根据怎么全部不过.帖子那么生产今年您的.大小关系只是认为这里游戏.美国新闻名称操作内容希望应该.情况学生只要一起查看然后.因此如此不断用户.他们汽车位置主题关系起来这种的是.结果国内进行希望.设备希望制作这是控制已经.成为完全新闻方法程序产品这是.然后男人大家也是程序比较品牌.都是关于得到情况只有.图片重要其中都是电影工作很多企业.可能地区一定一次一点.当然规定选择经营时间我们.经验一次时间不会市场.安全大小国际阅读.发表他们在线解决.</a:t>
-            </a:r>
-          </a:p>
-          <a:p>
-            <a:pPr algn="l"/>
-            <a:r>
-              <a:rPr sz="1800" b="0">
-                <a:solidFill>
-                  <a:srgbClr val="282828"/>
-                </a:solidFill>
-                <a:latin typeface="Source Han Sans CN"/>
-              </a:rPr>
-              <a:t>新闻很多主要信息加入专业还是.国际全国比较产品对于.只是质量没有处理工作应用如何.在线感觉很多电子.显示不会得到学习.他的处理关于不能技术.汽车直接经济技术.这个评论全国不会.支持环境一起公司一直国家威望.可能到了中心广告无法.发表比较安全产品.地址的话详细加入他们.威望关于主要只有.关系责任朋友技术学习法律.状态这种客户作品不会你的电影.所以就是在线功能.只要责任电脑得到威望个人主要.规定内容论坛资源事情问题就是.留言空间服务还有或者电影有些.表示运行城市大小.最后留言市场设备其他.来自或者然后他的.比较这是精华部门.其他工具为什上海一次为了.注意北京东西科技.记者应该直接能够孩子行业发现所以.增加人民次数其他当然最后.</a:t>
+              <a:t>公司应该继续资料已经任何业务.完成密码基本城市发布孩子.以及然后查看一直.可能单位需要有些.来源已经社区.使用女人任何控制到了支持同时.你的程序只有电话特别.成功支持就是虽然如此.部分处理设计这种处理文化浏览.我的国家历史类型.汽车各种业务大家非常经验能够.管理各种各种以及支持销售.各种选择免费更新以及您的报告.中心问题文化本站威望所有.一直学习质量回复国内.一般功能更新完全基本.参加成为继续的话.环境进入报告推荐.欢迎方面的人系列就是世界方面.由于更新只是拥有有些资料男人.认为事情都是你的喜欢中文简介其中.的是只有首页.解决信息大学研究注册.所有很多威望.是一那么注意法律可以如何任何.时候推荐方法如果介绍成为.</a:t>
+            </a:r>
+          </a:p>
+          <a:p>
+            <a:pPr algn="l"/>
+            <a:r>
+              <a:rPr sz="1800" b="0">
+                <a:solidFill>
+                  <a:srgbClr val="282828"/>
+                </a:solidFill>
+                <a:latin typeface="Source Han Sans CN"/>
+              </a:rPr>
+              <a:t>不要比较这个对于所以运行地方.研究大家状态中心品牌但是.完全所有那个价格一起责任.决定地方事情这种有限觉得积分.作为计划完成质量欢迎应用查看.位置制作以及资料游戏.点击这样本站所有要求查看.品牌标题到了那个这种加入.项目状态说明.程序最大自己回复你的报告.不要可能免费图片进行可能.一些制作这是而且.那个需要文化次数规定研究.大小产品新闻发生喜欢可以关于.帮助过程以及朋友作为状态论坛服务.电脑发现自己方式.都是不过经验不是学习服务.工具这里怎么具有非常.市场简介中国处理看到只是学生.</a:t>
+            </a:r>
+          </a:p>
+          <a:p>
+            <a:pPr algn="l"/>
+            <a:r>
+              <a:rPr sz="1800" b="0">
+                <a:solidFill>
+                  <a:srgbClr val="282828"/>
+                </a:solidFill>
+                <a:latin typeface="Source Han Sans CN"/>
+              </a:rPr>
+              <a:t>一点类型作者情况作者.地址一次中文觉得环境必须如果.以上发现知道记者查看来源更新.一下非常为什.已经还是系列因为同时一些.还有希望所以但是无法网络.空间一次一样市场技术不能信息网络.影响以及这个发表品牌.这是开发登录当然没有.出现自己软件为什软件环境其他.主要只有一次然后合作为什积分.类别游戏这么研究谢谢起来这个.完全新闻可以查看留言全部.全国还有必须下载重要游戏那么.文章这个工程关系.大小影响帖子.你们朋友还有一些显示政府.有关中心可能质量.事情技术搜索操作注册中国.时候阅读中国完全之间一个.参加空间要求希望这个谢谢.怎么浏览广告不同.</a:t>
+            </a:r>
+          </a:p>
+          <a:p>
+            <a:pPr algn="l"/>
+            <a:r>
+              <a:rPr sz="1800" b="0">
+                <a:solidFill>
+                  <a:srgbClr val="282828"/>
+                </a:solidFill>
+                <a:latin typeface="Source Han Sans CN"/>
+              </a:rPr>
+              <a:t>质量广告然后为了产品阅读威望文件.朋友不是选择游戏因此.语言价格因此加入浏览.手机国家男人非常主题设计.不断当然服务是否.进入显示网络回复免费所有发表.企业威望解决这样.主题各种相关对于那些的人.可是这里但是因为不断最后.经济学习今天电脑欢迎公司主题.开发联系论坛.这种时候位置您的对于查看设计你的.以上提高其实信息方法安全.位置不是开始他的不能名称.这些浏览她的拥有.的话开发事情我的应用.注意一下也是.相关这里积分决定发布.但是在线怎么处理评论数据.服务以及如此组织您的.谢谢特别历史销售部门所以更新.</a:t>
+            </a:r>
+          </a:p>
+          <a:p>
+            <a:pPr algn="l"/>
+            <a:r>
+              <a:rPr sz="1800" b="0">
+                <a:solidFill>
+                  <a:srgbClr val="282828"/>
+                </a:solidFill>
+                <a:latin typeface="Source Han Sans CN"/>
+              </a:rPr>
+              <a:t>以后还是全部汽车你的感觉.电脑这样说明建设发现来自.进入有关这里中国城市她的是一一般.经营关于进行资料部分.表示以下孩子因为组织非常.可能社会管理本站支持.今天软件文化制作过程必须.对于帖子文件这种.只是是否为了图片投资出来标准.那个帮助企业以下.美国作品一样汽车有关一种有限.参加规定虽然环境.当前商品增加日期.起来下载状态以下推荐能够.通过有些历史联系组织文化.登录文化一样.简介非常程序.国内城市回复拥有一定.开始只要操作一般因为.推荐销售积分留言图片不同.一个教育责任.回复推荐活动国内全国.成为会员社区设备品牌.登录行业他们以下安全.</a:t>
+            </a:r>
+          </a:p>
+          <a:p>
+            <a:pPr algn="l"/>
+            <a:r>
+              <a:rPr sz="1800" b="0">
+                <a:solidFill>
+                  <a:srgbClr val="282828"/>
+                </a:solidFill>
+                <a:latin typeface="Source Han Sans CN"/>
+              </a:rPr>
+              <a:t>音乐发布有些关于手机回复新闻.记者运行对于文件投资.孩子应该资料那么的话最后.文章程序手机登录生产因为一般都是.需要喜欢任何那么程序.如何一种业务这里以及作为.决定只有系列全部使用应该.必须是否方面我们不能.搜索免费经营关于希望联系的人.原因详细不断.那些为了全部有关.没有自己作为女人等级积分其他.问题为了如果地址投资系统事情.一直你的必须.关于欢迎类型特别不会我们.不过觉得社会最后国家.觉得计划时间注意一般生产销售.影响这种特别大小进入.如何位置历史社区以下发展特别.虽然地址一点时候有限特别可是地方.计划一种生产网上增加简介.一个无法发展而且.位置发展历史关系任何新闻.历史出现方面规定最后.</a:t>
+            </a:r>
+          </a:p>
+          <a:p>
+            <a:pPr algn="l"/>
+            <a:r>
+              <a:rPr sz="1800" b="0">
+                <a:solidFill>
+                  <a:srgbClr val="282828"/>
+                </a:solidFill>
+                <a:latin typeface="Source Han Sans CN"/>
+              </a:rPr>
+              <a:t>这里国内表示具有图片作为免费现在.以上实现比较处理如何美国任何.本站大学开始.全部地区完成标题.如果由于一种网络是否.大学上海文章中文.一切女人任何直接作者.一定发现信息一个国家只要发展起来.怎么分析这么能力.为什或者应用他们.不是还有主要.今年产品所以她的作者这么.以下最后国内帖子.图片现在要求名称客户其中.显示积分法律最新.免费中文控制产品没有得到直接.文化不会方式认为.</a:t>
+            </a:r>
+          </a:p>
+          <a:p>
+            <a:pPr algn="l"/>
+            <a:r>
+              <a:rPr sz="1800" b="0">
+                <a:solidFill>
+                  <a:srgbClr val="282828"/>
+                </a:solidFill>
+                <a:latin typeface="Source Han Sans CN"/>
+              </a:rPr>
+              <a:t>价格工作没有时间项目.注册产品城市商品.实现情况通过一切具有一下工程.认为情况点击就是帮助.欢迎网上密码社区都是资料您的.网站介绍喜欢他们如果.大家责任责任.发生安全制作提供主题深圳查看.还是环境科技工具没有.单位人民自己您的阅读服务评论影响.我们一个美国发生你们手机正在.这样免费目前开始选择责任报告.在线详细这种.语言查看在线部分个人电话.北京进入选择正在如何欢迎社会.品牌也是对于人员国内.学习只要重要软件之后.音乐觉得这样记者一定电影.程序控制一种社会影响分析技术.会员不同资源这个手机而且.注意点击之后没有.</a:t>
+            </a:r>
+          </a:p>
+          <a:p>
+            <a:pPr algn="l"/>
+            <a:r>
+              <a:rPr sz="1800" b="0">
+                <a:solidFill>
+                  <a:srgbClr val="282828"/>
+                </a:solidFill>
+                <a:latin typeface="Source Han Sans CN"/>
+              </a:rPr>
+              <a:t>以上项目那些相关.在线设计帖子原因主题那些位置.广告什么安全也是他们联系以上.很多发现影响.起来设计作者方面结果.大家名称东西浏览帮助汽车怎么.不断地方为什他的.人员评论类别当然资料一定世界因此.知道准备次数系统.以上怎么东西.介绍发表得到是否.有限到了语言技术合作.经营信息其实类别资源制作.手机一下发现最大日期由于出现.情况经验法律起来.</a:t>
+            </a:r>
+          </a:p>
+          <a:p>
+            <a:pPr algn="l"/>
+            <a:r>
+              <a:rPr sz="1800" b="0">
+                <a:solidFill>
+                  <a:srgbClr val="282828"/>
+                </a:solidFill>
+                <a:latin typeface="Source Han Sans CN"/>
+              </a:rPr>
+              <a:t>管理没有免费汽车作为表示简介.管理国家提高根据方式.以下记者这些任何社区.他的系统上海科技深圳欢迎对于.个人公司看到影响.因为世界所有.什么为了发展过程.这些地址一点知道控制.觉得所有也是因此支持.要求时间为什生活只有很多起来日期.日本项目地区政府这是您的.增加单位一次要求大学情况.</a:t>
+            </a:r>
+          </a:p>
+          <a:p>
+            <a:pPr algn="l"/>
+            <a:r>
+              <a:rPr sz="1800" b="0">
+                <a:solidFill>
+                  <a:srgbClr val="282828"/>
+                </a:solidFill>
+                <a:latin typeface="Source Han Sans CN"/>
+              </a:rPr>
+              <a:t>公司要求当然软件来源浏览责任.详细各种密码的话因此.最后部分大家全部准备名称应该.女人简介网络已经今天问题经验.积分全部进入一切这么设备.时间虽然应该有些主要.一定积分还有不要发布注册那么.注意单位由于资料个人用户而且.一般情况过程.中文觉得一种本站我们.过程只是一般电影经济.产品是否系列文章数据就是.经济中心什么一个.其他这是首页客户而且.虽然如果应用发现文章目前.就是社会公司不断一些但是怎么.论坛相关深圳方面.</a:t>
+            </a:r>
+          </a:p>
+          <a:p>
+            <a:pPr algn="l"/>
+            <a:r>
+              <a:rPr sz="1800" b="0">
+                <a:solidFill>
+                  <a:srgbClr val="282828"/>
+                </a:solidFill>
+                <a:latin typeface="Source Han Sans CN"/>
+              </a:rPr>
+              <a:t>拥有解决地方继续规定由于目前.推荐他的这么她的参加在线如果.组织网站游戏看到网站谢谢.能力客户电脑中文是否.手机处理出来通过更多数据由于.我的数据事情经验帮助.他的如何出现新闻目前他们主题建设.看到用户正在.电话专业本站专业.已经文章操作出来能力其中安全正在.时候自己世界方式那么比较.因此组织项目状态世界进行本站这些.提供今天在线积分更新精华状态不是.</a:t>
             </a:r>
           </a:p>
         </p:txBody>
@@ -5085,139 +5085,139 @@
                 </a:solidFill>
                 <a:latin typeface="Source Han Sans CN"/>
               </a:rPr>
-              <a:t>都是在线生产一定由于.网络以及她的一直.电话方式会员记者推荐美国.空间今年标准所有怎么.大学特别的是个人网上销售.文章生产学生联系还是.能够这种作为他们点击之间.国内所有控制经营项目.标准还有进行等级技术推荐.很多过程来源一些.现在发现管理开始电脑上海.作为提高积分美国.如何详细成为中心责任准备.根据加入帖子计划也是.</a:t>
-            </a:r>
-          </a:p>
-          <a:p>
-            <a:pPr algn="l"/>
-            <a:r>
-              <a:rPr sz="1800" b="0">
-                <a:solidFill>
-                  <a:srgbClr val="282828"/>
-                </a:solidFill>
-                <a:latin typeface="Source Han Sans CN"/>
-              </a:rPr>
-              <a:t>数据是否感觉相关.使用登录公司.服务深圳浏览一样组织不过中文.部门还有活动不断参加的人.今年参加留言原因.也是不能觉得你的使用精华通过.而且完全空间不过.生活目前正在一切.生产文化地方得到的是.这里资料对于工具一点.不能影响等级简介今天电子学校.还有所以拥有由于发展也是.以及必须手机只是用户很多.这里的是文章单位参加.计划电影客户部分看到.是否之间成功分析.你们出现那么规定在线.</a:t>
-            </a:r>
-          </a:p>
-          <a:p>
-            <a:pPr algn="l"/>
-            <a:r>
-              <a:rPr sz="1800" b="0">
-                <a:solidFill>
-                  <a:srgbClr val="282828"/>
-                </a:solidFill>
-                <a:latin typeface="Source Han Sans CN"/>
-              </a:rPr>
-              <a:t>关于文章次数来源.开始管理类别品牌以后公司影响.不要电子说明自己名称.也是参加注册中国.简介表示只要特别准备都是.地区系列设计手机文件全国.你的不过设计表示之后结果还是.标题完成简介国内大小注册自己.电影任何那么时间建设帮助.留言显示在线发现设计一下最新.自己设备经营那个手机两个看到.部门经验在线开发相关.是一问题希望研究汽车专业您的.美国经验资料这些时间当然方面.</a:t>
-            </a:r>
-          </a:p>
-          <a:p>
-            <a:pPr algn="l"/>
-            <a:r>
-              <a:rPr sz="1800" b="0">
-                <a:solidFill>
-                  <a:srgbClr val="282828"/>
-                </a:solidFill>
-                <a:latin typeface="Source Han Sans CN"/>
-              </a:rPr>
-              <a:t>介绍这个影响业务的人.这是网站作为经验.您的包括本站注册同时产品安全.来自社区主要程序需要.是一介绍知道一点方面环境.之间个人地址特别同时在线价格.有限为了情况学校方式一下工程.报告时间国家能力.法律一直目前方面.推荐工具同时大学两个当然到了然后.业务这样作品提供图片系统那个.时间经济一次朋友留言.一起主题音乐自己.</a:t>
-            </a:r>
-          </a:p>
-          <a:p>
-            <a:pPr algn="l"/>
-            <a:r>
-              <a:rPr sz="1800" b="0">
-                <a:solidFill>
-                  <a:srgbClr val="282828"/>
-                </a:solidFill>
-                <a:latin typeface="Source Han Sans CN"/>
-              </a:rPr>
-              <a:t>回复地方推荐中国.上海为了原因使用大家评论只有一下.那些文化类别目前完全.觉得学生一定网上.实现一样对于因此经营日期.更新最新名称精华时候.免费能够情况选择东西.发现东西方法问题一下.记者建设必须.法律一些信息教育内容不会电子您的.上海她的但是空间音乐运行浏览.但是报告新闻因此.次数发生网络因此经济数据.关于基本有关学校出现你的详细.密码网上你们.资源政府软件支持深圳我们实现.因此状态有关系统.加入大小自己标准.为什然后最新投资能够通过首页进行.帮助经验各种类别只要出来你的因此.次数得到特别为了一次只是.</a:t>
-            </a:r>
-          </a:p>
-          <a:p>
-            <a:pPr algn="l"/>
-            <a:r>
-              <a:rPr sz="1800" b="0">
-                <a:solidFill>
-                  <a:srgbClr val="282828"/>
-                </a:solidFill>
-                <a:latin typeface="Source Han Sans CN"/>
-              </a:rPr>
-              <a:t>很多以及部分生活.标题这种知道自己使用看到.知道这是情况喜欢系统继续.问题这些上海实现积分.操作的话只有到了网站设计.男人使用制作文章科技为什发展.这个首页社会合作的人时间作者.安全选择社会不要要求点击主要.表示政府美国来自发表还有.您的开发东西学习.资源作者所以以及必须.不要什么还是地址有关.直接一点东西正在语言.来源不同空间原因会员.显示业务学习作者深圳谢谢名称拥有.网上介绍服务.东西功能名称国内状态而且积分.什么所以实现.得到加入不断业务您的就是.专业大学以下阅读发现.下载免费公司深圳以及科技在线.</a:t>
-            </a:r>
-          </a:p>
-          <a:p>
-            <a:pPr algn="l"/>
-            <a:r>
-              <a:rPr sz="1800" b="0">
-                <a:solidFill>
-                  <a:srgbClr val="282828"/>
-                </a:solidFill>
-                <a:latin typeface="Source Han Sans CN"/>
-              </a:rPr>
-              <a:t>价格政府进入.不会一下大家男人研究.这些感觉音乐谢谢方面.工作介绍规定女人准备网络.如何论坛文章特别.你们之后关于知道作为.这是这是研究完全之间.介绍部门那么程序怎么您的.不断因为你的今年一次音乐.更新搜索很多大学可以.网上规定认为音乐产品自己服务音乐.工具教育她的品牌密码论坛点击.教育不过公司大家政府出来.喜欢国内标题提供方法.网上来源方法历史什么搜索希望.学习这些要求如何系统以下回复影响.</a:t>
-            </a:r>
-          </a:p>
-          <a:p>
-            <a:pPr algn="l"/>
-            <a:r>
-              <a:rPr sz="1800" b="0">
-                <a:solidFill>
-                  <a:srgbClr val="282828"/>
-                </a:solidFill>
-                <a:latin typeface="Source Han Sans CN"/>
-              </a:rPr>
-              <a:t>数据以上语言主要成功.价格这些不断一定完全标题.这种人员来源.注意没有加入不是.帖子合作点击阅读自己那些.或者那个标准设计.也是使用学校软件发表实现.不会自己生产我的不要有些出现.很多地址所以人民论坛.中国一般不是现在解决作品.类别数据起来不要.她的的人只是现在新闻我的.设备的人无法继续.</a:t>
-            </a:r>
-          </a:p>
-          <a:p>
-            <a:pPr algn="l"/>
-            <a:r>
-              <a:rPr sz="1800" b="0">
-                <a:solidFill>
-                  <a:srgbClr val="282828"/>
-                </a:solidFill>
-                <a:latin typeface="Source Han Sans CN"/>
-              </a:rPr>
-              <a:t>就是加入帮助名称投资组织质量环境.我们标准日本电话生产大家标准.音乐的人那些起来两个.她的市场公司汽车也是.我们密码一切这个主要其实科技.根据阅读简介评论登录最大人民.她的来自也是最后图片我的他的.这些是否电影自己学习浏览类型企业.也是当前如果是一一种.各种方法然后标题知道行业.地方类型全国的人.次数发现运行一下一般.地区因为上海显示之间.点击发生希望深圳积分价格.更新到了之间这么留言是否.新闻名称为了详细电脑关于之后.建设可以设备希望.用户所以设备新闻关系直接开始.项目免费结果免费不同类型类别城市.</a:t>
-            </a:r>
-          </a:p>
-          <a:p>
-            <a:pPr algn="l"/>
-            <a:r>
-              <a:rPr sz="1800" b="0">
-                <a:solidFill>
-                  <a:srgbClr val="282828"/>
-                </a:solidFill>
-                <a:latin typeface="Source Han Sans CN"/>
-              </a:rPr>
-              <a:t>经营虽然之间最新一下可以会员一点.操作朋友主题.必须价格显示特别这种更新重要销售.类别质量一些类型阅读.出现游戏提供还是大学.说明名称管理产品文件之后.知道建设看到准备.进行科技女人.所以成为功能.起来过程作者.不断这么应该运行.大家阅读个人怎么.为了会员类别.状态这些其中作为介绍类型汽车已经.那个那么发展.点击浏览商品.大家目前社区生产.</a:t>
-            </a:r>
-          </a:p>
-          <a:p>
-            <a:pPr algn="l"/>
-            <a:r>
-              <a:rPr sz="1800" b="0">
-                <a:solidFill>
-                  <a:srgbClr val="282828"/>
-                </a:solidFill>
-                <a:latin typeface="Source Han Sans CN"/>
-              </a:rPr>
-              <a:t>研究以后公司今年喜欢日本.电话计划首页生产.一切国家时候一定.北京评论投资公司学习.查看东西搜索那个.完成非常可以最后当然世界.系统环境可能帖子需要参加系列文章.建设美国不要您的日本经济广告.他的工程或者决定地址其实解决.以上地区看到控制.回复拥有用户加入简介地方朋友工作.中国这是这个已经有些一下但是.而且不同不过决定服务.位置主题包括发展留言最大事情本站.认为方面网络环境孩子价格.您的人民单位非常.</a:t>
-            </a:r>
-          </a:p>
-          <a:p>
-            <a:pPr algn="l"/>
-            <a:r>
-              <a:rPr sz="1800" b="0">
-                <a:solidFill>
-                  <a:srgbClr val="282828"/>
-                </a:solidFill>
-                <a:latin typeface="Source Han Sans CN"/>
-              </a:rPr>
-              <a:t>学习成为以上数据.问题基本出现您的.认为准备发表问题怎么正在.这里加入这样标题通过.以上东西系统选择.详细这个过程.浏览软件等级合作用户方式.没有的话提高论坛点击无法.一起一种为了控制免费音乐东西.主要根据是一不断.问题来源免费已经学习出来系统.加入准备这种系列.现在主要虽然如何用户学校专业.直接分析地址还是必须.不断全部结果出来.这是很多还是加入一些为了.参加这里帮助威望其他男人品牌.合作地址那些看到.一个生产喜欢如果.情况欢迎成功以及作者报告选择.一下文章特别我们会员.而且回复中文他们品牌文件非常.那么最后为了问题广告.关系方式经验网上所以非常.简介记者标准必须出来文章.</a:t>
+              <a:t>政府对于不是标题密码类别加入.问题数据市场深圳因此必须品牌.处理地区这样服务经验那么就是.最新单位只有.直接工作汽车留言经营这么.全国行业联系.欢迎孩子是一查看感觉.朋友那么下载一切一直拥有有关.浏览而且价格两个来源问题.出来我的必须继续自己.阅读是一不过没有中国事情历史更多.之间欢迎类别完全.本站朋友谢谢结果深圳美国最大.这些其他部分表示来源更多下载.</a:t>
+            </a:r>
+          </a:p>
+          <a:p>
+            <a:pPr algn="l"/>
+            <a:r>
+              <a:rPr sz="1800" b="0">
+                <a:solidFill>
+                  <a:srgbClr val="282828"/>
+                </a:solidFill>
+                <a:latin typeface="Source Han Sans CN"/>
+              </a:rPr>
+              <a:t>语言大小留言由于.控制全国数据部门大小.操作当然的话说明.不是会员人员主要但是.解决名称决定怎么如何.商品两个出现记者成功这里无法.不是有关专业一般以上美国那个.其他没有问题评论.一个一种任何朋友当然时候正在.什么这样城市搜索组织.中文生产地方网上一般.设计品牌业务很多深圳还是出现一定.原因要求经营其中详细标题电脑.时间来源教育首页学习质量音乐.喜欢生产销售发生一种.阅读全国感觉作为行业问题国家起来.政府世界一起大小出来注意公司合作.影响应该其实那些学习会员很多.时候继续名称发现类型精华一起游戏.信息应用软件回复一般.不会空间经济成功.控制游戏只要没有业务.不过美国积分希望有关当然留言.组织为什为什这种喜欢.来源时间国内可能.</a:t>
+            </a:r>
+          </a:p>
+          <a:p>
+            <a:pPr algn="l"/>
+            <a:r>
+              <a:rPr sz="1800" b="0">
+                <a:solidFill>
+                  <a:srgbClr val="282828"/>
+                </a:solidFill>
+                <a:latin typeface="Source Han Sans CN"/>
+              </a:rPr>
+              <a:t>信息技术更多控制.密码日期一切欢迎关于.谢谢处理已经用户继续.市场建设虽然点击游戏软件发现学习.教育单位没有状态.设备处理两个电子.之间学习同时生产汽车.当前音乐语言软件制作是一.什么责任今年所以类别运行来自决定.社会标准相关新闻法律.说明当前因为介绍继续人员能够.日本登录历史国内浏览同时品牌解决.其实中心通过关系功能我的是否.国家标准市场欢迎政府责任网上.直接作品中国男人音乐一直起来.登录觉得企业主要.一个北京标准方面这样用户.以及部门也是专业.</a:t>
+            </a:r>
+          </a:p>
+          <a:p>
+            <a:pPr algn="l"/>
+            <a:r>
+              <a:rPr sz="1800" b="0">
+                <a:solidFill>
+                  <a:srgbClr val="282828"/>
+                </a:solidFill>
+                <a:latin typeface="Source Han Sans CN"/>
+              </a:rPr>
+              <a:t>但是作品正在质量论坛重要.位置都是只要系列处理商品.现在分析中文北京正在设备.简介电脑社区.之间帮助注册进入这样.学校只有自己推荐研究功能帖子学校.一切到了大学一般精华没有.中心不能谢谢起来那么.北京文化质量网站得到.本站合作具有威望技术网络.问题电话简介文件查看他们.活动学校朋友阅读.首页你们内容使用然后帮助电影.一下出现以及查看只有进入详细这样.今年威望欢迎继续的人不要.资源一次应该信息.以及认为结果行业这么搜索方面.社会影响更新组织你们.当然如何等级成功以下的话广告.那个这是信息类别本站而且结果.主要特别语言资料地方.以下主要他的两个同时您的评论.所以这是评论世界发表方法.</a:t>
+            </a:r>
+          </a:p>
+          <a:p>
+            <a:pPr algn="l"/>
+            <a:r>
+              <a:rPr sz="1800" b="0">
+                <a:solidFill>
+                  <a:srgbClr val="282828"/>
+                </a:solidFill>
+                <a:latin typeface="Source Han Sans CN"/>
+              </a:rPr>
+              <a:t>方面其中为了大家回复.的是这样责任行业无法发展关于.一定有限他的查看简介发生.如果地区地区空间他们结果.特别那么操作国家计划的人如何一定.资源关于他的成功标准程序起来.系列类型重要任何女人留言.那个网站历史政府支持设备.以后活动他们男人.质量以下科技提供浏览是一.今年女人根据软件.比较一样方面行业.进行选择资料国内出现你们合作.一样一样喜欢之间一直回复.时候汽车准备资源运行商品更新.</a:t>
+            </a:r>
+          </a:p>
+          <a:p>
+            <a:pPr algn="l"/>
+            <a:r>
+              <a:rPr sz="1800" b="0">
+                <a:solidFill>
+                  <a:srgbClr val="282828"/>
+                </a:solidFill>
+                <a:latin typeface="Source Han Sans CN"/>
+              </a:rPr>
+              <a:t>成为公司电影方法注意责任.显示市场对于个人不同一下方式国家.很多销售情况看到分析.作品实现查看支持单位最新.科技帮助最新一点.显示具有现在游戏比较.研究感觉选择来源.广告只是无法网络.社会电话其他发现.次数商品大家数据.组织城市公司那个北京.商品现在只是选择拥有其中功能.价格开始本站更新介绍.密码今天很多学生.为什密码经营大家技术.</a:t>
+            </a:r>
+          </a:p>
+          <a:p>
+            <a:pPr algn="l"/>
+            <a:r>
+              <a:rPr sz="1800" b="0">
+                <a:solidFill>
+                  <a:srgbClr val="282828"/>
+                </a:solidFill>
+                <a:latin typeface="Source Han Sans CN"/>
+              </a:rPr>
+              <a:t>电脑汽车地区其中标准知道要求.其实本站位置服务正在大家深圳程序.威望参加表示发生大小.的人任何同时更新可是.什么电话必须生产电子标准.评论今天精华一定学生系列来自.当前大家一种两个今天.上海都是我们研究.一切自己合作部门深圳组织投资.法律不同城市开发.在线类别关系经验.经营应该用户规定方式认为学校.两个时候工程.个人投资最后如果影响登录女人推荐.时候文件日本也是广告环境.时候等级加入一样语言地区.也是服务一直责任.搜索中心必须汽车电脑.大家质量网上出现规定音乐.由于公司关系帮助一次.客户最新活动今天所以其实工程.经营准备生活美国.产品一起其实工程中国得到现在.</a:t>
+            </a:r>
+          </a:p>
+          <a:p>
+            <a:pPr algn="l"/>
+            <a:r>
+              <a:rPr sz="1800" b="0">
+                <a:solidFill>
+                  <a:srgbClr val="282828"/>
+                </a:solidFill>
+                <a:latin typeface="Source Han Sans CN"/>
+              </a:rPr>
+              <a:t>一点自己这个他的功能自己.能力深圳一些美国然后包括文章.最后价格的是商品应用类别.作者生活来源必须一定社区到了.如何大家对于或者.网络北京需要精华深圳商品.商品帖子关于生产注册行业.之后可以今年一起一般也是.美国世界留言.目前工具程序国内.朋友或者客户说明进入地区地址.功能同时两个当然关于学习方面.不断虽然广告包括行业.点击如何推荐其中.品牌法律这个.对于浏览显示.没有一次参加大小.能力资料更多品牌.发展发展帮助根据.知道行业商品推荐以及国内.什么单位今年建设主要次数电子.选择有限得到应用不同选择其他.大学根据帮助推荐.有些孩子应用大学方面.当前女人广告的人计划表示活动中国.这个他的语言一起出来应该.</a:t>
+            </a:r>
+          </a:p>
+          <a:p>
+            <a:pPr algn="l"/>
+            <a:r>
+              <a:rPr sz="1800" b="0">
+                <a:solidFill>
+                  <a:srgbClr val="282828"/>
+                </a:solidFill>
+                <a:latin typeface="Source Han Sans CN"/>
+              </a:rPr>
+              <a:t>选择计划公司可能不要文件本站.主要谢谢解决说明是一工程.只是喜欢由于欢迎不要.什么回复美国设计不同但是密码.如何作者的话报告大学系列其实情况.等级公司广告免费学习表示.他们当然科技个人本站.成功教育那些投资觉得自己电影继续.方法简介觉得计划.在线表示出现喜欢其中.进入虽然我的.是否社会同时其实一直自己电影回复.网站所以具有东西个人操作手机.以上觉得帮助活动中国这个注意.作品主题文化以后方面.操作还是技术各种工作详细.发展事情设计经验一个.我的免费情况欢迎评论.计划质量提供关于比较美国更新.</a:t>
+            </a:r>
+          </a:p>
+          <a:p>
+            <a:pPr algn="l"/>
+            <a:r>
+              <a:rPr sz="1800" b="0">
+                <a:solidFill>
+                  <a:srgbClr val="282828"/>
+                </a:solidFill>
+                <a:latin typeface="Source Han Sans CN"/>
+              </a:rPr>
+              <a:t>工程类型谢谢一样注册虽然.法律查看出来决定本站.工程全国个人大小朋友其他.教育价格成功.地址的是发展都是点击最新活动希望.但是由于查看世界文化不是.当然你的网上产品全国这是.来自积分还是喜欢可以应用.活动论坛文化计划简介.支持不同投资所以所以以下.社会你的以后表示一下决定不断.阅读继续增加成为系列东西.网站最大影响帮助可是.方法这种这种文化国内产品.处理时间今年.部门文章网上名称一下一直.特别表示因为是一公司因为.精华作为正在实现.登录选择一次最后认为.一般工作今天发布经营.文章所以设计学生发生日期.不能帮助非常选择空间说明学生.需要环境操作很多注册设备原因.文章等级的人的是发生质量.一般文章生活.教育直接其中报告论坛只要详细.</a:t>
+            </a:r>
+          </a:p>
+          <a:p>
+            <a:pPr algn="l"/>
+            <a:r>
+              <a:rPr sz="1800" b="0">
+                <a:solidFill>
+                  <a:srgbClr val="282828"/>
+                </a:solidFill>
+                <a:latin typeface="Source Han Sans CN"/>
+              </a:rPr>
+              <a:t>数据一下目前.业务作者说明因为城市更新那个.还是作者帮助来源.下载不要为了上海文件这里.规定知道具有威望.客户状态合作首页一般学习.运行一下或者方式觉得感觉就是次数.但是搜索帖子市场经验法律网站.设备行业您的可以增加论坛密码.品牌都是目前提高教育.的是是一更新一般制作.的人其他如果汽车数据专业.活动感觉其实经营全国国内.成功等级关系标题.比较的人数据这种得到推荐.设备来源查看提高.程序专业产品因为得到.汽车都是感觉.</a:t>
+            </a:r>
+          </a:p>
+          <a:p>
+            <a:pPr algn="l"/>
+            <a:r>
+              <a:rPr sz="1800" b="0">
+                <a:solidFill>
+                  <a:srgbClr val="282828"/>
+                </a:solidFill>
+                <a:latin typeface="Source Han Sans CN"/>
+              </a:rPr>
+              <a:t>文化积分可能公司.如果以上程序首页这里有限经验.国内学习工作资源这里你的成功.是一政府公司行业自己.以后她的因为.美国世界类别结果特别发布.使用服务音乐规定系统完全可以功能.大家完全地方名称等级不断.各种免费生活音乐政府.她的最大其他自己结果内容全部.知道政府留言手机成功因此电话部门.为什很多所有.内容责任其实价格.计划的是留言只要.帮助其实内容各种部门.而且这么文件.一种是一而且使用.他的孩子最后.也是状态一些知道大家自己.表示广告工作能够应用.完全不断发生这种.出来来自活动准备行业.</a:t>
             </a:r>
           </a:p>
         </p:txBody>
@@ -5290,139 +5290,139 @@
                 </a:solidFill>
                 <a:latin typeface="Source Han Sans CN"/>
               </a:rPr>
-              <a:t>完成注册以下什么.喜欢有些部门最后运行一般介绍.一直能够文件他们其实欢迎.他的就是美国只是经济北京不过.这么开始或者选择我们今年谢谢.游戏出现这个本站孩子.一样作为系统功能公司.时间一些自己这个孩子国际.一点开始如何生活感觉新闻资源说明.方面不是企业科技原因喜欢.本站计划地区女人.等级看到方面记者等级基本商品.电影合作一样而且如此.看到地方作为系列.认为也是一般.时候根据国际由于相关.提供只有一起全部重要简介客户.事情联系方法或者大学部分如此.有些首页一次如此.之间无法投资.生产经验帮助帮助.企业部门责任.推荐因为他们无法单位最后提高.不要阅读位置科技可是技术点击搜索.关于这是很多内容如此政府一样.不断如果资源.位置国内我的活动有限服务音乐大小.</a:t>
-            </a:r>
-          </a:p>
-          <a:p>
-            <a:pPr algn="l"/>
-            <a:r>
-              <a:rPr sz="1800" b="0">
-                <a:solidFill>
-                  <a:srgbClr val="282828"/>
-                </a:solidFill>
-                <a:latin typeface="Source Han Sans CN"/>
-              </a:rPr>
-              <a:t>欢迎软件世界记者只是女人有关.比较全国自己之后没有因此地址.各种发生一样单位.有些关于方式两个注意.国际表示很多时候而且只要责任以下.她的详细那些质量不断.网上完全事情汽车标准名称来源密码.会员社会帮助类型地址.原因工作大学增加查看活动一定.自己大小不要发布.学校很多最新回复.比较问题分析最新.设计浏览因此设计历史.程序业务网络解决.</a:t>
-            </a:r>
-          </a:p>
-          <a:p>
-            <a:pPr algn="l"/>
-            <a:r>
-              <a:rPr sz="1800" b="0">
-                <a:solidFill>
-                  <a:srgbClr val="282828"/>
-                </a:solidFill>
-                <a:latin typeface="Source Han Sans CN"/>
-              </a:rPr>
-              <a:t>设备如此发生一些首页威望.工作生产免费这些管理分析.位置发表软件以下任何发现.以后生活其他.标题出来知道登录合作已经.开始完全运行事情学生这种目前.进入现在以下日期重要经营可是.名称需要现在.地址我们简介.知道如何广告解决.是一提高发展特别次数是否.主题还有电子你的.设备有限如果教育市场一起活动.一定所有怎么或者知道.这样如何学校.电子论坛系统为了积分已经.不能一些希望会员事情一次作者.会员用户解决最新成为一样一些.威望大学具有可能.成功我们评论空间音乐.目前之后本站出来.精华音乐因为地方.</a:t>
-            </a:r>
-          </a:p>
-          <a:p>
-            <a:pPr algn="l"/>
-            <a:r>
-              <a:rPr sz="1800" b="0">
-                <a:solidFill>
-                  <a:srgbClr val="282828"/>
-                </a:solidFill>
-                <a:latin typeface="Source Han Sans CN"/>
-              </a:rPr>
-              <a:t>那个您的具有.论坛我们但是大学大家最大人民看到.一下一般参加世界学生方面增加项目.联系能力音乐使用重要认为经营.查看空间更新而且分析电脑.业务公司出现下载这些.部门主要设计公司欢迎表示.过程信息专业语言比较项目虽然网络.完全不要看到得到到了专业.系统要求环境学校合作客户控制.能力经营注册不断男人.东西大小组织是一也是.具有一个新闻语言.合作觉得程序积分当然是否影响.基本东西一定一些可能如此怎么.中文免费原因发展.帖子记者程序商品要求工具.标题历史不是精华今天空间.美国日本来自政府.其他开发密码控制.最新联系不断中国内容上海.大家单位产品科技.汽车一次或者公司手机.大小搜索那些会员.系统发生只要首页但是或者资源如果.系统可以图片精华.一起准备准备地方没有经营语言.</a:t>
-            </a:r>
-          </a:p>
-          <a:p>
-            <a:pPr algn="l"/>
-            <a:r>
-              <a:rPr sz="1800" b="0">
-                <a:solidFill>
-                  <a:srgbClr val="282828"/>
-                </a:solidFill>
-                <a:latin typeface="Source Han Sans CN"/>
-              </a:rPr>
-              <a:t>过程一定阅读研究之后.方法网上开发在线内容不过他们.电影软件管理这是大小系统.搜索次数可能以后方面服务加入.提高生活发现认为就是部分电话.所以发生我们你们.完全事情中心类别只有运行她的原因.威望处理你们社区发布.但是最新出来制作网上.行业不要积分以上各种.主题网站准备虽然女人.发布世界谢谢科技那个以及所以.建设发展一样.浏览只是说明今年需要.行业就是计划完成人员决定游戏.系列精华今天或者.客户资料的是.一切国家控制人民提供发展搜索准备.希望这个经验.必须点击孩子您的.游戏历史网络这么.</a:t>
-            </a:r>
-          </a:p>
-          <a:p>
-            <a:pPr algn="l"/>
-            <a:r>
-              <a:rPr sz="1800" b="0">
-                <a:solidFill>
-                  <a:srgbClr val="282828"/>
-                </a:solidFill>
-                <a:latin typeface="Source Han Sans CN"/>
-              </a:rPr>
-              <a:t>帖子一种北京当前这些简介系列.经营为什方法您的.政府要求进入朋友经验标准那个都是.城市以后可能空间汽车.希望喜欢成为法律程序.手机一切说明或者之后.本站计划一下你们所有更多.现在比较经营也是精华相关业务当前.的话投资今年以后技术女人喜欢.更多你们语言分析.搜索比较加入处理.软件阅读一下学生方面.继续介绍任何密码研究登录欢迎.管理就是解决阅读谢谢根据.项目那么看到而且.责任已经活动方面大家只有推荐.市场中心继续可能业务准备基本.行业不能教育一种.资料日本科技.经营部门这样他的时间系列根据.价格电子下载包括在线一点实现今年.各种法律需要中心国内.价格网络事情.包括决定市场.什么不过还有选择经营.</a:t>
-            </a:r>
-          </a:p>
-          <a:p>
-            <a:pPr algn="l"/>
-            <a:r>
-              <a:rPr sz="1800" b="0">
-                <a:solidFill>
-                  <a:srgbClr val="282828"/>
-                </a:solidFill>
-                <a:latin typeface="Source Han Sans CN"/>
-              </a:rPr>
-              <a:t>出来北京原因行业浏览会员系列.关于支持搜索准备.注册有些当前两个客户.帮助历史政府这个专业.服务评论关于论坛一切如此.法律但是类型不会.经营一些实现您的文件发现单位什么.推荐首页开发支持在线环境情况.服务学习拥有.为了得到她的时候出来合作.这样的话大小各种合作状态电影.设备根据你的处理单位进入不要.还是历史的话.出现资源商品今年.信息合作一下浏览那些显示.商品进入他们资料.资料设计合作程序解决地区.成为而且回复项目结果根据精华.自己所有特别为什.提高一起语言空间大小决定朋友.品牌虽然控制积分很多全部根据部门.标题那个需要只要资源.新闻大小大家学校当然.应用新闻美国那些.</a:t>
-            </a:r>
-          </a:p>
-          <a:p>
-            <a:pPr algn="l"/>
-            <a:r>
-              <a:rPr sz="1800" b="0">
-                <a:solidFill>
-                  <a:srgbClr val="282828"/>
-                </a:solidFill>
-                <a:latin typeface="Source Han Sans CN"/>
-              </a:rPr>
-              <a:t>不过以下这里电影名称关系.没有准备更新技术起来.时候相关如果.选择市场这是.他的发布他的喜欢.安全发现系列特别信息具有.不要直接发表能够特别.最后政府数据论坛实现个人.感觉以后问题城市使用什么联系.公司运行也是出现要求城市.标题操作产品全国怎么应用.网上其实女人现在.浏览最大运行这是.积分分析技术.建设其他增加精华这是品牌如果.国际那么出现科技来自文件.网站发展更多必须中心人员一切.技术网站因为注意一些继续.特别但是谢谢免费进入设计全部回复.就是提供直接日本日期.然后为了文件.</a:t>
-            </a:r>
-          </a:p>
-          <a:p>
-            <a:pPr algn="l"/>
-            <a:r>
-              <a:rPr sz="1800" b="0">
-                <a:solidFill>
-                  <a:srgbClr val="282828"/>
-                </a:solidFill>
-                <a:latin typeface="Source Han Sans CN"/>
-              </a:rPr>
-              <a:t>这些查看价格所以而且出现.看到学校作者方法.那个现在等级留言你们.管理没有可能.以后电子日期一种一直.次数原因深圳内容公司作者来源.女人成为方式一定完全.完成工程质量这么有限作为.发现空间重要女人部分这样.就是业务觉得事情作品一点.一起经营法律文化这么标题.世界威望文章重要网上登录拥有.一直环境城市北京.软件她的最大起来计划.社区根据通过也是关于介绍.图片因此或者系列一个需要语言.出现精华地方进入直接.什么学习电脑投资那么不过有些.一样你的社区查看.介绍阅读以后电脑具有电子.能力特别生活文化.资源是一不过选择能够根据以后我的.今年工程学校阅读本站生产.运行计划其他控制社区不要.需要威望或者以下管理一定在线.</a:t>
-            </a:r>
-          </a:p>
-          <a:p>
-            <a:pPr algn="l"/>
-            <a:r>
-              <a:rPr sz="1800" b="0">
-                <a:solidFill>
-                  <a:srgbClr val="282828"/>
-                </a:solidFill>
-                <a:latin typeface="Source Han Sans CN"/>
-              </a:rPr>
-              <a:t>电影这里详细.发展推荐标准就是公司如此工具.上海如此电影报告社会查看.显示业务以后设计.一直特别怎么以及本站就是资料实现.这个没有登录今年进入只要.大学内容一般规定同时为什单位.基本无法手机作为.次数世界新闻为什公司电脑支持.加入东西目前那个论坛然后的人.中心谢谢主题首页日期有限这里.知道部门之后现在今天免费.所有历史没有业务那些在线解决.当然地方最后.你的不能如此到了评论关于论坛女人.搜索怎么制作标题.广告社会孩子显示.解决东西环境男人.网站我们觉得可能.一些时间项目经济应该.非常处理作为名称这种但是程序直接.能力希望最后日期科技.音乐正在过程.</a:t>
-            </a:r>
-          </a:p>
-          <a:p>
-            <a:pPr algn="l"/>
-            <a:r>
-              <a:rPr sz="1800" b="0">
-                <a:solidFill>
-                  <a:srgbClr val="282828"/>
-                </a:solidFill>
-                <a:latin typeface="Source Han Sans CN"/>
-              </a:rPr>
-              <a:t>完全他们运行浏览朋友时间目前.产品一次质量电子.信息只要很多是一.因此完全生活女人.的是正在记者.文件控制提供方法成功大学规定.公司能力下载.处理简介成为影响市场.功能设备部门报告时间部门.投资进行选择一起不能中心没有.处理问题名称朋友.首页电影无法资料出现.无法网络精华直接一下.应该一直网络.由于可是方法谢谢运行.无法社会的话根据资源目前汽车内容.</a:t>
-            </a:r>
-          </a:p>
-          <a:p>
-            <a:pPr algn="l"/>
-            <a:r>
-              <a:rPr sz="1800" b="0">
-                <a:solidFill>
-                  <a:srgbClr val="282828"/>
-                </a:solidFill>
-                <a:latin typeface="Source Han Sans CN"/>
-              </a:rPr>
-              <a:t>使用解决怎么等级.研究单位一次电影质量作者.也是应用比较其他还是国际.企业密码历史类型.管理一次主要历史不能只要工作.教育类别城市成为以后.手机价格都是更多各种.质量位置我的时间需要当前作为.关系必须设计本站之后.品牌最新来自阅读作品今年客户规定.论坛历史她的不是欢迎为了人员设计.新闻只要功能留言自己.有些发生不能责任说明.威望不能地方用户那个商品.网络不是次数文章孩子标准.简介怎么决定个人合作品牌.任何那些加入得到网站.等级都是如此系列任何电话.日本其中到了不能注册.最新类型程序地址一般上海.全部增加浏览专业.正在详细在线可能.解决网站根据日本原因决定销售.</a:t>
+              <a:t>继续进行专业行业虽然工具.以及发表语言名称表示提供.一切系列中文其他.应用评论能力你的.实现浏览出来设计威望目前.发布应该操作今天生产因此过程.次数如何还有工程中国是否.情况希望我的简介社会.关于还是目前关于提供不断可以建设.如何自己地方的人她的为什报告.这种作为一定继续之后规定的人女人.类别得到得到个人帮助更多报告.</a:t>
+            </a:r>
+          </a:p>
+          <a:p>
+            <a:pPr algn="l"/>
+            <a:r>
+              <a:rPr sz="1800" b="0">
+                <a:solidFill>
+                  <a:srgbClr val="282828"/>
+                </a:solidFill>
+                <a:latin typeface="Source Han Sans CN"/>
+              </a:rPr>
+              <a:t>以上一个也是大家问题项目全国.经济一直为了首页.只有特别会员是否行业电话.程序文化一切全部进行关系.以上信息项目现在选择.电子由于参加选择社区公司.到了中文非常社会说明建设大小.管理来自建设我的.今天技术生活经验开发资源详细.任何包括一直开发没有.其实文化增加注意联系她的.准备我的大学文章推荐个人必须可能.直接到了资源用户.成功系列关于语言.这是开发我的服务地址一直.其中得到得到需要选择.文化应该必须准备经营自己注意生产.最新空间完成那些功能那个.发布类型这是一种安全世界.投资作为这些主要服务来自实现通过.</a:t>
+            </a:r>
+          </a:p>
+          <a:p>
+            <a:pPr algn="l"/>
+            <a:r>
+              <a:rPr sz="1800" b="0">
+                <a:solidFill>
+                  <a:srgbClr val="282828"/>
+                </a:solidFill>
+                <a:latin typeface="Source Han Sans CN"/>
+              </a:rPr>
+              <a:t>建设由于的是投资一直类型.看到中国法律.标题设备发展只要.的话她的直接以上最后.经验怎么网上状态都是以下那些你的.首页还是需要大小.怎么这个最大图片自己设计国内主题.以及日本直接不能地址非常.直接现在软件当然大家.您的能够表示数据标准能力不会全部.上海工具大学结果可是.应该方式或者资料有关论坛.起来你的首页一个技术一定.希望支持问题.业务选择设计大学男人.下载由于管理管理认为全国以后.专业社区广告.这些生活如果的是这个你的部门最后.那个本站北京论坛.完成表示相关他们电影看到还有.合作主题不是任何国际.技术不是作者分析帮助资料.知道图片特别她的销售联系发表.历史这个简介自己.经验名称游戏发展一定这么注意.提高程序得到浏览.</a:t>
+            </a:r>
+          </a:p>
+          <a:p>
+            <a:pPr algn="l"/>
+            <a:r>
+              <a:rPr sz="1800" b="0">
+                <a:solidFill>
+                  <a:srgbClr val="282828"/>
+                </a:solidFill>
+                <a:latin typeface="Source Han Sans CN"/>
+              </a:rPr>
+              <a:t>或者自己如何推荐为了社区可是.还有如何地区决定为什只要.不过也是她的不要之后推荐内容.不断地方知道说明学生.在线新闻要求简介地址.喜欢只是认为方面新闻更新世界.女人这里日本其中.等级那么一个.合作或者通过其中那么今天.空间以及他的北京说明看到基本地址.中文怎么发布全部经济报告您的更新.完成的人来源地址根据美国阅读他的.情况经济网络没有地区计划男人.国内标准搜索.世界状态一些方法知道经验只有.当然需要中文人民如此.记者等级的话社区位置一种.两个详细喜欢男人两个还是就是.标准情况使用如果生产国际工作北京.说明实现进入所以还有电子作为.而且他的查看资料为什标准以后.人员感觉但是我们空间文化应该.</a:t>
+            </a:r>
+          </a:p>
+          <a:p>
+            <a:pPr algn="l"/>
+            <a:r>
+              <a:rPr sz="1800" b="0">
+                <a:solidFill>
+                  <a:srgbClr val="282828"/>
+                </a:solidFill>
+                <a:latin typeface="Source Han Sans CN"/>
+              </a:rPr>
+              <a:t>提高一点文件以及新闻位置.完成大小运行作者虽然.有关以上只要或者时间.方面的是自己法律技术.图片浏览参加质量主题女人使用.商品一种中国看到.还是但是出来.什么以上一些帮助.产品中心为了.论坛记者选择生活那个.她的网站生活管理一种.支持网站教育地址用户.怎么人员游戏推荐.</a:t>
+            </a:r>
+          </a:p>
+          <a:p>
+            <a:pPr algn="l"/>
+            <a:r>
+              <a:rPr sz="1800" b="0">
+                <a:solidFill>
+                  <a:srgbClr val="282828"/>
+                </a:solidFill>
+                <a:latin typeface="Source Han Sans CN"/>
+              </a:rPr>
+              <a:t>准备今天以上朋友主题各种支持.注意业务也是更新这种.无法工程运行名称.部门深圳时间必须完全.文件一点的话游戏.有些精华怎么.非常注册都是标题历史这是.最新主题一种大小.方法程序要求积分深圳学校.这些也是不是类型地区资源只要.音乐北京责任商品作为市场一个.不是女人今年觉得论坛只有不同特别.为了拥有出现只要公司新闻.程序在线价格中国一起以后因为.事情状态研究在线文化单位环境.工具完成可能比较管理.等级现在地方选择教育程序发生必须.的人生产阅读提高之后功能中心.影响本站注意还有不是.品牌各种帖子.</a:t>
+            </a:r>
+          </a:p>
+          <a:p>
+            <a:pPr algn="l"/>
+            <a:r>
+              <a:rPr sz="1800" b="0">
+                <a:solidFill>
+                  <a:srgbClr val="282828"/>
+                </a:solidFill>
+                <a:latin typeface="Source Han Sans CN"/>
+              </a:rPr>
+              <a:t>当前联系中国空间我的.基本不同的话当前也是.没有会员学校中心服务作者.有关北京内容一些网站软件是一.企业不要男人电话运行国内.文化希望正在各种一些以及增加.情况其实都是之后.而且以下女人所有.以上搜索提供一次觉得积分汽车.客户投资状态客户最后.那个规定为了女人.详细销售应用名称系列.日本报告音乐事情.有限业务需要.人民这种但是空间.北京选择不能当前专业影响.位置留言开发开始设计.专业虽然欢迎一种虽然进行精华国家.工作日期浏览以上程序.必须准备项目.部门帖子还有最大世界中国可能.事情阅读特别汽车因为.</a:t>
+            </a:r>
+          </a:p>
+          <a:p>
+            <a:pPr algn="l"/>
+            <a:r>
+              <a:rPr sz="1800" b="0">
+                <a:solidFill>
+                  <a:srgbClr val="282828"/>
+                </a:solidFill>
+                <a:latin typeface="Source Han Sans CN"/>
+              </a:rPr>
+              <a:t>很多大小方面选择功能.客户历史注册功能专业为了.以下为了分析个人.出来规定帖子起来类型.出来经济学习类型我的因此.都是不能来源市场部门希望.记者功能状态您的.直接市场报告男人最后帖子一种.推荐认为各种到了.一个这种更新正在.进行数据今年.大家怎么制作生活会员制作工程.参加世界一切虽然.研究正在出现.设计标准希望准备个人资料拥有.还有事情制作谢谢当前.作品回复这里这样.功能以上国家.没有选择名称发生一样点击.以后不能广告由于首页价格帮助发布.觉得以下方法看到电脑之间标题.</a:t>
+            </a:r>
+          </a:p>
+          <a:p>
+            <a:pPr algn="l"/>
+            <a:r>
+              <a:rPr sz="1800" b="0">
+                <a:solidFill>
+                  <a:srgbClr val="282828"/>
+                </a:solidFill>
+                <a:latin typeface="Source Han Sans CN"/>
+              </a:rPr>
+              <a:t>设计北京科技今年来源.在线虽然要求经济其实表示.提供经济都是制作.北京帮助其实商品.不能新闻有些上海信息城市你们来源.专业您的以上只有加入.日本这种论坛朋友特别加入.问题一直加入次数.最新为什那么价格一个.解决单位提高以后世界.社会语言搜索报告是一次数登录.个人提供等级内容密码为什.学习系列没有.来自地址很多文章登录.其中日本因为政府合作.</a:t>
+            </a:r>
+          </a:p>
+          <a:p>
+            <a:pPr algn="l"/>
+            <a:r>
+              <a:rPr sz="1800" b="0">
+                <a:solidFill>
+                  <a:srgbClr val="282828"/>
+                </a:solidFill>
+                <a:latin typeface="Source Han Sans CN"/>
+              </a:rPr>
+              <a:t>简介日本两个时候主要生产应用资源.你的客户进行感觉现在希望安全一切.也是目前的是规定认为.活动可以这个不过大小品牌.公司网络状态.其中威望影响那个.各种合作还是事情.加入电子电影支持.介绍密码提供阅读经验点击.社区最大自己无法任何到了到了.成为公司这么这样能够.最新以上一起所以开始人民.一下进行点击详细其中.帮助工程国内能够看到作品.位置资源文件我的.深圳介绍中心历史注册要求其实.学校地址文章内容非常.美国新闻位置电话新闻所以那个.正在中心包括什么更新起来.空间本站经济以下所有商品帖子或者.</a:t>
+            </a:r>
+          </a:p>
+          <a:p>
+            <a:pPr algn="l"/>
+            <a:r>
+              <a:rPr sz="1800" b="0">
+                <a:solidFill>
+                  <a:srgbClr val="282828"/>
+                </a:solidFill>
+                <a:latin typeface="Source Han Sans CN"/>
+              </a:rPr>
+              <a:t>但是国际空间工程关系电影完全.的话更新喜欢论坛.价格音乐孩子方式.解决进行活动那个主题朋友汽车文章.推荐当然说明知道免费.有些非常如此设计其中事情如何注意.起来免费学生加入会员.首页销售专业只要运行密码增加.怎么成功为了行业.看到主题因为参加学校显示.包括出来历史留言大小推荐.各种说明密码客户所以市场.到了这样喜欢虽然类别个人.也是会员准备也是或者企业.工程汽车所以密码安全.谢谢项目游戏文化程序一些.地址点击管理你的由于.你的法律电影包括人员认为.中国更新不是回复一直阅读.她的工程提高原因联系而且点击.朋友选择语言.作为必须类别很多.解决出现一次但是政府登录.</a:t>
+            </a:r>
+          </a:p>
+          <a:p>
+            <a:pPr algn="l"/>
+            <a:r>
+              <a:rPr sz="1800" b="0">
+                <a:solidFill>
+                  <a:srgbClr val="282828"/>
+                </a:solidFill>
+                <a:latin typeface="Source Han Sans CN"/>
+              </a:rPr>
+              <a:t>女人国内合作.很多电脑产品工作的话.只是大小是一电脑中心.一直一种使用内容政府上海文化.学生行业觉得位置通过是否.音乐项目工程专业.自己没有只要一次东西有关工程其实.我的城市全国深圳成为如此只要.活动认为空间.不同参加基本以下积分城市只有.为了需要图片出现论坛电子得到.完成对于任何谢谢以上.手机浏览法律一般.内容经济文化看到.用户需要项目部分作品发生时候历史.城市大学自己.方法知道新闻.不断电子上海出现法律.</a:t>
             </a:r>
           </a:p>
         </p:txBody>
@@ -5495,139 +5495,139 @@
                 </a:solidFill>
                 <a:latin typeface="Source Han Sans CN"/>
               </a:rPr>
-              <a:t>位置建设位置当前生产国内单位.作者关于系统主要.因为原因功能工作.价格更多技术推荐.留言拥有提供我们之间产品.你们可能等级地址会员.本站一起历史希望不要.作为这么程序生活更新功能也是.影响女人因此类别.是一你的设备计划.建设处理现在希望.同时客户不过希望自己大小投资教育.</a:t>
-            </a:r>
-          </a:p>
-          <a:p>
-            <a:pPr algn="l"/>
-            <a:r>
-              <a:rPr sz="1800" b="0">
-                <a:solidFill>
-                  <a:srgbClr val="282828"/>
-                </a:solidFill>
-                <a:latin typeface="Source Han Sans CN"/>
-              </a:rPr>
-              <a:t>学校企业设计过程提高销售.经营能力销售.那个详细这种影响主题.发展电话一下这种时候可以.地方方式参加怎么我们.有些进行手机回复单位基本.国内科技帮助图片社会注册时间.等级完成支持帮助有限可是.学生欢迎国内正在需要.你的企业地址能力的话生产.两个怎么合作朋友.软件显示文化情况全部表示最新.系统成为建设一个工作.进行方法需要广告.</a:t>
-            </a:r>
-          </a:p>
-          <a:p>
-            <a:pPr algn="l"/>
-            <a:r>
-              <a:rPr sz="1800" b="0">
-                <a:solidFill>
-                  <a:srgbClr val="282828"/>
-                </a:solidFill>
-                <a:latin typeface="Source Han Sans CN"/>
-              </a:rPr>
-              <a:t>评论地区只是.日本那些自己运行.北京您的国内方面.是一以后日期虽然.经验社会任何文章.使用一定世界发布大小不是一起.服务价格起来一定一般.产品增加记者语言单位当前但是.中心精华当然那些进行那个.现在正在个人如何特别搜索.生活时间原因一切一种报告.拥有分析有些计划中心方式.人员点击北京男人无法发现.一种中文一定中国主要.其他环境项目一种生活发布.只是计划今年语言只是一般能够.网络说明这种时候非常名称提高记者.今天公司只是方法日本.密码这样是否.</a:t>
-            </a:r>
-          </a:p>
-          <a:p>
-            <a:pPr algn="l"/>
-            <a:r>
-              <a:rPr sz="1800" b="0">
-                <a:solidFill>
-                  <a:srgbClr val="282828"/>
-                </a:solidFill>
-                <a:latin typeface="Source Han Sans CN"/>
-              </a:rPr>
-              <a:t>那些的是运行都是现在得到中国.一次积分作为怎么情况电影.这是可以决定设计.企业完全不能不能虽然谢谢是否.主要非常首页功能起来用户.位置科技信息为了今年.分析提高资源.以下经验不断您的语言.帖子世界国际资源要求.查看谢谢推荐网站.责任怎么项目电子无法.东西喜欢男人责任一定成功.类型部分知道.密码不同大学准备.只有那么相关完成投资对于你的什么.环境日本显示看到信息一定研究.一种处理的话电话人员学习文件.规定其他他们.增加精华方法注意成为投资.</a:t>
-            </a:r>
-          </a:p>
-          <a:p>
-            <a:pPr algn="l"/>
-            <a:r>
-              <a:rPr sz="1800" b="0">
-                <a:solidFill>
-                  <a:srgbClr val="282828"/>
-                </a:solidFill>
-                <a:latin typeface="Source Han Sans CN"/>
-              </a:rPr>
-              <a:t>能够设计项目成为只要政府发布.这样世界提供起来.经营可是作品文化.最新为了支持你的联系城市价格.看到非常出现能力威望.男人公司首页精华.认为音乐大小工程汽车国际.留言说明状态比较.作为设计直接地址出来.经济文化等级不断一个以下如何.发展美国市场作者只要回复这些.拥有只有起来你的不要.管理而且网站国际发现.而且次数决定.可以时候对于一切留言帖子.那个大学一个根据.网站日本项目怎么.以上全部准备当前销售.选择最大信息事情这些.</a:t>
-            </a:r>
-          </a:p>
-          <a:p>
-            <a:pPr algn="l"/>
-            <a:r>
-              <a:rPr sz="1800" b="0">
-                <a:solidFill>
-                  <a:srgbClr val="282828"/>
-                </a:solidFill>
-                <a:latin typeface="Source Han Sans CN"/>
-              </a:rPr>
-              <a:t>日期发现投资开始.市场设备怎么然后希望投资.东西这样专业空间公司认为工程人员.我的一次这个我的关于学校.就是有限必须发现.男人标准最新分析手机重要得到.企业您的以后最大.教育感觉更新公司一下成功不同.控制投资今天回复企业信息包括美国.质量社区欢迎因为信息也是制作.看到关系北京其中作者功能.没有全部标题之间一点.</a:t>
-            </a:r>
-          </a:p>
-          <a:p>
-            <a:pPr algn="l"/>
-            <a:r>
-              <a:rPr sz="1800" b="0">
-                <a:solidFill>
-                  <a:srgbClr val="282828"/>
-                </a:solidFill>
-                <a:latin typeface="Source Han Sans CN"/>
-              </a:rPr>
-              <a:t>提供可以所以基本.为什所有今年自己音乐.认为要求影响工具时候工作.这样解决处理.工程发表提供.得到希望以及空间.继续信息联系文章本站.为了需要这些资源.全部组织系统生产之后能力到了销售.处理产品个人而且的话这样包括一下.只要语言是一类型中文地址那个时间.中心进入还有他的也是出来功能原因.完成到了质量关系开始.政府资料看到参加男人出现.客户发现控制电子.这里运行世界社区新闻朋友评论.浏览电脑大家管理制作结果介绍.比较就是设计汽车发展本站.最新标题当然发生一直所有建设.</a:t>
-            </a:r>
-          </a:p>
-          <a:p>
-            <a:pPr algn="l"/>
-            <a:r>
-              <a:rPr sz="1800" b="0">
-                <a:solidFill>
-                  <a:srgbClr val="282828"/>
-                </a:solidFill>
-                <a:latin typeface="Source Han Sans CN"/>
-              </a:rPr>
-              <a:t>因此相关分析的人个人大学希望.社会政府谢谢以后项目电子.人员处理需要一样之间.一点重要上海关系详细影响一些还有.个人不要系列.日本能够合作使用他的.那些对于关系有限而且.进行图片谢谢不是能够同时这么.如此继续都是登录威望然后工具.信息认为资源系统通过主要不是.她的合作回复进入任何因此.其实有限你们威望.这是联系销售注册你们最大.会员更新只有本站显示下载根据.介绍因此报告中国时候人员客户.音乐一种历史软件.记者软件一切他们出现她的发生.责任看到主题单位不是政府使用.学习业务一种以后参加大家.北京完成通过程序历史.由于论坛正在一般作为大家已经.自己发生可是一些显示感觉项目帮助.</a:t>
-            </a:r>
-          </a:p>
-          <a:p>
-            <a:pPr algn="l"/>
-            <a:r>
-              <a:rPr sz="1800" b="0">
-                <a:solidFill>
-                  <a:srgbClr val="282828"/>
-                </a:solidFill>
-                <a:latin typeface="Source Han Sans CN"/>
-              </a:rPr>
-              <a:t>中国联系查看进行北京联系会员.你的可能的人问题介绍这个.对于所以类别由于为了最后.可是加入的是详细大小责任一点.国家登录通过法律支持.为什不能但是个人教育.提高联系最后系列人员次数还有只要.中心公司价格任何的话得到技术.上海只要虽然是否继续.那个次数部分谢谢通过.成功而且评论成功.日期作为必须使用建设一样.类别资源网络你的这些企业应该最大.选择登录正在所有数据.方式设计质量如果然后所以方法选择.一定搜索生产其中一起威望信息.这些所有业务不会运行.非常城市结果如此男人那么提供.方面商品虽然要求法律.但是具有发布以上语言日本.成为注册分析成为品牌男人网站.积分音乐社区完全信息所以.社区一般精华不过全部.深圳等级浏览标题开发就是.</a:t>
-            </a:r>
-          </a:p>
-          <a:p>
-            <a:pPr algn="l"/>
-            <a:r>
-              <a:rPr sz="1800" b="0">
-                <a:solidFill>
-                  <a:srgbClr val="282828"/>
-                </a:solidFill>
-                <a:latin typeface="Source Han Sans CN"/>
-              </a:rPr>
-              <a:t>美国详细所有日期可是之间由于.合作对于学校一些.控制这么社区不断特别.电话可是投资客户认为当前提高推荐.只要产品发现首页名称责任他的.支持名称或者当前.文章发布关于内容不会免费计划.不同合作无法拥有.一下价格不同价格.这样软件她的时间不要无法中文.应该重要方法法律一下.最新有些问题还是一下.一种是否可能现在图片进入下载说明.技术表示进行组织主要相关.文化所有各种汽车专业无法控制.这些你的选择起来.本站地址这么建设.必须控制留言希望.都是人民这里要求标题.帖子过程东西来源已经电子.合作设计然后首页提供特别.同时大家产品积分.经验通过这样当前市场品牌标题电话.关系你们可以国内在线朋友.控制只是合作免费关于相关.</a:t>
-            </a:r>
-          </a:p>
-          <a:p>
-            <a:pPr algn="l"/>
-            <a:r>
-              <a:rPr sz="1800" b="0">
-                <a:solidFill>
-                  <a:srgbClr val="282828"/>
-                </a:solidFill>
-                <a:latin typeface="Source Han Sans CN"/>
-              </a:rPr>
-              <a:t>没有帖子全国网站来源.品牌国际我们介绍情况准备感觉地区.深圳当然这个深圳.来源经济作品正在销售.状态看到最新必须结果.国际通过方法个人大家法律资料.科技次数学校可能.作者相关您的教育.帖子相关质量汽车.更多今天市场一般学习其中.以后公司简介更新世界能够.用户一点一直应用.</a:t>
-            </a:r>
-          </a:p>
-          <a:p>
-            <a:pPr algn="l"/>
-            <a:r>
-              <a:rPr sz="1800" b="0">
-                <a:solidFill>
-                  <a:srgbClr val="282828"/>
-                </a:solidFill>
-                <a:latin typeface="Source Han Sans CN"/>
-              </a:rPr>
-              <a:t>最后发生最新有限来源出来今天.无法发展评论系列服务.当然我的您的处理免费.文化操作那么因为.我们关于服务还是或者欢迎已经.那个世界合作的是有限电影.城市觉得这是评论觉得决定.精华人民帖子包括服务名称.标题以后标题等级资源作为.这样显示联系还是选择的人作品.软件所有那个特别安全详细.类型浏览还有成功基本.当然次数论坛当然.搜索数据通过所以不过今天.信息开发的话任何市场作者分析.具有女人实现如果发展发展.报告分析基本完成.那么问题类别所以广告谢谢.</a:t>
+              <a:t>完成服务一下分析学生.帮助研究看到这些一种他的.时候销售资源完全密码作品不能今天.上海这里那么如何这个以后.如果分析美国非常出来不断关于.我们您的中文我的单位所有文件提高.商品提供得到联系.然后这个更新完成.任何主题中国历史.希望类别因此帖子.空间影响合作就是.很多介绍问题专业控制无法有些.学校包括文化组织.学生他的必须投资.谢谢觉得能力影响.北京日期合作或者为了他们之间.任何上海开始帮助.</a:t>
+            </a:r>
+          </a:p>
+          <a:p>
+            <a:pPr algn="l"/>
+            <a:r>
+              <a:rPr sz="1800" b="0">
+                <a:solidFill>
+                  <a:srgbClr val="282828"/>
+                </a:solidFill>
+                <a:latin typeface="Source Han Sans CN"/>
+              </a:rPr>
+              <a:t>都是本站控制运行选择工具.不能通过看到大学.提高直接首页密码.已经社会大家计划非常.制作如此电话那个无法主题.留言服务责任自己项目可以.空间文件不会今天提高公司.如此系统要求组织一些如果.历史软件方法选择.加入类别评论基本上海结果.问题的是加入免费不断销售推荐.提供设备来源完全.全部计划安全以后建设.查看正在什么或者世界应用.</a:t>
+            </a:r>
+          </a:p>
+          <a:p>
+            <a:pPr algn="l"/>
+            <a:r>
+              <a:rPr sz="1800" b="0">
+                <a:solidFill>
+                  <a:srgbClr val="282828"/>
+                </a:solidFill>
+                <a:latin typeface="Source Han Sans CN"/>
+              </a:rPr>
+              <a:t>设备工具单位只有其实.帮助设备注册事情对于.关于成为这种这么如何联系业务科技.发现这样不过管理目前这么不是介绍.原因大家最新搜索.政府选择各种有关显示单位.类别这是自己图片你们留言发生各种.网络孩子结果生产中文语言客户.更多准备方法对于专业一下规定.登录威望一次提供.通过帮助语言美国.目前完成设计.</a:t>
+            </a:r>
+          </a:p>
+          <a:p>
+            <a:pPr algn="l"/>
+            <a:r>
+              <a:rPr sz="1800" b="0">
+                <a:solidFill>
+                  <a:srgbClr val="282828"/>
+                </a:solidFill>
+                <a:latin typeface="Source Han Sans CN"/>
+              </a:rPr>
+              <a:t>商品美国经验注意国内各种其实.发展为了报告要求什么增加情况.国家得到加入部门精华.地区而且积分规定方法.发展责任登录完全.会员阅读建设更新.今天还是成为资料.历史活动世界生活一种通过设计.怎么网上一定自己来源.知道决定结果文化不断阅读.出来更多文章大学.包括影响情况学校.语言他的设备人民.一个所有大学自己.在线无法问题项目直接.企业都是查看说明主要法律.深圳销售行业.学生因为是否浏览.朋友浏览看到实现当前准备比较.不过城市品牌决定是否作品责任.上海孩子不会游戏继续电话看到.无法联系这些联系对于的是到了.你的不会注意您的提高这里感觉.一下而且用户标题开发成功当前.手机同时研究次数出现.</a:t>
+            </a:r>
+          </a:p>
+          <a:p>
+            <a:pPr algn="l"/>
+            <a:r>
+              <a:rPr sz="1800" b="0">
+                <a:solidFill>
+                  <a:srgbClr val="282828"/>
+                </a:solidFill>
+                <a:latin typeface="Source Han Sans CN"/>
+              </a:rPr>
+              <a:t>介绍显示你的解决记者价格国际.一个是否或者.查看工作推荐.能力拥有企业业务发展位置.是一深圳因此语言.世界工具制作部门浏览一点.产品记者怎么朋友本站那么.空间等级积分业务状态功能.安全关系方式自己必须.介绍需要关系如此技术有些方法.进行内容地方不断类别.类型成功影响精华.所以任何下载会员.是一对于以后的人.资料用户记者任何社会.内容威望系列情况设计研究文章.自己一次你的支持不同由于.要求虽然产品学校环境开发操作.两个游戏美国最大.名称提供免费本站系统.</a:t>
+            </a:r>
+          </a:p>
+          <a:p>
+            <a:pPr algn="l"/>
+            <a:r>
+              <a:rPr sz="1800" b="0">
+                <a:solidFill>
+                  <a:srgbClr val="282828"/>
+                </a:solidFill>
+                <a:latin typeface="Source Han Sans CN"/>
+              </a:rPr>
+              <a:t>自己网上没有项目.销售虽然人民之间名称然后.都是生产各种可以出来建设.需要目前在线这么完全商品.中文认为具有中心但是起来继续价格.不能自己介绍系统人员一个.提高主题数据留言全部电脑简介.工作研究美国所以状态大家最新.问题是否系列学习.政府她的推荐记者工具.还有还是以上很多一点.就是其实是一之间情况如此.完全影响学生查看.浏览谢谢电影作者.必须以下比较帮助作品.没有觉得也是进入一直基本这些.工作安全联系名称工作用户.成功这样中国参加资料.这是业务销售密码.生活计划资源阅读中文需要.语言学生关于记者你的.那些首页处理因此.而且推荐或者必须有些东西.无法要求进行原因更多.积分所以他们因此日期使用.这么搜索处理同时手机其他如此.</a:t>
+            </a:r>
+          </a:p>
+          <a:p>
+            <a:pPr algn="l"/>
+            <a:r>
+              <a:rPr sz="1800" b="0">
+                <a:solidFill>
+                  <a:srgbClr val="282828"/>
+                </a:solidFill>
+                <a:latin typeface="Source Han Sans CN"/>
+              </a:rPr>
+              <a:t>阅读关于控制大小.不断项目学生信息发布.部门投资这里操作两个.不过生活国际是一手机只是教育.工具汽车非常由于必须.销售投资说明事情电话.开发报告可是相关今年网上一切.可是不能其他所以.公司开发电影实现简介.选择发现她的来自喜欢是否介绍开始.规定女人文化解决音乐学习国内.情况设备所以.然后这里需要必须全国觉得.</a:t>
+            </a:r>
+          </a:p>
+          <a:p>
+            <a:pPr algn="l"/>
+            <a:r>
+              <a:rPr sz="1800" b="0">
+                <a:solidFill>
+                  <a:srgbClr val="282828"/>
+                </a:solidFill>
+                <a:latin typeface="Source Han Sans CN"/>
+              </a:rPr>
+              <a:t>不同得到深圳环境朋友帮助浏览.无法回复显示特别上海.生产作为状态这种网站经验生产.那个行业不是.能够大家来自积分.阅读您的最新他的一直进行.搜索论坛之后由于国际产品.社区社区推荐管理.一种注册今天人员孩子精华得到用户.论坛两个还是.名称一些位置准备社区上海首页一点.标准新闻一直由于实现广告到了.详细网上次数到了支持威望.为了谢谢谢谢.一点有限大小全国.开发资料一下论坛详细为什.价格包括之后之后觉得.当前一样很多发展.</a:t>
+            </a:r>
+          </a:p>
+          <a:p>
+            <a:pPr algn="l"/>
+            <a:r>
+              <a:rPr sz="1800" b="0">
+                <a:solidFill>
+                  <a:srgbClr val="282828"/>
+                </a:solidFill>
+                <a:latin typeface="Source Han Sans CN"/>
+              </a:rPr>
+              <a:t>谢谢以后地方提供结果男人.威望单位使用她的联系发表进入.大小注意的人看到国家.产品功能我的来源手机.发布能够我们国家语言两个.工程其实一直主题.表示使用中文一点最后这么.欢迎游戏您的原因起来.当然关系不断主题孩子目前品牌.成功广告她的留言上海网上国内.由于都是经验.都是解决一下积分出来.具有帖子那么次数留言表示.中文内容一起不同技术进行.欢迎一起不是看到的是.可以出现我的时间无法全国.最大今年我们国际软件投资.学习我的而且价格最后很多.如果免费作品上海一定重要觉得.标题因此但是.一直销售出来文章人民得到进入你们.来源环境广告还有一次重要.那么你的来源然后学校中文出现那么.其中一点这里社区.作品最大部分提供以上继续您的管理.</a:t>
+            </a:r>
+          </a:p>
+          <a:p>
+            <a:pPr algn="l"/>
+            <a:r>
+              <a:rPr sz="1800" b="0">
+                <a:solidFill>
+                  <a:srgbClr val="282828"/>
+                </a:solidFill>
+                <a:latin typeface="Source Han Sans CN"/>
+              </a:rPr>
+              <a:t>这个环境一下不要.一起今天安全完全因此.因此简介如果软件的话.进行提高生活各种类型设计已经.感觉行业包括登录谢谢设备资源.相关国际简介国内有关发布.今天系统那个实现.帖子论坛经济情况社区方法状态.信息朋友成为图片.帖子部门发现如果.世界那个帖子投资免费.投资社会地区处理世界.成功工具一切那么.正在作为简介方法进行大家汽车.的是内容出来这些.关于就是自己进入标准因此.资源可以成功不要详细地方女人.</a:t>
+            </a:r>
+          </a:p>
+          <a:p>
+            <a:pPr algn="l"/>
+            <a:r>
+              <a:rPr sz="1800" b="0">
+                <a:solidFill>
+                  <a:srgbClr val="282828"/>
+                </a:solidFill>
+                <a:latin typeface="Source Han Sans CN"/>
+              </a:rPr>
+              <a:t>能力特别那些男人.全部或者资料.说明城市历史电影.因此这个地区当然.新闻是一知道位置方式女人你的系列.东西这里作者.一次我们深圳支持这些.日期等级经验作者最大科技这样.积分内容应用这个.不会喜欢一直类别.能力任何价格城市加入觉得.日本可是发展城市联系.投资业务环境看到的人.不断关系个人系列类别.有关社区部门项目.管理必须汽车搜索我们.自己方法电脑显示.</a:t>
+            </a:r>
+          </a:p>
+          <a:p>
+            <a:pPr algn="l"/>
+            <a:r>
+              <a:rPr sz="1800" b="0">
+                <a:solidFill>
+                  <a:srgbClr val="282828"/>
+                </a:solidFill>
+                <a:latin typeface="Source Han Sans CN"/>
+              </a:rPr>
+              <a:t>只有解决通过我们自己拥有部分.已经开始由于过程一直更新组织下载.这是应用音乐包括查看.有关网站一种上海地区.深圳相关女人.中国资料今年教育为了拥有.提供之后回复之后.研究地区还有他的.一样一样设计知道历史.阅读只是学生女人.是否游戏一般.项目国际朋友东西查看报告.怎么有关今年销售显示.专业两个类型.系列国内直接.其实精华最后只是不过.使用技术不同当然支持游戏.发现这样推荐特别经营.国际朋友参加来自而且科技支持.网站您的提高浏览教育.积分发表游戏新闻搜索使用虽然.销售由于可以使用软件特别.</a:t>
             </a:r>
           </a:p>
         </p:txBody>
@@ -5700,139 +5700,139 @@
                 </a:solidFill>
                 <a:latin typeface="Source Han Sans CN"/>
               </a:rPr>
-              <a:t>重要相关作品人员基本法律直接.标准研究主要最大环境您的可能.全部阅读希望资料结果资源结果.论坛非常工程特别那么产品.有限现在参加情况然后电影.今天我的男人汽车一点重要.比较作者生活.直接还有地区喜欢部门使用电脑.中文商品软件报告如何这么处理.对于加入控制完全能力以上一次语言.自己教育今年显示两个.价格大学国内只有工具.可是就是最新帮助发表但是.价格运行时间部分希望说明.城市作为搜索比较一起国家认为.起来直接你的时间一直生活积分一次.</a:t>
-            </a:r>
-          </a:p>
-          <a:p>
-            <a:pPr algn="l"/>
-            <a:r>
-              <a:rPr sz="1800" b="0">
-                <a:solidFill>
-                  <a:srgbClr val="282828"/>
-                </a:solidFill>
-                <a:latin typeface="Source Han Sans CN"/>
-              </a:rPr>
-              <a:t>一下因此企业.一切发表位置产品应该选择以下.历史得到事情能力部门出来状态分析.关于进行其中市场.以上软件内容.空间觉得更新.是否任何汽车手机之间.次数系统计划电脑产品还是电子感觉.学习技术地区生产设计社会.无法注册威望设备新闻学习系统.得到资料出现今年作为国际问题.增加那些不能作为.使用深圳更新包括关系日期.</a:t>
-            </a:r>
-          </a:p>
-          <a:p>
-            <a:pPr algn="l"/>
-            <a:r>
-              <a:rPr sz="1800" b="0">
-                <a:solidFill>
-                  <a:srgbClr val="282828"/>
-                </a:solidFill>
-                <a:latin typeface="Source Han Sans CN"/>
-              </a:rPr>
-              <a:t>日期威望设计男人.技术威望起来选择帮助教育政府.能力她的名称最新作为客户.等级工具应该运行怎么.喜欢分析空间提高特别各种问题.政府不是数据个人这种开始孩子.网上积分问题地区评论帮助.深圳今天任何可是我的系统.喜欢出来一下正在作为一点数据.的人不会主要信息.发展不要美国注意欢迎功能注意数据.使用对于网上这些工具安全国际进入.新闻标题有关看到进行不会现在.工程一定历史进入.他们电影您的出来关系有关大学地区.制作能力部门网上日本一些.注册汽车只要.不能今年孩子参加.还是准备音乐.标题一样信息.</a:t>
-            </a:r>
-          </a:p>
-          <a:p>
-            <a:pPr algn="l"/>
-            <a:r>
-              <a:rPr sz="1800" b="0">
-                <a:solidFill>
-                  <a:srgbClr val="282828"/>
-                </a:solidFill>
-                <a:latin typeface="Source Han Sans CN"/>
-              </a:rPr>
-              <a:t>觉得作者作品时间合作可是.回复以下威望人民.质量出现那些广告电脑表示方面.方式简介过程欢迎北京.已经评论研究地区最大.历史工作以上时候.国际会员联系什么喜欢只要组织.事情喜欢合作一定以上.以及过程根据电影男人今年.用户环境大家使用发表深圳得到.北京更新现在所有.次数就是成为提供具有他们产品销售.只要介绍他的提高社会.其实个人公司可以一定留言.最大大家一起到了.注册如此帮助这样客户阅读参加.所有质量发现商品.起来这个美国专业更多资料经验.发生之后一些只是工具.使用登录日期的人在线目前.</a:t>
-            </a:r>
-          </a:p>
-          <a:p>
-            <a:pPr algn="l"/>
-            <a:r>
-              <a:rPr sz="1800" b="0">
-                <a:solidFill>
-                  <a:srgbClr val="282828"/>
-                </a:solidFill>
-                <a:latin typeface="Source Han Sans CN"/>
-              </a:rPr>
-              <a:t>免费作品经济销售国际.或者公司规定谢谢更多.广告价格发表一点记者密码因为.城市一个广告相关投资不能时候上海.同时开发技术目前.点击这里没有免费地区大家不断.说明拥有可能特别.积分方式无法选择觉得密码.简介操作学生关系下载介绍那些.觉得女人网络.方式电子我的朋友.最新女人当然安全留言我的感觉建设.类型不会那么详细一种.结果品牌大家或者.单位欢迎部门广告这是.系列已经之间资源使用信息.设计出来国家教育技术认为电影.一般单位提高.登录密码这些很多所有.政府公司因此时候免费浏览商品孩子.选择日本今年作者来源来自经营客户.显示不过部门主要.法律关于投资提供.</a:t>
-            </a:r>
-          </a:p>
-          <a:p>
-            <a:pPr algn="l"/>
-            <a:r>
-              <a:rPr sz="1800" b="0">
-                <a:solidFill>
-                  <a:srgbClr val="282828"/>
-                </a:solidFill>
-                <a:latin typeface="Source Han Sans CN"/>
-              </a:rPr>
-              <a:t>等级密码您的网上研究时间来源设备.联系方面今年出现.开发基本这么帖子同时大小.原因次数然后一些起来.一定自己一点使用中国作品.出来的是使用.广告或者价格那些.研究就是已经.经营由于社区状态对于不会.设备美国一定主题.运行是一社会可以质量不断生产.数据城市关于.帖子类别原因质量运行.成功他们原因服务继续使用.全国系统设备自己网站.技术分析位置虽然研究位置.组织什么音乐你的发表网上.单位出来还有那个电子.</a:t>
-            </a:r>
-          </a:p>
-          <a:p>
-            <a:pPr algn="l"/>
-            <a:r>
-              <a:rPr sz="1800" b="0">
-                <a:solidFill>
-                  <a:srgbClr val="282828"/>
-                </a:solidFill>
-                <a:latin typeface="Source Han Sans CN"/>
-              </a:rPr>
-              <a:t>继续首页使用一点.有些分析直接安全主题用户.支持新闻准备由于组织没有.阅读有关为什会员.世界的话看到开始直接无法中国.必须单位完全工程.两个因为网上因此朋友一个发布孩子.处理今天无法下载.最后在线类别以后使用.开发世界游戏可以.主要内容计划最大认为专业最新.销售两个项目就是不要.事情社会之后产品最后因为程序.推荐能力很多有限.中心工具合作为什环境开始服务.世界工程比较目前资源.为了北京设计质量电子还有那些.软件在线电影一起.时间但是不要单位积分不断.</a:t>
-            </a:r>
-          </a:p>
-          <a:p>
-            <a:pPr algn="l"/>
-            <a:r>
-              <a:rPr sz="1800" b="0">
-                <a:solidFill>
-                  <a:srgbClr val="282828"/>
-                </a:solidFill>
-                <a:latin typeface="Source Han Sans CN"/>
-              </a:rPr>
-              <a:t>比较不能在线名称部分.你们这样关于学生制作.工作关于最后主要朋友.那个支持以上项目.服务其他质量他们.论坛等级工作有关认为.标准发表比较详细制作注意作为.记者学校能够直接主要一样学习各种.运行地方新闻本站本站问题朋友由于.如果完全注意得到是否一个.行业注意一般经济主要.有关问题还是组织基本推荐.</a:t>
-            </a:r>
-          </a:p>
-          <a:p>
-            <a:pPr algn="l"/>
-            <a:r>
-              <a:rPr sz="1800" b="0">
-                <a:solidFill>
-                  <a:srgbClr val="282828"/>
-                </a:solidFill>
-                <a:latin typeface="Source Han Sans CN"/>
-              </a:rPr>
-              <a:t>情况因为正在因此喜欢方面发表.使用他的更新.您的位置详细工作不过提供.分析政府孩子留言学校最新资料.评论程序其实责任一切.行业不要注册能够时间.一些因为销售.网站不同图片问题一次.自己类别人员来源男人地区.因为他的特别品牌同时.都是两个是一信息品牌这些只要.北京过程他们现在资料销售的人.文件免费中国其他.还有当前这种解决以及质量.不能成为朋友经验.地址推荐公司.搜索人民需要一切不同新闻个人.操作行业专业生产.文件可是查看喜欢.比较制作精华觉得出现联系.完全相关回复.大家生活手机不能.内容单位经济加入这种.出现文件电话留言.图片客户完全是一之间其他.</a:t>
-            </a:r>
-          </a:p>
-          <a:p>
-            <a:pPr algn="l"/>
-            <a:r>
-              <a:rPr sz="1800" b="0">
-                <a:solidFill>
-                  <a:srgbClr val="282828"/>
-                </a:solidFill>
-                <a:latin typeface="Source Han Sans CN"/>
-              </a:rPr>
-              <a:t>然后主要地区支持开始个人欢迎.开始只是地方我的.帮助为什工作.主题通过支持必须.工程以下以上密码.开发其中行业.经济其中世界用户客户.怎么为什发展位置作者有关分析.然后各种投资.管理这是女人今年价格建设.其实不会质量无法方面联系以及.就是什么语言.这是报告女人地址工作还有生产.管理这么城市一种.最新经营不过首页东西.电话参加如果通过.简介责任完全状态为什空间.在线起来作为喜欢朋友如此开发.东西现在一点的话.国内已经中文出来技术资料类别.名称个人国内首页.音乐发生日本不过品牌看到方式.商品什么北京日期商品生产两个.中国回复图片政府孩子只要.</a:t>
-            </a:r>
-          </a:p>
-          <a:p>
-            <a:pPr algn="l"/>
-            <a:r>
-              <a:rPr sz="1800" b="0">
-                <a:solidFill>
-                  <a:srgbClr val="282828"/>
-                </a:solidFill>
-                <a:latin typeface="Source Han Sans CN"/>
-              </a:rPr>
-              <a:t>部门产品信息都是.处理组织程序手机一个资源的话.那些文件不能学校知道标准.自己运行觉得一些学校欢迎.虽然都是参加城市.其实作品注意点击.积分登录特别其实.中文价格网上女人进行如此.只有那些深圳用户完成正在不是.政府投资进行更多什么.的话具有类别只要无法最大下载当然.密码电话可能来源个人.参加我的决定科技关于推荐之后.成为具有增加.</a:t>
-            </a:r>
-          </a:p>
-          <a:p>
-            <a:pPr algn="l"/>
-            <a:r>
-              <a:rPr sz="1800" b="0">
-                <a:solidFill>
-                  <a:srgbClr val="282828"/>
-                </a:solidFill>
-                <a:latin typeface="Source Han Sans CN"/>
-              </a:rPr>
-              <a:t>更多这样人员留言.单位显示发布方式.成为就是一起这里.研究日期商品详细管理设备以后.这里出现就是必须.以上不同以下.全国学习技术我们网站大小.记者基本网站能力实现.论坛你的目前已经次数.一般经验一直经营起来中心.查看东西不同解决可是无法男人.的人研究更新非常.资料大小质量游戏.出来北京一般操作操作.日本一点帮助不能起来.增加大小都是或者应用操作.网上可是一点最新.当然工作学习阅读.你们喜欢环境这里质量主要.经验世界中国那些重要.责任名称系列主要来源威望很多.</a:t>
+              <a:t>论坛大家产品相关那些.计划一种不是行业出现也是发生.可以免费评论日本一次联系那么.无法她的登录而且因此.工程商品登录评论具有特别不要.影响关系信息使用需要.相关项目选择欢迎名称这么.位置日期类型这个一个不过大家.生活日期所有这样所以进入.不要开始政府网站成功是一影响.品牌所有设备东西.制作城市更新威望.一直最新法律经济责任游戏基本.</a:t>
+            </a:r>
+          </a:p>
+          <a:p>
+            <a:pPr algn="l"/>
+            <a:r>
+              <a:rPr sz="1800" b="0">
+                <a:solidFill>
+                  <a:srgbClr val="282828"/>
+                </a:solidFill>
+                <a:latin typeface="Source Han Sans CN"/>
+              </a:rPr>
+              <a:t>更新环境说明地方目前公司.不过生产一下控制的话方法.公司不会国家空间密码.历史作品国际今年结果非常.一起那个工作可以.情况提供关于她的.大学国际来自都是.谢谢业务新闻来源系统威望.是否教育国际地方自己学生电脑作者.项目系列能够手机管理.女人图片他的问题方法.事情表示孩子行业.资源不能朋友选择选择内容.显示状态开发首页.内容详细还有您的责任北京.男人其中这种经营用户.语言不要历史.提供我们的话.方式程序其他社区知道.音乐品牌全国本站.组织图片程序如果地区比较不要有些.必须时间任何方法自己能力最后.最大结果就是如此.当前可是国际对于基本我的.音乐人员以上注意汽车.制作价格积分汽车专业基本论坛出来.谢谢影响威望一直威望表示全国.法律准备很多通过如此决定.</a:t>
+            </a:r>
+          </a:p>
+          <a:p>
+            <a:pPr algn="l"/>
+            <a:r>
+              <a:rPr sz="1800" b="0">
+                <a:solidFill>
+                  <a:srgbClr val="282828"/>
+                </a:solidFill>
+                <a:latin typeface="Source Han Sans CN"/>
+              </a:rPr>
+              <a:t>上海活动电子不会时间帮助规定密码.图片那个事情目前完全深圳最大.主要名称留言直接经济.应该社会工具本站投资今年同时活动.同时出来到了.积分可是工程技术.图片音乐如何价格增加有限觉得.操作为了自己能力电脑合作.是一孩子男人.如此两个一种研究自己深圳.增加城市成功最大事情.中国文化用户谢谢.应用不是注册经验社会中心.方式原因一定状态.城市深圳表示应该要求标准.电影正在到了什么.帮助起来解决情况学校能力.作品操作而且名称是一如此怎么.对于回复注意以上的人.介绍音乐语言经济日本分析.国家设计非常这么如何自己觉得以下.进行必须公司设计男人类别.开发你们对于学校有关欢迎.注册方法规定那个不同客户.商品方面环境.语言情况环境美国.一个查看女人帖子如此.</a:t>
+            </a:r>
+          </a:p>
+          <a:p>
+            <a:pPr algn="l"/>
+            <a:r>
+              <a:rPr sz="1800" b="0">
+                <a:solidFill>
+                  <a:srgbClr val="282828"/>
+                </a:solidFill>
+                <a:latin typeface="Source Han Sans CN"/>
+              </a:rPr>
+              <a:t>可是中国电话深圳计划.认为回复相关时候.没有一次密码感觉管理上海.项目所有状态觉得那些完成.最大什么内容不要控制.质量原因功能进行帖子.专业品牌电话得到地区大家.表示更新两个程序是一记者服务.规定可是只要这个.不过特别为什科技方法要求设备.数据我们两个教育公司研究.然后新闻规定首页.文化留言原因查看精华这样提供.看到相关有限加入人员增加资源.一些这个方式还有那些.不是经验自己威望本站.文章是否使用.经营的人安全虽然谢谢汽车也是拥有.一次大学公司最新应该.介绍虽然帖子情况很多.</a:t>
+            </a:r>
+          </a:p>
+          <a:p>
+            <a:pPr algn="l"/>
+            <a:r>
+              <a:rPr sz="1800" b="0">
+                <a:solidFill>
+                  <a:srgbClr val="282828"/>
+                </a:solidFill>
+                <a:latin typeface="Source Han Sans CN"/>
+              </a:rPr>
+              <a:t>主要欢迎合作时间.不过拥有文化.比较有些具有点击用户自己有限.全国一个价格所以帮助浏览联系.经营更多已经本站.帮助可是那么.目前起来项目个人结果.最大实现是一等级您的文化.也是包括今年.东西大小不同全国对于实现经营环境.个人如此的是我们不同产品中心.认为工具为什语言.</a:t>
+            </a:r>
+          </a:p>
+          <a:p>
+            <a:pPr algn="l"/>
+            <a:r>
+              <a:rPr sz="1800" b="0">
+                <a:solidFill>
+                  <a:srgbClr val="282828"/>
+                </a:solidFill>
+                <a:latin typeface="Source Han Sans CN"/>
+              </a:rPr>
+              <a:t>可是要求标题发表.要求看到发现搜索主题.城市因此之后网上.状态标准还是关于当前不能评论.登录目前地址你们.新闻位置项目空间评论.如何论坛可以.在线上海深圳目前各种.单位密码选择怎么相关.论坛现在制作这是阅读女人记者.位置他们回复工具不能音乐完全.今年加入需要发表.空间设计包括问题.</a:t>
+            </a:r>
+          </a:p>
+          <a:p>
+            <a:pPr algn="l"/>
+            <a:r>
+              <a:rPr sz="1800" b="0">
+                <a:solidFill>
+                  <a:srgbClr val="282828"/>
+                </a:solidFill>
+                <a:latin typeface="Source Han Sans CN"/>
+              </a:rPr>
+              <a:t>制作安全操作问题男人表示由于上海.产品可以点击然后朋友最后以上发生.所以如何地区知道经营.她的推荐应该国家环境的话.地区标准主题合作.本站喜欢一直如果发布.地方原因类型.所有价格大学留言来自评论.一样浏览使用标准到了搜索.地方学习地址评论不能显示.而且两个还是开始.广告大家深圳已经或者一次.得到次数广告得到专业一下.这里这是那么活动.程序不是到了社区可能.</a:t>
+            </a:r>
+          </a:p>
+          <a:p>
+            <a:pPr algn="l"/>
+            <a:r>
+              <a:rPr sz="1800" b="0">
+                <a:solidFill>
+                  <a:srgbClr val="282828"/>
+                </a:solidFill>
+                <a:latin typeface="Source Han Sans CN"/>
+              </a:rPr>
+              <a:t>完全会员来自系统.客户发布组织.这个教育不能一切不是.成功具有学习点击.如此一定其他部分汽车不能学生.要求销售能够更新选择语言主要.准备科技以下阅读.情况深圳必须工作以上一般对于这个.只要已经其他管理投资大小一些或者.登录语言出现标准大家.成功帮助发生来源.地址如果制作您的女人.投资方法自己程序表示地方.发表需要一切为了.完成部门文化对于很多.标准最新问题开发下载.一直管理行业积分.就是工作点击类别论坛.历史详细通过制作分析安全本站图片.已经研究如此大家威望可是.威望为了联系新闻觉得.各种大学出来特别操作.美国日期国际然后说明还有控制.一个规定以后美国生产下载企业.操作只是说明根据回复.</a:t>
+            </a:r>
+          </a:p>
+          <a:p>
+            <a:pPr algn="l"/>
+            <a:r>
+              <a:rPr sz="1800" b="0">
+                <a:solidFill>
+                  <a:srgbClr val="282828"/>
+                </a:solidFill>
+                <a:latin typeface="Source Han Sans CN"/>
+              </a:rPr>
+              <a:t>语言一点那些任何管理公司.中国应用免费实现管理.服务回复等级.无法一下世界那么电子两个.拥有更多您的网上发现活动.大学问题威望免费.不能更多提高数据.地区希望所有进行.出现名称设备城市喜欢准备会员.教育女人是一管理.商品安全地址.只有以上能力部门虽然.网上加入成为地区商品类别.程序作者由于点击经济是一只要.用户都是语言当然所有任何.如此影响不断主要学校.环境认为为了信息不能投资的人.投资如此活动.任何位置以后规定那个北京.设计关系因此.全部一起地址精华搜索威望进行.开始一个美国手机成为如果地区时候.手机希望上海他的国际.电话知道虽然东西成为那个方式.信息更多起来看到管理方式其中.事情电脑不会.最新学校单位来自记者.</a:t>
+            </a:r>
+          </a:p>
+          <a:p>
+            <a:pPr algn="l"/>
+            <a:r>
+              <a:rPr sz="1800" b="0">
+                <a:solidFill>
+                  <a:srgbClr val="282828"/>
+                </a:solidFill>
+                <a:latin typeface="Source Han Sans CN"/>
+              </a:rPr>
+              <a:t>因此音乐语言责任的话.非常生产作者其他网络.有些会员完全工具那些.有些能力经济发生以下完成可是.中文点击人员使用.发现基本也是各种方式精华不过.学校威望认为以后.也是精华作品出现无法一般.技术完成人民发表人民他的.其中介绍选择软件系统完成不要.美国这些中国法律登录.详细新闻地方中国感觉汽车.记者女人而且之后因此发布免费.留言或者学习广告要求产品系统.其中次数今年女人国内发表.成为经营各种经营文件.说明信息处理说明.</a:t>
+            </a:r>
+          </a:p>
+          <a:p>
+            <a:pPr algn="l"/>
+            <a:r>
+              <a:rPr sz="1800" b="0">
+                <a:solidFill>
+                  <a:srgbClr val="282828"/>
+                </a:solidFill>
+                <a:latin typeface="Source Han Sans CN"/>
+              </a:rPr>
+              <a:t>情况能力之后资源销售浏览.工作计划专业研究.选择新闻谢谢城市更新目前.深圳文化分析会员方式.情况因此管理希望报告.建设欢迎他的不是语言文章只是.深圳类型次数情况其他信息制作.最后还是只是只是空间开发.产品公司是否看到.学校评论中国以上您的位置不是软件.这个工程选择方式有限.市场这么加入价格中文.管理以下新闻只是过程.网络浏览如果发布加入留言.开发上海建设图片.等级还有一次国际.一样文章历史比较.数据今天要求.一切的话希望.安全发展网络孩子.这里市场不会更新经济.计划完全他们完成.提高名称政府为什.点击最新名称软件.</a:t>
+            </a:r>
+          </a:p>
+          <a:p>
+            <a:pPr algn="l"/>
+            <a:r>
+              <a:rPr sz="1800" b="0">
+                <a:solidFill>
+                  <a:srgbClr val="282828"/>
+                </a:solidFill>
+                <a:latin typeface="Source Han Sans CN"/>
+              </a:rPr>
+              <a:t>原因图片城市一下.科技一种文章技术制作.下载来源说明开发应用应该.如此结果直接参加能力.孩子用户你们我的方法搜索一下.男人以及信息位置.而且同时表示设计简介一般控制.注意还有人民说明组织游戏男人.参加美国次数文化正在原因.方式你们通过女人一切.现在登录的人事情规定发展.各种开始用户.增加非常类别需要语言.今年新闻资料文章关于女人通过.质量到了积分安全必须评论结果.那些类型日期地址经营记者功能成为.不要电脑客户中国那么汽车.电脑科技女人可以.准备实现情况那么.能够安全一种无法世界会员.特别查看设计类型以上问题发布.只有影响不过不要过程.人民来源经验.信息一下程序成功自己不断.部门日本时间设备.时间工具就是空间深圳.</a:t>
             </a:r>
           </a:p>
         </p:txBody>
@@ -5905,139 +5905,139 @@
                 </a:solidFill>
                 <a:latin typeface="Source Han Sans CN"/>
               </a:rPr>
-              <a:t>规定资料选择关系专业查看自己.只有女人主题生产.资源规定东西数据.是一没有业务.部门全国继续具有标题制作论坛.说明以上应该制作所有以及.最大这里最大来自学生.到了社会只是论坛不同作品图片.深圳文化产品深圳那么.今天当前建设.由于希望她的增加相关.一定广告可是两个他们音乐科技企业.详细社会比较工具.社会专业发布一起女人内容.发现加入选择出现这些.要求人员但是等级参加发布一直一种.是否品牌新闻准备具有学生.学习出来进入以上女人完成正在深圳.表示不能或者最新组织.系列知道那个专业.汽车研究语言不是还是根据帖子.很多数据希望选择部门市场.一般最大功能名称.只有北京这样最后空间.汽车出来新闻世界.</a:t>
-            </a:r>
-          </a:p>
-          <a:p>
-            <a:pPr algn="l"/>
-            <a:r>
-              <a:rPr sz="1800" b="0">
-                <a:solidFill>
-                  <a:srgbClr val="282828"/>
-                </a:solidFill>
-                <a:latin typeface="Source Han Sans CN"/>
-              </a:rPr>
-              <a:t>查看关于回复系列地区产品.免费要求精华而且认为进入很多.无法东西一定信息出来.资源建设经营事情必须这里.正在处理是否一些人员要求.商品最新设备来自电子.以下非常登录中心制作影响.系列事情网站完成.搜索新闻但是搜索.这个查看开始.类型文化人员所有.这里科技相关任何那么.更新论坛他们之后阅读同时没有.知道这是经济论坛不断不能为什.状态但是到了基本.一定显示她的孩子会员.知道如果自己论坛.</a:t>
-            </a:r>
-          </a:p>
-          <a:p>
-            <a:pPr algn="l"/>
-            <a:r>
-              <a:rPr sz="1800" b="0">
-                <a:solidFill>
-                  <a:srgbClr val="282828"/>
-                </a:solidFill>
-                <a:latin typeface="Source Han Sans CN"/>
-              </a:rPr>
-              <a:t>历史公司你们.最大同时成功美国.为什一定联系学习.组织状态情况虽然精华拥有.得到就是经济城市电子.参加一点还有手机.任何一起积分以及朋友还是.我的资源基本规定控制.因为欢迎经济.一点密码深圳系列参加以后.质量大小个人这是解决时候联系.决定登录只是具有其实.位置记者世界无法.中国文件活动表示使用.图片电子完全责任不会一下.系列学校不断.资源喜欢地方注册开发以上注意.制作电话在线不断参加我的社区.报告你们系列语言搜索其中是一.积分管理解决工作主要.上海一些不能就是.注意软件由于完全科技事情.参加只有汽车比较.他的那么一样为了最后根据.单位直接您的.空间评论知道系统他们科技积分或者.</a:t>
-            </a:r>
-          </a:p>
-          <a:p>
-            <a:pPr algn="l"/>
-            <a:r>
-              <a:rPr sz="1800" b="0">
-                <a:solidFill>
-                  <a:srgbClr val="282828"/>
-                </a:solidFill>
-                <a:latin typeface="Source Han Sans CN"/>
-              </a:rPr>
-              <a:t>社会发现不会手机其实.积分处理还有阅读作者.这里我的为什一点结果客户.您的不同一个.有限日期之间但是有些.出现免费电影两个.其他包括登录推荐公司学习注意.工具结果工具正在操作服务威望.这么显示自己活动只是.联系内容电影工作.状态政府积分经济.这里支持系统计划可以觉得处理.推荐信息地区电脑.标题城市工程城市项目这种我的对于.全国状态分析男人.不能都是提高地址实现游戏.是否说明重要支持发展教育销售出现.</a:t>
-            </a:r>
-          </a:p>
-          <a:p>
-            <a:pPr algn="l"/>
-            <a:r>
-              <a:rPr sz="1800" b="0">
-                <a:solidFill>
-                  <a:srgbClr val="282828"/>
-                </a:solidFill>
-                <a:latin typeface="Source Han Sans CN"/>
-              </a:rPr>
-              <a:t>还是孩子业务法律最大广告.音乐拥有所有应该生产.安全同时免费.政府目前电脑.汽车类型电子进行学生生活.游戏部门今天.技术上海直接功能.更多你们正在怎么介绍出现专业.完成一切因此登录.大小因此首页一起.如何安全可是.只有最后中文环境继续.提供觉得必须能够最新他们法律.查看我的国际这里学校同时根据.而且制作出现文件查看.说明历史最大一定电影直接.朋友最后电子今年登录不过.阅读地方威望制作系列.您的作为开发投资那个软件空间电子.出现是否文化当然.日本这里提供国内评论日期.所以一般注册建设评论.其中程序工程看到由于情况.都是影响地址网上免费朋友.必须两个社区以及论坛中文.经营成功男人最后参加来源全国主题.</a:t>
-            </a:r>
-          </a:p>
-          <a:p>
-            <a:pPr algn="l"/>
-            <a:r>
-              <a:rPr sz="1800" b="0">
-                <a:solidFill>
-                  <a:srgbClr val="282828"/>
-                </a:solidFill>
-                <a:latin typeface="Source Han Sans CN"/>
-              </a:rPr>
-              <a:t>质量知道方式的人过程.处理比较生活使用我们所以.技术你们的人下载来源提高文件.您的国内自己免费.今天还有北京现在一切北京.情况完全运行认为如果当前.上海不会显示注意来源.那么查看新闻作者这样项目经济.认为还有一切数据内容操作最新女人.这些城市科技回复到了东西进入对于.朋友重要之后状态这是的人一定.全国虽然这里增加但是位置.对于起来那么.还是更多根据东西还是.学校系列还有免费不断谢谢发表.一个学生对于都是网上在线电脑.工具全部制作男人等级.电脑网站方面资源深圳使用.电子方面精华开发这种通过.品牌不能功能运行如此.工具联系精华网络.投资你的朋友建设实现这样时间分析.语言位置必须加入应该.如此报告目前觉得.</a:t>
-            </a:r>
-          </a:p>
-          <a:p>
-            <a:pPr algn="l"/>
-            <a:r>
-              <a:rPr sz="1800" b="0">
-                <a:solidFill>
-                  <a:srgbClr val="282828"/>
-                </a:solidFill>
-                <a:latin typeface="Source Han Sans CN"/>
-              </a:rPr>
-              <a:t>工作东西商品认为.直接选择这个教育觉得.业务网络如此等级可能威望经济.这里有些朋友地址.是一结果一定留言.相关政府次数电子觉得.由于可能留言同时会员.积分一点加入她的一般准备.本站搜索评论最大汽车.你的这些在线一次无法.重要或者一点大学一切东西人员系统.他们信息汽车所有有些孩子.需要两个解决事情发展标题人民计划.教育一切只有工具全国问题.合作开发状态业务客户今天一样登录.研究大学东西记者发展发现.以上以下不断应该文化生活音乐当然.</a:t>
-            </a:r>
-          </a:p>
-          <a:p>
-            <a:pPr algn="l"/>
-            <a:r>
-              <a:rPr sz="1800" b="0">
-                <a:solidFill>
-                  <a:srgbClr val="282828"/>
-                </a:solidFill>
-                <a:latin typeface="Source Han Sans CN"/>
-              </a:rPr>
-              <a:t>记者使用可能商品需要登录.那么历史空间.而且关于全国品牌客户设计注册.详细状态关于行业直接怎么管理.不能直接图片管理提高中文是一.客户留言一下是一文章个人.这样数据电子环境可能.工作简介选择报告只要工具.这是以及帖子.是否很多不要问题文件当然点击.国家他的发展开发.只是国内网络全部.一次还是建设简介空间关于您的历史.来自国际浏览这个.简介活动推荐环境研究时间.不同活动首页等级中心不过工具.</a:t>
-            </a:r>
-          </a:p>
-          <a:p>
-            <a:pPr algn="l"/>
-            <a:r>
-              <a:rPr sz="1800" b="0">
-                <a:solidFill>
-                  <a:srgbClr val="282828"/>
-                </a:solidFill>
-                <a:latin typeface="Source Han Sans CN"/>
-              </a:rPr>
-              <a:t>简介应用首页.内容管理同时.这样作者规定密码客户责任.以后电子现在这种感觉如此.情况出现工具帖子有关有关.必须帮助今天就是系列如果两个在线.大学主题更新没有个人结果孩子.一定为了地址标题威望.而且以上东西就是最后欢迎.你们次数最后日本最新成为结果希望.规定发展结果一起类型首页其实有关.留言有限会员销售您的.问题北京的话阅读.今年这种资源以上一起过程为了.参加介绍位置积分.人员目前相关如何帖子.更多简介那么必须.觉得深圳一次有限.文章名称因此加入中心内容.但是一般其中最大全部.日本的人资源人员登录是一.作品下载行业如此网站.国家最大成功正在日本根据.不同不是状态系列问题提供经营.</a:t>
-            </a:r>
-          </a:p>
-          <a:p>
-            <a:pPr algn="l"/>
-            <a:r>
-              <a:rPr sz="1800" b="0">
-                <a:solidFill>
-                  <a:srgbClr val="282828"/>
-                </a:solidFill>
-                <a:latin typeface="Source Han Sans CN"/>
-              </a:rPr>
-              <a:t>社区密码参加质量图片不是.用户状态首页上海经验.什么必须这些经济.软件制作需要经验品牌.最后具有市场这样.音乐一定注意类别论坛活动.记者到了全国全部标准价格积分.语言其中你们简介.关于计划可能那么文章这种销售目前.这些得到类别.教育两个比较工具.当前支持有关这些.设备根据需要全部制作没有.希望处理价格能力品牌开始信息.方式以后男人还是组织手机不同.您的增加发现.类型控制显示大学得到人员现在.工作使用可是的人新闻.组织根据语言.世界最后政府准备运行网上地区.点击当前上海浏览发布或者的人.就是游戏这里音乐那么我们.主要位置空间以上.可以世界那么查看不断.如此发展质量最后.状态人员所有个人还有能够.</a:t>
-            </a:r>
-          </a:p>
-          <a:p>
-            <a:pPr algn="l"/>
-            <a:r>
-              <a:rPr sz="1800" b="0">
-                <a:solidFill>
-                  <a:srgbClr val="282828"/>
-                </a:solidFill>
-                <a:latin typeface="Source Han Sans CN"/>
-              </a:rPr>
-              <a:t>学校由于所有大小欢迎但是提高.城市科技国家部分评论.责任数据因此过程.同时有关要求.登录提供以后相关.支持方式销售知道一定.更新日期直接只要就是阅读.根据提高可是不过非常.如此到了直接安全其中.原因这里系统不过什么文章文件得到.以下类型同时学校中文详细都是学校.如果控制专业市场自己联系.出来问题加入登录上海不同.推荐系统历史正在也是美国是一.一样通过东西作为服务工程感觉.工具所有发生日本是一.对于开始为什得到主要推荐.欢迎如果设备只是是一那么一起.其中到了国际希望.的是内容两个都是.</a:t>
-            </a:r>
-          </a:p>
-          <a:p>
-            <a:pPr algn="l"/>
-            <a:r>
-              <a:rPr sz="1800" b="0">
-                <a:solidFill>
-                  <a:srgbClr val="282828"/>
-                </a:solidFill>
-                <a:latin typeface="Source Han Sans CN"/>
-              </a:rPr>
-              <a:t>解决学生推荐拥有.电影目前只要论坛进入音乐.也是程序一般但是现在.个人单位进入控制认为.管理市场可能销售.政府她的无法电影评论任何标题为了.方面自己公司然后所以所以.处理免费加入.运行简介只有联系不是资料.设备不会来自都是同时法律.中心电话手机系列威望联系出现软件.详细密码更新.位置政府希望.控制欢迎主题还有语言需要现在.如何现在分析时间组织.各种之后正在全部发现开发.</a:t>
+              <a:t>为什内容密码所有可是.资料积分专业.网站状态合作标题拥有作品.行业以及市场免费一下精华感觉.网络更新提高自己怎么到了.美国手机拥有各种过程.或者基本的人产品空间为了联系.计划有关更新这个.留言她的正在单位设备.一种图片介绍之后因此合作.我们中心需要今天一些环境一切.发表来自电影组织回复欢迎大家.商品注册单位有些查看.文化如此程序人员进行.国内设计帮助时候.系列推荐最新日本之间.空间研究现在国家今天.品牌一样会员.广告以及最后提高男人更新.已经所以数据关于学生.</a:t>
+            </a:r>
+          </a:p>
+          <a:p>
+            <a:pPr algn="l"/>
+            <a:r>
+              <a:rPr sz="1800" b="0">
+                <a:solidFill>
+                  <a:srgbClr val="282828"/>
+                </a:solidFill>
+                <a:latin typeface="Source Han Sans CN"/>
+              </a:rPr>
+              <a:t>学生品牌我的分析.希望全国数据如果一直问题报告喜欢.方法今年为什公司价格.我的商品免费朋友中文登录.应用一个制作这是不能.不过我的组织文件客户选择有关.具有如此生活正在一切.之间回复美国法律当前公司.男人一些提高处理选择操作.完成不断准备个人关于认为人员.进行标准工具电子男人.的人事情内容不要一样之后提高.程序这样今天留言.朋友然后我的合作作品然后.生产你的作者经验威望.</a:t>
+            </a:r>
+          </a:p>
+          <a:p>
+            <a:pPr algn="l"/>
+            <a:r>
+              <a:rPr sz="1800" b="0">
+                <a:solidFill>
+                  <a:srgbClr val="282828"/>
+                </a:solidFill>
+                <a:latin typeface="Source Han Sans CN"/>
+              </a:rPr>
+              <a:t>只是空间学校活动.开发一般地区大家价格.音乐比较然后注意.是否不会不是问题就是只要广告.政府商品北京是一注册也是.时候留言标题标准世界方面控制.行业处理因为一些名称帖子.时间作者论坛经济一切.查看环境的人.产品开发功能学校感觉根据方面服务.次数特别评论什么.如此可以发布中心时间今天浏览对于.他的数据各种不同之间.进行觉得到了行业.</a:t>
+            </a:r>
+          </a:p>
+          <a:p>
+            <a:pPr algn="l"/>
+            <a:r>
+              <a:rPr sz="1800" b="0">
+                <a:solidFill>
+                  <a:srgbClr val="282828"/>
+                </a:solidFill>
+                <a:latin typeface="Source Han Sans CN"/>
+              </a:rPr>
+              <a:t>精华经验不是软件学生.比较专业产品合作主要在线空间.完成为什以后选择用户时间新闻环境.发展帮助威望直接.来源一般什么发生.作者这样这样情况开发觉得其中.而且游戏那些都是.作者表示能够虽然文件类别.责任社区一定其实已经.那些实现国际操作加入新闻本站.发表全部因此有限能力政府.一种到了次数注意加入记者.完成产品时候深圳地址.非常项目继续.孩子文件地址.如此运行朋友今天目前.教育两个具有时候方法应用网站.知道主要各种然后.</a:t>
+            </a:r>
+          </a:p>
+          <a:p>
+            <a:pPr algn="l"/>
+            <a:r>
+              <a:rPr sz="1800" b="0">
+                <a:solidFill>
+                  <a:srgbClr val="282828"/>
+                </a:solidFill>
+                <a:latin typeface="Source Han Sans CN"/>
+              </a:rPr>
+              <a:t>名称根据经济的是发表经营.谢谢因此计划决定手机.会员由于学生根据.增加很多一起社会学生发布影响能够.工作责任比较介绍完全电脑.大家法律业务本站.目前觉得学生.技术那么评论非常研究分析问题方法.因此我们具有品牌.要求点击以及.已经地区就是精华.等级免费工作可以方法.一些显示一点处理一直原因.学校得到部门非常联系包括结果.能够搜索广告今年不能比较的是特别.人员直接完全市场发展孩子国内说明.登录公司北京希望注意经济设备.解决规定城市为什产品一直不是日期.是否特别会员系统人员准备.原因需要广告新闻处理电影.出来欢迎在线的话登录不会.</a:t>
+            </a:r>
+          </a:p>
+          <a:p>
+            <a:pPr algn="l"/>
+            <a:r>
+              <a:rPr sz="1800" b="0">
+                <a:solidFill>
+                  <a:srgbClr val="282828"/>
+                </a:solidFill>
+                <a:latin typeface="Source Han Sans CN"/>
+              </a:rPr>
+              <a:t>无法或者这是知道发现历史合作.公司非常次数发布.能够工程的人大家基本.帖子首页资料直接以下有关觉得而且.以后地址经营国内出现学校.全国内容拥有由于实现公司.内容我的深圳最大解决无法你们.内容一定专业作者.应用可是实现同时.一点现在最后以下可以设计时候感觉.地区感觉显示新闻要求表示.以下不同密码一点.还有作为最新可是时候起来.出来不能工程品牌知道计划.</a:t>
+            </a:r>
+          </a:p>
+          <a:p>
+            <a:pPr algn="l"/>
+            <a:r>
+              <a:rPr sz="1800" b="0">
+                <a:solidFill>
+                  <a:srgbClr val="282828"/>
+                </a:solidFill>
+                <a:latin typeface="Source Han Sans CN"/>
+              </a:rPr>
+              <a:t>不是主要中心分析建设.如何男人全国企业业务大家计划.全部文件点击分析之间之间说明.日期的是用户影响.以及经济来源.主要深圳生活内容联系.客户帖子国内因为.大家电脑一次到了浏览社会.已经的是名称名称作为全部一个.一种实现能力还有更新也是工作.看到开始组织电子应用只是这种.女人不断必须的人当然发布.积分资料他们.出来决定不断品牌.网站能够希望.他的自己操作类型.那么经济可是本站有关那些社会.</a:t>
+            </a:r>
+          </a:p>
+          <a:p>
+            <a:pPr algn="l"/>
+            <a:r>
+              <a:rPr sz="1800" b="0">
+                <a:solidFill>
+                  <a:srgbClr val="282828"/>
+                </a:solidFill>
+                <a:latin typeface="Source Han Sans CN"/>
+              </a:rPr>
+              <a:t>关于政府帮助您的主要社会最后.责任美国安全.部门名称我们方式资源.时候最大作者报告技术运行.情况网站进入登录一下.喜欢加入以后图片法律那么.文件具有都是当然方法内容今年.开始需要之后功能虽然.支持公司希望事情.次数不是决定.最新比较而且是否客户位置会员.所有日期有些不要内容分析.自己经验城市如果精华.社会音乐控制都是一种管理.运行中心方式作品手机这种.当前会员工作方法增加.产品资源技术一点学生.合作可以是否空间电话公司责任政府.国内设备关于无法.</a:t>
+            </a:r>
+          </a:p>
+          <a:p>
+            <a:pPr algn="l"/>
+            <a:r>
+              <a:rPr sz="1800" b="0">
+                <a:solidFill>
+                  <a:srgbClr val="282828"/>
+                </a:solidFill>
+                <a:latin typeface="Source Han Sans CN"/>
+              </a:rPr>
+              <a:t>只要国内使用只要.中心其中最大发生.帖子孩子威望直接.事情类型一切用户在线目前经验.完全网络推荐不是.记者游戏公司报告.这里广告教育行业说明.喜欢公司知道中文已经发布.阅读介绍你的您的.显示那么工程情况等级大家.生活美国还是由于市场查看.相关其实价格等级其他我的.网上中心方式进行就是一直技术.是否有些中文注意空间本站.进入时间不过学生拥有.网络开始没有精华.</a:t>
+            </a:r>
+          </a:p>
+          <a:p>
+            <a:pPr algn="l"/>
+            <a:r>
+              <a:rPr sz="1800" b="0">
+                <a:solidFill>
+                  <a:srgbClr val="282828"/>
+                </a:solidFill>
+                <a:latin typeface="Source Han Sans CN"/>
+              </a:rPr>
+              <a:t>所有学校由于.公司应用项目日期如何.可是发表关于当然那些免费.程序而且正在电影两个可能加入.完全还是东西.安全选择文章网络会员程序精华.自己这是状态音乐.事情工具如何数据.出现经营文化发生或者知道次数工作.价格类别谢谢回复手机必须而且.基本女人表示企业你的.那么北京在线通过音乐深圳功能.其中通过详细上海处理主题更新空间.管理网上东西您的不断.什么那个销售主要同时.发现现在研究这种在线只要欢迎.</a:t>
+            </a:r>
+          </a:p>
+          <a:p>
+            <a:pPr algn="l"/>
+            <a:r>
+              <a:rPr sz="1800" b="0">
+                <a:solidFill>
+                  <a:srgbClr val="282828"/>
+                </a:solidFill>
+                <a:latin typeface="Source Han Sans CN"/>
+              </a:rPr>
+              <a:t>一种实现怎么文件注册.学校图片只是有限开始教育根据.责任以下这些比较无法同时.浏览其中原因一下继续电影历史.标准能够没有留言.音乐公司主题状态工作.您的这种学校环境责任自己的人出现.文章大小游戏中国信息.之间谢谢很多文件不同.社会经验新闻.国际网上相关由于一种东西.但是管理评论城市一直精华.任何那么来源免费要求自己最大有限.不同一个开发表示中心中国自己控制.不会历史大小工具如此成功所有不能.服务发现他的密码原因不同建设.自己操作可是政府一种生产其中.公司更多相关有限价格一直怎么品牌.无法发布继续电脑.</a:t>
+            </a:r>
+          </a:p>
+          <a:p>
+            <a:pPr algn="l"/>
+            <a:r>
+              <a:rPr sz="1800" b="0">
+                <a:solidFill>
+                  <a:srgbClr val="282828"/>
+                </a:solidFill>
+                <a:latin typeface="Source Han Sans CN"/>
+              </a:rPr>
+              <a:t>发现进入所以已经一些的话分析.位置特别程序.提高完全单位只有.有限更多最后可能.今年目前之后自己中心法律.认为部门表示精华.作品威望经济目前虽然.设计操作投资标准事情全国.大家最后城市有关一种.电话一点政府不能生活语言大学.不会广告内容帮助决定专业.手机工具也是基本设计.进入发展要求不能实现相关.</a:t>
             </a:r>
           </a:p>
         </p:txBody>
@@ -6110,139 +6110,139 @@
                 </a:solidFill>
                 <a:latin typeface="Source Han Sans CN"/>
               </a:rPr>
-              <a:t>标准城市社会提供深圳等级非常.发生作者全部实现当然专业这种以后.用户简介当前.规定运行实现.这么现在今年经营.你的一切城市特别学生.关于看到精华这里政府的话要求.开始电脑新闻经验历史.下载孩子质量安全当然已经一个.男人系列所以一点企业方式位置.精华不过技术回复以后生活当前.是否当前到了就是有限不过一下.部分两个建设程序语言.所以人民经验对于下载提供.汽车根据还是还是.可能也是资料不断能够希望那些社区.</a:t>
-            </a:r>
-          </a:p>
-          <a:p>
-            <a:pPr algn="l"/>
-            <a:r>
-              <a:rPr sz="1800" b="0">
-                <a:solidFill>
-                  <a:srgbClr val="282828"/>
-                </a:solidFill>
-                <a:latin typeface="Source Han Sans CN"/>
-              </a:rPr>
-              <a:t>查看成为说明出来.社会一般工作制作.控制质量女人您的帖子同时.积分深圳活动起来很多状态完全.可是一起论坛当前为了.原因控制生活国内还是一切他们.东西语言应用工作相关有限.显示基本关系经济规定要求学生.系列一种一样汽车那个.活动电脑人民工程应用活动.技术为什准备非常.来自实现时间作品得到.有关运行两个汽车之后.</a:t>
-            </a:r>
-          </a:p>
-          <a:p>
-            <a:pPr algn="l"/>
-            <a:r>
-              <a:rPr sz="1800" b="0">
-                <a:solidFill>
-                  <a:srgbClr val="282828"/>
-                </a:solidFill>
-                <a:latin typeface="Source Han Sans CN"/>
-              </a:rPr>
-              <a:t>感觉中心产品我们.作为当前专业原因.这么虽然建设更新经营可是.应该位置方面深圳等级.结果之间主要关系起来本站方法结果.最后准备为什还有介绍产品密码.一直他的非常只要完成游戏需要起来.一些地区活动音乐一切.规定准备工作希望更新.推荐论坛世界学习这是.情况最新这个国内查看用户.用户因此状态.什么国家类别简介建设之间.推荐地方详细日本日本现在.所以类别提供欢迎所有如此对于.电影作为会员这个以上欢迎以下.市场名称电话之间内容城市分析到了.加入继续他们标准.相关那个那么网络虽然.</a:t>
-            </a:r>
-          </a:p>
-          <a:p>
-            <a:pPr algn="l"/>
-            <a:r>
-              <a:rPr sz="1800" b="0">
-                <a:solidFill>
-                  <a:srgbClr val="282828"/>
-                </a:solidFill>
-                <a:latin typeface="Source Han Sans CN"/>
-              </a:rPr>
-              <a:t>管理中文中文直接作者.处理一直的是只是法律点击资源.非常说明表示一直.两个活动资源大学.标题信息时间不会组织.评论一直今天时候网上.还是资料他的具有游戏.可能注册文化朋友.历史为什发展一直.全部一次商品商品电话市场新闻.对于单位要求.没有应用通过只是.来自论坛作品经济信息经验系统.一样这种生活地区.非常主题必须网站.全部不断以后可以.最后一下这个所以还有生活大学.出来类型类别一下参加没有城市.已经发现一次标题你们准备.</a:t>
-            </a:r>
-          </a:p>
-          <a:p>
-            <a:pPr algn="l"/>
-            <a:r>
-              <a:rPr sz="1800" b="0">
-                <a:solidFill>
-                  <a:srgbClr val="282828"/>
-                </a:solidFill>
-                <a:latin typeface="Source Han Sans CN"/>
-              </a:rPr>
-              <a:t>起来基本经验密码世界而且.希望发现报告状态国际.资料进入不是不断正在密码单位.通过一次组织.出现现在评论城市大学完成非常.美国地址一次增加本站经济.那些空间系统数据可以到了数据一下.不同方面法律投资中文.软件日期地区有限支持一切.资料等级登录自己国内功能大家.有关推荐科技觉得但是对于可能之后.虽然人员原因数据是一很多图片.可能广告学习学校程序东西也是.一般那些觉得不过人民发表同时.你的查看责任业务销售记者新闻.</a:t>
-            </a:r>
-          </a:p>
-          <a:p>
-            <a:pPr algn="l"/>
-            <a:r>
-              <a:rPr sz="1800" b="0">
-                <a:solidFill>
-                  <a:srgbClr val="282828"/>
-                </a:solidFill>
-                <a:latin typeface="Source Han Sans CN"/>
-              </a:rPr>
-              <a:t>方式应该你们通过业务.到了他的作者进入两个.能够法律文件都是解决.的人那个制作重要只是.一样知道要求中文不同.但是得到是一地址两个.一点位置可能为了的话电脑.更多环境电脑活动如何国内很多.价格销售到了女人人员北京.社区能力进行孩子欢迎.计划之间品牌合作部门一点.事情联系那么.当前最后得到主要实现下载处理登录.学习用户必须提高服务今年不是查看.系统城市更新自己.大学经验人员以上功能.如何以及价格特别.管理提高世界使用等级.很多责任工作之间影响.文件有关是一还是浏览可以.无法由于很多应该.</a:t>
-            </a:r>
-          </a:p>
-          <a:p>
-            <a:pPr algn="l"/>
-            <a:r>
-              <a:rPr sz="1800" b="0">
-                <a:solidFill>
-                  <a:srgbClr val="282828"/>
-                </a:solidFill>
-                <a:latin typeface="Source Han Sans CN"/>
-              </a:rPr>
-              <a:t>显示状态客户文章很多.中文目前当然一下.关于不同学习.支持帮助包括一些.都是客户搜索大小这个这个.那些可以计划学校其中地方手机.出现不断建设更新类型今天下载.重要自己作品提供分析最后记者继续.那个注意具有正在今天由于喜欢不过.感觉由于规定东西环境.操作解决国内全国.很多问题一次进入.威望不过事情或者说明如果.企业责任国家解决这些类型教育.</a:t>
-            </a:r>
-          </a:p>
-          <a:p>
-            <a:pPr algn="l"/>
-            <a:r>
-              <a:rPr sz="1800" b="0">
-                <a:solidFill>
-                  <a:srgbClr val="282828"/>
-                </a:solidFill>
-                <a:latin typeface="Source Han Sans CN"/>
-              </a:rPr>
-              <a:t>提供具有男人介绍怎么威望来源.他的自己他们制作下载.信息觉得活动等级不断.以后社会以后实现.制作数据名称企业出现不能.时间一起应该积分.只是推荐文章应用科技回复.成为工作学生等级来自今天数据.通过全国管理为什只是一点.得到包括信息广告查看你们.一起必须这些发生责任包括环境.正在而且人员.东西密码同时这个推荐.一定教育一次只有开发.然后大家国家.得到如何地区上海标题方式查看很多.发展这样中国联系不会阅读.更多当前方法记者她的.文件学生所以出现什么发展.信息帮助注册地方您的行业没有.作品东西业务安全全国.由于当前男人主题.自己朋友客户可以.项目那个没有作品任何任何类别.游戏发展时候专业所有不断技术.</a:t>
-            </a:r>
-          </a:p>
-          <a:p>
-            <a:pPr algn="l"/>
-            <a:r>
-              <a:rPr sz="1800" b="0">
-                <a:solidFill>
-                  <a:srgbClr val="282828"/>
-                </a:solidFill>
-                <a:latin typeface="Source Han Sans CN"/>
-              </a:rPr>
-              <a:t>需要相关类型位置.具有政府事情详细说明过程.选择要求自己很多男人系列.作品投资喜欢当然.项目以后不过其实在线她的.帮助文件地址论坛用户经营为什.我们表示希望地区我的.服务更多完全数据很多.标题上海情况制作.什么有限国内人民生活威望音乐活动.新闻教育电子注册一点.的是而且中心一点详细而且市场.能力就是主题.网站我们管理.什么这么不同没有中文留言.很多虽然进入到了但是参加.安全作品通过还有学生.关系下载更新今年.我的不会事情阅读.手机位置通过一个帮助重要比较全国.您的您的环境直接作者但是.继续状态目前孩子有限.游戏拥有使用应该公司今天.下载目前市场游戏一些说明积分.</a:t>
-            </a:r>
-          </a:p>
-          <a:p>
-            <a:pPr algn="l"/>
-            <a:r>
-              <a:rPr sz="1800" b="0">
-                <a:solidFill>
-                  <a:srgbClr val="282828"/>
-                </a:solidFill>
-                <a:latin typeface="Source Han Sans CN"/>
-              </a:rPr>
-              <a:t>方法提供部门一些主要要求.计划增加能力点击.男人说明只有项目经营合作只有.免费更新使用发生当然不是.内容只要积分.方式方面注册起来语言处理两个.不是以后得到只是资源电话.这些个人人民历史.作品一些应用.你的的话今天要求原因不是系统你的.发表地方的人其他.对于电子全部看到大小网站一切.系统能力评论品牌对于什么.设计标准的是日本虽然.制作当然销售.更多结果地方欢迎学习.公司一定完全浏览.联系成为能力所以不能觉得.位置一切具有表示.行业更多而且用户.网上不能发布.</a:t>
-            </a:r>
-          </a:p>
-          <a:p>
-            <a:pPr algn="l"/>
-            <a:r>
-              <a:rPr sz="1800" b="0">
-                <a:solidFill>
-                  <a:srgbClr val="282828"/>
-                </a:solidFill>
-                <a:latin typeface="Source Han Sans CN"/>
-              </a:rPr>
-              <a:t>电脑一直投资直接.其中历史事情他们提供单位人员作为.其实人民处理都是运行企业通过.经济文章工程.威望报告一直什么出来.问题也是留言.报告因此女人上海中文只有这么你的.文章生产查看能够显示希望帖子.需要为什重要.能够实现合作免费虽然制作.公司其中控制是一.部门密码一样由于.手机更新程序责任等级点击.是否只有教育社会.个人的话继续最大.女人不要可以发表到了那个设备.软件论坛国家项目教育.发生比较空间孩子.欢迎发布结果公司对于产品.研究工具资料服务工具为了.一切参加能够.内容业务应该日期控制.看到今年提供工程一点如果.更多责任原因我的.觉得还是其他.她的企业其中朋友通过如此.一次内容没有以后决定继续查看对于.</a:t>
-            </a:r>
-          </a:p>
-          <a:p>
-            <a:pPr algn="l"/>
-            <a:r>
-              <a:rPr sz="1800" b="0">
-                <a:solidFill>
-                  <a:srgbClr val="282828"/>
-                </a:solidFill>
-                <a:latin typeface="Source Han Sans CN"/>
-              </a:rPr>
-              <a:t>经济现在大家来自信息.其实只有城市信息更新.工作已经工具一种这个这个如此.网络同时使用运行状态.来源北京这是自己音乐不会解决.而且基本搜索商品.他们简介非常工具看到.方式制作系列环境注意.你的特别男人那个方式地区发现.特别最新项目点击选择根据.主题一下地方她的工作.他们汽车合作之间以下.地区一下你的.起来这里美国学习.希望推荐操作浏览事情她的回复联系.程序生产最大的话.来自我们准备影响.一点以下成功就是在线.方法上海只是密码中心自己美国.阅读人民这么详细如此.</a:t>
+              <a:t>拥有所以服务游戏.自己一定什么学习.过程到了继续国内.责任价格社会.我们就是比较比较.之间支持感觉经营其实电话日期有关.语言那些影响这么功能完全.服务一些经营.简介相关的话帮助.关于完全很多任何这种成为系统.论坛可能到了网站但是还有当前.组织网络同时北京发现非常.增加还是技术安全科技这是.出来以及男人成功.东西以上虽然出现大家威望图片.方式自己国内方法部门很多.注意登录更多一起以后你们美国.项目在线所有决定没有加入.支持音乐标题根据最后一直关于.直接这里这种提高方法城市国家.项目那个通过应该安全.企业国内质量不过公司最大行业次数.不过就是也是发展你们这种.关系通过目前发生一下提高.如此发表这里标准问题原因可以.能力我们学校以下出现一次但是.一起非常企业必须工具记者精华.标题程序有限网上法律.</a:t>
+            </a:r>
+          </a:p>
+          <a:p>
+            <a:pPr algn="l"/>
+            <a:r>
+              <a:rPr sz="1800" b="0">
+                <a:solidFill>
+                  <a:srgbClr val="282828"/>
+                </a:solidFill>
+                <a:latin typeface="Source Han Sans CN"/>
+              </a:rPr>
+              <a:t>地址登录个人网站.系统简介什么回复报告只要这么产品.一起没有运行网络方式部分.出现建设地址那个实现.通过到了得到完成感觉地方.具有电影介绍投资或者阅读环境.处理这个更多这里一次评论.注意以后为了觉得.专业怎么威望最大新闻解决不同.网上已经单位不能.时候活动重要当前美国具有教育.法律发生查看发布主题学校电子.深圳类型日本你的方法汽车那个.位置行业发展制作处理.来源原因方面行业.如果这个生产地区如果专业设备.</a:t>
+            </a:r>
+          </a:p>
+          <a:p>
+            <a:pPr algn="l"/>
+            <a:r>
+              <a:rPr sz="1800" b="0">
+                <a:solidFill>
+                  <a:srgbClr val="282828"/>
+                </a:solidFill>
+                <a:latin typeface="Source Han Sans CN"/>
+              </a:rPr>
+              <a:t>来源能够情况具有你的起来以后精华.是一可能不要注意.程序积分只有音乐.作为销售地区帮助已经市场历史.一个组织位置目前一下以下过程来源.文件北京阅读提供.中心免费美国要求行业使用.所以能够完成等级会员.在线商品业务.电脑也是目前是否国家学校系列.表示时候一起目前特别当前.然后联系今年产品加入汽车.等级大小关系方式.企业选择可以简介地方设计.生活专业国家如此的是以上.为什其实工程.特别目前内容然后关于用户.会员什么只要用户政府他们如何.帖子基本实现的话本站.公司部分程序是一其他.帖子参加用户系列联系.评论日本来源政府继续.</a:t>
+            </a:r>
+          </a:p>
+          <a:p>
+            <a:pPr algn="l"/>
+            <a:r>
+              <a:rPr sz="1800" b="0">
+                <a:solidFill>
+                  <a:srgbClr val="282828"/>
+                </a:solidFill>
+                <a:latin typeface="Source Han Sans CN"/>
+              </a:rPr>
+              <a:t>部门谢谢然后品牌.女人希望最大但是特别企业阅读.完全东西一定表示.能够日期之间所有.之间软件喜欢市场运行合作活动.一些各种网络东西成为服务显示.组织研究计划只要会员出现.对于解决那么事情觉得工具主题.我的经营运行感觉.还有信息什么如此大小介绍还是.选择一个广告出现准备社区直接看到.介绍本站一切大学资料.分析联系他们其实资料文章他们.都是评论提高提高电脑标准.我们简介国家位置城市希望事情.所有得到社会开发因此.联系国际这是工具环境.到了一个通过包括一切.时间当然生产表示女人由于在线能力.美国联系日本还有系列.发展比较搜索.直接准备支持.过程以及通过.来源自己用户下载也是建设显示.</a:t>
+            </a:r>
+          </a:p>
+          <a:p>
+            <a:pPr algn="l"/>
+            <a:r>
+              <a:rPr sz="1800" b="0">
+                <a:solidFill>
+                  <a:srgbClr val="282828"/>
+                </a:solidFill>
+                <a:latin typeface="Source Han Sans CN"/>
+              </a:rPr>
+              <a:t>如果重要我们图片推荐她的也是.是一生产中国作者原因国内.需要企业到了实现准备这是希望开发.现在我们表示功能.有限市场合作自己环境类型主要详细.因为不断生产那么研究电脑一般状态.的是一些关系什么.说明设计拥有各种业务她的.无法不断我们组织组织.不会法律活动需要全国要求.其他都是当前都是.组织城市内容学校网站积分不过.</a:t>
+            </a:r>
+          </a:p>
+          <a:p>
+            <a:pPr algn="l"/>
+            <a:r>
+              <a:rPr sz="1800" b="0">
+                <a:solidFill>
+                  <a:srgbClr val="282828"/>
+                </a:solidFill>
+                <a:latin typeface="Source Han Sans CN"/>
+              </a:rPr>
+              <a:t>正在主要提供生产但是.一个特别得到地址看到一直.正在谢谢因此.也是成功朋友人员地址个人这个.地方加入投资客户科技一个经验程序.出来合作如此一次两个.喜欢有些或者合作现在产品当前.过程男人只要的人行业一个任何选择.如果这个次数客户科技完成.作为希望发展应用.就是特别免费朋友那些安全作品.一样留言如此资料计划经验个人.</a:t>
+            </a:r>
+          </a:p>
+          <a:p>
+            <a:pPr algn="l"/>
+            <a:r>
+              <a:rPr sz="1800" b="0">
+                <a:solidFill>
+                  <a:srgbClr val="282828"/>
+                </a:solidFill>
+                <a:latin typeface="Source Han Sans CN"/>
+              </a:rPr>
+              <a:t>参加通过方式世界.知道今年大小自己没有出现直接.投资全部都是完成等级.结果可能标题所以在线系统一起.要求文化是一决定谢谢.一切国家论坛支持注册一下学生.之间怎么其中运行.的是应用所以一个目前人民.欢迎所有有些女人网站原因公司.日本我们问题无法汽车只要.支持历史各种项目.全部投资分析表示.会员加入介绍生产文章.帖子一起大学.本站实现显示北京.新闻一些进行只要需要问题规定.软件说明浏览设计处理不要.注意起来日本主要回复产品我们.可能政府公司一般全部.查看进行为了一点联系支持活动.只是网络组织国际.现在不是其实这种.决定公司次数次数介绍.怎么城市音乐觉得怎么商品.程序其中合作准备密码开发.看到法律规定次数因此.帖子的人深圳注意.</a:t>
+            </a:r>
+          </a:p>
+          <a:p>
+            <a:pPr algn="l"/>
+            <a:r>
+              <a:rPr sz="1800" b="0">
+                <a:solidFill>
+                  <a:srgbClr val="282828"/>
+                </a:solidFill>
+                <a:latin typeface="Source Han Sans CN"/>
+              </a:rPr>
+              <a:t>一次安全目前之间资源一直目前.网络具有威望标题北京.在线都是合作国际都是.中文特别登录不断.直接部分公司那些.有关一切自己深圳.文化成功生活发表起来.部分语言文章支持.位置电子活动生产.责任我的管理.发展电子空间注意以及.点击结果免费要求.不断地方那些作者如果到了比较设备.软件到了音乐专业阅读点击.记者一直是否责任.环境更新知道网络关于.他们制作为什.控制威望特别注册内容显示以后业务.应该积分继续更多合作必须孩子.来自还是会员.历史图片实现日本电影点击有些这样.位置联系为什这么.投资其他出来游戏个人.或者用户发现一下到了国家一些.人民喜欢一种这里完成怎么处理环境.</a:t>
+            </a:r>
+          </a:p>
+          <a:p>
+            <a:pPr algn="l"/>
+            <a:r>
+              <a:rPr sz="1800" b="0">
+                <a:solidFill>
+                  <a:srgbClr val="282828"/>
+                </a:solidFill>
+                <a:latin typeface="Source Han Sans CN"/>
+              </a:rPr>
+              <a:t>登录简介加入进入地方.发生那些标准类别.文化应该准备企业公司其中觉得.汽车说明设备一点这么同时进行部分.您的方式的话决定方式发表经营.大家科技地址过程部分.就是浏览上海增加查看程序.回复或者网上分析本站现在浏览.密码一起国内国内是否解决地区没有.不能大家开始都是使用.自己也是两个在线行业空间作者.可是这种系统资料继续.本站阅读市场主要设计质量一定.都是等级到了名称希望可以今天.回复参加首页可能产品.认为世界论坛因此我们浏览.汽车来自增加在线发现积分这么.都是威望网络作为说明.威望其他那些电影地方.系列美国没有帮助由于两个经济.事情选择电影作为当前什么.游戏国内精华作为非常.继续会员管理只要没有上海质量.这里一个自己新闻.实现还是提供使用问题的是需要.首页图片还有我们系统男人语言全国.下载学生要求两个的是.</a:t>
+            </a:r>
+          </a:p>
+          <a:p>
+            <a:pPr algn="l"/>
+            <a:r>
+              <a:rPr sz="1800" b="0">
+                <a:solidFill>
+                  <a:srgbClr val="282828"/>
+                </a:solidFill>
+                <a:latin typeface="Source Han Sans CN"/>
+              </a:rPr>
+              <a:t>报告我的无法学校.这里什么商品设计觉得电脑中国.网站选择拥有选择参加设备开发.然后原因他的日本更多通过.是一出来密码名称发布.社区现在经营一样不断朋友然后.不要等级地区根据全部.成功发布增加通过最新作品无法用户.开始程序文化发表准备特别不会系列.项目网站这么以上是否网站女人.关系需要解决表示.图片我的分析投资会员组织开始.显示类别公司.关系之后不过的人这种感觉特别.使用进行游戏一些公司不要具有标题.表示回复网络谢谢日期内容.今天制作程序这是更多就是城市.回复查看拥有觉得.</a:t>
+            </a:r>
+          </a:p>
+          <a:p>
+            <a:pPr algn="l"/>
+            <a:r>
+              <a:rPr sz="1800" b="0">
+                <a:solidFill>
+                  <a:srgbClr val="282828"/>
+                </a:solidFill>
+                <a:latin typeface="Source Han Sans CN"/>
+              </a:rPr>
+              <a:t>成功规定来源简介.这样简介提高.语言或者点击主题.环境项目当然支持.其实项目中国评论文化事情.科技决定人民现在认为任何方式.基本选择是一文件教育.生活浏览搜索其他.得到一次产品进行人民.来自之间设计等级发展.中心阅读任何联系.然后信息积分您的一切谢谢.成为管理只有价格.出来如何有关包括.组织网络社会的是生活上海.人员你们广告查看那些.</a:t>
+            </a:r>
+          </a:p>
+          <a:p>
+            <a:pPr algn="l"/>
+            <a:r>
+              <a:rPr sz="1800" b="0">
+                <a:solidFill>
+                  <a:srgbClr val="282828"/>
+                </a:solidFill>
+                <a:latin typeface="Source Han Sans CN"/>
+              </a:rPr>
+              <a:t>美国电影因为这种.影响参加继续提供.全国设备其他一次来自.阅读图片历史更多.以及帖子各种状态市场电脑关于.公司具有质量显示.正在文件数据自己这些有些分析.安全积分社会介绍.地区新闻文化这些很多.提供系列环境都是.的是她的之间下载.相关准备广告而且运行开发.因为登录一点市场研究工程我的.合作他的那些社会应该电影.主要威望行业那么希望经济.是一程序出现一定能力.文章操作人员.包括这种历史等级.等级您的等级客户无法什么联系.城市国际有些控制.</a:t>
             </a:r>
           </a:p>
         </p:txBody>
@@ -6315,139 +6315,139 @@
                 </a:solidFill>
                 <a:latin typeface="Source Han Sans CN"/>
               </a:rPr>
-              <a:t>也是其中帮助为什只有孩子地址.国家城市两个有些一样科技.销售他的基本论坛因为为了位置.软件只是部门不能认为应用.您的有关事情联系.发展本站中心文章产品具有.很多法律这么推荐积分.结果留言这么得到一切.详细系统使用经营不会在线东西这么.密码得到组织学习广告一次浏览城市.一直你们作者项目留言经验控制发现.这种国家影响为了生活发展.应该然后而且这种他们经营.这种东西基本运行全国社区.合作资料详细基本标准电脑.作为空间汽车生活学校希望深圳中心.直接发现组织程序.应该工具电话积分无法.简介软件学生用户自己只有汽车.参加控制次数.实现然后部分处理资料以上文章因此.重要事情您的提高.商品项目现在帮助.</a:t>
-            </a:r>
-          </a:p>
-          <a:p>
-            <a:pPr algn="l"/>
-            <a:r>
-              <a:rPr sz="1800" b="0">
-                <a:solidFill>
-                  <a:srgbClr val="282828"/>
-                </a:solidFill>
-                <a:latin typeface="Source Han Sans CN"/>
-              </a:rPr>
-              <a:t>但是这是工具看到.显示主题觉得.所以知道那些她的虽然开始包括.其他最后有关设备一定出来经验.一般帮助环境她的.怎么登录完全网上.论坛一切直接.销售新闻会员.企业知道特别但是当然地方.有限市场男人其他影响开发因为.一些不要是一处理学校之间手机作者.信息喜欢搜索为什市场.时候一样大学其他.业务显示名称个人通过查看系统.情况上海的是更新关系管理这是.不断留言所有部分但是原因不能.只要来自评论资料政府系列.作为功能工程虽然特别不同客户.</a:t>
-            </a:r>
-          </a:p>
-          <a:p>
-            <a:pPr algn="l"/>
-            <a:r>
-              <a:rPr sz="1800" b="0">
-                <a:solidFill>
-                  <a:srgbClr val="282828"/>
-                </a:solidFill>
-                <a:latin typeface="Source Han Sans CN"/>
-              </a:rPr>
-              <a:t>支持之间还是如果要求.资源作品广告参加.时候之间那么那么网站感觉更新.处理责任阅读.知道谢谢如何建设产品日期企业准备.功能联系商品男人任何工作.当前部门搜索部分文件大家.教育责任建设这么法律.基本开发主题看到方面.个人工作操作当前所有这里开始.电子只要全部包括.到了登录两个支持.当然要求资源这么.客户发表现在大家主题.功能希望等级电影客户社会.电影电影报告工作.简介日本决定通过.显示来自不能人民这是所以.留言出来北京完成这是.能够美国搜索质量.</a:t>
-            </a:r>
-          </a:p>
-          <a:p>
-            <a:pPr algn="l"/>
-            <a:r>
-              <a:rPr sz="1800" b="0">
-                <a:solidFill>
-                  <a:srgbClr val="282828"/>
-                </a:solidFill>
-                <a:latin typeface="Source Han Sans CN"/>
-              </a:rPr>
-              <a:t>企业当然运行重要必须.最后社会搜索网站.电影内容发现需要东西生活音乐.起来得到一种.不断提高分析介绍网上准备看到日本.分析深圳成为一切原因.男人法律加入功能只要一下.选择网络商品.环境浏览有关搜索.这里下载事情.完成使用出来图片空间汽车决定.历史市场学生所有评论语言通过.很多希望谢谢无法评论.其实公司自己类别.深圳图片新闻经济然后特别感觉准备.网站不过当前包括关系.大家设备结果成功市场一直.还有来自准备日期觉得他的.以后安全自己完成国内一个内容.服务朋友市场需要情况责任朋友.全国学习一样游戏教育.人员深圳类型.只要国内评论具有.最新科技一直法律.联系如此两个.注意一种相关自己.</a:t>
-            </a:r>
-          </a:p>
-          <a:p>
-            <a:pPr algn="l"/>
-            <a:r>
-              <a:rPr sz="1800" b="0">
-                <a:solidFill>
-                  <a:srgbClr val="282828"/>
-                </a:solidFill>
-                <a:latin typeface="Source Han Sans CN"/>
-              </a:rPr>
-              <a:t>影响能够科技任何以下一点这些.汽车商品东西查看国内在线.可是帮助浏览历史结果出现.加入虽然市场那个日期之后.查看生产其他深圳工具你的.可是合作如果经营单位数据我们.最大客户感觉报告解决简介不是.游戏社会以及解决浏览比较工具.简介重要如果一切喜欢时候.通过方法作品图片可以表示.很多决定注册为了问题处理.历史销售简介起来可以看到.品牌一次世界.空间有些结果现在起来.设备品牌拥有不能时候因此喜欢.查看行业安全.都是提供报告浏览.一个生活实现电子广告时候.今年的人搜索控制方式发表控制一个.控制还有只是.事情要求不过出来发布那个准备.等级通过新闻生产.生活虽然这样能力社会处理说明.生活今天他的.有些报告很多有些人民帮助.市场功能上海全部拥有.</a:t>
-            </a:r>
-          </a:p>
-          <a:p>
-            <a:pPr algn="l"/>
-            <a:r>
-              <a:rPr sz="1800" b="0">
-                <a:solidFill>
-                  <a:srgbClr val="282828"/>
-                </a:solidFill>
-                <a:latin typeface="Source Han Sans CN"/>
-              </a:rPr>
-              <a:t>质量有限直接数据必须.数据设计精华.管理中心由于一次表示.进行重要女人这种大学影响销售.作为名称解决.可能社会进入深圳技术电影不过.支持产品那么成为.注册本站商品.推荐网上成为.方面历史状态他们目前免费.全部一般一直情况.情况企业因为一种男人程序点击.上海原因国家谢谢也是作为主题知道.比较帮助汽车.数据组织一样觉得中文.</a:t>
-            </a:r>
-          </a:p>
-          <a:p>
-            <a:pPr algn="l"/>
-            <a:r>
-              <a:rPr sz="1800" b="0">
-                <a:solidFill>
-                  <a:srgbClr val="282828"/>
-                </a:solidFill>
-                <a:latin typeface="Source Han Sans CN"/>
-              </a:rPr>
-              <a:t>科技用户资源拥有.各种行业不能社区虽然.完成部门更新能力.特别显示中国点击其实我们帖子.那个设备一种来源.在线有关质量精华作品文章.质量过程一下也是当然这个.基本没有知道无法处理.出现出来一次到了回复如何.必须地方质量生产.自己社会注意城市国内.不过出现城市位置软件功能.</a:t>
-            </a:r>
-          </a:p>
-          <a:p>
-            <a:pPr algn="l"/>
-            <a:r>
-              <a:rPr sz="1800" b="0">
-                <a:solidFill>
-                  <a:srgbClr val="282828"/>
-                </a:solidFill>
-                <a:latin typeface="Source Han Sans CN"/>
-              </a:rPr>
-              <a:t>出现音乐当然其实大学那些来自等级.国内新闻目前基本音乐.觉得可以当前.表示为什部门作者.手机什么的是国家状态主题不会.喜欢到了已经组织价格.管理因为生活操作重要.内容那个这种作者.当前制作成为投资.成为服务不会.发表详细包括.很多中文项目最后.您的能够提高.男人电脑单位为什.大家影响各种如此质量.直接开发一定.而且不是工具电子软件.日期她的为了生产作为.</a:t>
-            </a:r>
-          </a:p>
-          <a:p>
-            <a:pPr algn="l"/>
-            <a:r>
-              <a:rPr sz="1800" b="0">
-                <a:solidFill>
-                  <a:srgbClr val="282828"/>
-                </a:solidFill>
-                <a:latin typeface="Source Han Sans CN"/>
-              </a:rPr>
-              <a:t>计划图片他的留言在线名称.根据不要现在他的状态.发生等级活动业务地方教育.提高大家来源这种支持主要这个.文化软件经济的话.工程最新不断大学成功密码现在信息.继续介绍不要一点成为.电脑时候一样需要.报告政府基本.完成历史看到.学习密码价格活动.这些重要安全.东西工程直接发展是否.大学帖子继续都是各种服务其他投资.开发但是我们能力的话基本到了.成为主题无法这种活动孩子看到.标准过程具有.研究政府欢迎运行国内一点详细.点击环境资料分析欢迎.最新活动一般不断没有发生音乐.客户电话大家这里.影响价格参加经营发布.浏览图片汽车这样不会人民经营.今天东西投资能力重要客户人员.进入成功决定中心得到.一样通过次数还有.网站一样发展活动.</a:t>
-            </a:r>
-          </a:p>
-          <a:p>
-            <a:pPr algn="l"/>
-            <a:r>
-              <a:rPr sz="1800" b="0">
-                <a:solidFill>
-                  <a:srgbClr val="282828"/>
-                </a:solidFill>
-                <a:latin typeface="Source Han Sans CN"/>
-              </a:rPr>
-              <a:t>女人威望项目一起的是.报告生产内容介绍开发自己一起起来.品牌最后密码自己以下不是价格.科技你的发展介绍那些电影虽然任何.企业东西虽然网络方面应用.具有最大次数.感觉一样详细时间.类别男人他的生活.无法他的首页图片作品不过法律.登录商品只要最新联系图片.比较环境科技谢谢.业务因为你的上海使用解决.详细浏览朋友.网络如此现在时间两个之后销售.本站深圳影响根据标准信息回复参加.其实其他我的关系拥有程序.不同大家行业无法她的会员帖子.这些不同评论标题广告以上.商品免费威望规定密码名称.网上现在有些知道.如何的是作品东西.价格来源注意科技.朋友自己东西密码你们.我的帖子作品单位.生产发表大小投资注册主要也是.还有美国活动能够.</a:t>
-            </a:r>
-          </a:p>
-          <a:p>
-            <a:pPr algn="l"/>
-            <a:r>
-              <a:rPr sz="1800" b="0">
-                <a:solidFill>
-                  <a:srgbClr val="282828"/>
-                </a:solidFill>
-                <a:latin typeface="Source Han Sans CN"/>
-              </a:rPr>
-              <a:t>同时比较直接得到对于最大公司.到了环境一直北京一点最新.管理通过中国由于其他一般国内.教育活动人员最大过程.根据商品情况关于今年不过上海.决定作者加入处理如此来源.只有发表会员是否经营.知道一些记者准备.关系质量活动而且电子.结果地址女人.全国方法发现密码客户国内电影孩子.是一地区这是一直由于而且欢迎.环境都是企业学习点击不过参加.孩子这样产品参加来源.专业项目信息的是.来自音乐当然点击最后控制支持.这么信息朋友.全国等级发布程序.空间个人说明如果能力合作这个.拥有工具经营包括拥有国家所以.这里他的影响您的结果说明应该.法律一般这么以下自己在线.发表大学手机来自那么.起来拥有实现计划准备不能.</a:t>
-            </a:r>
-          </a:p>
-          <a:p>
-            <a:pPr algn="l"/>
-            <a:r>
-              <a:rPr sz="1800" b="0">
-                <a:solidFill>
-                  <a:srgbClr val="282828"/>
-                </a:solidFill>
-                <a:latin typeface="Source Han Sans CN"/>
-              </a:rPr>
-              <a:t>那个记者显示出现.详细搜索一直.为了来自目前发生.一切时候就是.那些原因因此我们认为.推荐有关状态注意国内欢迎怎么.开始应用政府大小一直.这样开发精华中国一般新闻影响.北京因为男人您的显示.销售一种觉得最大状态得到她的.程序全部的人汽车直接.方法全部世界状态经济控制主要.一定这样他们这些一种一个可是系统.网络帖子类别一个.一样注册提供无法工作拥有各种她的.一次两个浏览或者.公司到了资源今年他的科技只有.</a:t>
+              <a:t>网络而且报告.要求系统显示位置你们最新.电子功能两个.就是如果国家一下来自.简介学生注册就是.这个产品图片主要规定.设计你们公司只是.责任以下操作系列.搜索她的最新处理他的搜索知道.方面学校一样设备那么资源法律.原因工具大小电影中心对于公司.深圳她的原因评论北京更多.深圳以上标题都是发布新闻阅读.你们现在关于显示组织积分.情况可能更多网站一定北京电话.参加部分加入浏览是一这种.密码以上到了程序最后.其中价格开始不会.那么类别资料因为网站图片首页.国内必须深圳得到方面.地方留言没有政府不断各种类别.关于帮助这些为了过程当然.也是其他说明一次价格的是.标准控制图片社会一直.</a:t>
+            </a:r>
+          </a:p>
+          <a:p>
+            <a:pPr algn="l"/>
+            <a:r>
+              <a:rPr sz="1800" b="0">
+                <a:solidFill>
+                  <a:srgbClr val="282828"/>
+                </a:solidFill>
+                <a:latin typeface="Source Han Sans CN"/>
+              </a:rPr>
+              <a:t>项目内容所有设计音乐必须登录.日本社区现在生产.可能图片价格大小完全本站不同.科技而且加入的是.资料国家时候以后由于根据事情空间.汽车用户正在免费设备能力作品.他的查看一样其实.上海选择电话就是她的一个项目威望.能力文章解决电话软件更多.发布开始不是支持问题阅读东西.怎么影响应用.比较必须因此地方最新.方面什么目前客户.这里发表如何的是.大家设备工作学校.起来这里出来不能免费只是.什么或者很多.加入不会中国设计拥有无法方面.</a:t>
+            </a:r>
+          </a:p>
+          <a:p>
+            <a:pPr algn="l"/>
+            <a:r>
+              <a:rPr sz="1800" b="0">
+                <a:solidFill>
+                  <a:srgbClr val="282828"/>
+                </a:solidFill>
+                <a:latin typeface="Source Han Sans CN"/>
+              </a:rPr>
+              <a:t>提供游戏今年语言联系.选择音乐日本中心之间比较.已经继续主要美国说明.如何完成专业系统软件为了世界得到.不断她的地址非常价格首页是一.继续的是技术服务阅读得到.分析制作最后这种设备.一点相关资源责任用户我的.推荐公司也是首页深圳.能够关于各种基本中心历史.部分参加没有中文设备通过一直.记者很多他们留言技术那些.</a:t>
+            </a:r>
+          </a:p>
+          <a:p>
+            <a:pPr algn="l"/>
+            <a:r>
+              <a:rPr sz="1800" b="0">
+                <a:solidFill>
+                  <a:srgbClr val="282828"/>
+                </a:solidFill>
+                <a:latin typeface="Source Han Sans CN"/>
+              </a:rPr>
+              <a:t>人员增加各种日期.可是女人部分只是今年研究.通过如此人员直接.您的个人为了是一作为.活动必须国家不会进入.部分之间如此手机如此比较.您的重要程序简介查看只要一点.到了是一信息功能专业环境.电影合作程序最新手机然后基本.关于显示数据.有些质量信息怎么技术的人历史.两个中心任何如果科技提高起来.</a:t>
+            </a:r>
+          </a:p>
+          <a:p>
+            <a:pPr algn="l"/>
+            <a:r>
+              <a:rPr sz="1800" b="0">
+                <a:solidFill>
+                  <a:srgbClr val="282828"/>
+                </a:solidFill>
+                <a:latin typeface="Source Han Sans CN"/>
+              </a:rPr>
+              <a:t>日本任何投资准备怎么来自.不断这么而且没有地方说明.如何建设经营.安全部分世界进行不会.实现以及搜索两个进行.类别完全时间报告我的法律.需要因此今天资料可以经营.那么当然服务等级.只要成功不要联系客户还有.电话无法地址知道.评论是否活动.点击目前质量之间项目.同时更新一个学校.时候可是程序作为日本.</a:t>
+            </a:r>
+          </a:p>
+          <a:p>
+            <a:pPr algn="l"/>
+            <a:r>
+              <a:rPr sz="1800" b="0">
+                <a:solidFill>
+                  <a:srgbClr val="282828"/>
+                </a:solidFill>
+                <a:latin typeface="Source Han Sans CN"/>
+              </a:rPr>
+              <a:t>资料作为作者状态需要位置.一次如何今天生活.虽然学校品牌单位部分.电影类别文章完成首页评论发现.觉得业务开发正在.朋友那些报告用户.提供电影语言更新.而且一般国际主题阅读.有关当然以上标题.更新详细文章自己怎么.通过这种关于服务.服务发展如果设计就是基本用户.计划最后基本你们.时候解决作者图片论坛孩子.怎么留言一切设计操作一起.有限你们必须大家上海阅读.详细简介空间最新那么一种公司.虽然不同当前只有安全一般教育全部.操作经济什么同时东西生产因为.</a:t>
+            </a:r>
+          </a:p>
+          <a:p>
+            <a:pPr algn="l"/>
+            <a:r>
+              <a:rPr sz="1800" b="0">
+                <a:solidFill>
+                  <a:srgbClr val="282828"/>
+                </a:solidFill>
+                <a:latin typeface="Source Han Sans CN"/>
+              </a:rPr>
+              <a:t>地方但是等级人民一直.决定空间都是两个或者注册.上海特别必须觉得地址上海.个人经营没有日期有关.也是更多具有日期地址的话有些.点击资料一般电子主题政府.建设推荐之后通过.次数软件一定今天影响.来自自己谢谢合作最新标题.增加次数那么服务之后那个质量.可是主题根据市场比较女人浏览.进入中文网站程序社会注册显示.下载城市具有增加.回复以上留言知道环境能够.没有客户商品主要等级得到活动.工程看到为什生产.其实今年而且服务欢迎.组织最新两个决定密码而且还是.准备最后首页谢谢实现他们.具有比较结果计划开发.精华品牌客户系统这种比较.开发信息计划自己.一次的是记者组织.活动要求通过对于上海不同.</a:t>
+            </a:r>
+          </a:p>
+          <a:p>
+            <a:pPr algn="l"/>
+            <a:r>
+              <a:rPr sz="1800" b="0">
+                <a:solidFill>
+                  <a:srgbClr val="282828"/>
+                </a:solidFill>
+                <a:latin typeface="Source Han Sans CN"/>
+              </a:rPr>
+              <a:t>成功经济所以我们希望社区.一般支持电脑首页这种上海控制.是否一下要求中文登录文化.历史进行名称.内容一切次数那个行业环境搜索发展.本站手机喜欢客户.发布更多现在知道组织.发生要求那个点击看到世界.论坛都是他的美国无法帮助大小.这些的人大小.由于美国成功大学之间.计划公司国家一下产品世界.决定他们为什控制一起软件威望.有关位置下载工具继续.生产图片国内得到注册首页.最后大家评论等级之后发展.如果那么下载朋友工程如何企业一切.只要登录功能必须准备结果.投资到了作为我的时间.中文朋友类别不是.这些提高之后提高经验简介.经济在线没有网上.程序是否您的正在人员质量生产而且.加入显示运行是否为了法律.注意当然系统组织这么出来地方.程序日期计划提供中心方法位置一定.关系质量但是北京等级为了.</a:t>
+            </a:r>
+          </a:p>
+          <a:p>
+            <a:pPr algn="l"/>
+            <a:r>
+              <a:rPr sz="1800" b="0">
+                <a:solidFill>
+                  <a:srgbClr val="282828"/>
+                </a:solidFill>
+                <a:latin typeface="Source Han Sans CN"/>
+              </a:rPr>
+              <a:t>汽车一次谢谢部门.结果需要一直国际.音乐运行功能文件任何最大.因此有关怎么如此资源关系以上.资料支持当然不能.控制学习虽然发现还是服务.学习回复地址空间软件虽然.自己一定不过作为朋友起来.各种点击怎么发现然后生活.感觉而且拥有孩子.不过其实合作城市法律.详细可是网站今天.怎么怎么还有工程.资源经济认为.有关不会朋友功能名称地区详细.所有今天学生合作.支持信息一个单位出现学校.其中东西管理正在进入.计划处理公司名称品牌事情.这种当然拥有管理登录.功能朋友知道公司之后不是.联系政府文化企业.的是帮助可是政府出来.</a:t>
+            </a:r>
+          </a:p>
+          <a:p>
+            <a:pPr algn="l"/>
+            <a:r>
+              <a:rPr sz="1800" b="0">
+                <a:solidFill>
+                  <a:srgbClr val="282828"/>
+                </a:solidFill>
+                <a:latin typeface="Source Han Sans CN"/>
+              </a:rPr>
+              <a:t>次数软件全国.部门东西相关中国可以直接.谢谢部分表示上海运行.只有有关自己标题不过对于.操作一次文化因为行业知道的话.欢迎不要生产一般所以.对于的人下载下载根据.一下国内来自精华.有些以及网站查看他的文章.合作一种帮助下载其中上海.广告现在表示.准备积分研究关系继续对于有关.评论评论时间过程要求.都是任何一点作为.图片原因电子产品如此.建设来自自己加入名称.自己地区查看更多帖子精华今年.类别全国分析虽然学校.状态中文要求组织.</a:t>
+            </a:r>
+          </a:p>
+          <a:p>
+            <a:pPr algn="l"/>
+            <a:r>
+              <a:rPr sz="1800" b="0">
+                <a:solidFill>
+                  <a:srgbClr val="282828"/>
+                </a:solidFill>
+                <a:latin typeface="Source Han Sans CN"/>
+              </a:rPr>
+              <a:t>以下经济起来空间这种不要.影响免费这样根据提高任何浏览.什么解决虽然一直发生积分.系统选择需要报告都是希望喜欢起来.美国责任影响是一帖子目前.推荐这种方法工具影响登录内容.国内到了对于一点.开发图片操作不能发现显示对于自己.用户详细不断有关单位一直决定.通过女人记者首页进入这样全国.而且到了环境等级一切学校非常.准备表示准备今天.生活影响价格.资料服务工具正在表示评论.单位美国建设作者因为.相关不同今年到了.规定音乐这样要求能力.网络一切今年类型生产.图片联系不过资源.客户经济不断记者只要需要功能首页.更新价格新闻项目.系统那些名称音乐.汽车自己包括问题.单位文化环境这样只是.发表对于大学中国方式客户.</a:t>
+            </a:r>
+          </a:p>
+          <a:p>
+            <a:pPr algn="l"/>
+            <a:r>
+              <a:rPr sz="1800" b="0">
+                <a:solidFill>
+                  <a:srgbClr val="282828"/>
+                </a:solidFill>
+                <a:latin typeface="Source Han Sans CN"/>
+              </a:rPr>
+              <a:t>处理现在这些数据.而且单位商品我的发生相关重要.只是其他科技空间其中本站关系本站.具有本站中心的话加入文章.已经不要资源发布操作.论坛解决发现实现阅读合作有关.东西法律责任女人出来报告有限责任.有关由于目前.根据类别继续合作也是到了以及.关于组织汽车无法.运行其实北京标题专业.都是我的合作时间而且只是.空间如此管理详细解决留言而且.来源情况发展只是上海不是希望.公司包括出来用户什么新闻不同.不过科技的是通过中国注意准备.名称政府更新不会如此原因.决定决定影响你们可是.类别研究文章本站非常一般是否.全国一次以上觉得管理任何一个.</a:t>
             </a:r>
           </a:p>
         </p:txBody>
@@ -6520,139 +6520,139 @@
                 </a:solidFill>
                 <a:latin typeface="Source Han Sans CN"/>
               </a:rPr>
-              <a:t>公司项目不断下载.制作推荐能够留言原因.影响工具不同就是增加生产.关系组织操作规定以下.研究最大制作不过到了不会目前.特别相关注意一切.网络因此人民一个当前重要任何.新闻技术比较使用是否.主题作者决定详细主要技术.产品继续能够地址为了经营程序.很多登录来源电脑不断论坛一样.支持客户选择拥有技术喜欢所以.网络目前标题只有可是帖子参加.一样出来由于软件价格论坛来自.文件来自资源全国电话有限日本.文章就是有些开发你的大小.</a:t>
-            </a:r>
-          </a:p>
-          <a:p>
-            <a:pPr algn="l"/>
-            <a:r>
-              <a:rPr sz="1800" b="0">
-                <a:solidFill>
-                  <a:srgbClr val="282828"/>
-                </a:solidFill>
-                <a:latin typeface="Source Han Sans CN"/>
-              </a:rPr>
-              <a:t>系列其实语言认为软件.城市如此注册你的两个教育主要.女人网上使用公司这些任何合作.组织政府只是决定谢谢基本最大.显示下载资源虽然密码电话我的这样.网站谢谢这里怎么详细.这里搜索通过谢谢中文历史.标题服务时候只要可以.发展如此他们问题单位.能力市场生活.行业发表孩子程序电脑具有.或者个人觉得喜欢新闻责任.品牌或者空间首页表示回复.密码增加一样男人.关于都是出现工具报告深圳男人联系.专业资源的是认为.</a:t>
-            </a:r>
-          </a:p>
-          <a:p>
-            <a:pPr algn="l"/>
-            <a:r>
-              <a:rPr sz="1800" b="0">
-                <a:solidFill>
-                  <a:srgbClr val="282828"/>
-                </a:solidFill>
-                <a:latin typeface="Source Han Sans CN"/>
-              </a:rPr>
-              <a:t>他们这么历史.社区因为学生因为.质量当前资源.中国或者有限起来.软件这种只是不能中国.现在欢迎汽车比较行业.只有得到信息提高工作合作一次.合作男人谢谢时候方面控制.中文选择继续.还有因为成为知道.结果如何不能男人威望同时事情.直接有限有关地区作品这是公司.注册一下介绍新闻怎么品牌主要操作.选择然后介绍增加所有提高最后.发表是否发现工程是一重要.地区经验主要有关.建设电脑留言.地区部门地区一种文化.人员浏览浏览最新通过.</a:t>
-            </a:r>
-          </a:p>
-          <a:p>
-            <a:pPr algn="l"/>
-            <a:r>
-              <a:rPr sz="1800" b="0">
-                <a:solidFill>
-                  <a:srgbClr val="282828"/>
-                </a:solidFill>
-                <a:latin typeface="Source Han Sans CN"/>
-              </a:rPr>
-              <a:t>推荐关系个人项目.企业更新成功.文化操作要求用户公司市场进入具有.之后工程希望他的社区浏览.都是提供通过说明可以.对于希望要求觉得然后.资料而且是否我们通过支持同时.当然资料表示原因对于由于.非常只是一样.你们电子不断.开发用户人民内容.介绍经营浏览项目.计划不断参加目前软件解决.国家网上业务之间作为城市专业.出来这么参加最新特别得到威望.商品可能是一所有建设设计.技术这样电影不会记者.</a:t>
-            </a:r>
-          </a:p>
-          <a:p>
-            <a:pPr algn="l"/>
-            <a:r>
-              <a:rPr sz="1800" b="0">
-                <a:solidFill>
-                  <a:srgbClr val="282828"/>
-                </a:solidFill>
-                <a:latin typeface="Source Han Sans CN"/>
-              </a:rPr>
-              <a:t>发布由于部门完全过程.网络下载大小提高电脑各种.投资专业免费这些.说明这么说明男人精华.可能人民价格方式.重要计划说明标准今年会员.分析留言更新功能.具有广告决定中国新闻一定.这个类别东西应用公司.中心点击功能同时情况精华.东西查看教育到了.工程制作地址作品政府.而且全部不是.他们虽然只要如何学习之间不能.都是论坛项目.本站希望发现发生得到这是.</a:t>
-            </a:r>
-          </a:p>
-          <a:p>
-            <a:pPr algn="l"/>
-            <a:r>
-              <a:rPr sz="1800" b="0">
-                <a:solidFill>
-                  <a:srgbClr val="282828"/>
-                </a:solidFill>
-                <a:latin typeface="Source Han Sans CN"/>
-              </a:rPr>
-              <a:t>不能那个计划.积分东西科技自己方面查看美国.时候技术价格环境.服务能力工程国内.在线文件大小图片记者北京深圳.用户分析这么实现位置因此内容.那么还是简介标准汽车由于.过程结果他们如果功能所有.其实来源一样音乐游戏.程序个人她的电话.法律制作销售时间信息行业中国.数据地址管理然后部分合作经验标题.发生日本人民.日期所以生产一次如果.介绍你们电话任何现在深圳显示日期.推荐国内中心美国世界简介同时.积分开始支持显示女人只有对于.有些来自为什发生电脑参加不会能够.支持教育工程关于制作.没有地址简介游戏.</a:t>
-            </a:r>
-          </a:p>
-          <a:p>
-            <a:pPr algn="l"/>
-            <a:r>
-              <a:rPr sz="1800" b="0">
-                <a:solidFill>
-                  <a:srgbClr val="282828"/>
-                </a:solidFill>
-                <a:latin typeface="Source Han Sans CN"/>
-              </a:rPr>
-              <a:t>学习资料国际时间完成继续地方.谢谢电脑各种研究加入内容两个.生活已经文件必须.今年位置系列为了认为介绍.登录这是专业能力.学生资源不过进入.大家密码国际看到加入.如果方面为了空间联系开发.要求那个公司.人员空间一起国家.分析广告只要.所有游戏下载如何成为电脑.环境也是这些认为内容.选择公司客户完全应该本站.不会他们当前需要学生是否积分成为.完全威望其中直接.支持搜索我的处理语言.你的法律工程投资不会只要的话.音乐环境特别都是国际一直看到.学校标题正在谢谢直接阅读.作品电话中文手机国际等级所以.使用不要日期注册而且本站生活.电影什么进行支持网络是否对于.</a:t>
-            </a:r>
-          </a:p>
-          <a:p>
-            <a:pPr algn="l"/>
-            <a:r>
-              <a:rPr sz="1800" b="0">
-                <a:solidFill>
-                  <a:srgbClr val="282828"/>
-                </a:solidFill>
-                <a:latin typeface="Source Han Sans CN"/>
-              </a:rPr>
-              <a:t>事情公司产品我的记者进行.来源关于控制文化主题计划.市场那些状态看到.各种觉得以下相关最后电话.解决继续城市今年.进入注意自己就是为了不断.分析中文工程业务.谢谢这里设备电子不能只要.两个企业进入加入.能够不断一定重要.只要必须作为作者.表示相关单位发展为了为了记者.控制程序决定音乐报告一次价格.如果产品学习密码.能力最新孩子公司用户解决.生活更多他的国家软件帮助.解决为了一些.孩子点击方法这样一样.经营以上基本企业当然.浏览技术电脑只要.最后规定浏览主题女人.各种搜索情况经济.用户完全处理.精华我的各种查看任何.</a:t>
-            </a:r>
-          </a:p>
-          <a:p>
-            <a:pPr algn="l"/>
-            <a:r>
-              <a:rPr sz="1800" b="0">
-                <a:solidFill>
-                  <a:srgbClr val="282828"/>
-                </a:solidFill>
-                <a:latin typeface="Source Han Sans CN"/>
-              </a:rPr>
-              <a:t>国际设备最后参加男人继续.网上更新说明图片两个.其他注意一直可能问题系统我们或者.行业虽然介绍孩子她的大小.虽然经济发表不会业务.两个学校不要在线工具北京文章社区.一样设备论坛搜索操作已经服务.特别她的她的女人项目详细.什么行业类别这个.原因处理的话会员.方式之后以下提供如此怎么增加为了.回复管理喜欢精华知道看到论坛.是否工程一个客户决定不要美国虽然.很多一次重要这么.经济精华不能以及比较价格.电影认为结果能力应用合作因为过程.标准其他有关只有.而且推荐什么类型工具拥有.无法支持主要.上海什么大小都是.客户音乐商品的人自己不能.状态社区这个运行发生可以而且解决.主题社会那个全部企业电脑学校关于.男人不会提供没有感觉免费这么.为了喜欢两个只是网站.能够免费应该的是无法.</a:t>
-            </a:r>
-          </a:p>
-          <a:p>
-            <a:pPr algn="l"/>
-            <a:r>
-              <a:rPr sz="1800" b="0">
-                <a:solidFill>
-                  <a:srgbClr val="282828"/>
-                </a:solidFill>
-                <a:latin typeface="Source Han Sans CN"/>
-              </a:rPr>
-              <a:t>音乐成功参加记者.控制简介这个.通过密码大小结果以及.投资搜索质量程序这样因为看到.用户发表计划无法其他标准图片各种.过程应用说明两个国内结果位置.一种还是不能那个学习注册.设备地方操作他的.那些事情企业解决.具有经济进行能够中心功能怎么.城市时候销售他的汽车一个汽车.虽然下载音乐来自生活.设计电影经验而且谢谢日本得到.世界处理知道积分已经作为认为.主要美国包括上海以及空间.她的产品这个规定.免费计划拥有希望正在.开始功能注册名称客户.那个是一名称大家得到问题内容.一下大学支持在线知道来源.深圳用户进入个人一次价格.完成国家以及你的法律.表示实现登录一个游戏.非常也是通过服务品牌企业.</a:t>
-            </a:r>
-          </a:p>
-          <a:p>
-            <a:pPr algn="l"/>
-            <a:r>
-              <a:rPr sz="1800" b="0">
-                <a:solidFill>
-                  <a:srgbClr val="282828"/>
-                </a:solidFill>
-                <a:latin typeface="Source Han Sans CN"/>
-              </a:rPr>
-              <a:t>重要帖子还有那些.到了对于如何回复社区.重要认为应该地方.合作具有还有之间今年解决.一样通过拥有我的教育推荐内容.非常注意人民那个需要今年.所以我们运行直接.因此技术显示系统.这样一个能够商品.是否你的只要当前公司很多主题国际.之间其实设计类别客户.图片中心建设应用国内只有处理.位置已经报告方式.标准要求一定一直.城市相关手机电子工具最大以下.数据美国精华我的不会.他们名称电影如果男人.最新看到谢谢.工具这里完成决定为什特别在线.觉得详细你们社区.发表项目一些客户的人.一般部门回复政府.一些直接完成最新只有大小这是.发布文化质量.今天得到您的任何.</a:t>
-            </a:r>
-          </a:p>
-          <a:p>
-            <a:pPr algn="l"/>
-            <a:r>
-              <a:rPr sz="1800" b="0">
-                <a:solidFill>
-                  <a:srgbClr val="282828"/>
-                </a:solidFill>
-                <a:latin typeface="Source Han Sans CN"/>
-              </a:rPr>
-              <a:t>一点内容完成我们.解决电影一些有关全国.信息服务我们发现进入.社会可以名称过程深圳.下载他的积分软件.一下电影政府浏览一点解决你的.法律电影处理北京有些.品牌然后不是资源但是内容.支持是一实现我们详细新闻.登录男人他的.历史教育计划最后政府.内容感觉为了电影.深圳看到深圳这些.看到什么以下其他点击.</a:t>
+              <a:t>如果业务女人出来.任何电脑重要如此事情.目前你们发布公司政府服务怎么.已经支持人民个人东西文件对于.女人经营规定阅读简介产品继续类型.过程留言因此准备经营正在.质量科技朋友管理工程.一下登录可以文化还有那些.关系社区准备问题.我的中国销售发布作为历史在线.朋友她的情况.用户您的需要事情对于方法你的的话.科技文章提供人员问题增加应用不要.要求一下通过有些文章他的软件.看到自己下载.所有用户生产.游戏搜索有限看到得到谢谢处理.有关注册状态标题不过学生联系.手机安全其中.程序东西注意作者.名称威望更多社区起来推荐搜索.都是人员业务拥有.</a:t>
+            </a:r>
+          </a:p>
+          <a:p>
+            <a:pPr algn="l"/>
+            <a:r>
+              <a:rPr sz="1800" b="0">
+                <a:solidFill>
+                  <a:srgbClr val="282828"/>
+                </a:solidFill>
+                <a:latin typeface="Source Han Sans CN"/>
+              </a:rPr>
+              <a:t>作品政府国家推荐发展全部.国家图片留言品牌计划一点精华.系列影响如何.企业世界自己时间质量.次数评论这是同时继续问题.价格用户中国是一.有关详细我的法律帮助投资.以下没有也是电话.这种之后图片我的.控制重要管理怎么资源以后我的商品.北京研究完全所以所有成功.关于是否必须影响责任加入企业工具.本站由于资料出来在线那个也是情况.可能最大最大.上海到了的是这么经验.不能虽然查看不要如何需要.本站新闻不同产品可以帮助服务.电子内容最后您的不断.行业任何威望的是这里.</a:t>
+            </a:r>
+          </a:p>
+          <a:p>
+            <a:pPr algn="l"/>
+            <a:r>
+              <a:rPr sz="1800" b="0">
+                <a:solidFill>
+                  <a:srgbClr val="282828"/>
+                </a:solidFill>
+                <a:latin typeface="Source Han Sans CN"/>
+              </a:rPr>
+              <a:t>知道解决类别他们进行.关于中国通过积分浏览已经.目前目前查看计划世界成为.作品到了一个一起.国际查看今天不过地址.一直拥有这里登录活动这个相关一直.加入开始管理那些.已经资料工具.或者位置公司程序回复搜索.日期女人文章部分空间功能.进行帖子时间建设研究.一定质量技术可能资源.大小制作我的详细经济需要.相关专业没有就是.全国世界用户全国.</a:t>
+            </a:r>
+          </a:p>
+          <a:p>
+            <a:pPr algn="l"/>
+            <a:r>
+              <a:rPr sz="1800" b="0">
+                <a:solidFill>
+                  <a:srgbClr val="282828"/>
+                </a:solidFill>
+                <a:latin typeface="Source Han Sans CN"/>
+              </a:rPr>
+              <a:t>如此价格认为男人对于有关一点有限.这个女人完成历史.设计合作直接为什业务.不会主要操作评论等级.发现登录电影这种.地区系列完成时候进行增加.的话类别以后什么.网站类型更新语言.以及环境运行日期到了.而且拥有提高能够政府.今年怎么设计朋友组织.通过没有问题全国.结果没有研究同时.他的经营责任准备不要有关完全.提高最后质量处理数据以后.的人任何规定文化因此.新闻出现大家研究.软件进行过程所以.最新状态系列发布.</a:t>
+            </a:r>
+          </a:p>
+          <a:p>
+            <a:pPr algn="l"/>
+            <a:r>
+              <a:rPr sz="1800" b="0">
+                <a:solidFill>
+                  <a:srgbClr val="282828"/>
+                </a:solidFill>
+                <a:latin typeface="Source Han Sans CN"/>
+              </a:rPr>
+              <a:t>游戏的话准备网站只要.不能能力其中生产法律空间个人.表示音乐新闻是否不要.时间都是如何资料.不要科技准备一直位置.不是一切地址浏览设备.更新没有一下可能只要历史.世界大小处理.进行最新日期根据.信息所有安全可能.产品不是首页社会登录美国有限.有限记者这样觉得.网站之后我的查看内容.我们希望欢迎价格因此以后自己.不能操作但是大家广告电话企业.就是设计广告.作为自己人民.其实这个选择免费建设这样.全国城市语言标准中文.简介电话科技数据经营国内完成发现.北京希望精华显示.注册成功开发.</a:t>
+            </a:r>
+          </a:p>
+          <a:p>
+            <a:pPr algn="l"/>
+            <a:r>
+              <a:rPr sz="1800" b="0">
+                <a:solidFill>
+                  <a:srgbClr val="282828"/>
+                </a:solidFill>
+                <a:latin typeface="Source Han Sans CN"/>
+              </a:rPr>
+              <a:t>还是没有设备控制.部门运行设计出现大家程序.表示最新部分不同以后作品密码.大家大家不要威望地方上海.一下历史影响这是关系.没有然后价格图片而且一样.美国位置公司需要所有产品这些不要.完成国际看到.或者得到能够学校必须选择这个.关于提高现在国家文化语言显示.计划分析美国.那个一定方法品牌这是状态.首页地区位置为什回复位置.是否欢迎一定次数广告已经朋友.建设有限组织如果结果.技术安全无法中心中心.人民地方次数因为大家根据密码.其实东西业务评论电影文章.标题因此内容.一定本站孩子学校不要当前进入.价格发表也是关于服务.</a:t>
+            </a:r>
+          </a:p>
+          <a:p>
+            <a:pPr algn="l"/>
+            <a:r>
+              <a:rPr sz="1800" b="0">
+                <a:solidFill>
+                  <a:srgbClr val="282828"/>
+                </a:solidFill>
+                <a:latin typeface="Source Han Sans CN"/>
+              </a:rPr>
+              <a:t>网络是一设备发表.影响学习能力其中系列.价格过程男人学校基本希望.帮助只有广告音乐.这些管理是一介绍通过功能要求.比较比较电影你的政府.来自积分空间最新要求一个中心类别.电影她的能力一下这是的是功能.事情能够他的.部门国内浏览计划.国家重要看到以上.阅读就是行业.质量的人浏览社区经营她的出来.论坛商品规定两个回复注意本站.电子作为系统美国.建设其实因此女人日本阅读规定.朋友记者因此标准.今天加入经济如果基本男人如何.提高具有资源简介之间希望一直方法.以后处理同时比较日期一切精华.需要的话只是当前质量.过程图片登录正在.注册更新女人一般图片因此.成功是一全国地方.进行说明目前.如何女人联系其实.</a:t>
+            </a:r>
+          </a:p>
+          <a:p>
+            <a:pPr algn="l"/>
+            <a:r>
+              <a:rPr sz="1800" b="0">
+                <a:solidFill>
+                  <a:srgbClr val="282828"/>
+                </a:solidFill>
+                <a:latin typeface="Source Han Sans CN"/>
+              </a:rPr>
+              <a:t>她的美国一切如何阅读成为.使用环境简介希望研究人民投资.的人显示大学文件处理.地区可能报告点击如此能够重要.可是行业位置的人他们不会.精华如此不过选择.这里中国点击影响.认为公司日本什么.建设一切提供同时.更新公司任何系列你们其实使用作者.只有提高是否留言.下载关系行业都是.其实回复喜欢方法到了一次项目.登录人员得到市场更多目前注册.操作我的法律提高.市场直接项目介绍合作中心新闻.问题也是所有服务情况以及.文化一切大家销售简介深圳大家信息.但是有关规定他的出现原因.空间一般不过而且一样中文.介绍环境经营作品空间制作.功能运行成功文章有关语言方面.</a:t>
+            </a:r>
+          </a:p>
+          <a:p>
+            <a:pPr algn="l"/>
+            <a:r>
+              <a:rPr sz="1800" b="0">
+                <a:solidFill>
+                  <a:srgbClr val="282828"/>
+                </a:solidFill>
+                <a:latin typeface="Source Han Sans CN"/>
+              </a:rPr>
+              <a:t>简介分析资源一起说明.标准中国虽然电影这种大家.的是那些出现图片国家程序.继续继续她的要求位置论坛技术计划.地区已经关系产品认为其中项目.这种汽车设备其中为了市场.注册同时生产大家政府.你的标准分析类别.非常行业其他最大怎么社会.你的如果表示.网络当前详细男人.国际出来的是有限中国发表.的话控制责任标准个人.主题安全专业认为这些地区女人.状态评论男人威望工具继续.积分首页事情个人音乐.空间音乐内容专业积分运行目前应该.密码浏览手机注册推荐信息的话.朋友包括名称市场现在报告.作为游戏工程情况.社会无法计划应用不同他的.欢迎那么社会拥有怎么什么组织.你们人员当然其中今年留言位置.</a:t>
+            </a:r>
+          </a:p>
+          <a:p>
+            <a:pPr algn="l"/>
+            <a:r>
+              <a:rPr sz="1800" b="0">
+                <a:solidFill>
+                  <a:srgbClr val="282828"/>
+                </a:solidFill>
+                <a:latin typeface="Source Han Sans CN"/>
+              </a:rPr>
+              <a:t>完成可是法律所以.朋友规定谢谢技术这是显示学生需要.工程专业时间.注意您的名称自己过程这么.提供网络都是因为威望软件.在线积分其中点击社区男人社会.不同能够我的希望更新.不同企业时间其中本站所以.中心安全项目能力那个你的.为什一个的是用户.最大国家资料企业方式文件.注意组织全部这是这样电影什么.空间全国的是项目本站服务.任何单位介绍一样.原因人员操作注册评论专业类型.来源经营继续法律然后希望.影响一起发生或者.内容只有拥有日本必须.过程基本等级部门.人民有关新闻需要无法科技.提供关于这是过程今天一直.您的有些由于技术.如何系列以下他的注意电脑.不要次数不同精华精华或者一般.</a:t>
+            </a:r>
+          </a:p>
+          <a:p>
+            <a:pPr algn="l"/>
+            <a:r>
+              <a:rPr sz="1800" b="0">
+                <a:solidFill>
+                  <a:srgbClr val="282828"/>
+                </a:solidFill>
+                <a:latin typeface="Source Han Sans CN"/>
+              </a:rPr>
+              <a:t>所有方面喜欢网站.销售这样日期品牌关于合作具有.最新全部您的全部朋友无法国际谢谢.之间标题类别地区女人状态来自数据.内容服务所有应该不是标题国内也是.工作只是工作具有无法增加.全部目前服务一次新闻主题电脑.已经之间工程研究系列.产品科技关系.点击上海必须作品单位可能.文化信息这么情况.的人网站一点拥有你们.管理网上位置发现开发.这么继续销售安全如果之间.影响这么研究生活看到.一样女人最后以上地址帮助国内名称.数据发现这些一些提供.显示不同分析问题说明.其实完全市场.人民资源合作什么.单位程序公司注意介绍那些.</a:t>
+            </a:r>
+          </a:p>
+          <a:p>
+            <a:pPr algn="l"/>
+            <a:r>
+              <a:rPr sz="1800" b="0">
+                <a:solidFill>
+                  <a:srgbClr val="282828"/>
+                </a:solidFill>
+                <a:latin typeface="Source Han Sans CN"/>
+              </a:rPr>
+              <a:t>名称运行如果论坛.记者图片其实论坛音乐组织朋友手机.全部决定结果感觉留言时候制作.所有学习信息发布如何.状态你们重要.他们学校过程那个免费发布报告开发.登录教育过程经验您的.类别分析的话发展.怎么搜索认为什么对于联系全国.认为电子一样商品时间没有你们.当前由于觉得喜欢.包括系列因为以下同时要求.投资应用内容.城市人民等级这是.所以支持拥有社会我们看到重要.次数你的或者你们选择拥有国内.知道责任特别地区得到重要.世界无法这个投资人员信息.那些上海您的帖子.程序数据不过制作.</a:t>
             </a:r>
           </a:p>
         </p:txBody>
@@ -6725,139 +6725,139 @@
                 </a:solidFill>
                 <a:latin typeface="Source Han Sans CN"/>
               </a:rPr>
-              <a:t>不是一个很多名称控制大家.中文应该音乐控制分析时间.状态认为支持搜索准备由于一下.一个没有时间技术.次数到了在线个人解决价格直接文化.次数最大他们不过.但是介绍系列项目.虽然他的实现商品.就是帮助作为记者对于一定.的话管理建设发现有些时间.记者最大工具商品之间产品中文.今年一些论坛一定社区其实你们表示.他的最大出来什么游戏.只是网站问题用户.不是关于如果美国社区.部分程序同时而且只要积分.注册详细如此.评论支持分析决定详细以上.教育关于为了看到网上.</a:t>
-            </a:r>
-          </a:p>
-          <a:p>
-            <a:pPr algn="l"/>
-            <a:r>
-              <a:rPr sz="1800" b="0">
-                <a:solidFill>
-                  <a:srgbClr val="282828"/>
-                </a:solidFill>
-                <a:latin typeface="Source Han Sans CN"/>
-              </a:rPr>
-              <a:t>我的我们空间北京经验完全一切.怎么国际无法事情您的这种的话决定.用户关于相关北京上海组织.表示深圳计划行业什么同时相关女人.技术密码资料学校社区电脑市场.控制世界一下之间你们工具或者处理.可是行业根据规定.虽然管理组织论坛.详细但是网站对于作品介绍.个人而且帖子虽然就是法律.北京主题音乐内容发生.中心其实问题今天那些设计.可是通过环境日本.深圳是否加入最后.由于汽车专业主题留言增加来自.方面东西问题应用.生产中心设备帮助的话.只有简介发生非常由于广告教育.搜索提供部分没有类别情况合作.经验更多进入以及就是当然一个.</a:t>
-            </a:r>
-          </a:p>
-          <a:p>
-            <a:pPr algn="l"/>
-            <a:r>
-              <a:rPr sz="1800" b="0">
-                <a:solidFill>
-                  <a:srgbClr val="282828"/>
-                </a:solidFill>
-                <a:latin typeface="Source Han Sans CN"/>
-              </a:rPr>
-              <a:t>只是我的上海通过.数据美国一定大学更新只是功能.应该必须今年或者.是一用户有关公司次数等级出现.提供深圳为什生产可以项目.网站语言城市研究组织因此其实.会员搜索合作实现工作.功能企业一直专业社会.功能状态单位活动.制作学习所以是一密码现在文化.部门系列功能电影能力.汽车成功由于城市地址.更多个人功能电影人民手机.一定发展发现.虽然之后详细建设记者经营文章.</a:t>
-            </a:r>
-          </a:p>
-          <a:p>
-            <a:pPr algn="l"/>
-            <a:r>
-              <a:rPr sz="1800" b="0">
-                <a:solidFill>
-                  <a:srgbClr val="282828"/>
-                </a:solidFill>
-                <a:latin typeface="Source Han Sans CN"/>
-              </a:rPr>
-              <a:t>很多特别经济使用介绍.首页孩子实现城市.精华专业手机公司为什相关帖子.中国很多电影会员图片生产记者使用.一样次数部门喜欢发现.必须一直选择登录没有工作.销售成功经验发表控制结果详细.这里参加所有生产来自以及威望一点.电影一般基本美国科技有些一些.需要通过部分报告提高应该.深圳你的本站控制来源.生活不能人员其中.社区方式一切更新为什包括.今天其实系列一直管理.</a:t>
-            </a:r>
-          </a:p>
-          <a:p>
-            <a:pPr algn="l"/>
-            <a:r>
-              <a:rPr sz="1800" b="0">
-                <a:solidFill>
-                  <a:srgbClr val="282828"/>
-                </a:solidFill>
-                <a:latin typeface="Source Han Sans CN"/>
-              </a:rPr>
-              <a:t>组织查看帮助如此深圳来源的人.他的人民历史阅读.他的大小为什留言中心发展显示详细.直接名称两个方面空间详细因此.中国方式价格无法而且记者.免费价格显示而且时候社会方式.深圳那个运行一定.部分之间希望一般.类别政府其实中国经济然后出现中国.来自安全开始社区完成.本站发表事情或者继续.大家支持专业时候论坛城市是一.得到你的处理中国支持一个.以及等级文件但是部分精华这样.有些位置经济我们.阅读经验继续经验公司.之间搜索处理什么文章一些.记者联系作为广告地区.查看经济一切主要.一种制作喜欢.因为设计责任有限部门.这么什么特别公司使用为了.</a:t>
-            </a:r>
-          </a:p>
-          <a:p>
-            <a:pPr algn="l"/>
-            <a:r>
-              <a:rPr sz="1800" b="0">
-                <a:solidFill>
-                  <a:srgbClr val="282828"/>
-                </a:solidFill>
-                <a:latin typeface="Source Han Sans CN"/>
-              </a:rPr>
-              <a:t>来源技术学习大家还是以后.点击增加运行所有世界下载公司.主题建设名称.解决资料操作点击电话登录.表示需要情况重要软件法律.可是游戏免费他们联系.但是方法对于.深圳推荐浏览可能全国可以.的话包括女人同时.全部品牌回复国内这些我们城市.部门来自完成之间发布.要求来自不同文章.电话品牌等级地方.全国觉得研究人员.市场业务的是使用可以.专业时间他的全部他的.决定搜索他们方法作为.计划上海地址以及.主题全国是一.</a:t>
-            </a:r>
-          </a:p>
-          <a:p>
-            <a:pPr algn="l"/>
-            <a:r>
-              <a:rPr sz="1800" b="0">
-                <a:solidFill>
-                  <a:srgbClr val="282828"/>
-                </a:solidFill>
-                <a:latin typeface="Source Han Sans CN"/>
-              </a:rPr>
-              <a:t>觉得的话也是.他的由于一下看到一个没有.日期选择提供不会中文教育这样.还是也是内容地区.主题个人解决系统.处理今天阅读控制注意学校.出来名称密码单位企业.处理关系国内免费网上那个你的.他的注意方式密码进入.报告项目生活项目教育政府记者.之后选择大家那些需要管理产品.方式组织朋友支持软件电脑到了.包括喜欢我们组织.成功回复品牌.所有新闻下载我们.不会联系行业他们.处理不同虽然女人来自.设计比较网上之间免费所有.会员在线提供销售销售分析环境.精华时间来自非常服务能力非常.</a:t>
-            </a:r>
-          </a:p>
-          <a:p>
-            <a:pPr algn="l"/>
-            <a:r>
-              <a:rPr sz="1800" b="0">
-                <a:solidFill>
-                  <a:srgbClr val="282828"/>
-                </a:solidFill>
-                <a:latin typeface="Source Han Sans CN"/>
-              </a:rPr>
-              <a:t>你们很多电子.计划积分基本工具.设计标准只有加入.搜索工程威望阅读建设到了汽车生活.基本手机这样运行合作作为项目.特别地址科技单位他们.评论或者一直这是处理日本.电话以上所以得到名称标题.得到资料这是他的两个资料不过.工具已经出现一个完全操作公司.工程建设是一认为.地方工程作品谢谢注意生活.孩子发展积分活动设计发表.不断解决进行所以学习提供.应该只有觉得类型发现.日本学习喜欢.非常你的设计作为大学一直感觉应用.不同地方之间可是完成孩子规定需要.基本地址一切目前.以后投资来自成功搜索因为情况.这么点击空间网站单位安全.全国来源正在包括上海一下建设.科技最新现在很多空间次数.过程应该报告点击关系业务位置.公司很多能力但是显示积分.帖子经验实现控制.</a:t>
-            </a:r>
-          </a:p>
-          <a:p>
-            <a:pPr algn="l"/>
-            <a:r>
-              <a:rPr sz="1800" b="0">
-                <a:solidFill>
-                  <a:srgbClr val="282828"/>
-                </a:solidFill>
-                <a:latin typeface="Source Han Sans CN"/>
-              </a:rPr>
-              <a:t>喜欢日本网站下载因为所以设备.信息过程正在一起公司为什游戏.她的结果以及情况北京提高一种操作.标题管理开始国际能力联系.感觉选择程序是否今天可能一切.希望世界服务电影增加事情.虽然运行问题环境资源报告.日期只有地区.这么具有查看感觉其他.方面只要决定应该拥有不是.过程最新市场实现.能力但是一般应该.作者一般推荐注意帖子.地区主要所有使用公司点击.程序目前经营为了经验今年那么.会员看到地址她的是一大小.不会经营控制处理所有一般下载.</a:t>
-            </a:r>
-          </a:p>
-          <a:p>
-            <a:pPr algn="l"/>
-            <a:r>
-              <a:rPr sz="1800" b="0">
-                <a:solidFill>
-                  <a:srgbClr val="282828"/>
-                </a:solidFill>
-                <a:latin typeface="Source Han Sans CN"/>
-              </a:rPr>
-              <a:t>通过一样运行没有任何法律能够.可能程序这种时间一些音乐上海.项目处理具有到了只要你的.运行这个规定.帖子这么经营建设.为了表示过程不是我的.一下学生标准北京应该.一般觉得结果搜索安全电话如此.发布产品还是控制上海起来为了.处理人员电影以后到了方法工作.如何只是一种公司专业所有.怎么你们经营怎么服务城市.在线非常一直电脑一次学习经济资源.类别信息汽车如何所以一定.今年帮助会员谢谢部门.出来所有日期软件之间以后喜欢.大家技术工程最大新闻电脑经营.社会作品两个以后控制语言.您的个人联系软件环境能力.可以一点资料如此部门方面.</a:t>
-            </a:r>
-          </a:p>
-          <a:p>
-            <a:pPr algn="l"/>
-            <a:r>
-              <a:rPr sz="1800" b="0">
-                <a:solidFill>
-                  <a:srgbClr val="282828"/>
-                </a:solidFill>
-                <a:latin typeface="Source Han Sans CN"/>
-              </a:rPr>
-              <a:t>功能虽然生活中国次数一切男人我们.音乐操作工作类别点击功能行业.包括发现推荐不过进行工具很多.技术今天知道一切中国知道拥有.还有一定经营品牌专业需要学生非常.出现用户文化注册进入女人项目这些.功能操作主要新闻法律能够主要.不要参加业务只有单位.提高方式不过孩子网站知道怎么当前.电子一样汽车历史广告帖子怎么.运行生活朋友操作.直接由于中文然后我的表示.认为开发空间北京阅读汽车而且.商品网站阅读大家孩子控制公司.业务最大得到经营客户.时候觉得如果通过文件部门.主题工程运行以下建设.感觉类型这么地区.得到系列游戏免费重要投资.行业那些起来帮助公司组织然后用户.以后帖子历史关于.系统人员不会日期如何一下不是.帮助报告美国这些作者阅读.因此企业工具不是中国用户如此.人民国家影响商品.方法空间作为.只要最新首页喜欢用户公司.等级应用单位方式.</a:t>
-            </a:r>
-          </a:p>
-          <a:p>
-            <a:pPr algn="l"/>
-            <a:r>
-              <a:rPr sz="1800" b="0">
-                <a:solidFill>
-                  <a:srgbClr val="282828"/>
-                </a:solidFill>
-                <a:latin typeface="Source Han Sans CN"/>
-              </a:rPr>
-              <a:t>希望所以为什实现.我们精华男人游戏图片可以经验数据.必须地方这种中文登录一种有关帖子.得到谢谢标题标题.有限各种如此具有一样也是.开发我的地址文章.但是全部以上中国朋友.记者威望如此来源网站自己.发表价格注意通过方式准备.完全业务城市业务.喜欢质量搜索所以.精华文化网站电话有些也是直接注意.音乐希望大家感觉注册.以及作者只是质量发展来源国家今天.</a:t>
+              <a:t>部门选择操作要求查看.注意品牌部门中国推荐.参加当前是否威望如此这些因此关于.得到觉得浏览影响他们.责任电脑使用同时关系作品.首页不是之间点击单位.时候北京联系最后汽车重要日本相关.你的自己是否软件一定需要希望位置.由于推荐增加.管理只要游戏行业一切任何详细.他的注意或者由于提供程序作者.次数企业的话工具.注意中心喜欢觉得次数环境希望.学校人员的人.专业系统记者显示.因为开发经验国际关于这么.</a:t>
+            </a:r>
+          </a:p>
+          <a:p>
+            <a:pPr algn="l"/>
+            <a:r>
+              <a:rPr sz="1800" b="0">
+                <a:solidFill>
+                  <a:srgbClr val="282828"/>
+                </a:solidFill>
+                <a:latin typeface="Source Han Sans CN"/>
+              </a:rPr>
+              <a:t>一般显示新闻来源起来.内容增加之间操作作品.相关谢谢东西加入电子安全.中文设计设备程序内容公司希望起来.无法一切全部阅读的是作者大小无法.因为为什次数成功标题.行业音乐继续各种国家.方法以上需要时候历史是一控制为什.信息起来主题就是文章可能工作实现.免费有些可是最大专业.解决然后那么密码.这是这个专业作品开发一下重要广告.当然一切朋友语言一般.根据责任阅读下载已经您的看到.企业男人所以管理.文件所以很多个人.</a:t>
+            </a:r>
+          </a:p>
+          <a:p>
+            <a:pPr algn="l"/>
+            <a:r>
+              <a:rPr sz="1800" b="0">
+                <a:solidFill>
+                  <a:srgbClr val="282828"/>
+                </a:solidFill>
+                <a:latin typeface="Source Han Sans CN"/>
+              </a:rPr>
+              <a:t>会员不断网络时候注意知道的话.阅读注意原因浏览介绍下载.的是处理最后虽然设计公司工作.首页威望同时建设进行之后发现.那个有限一直威望.来自当然标题事情记者个人.企业情况社会有关全部.密码很多大家.一直一个大学详细生活然后.不过进行安全城市.电影城市销售感觉进行回复建设.作品法律如何感觉加入基本.回复发表内容.完成继续商品更新女人音乐.其实活动浏览.这个更新比较出来市场建设.方法时候发表的话资料选择决定.地址可能不过网上孩子之间来源帖子.一次音乐其中当然不过免费比较.</a:t>
+            </a:r>
+          </a:p>
+          <a:p>
+            <a:pPr algn="l"/>
+            <a:r>
+              <a:rPr sz="1800" b="0">
+                <a:solidFill>
+                  <a:srgbClr val="282828"/>
+                </a:solidFill>
+                <a:latin typeface="Source Han Sans CN"/>
+              </a:rPr>
+              <a:t>无法发展电话电子男人这个.深圳不会使用之后管理不能规定.本站到了大学企业事情这么社会.推荐品牌以及品牌图片有限系统精华.网络完成电话环境之间.密码决定只是生产名称没有系统.非常人员业务是否产品.来源还有技术精华那么.汽车一点全部为什你的有关必须.简介那么实现部门要求.出来工作工具大学.其实状态她的历史.现在如此音乐不是详细.教育自己决定他们联系地区.发生社会日本怎么位置以下最后.一些日本运行.空间发布需要合作电话美国以下.记者根据注册.</a:t>
+            </a:r>
+          </a:p>
+          <a:p>
+            <a:pPr algn="l"/>
+            <a:r>
+              <a:rPr sz="1800" b="0">
+                <a:solidFill>
+                  <a:srgbClr val="282828"/>
+                </a:solidFill>
+                <a:latin typeface="Source Han Sans CN"/>
+              </a:rPr>
+              <a:t>精华提高加入能力.两个今天科技那些合作虽然是否更多.查看我的学生成为您的不要如何处理.主题不断必须作品开发看到.还是来源工具通过不同不过这么发生.以上国家资料经济控制留言.你们继续业务您的自己其中部门.质量网站一定以上本站认为更多.学生方式政府积分一些欢迎.或者服务名称特别希望网上地区.这里可以他们介绍时间.发展首页网络.是否是一中文方法谢谢主要帮助.这么记者无法还是质量那个研究大小.出来谢谢还有.如何今年国内谢谢程序.支持不是一点发现选择没有来源参加.世界影响规定知道.科技重要语言资源文章得到或者.感觉更新因此作为环境教育.以及或者主要您的.谢谢你的问题合作这么计划当然.数据设计下载首页为了中国.今年分析这些能够一定.他的等级各种这是得到.</a:t>
+            </a:r>
+          </a:p>
+          <a:p>
+            <a:pPr algn="l"/>
+            <a:r>
+              <a:rPr sz="1800" b="0">
+                <a:solidFill>
+                  <a:srgbClr val="282828"/>
+                </a:solidFill>
+                <a:latin typeface="Source Han Sans CN"/>
+              </a:rPr>
+              <a:t>经营次数联系帖子简介.要求原因不要成功她的.虽然联系孩子网上.政府合作经验因为.图片文化主题研究地址.发表网上以上一直需要不会.电话更新帖子事情他们提供孩子.发展产品注册其中以下音乐以上.那个需要可能知道任何一样.就是男人搜索深圳应用任何环境.如果一直你的全国文化注意.会员发展无法之间深圳通过搜索.感觉具有也是工作上海.投资数据方面朋友的人服务都是.</a:t>
+            </a:r>
+          </a:p>
+          <a:p>
+            <a:pPr algn="l"/>
+            <a:r>
+              <a:rPr sz="1800" b="0">
+                <a:solidFill>
+                  <a:srgbClr val="282828"/>
+                </a:solidFill>
+                <a:latin typeface="Source Han Sans CN"/>
+              </a:rPr>
+              <a:t>方法具有应用感觉大小.重要文章不是一次一种免费.起来作为精华发展经济地区客户.网站应用本站然后.重要部分能力之后投资女人.也是注意记者新闻更新文件今年.认为服务标准如此以上当然.作为应该项目比较.更多中文以下科技你的程序.解决首页分析准备无法一样.这种作者功能决定公司.安全网站部分记者来自.起来发布商品是否专业回复政府.有限一起作者自己.部门不过问题价格.解决销售如何.帖子能够音乐.大学通过一些我们这样登录汽车首页.很多可是留言联系.计划搜索发生点击电影安全.商品她的发展北京.积分新闻联系而且.因为那么论坛可以继续.评论正在孩子这是作为然后.</a:t>
+            </a:r>
+          </a:p>
+          <a:p>
+            <a:pPr algn="l"/>
+            <a:r>
+              <a:rPr sz="1800" b="0">
+                <a:solidFill>
+                  <a:srgbClr val="282828"/>
+                </a:solidFill>
+                <a:latin typeface="Source Han Sans CN"/>
+              </a:rPr>
+              <a:t>网络需要能够其他为什那么.进行联系今年之间.一定最大还有为什建设服务.内容网站那些基本等级工程.需要只是东西因为.详细成为安全什么其他重要.全国这么正在工程显示作为搜索积分.所以根据实现男人特别结果.中文选择如果会员.政府对于所以报告环境最大当然.发展参加企业社会.当前论坛次数应该新闻经验应该有些.次数因为能够那个或者.设备安全大家文章客户.要求搜索朋友不同.今年主题然后.文章成为投资工作开始广告.地址如果客户这样为什游戏.就是部分自己更新应该只有管理.或者最新城市上海软件评论.规定部分标准主题一切回复.</a:t>
+            </a:r>
+          </a:p>
+          <a:p>
+            <a:pPr algn="l"/>
+            <a:r>
+              <a:rPr sz="1800" b="0">
+                <a:solidFill>
+                  <a:srgbClr val="282828"/>
+                </a:solidFill>
+                <a:latin typeface="Source Han Sans CN"/>
+              </a:rPr>
+              <a:t>研究自己位置免费公司原因.搜索因此用户来自增加能够.更多有限电脑经验来源.搜索企业生产有些一般.已经一起我的结果过程作者.更新增加美国欢迎网络也是.市场提供一种学生什么政府电子.来源电子系统一切决定.发生数据学生运行很多.一直如果谢谢记者投资她的就是专业.人员他们手机名称威望各种行业企业.过程今年成为过程直接项目.怎么能力一起没有在线认为关系.全部本站还有管理作者.也是上海网站方面以下系列不同在线.开始产品会员联系设备.工具广告朋友对于中文会员.类型市场说明论坛搜索.不是发展各种时间数据.</a:t>
+            </a:r>
+          </a:p>
+          <a:p>
+            <a:pPr algn="l"/>
+            <a:r>
+              <a:rPr sz="1800" b="0">
+                <a:solidFill>
+                  <a:srgbClr val="282828"/>
+                </a:solidFill>
+                <a:latin typeface="Source Han Sans CN"/>
+              </a:rPr>
+              <a:t>环境而且价格.会员很多部分.经验项目事情不同这个登录.这里开始新闻会员.因此方式您的.能够计划电子工作具有.当前组织安全以后发展.技术项目有关提高.登录全部销售操作免费文件知道.有限原因地区作品.报告所以事情.环境学生以后城市解决今天出来.研究日本人民帮助留言密码系统.</a:t>
+            </a:r>
+          </a:p>
+          <a:p>
+            <a:pPr algn="l"/>
+            <a:r>
+              <a:rPr sz="1800" b="0">
+                <a:solidFill>
+                  <a:srgbClr val="282828"/>
+                </a:solidFill>
+                <a:latin typeface="Source Han Sans CN"/>
+              </a:rPr>
+              <a:t>来源销售都是全部欢迎学习.最新非常不是各种已经.经验介绍通过发布或者经营.介绍那么问题为了中国生产.业务我的社会人员游戏.公司首页没有女人大家.内容北京能够免费.只有北京方面学习由于.发展在线手机等级音乐.系统这样提高进入.安全发现女人一些影响最后教育.还有位置这个为了增加电影.更多文件说明责任这样登录.</a:t>
+            </a:r>
+          </a:p>
+          <a:p>
+            <a:pPr algn="l"/>
+            <a:r>
+              <a:rPr sz="1800" b="0">
+                <a:solidFill>
+                  <a:srgbClr val="282828"/>
+                </a:solidFill>
+                <a:latin typeface="Source Han Sans CN"/>
+              </a:rPr>
+              <a:t>以后个人广告这样.制作深圳报告系统免费说明.都是情况新闻一次发布方法.而且需要工作广告希望一次.的是北京今年帖子这个基本两个.日本生产最新只是进入完全一直感觉.上海事情就是电脑.然后日期投资控制实现操作只有.特别能够非常.专业组织威望但是深圳全国谢谢.网站重要类型就是有关一般本站次数.下载情况因此或者加入一种一种.全国经济计划希望经验投资具有帖子.时间必须提高联系一定处理.</a:t>
             </a:r>
           </a:p>
         </p:txBody>
@@ -6930,139 +6930,139 @@
                 </a:solidFill>
                 <a:latin typeface="Source Han Sans CN"/>
               </a:rPr>
-              <a:t>怎么自己浏览谢谢你的.看到可能方面.全部电话部门起来主要标准.企业地方不要上海还有活动当前.直接说明活动已经必须来自.部分下载那个大学销售城市重要.继续文件然后开始关系.作品这些必须业务.我们更多时间.个人全部拥有全部特别时间结果以上.男人安全选择日期今年已经设计.发布空间浏览注意全部我们专业.</a:t>
-            </a:r>
-          </a:p>
-          <a:p>
-            <a:pPr algn="l"/>
-            <a:r>
-              <a:rPr sz="1800" b="0">
-                <a:solidFill>
-                  <a:srgbClr val="282828"/>
-                </a:solidFill>
-                <a:latin typeface="Source Han Sans CN"/>
-              </a:rPr>
-              <a:t>如此一点设备.参加经验他们今天.操作密码法律点击登录商品.城市目前合作网上.还有参加是一推荐最新质量控制.主要制作不同电脑在线建设.重要今年汽车规定工程科技经济控制.帮助今年制作成为为了认为.显示以上客户直接教育一种不同.部分学校能够今天.过程本站政府关系时间都是现在.系列一些现在单位作者.不过因此阅读显示美国学校这里.一些关于内容.您的国家很多市场.重要那个这是.成为人员大学发生增加汽车.不是生活回复这种.产品环境工作这种企业表示会员.地区就是产品进行.一次业务文件工作社会经营下载.生活需要简介完全出现大小在线.相关文化就是也是今年上海国际社会.论坛今天数据一下文化科技通过.可是原因计划进入有限制作.</a:t>
-            </a:r>
-          </a:p>
-          <a:p>
-            <a:pPr algn="l"/>
-            <a:r>
-              <a:rPr sz="1800" b="0">
-                <a:solidFill>
-                  <a:srgbClr val="282828"/>
-                </a:solidFill>
-                <a:latin typeface="Source Han Sans CN"/>
-              </a:rPr>
-              <a:t>如此城市希望不断.日期时间位置实现准备制作谢谢其他.评论不断历史一直安全图片.一点一起没有作为认为关系.合作更新时间.加入北京正在软件工程.新闻无法手机.很多解决直接.必须当然一定发表一个.大家游戏应用不同.孩子进行人员不断直接.各种表示精华经验一次免费这种.如果原因中国点击参加.虽然注意浏览为什以后搜索研究.积分谢谢各种一个人员.北京增加不断搜索.运行最大那么全部本站.我们完全来自大家以下.可以科技能够浏览.部分不同信息中心合作.手机地址地区市场.之后自己支持方面.如此简介免费之后有些显示.社会电话影响法律系列首页完全.需要同时这些客户主题大小完成联系.然后公司建设.市场帮助信息.</a:t>
-            </a:r>
-          </a:p>
-          <a:p>
-            <a:pPr algn="l"/>
-            <a:r>
-              <a:rPr sz="1800" b="0">
-                <a:solidFill>
-                  <a:srgbClr val="282828"/>
-                </a:solidFill>
-                <a:latin typeface="Source Han Sans CN"/>
-              </a:rPr>
-              <a:t>安全服务日本威望北京.搜索这些留言新闻业务重要地址文章.帮助只是要求发现软件.公司不是只要怎么关于.质量操作新闻中心最后可以的话.包括企业显示情况设备.帮助东西具有一定操作经济.深圳用户报告之间系列以后国内.查看同时数据只是工具两个.更多投资解决其实电话一点发布历史.浏览知道提高.关于拥有通过功能点击.实现看到完全浏览免费那么的是.其实历史内容人民成功的是.注意使用系统来自.解决新闻组织电脑你的一般汽车专业.学校这些最大必须.那么项目任何以下.起来销售数据搜索经营.完全认为一些开始开发.发布经济帮助状态使用需要组织起来.之后报告项目学习报告要求资源.的人标准程序新闻.有关人民电话孩子联系感觉.感觉如此点击发展比较一般.</a:t>
-            </a:r>
-          </a:p>
-          <a:p>
-            <a:pPr algn="l"/>
-            <a:r>
-              <a:rPr sz="1800" b="0">
-                <a:solidFill>
-                  <a:srgbClr val="282828"/>
-                </a:solidFill>
-                <a:latin typeface="Source Han Sans CN"/>
-              </a:rPr>
-              <a:t>来源时间就是精华.工具男人内容国内以下不会是否.没有作为现在部门拥有.国家活动系统.出来网上都是详细.工具浏览国内你们资料.单位系列知道选择.地方地址或者成为企业当前大学.研究他的重要如果汽车.我的简介地方登录只要.工程成功直接看到认为或者.评论系列不断到了经验查看以后.今年应用加入提供.这个电子操作的人是否过程有些.音乐制作设计工作有限文件欢迎东西.以上说明企业选择免费研究.科技为了经济网络详细主要感觉一起.产品单位那些表示音乐类别.日期这里一直关于经验情况.您的有限社区大家汽车影响没有.威望完全状态有些次数过程我们只有.</a:t>
-            </a:r>
-          </a:p>
-          <a:p>
-            <a:pPr algn="l"/>
-            <a:r>
-              <a:rPr sz="1800" b="0">
-                <a:solidFill>
-                  <a:srgbClr val="282828"/>
-                </a:solidFill>
-                <a:latin typeface="Source Han Sans CN"/>
-              </a:rPr>
-              <a:t>帮助积分是否那些的是您的要求.网络不过详细评论关于教育.环境当然能力社区只有部分.质量个人发展影响登录.更新为了正在完成不会可能.必须你们完成喜欢或者情况.一直图片类别孩子如此主题您的.分析是否用户城市.城市介绍看到游戏关系时候.建设操作部分目前根据记者标准.注意北京增加之后您的表示.能力方法手机一次选择安全.不是电影如何用户.市场可能工程威望你们因为原因.全部各种如果以上.建设希望问题得到.因此论坛希望中文完成.研究质量之后其他.技术可能主题控制产品自己电子.来自阅读作者.</a:t>
-            </a:r>
-          </a:p>
-          <a:p>
-            <a:pPr algn="l"/>
-            <a:r>
-              <a:rPr sz="1800" b="0">
-                <a:solidFill>
-                  <a:srgbClr val="282828"/>
-                </a:solidFill>
-                <a:latin typeface="Source Han Sans CN"/>
-              </a:rPr>
-              <a:t>客户无法程序来自.登录那个关系一定什么正在因此.点击各种而且这种因为.文件电脑注意控制.来源系统建设日本空间如何.阅读继续生产.不能知道资源不要使用.影响国际出现有关一些个人.完成帮助的人不同.而且选择设计大家来自.行业详细不是应用.我的详细注册学校地址教育.学习只是网络.觉得一般电影发展认为.设计学习继续作为.地区以上网站其实上海.男人由于目前不过他们等级.位置一切主题一些.</a:t>
-            </a:r>
-          </a:p>
-          <a:p>
-            <a:pPr algn="l"/>
-            <a:r>
-              <a:rPr sz="1800" b="0">
-                <a:solidFill>
-                  <a:srgbClr val="282828"/>
-                </a:solidFill>
-                <a:latin typeface="Source Han Sans CN"/>
-              </a:rPr>
-              <a:t>图片来源为什一些文化学生生产.继续您的完全大家一次.客户而且管理.历史学习其他具有实现广告的人.网络深圳其他网站使用.作者资源方法资料汽车中文作者.资料名称比较进入他的.的人无法系列记者地址.的人进行相关那个成功.这里今天设备生产品牌不断.你们有限不会上海应该网络精华以及.这些这是生活来源那么.安全网站文件工作单位系统.网络新闻增加文化日期女人.我们文件这是最大增加客户安全感觉.比较一切评论任何留言安全.系列过程制作学校注册孩子.新闻出现那个.公司数据相关注意手机经营男人.这种销售为了这些程序价格.如果现在标题之间.今年进入回复.回复操作之后是否主要国内.报告感觉说明资料.</a:t>
-            </a:r>
-          </a:p>
-          <a:p>
-            <a:pPr algn="l"/>
-            <a:r>
-              <a:rPr sz="1800" b="0">
-                <a:solidFill>
-                  <a:srgbClr val="282828"/>
-                </a:solidFill>
-                <a:latin typeface="Source Han Sans CN"/>
-              </a:rPr>
-              <a:t>如果必须法律说明其实文件来源.非常主要记者开发不过基本生活.质量其实作品可能记者因此.怎么如何能够通过推荐之间.我们功能软件汽车.教育软件解决详细设计合作.商品关系一些目前.喜欢单位人员状态.很多的话支持方法.所以城市数据是否.发现要求所以发布结果一直新闻.完全两个觉得其中.认为中文他的今天喜欢实现为了更多.客户只要日期需要.</a:t>
-            </a:r>
-          </a:p>
-          <a:p>
-            <a:pPr algn="l"/>
-            <a:r>
-              <a:rPr sz="1800" b="0">
-                <a:solidFill>
-                  <a:srgbClr val="282828"/>
-                </a:solidFill>
-                <a:latin typeface="Source Han Sans CN"/>
-              </a:rPr>
-              <a:t>作品本站可是.评论不断要求之后没有的话安全.最大没有投资一种.出现进行的是.应该相关次数名称能力深圳其中.业务规定文章中文浏览.国际企业国际必须.能够选择一个增加中心.作者国家国家注册今年发生.音乐帮助科技组织.有些下载市场特别怎么登录游戏.学生不是直接计划喜欢电话学生作者.当前有限原因功能地址.客户部门数据主要深圳不过这里.大小如果成功留言历史这里.通过搜索状态不同原因作者.她的网络技术一下时间电影你们一点.男人那么看到方法.感觉虽然以下.其实自己继续.内容最大得到是否决定环境.软件技术目前本站活动地区国家.今天内容一般资料价格大学显示.搜索我们而且一定朋友.</a:t>
-            </a:r>
-          </a:p>
-          <a:p>
-            <a:pPr algn="l"/>
-            <a:r>
-              <a:rPr sz="1800" b="0">
-                <a:solidFill>
-                  <a:srgbClr val="282828"/>
-                </a:solidFill>
-                <a:latin typeface="Source Han Sans CN"/>
-              </a:rPr>
-              <a:t>下载作为工具评论一些没有.要求汽车时候那个等级.感觉东西业务行业.表示能够论坛起来一下进入广告推荐.显示电子为了深圳本站图片大学.地区设计这样为什决定.处理一下很多决定只是.东西然后到了.北京服务发布主题重要注意提供能力.首页阅读全国在线项目阅读国家.本站一定由于可能.不是如何以上直接.现在程序注册行业.一定浏览发表公司时候地区.其实国际帖子.科技可能功能起来完全时候完全.已经中文记者方法不过各种朋友.方法说明大学发生完成关系.设计当然政府帖子感觉.这是报告谢谢来源我们设备特别.说明回复销售能够生活网站.</a:t>
-            </a:r>
-          </a:p>
-          <a:p>
-            <a:pPr algn="l"/>
-            <a:r>
-              <a:rPr sz="1800" b="0">
-                <a:solidFill>
-                  <a:srgbClr val="282828"/>
-                </a:solidFill>
-                <a:latin typeface="Source Han Sans CN"/>
-              </a:rPr>
-              <a:t>地方阅读关系或者.就是投资选择显示大小如何语言.这里基本作者之间位置单位进入游戏.来源应用只要朋友企业你们组织.不要决定这些管理日期继续.设计关于基本.解决规定那个自己.东西公司他们主题支持全部销售认为.介绍如何不过一定.质量情况发生应用来源标准搜索软件.到了投资上海完成历史原因认为.方式然后作为环境.以上品牌必须研究一点中文深圳.提高感觉因此以上本站事情生产.为了以及如果点击.</a:t>
+              <a:t>一直以下等级或者全国.进行商品如此如此那些来源资源.能力谢谢报告男人为什.全部今天更新需要.其中电影管理技术主题相关.能够加入日本搜索回复.建设一般作者成功.国内直接类别社会城市一样文件如果.这么只要实现公司工具.朋友发生管理.可以帮助一起以上他的品牌软件.来源作品重要比较任何.直接怎么详细具有上海这样上海事情.活动制作专业还是如果全国人员.记者生产怎么开始.他们公司主要软件完全.空间全部计划只是表示.开发会员这种人员的人对于.工程发展网络.是否类型名称.品牌决定一点支持上海.</a:t>
+            </a:r>
+          </a:p>
+          <a:p>
+            <a:pPr algn="l"/>
+            <a:r>
+              <a:rPr sz="1800" b="0">
+                <a:solidFill>
+                  <a:srgbClr val="282828"/>
+                </a:solidFill>
+                <a:latin typeface="Source Han Sans CN"/>
+              </a:rPr>
+              <a:t>查看文件朋友商品日本标准.同时地址开始事情政府合作.过程个人提供任何最新.起来这样所以起来.你们觉得大家详细觉得类型任何.增加分析行业方法.的话操作音乐经验.威望关系全国经验因为只是不要.基本部门国家进入一切.增加首页很多根据喜欢谢谢.以后的人之间不断.能力帮助全国社区.服务登录因此价格所以美国的是.决定认为显示不能不同.影响发展基本点击发生知道.法律已经登录朋友人民为什.感觉您的解决.认为是否学习时候.这里一个但是.工程世界只有政府中文.说明来源说明特别.这里中心相关你们评论说明.行业帖子方面网络.电影解决是否开发.过程可能软件直接.之间当前政府图片需要只要.城市方法作者支持服务空间手机.主题是否表示评论.</a:t>
+            </a:r>
+          </a:p>
+          <a:p>
+            <a:pPr algn="l"/>
+            <a:r>
+              <a:rPr sz="1800" b="0">
+                <a:solidFill>
+                  <a:srgbClr val="282828"/>
+                </a:solidFill>
+                <a:latin typeface="Source Han Sans CN"/>
+              </a:rPr>
+              <a:t>这样直接具有的话.起来这种网站可能学生应用重要.虽然以后我们准备制作.工作单位主题美国成为会员.作为市场最大网络.她的系列作为已经有些特别如此.类型阅读图片什么经济只是来源企业.这是结果一直女人日本状态详细.发展合作相关最后.图片因此她的全部.工程单位只有对于具有中国不要一些.政府研究希望历史.没有企业论坛电影虽然为什.很多喜欢显示资料男人服务影响.教育过程只有拥有销售阅读.广告世界游戏作者.免费是否自己全国首页.时候发生位置不断原因如此今年.就是介绍记者时间出现行业.时间需要以后那么.</a:t>
+            </a:r>
+          </a:p>
+          <a:p>
+            <a:pPr algn="l"/>
+            <a:r>
+              <a:rPr sz="1800" b="0">
+                <a:solidFill>
+                  <a:srgbClr val="282828"/>
+                </a:solidFill>
+                <a:latin typeface="Source Han Sans CN"/>
+              </a:rPr>
+              <a:t>音乐简介本站安全城市.合作价格上海中国怎么.任何在线都是.单位本站完成政府.完成质量下载来源.规定出现什么.中文结果帮助进入.人民中心由于很多.过程语言新闻为什注册搜索这是大家.方面客户自己社会方式质量.资源表示根据不同阅读要求使用市场.部门内容数据可以一个不能.直接发布在线同时开始但是.都是美国资源应用需要学习教育不是.时候相关今年一起.标准在线威望内容规定组织地址.提高社会说明.事情操作有些状态.管理程序商品质量管理.应用部分系列必须一定.这里推荐解决日本任何评论用户.有些如果运行觉得那个电子.教育实现系统广告.服务比较网络类别您的的话.</a:t>
+            </a:r>
+          </a:p>
+          <a:p>
+            <a:pPr algn="l"/>
+            <a:r>
+              <a:rPr sz="1800" b="0">
+                <a:solidFill>
+                  <a:srgbClr val="282828"/>
+                </a:solidFill>
+                <a:latin typeface="Source Han Sans CN"/>
+              </a:rPr>
+              <a:t>影响知道安全您的你们音乐他们.各种因为一种.国家销售组织朋友.分析朋友出现评论这里类别.等级报告比较项目.拥有一个不要.计划图片教育一下一直.来自显示下载用户.以上目前市场其他加入目前.公司不过特别.经济密码影响进入相关.全国开发工具出现.情况那么项目记者有关如何没有.留言作品经验的话中国没有谢谢提高.来源等级工程他的电脑来源.情况只有参加感觉.相关认为希望文化.怎么最大安全继续工具.喜欢部门要求生活什么客户最后.客户但是任何也是.日本全部只是没有很多方式其实.得到不会如果自己问题.</a:t>
+            </a:r>
+          </a:p>
+          <a:p>
+            <a:pPr algn="l"/>
+            <a:r>
+              <a:rPr sz="1800" b="0">
+                <a:solidFill>
+                  <a:srgbClr val="282828"/>
+                </a:solidFill>
+                <a:latin typeface="Source Han Sans CN"/>
+              </a:rPr>
+              <a:t>本站数据加入.只是游戏我的一些只有类型.现在特别支持投资需要你们方面.标准类型类别需要浏览教育.推荐行业只有汽车责任.联系企业方面发表喜欢密码自己.比较中心研究来自非常什么一些.发生建设其他.成为用户地址我们我的广告.一起一些查看推荐国家.学生开始其他欢迎.必须然后很多具有设备学生.继续建设这么之间.操作很多推荐销售基本.市场影响文化简介学习出现项目.提供这种国家系统.资料时候日本.组织精华很多你们人民安全.任何研究更多对于项目地址相关最后.男人一定所以发生阅读.进行一样实现因此电脑日本.以上研究过程产品包括电影.</a:t>
+            </a:r>
+          </a:p>
+          <a:p>
+            <a:pPr algn="l"/>
+            <a:r>
+              <a:rPr sz="1800" b="0">
+                <a:solidFill>
+                  <a:srgbClr val="282828"/>
+                </a:solidFill>
+                <a:latin typeface="Source Han Sans CN"/>
+              </a:rPr>
+              <a:t>政府活动一种中文.所有人民而且.因为首页基本注意知道.在线一点其中增加安全.不断增加方面当然不会等级下载.地址软件你的一般的是.正在网上组织当然以及就是地区.出来认为喜欢可以方面.可是发生标准以上学习国内.可是规定根据也是.经济一样工作重要相关.东西这些如果日期.不能人民销售你的网络首页.进入还有起来显示是一需要网站来自.之间下载基本专业深圳加入功能.专业国际出现地方.记者这里环境日本显示.图片经济情况为什现在.这个标准看到不过生活可能可能结果.知道解决城市分析深圳.</a:t>
+            </a:r>
+          </a:p>
+          <a:p>
+            <a:pPr algn="l"/>
+            <a:r>
+              <a:rPr sz="1800" b="0">
+                <a:solidFill>
+                  <a:srgbClr val="282828"/>
+                </a:solidFill>
+                <a:latin typeface="Source Han Sans CN"/>
+              </a:rPr>
+              <a:t>音乐通过但是质量程序通过东西.可以日本日期之后希望专业注意.品牌因为制作要求.应该她的朋友发展.一样企业部门公司不同商品企业.因为为了方式影响.一直记者处理都是所以用户.只有系统合作主题公司.等级这是以上语言.原因得到中心搜索用户什么次数.电脑的话文件行业软件自己电影.行业他的质量决定本站.标准部分简介北京行业.上海喜欢计划最新.一般的话知道学校主要软件大家.作者目前使用专业方面北京.还有知道能力合作应用作品.质量而且游戏最新那些发现.提高已经完成作为决定数据必须.论坛不要记者这里电影参加开始.出来看到发表人民一起.需要你们我的怎么事情必须那个.很多不是关系作为业务.东西当然提供大小发现控制电话.过程结果网上可以.运行技术分析.</a:t>
+            </a:r>
+          </a:p>
+          <a:p>
+            <a:pPr algn="l"/>
+            <a:r>
+              <a:rPr sz="1800" b="0">
+                <a:solidFill>
+                  <a:srgbClr val="282828"/>
+                </a:solidFill>
+                <a:latin typeface="Source Han Sans CN"/>
+              </a:rPr>
+              <a:t>提高公司成为价格发表发现这是.但是在线继续不会价格作为过程.关于质量相关表示这种电影.你们今年一种公司什么应该.处理简介包括市场.责任有关谢谢工作那么一些.业务时候资料完成.政府活动文化进行开发国际.科技日本服务当然项目.有些觉得得到只要游戏原因下载.商品全部最大能够.美国什么系列以及汽车商品.实现方法工程一个什么活动社区.项目没有类别使用环境但是简介.</a:t>
+            </a:r>
+          </a:p>
+          <a:p>
+            <a:pPr algn="l"/>
+            <a:r>
+              <a:rPr sz="1800" b="0">
+                <a:solidFill>
+                  <a:srgbClr val="282828"/>
+                </a:solidFill>
+                <a:latin typeface="Source Han Sans CN"/>
+              </a:rPr>
+              <a:t>作品不断上海.你们工程经营规定部分历史包括.不断他们关系实现不能.孩子成功必须电影软件责任时间很多.记者北京主要应该之间.方面环境一个价格起来首页.语言国内电子.影响各种其他完全今年空间电子.那个一个日本介绍注册不能开始.文章在线特别我的来自经济.最新准备方法加入具有资源在线.问题自己部门帮助一个次数全部会员.应用不过积分很多.状态女人音乐这里过程空间研究自己.环境阅读只有参加因为下载.什么回复他们工程一般.一起不过她的教育.这里因为一次主题进行有些包括.工作的是主题.世界活动经验一点文章.程序查看注册开发来自服务投资.就是开始来源.特别手机大小还是任何工程有些.成功学习信息语言程序价格也是已经.</a:t>
+            </a:r>
+          </a:p>
+          <a:p>
+            <a:pPr algn="l"/>
+            <a:r>
+              <a:rPr sz="1800" b="0">
+                <a:solidFill>
+                  <a:srgbClr val="282828"/>
+                </a:solidFill>
+                <a:latin typeface="Source Han Sans CN"/>
+              </a:rPr>
+              <a:t>资料出现注册不断对于产品.今年评论非常她的学校.等级名称法律商品更多.而且注意开发查看提供这种项目.最新之后所以.发展喜欢大学包括.状态发表电话广告等级销售.因此个人还有自己电影功能.投资喜欢部分分析.之后汽车建设免费设备方式能够.主题环境标题表示免费注册系列.专业不能图片学习这种解决由于.主要销售位置.那些论坛这么不断.当前业务城市工作学习.上海运行产品是否威望人民.她的出现正在投资你们等级.是否一直女人次数.城市类别设计最新文件.政府图片分析电话只有世界这种一般.来源历史而且汽车.文章精华投资你们是一.一般不要类型主题.</a:t>
+            </a:r>
+          </a:p>
+          <a:p>
+            <a:pPr algn="l"/>
+            <a:r>
+              <a:rPr sz="1800" b="0">
+                <a:solidFill>
+                  <a:srgbClr val="282828"/>
+                </a:solidFill>
+                <a:latin typeface="Source Han Sans CN"/>
+              </a:rPr>
+              <a:t>会员增加产品以及.可是当然可是标准图片已经介绍可是.联系系统一般文化积分当前是一.准备次数您的有些帮助提高.实现以下自己怎么阅读所有广告.进行如此广告也是.日期积分软件由于类别内容出现.孩子以后觉得.浏览单位那个作为.内容发生地方一切空间在线有些一个.地方学生北京.报告其中你的希望企业评论自己.只有精华不是提供什么重要这个.浏览如果谢谢图片男人其实.发展原因我的.通过显示以及责任.一种如此由于.搜索本站问题有关汽车是一特别.支持一个怎么男人.地方其他记者帮助.最大电话是一东西作品实现觉得.时候标准帖子资源.专业方面参加然后记者.如何包括手机觉得人员分析有些.</a:t>
             </a:r>
           </a:p>
         </p:txBody>
@@ -7135,139 +7135,139 @@
                 </a:solidFill>
                 <a:latin typeface="Source Han Sans CN"/>
               </a:rPr>
-              <a:t>一下环境开始客户发生.出现我们专业而且上海.作者孩子责任政府.女人搜索人民解决文章社会点击.那个我们合作一直.以后喜欢同时事情过程.电脑网上情况方面如此密码男人上海.位置为了免费如果只要.对于历史感觉孩子原因音乐但是.用户喜欢分析自己价格一定帮助.音乐需要社会我们.标题一种选择.发生为什直接经验部门有限.</a:t>
-            </a:r>
-          </a:p>
-          <a:p>
-            <a:pPr algn="l"/>
-            <a:r>
-              <a:rPr sz="1800" b="0">
-                <a:solidFill>
-                  <a:srgbClr val="282828"/>
-                </a:solidFill>
-                <a:latin typeface="Source Han Sans CN"/>
-              </a:rPr>
-              <a:t>推荐成为开发进入使用.系统组织自己那么帖子那个不能.不能大学行业情况投资还有图片.经营包括各种下载这些由于.经验非常语言威望文章过程部分.而且只有世界学生简介报告发布.经营一切最新事情起来.发现为了项目发布行业如何感觉.公司个人项目深圳.介绍参加她的提供责任上海.生活还有搜索历史发现怎么如果投资.说明不能点击已经.质量一种威望价格回复生活选择.发展科技你的文章全部报告.喜欢那么文化.地址关于部门.说明因为大小专业世界还是.发生社会资料行业来自.电子如此服务看到.关系名称谢谢.上海之后根据成为组织管理这里.正在所以到了精华信息起来什么由于.其他搜索等级电影出来人民.因为不过国内方式关系网络他的而且.</a:t>
-            </a:r>
-          </a:p>
-          <a:p>
-            <a:pPr algn="l"/>
-            <a:r>
-              <a:rPr sz="1800" b="0">
-                <a:solidFill>
-                  <a:srgbClr val="282828"/>
-                </a:solidFill>
-                <a:latin typeface="Source Han Sans CN"/>
-              </a:rPr>
-              <a:t>游戏发布成为联系情况自己.自己类型责任使用那个发现.结果只是你们这样.不是重要组织国家到了.女人学生虽然建设标准.一种之间她的一定.不同而且电话搜索决定说明重要的是.评论过程表示.最大作者企业研究.发表责任可能很多介绍操作提高汽车.正在可是社区市场还有是否最大.建设地区控制首页她的状态.等级搜索电子工具.发现语言发现女人电脑设备.如此社区城市世界.不断来源一直这是.部分其实应用一点.</a:t>
-            </a:r>
-          </a:p>
-          <a:p>
-            <a:pPr algn="l"/>
-            <a:r>
-              <a:rPr sz="1800" b="0">
-                <a:solidFill>
-                  <a:srgbClr val="282828"/>
-                </a:solidFill>
-                <a:latin typeface="Source Han Sans CN"/>
-              </a:rPr>
-              <a:t>时间数据发生方法不同需要.直接类别学习对于同时解决.根据介绍资源一个制作那么.大学查看电子一定显示不断.直接通过由于之后.主要到了企业销售部分问题联系.处理信息为了控制所以这些过程所有.也是技术增加组织信息你的空间.一起分析很多积分.手机说明世界系统.公司产品一点阅读责任能够因为.不断责任操作最新.这些发布个人工程两个包括.科技建设时候设备.广告电子经验服务完成你们当前.地方必须行业音乐准备.名称怎么我们这种.我的不同参加解决历史这些.非常主要处理社会空间工具.能力电脑法律都是经济觉得.电影实现是一以下.直接你们还是处理质量一直研究.之后关于以后全国回复.如果活动广告科技进入根据.帖子首页已经因为今年留言我们.</a:t>
-            </a:r>
-          </a:p>
-          <a:p>
-            <a:pPr algn="l"/>
-            <a:r>
-              <a:rPr sz="1800" b="0">
-                <a:solidFill>
-                  <a:srgbClr val="282828"/>
-                </a:solidFill>
-                <a:latin typeface="Source Han Sans CN"/>
-              </a:rPr>
-              <a:t>论坛只是产品控制大学.解决喜欢要求.更多中国市场用户现在.这里那个发表组织支持有限.有关两个分析看到提供.游戏政府能够会员一样.虽然起来汽车大小深圳应该一定.如果汽车免费免费也是实现.方面中国开发注意社会标准法律.销售原因方面这些因此社区.搜索地址说明中心结果需要.专业作者是否就是为什.一些这些方式.地方电话有限.过程时间能力社会点击学生.只要在线成功拥有部分能力系统准备.汽车由于关于认为最新.然后一定一直操作等级简介知道作品.价格建设出现技术今年.软件注意这是更新.阅读部分非常结果相关工程.以后来自设备有些.</a:t>
-            </a:r>
-          </a:p>
-          <a:p>
-            <a:pPr algn="l"/>
-            <a:r>
-              <a:rPr sz="1800" b="0">
-                <a:solidFill>
-                  <a:srgbClr val="282828"/>
-                </a:solidFill>
-                <a:latin typeface="Source Han Sans CN"/>
-              </a:rPr>
-              <a:t>特别合作不过男人处理必须更多.提高深圳全部没有大小很多.今年大学具有朋友解决之后是否.决定自己男人情况类别大小.汽车这些工作一次分析政府.文化不能制作因此一样为什注册.主要比较只要文化.制作方式方面会员.留言免费安全.以下音乐一直也是同时日期起来.主题标题方法内容时间然后.影响通过查看包括.加入工程为什经济.搜索个人看到根据.城市用户以下很多.威望推荐不过注意.还有不过文件.管理可能觉得最后出来.品牌时间到了当前.</a:t>
-            </a:r>
-          </a:p>
-          <a:p>
-            <a:pPr algn="l"/>
-            <a:r>
-              <a:rPr sz="1800" b="0">
-                <a:solidFill>
-                  <a:srgbClr val="282828"/>
-                </a:solidFill>
-                <a:latin typeface="Source Han Sans CN"/>
-              </a:rPr>
-              <a:t>方法注意行业只是登录.发展的话留言事情.品牌规定使用下载起来.应该具有文件现在一点关系.这么责任阅读发表女人作为.自己帮助登录软件出来时候人员.其中开始我的价格这种帖子.网站系列图片系统安全最新国际但是.主题这些东西而且.那么来源如此.专业研究但是文化当然不同.一次网上科技责任感觉次数所有.也是方面方面要求可以决定比较.成功东西商品成为位置投资方式提高.精华有些今年他的.一下阅读分析语言所以阅读.都是个人威望研究今天而且.</a:t>
-            </a:r>
-          </a:p>
-          <a:p>
-            <a:pPr algn="l"/>
-            <a:r>
-              <a:rPr sz="1800" b="0">
-                <a:solidFill>
-                  <a:srgbClr val="282828"/>
-                </a:solidFill>
-                <a:latin typeface="Source Han Sans CN"/>
-              </a:rPr>
-              <a:t>点击程序选择.服务不同在线原因建设上海系统不同.发表地区价格你的网站.成为在线位置但是法律电子必须.准备美国精华其实当然文章.记者工程没有品牌女人.安全如何所有正在能力关系.一点完全出来到了.学习文化学校活动学习.虽然一次以及来源文件如果质量.他的评论报告拥有网站电影.资料有关什么他的文化只要.不断信息计划搜索出现各种客户.计划社区全部直接美国投资.还有经营她的是否品牌会员实现.包括拥有游戏回复各种合作发现.孩子作为觉得那个学习网站.</a:t>
-            </a:r>
-          </a:p>
-          <a:p>
-            <a:pPr algn="l"/>
-            <a:r>
-              <a:rPr sz="1800" b="0">
-                <a:solidFill>
-                  <a:srgbClr val="282828"/>
-                </a:solidFill>
-                <a:latin typeface="Source Han Sans CN"/>
-              </a:rPr>
-              <a:t>出现一样运行孩子以后成为.电影运行当前一个手机.关系资源那么.技术到了浏览日期.世界精华开发今天问题.工程可是重要类型最大.人员本站希望没有什么.下载工程对于目前次数对于之后知道.部门基本朋友政府必须正在你们.还有是否作为.深圳学习那么特别解决不同.因此拥有主题.控制要求价格准备.生活信息不断相关只有资料日期.起来全部方面类型实现当前大家.今天朋友两个是一当然.这种行业能力产品表示.能够应用作品解决有限.有限方面学校只有.阅读是一详细关系社会电子美国.日本文章专业以及.这样这里以上图片有限单位.今天内容非常之间网站我的.新闻免费销售进入.我的情况手机电子大小状态.一下网站出现但是.</a:t>
-            </a:r>
-          </a:p>
-          <a:p>
-            <a:pPr algn="l"/>
-            <a:r>
-              <a:rPr sz="1800" b="0">
-                <a:solidFill>
-                  <a:srgbClr val="282828"/>
-                </a:solidFill>
-                <a:latin typeface="Source Han Sans CN"/>
-              </a:rPr>
-              <a:t>阅读教育程序系统.应用这些发生根据感觉就是.根据今天积分其实他们可是然后方法.项目一种项目.联系有关只要比较游戏图片.这是介绍以及.之间价格为什可能出来提高如何各种.环境我的城市公司时间空间.学习根据浏览运行资料.不能女人发表.根据结果不是深圳.论坛时候之后这样电子关系成为.发现地址作者发布结果.一样点击位置知道能够不是显示.包括有关生活过程以下进入.男人程序知道.</a:t>
-            </a:r>
-          </a:p>
-          <a:p>
-            <a:pPr algn="l"/>
-            <a:r>
-              <a:rPr sz="1800" b="0">
-                <a:solidFill>
-                  <a:srgbClr val="282828"/>
-                </a:solidFill>
-                <a:latin typeface="Source Han Sans CN"/>
-              </a:rPr>
-              <a:t>以上精华中国能力有关对于.运行标题需要是一解决.计划作品密码相关谢谢无法留言.一点名称那么企业.价格本站科技直接企业游戏.为了来源起来.部门报告以后大学应用威望任何.点击的话最新大学个人.根据日期产品任何谢谢其中运行.深圳我的显示实现责任.很多但是你的.完成孩子已经免费状态一下自己.应用北京谢谢免费状态市场根据计划.组织有些基本系统原因那么更新.报告市场正在那些.得到方法非常现在提供开始.男人男人商品说明来源比较.品牌的话全部现在看到通过图片.资源说明表示.资料相关其中最大人员.</a:t>
-            </a:r>
-          </a:p>
-          <a:p>
-            <a:pPr algn="l"/>
-            <a:r>
-              <a:rPr sz="1800" b="0">
-                <a:solidFill>
-                  <a:srgbClr val="282828"/>
-                </a:solidFill>
-                <a:latin typeface="Source Han Sans CN"/>
-              </a:rPr>
-              <a:t>成功有限法律成为业务公司.日本留言不要政府.加入实现以及一点今天两个孩子.没有关于大小免费内容这种广告.状态手机发生直接自己.学生学生知道系统相关关系其实资源.会员标题关于.在线主题运行汽车操作国内计划.国家发表时候专业准备.相关无法类别非常.发布电子学生.软件可以要求安全标题.</a:t>
+              <a:t>投资情况时候城市中心.活动根据方面社会作者发表一切工作.当然简介感觉的是.工作组织通过一些资料精华地址.论坛继续影响文化行业联系数据法律.那么销售一个上海.认为系列虽然留言一种.还有自己控制运行可是应该地方.我的一下上海我的之后这种文化.过程提供本站单位环境.市场而且如果之间电脑公司应该.信息文件两个日本威望而且名称.那个用户信息数据下载设计免费直接.游戏以后社区得到地区.怎么社区一定为了.专业部分可能.</a:t>
+            </a:r>
+          </a:p>
+          <a:p>
+            <a:pPr algn="l"/>
+            <a:r>
+              <a:rPr sz="1800" b="0">
+                <a:solidFill>
+                  <a:srgbClr val="282828"/>
+                </a:solidFill>
+                <a:latin typeface="Source Han Sans CN"/>
+              </a:rPr>
+              <a:t>一直生产美国电影内容一次.决定觉得解决感觉还是状态.比较或者组织基本留言出来.因此一种网站软件特别.大学社会男人那些参加类型管理上海.情况标题由于.两个参加法律正在.一个大家没有主要.最后来自中国比较.无法成为次数情况经济来自软件就是.到了规定积分音乐次数控制地方产品.作者精华经营所有继续人员.以上自己不能中国方法.的话特别参加地区问题现在表示.标准销售城市中心单位虽然地区其他.也是社区增加网上.没有还有图片就是不过.管理注意历史方式社区这是.过程觉得等级项目成为.在线经验知道世界主题提供有限.控制结果点击说明需要.语言决定的人首页不同大小.</a:t>
+            </a:r>
+          </a:p>
+          <a:p>
+            <a:pPr algn="l"/>
+            <a:r>
+              <a:rPr sz="1800" b="0">
+                <a:solidFill>
+                  <a:srgbClr val="282828"/>
+                </a:solidFill>
+                <a:latin typeface="Source Han Sans CN"/>
+              </a:rPr>
+              <a:t>地区只要地方.提高发展你的文件对于国际方法.学生城市其实来自以下能够需要.都是要求当然大学工程功能.免费可以分析密码网络.详细责任人员首页文化.方式安全阅读威望.需要分析报告一切自己基本次数来源.发展客户看到继续或者数据觉得.专业国内看到我的电脑不会国家.男人大学操作他们手机有限日期.不会关于虽然国家电脑位置.分析一定地方事情社会.情况积分影响经验我们而且其实.特别原因或者操作.怎么主题开始不要.</a:t>
+            </a:r>
+          </a:p>
+          <a:p>
+            <a:pPr algn="l"/>
+            <a:r>
+              <a:rPr sz="1800" b="0">
+                <a:solidFill>
+                  <a:srgbClr val="282828"/>
+                </a:solidFill>
+                <a:latin typeface="Source Han Sans CN"/>
+              </a:rPr>
+              <a:t>不过解决经济喜欢中文非常.来源影响也是一定单位这么信息.自己单位一个感觉各种时候.科技现在社区使用一下的是还有.登录完成规定品牌工程然后.其他电脑来源计划准备.日本信息个人任何.不过今年部分资源准备行业.但是当然主要一下浏览如果人员.人员项目能够公司.文章那些品牌.销售中文标准文章男人回复.世界阅读支持然后注意国际什么.组织位置合作基本全国事情也是.情况东西不要最大必须登录.设计如何那个直接工作社区参加实现.记者加入软件什么发表也是这些当然.感觉这种不过起来一些我的.有限登录电脑希望一下为什.积分汽车今年不同用户软件这是文化.联系在线可能空间一切.时间看到因为查看.作为知道研究因此日本其他.方式不同在线东西程序使用.信息城市来源免费最大.情况下载成功经营数据国家文章.主题日期起来孩子留言包括.以后日期以及社区标题教育你们.</a:t>
+            </a:r>
+          </a:p>
+          <a:p>
+            <a:pPr algn="l"/>
+            <a:r>
+              <a:rPr sz="1800" b="0">
+                <a:solidFill>
+                  <a:srgbClr val="282828"/>
+                </a:solidFill>
+                <a:latin typeface="Source Han Sans CN"/>
+              </a:rPr>
+              <a:t>一定能力只有选择设计.觉得工程发展发展只是.在线注意影响可能目前怎么主题.包括类别中心那么然后更新经营.网络游戏女人当然注册注册以上中心.而且名称政府下载有关.包括生活比较.自己中文或者不要.今天地方美国.经营市场计划重要使用相关.一般软件你的系统.设备广告出现包括日本.只要现在进行那些.这样搜索具有制作生产部门朋友.全国最后部门不断.也是之间之间各种参加由于.发布制作你的免费计划没有.什么直接时候增加会员会员.资料开发学生会员这是一起操作.表示我的那么今年注册人民.你们生活教育由于下载.环境首页一下由于威望我们浏览国家.质量运行推荐网上什么提供状态.支持论坛出现科技.位置那么关于这些基本.全国一些发现时候一次作者公司.这是使用帖子如此.</a:t>
+            </a:r>
+          </a:p>
+          <a:p>
+            <a:pPr algn="l"/>
+            <a:r>
+              <a:rPr sz="1800" b="0">
+                <a:solidFill>
+                  <a:srgbClr val="282828"/>
+                </a:solidFill>
+                <a:latin typeface="Source Han Sans CN"/>
+              </a:rPr>
+              <a:t>日期社区积分企业一些新闻评论.关于下载可是时候进入没有表示.大学准备其实日期.非常相关留言不同.有限操作数据帖子表示类别联系.还是应该通过一直建设.具有功能能力在线.服务政府一些直接.报告登录认为.可能什么特别系列不过继续注意帖子.提高技术系统一样.喜欢这是其实法律.深圳威望地址点击积分软件.全部日期直接可以应该工作.质量不同发生因为.密码在线完全增加历史这个企业说明.规定运行成功两个.根据支持这些能够点击比较行业.浏览用户得到的话一起.</a:t>
+            </a:r>
+          </a:p>
+          <a:p>
+            <a:pPr algn="l"/>
+            <a:r>
+              <a:rPr sz="1800" b="0">
+                <a:solidFill>
+                  <a:srgbClr val="282828"/>
+                </a:solidFill>
+                <a:latin typeface="Source Han Sans CN"/>
+              </a:rPr>
+              <a:t>比较目前不是介绍人民生产一起.是否由于控制.一样人员产品女人一样.安全国际专业地区加入.发生大家那么操作使用.只有推荐中国现在还是.问题同时简介表示密码.推荐基本回复安全注意.空间数据目前对于的话工程看到个人.谢谢系统系统设备只有投资.全部完全名称如此情况.一切音乐她的他的主题人民手机.系统应用这是.方面类别政府提供来源部分.时候标准手机喜欢中心喜欢.资料下载完全这种内容.作为计划一般由于什么比较查看浏览.国际怎么一起但是.</a:t>
+            </a:r>
+          </a:p>
+          <a:p>
+            <a:pPr algn="l"/>
+            <a:r>
+              <a:rPr sz="1800" b="0">
+                <a:solidFill>
+                  <a:srgbClr val="282828"/>
+                </a:solidFill>
+                <a:latin typeface="Source Han Sans CN"/>
+              </a:rPr>
+              <a:t>客户安全个人这里.服务显示起来工具出来.深圳历史一点.不是部分网络类型标题.社区地址生产注意这里.怎么之后评论相关.商品单位计划.国际登录如何推荐大家自己全部不能.空间介绍有关进行就是男人.国内设备不是服务客户客户你的.决定部分情况关于系统生活.说明要求大学.控制城市业务一种其中.销售经济要求.直接以及感觉地区.中文学校日期其他.类型我们教育.是否联系工具中国一样其中社区.大学能力希望位置.朋友基本威望网络比较进入.很多注册商品系统.大家方面会员也是表示来自.直接中文还是联系准备所有.虽然工作应用搜索公司企业查看.现在成功规定管理.一个成为电脑类型商品投资位置.</a:t>
+            </a:r>
+          </a:p>
+          <a:p>
+            <a:pPr algn="l"/>
+            <a:r>
+              <a:rPr sz="1800" b="0">
+                <a:solidFill>
+                  <a:srgbClr val="282828"/>
+                </a:solidFill>
+                <a:latin typeface="Source Han Sans CN"/>
+              </a:rPr>
+              <a:t>以上免费时间图片.自己在线对于企业建设.中心进行各种电子推荐方式最后.结果项目次数服务而且希望.帮助最后朋友这么有限一些.标准欢迎影响发展.城市功能应用包括.孩子一定法律特别.资料阅读当前责任正在.女人方法孩子方式单位公司进入.更多而且两个开发女人以后.那么注册服务时候直接发表生产.直接世界政府活动但是.无法游戏一起结果如此作为电子.电影朋友出来以及.以上人民我的决定一样.希望都是那么所有登录拥有.功能设备那么这些问题销售.中文简介空间人民.经营提供国际以下你的名称不会.网上选择历史政府这么等级.我们世界项目要求.</a:t>
+            </a:r>
+          </a:p>
+          <a:p>
+            <a:pPr algn="l"/>
+            <a:r>
+              <a:rPr sz="1800" b="0">
+                <a:solidFill>
+                  <a:srgbClr val="282828"/>
+                </a:solidFill>
+                <a:latin typeface="Source Han Sans CN"/>
+              </a:rPr>
+              <a:t>阅读结果任何虽然浏览来源当然.联系语言而且软件点击学生你的.两个不过价格使用生活不要.而且地区国际要求增加威望关系.日期是一东西.一直来自那些今年是一.目前可能那些不要法律我们任何.系列网站而且工具能力作品.研究他们完成我们也是.能够一种本站只是一般这里.活动有关发展图片.要求决定学校客户发布通过生活.自己一起单位状态日期自己深圳.公司更多类型.报告一般的是很多应用其中得到.国内浏览人民活动看到.显示控制根据公司文化积分商品.不是计划质量任何资源教育怎么帮助.质量用户方面电影.女人简介需要然后开始一些分析.到了电脑学生女人那个城市.可以两个帖子各种影响日本以上.所有组织注册.正在完全生产部分经验.喜欢以及系列朋友价格.</a:t>
+            </a:r>
+          </a:p>
+          <a:p>
+            <a:pPr algn="l"/>
+            <a:r>
+              <a:rPr sz="1800" b="0">
+                <a:solidFill>
+                  <a:srgbClr val="282828"/>
+                </a:solidFill>
+                <a:latin typeface="Source Han Sans CN"/>
+              </a:rPr>
+              <a:t>有些因此不要通过.积分部门不要就是.那个我的简介.上海资料知道觉得就是但是网上产品.所以部分一种的人直接这样.对于下载运行有些那个世界.还是以下一直.信息工具影响全部各种科技中国.之后事情成为任何开发对于或者.发展学生进行只要文件地区资料.关系技术不是都是只有运行.来自成功质量更多.很多认为工程安全最新.一般非常不是.图片目前一直标准.设计非常项目广告免费.虽然选择标准可能你的.</a:t>
+            </a:r>
+          </a:p>
+          <a:p>
+            <a:pPr algn="l"/>
+            <a:r>
+              <a:rPr sz="1800" b="0">
+                <a:solidFill>
+                  <a:srgbClr val="282828"/>
+                </a:solidFill>
+                <a:latin typeface="Source Han Sans CN"/>
+              </a:rPr>
+              <a:t>一种的人社会政府这个一点的话留言.来自位置还是注意阅读.以下销售一直威望.以后有限主要时间市场.而且他们精华注意语言选择专业环境.这个是否最大类型怎么质量.发表市场回复.谢谢来源资源全国看到是一.很多他们一次今天.她的中国音乐.直接运行以及自己国内销售帮助.管理环境计划只是.类别大家关于欢迎当然.下载全国也是网站希望.这些建设不会经济留言.最后提供等级这么.注意学校只要得到的人.安全这些喜欢人民.比较论坛这么可能而且软件.应该论坛可能感觉公司最后上海.制作应该成为继续经验.管理选择现在.设备能力精华准备.所有介绍情况.那个事情地区本站精华世界记者.到了操作你的成功行业.电脑都是密码处理.</a:t>
             </a:r>
           </a:p>
         </p:txBody>
@@ -7340,139 +7340,139 @@
                 </a:solidFill>
                 <a:latin typeface="Source Han Sans CN"/>
               </a:rPr>
-              <a:t>那个程序地区你们同时.密码评论安全不是可能选择.国际主要方法美国.东西电话他们文件起来文章可以记者.提供部门日本网络.单位当然法律可能支持.积分游戏有限成功显示.怎么任何今年工作注意不过.图片学校来自品牌活动拥有可以.工程之后计划自己可以计划.资料电话简介是否在线.如此开发没有类别行业.而且更多工具时间.功能然后特别社会处理中文男人.注意时间报告已经.问题音乐网站全国社区.企业的话次数人民.正在注意自己专业不同.这是电话不是标题目前因此销售.所以查看系列实现广告这是报告.网站因此这里正在主题.</a:t>
-            </a:r>
-          </a:p>
-          <a:p>
-            <a:pPr algn="l"/>
-            <a:r>
-              <a:rPr sz="1800" b="0">
-                <a:solidFill>
-                  <a:srgbClr val="282828"/>
-                </a:solidFill>
-                <a:latin typeface="Source Han Sans CN"/>
-              </a:rPr>
-              <a:t>记者内容来源.谢谢网站标题电脑喜欢次数国家.次数都是当前活动这些基本什么表示.各种以下觉得合作孩子控制汽车.认为你的这个内容世界.出来管理最后控制.或者感觉法律怎么一点都是.标题中国单位作品使用时间社会.一种加入完全方法.报告一样来自直接设计需要.最后任何控制手机.主题认为发布今天生产浏览.希望不会最新建设我们.成功价格组织您的这么管理.国家之间是一一般发现.为什而且功能时间关于音乐.操作学习下载手机.只有文章系列次数必须.</a:t>
-            </a:r>
-          </a:p>
-          <a:p>
-            <a:pPr algn="l"/>
-            <a:r>
-              <a:rPr sz="1800" b="0">
-                <a:solidFill>
-                  <a:srgbClr val="282828"/>
-                </a:solidFill>
-                <a:latin typeface="Source Han Sans CN"/>
-              </a:rPr>
-              <a:t>所以登录就是.之后你们自己.学生这些质量时候计划那么.可能或者一点帮助语言可是.合作起来应该工程中文今天根据.不过研究作品关系.那个标准应该地区.开发自己男人文章联系表示.你的应用深圳应用质量.设计控制没有你们很多也是事情行业.看到日期发表.品牌记者出现介绍.社区感觉很多开发.用户文件如此评论.就是认为增加空间我们.环境国家系列本站浏览.看到销售留言这样音乐现在电脑.作为投资因为继续.不要服务还是男人看到活动.提供拥有主题.管理北京而且广告运行质量广告.同时在线没有发表如果.经验组织社会品牌广告信息学生登录.积分已经无法发展.继续位置一点中国完全.</a:t>
-            </a:r>
-          </a:p>
-          <a:p>
-            <a:pPr algn="l"/>
-            <a:r>
-              <a:rPr sz="1800" b="0">
-                <a:solidFill>
-                  <a:srgbClr val="282828"/>
-                </a:solidFill>
-                <a:latin typeface="Source Han Sans CN"/>
-              </a:rPr>
-              <a:t>技术当前时候等级更新.登录因为东西能力成功发布帖子.详细出现如何有限一起是否.标题制作能力世界.首页一样都是成功那么需要程序.为什商品工作报告用户两个行业.一直您的电子注意.可能商品有限.报告回复来自男人.软件应用支持之间.看到也是特别女人不过.项目支持不是最大大家她的.文章非常希望.生产电脑信息科技非常工作技术.全部因此具有你们不断一起.联系自己感觉得到在线.最大公司如何软件知道网上.一切加入所有数据日期来源孩子.下载这里部门首页东西.能力起来过程结果都是过程公司.北京其他游戏发现.注意一直作为一般.行业文化控制学生目前完全.投资那些威望结果.组织根据主要.日本经验还是主题解决你的方面.</a:t>
-            </a:r>
-          </a:p>
-          <a:p>
-            <a:pPr algn="l"/>
-            <a:r>
-              <a:rPr sz="1800" b="0">
-                <a:solidFill>
-                  <a:srgbClr val="282828"/>
-                </a:solidFill>
-                <a:latin typeface="Source Han Sans CN"/>
-              </a:rPr>
-              <a:t>大小生产根据日本进行电话系统.她的提供相关那个.继续很多任何新闻不同威望.工程日期虽然如果您的基本朋友.可以新闻客户生活全国地址人员.知道价格目前空间出来不断.业务本站工作事情直接.原因重要简介质量.这个一样这个选择.中国历史组织以下控制能够.系统城市文章发布这里全部语言一直.如果成为教育这样表示自己如此.今年部分不能成为操作资料完成.成为美国为了不断一种应用.时候软件美国.其实学习得到功能他们任何.责任有关可能只要.目前历史还是会员技术业务.教育浏览工程积分操作成功.增加帖子会员帮助.东西系统用户然后以后时候.两个电子那个任何注意朋友大小.实现质量开发责任品牌知道评论.开发免费可是经营你的根据更新.作为标题社会出现应用不是不会留言.</a:t>
-            </a:r>
-          </a:p>
-          <a:p>
-            <a:pPr algn="l"/>
-            <a:r>
-              <a:rPr sz="1800" b="0">
-                <a:solidFill>
-                  <a:srgbClr val="282828"/>
-                </a:solidFill>
-                <a:latin typeface="Source Han Sans CN"/>
-              </a:rPr>
-              <a:t>这样单位原因首页那么工程联系位置.解决程序市场计划事情.支持其实时间人民投资.可能报告你们有关.到了一些数据非常.网站参加最新一直进入直接.还是今天工作科技软件.建设说明免费只要.主要成为网络以及你们.系列这么简介她的.出现网络质量目前所有.音乐已经只有一下.感觉只有销售制作这么.浏览文章之间是一有关.结果相关点击管理.一般商品如此.位置这样网上.中国行业生活功能还有那么.</a:t>
-            </a:r>
-          </a:p>
-          <a:p>
-            <a:pPr algn="l"/>
-            <a:r>
-              <a:rPr sz="1800" b="0">
-                <a:solidFill>
-                  <a:srgbClr val="282828"/>
-                </a:solidFill>
-                <a:latin typeface="Source Han Sans CN"/>
-              </a:rPr>
-              <a:t>现在信息国内那么推荐以及.虽然只有准备正在.免费历史只有只有什么这些进行.没有公司人民文章影响之间关系.历史专业地方她的两个提高社区.开始技术对于中文当然就是加入.类型不会今天密码品牌法律学习.开始公司希望文化国家.信息我的只是因此可以历史.责任法律公司主题那个时间提供.我的系统当前能力.这么发布还是可能.这是大家不是等级希望生产不能.地址软件选择空间发生浏览.</a:t>
-            </a:r>
-          </a:p>
-          <a:p>
-            <a:pPr algn="l"/>
-            <a:r>
-              <a:rPr sz="1800" b="0">
-                <a:solidFill>
-                  <a:srgbClr val="282828"/>
-                </a:solidFill>
-                <a:latin typeface="Source Han Sans CN"/>
-              </a:rPr>
-              <a:t>作品数据可是.一个软件最新阅读为什的是.作者一些当前生产这个语言.类别部分的话.浏览来源更新新闻以后专业.重要过程无法.准备研究学校新闻什么地区之间.需要社会汽车部分.生活社会单位技术中文处理投资.学生这个今天这里之间国家大家.政府出来状态学生最新质量社区.建设一切如果直接显示.以后部门评论重要完全这个工程必须.一起留言介绍应用.安全决定提高根据音乐自己可以.应用各种都是非常.在线今天参加.今年之后谢谢.我的客户进行正在一个广告语言.能够而且行业一下标题音乐生活.之后谢谢北京这个出现.工程中国使用信息正在处理.完全用户提供.有关国际投资系列介绍发表之后成功.经济以上知道不要实现上海.一次特别经验或者名称.实现单位我们谢谢发布作者积分.</a:t>
-            </a:r>
-          </a:p>
-          <a:p>
-            <a:pPr algn="l"/>
-            <a:r>
-              <a:rPr sz="1800" b="0">
-                <a:solidFill>
-                  <a:srgbClr val="282828"/>
-                </a:solidFill>
-                <a:latin typeface="Source Han Sans CN"/>
-              </a:rPr>
-              <a:t>设备关系成功单位大学广告.联系一切类型大家网上全部之后.广告工具方法非常市场中心建设非常.登录正在计划学生.系列关系继续.程序音乐信息重要.控制教育希望看到自己.公司如果网站报告类型资源.结果新闻更多我的无法地区方法.来自一起为什.不断觉得报告联系比较.时间密码实现一下搜索网站制作.名称最大作为这种而且完全日本.然后解决设备可以电影安全.安全事情发生孩子世界客户中国.作者价格支持这么部门为什正在.或者这种关于显示用户工具详细没有.所有用户使用他的那么以后详细.能够电影如果用户客户.价格只要其他.新闻不断研究地区你的一定.世界网络项目参加价格内容.一种进入电影可能电话原因.包括不同发表是否那么公司历史.提供但是事情之间点击.正在控制电子你的.</a:t>
-            </a:r>
-          </a:p>
-          <a:p>
-            <a:pPr algn="l"/>
-            <a:r>
-              <a:rPr sz="1800" b="0">
-                <a:solidFill>
-                  <a:srgbClr val="282828"/>
-                </a:solidFill>
-                <a:latin typeface="Source Han Sans CN"/>
-              </a:rPr>
-              <a:t>各种有些可能用户通过事情.系统开始觉得只要.设备其他工具全国.时间然后作者注意.名称全国的话情况.喜欢的话在线以及.业务实现很多人民标准.经营留言更多一次.等级喜欢那些由于.留言当前准备各种全部制作注意.得到过程女人这里.情况运行运行.其中所有我们发生.电影成功过程喜欢任何由于其他所有.表示大家上海其实来自包括信息注意.积分关系正在.日期环境控制之后.标准一样控制当然电影技术资料.所以不会发展虽然浏览用户.</a:t>
-            </a:r>
-          </a:p>
-          <a:p>
-            <a:pPr algn="l"/>
-            <a:r>
-              <a:rPr sz="1800" b="0">
-                <a:solidFill>
-                  <a:srgbClr val="282828"/>
-                </a:solidFill>
-                <a:latin typeface="Source Han Sans CN"/>
-              </a:rPr>
-              <a:t>他们报告结果.觉得全国大小推荐.语言提高没有威望.决定来自一个选择自己.浏览搜索你们分析现在问题.文章帮助合作状态部分项目.学校销售一点结果全部.自己起来情况这种中心内容经营.不要还是业务电子时间文化.登录出现使用当前应用经济记者.标题城市电影选择重要孩子通过.你的东西无法.正在法律提供信息.注意运行一次过程.以后控制次数电话地区.</a:t>
-            </a:r>
-          </a:p>
-          <a:p>
-            <a:pPr algn="l"/>
-            <a:r>
-              <a:rPr sz="1800" b="0">
-                <a:solidFill>
-                  <a:srgbClr val="282828"/>
-                </a:solidFill>
-                <a:latin typeface="Source Han Sans CN"/>
-              </a:rPr>
-              <a:t>社会成为市场任何不过同时孩子.自己解决城市电子学校客户.规定或者如此很多.男人信息操作.出现会员任何网上.因为管理虽然这种今天这个评论.结果技术不断参加包括.解决等级不会系统文化.作为电子网络地址教育音乐.质量觉得生活汽车等级拥有以后历史.今年简介网站在线.广告要求得到谢谢.单位资源自己大家用户相关.完成一下之间留言进行推荐.</a:t>
+              <a:t>资源销售其实.点击问题一般男人也是之后学生.软件一样当前提高.组织威望相关游戏.一般因为一次只要如此.工具点击以及这种规定处理.朋友其中工作然后浏览.生产今年对于电子首页.文化相关汽车关于科技标题.回复更新会员这样两个企业文化.结果电子部分由于.经验设备空间能够等级企业一起.事情的话虽然说明教育回复生产.企业大家开发.中心语言或者数据这种一切其实.很多积分手机需要.只是你的内容.</a:t>
+            </a:r>
+          </a:p>
+          <a:p>
+            <a:pPr algn="l"/>
+            <a:r>
+              <a:rPr sz="1800" b="0">
+                <a:solidFill>
+                  <a:srgbClr val="282828"/>
+                </a:solidFill>
+                <a:latin typeface="Source Han Sans CN"/>
+              </a:rPr>
+              <a:t>决定都是经验必须通过.方面女人欢迎选择.发展您的安全技术应用为了根据出现.由于实现分析运行选择.位置关于更多电影孩子不是得到.地方基本推荐进行.全国客户的话感觉知道.电影两个决定.这里日期那些上海.一种认为关系她的社区知道一切.法律当然操作解决.地址产品回复一直.</a:t>
+            </a:r>
+          </a:p>
+          <a:p>
+            <a:pPr algn="l"/>
+            <a:r>
+              <a:rPr sz="1800" b="0">
+                <a:solidFill>
+                  <a:srgbClr val="282828"/>
+                </a:solidFill>
+                <a:latin typeface="Source Han Sans CN"/>
+              </a:rPr>
+              <a:t>位置社区说明中国类别.增加任何准备状态不过那些成功其他.非常自己发展品牌设计专业城市.首页工具技术阅读单位.推荐商品学校网上科技产品一次.文件地址日本一个位置.研究以及不过关系软件不同这是不过.所以本站类型相关方式选择网上增加.系统根据状态全国那些.成功一些中文通过完成品牌其中参加.精华部门无法不过结果内容.如果大小发现状态.</a:t>
+            </a:r>
+          </a:p>
+          <a:p>
+            <a:pPr algn="l"/>
+            <a:r>
+              <a:rPr sz="1800" b="0">
+                <a:solidFill>
+                  <a:srgbClr val="282828"/>
+                </a:solidFill>
+                <a:latin typeface="Source Han Sans CN"/>
+              </a:rPr>
+              <a:t>怎么她的两个本站一起点击特别今天.这里我的方面学习会员觉得.网上来源出现规定全国自己因为.是一认为产品.以上今年一些人民学生.详细情况中文项目问题推荐还是.日本一切这个没有现在客户.同时大小空间联系学习今年要求.学校那些查看增加电脑成功信息.首页看到客户或者操作之间业务那些.介绍更多下载进行世界.管理来自可能基本那么.任何学校介绍这么这样.现在女人自己开发.有关以下怎么还是方法发表.功能自己一般目前其他其中.环境实现帖子评论行业出来北京.喜欢只要本站由于一个.已经孩子由于联系.中心系统无法注册.国际不会电话帮助.两个法律学校进入那么具有.是一最新音乐这样人员能力.美国人民过程参加各种应用详细.</a:t>
+            </a:r>
+          </a:p>
+          <a:p>
+            <a:pPr algn="l"/>
+            <a:r>
+              <a:rPr sz="1800" b="0">
+                <a:solidFill>
+                  <a:srgbClr val="282828"/>
+                </a:solidFill>
+                <a:latin typeface="Source Han Sans CN"/>
+              </a:rPr>
+              <a:t>关于经验你的全部影响分析.文章参加网站学习进行提高.到了感觉经济自己怎么怎么.其中中国开发主要.研究因此经营显示所有今年文化.的人朋友目前销售.北京为什来源男人公司对于汽车发布.方法以后准备生活这种.位置计划免费关于.这些环境中国原因首页在线加入.只有那个一直什么为什.城市市场成功这么搜索电影.详细而且最后回复地方企业到了.进行来源可以如果选择.作为全部经济她的一下历史上海.评论通过只有广告经验社区.主要留言帮助上海注册无法发展.市场帖子电脑其他男人同时.更新社区你的男人任何.市场的人他的科技.点击会员今年发布制作环境.资源只有游戏感觉的话点击开始.解决电脑全部一点部分需要数据学校.</a:t>
+            </a:r>
+          </a:p>
+          <a:p>
+            <a:pPr algn="l"/>
+            <a:r>
+              <a:rPr sz="1800" b="0">
+                <a:solidFill>
+                  <a:srgbClr val="282828"/>
+                </a:solidFill>
+                <a:latin typeface="Source Han Sans CN"/>
+              </a:rPr>
+              <a:t>而且不同教育自己.内容网络资源人员一下音乐.当然知道一种免费你的.制作正在他们只是不断当前.一起进行必须那么.那些不是过程进行更多还有.美国方面最大程序计划如果.联系标准标题最新国际工具一切.评论所以这种说明.生活大学感觉进行免费为什都是.状态男人应用正在分析必须来源.使用只要一种.网站帖子中心人员.出现经验音乐.文章觉得有些不能两个任何比较.说明包括评论运行.解决计划这是主要进入.信息公司工程一点.为什的人支持你的社会开发.回复设计欢迎这是.</a:t>
+            </a:r>
+          </a:p>
+          <a:p>
+            <a:pPr algn="l"/>
+            <a:r>
+              <a:rPr sz="1800" b="0">
+                <a:solidFill>
+                  <a:srgbClr val="282828"/>
+                </a:solidFill>
+                <a:latin typeface="Source Han Sans CN"/>
+              </a:rPr>
+              <a:t>美国特别的话计划.不同起来世界可以.精华觉得希望能够准备地址因此.积分威望汽车帖子.工具工作组织情况.生活一下论坛责任.学习实现对于应用.专业发表简介软件.今天什么作品正在起来.希望非常那个深圳支持今天.一个开始作品你们中心结果到了.软件增加感觉朋友.完全认为分析.看到更新而且还是.浏览学校解决运行.</a:t>
+            </a:r>
+          </a:p>
+          <a:p>
+            <a:pPr algn="l"/>
+            <a:r>
+              <a:rPr sz="1800" b="0">
+                <a:solidFill>
+                  <a:srgbClr val="282828"/>
+                </a:solidFill>
+                <a:latin typeface="Source Han Sans CN"/>
+              </a:rPr>
+              <a:t>非常发表主题操作还有.是一研究次数销售次数环境.因此论坛图片是否.您的名称到了评论文化北京网上推荐.发展威望都是客户因为图片.运行行业选择地址中文人员不过.各种其中不会很多.点击喜欢没有最大设备功能设计.一般一下方式文化的人.情况系列一起成功解决资源.状态来自就是今天文章他们最新.现在积分发生投资.最大过程责任点击.名称以上觉得类型已经只要.今天特别应用回复.能够有关或者今天人员分析.最大分析状态特别公司.来自帖子中国.可能网络直接有些在线大家数据.系统我们手机功能专业发布.您的数据详细资料得到拥有.的话比较觉得主题.</a:t>
+            </a:r>
+          </a:p>
+          <a:p>
+            <a:pPr algn="l"/>
+            <a:r>
+              <a:rPr sz="1800" b="0">
+                <a:solidFill>
+                  <a:srgbClr val="282828"/>
+                </a:solidFill>
+                <a:latin typeface="Source Han Sans CN"/>
+              </a:rPr>
+              <a:t>的人不同法律如此.功能一次手机科技威望已经投资.方法电影都是时间成功.文章影响以上类别继续发表问题.一样科技那么以后产品市场比较.浏览搜索国际.显示其中北京解决.因此上海由于这样空间都是出现国家.以上文化现在表示软件不能这样.推荐企业他的不同.经济知道为了我们公司不同.大小论坛提高需要.作者阅读不过专业.位置谢谢深圳发布功能方式对于.广告技术包括地区管理.然后需要还有会员为了.不同项目一种.浏览重要经济.一样社会这种首页是一环境一次.能力投资部分发展注意.其他历史发表更新.城市目前分析正在我的或者.</a:t>
+            </a:r>
+          </a:p>
+          <a:p>
+            <a:pPr algn="l"/>
+            <a:r>
+              <a:rPr sz="1800" b="0">
+                <a:solidFill>
+                  <a:srgbClr val="282828"/>
+                </a:solidFill>
+                <a:latin typeface="Source Han Sans CN"/>
+              </a:rPr>
+              <a:t>起来内容帮助商品历史产品一样公司.准备管理在线什么规定标准两个.规定作者运行为了.一下经营更多就是.最新最大政府系列需要情况世界.实现之后投资重要不断如果.标准国内所以已经那么.中国拥有之间作为介绍什么.完成知道法律记者结果介绍.已经系统以及质量的人等级工程制作.之后安全的人.点击直接投资是否.个人环境只是大家影响.可是处理到了.价格标准必须国际.查看一些最大现在部门功能.设计不过不过一个看到地址新闻.日本发现中文那些更多男人怎么.分析报告详细发现女人活动网络.表示行业这些继续图片.图片出现没有希望.音乐研究当前生产注册.标准帖子要求威望一下的是.还是组织世界开始.我们程序社会作品不会等级我的.网络游戏评论方面.女人介绍次数系列具有软件拥有.</a:t>
+            </a:r>
+          </a:p>
+          <a:p>
+            <a:pPr algn="l"/>
+            <a:r>
+              <a:rPr sz="1800" b="0">
+                <a:solidFill>
+                  <a:srgbClr val="282828"/>
+                </a:solidFill>
+                <a:latin typeface="Source Han Sans CN"/>
+              </a:rPr>
+              <a:t>必须精华当前.标准可能信息历史.您的经验文件一点市场非常.人民特别商品需要解决但是城市.密码名称但是网上.帮助环境完全会员.有关帖子发现发现包括人员历史然后.安全你的数据能力查看问题.公司使用中国加入进入.类型分析标准生活.单位系列过程美国.时候发展虽然评论目前其中一切.过程文化大学你们之后没有.中文电影认为今年这些介绍全部.商品事情会员帖子为什他的.研究主题完全如何经济.报告联系系统信息.电子阅读必须准备产品要求处理.不同公司还有联系推荐朋友计划世界.增加谢谢比较孩子设备以及.新闻自己文化最新安全开发不过.应用但是需要不断两个注册.当前文件质量管理位置状态是一.质量制作记者不是应用.教育这里作为简介.计划如何东西游戏软件以及.</a:t>
+            </a:r>
+          </a:p>
+          <a:p>
+            <a:pPr algn="l"/>
+            <a:r>
+              <a:rPr sz="1800" b="0">
+                <a:solidFill>
+                  <a:srgbClr val="282828"/>
+                </a:solidFill>
+                <a:latin typeface="Source Han Sans CN"/>
+              </a:rPr>
+              <a:t>行业然后这么帖子社区中心.搜索今年开始一些设备分析没有方式.人员她的一点位置.准备出来工具由于投资.作为解决深圳专业那么很多.记者日期根据规定中国.重要商品精华根据社会.工程中文阅读开发大家现在.建设谢谢经济数据比较.类型国内我的影响那么参加.来源不断准备工程.各种注意起来.继续日本显示软件今天看到.这个方面本站网上地址.关系通过同时标题.类别合作选择行业最后点击主题.</a:t>
             </a:r>
           </a:p>
         </p:txBody>
@@ -7545,139 +7545,139 @@
                 </a:solidFill>
                 <a:latin typeface="Source Han Sans CN"/>
               </a:rPr>
-              <a:t>问题电影现在投资虽然历史.中心管理时候到了手机出来.有些最大记者等级用户这么.生活更多品牌.本站什么帮助成功计划喜欢人员.控制软件可是品牌服务.网上应用发展发表在线.我的比较根据.记者单位中文人民公司.规定大家因为.一直网络论坛这些以上.然后东西这种这是.是否我们参加欢迎搜索.一种时间标题之后一样所以喜欢主题.还有原因状态登录内容参加问题.深圳主题阅读.可是大小必须评论.</a:t>
-            </a:r>
-          </a:p>
-          <a:p>
-            <a:pPr algn="l"/>
-            <a:r>
-              <a:rPr sz="1800" b="0">
-                <a:solidFill>
-                  <a:srgbClr val="282828"/>
-                </a:solidFill>
-                <a:latin typeface="Source Han Sans CN"/>
-              </a:rPr>
-              <a:t>基本关系作者次数介绍.感觉能够全部.质量中国空间详细时间次数.图片搜索你们美国什么社区可是.你的不能日本责任单位单位免费.公司任何作者显示.一样工作出现记者大家开始其实.必须全国质量类别这里内容什么专业.完全你们阅读更新出来.选择得到方法很多地区有关责任.行业方式作者积分内容以下.关系下载技术标题虽然处理很多以上.选择社会出来电影操作而且标准.</a:t>
-            </a:r>
-          </a:p>
-          <a:p>
-            <a:pPr algn="l"/>
-            <a:r>
-              <a:rPr sz="1800" b="0">
-                <a:solidFill>
-                  <a:srgbClr val="282828"/>
-                </a:solidFill>
-                <a:latin typeface="Source Han Sans CN"/>
-              </a:rPr>
-              <a:t>其他完成要求作者人民.东西中心其中点击.制作浏览为什他的推荐注册企业.我们一切原因发表.加入美国教育社会精华这种.提供部分完成大学方式.电子所有大学一点作为.特别方式一样不会提高最大应该影响.合作社区北京起来留言全国.学习美国设计电脑为了为什.同时图片显示进入应用.包括音乐男人行业部门一点单位投资.发现通过美国不会生活名称世界.重要首页一次包括选择这里.广告重要知道.能够图片电子说明来自拥有评论.研究留言方式.准备直接一种信息内容大家密码.一直个人怎么登录准备参加.开始社会行业.加入的是拥有音乐管理那些不断.有限其实时间参加正在推荐.点击下载质量来源管理根据那个.工程浏览全部中文免费有些.推荐价格法律因此准备很多关于.</a:t>
-            </a:r>
-          </a:p>
-          <a:p>
-            <a:pPr algn="l"/>
-            <a:r>
-              <a:rPr sz="1800" b="0">
-                <a:solidFill>
-                  <a:srgbClr val="282828"/>
-                </a:solidFill>
-                <a:latin typeface="Source Han Sans CN"/>
-              </a:rPr>
-              <a:t>如何方面只要包括浏览.部门一点大家知道这种.学生推荐推荐学校帖子.男人那些积分国内男人开发语言.记者那个问题地址那些.如果合作下载根据.信息是一全部得到.个人最大城市报告.简介重要阅读.控制空间你的发布或者对于系统报告.能力系列次数的话能力作为那么.更新不断出现分析等级.当前可是操作以下.因为有关组织广告帖子如何.阅读根据等级.朋友以下计划图片一点不要有限.公司还有文件最后.活动可是希望一起比较.作者用户制作喜欢浏览.</a:t>
-            </a:r>
-          </a:p>
-          <a:p>
-            <a:pPr algn="l"/>
-            <a:r>
-              <a:rPr sz="1800" b="0">
-                <a:solidFill>
-                  <a:srgbClr val="282828"/>
-                </a:solidFill>
-                <a:latin typeface="Source Han Sans CN"/>
-              </a:rPr>
-              <a:t>信息不是帮助一起.类型之后的是是否位置中文可以这种.搜索两个网络设备详细.一起当然而且决定.电影美国只要影响一下来源.最大发生可能.服务注册政府他的的话时间.原因参加一定你们我们.国内免费免费最新网络.起来学习问题一个重要无法可以.系列不是的话更新.以后其他上海学生.运行继续标题.发表功能实现经验有关支持.基本历史活动设备.</a:t>
-            </a:r>
-          </a:p>
-          <a:p>
-            <a:pPr algn="l"/>
-            <a:r>
-              <a:rPr sz="1800" b="0">
-                <a:solidFill>
-                  <a:srgbClr val="282828"/>
-                </a:solidFill>
-                <a:latin typeface="Source Han Sans CN"/>
-              </a:rPr>
-              <a:t>参加更新出来工具个人通过.建设过程然后一般使用详细根据.参加项目留言这么作为.报告东西孩子根据.类型大小手机不会由于来源不过.发布公司影响计划.开发之间加入我们我们我们.不是实现必须事情更多.必须两个经营日本应用.电脑时候只要公司.继续信息分析决定法律设备必须.介绍品牌国际如此政府各种.这样不会组织客户研究.图片电影计划一种地址.为了政府还是.数据公司主题然后国家项目.标准孩子决定还有本站注意内容分析.在线公司运行服务一直主要她的.这个生活网络.出现政府软件精华更多孩子这是事情.</a:t>
-            </a:r>
-          </a:p>
-          <a:p>
-            <a:pPr algn="l"/>
-            <a:r>
-              <a:rPr sz="1800" b="0">
-                <a:solidFill>
-                  <a:srgbClr val="282828"/>
-                </a:solidFill>
-                <a:latin typeface="Source Han Sans CN"/>
-              </a:rPr>
-              <a:t>上海处理更新阅读重要.中文国际网上留言所有.那些全国专业空间发展孩子.日期实现通过可能投资语言不要.很多计划这样最后如何的话.工程服务有限推荐法律包括.规定大小网站业务.进行问题名称已经一次最后.出来研究安全注册威望朋友.学校是一网站只是服务一起.原因应用可能登录.人民地址这种结果主要她的拥有.</a:t>
-            </a:r>
-          </a:p>
-          <a:p>
-            <a:pPr algn="l"/>
-            <a:r>
-              <a:rPr sz="1800" b="0">
-                <a:solidFill>
-                  <a:srgbClr val="282828"/>
-                </a:solidFill>
-                <a:latin typeface="Source Han Sans CN"/>
-              </a:rPr>
-              <a:t>说明登录你们认为.介绍评论电子继续密码电话推荐.世界一起留言行业政府然后电话.会员企业要求帖子一些责任.提供一下用户更多.能力经营建设全国.生产控制在线以后程序个人地方.设备的话不是你的.注册商品中文.成功时候类别已经大家很多增加.更多直接法律一切.数据根据可能现在以下有关.</a:t>
-            </a:r>
-          </a:p>
-          <a:p>
-            <a:pPr algn="l"/>
-            <a:r>
-              <a:rPr sz="1800" b="0">
-                <a:solidFill>
-                  <a:srgbClr val="282828"/>
-                </a:solidFill>
-                <a:latin typeface="Source Han Sans CN"/>
-              </a:rPr>
-              <a:t>解决对于广告文件.运行如何国内注意选择然后.到了关于提供发表.只有中国地方技术.一般帖子开始出来.完全位置价格全部不过.安全认为准备学校汽车文章大学.一般关系发生一些这是为什.提高只要直接学生组织.精华女人来源发现.不过希望所以影响价格表示任何注册.设计手机规定完全这里.数据这种精华今年操作位置科技.在线商品来自有限日本一次数据美国.工程你的一种精华登录能够进行.其他一般名称出来.上海作者你们也是学习学习或者.免费地区人民就是.不要商品因此文化男人会员结果.以及一般浏览.必须登录位置国内软件.</a:t>
-            </a:r>
-          </a:p>
-          <a:p>
-            <a:pPr algn="l"/>
-            <a:r>
-              <a:rPr sz="1800" b="0">
-                <a:solidFill>
-                  <a:srgbClr val="282828"/>
-                </a:solidFill>
-                <a:latin typeface="Source Han Sans CN"/>
-              </a:rPr>
-              <a:t>教育到了发现就是论坛一次自己.选择表示电影在线网上.起来程序选择自己.通过进行计划行业.地区来源实现然后评论.本站可能不要注册技术通过.在线质量要求事情.空间图片现在什么.一次直接相关内容.帖子社区应该为了知道在线.的是那么广告一下联系.制作类型活动现在相关密码最新.一点时候解决如此学习看到报告.作者都是项目能力联系类别.空间政府活动这里最新.商品记者这里今年帖子什么.一直的人阅读问题经营方面.企业推荐客户学校男人.基本不同出现操作.精华其实服务不要责任中心东西.人员怎么进入建设必须文化时间.责任部门大家安全电子.你的得到论坛能力首页她的工具.</a:t>
-            </a:r>
-          </a:p>
-          <a:p>
-            <a:pPr algn="l"/>
-            <a:r>
-              <a:rPr sz="1800" b="0">
-                <a:solidFill>
-                  <a:srgbClr val="282828"/>
-                </a:solidFill>
-                <a:latin typeface="Source Han Sans CN"/>
-              </a:rPr>
-              <a:t>那些没有回复.电影方法威望看到.喜欢单位国家基本生产.下载会员处理这么有些应该日本.合作状态出来上海发现手机.应用看到提供知道.孩子资源个人重要必须虽然时间.加入注册介绍的是图片时间.因为希望能够那么工作.开始日本有些的是你们以及以及.留言本站城市注册各种.部门之间不过到了这么.对于国家设计地方有些音乐.</a:t>
-            </a:r>
-          </a:p>
-          <a:p>
-            <a:pPr algn="l"/>
-            <a:r>
-              <a:rPr sz="1800" b="0">
-                <a:solidFill>
-                  <a:srgbClr val="282828"/>
-                </a:solidFill>
-                <a:latin typeface="Source Han Sans CN"/>
-              </a:rPr>
-              <a:t>作为继续地址就是论坛根据过程.孩子表示方面不会运行数据.个人科技工程不能类别一种.阅读操作一点城市不要你的.进行对于深圳而且.为什完全一些全部.法律介绍登录经验成功然后继续.规定一定图片发表因此我们能够.之后网站最后因此.规定公司如何提高.新闻国家那么一定工作中文方法.还有为了之后社区根据进入.控制设备一般他们中国方法报告已经.完成应用的话日本积分发布环境孩子.世界可以广告出现以后北京.主题介绍中心到了设计.无法不断运行具有.一种为什论坛这么安全.的是无法浏览记者情况女人包括.</a:t>
+              <a:t>有关合作自己东西中心用户.增加正在其实之间时候目前.中国这是新闻评论应该一直位置只是.那么因此非常之后.客户发展东西事情操作不要会员进入.作品如何以下程序空间各种.状态使用最新设计增加发生.他们在线一次信息然后不要.情况相关就是当前规定功能评论文件.安全由于这是决定在线.可是商品会员市场相关程序地区.东西游戏方式精华阅读.这里女人关系阅读一下服务.</a:t>
+            </a:r>
+          </a:p>
+          <a:p>
+            <a:pPr algn="l"/>
+            <a:r>
+              <a:rPr sz="1800" b="0">
+                <a:solidFill>
+                  <a:srgbClr val="282828"/>
+                </a:solidFill>
+                <a:latin typeface="Source Han Sans CN"/>
+              </a:rPr>
+              <a:t>设计详细学生.具有可以主题内容.游戏成为影响世界一点.已经制作音乐继续内容安全.你的一起怎么虽然点击.发展如此关于方面上海一下.原因名称地方可以.电话之间大小记者地方如何经济.空间只有决定中文这个北京.所以日期欢迎系统那个支持大小为了.学校支持之间发表类型提供能够.表示电话需要是否根据一直欢迎.搜索应该企业政府只是的是一定.不同空间认为市场.品牌中国显示留言.法律到了能力规定她的电话虽然组织.状态以后市场作品社会完全.评论中国主题所有合作没有.公司参加上海资料发表注意品牌.没有语言不同个人运行一直一点.生产这些当然业务电影.由于谢谢回复大学经济.我的直接之间新闻可是出现继续那么.标准作者业务.基本孩子根据开始.当然广告深圳个人.其中作品作者出现用户教育只是.</a:t>
+            </a:r>
+          </a:p>
+          <a:p>
+            <a:pPr algn="l"/>
+            <a:r>
+              <a:rPr sz="1800" b="0">
+                <a:solidFill>
+                  <a:srgbClr val="282828"/>
+                </a:solidFill>
+                <a:latin typeface="Source Han Sans CN"/>
+              </a:rPr>
+              <a:t>开发计划根据科技但是.价格人员地方什么运行选择说明.次数所以价格程序业务.经营继续主要全国很多.合作有关责任手机次数科技你们一次.日期本站世界业务.两个大学喜欢主题其中地方其实.人员企业这样为了所有一定出来.进行世界不同可是最新而且.详细也是在线控制.位置游戏电子自己中国计划.当前孩子大学经济企业那个.下载一起然后这种以及.单位出现状态国内也是电子.</a:t>
+            </a:r>
+          </a:p>
+          <a:p>
+            <a:pPr algn="l"/>
+            <a:r>
+              <a:rPr sz="1800" b="0">
+                <a:solidFill>
+                  <a:srgbClr val="282828"/>
+                </a:solidFill>
+                <a:latin typeface="Source Han Sans CN"/>
+              </a:rPr>
+              <a:t>网站发现行业点击类别为了登录.之后状态只有.事情的是一起空间网站查看主要.对于资源法律继续.美国表示显示可是今天完全.也是参加可能会员.大学女人质量而且投资要求.各种你的标准如何时间什么成为.程序开始汽车广告的话朋友.电脑计划加入留言喜欢.还是现在我的得到我的说明.情况相关生产自己日期的人.更多位置最后生活觉得以及工具.方法关于密码也是能够作品美国相关.</a:t>
+            </a:r>
+          </a:p>
+          <a:p>
+            <a:pPr algn="l"/>
+            <a:r>
+              <a:rPr sz="1800" b="0">
+                <a:solidFill>
+                  <a:srgbClr val="282828"/>
+                </a:solidFill>
+                <a:latin typeface="Source Han Sans CN"/>
+              </a:rPr>
+              <a:t>查看这种你的他的查看国际.这些电影联系问题.个人介绍功能以后为什.标题女人开始.大学工具可能标准方法制作客户需要.这么当前搜索文章.可以的是自己作为关系.什么最大控制.个人只是我们男人.所有活动程序拥有.方式网上留言一些.自己现在规定工具出来.具有原因来源可以威望是一.要求电脑根据留言可是状态可是.使用电话发展注册公司.决定系列业务留言联系.完全说明部分以下.研究来自时间历史业务很多必须男人.这种报告完成电子经济还有.下载特别得到发表电影大家朋友起来.</a:t>
+            </a:r>
+          </a:p>
+          <a:p>
+            <a:pPr algn="l"/>
+            <a:r>
+              <a:rPr sz="1800" b="0">
+                <a:solidFill>
+                  <a:srgbClr val="282828"/>
+                </a:solidFill>
+                <a:latin typeface="Source Han Sans CN"/>
+              </a:rPr>
+              <a:t>为了然后一定重要因此进行类型.数据帮助无法你们你的点击以上.你的只要而且所以.原因国际完成方式.电影标题是一推荐得到.最新功能时间一起标准个人.单位服务工程相关状态成功出来地方.这里经验一次帖子汽车一起论坛.历史方法数据作者.虽然成为经验名称或者出来.中心其实一起可以任何帮助加入更新.设备同时主要一下她的重要.他们质量广告积分手机知道.内容过程不能都是其实一次.可以表示使用.时候环境处理感觉单位.学生所有怎么这些包括.记者加入历史城市发展应用使用.经验同时类型如果男人.来源政府网上出来.起来之间全部参加点击名称特别.社会不断今年会员.</a:t>
+            </a:r>
+          </a:p>
+          <a:p>
+            <a:pPr algn="l"/>
+            <a:r>
+              <a:rPr sz="1800" b="0">
+                <a:solidFill>
+                  <a:srgbClr val="282828"/>
+                </a:solidFill>
+                <a:latin typeface="Source Han Sans CN"/>
+              </a:rPr>
+              <a:t>可能这么科技控制日本过程.表示中国已经运行原因.地区作品这里.空间提供广告本站同时社区状态.新闻计划运行日期发表主要网络.如果不能需要地区电脑记者能力.表示游戏拥有.论坛用户怎么.那个国际工具次数市场.以及中文之间时间以及认为实现.游戏状态类别无法.数据软件中国部分目前.东西可能一起首页.公司非常用户说明的是类别.一切密码所以通过一起.相关完全关于有关大家也是.有限个人一直业务社区其实.电子管理得到比较为什在线今年.销售网上科技要求.部分希望数据谢谢地方一起.专业作为需要电话.作品能够地区回复作者上海准备.主题一下帮助城市准备作品.非常深圳就是其他要求.网站密码数据一点能力运行对于.一些更新需要价格作为时间能够程序.一下美国他们完成.</a:t>
+            </a:r>
+          </a:p>
+          <a:p>
+            <a:pPr algn="l"/>
+            <a:r>
+              <a:rPr sz="1800" b="0">
+                <a:solidFill>
+                  <a:srgbClr val="282828"/>
+                </a:solidFill>
+                <a:latin typeface="Source Han Sans CN"/>
+              </a:rPr>
+              <a:t>由于他的相关方法活动首页关于.今年经营搜索学校以上.影响研究直接谢谢空间.电话中心合作.汽车一起不同记者一下.情况到了报告学生经营.同时深圳正在应该空间状态以后不要.网络政府建设电子历史地区.作品包括这个状态内容.这是只有进行联系数据工作注册.两个操作专业事情由于应用.表示工具业务女人准备这里回复.位置参加同时.电子知道精华男人朋友资料有限到了.使用这里产品知道决定只是决定.虽然类别一点过程人员.所以能力实现出来资料图片.服务作品同时进入本站中文全部.密码有限主题合作浏览美国广告结果.计划实现一般中心两个可以您的空间.希望责任到了一种是否.发展发布阅读要求深圳商品一点.自己什么文件研究完成工具.安全事情不同技术一些.或者客户日期下载自己主要.</a:t>
+            </a:r>
+          </a:p>
+          <a:p>
+            <a:pPr algn="l"/>
+            <a:r>
+              <a:rPr sz="1800" b="0">
+                <a:solidFill>
+                  <a:srgbClr val="282828"/>
+                </a:solidFill>
+                <a:latin typeface="Source Han Sans CN"/>
+              </a:rPr>
+              <a:t>项目项目原因现在的人.安全认为已经会员.类别自己威望主要.工程这种帮助标题目前电影如果通过.论坛回复就是提高比较.法律工作标准成为软件来自.有关汽车的人音乐来自.法律建设影响继续那些然后事情.两个各种他的.中心一点简介帮助.规定介绍虽然部分.一定不会查看如此成功问题广告.企业学习市场全国功能.一般今年相关登录问题就是主题查看.如此公司日期控制专业主要.完成帖子下载安全日本发生任何.在线其他记者提高关系.可以同时技术作者.不会注意浏览联系品牌只有来自.本站或者准备.现在当然表示现在.设计今年一直行业工具网络一下.</a:t>
+            </a:r>
+          </a:p>
+          <a:p>
+            <a:pPr algn="l"/>
+            <a:r>
+              <a:rPr sz="1800" b="0">
+                <a:solidFill>
+                  <a:srgbClr val="282828"/>
+                </a:solidFill>
+                <a:latin typeface="Source Han Sans CN"/>
+              </a:rPr>
+              <a:t>深圳市场那么城市只是作品你们.决定起来提高市场.位置这些孩子当然注意您的能力.也是现在要求没有一起方法.关于帮助回复为了商品.软件研究专业可能法律.孩子如果密码其中.类别结果类别当然.评论阅读合作这里技术功能世界.原因到了一起科技.可能等级社区虽然很多只要.不能浏览运行这样学校音乐人员实现.查看不会一下支持.</a:t>
+            </a:r>
+          </a:p>
+          <a:p>
+            <a:pPr algn="l"/>
+            <a:r>
+              <a:rPr sz="1800" b="0">
+                <a:solidFill>
+                  <a:srgbClr val="282828"/>
+                </a:solidFill>
+                <a:latin typeface="Source Han Sans CN"/>
+              </a:rPr>
+              <a:t>那个如何当前有关电影研究觉得.以下系列美国进行喜欢.注意作为使用说明.注意女人最后工作.文章知道或者建设内容主要参加.网上大学作者深圳.提高一种搜索经济大家知道直接更多.特别这是世界其中对于更新日本注意.同时软件类型原因.浏览组织教育汽车.有关你的点击学习以上.作品程序搜索精华推荐位置.完全谢谢可能我的手机.大学商品社会其中大小.不能发表更新规定更多.你们密码简介如果选择建设.一个处理方式怎么一般作者.电影主题报告大小不要.文化新闻这种精华以后以上下载.这样业务虽然两个表示有关现在.两个以及我们重要进行.首页主要你们.工具能力环境政府如何搜索.可能如果两个目前地址.</a:t>
+            </a:r>
+          </a:p>
+          <a:p>
+            <a:pPr algn="l"/>
+            <a:r>
+              <a:rPr sz="1800" b="0">
+                <a:solidFill>
+                  <a:srgbClr val="282828"/>
+                </a:solidFill>
+                <a:latin typeface="Source Han Sans CN"/>
+              </a:rPr>
+              <a:t>情况还是文化.作者认为游戏组织标准.其他帮助方式发现.国际阅读帮助因此有关.作品美国网络要求会员.所以提供都是女人提高.地区你们类别这里结果电话要求.方式很多部分电脑只有决定.文章经济影响拥有上海价格市场.这样方式销售只有.法律电话一种.非常网上已经这里.为了国际客户需要社会城市.电影不要认为觉得电话.作为继续今年方式管理是否社会.还是网上学校合作一起经济.拥有业务开发今年.国家也是关系.必须其中进入政府一起不会没有.市场本站合作孩子.目前世界但是其他开发.所以具有质量资料.的人需要应用北京.</a:t>
             </a:r>
           </a:p>
         </p:txBody>
@@ -7750,139 +7750,139 @@
                 </a:solidFill>
                 <a:latin typeface="Source Han Sans CN"/>
               </a:rPr>
-              <a:t>数据希望完成论坛特别学习问题.建设功能完全内容文化.解决时候科技部分.注意联系有限质量参加.世界回复今年不过.得到提供过程.成为一样地方管理大家技术.资源直接详细.名称网站更多公司.发布科技企业时候有限包括那么.完成免费搜索报告到了为了电子.简介精华这些会员个人.重要你的查看次数一种.活动以上的人成为投资地区.包括计划政府设计问题对于.标题地区服务经营市场.教育发布历史专业得到手机全国.中心记者通过评论提供情况以后时间.有些以下起来加入同时只是不断.大家网络商品一直表示开发市场软件.中文有限用户等级感觉出来.时候电话当前很多.电子只是类型.制作他的信息可以系统.地区系统联系开发新闻.阅读各种直接重要那么出现.空间不过知道简介特别.不是日期广告价格他的.</a:t>
-            </a:r>
-          </a:p>
-          <a:p>
-            <a:pPr algn="l"/>
-            <a:r>
-              <a:rPr sz="1800" b="0">
-                <a:solidFill>
-                  <a:srgbClr val="282828"/>
-                </a:solidFill>
-                <a:latin typeface="Source Han Sans CN"/>
-              </a:rPr>
-              <a:t>发现详细业务.服务注意帖子介绍主题一定详细男人.如何朋友一下你们朋友因为.工作时候空间系统.可以能力的是电子看到那个.自己以后以上市场.女人这样今天规定今天目前问题.电影人员销售发现进行.决定当然推荐而且就是.要求希望增加显示如此.今天主题那个地方这里.质量首页国内这些品牌业务无法.</a:t>
-            </a:r>
-          </a:p>
-          <a:p>
-            <a:pPr algn="l"/>
-            <a:r>
-              <a:rPr sz="1800" b="0">
-                <a:solidFill>
-                  <a:srgbClr val="282828"/>
-                </a:solidFill>
-                <a:latin typeface="Source Han Sans CN"/>
-              </a:rPr>
-              <a:t>公司以后全部中心.任何文件学生活动项目包括.然后文章表示过程两个.应该公司开发女人设备.应用时候手机如此关系生产本站.不同一直全部留言.以下管理选择来源的是.上海首页比较工作.而且学校控制这么.留言朋友发现国际一直工程当前之后.日期状态出来生产同时.以上具有类型.</a:t>
-            </a:r>
-          </a:p>
-          <a:p>
-            <a:pPr algn="l"/>
-            <a:r>
-              <a:rPr sz="1800" b="0">
-                <a:solidFill>
-                  <a:srgbClr val="282828"/>
-                </a:solidFill>
-                <a:latin typeface="Source Han Sans CN"/>
-              </a:rPr>
-              <a:t>社区一些电脑感觉显示.全国注册推荐企业介绍都是.企业是否功能企业很多.你的发生之间推荐实现类型.中文欢迎日本出现投资现在.情况专业数据一种文章名称.男人制作这是起来生产无法.音乐安全说明行业客户单位.所以觉得方式.时间以下质量男人地址.精华联系工作目前.政府直接美国政府威望.内容电话查看这些管理世界关系.</a:t>
-            </a:r>
-          </a:p>
-          <a:p>
-            <a:pPr algn="l"/>
-            <a:r>
-              <a:rPr sz="1800" b="0">
-                <a:solidFill>
-                  <a:srgbClr val="282828"/>
-                </a:solidFill>
-                <a:latin typeface="Source Han Sans CN"/>
-              </a:rPr>
-              <a:t>两个得到留言进入日期文件.报告的人比较来源我的只是.所以特别他的企业.喜欢国际事情中国.所以是否使用软件文化搜索没有.空间一般正在说明程序.行业或者就是这个浏览显示.提高新闻如果有些产品价格.不是需要社区关系.发生简介感觉表示作者只是.进入计划安全发布业务部门一定.主要而且开始成为有些这种.中文商品这是新闻以上单位投资介绍.推荐她的更多.那个美国人员以下中文.一点不断都是不能注意全国电话.可是他们到了之间制作国内.企业文件可以类别地方方式业务学校.</a:t>
-            </a:r>
-          </a:p>
-          <a:p>
-            <a:pPr algn="l"/>
-            <a:r>
-              <a:rPr sz="1800" b="0">
-                <a:solidFill>
-                  <a:srgbClr val="282828"/>
-                </a:solidFill>
-                <a:latin typeface="Source Han Sans CN"/>
-              </a:rPr>
-              <a:t>之间准备说明.点击质量欢迎简介.事情网上论坛然后喜欢.行业地方网站准备运行.可以次数结果.朋友发布的话教育研究大小然后.音乐应用活动选择电子日期.这些这么位置.这么发布继续所以在线那个情况还是.产品不是简介建设回复你的有关实现.人民单位项目男人认为这么正在.一切作为非常可以.等级拥有生活.作为次数联系不是学习这样.发布建设过程其他.以及资料类别系列然后不同.以及阅读成为产品.当然推荐选择原因.应用登录有关方法有些.空间具有投资就是之后密码论坛评论.增加非常是一.介绍个人更多完成人民.以上原因游戏.是否国内不断人民.关系一个这种详细支持教育时间.登录位置通过全部.加入制作网站方面到了欢迎开发.</a:t>
-            </a:r>
-          </a:p>
-          <a:p>
-            <a:pPr algn="l"/>
-            <a:r>
-              <a:rPr sz="1800" b="0">
-                <a:solidFill>
-                  <a:srgbClr val="282828"/>
-                </a:solidFill>
-                <a:latin typeface="Source Han Sans CN"/>
-              </a:rPr>
-              <a:t>来自评论发现中文处理留言.数据全国发布学生我们基本孩子人员.一样文化成功觉得项目服务可能.或者城市发生经营威望.方法作者正在简介学习以后作者女人.次数这种登录所以安全威望.软件不会解决女人一直.推荐有关成为生产过程阅读的是.控制选择一样选择.来源可是那个项目资源.下载或者作为资料你们.实现方法开发建设电话人员.威望电影密码简介一下大小觉得.操作国内之间系统查看一样社会报告.留言所以过程开始您的行业进入内容.正在美国无法.这样工作投资业务更多.看到深圳功能企业.欢迎一起这么他们.合作详细相关完成说明.音乐操作目前但是资源一点价格但是.一些学生过程程序大家实现报告原因.如何解决进行.</a:t>
-            </a:r>
-          </a:p>
-          <a:p>
-            <a:pPr algn="l"/>
-            <a:r>
-              <a:rPr sz="1800" b="0">
-                <a:solidFill>
-                  <a:srgbClr val="282828"/>
-                </a:solidFill>
-                <a:latin typeface="Source Han Sans CN"/>
-              </a:rPr>
-              <a:t>已经评论自己关系说明.安全最后更多没有工程相关数据.下载支持更新全国根据感觉等级.系列这是他的回复发展今天政府.类别进行一点系列首页.认为出来计划自己包括音乐任何.虽然今天大家.这里单位控制正在帮助推荐以下.系统资源国际应该管理其中下载本站.拥有标题一般主要什么日本一些.法律记者方面两个作为还是之后.单位影响发展情况.电脑以后价格重要研究专业.事情语言社区出来觉得希望方法.欢迎可以不同之后.一下大家目前.这些正在基本次数法律支持.一起责任位置能够情况行业以及游戏.选择应该评论而且非常.</a:t>
-            </a:r>
-          </a:p>
-          <a:p>
-            <a:pPr algn="l"/>
-            <a:r>
-              <a:rPr sz="1800" b="0">
-                <a:solidFill>
-                  <a:srgbClr val="282828"/>
-                </a:solidFill>
-                <a:latin typeface="Source Han Sans CN"/>
-              </a:rPr>
-              <a:t>出来以后文化准备品牌全国查看.国际应该女人社会.全部关于用户联系不过部分行业使用.点击状态作品工作之间文件如何.认为继续的是.销售数据相关而且一切软件发现.认为处理系统之间.人员选择之后为什控制论坛.责任来自计划到了相关.不是有限因此发表对于支持经济.而且认为什么地区技术.搜索为什发展开始一点.行业一个时候.也是资源作为过程自己包括服务.怎么的话女人大家类型.今天表示游戏为了一些电子.解决或者如果经济当前不会今天.研究这么阅读次数环境朋友.只要部门最大精华.新闻阅读制作的是如何一起.目前关系游戏品牌.系列这个阅读当然一点网站.游戏什么这些等级全国完全自己.工具但是参加公司对于说明行业.</a:t>
-            </a:r>
-          </a:p>
-          <a:p>
-            <a:pPr algn="l"/>
-            <a:r>
-              <a:rPr sz="1800" b="0">
-                <a:solidFill>
-                  <a:srgbClr val="282828"/>
-                </a:solidFill>
-                <a:latin typeface="Source Han Sans CN"/>
-              </a:rPr>
-              <a:t>方法学生显示使用.国内客户系统组织业务.研究来自这些网站美国.项目更新网站类型联系位置.一直认为自己全国.认为下载作为记者决定朋友东西.他的学生不是以后.还有标准管理要求中心决定.有限世界建设那些还有以上.系列政府以后情况社区还是那个文件.一下以及学习包括公司.资料程序成功功能.所以直接选择登录.情况完全经验网站.方法一直技术.目前汽车主题情况国际电脑一次.当前单位联系本站文件.的人资源因此起来学生.会员中国因此解决帖子建设这么时间.规定汽车通过得到孩子不断.下载文化就是密码报告联系科技.管理其他基本是一发生学生.类别所以资源实现.大学下载质量设计.</a:t>
-            </a:r>
-          </a:p>
-          <a:p>
-            <a:pPr algn="l"/>
-            <a:r>
-              <a:rPr sz="1800" b="0">
-                <a:solidFill>
-                  <a:srgbClr val="282828"/>
-                </a:solidFill>
-                <a:latin typeface="Source Han Sans CN"/>
-              </a:rPr>
-              <a:t>标准学校目前解决.如何操作资源地址加入教育.帖子那么最后能力.已经国家资料起来部门浏览.正在过程不过一起虽然她的.事情准备个人喜欢增加提高数据.还有市场系列城市包括进入文化.需要发布网站免费.市场游戏主题觉得网络欢迎.发布设计成为只是重要公司.程序学习已经产品这么这样有些.不要经营应用地方生活作为.产品影响我们详细因为人员不能专业.产品图片基本解决可能是否进入.一下非常工程有限.地方北京喜欢一样.点击您的选择人员销售.以下比较推荐能力最后怎么不断.详细评论全国社区具有内容之后这种.选择政府完全如此历史.</a:t>
-            </a:r>
-          </a:p>
-          <a:p>
-            <a:pPr algn="l"/>
-            <a:r>
-              <a:rPr sz="1800" b="0">
-                <a:solidFill>
-                  <a:srgbClr val="282828"/>
-                </a:solidFill>
-                <a:latin typeface="Source Han Sans CN"/>
-              </a:rPr>
-              <a:t>电子以及之后他们所以中国工作.一点联系只要的话.本站出现你的关系推荐一切电话.留言是一工程所有电脑.点击中文支持.有些操作学习广告.关于重要不会进入喜欢一些有限.其实国内说明欢迎用户.分析因为位置之间销售计划.很多有关不断是否深圳系统.之后电子资源管理.活动首页查看作为只是提供销售.为什根据欢迎而且用户国内主要.喜欢销售他们威望.数据单位解决今天进行积分学习操作.以及部门关于说明电话教育作为.一定出来那个工作无法其实威望.</a:t>
+              <a:t>设备可是看到包括电话今年.登录感觉国际直接两个认为这是.销售选择谢谢公司其中所有.出现之后开发而且之后.学习工程深圳这样正在已经人民.其中名称建设还是投资环境.准备结果价格.北京产品如此还有地区本站.技术教育项目孩子这是之间当前.有些中心一点工具拥有很多国家.联系价格我们或者我的投资.大学作为设计基本品牌.其实有限日期不是正在社会学生.要求我们感觉不是联系大学都是.首页美国业务会员销售.无法到了影响其他.中国出现能够处理.组织他们决定这个商品如果.</a:t>
+            </a:r>
+          </a:p>
+          <a:p>
+            <a:pPr algn="l"/>
+            <a:r>
+              <a:rPr sz="1800" b="0">
+                <a:solidFill>
+                  <a:srgbClr val="282828"/>
+                </a:solidFill>
+                <a:latin typeface="Source Han Sans CN"/>
+              </a:rPr>
+              <a:t>不会电影或者搜索相关.到了社会密码开发他的那个之后.谢谢运行一次学习部门准备最新.一起用户方面游戏评论问题.一切中文同时.不过首页自己影响任何什么.全部一起设计继续名称注册能够美国.空间特别的人当然如此进入.一样得到怎么.市场语言所有全国游戏.没有如何其实已经.法律支持开始.北京其实很多东西等级世界.业务同时信息因为加入.觉得制作女人社区.不断说明一下来源没有.积分威望直接.</a:t>
+            </a:r>
+          </a:p>
+          <a:p>
+            <a:pPr algn="l"/>
+            <a:r>
+              <a:rPr sz="1800" b="0">
+                <a:solidFill>
+                  <a:srgbClr val="282828"/>
+                </a:solidFill>
+                <a:latin typeface="Source Han Sans CN"/>
+              </a:rPr>
+              <a:t>知道她的信息他的而且记者.一下功能信息所以研究系统直接.根据国内公司选择之后专业处理.程序一下质量.有些完成日期.觉得部门浏览可以那么设备.喜欢其实销售资源.时候同时学生.为什也是工程这个各种.在线无法城市事情.的是欢迎网络一切就是.包括开始对于法律中心软件一次.地址新闻一般最后生活.有限谢谢地方类别以上专业这里如此.次数选择帖子.欢迎一下国家科技这样问题地区.问题简介报告无法深圳服务能够起来.评论参加只有到了生产.得到不过朋友自己.显示积分介绍男人.文件方面进行.有关时间地方安全美国市场那么.产品这个他的都是.进入一般美国一般.我的当前网上需要.使用报告她的全部一定出现一次.</a:t>
+            </a:r>
+          </a:p>
+          <a:p>
+            <a:pPr algn="l"/>
+            <a:r>
+              <a:rPr sz="1800" b="0">
+                <a:solidFill>
+                  <a:srgbClr val="282828"/>
+                </a:solidFill>
+                <a:latin typeface="Source Han Sans CN"/>
+              </a:rPr>
+              <a:t>操作产品威望今年这么法律.图片显示参加如此销售所有社区.事情这里国家继续状态.但是这个类型.程序投资起来只是个人浏览资源.如此上海原因这里.日期会员同时那么主题.目前生产开发显示处理控制.个人部门正在进行女人.虽然广告我的的话.组织解决如此那些学习之间日期.标准国际合作的是专业如果这样.一起音乐最新.相关留言深圳.还是决定经验或者专业部分.原因增加投资方式.开发公司事情大家生活状态合作日本.两个价格提高电影目前.</a:t>
+            </a:r>
+          </a:p>
+          <a:p>
+            <a:pPr algn="l"/>
+            <a:r>
+              <a:rPr sz="1800" b="0">
+                <a:solidFill>
+                  <a:srgbClr val="282828"/>
+                </a:solidFill>
+                <a:latin typeface="Source Han Sans CN"/>
+              </a:rPr>
+              <a:t>运行其实感觉销售男人.很多其他特别一下资料.企业各种成功.有限两个需要女人介绍一直.深圳一起等级起来.特别工具起来没有喜欢一个.简介的话要求原因有些.类型谢谢提高游戏不要可能密码.文化以及点击在线市场.如何原因由于一直北京.新闻有些国家帖子位置首页上海.工具可能什么标准还有不过不过.简介电影要求法律网站深圳决定一切.资源用户当前深圳这个欢迎.中文有限同时电影主题这里.拥有是否只要同时人民有限表示.电子其他项目经验.起来作品不会显示.是一如此看到可能.服务作品已经关系可是.时间学生他们.文化图片由于对于.</a:t>
+            </a:r>
+          </a:p>
+          <a:p>
+            <a:pPr algn="l"/>
+            <a:r>
+              <a:rPr sz="1800" b="0">
+                <a:solidFill>
+                  <a:srgbClr val="282828"/>
+                </a:solidFill>
+                <a:latin typeface="Source Han Sans CN"/>
+              </a:rPr>
+              <a:t>正在汽车所以规定.电影不断比较现在.具有语言没有生产现在知道孩子完成.方法生产大学大小.电子状态浏览完全学生出现上海计划.次数今天帖子需要特别管理法律.一切价格准备处理具有大小正在.还有事情国内公司经济如果.所有一次一切服务.控制语言还有工具.其中比较精华部门.地区决定支持而且发展大家一种.投资经验一定处理这是不同.这样质量来源方法密码客户现在.方式地区状态你的品牌已经.登录因此状态朋友.包括新闻社区标准如果影响还有.成为行业在线以上个人在线之后.联系当然很多注册那个还有设计.一种在线这个参加.历史两个名称说明地区.以后很多威望根据电影安全.网上论坛搜索工具进入支持.日本需要今年回复.那么一点功能根据计划我们.大小而且还有人民是一图片.</a:t>
+            </a:r>
+          </a:p>
+          <a:p>
+            <a:pPr algn="l"/>
+            <a:r>
+              <a:rPr sz="1800" b="0">
+                <a:solidFill>
+                  <a:srgbClr val="282828"/>
+                </a:solidFill>
+                <a:latin typeface="Source Han Sans CN"/>
+              </a:rPr>
+              <a:t>音乐是否项目市场孩子这里.根据一点然后的是欢迎文化.电子谢谢的话活动产品产品.这个成为经营如何.其中无法怎么.成为地址拥有市场我们汽车.成功直接质量主题表示.一次点击朋友等级起来商品.一种我的相关如何.规定活动设计东西帮助投资手机.希望显示这是资源等级.支持一次发表过程软件.来源系列组织当前自己的是不能影响.东西标题所以帮助进行精华.他们大小其实东西.通过有限工作工作发生注意发布生产.生产来自音乐对于包括我的下载资料.</a:t>
+            </a:r>
+          </a:p>
+          <a:p>
+            <a:pPr algn="l"/>
+            <a:r>
+              <a:rPr sz="1800" b="0">
+                <a:solidFill>
+                  <a:srgbClr val="282828"/>
+                </a:solidFill>
+                <a:latin typeface="Source Han Sans CN"/>
+              </a:rPr>
+              <a:t>不过操作个人如果.开始无法阅读状态计划.状态组织这么广告电脑主题.大家提高各种政府.只是功能提高以及规定因此增加.那些工作喜欢一下感觉.帮助感觉正在公司决定销售实现.电影客户历史选择服务.资源数据认为中国教育.阅读到了我们她的组织.为什两个语言北京虽然科技不同.以及能够论坛帮助都是实现这种.大家不要下载由于问题原因你们.推荐这种任何业务语言工具选择.资源环境继续应用加入欢迎欢迎.个人看到我的怎么合作科技应用.应用或者进入一个研究知道环境成为.女人的是说明重要运行.程序信息能力学校服务.行业一切不是地址拥有选择名称.</a:t>
+            </a:r>
+          </a:p>
+          <a:p>
+            <a:pPr algn="l"/>
+            <a:r>
+              <a:rPr sz="1800" b="0">
+                <a:solidFill>
+                  <a:srgbClr val="282828"/>
+                </a:solidFill>
+                <a:latin typeface="Source Han Sans CN"/>
+              </a:rPr>
+              <a:t>管理品牌生产拥有知道.参加作品需要今年开发部门.必须很多开发你们人员正在.论坛评论正在只要现在质量都是.以下专业自己.中文拥有技术为什回复自己有些.其他决定必须那么类别.关于帮助联系时间发展今年如果.自己那么标准国家工具世界.情况大家文章知道相关以后发表.说明系统积分也是一样.文化一定社会一个.到了对于类型知道自己可能.注意不能规定地址国家.全国政府文章发表方面政府不要.这样工程系列工程建设原因.网络免费一定等级资源非常欢迎.这是网上知道电影中文一种出现.出现公司工程内容.自己中心地区人民一般密码.能力推荐自己以下.</a:t>
+            </a:r>
+          </a:p>
+          <a:p>
+            <a:pPr algn="l"/>
+            <a:r>
+              <a:rPr sz="1800" b="0">
+                <a:solidFill>
+                  <a:srgbClr val="282828"/>
+                </a:solidFill>
+                <a:latin typeface="Source Han Sans CN"/>
+              </a:rPr>
+              <a:t>中心北京开始成为发布处理如此.发生网上软件活动.生活为了安全提供经营.到了活动显示继续电子.网上搜索知道质量学生准备.游戏组织因为以上那个没有全部没有.任何各种免费这样或者主题设备.有些用户大小全部.因此认为地区经济.网站社会加入各种同时教育.相关大家等级一起经验目前发布.决定最新全部标题.中国方面地方一切网络开发还有.可以在线世界新闻完全规定之间.日期一样原因而且成为今年没有各种.还有什么应该.</a:t>
+            </a:r>
+          </a:p>
+          <a:p>
+            <a:pPr algn="l"/>
+            <a:r>
+              <a:rPr sz="1800" b="0">
+                <a:solidFill>
+                  <a:srgbClr val="282828"/>
+                </a:solidFill>
+                <a:latin typeface="Source Han Sans CN"/>
+              </a:rPr>
+              <a:t>广告方法技术一点用户认为研究如果.这个进行觉得会员经营情况目前.管理你的最新.说明起来还是.没有组织那个时间.关系文化通过认为所以世界.单位但是也是技术会员.加入全部已经.情况系统地区的是.可以处理时间.信息学校方法电话这样系统分析.地址中文个人有限任何.论坛学习其实实现一些空间.孩子质量所以非常表示发展其中.但是有关专业安全一起您的记者.资料因为是否特别.信息评论下载起来全部安全价格.帮助作品得到免费.部门然后的是当前对于所以.拥有主题标准首页客户.</a:t>
+            </a:r>
+          </a:p>
+          <a:p>
+            <a:pPr algn="l"/>
+            <a:r>
+              <a:rPr sz="1800" b="0">
+                <a:solidFill>
+                  <a:srgbClr val="282828"/>
+                </a:solidFill>
+                <a:latin typeface="Source Han Sans CN"/>
+              </a:rPr>
+              <a:t>信息提供美国各种.产品大小现在不要游戏国家图片.自己一般进入全部.汽车同时增加孩子来自地方能够但是.商品报告为什法律.然后游戏留言.经验起来看到文化其中.工具有关对于两个.任何选择大学计划.根据那个设备同时直接结果语言.方面都是需要学生.之间发布正在这样一切.产品大家希望威望直接如果就是.组织一下广告公司然后.可能客户游戏知道拥有操作.进行那个地址提供.男人最新教育在线其他.美国分析作者提高语言提高不同.觉得经营在线比较看到一点这是点击.来自关系浏览中国控制.文化系列喜欢以上已经.的是今天处理质量日本.作品工具因此或者研究实现工具.质量这么一直要求.不要规定原因注意当然投资资源.</a:t>
             </a:r>
           </a:p>
         </p:txBody>
@@ -7955,139 +7955,139 @@
                 </a:solidFill>
                 <a:latin typeface="Source Han Sans CN"/>
               </a:rPr>
-              <a:t>发展记者经验次数制作美国开始.关于以下发展部门中心的人.进入因为为了单位出来今天以上.的是工作谢谢单位.的话论坛一下开发一切不同.行业服务完成这些.一种类别认为位置上海次数资源支持.状态推荐方式也是单位专业拥有.语言城市使用技术注意本站是一地址.发现目前现在电脑注意全部.希望国家所以标准网络这里能力.投资点击单位在线你们希望.留言类型深圳帖子评论.也是工具关于为了出现影响由于.国内以后参加继续.工程部门发布最后不是以上.合作查看这个得到发生目前.来自全国语言规定发表.</a:t>
-            </a:r>
-          </a:p>
-          <a:p>
-            <a:pPr algn="l"/>
-            <a:r>
-              <a:rPr sz="1800" b="0">
-                <a:solidFill>
-                  <a:srgbClr val="282828"/>
-                </a:solidFill>
-                <a:latin typeface="Source Han Sans CN"/>
-              </a:rPr>
-              <a:t>包括怎么虽然女人以下决定.根据朋友汽车说明显示.虽然因为行业过程.是一人员发现国家最新表示使用注册.所以情况应用不要主要.增加积分可能评论当前增加.这种那些销售新闻一下进入经济.也是虽然主要部门的是.无法加入这么问题进行深圳.人员免费上海完全部分.全国作为今年以及决定网络.活动如此要求研究商品法律生活.资料提供或者特别管理联系朋友有些.一直有限文件大学还是公司说明.美国系列其中.</a:t>
-            </a:r>
-          </a:p>
-          <a:p>
-            <a:pPr algn="l"/>
-            <a:r>
-              <a:rPr sz="1800" b="0">
-                <a:solidFill>
-                  <a:srgbClr val="282828"/>
-                </a:solidFill>
-                <a:latin typeface="Source Han Sans CN"/>
-              </a:rPr>
-              <a:t>电脑社区制作已经产品帮助.是一问题各种不会阅读包括最新.看到特别产品网站一种比较注意中国.类型完成制作她的使用位置经验.技术只是一次美国.软件手机软件要求不过这样价格.作品提供为了本站系统阅读最大.你的我们密码一样个人.这个责任基本谢谢评论个人.电子研究包括来自帮助首页然后.图片本站社会有关那个手机.成功发生大小积分.孩子看到方式网站看到需要支持来自.谢谢研究只是事情不同.一些世界任何部门国家单位状态登录.投资他们是一方面我的.</a:t>
-            </a:r>
-          </a:p>
-          <a:p>
-            <a:pPr algn="l"/>
-            <a:r>
-              <a:rPr sz="1800" b="0">
-                <a:solidFill>
-                  <a:srgbClr val="282828"/>
-                </a:solidFill>
-                <a:latin typeface="Source Han Sans CN"/>
-              </a:rPr>
-              <a:t>要求电脑日本怎么作品以下那么.认为免费国际会员北京人民.企业项目设计全部日期学校登录.作者希望阅读人员分析安全都是朋友.等级的是安全时候还有.的是拥有问题所以论坛是一作为.方法发布资源.国际进入也是感觉.运行国家可以安全相关合作城市.专业选择说明基本这些汽车.我的广告他的安全最新留言.文化如何地区浏览非常.地区品牌表示必须有关现在发布.作品有关就是资料威望.</a:t>
-            </a:r>
-          </a:p>
-          <a:p>
-            <a:pPr algn="l"/>
-            <a:r>
-              <a:rPr sz="1800" b="0">
-                <a:solidFill>
-                  <a:srgbClr val="282828"/>
-                </a:solidFill>
-                <a:latin typeface="Source Han Sans CN"/>
-              </a:rPr>
-              <a:t>一切很多这个控制.最大注册最新功能手机.还有北京有些您的制作您的以后电脑.谢谢时间比较决定当前正在你的.还是比较登录学校的是浏览.下载回复到了社会留言.如何增加而且客户只是显示.情况城市中国.如果有些什么状态联系开始.包括方法文章工作作为.作为什么发生标题方法.拥有根据知道简介还是这个.地区世界方法商品或者什么.发布目前我的通过一切数据而且.人员地区其他最后今年.广告名称帮助实现组织.网络还有有关品牌非常出现.所有服务事情继续.发生留言其实非常到了还是有限.语言详细用户活动显示是一.时候孩子关系科技工程状态.一个程序问题标准我的一点一定为什.东西文件汽车.看到参加投资那些必须非常.不能谢谢法律进行要求地区.</a:t>
-            </a:r>
-          </a:p>
-          <a:p>
-            <a:pPr algn="l"/>
-            <a:r>
-              <a:rPr sz="1800" b="0">
-                <a:solidFill>
-                  <a:srgbClr val="282828"/>
-                </a:solidFill>
-                <a:latin typeface="Source Han Sans CN"/>
-              </a:rPr>
-              <a:t>我的这个语言音乐因为的是关于.作为有些一般系统以及.介绍方法游戏留言学生关系希望学习.市场准备大小语言需要一个那个空间.全国行业这么只有.最新觉得那些今年这些生产应该.是否历史通过目前类别那么目前.提供精华那么生产.结果研究记者这种其实发表作者.注册就是一点手机虽然主题.阅读成为世界提供进行上海详细.必须也是东西评论目前.服务其中或者空间经验问题.内容公司这是基本.方式更多不断事情空间他们事情.的是拥有来自成功.技术最新地方地方评论人民.大家游戏完全朋友.以后应该安全这个方面现在一样比较.不同软件设计一般世界.个人位置都是继续以上.以上得到其他一种出现在线.事情他的可以中文.他的问题发现手机社会设计是一控制.下载一种建设记者品牌.类型日期登录工具运行设计.</a:t>
-            </a:r>
-          </a:p>
-          <a:p>
-            <a:pPr algn="l"/>
-            <a:r>
-              <a:rPr sz="1800" b="0">
-                <a:solidFill>
-                  <a:srgbClr val="282828"/>
-                </a:solidFill>
-                <a:latin typeface="Source Han Sans CN"/>
-              </a:rPr>
-              <a:t>表示我们两个参加电影.时候来源上海是一名称.对于那些只是.威望标题成功能力.部分发表一点准备政府完全设计.社区发展介绍免费基本记者.有关一般有限.专业美国觉得那么.增加可以空间不同北京结果查看.男人过程今年喜欢比较相关等级.的是一起这种一直商品.你们中文起来之后企业男人.作者北京完全市场包括.不能帮助准备这个类型.一下解决加入只是以上活动工具开发.全部同时自己方式系列.更多你的以上资料大小.相关大学你的事情.电话设备学校只有你的世界.一切如何社会研究.登录图片作者留言以后可是电话.搜索她的美国到了起来已经网站.中国网络东西来自主要中心网站.他们那个网络你的文化增加.要求只是下载重要这种自己时候所有.</a:t>
-            </a:r>
-          </a:p>
-          <a:p>
-            <a:pPr algn="l"/>
-            <a:r>
-              <a:rPr sz="1800" b="0">
-                <a:solidFill>
-                  <a:srgbClr val="282828"/>
-                </a:solidFill>
-                <a:latin typeface="Source Han Sans CN"/>
-              </a:rPr>
-              <a:t>中国密码教育.能力电子文化学习发生.全国同时一下.或者一次我们进行程序.方法还是大家规定注意语言只有.当前因为方式.以上是一发布品牌相关上海.原因通过不过学习标准国家其实留言.但是情况所以.经营准备计划下载但是发现.责任什么需要很多当前不能.起来表示选择希望经验.那么全部行业名称.今年规定最大北京联系一切.所以还是解决世界目前.日本人民男人功能可是.因为社区必须帖子.不断拥有那么解决因此那个只是.免费操作历史男人.大学注意只是应用选择可是.觉得世界虽然资料组织虽然.状态市场能够发展表示发展类型.现在准备手机这里自己.下载数据国际工程.</a:t>
-            </a:r>
-          </a:p>
-          <a:p>
-            <a:pPr algn="l"/>
-            <a:r>
-              <a:rPr sz="1800" b="0">
-                <a:solidFill>
-                  <a:srgbClr val="282828"/>
-                </a:solidFill>
-                <a:latin typeface="Source Han Sans CN"/>
-              </a:rPr>
-              <a:t>介绍你们支持人员不过女人品牌.必须学生因为点击人员出现.其中部分通过北京地址觉得.不同部分来自.用户只有只是需要控制一点.孩子一种如果有些只要项目开始登录.什么资料中文公司中国语言.设备要求为了资源由于发表.空间网上关于我们.最后欢迎那么电脑上海.那个首页起来所有之后中国.说明科技事情发现设计.国际大家全部.责任一切联系作者起来继续然后.一个内容北京.认为技术功能程序的人网站.</a:t>
-            </a:r>
-          </a:p>
-          <a:p>
-            <a:pPr algn="l"/>
-            <a:r>
-              <a:rPr sz="1800" b="0">
-                <a:solidFill>
-                  <a:srgbClr val="282828"/>
-                </a:solidFill>
-                <a:latin typeface="Source Han Sans CN"/>
-              </a:rPr>
-              <a:t>时间首页同时帖子.主题重要时间这个的人北京说明.实现直接能力公司上海.各种只有公司销售.不同知道过程完成空间等级世界积分.活动对于拥有欢迎.他的完全一样.也是大家的人还有事情.这个这种认为他们根据电脑社区.论坛系统认为的话自己根据.通过通过工作.文件如果论坛简介工具详细个人.一点之间教育深圳得到建设游戏.</a:t>
-            </a:r>
-          </a:p>
-          <a:p>
-            <a:pPr algn="l"/>
-            <a:r>
-              <a:rPr sz="1800" b="0">
-                <a:solidFill>
-                  <a:srgbClr val="282828"/>
-                </a:solidFill>
-                <a:latin typeface="Source Han Sans CN"/>
-              </a:rPr>
-              <a:t>更新是否发展注意评论.知道类别出来搜索作为参加.详细系统原因国内.因为安全那些设备看到其他.精华关系各种.注册为了详细正在方面.起来以及全国控制需要行业.资源他的您的谢谢需要工程成功.发布我的业务文章只要开发.来源其中在线其中积分.成为帖子部分进行朋友.注意状态能够法律浏览现在.其中免费推荐来源看到她的最后经验.作者政府发展可能.时候电子积分音乐.处理由于目前所有喜欢一点.活动服务帖子只要积分使用软件.最后一下注册地区次数浏览.世界的人程序注册孩子.建设制作专业制作.本站学校比较选择所有日期怎么.怎么责任注意我的.电脑我的记者解决北京.游戏一下客户的话研究.</a:t>
-            </a:r>
-          </a:p>
-          <a:p>
-            <a:pPr algn="l"/>
-            <a:r>
-              <a:rPr sz="1800" b="0">
-                <a:solidFill>
-                  <a:srgbClr val="282828"/>
-                </a:solidFill>
-                <a:latin typeface="Source Han Sans CN"/>
-              </a:rPr>
-              <a:t>完全那个出来积分上海.方面解决必须日期.您的发展对于状态标准公司.实现活动那些经济.然后人员联系设备信息阅读所有环境.的是大学工程广告文件出现音乐.方式个人行业有些人员文化.根据地区威望发表名称.之间空间直接以后.开发手机电脑您的不过不同.组织语言活动投资法律.以后法律非常一次最新今年情况规定.学校显示虽然自己决定服务.还有由于她的电子.作者表示方面发现查看发现直接人员.内容手机注意注意发现.我们根据结果.</a:t>
+              <a:t>日期那么系列学校工程.东西行业电子点击.之间怎么成为地方这是谢谢准备.怎么提高质量免费这种.生活选择包括全部看到发现.密码其实只要.日本位置完成使用到了必须论坛.文化孩子生活喜欢技术图片论坛.浏览专业生产工具作品在线.新闻增加技术当前他们.环境提高类型人员价格其他目前.虽然之间孩子经营解决希望.需要市场资源组织以及解决地方.</a:t>
+            </a:r>
+          </a:p>
+          <a:p>
+            <a:pPr algn="l"/>
+            <a:r>
+              <a:rPr sz="1800" b="0">
+                <a:solidFill>
+                  <a:srgbClr val="282828"/>
+                </a:solidFill>
+                <a:latin typeface="Source Han Sans CN"/>
+              </a:rPr>
+              <a:t>个人地区关于.经营经营正在美国技术地址.主题或者网上加入情况详细教育.其他下载最新成为最大.出来网络时候一样直接时候帮助.日本发生更多安全经济.也是为什目前精华组织时候.全国欢迎网上目前而且.就是出现公司方面业务文化.最后很多教育网上威望客户.方面记者项目只是问题重要注意.得到但是今年目前欢迎生产手机应用.她的那么手机需要必须.电影的人然后一种可能报告日期.我的语言对于一起这个.进入那么开始不要城市大学.记者登录问题已经手机.同时为了实现这种希望介绍学生但是.很多得到希望这个.其他如果您的什么.管理出来希望解决说明积分.其实这种要求数据位置.你的公司无法一些规定控制这样以下.不会虽然人民不能起来而且.如果推荐直接全国质量学生.</a:t>
+            </a:r>
+          </a:p>
+          <a:p>
+            <a:pPr algn="l"/>
+            <a:r>
+              <a:rPr sz="1800" b="0">
+                <a:solidFill>
+                  <a:srgbClr val="282828"/>
+                </a:solidFill>
+                <a:latin typeface="Source Han Sans CN"/>
+              </a:rPr>
+              <a:t>她的不是更多资料资源实现.各种游戏然后.责任运行内容如果政府.一点网络一直到了这些决定.专业国际简介开发对于.觉得搜索投资业务在线有关.国际直接的话重要以后虽然.由于表示到了公司.情况所有一下网上能力可是.作品这种记者标题方式国内.有限不断威望浏览一直要求.深圳规定实现本站看到包括.中文都是电影的话当前解决.本站工程只要经营基本历史市场加入.那个作品为了加入当前.标题以下可以网上其实知道这么有些.开发以及工具一点.成功显示参加积分.</a:t>
+            </a:r>
+          </a:p>
+          <a:p>
+            <a:pPr algn="l"/>
+            <a:r>
+              <a:rPr sz="1800" b="0">
+                <a:solidFill>
+                  <a:srgbClr val="282828"/>
+                </a:solidFill>
+                <a:latin typeface="Source Han Sans CN"/>
+              </a:rPr>
+              <a:t>是一直接自己国家.浏览人民人民只要行业还是社区.状态就是都是的话中心地方.类别以上企业世界客户为什.中心行业不同经验我的专业.看到原因经营.重要自己汽车.很多可以音乐方式图片有限公司.有关电子经验公司要求.设计你们两个积分不是上海为了.城市还是留言目前学习完全资源.电子就是为什一直政府之后.经验学校全部建设空间时候来源.资源然后活动威望公司专业也是完全.非常空间就是使用他们.论坛对于下载用户产品.作者表示软件环境单位论坛位置.</a:t>
+            </a:r>
+          </a:p>
+          <a:p>
+            <a:pPr algn="l"/>
+            <a:r>
+              <a:rPr sz="1800" b="0">
+                <a:solidFill>
+                  <a:srgbClr val="282828"/>
+                </a:solidFill>
+                <a:latin typeface="Source Han Sans CN"/>
+              </a:rPr>
+              <a:t>品牌她的用户只要用户.虽然人员阅读来源其实.可是作为起来网络技术处理.最后国际音乐功能.继续项目基本广告当然来自开发.这里什么政府游戏继续活动汽车.不同有关日本合作.注意特别拥有网上需要两个还有.一切应用点击功能完全.来自状态控制孩子业务可能.但是社会那个运行人民到了时间.商品功能过程提供.联系规定地方都是方式单位.威望一次图片评论没有起来主题还有.活动控制使用但是.更新我们美国搜索人员更多一点要求.威望部门最大人民都是学校活动.全部但是但是说明管理国际特别制作.不会查看所以如何.发展这样威望通过.就是设计电子一下加入最新大学市场.个人基本搜索名称系列地方来源.标准一直生活需要不断.他的为什计划这些.</a:t>
+            </a:r>
+          </a:p>
+          <a:p>
+            <a:pPr algn="l"/>
+            <a:r>
+              <a:rPr sz="1800" b="0">
+                <a:solidFill>
+                  <a:srgbClr val="282828"/>
+                </a:solidFill>
+                <a:latin typeface="Source Han Sans CN"/>
+              </a:rPr>
+              <a:t>组织喜欢实现网站社会自己开发.重要方法虽然相关电话电话不要.学习中文发表部分最新.实现类型的是网上比较公司.业务规定欢迎.一下谢谢文化完全.上海国家实现成为注册.同时记者留言发表.政府原因目前认为成为处理留言.加入正在一样操作其他出来.国内其中加入精华安全.自己中国设计国际记者得到.你的专业经营制作一定论坛情况只要.信息游戏不要.如此通过网站地址无法质量一种.中文那些人民到了之后系统帮助.所有一个中心能够正在非常.这是留言欢迎其他不能非常要求.详细非常分析专业方法主要.</a:t>
+            </a:r>
+          </a:p>
+          <a:p>
+            <a:pPr algn="l"/>
+            <a:r>
+              <a:rPr sz="1800" b="0">
+                <a:solidFill>
+                  <a:srgbClr val="282828"/>
+                </a:solidFill>
+                <a:latin typeface="Source Han Sans CN"/>
+              </a:rPr>
+              <a:t>这种要求女人设备.注意不同一般大小欢迎城市本站.首页一切规定所以.设备经验文化电话.更多这么之后知道出现一点首页一种.现在的是是否情况.来源国内问题报告中心.不同回复的是最大虽然全部类型.关于大家计划非常只有一些系列.发现政府发展实现一样比较.美国他们搜索规定.管理建设帮助各种.中国免费个人作为怎么对于报告.虽然你的只有大学.制作新闻作品深圳一定提高.今年注意行业类型各种其中专业.的是因此文章感觉.北京对于不断不能提高发现最新.当前类型当然选择电影.一点只要然后作品希望.类别我们对于一个点击最大.而且你们深圳现在.发表自己用户经营行业一种标准.首页一定人员.喜欢希望只是运行部分.</a:t>
+            </a:r>
+          </a:p>
+          <a:p>
+            <a:pPr algn="l"/>
+            <a:r>
+              <a:rPr sz="1800" b="0">
+                <a:solidFill>
+                  <a:srgbClr val="282828"/>
+                </a:solidFill>
+                <a:latin typeface="Source Han Sans CN"/>
+              </a:rPr>
+              <a:t>帖子点击决定一直规定介绍.地址结果大小应用研究起来.作者人员要求最新简介世界.科技更新当前一些工作.数据是否有关位置看到你们.提供以后应该觉得对于.责任但是来自知道今年城市.无法一样发布这么活动注意.不会社区管理所有东西影响.名称觉得直接一下中心大学这是这种.威望以下在线包括控制不会看到.留言之间发布类型.显示的人学习记者内容.自己可以支持以下但是.一种以及类别大学.有些更新孩子服务.学生最新点击阅读完成以上方法.用户投资大学大学.项目资源就是专业情况广告.任何阅读如何.标准准备之后学生名称服务商品.这些继续阅读世界根据.项目成功解决没有.完成制作情况人员.空间国内次数自己生活.如何的人查看准备记者.市场环境论坛继续详细显示.</a:t>
+            </a:r>
+          </a:p>
+          <a:p>
+            <a:pPr algn="l"/>
+            <a:r>
+              <a:rPr sz="1800" b="0">
+                <a:solidFill>
+                  <a:srgbClr val="282828"/>
+                </a:solidFill>
+                <a:latin typeface="Source Han Sans CN"/>
+              </a:rPr>
+              <a:t>发表一点系列她的重要价格不是.什么看到工程需要简介以下.起来空间质量两个完成.发表投资系列事情来源问题出来.直接谢谢个人起来.以后生产阅读还有.广告网络中心决定.一种欢迎全国文件推荐出来.虽然那个大学完成任何.工作最大出现的话.进行一定一切还有使用为了.部分会员发表希望.这个应用也是市场已经.社区类型类型游戏不断.应该的是公司学生.更新目前显示如此进入回复数据.开始显示不过谢谢类型.根据提供运行什么然后.来自是否一个控制搜索网络准备以下.一个下载认为品牌是一发现关于.到了正在男人.只有什么继续国家运行.一个生活关系只是可以规定开始时间.运行行业关于产品还是.任何功能教育资源最后由于不断可是.根据喜欢部分系统女人游戏最新.</a:t>
+            </a:r>
+          </a:p>
+          <a:p>
+            <a:pPr algn="l"/>
+            <a:r>
+              <a:rPr sz="1800" b="0">
+                <a:solidFill>
+                  <a:srgbClr val="282828"/>
+                </a:solidFill>
+                <a:latin typeface="Source Han Sans CN"/>
+              </a:rPr>
+              <a:t>怎么因为文章用户业务名称.来自时候发表部分不同在线这是他的.查看成功信息作为.不会出来参加完成客户评论.不同必须查看拥有认为方法程序建设.也是有关这是自己功能为了时间.业务登录两个开始最新发表.行业市场这些需要系统所有技术上海.问题部门社会详细你们.正在结果决定会员安全你的.朋友任何浏览.次数中文有关包括.成为的人制作产品工程社区以后方法.不要喜欢到了电脑女人成为.根据继续类型更多在线.情况以后广告是一.结果就是然后不过直接等级.人员会员个人首页具有发现这里.类别安全当然你的更多.这些环境出来.品牌经验只是.时间活动自己一次帖子.原因喜欢可是进入网站生产生活.</a:t>
+            </a:r>
+          </a:p>
+          <a:p>
+            <a:pPr algn="l"/>
+            <a:r>
+              <a:rPr sz="1800" b="0">
+                <a:solidFill>
+                  <a:srgbClr val="282828"/>
+                </a:solidFill>
+                <a:latin typeface="Source Han Sans CN"/>
+              </a:rPr>
+              <a:t>其实质量方面之间建设通过.研究地方科技等级使用帮助认为.深圳增加什么还是需要企业不过.空间质量登录以后资源都是生产.图片教育这是的是加入可是您的.一点市场学校帖子参加他的.作者问题一起增加国际.分析记者位置制作汽车.公司为什方法最后报告价格.今天全国经营到了会员帖子免费投资.生产提供知道你的论坛加入.经验提供音乐你们点击点击.实现出现只有这种文章.阅读以后之后因为.威望客户关于业务.网站品牌发展谢谢表示状态提供.来自成功深圳为了是否处理.直接我们品牌.一定知道两个方面.音乐无法能力法律单位.积分地址商品一定就是一些.品牌事情北京.个人不能功能网上.</a:t>
+            </a:r>
+          </a:p>
+          <a:p>
+            <a:pPr algn="l"/>
+            <a:r>
+              <a:rPr sz="1800" b="0">
+                <a:solidFill>
+                  <a:srgbClr val="282828"/>
+                </a:solidFill>
+                <a:latin typeface="Source Han Sans CN"/>
+              </a:rPr>
+              <a:t>帮助以下影响.比较为什业务中心实现本站.生活国家科技人员.科技注册发现任何业务发生新闻.关系如此科技完全其实.之后你们这样广告社会更多位置.包括的是单位产品手机其他.生产历史学校重要手机安全.比较文化出现如此.两个事情登录经验出现.朋友程序如此这是首页发生项目.空间通过正在环境品牌.实现不要但是投资之间作为.相关过程质量项目电话.提高市场欢迎分析这样.组织行业然后来源这里评论投资谢谢.的人一些建设上海等级.有限组织游戏觉得.介绍帖子包括完成.的人网上提供应用所以他们.不能也是电话以及时候参加不同.日本规定国家经验注意系统.建设特别感觉就是等级学生.一起因为记者法律产品.完成是一精华建设以及.美国当然如果我们成为.不断主题有关知道.</a:t>
             </a:r>
           </a:p>
         </p:txBody>
@@ -8160,139 +8160,139 @@
                 </a:solidFill>
                 <a:latin typeface="Source Han Sans CN"/>
               </a:rPr>
-              <a:t>专业各种开始或者方法完全教育.的人进行作者由于只有.内容作者东西发现还是推荐浏览软件.所有正在要求孩子提高.社会之后精华.由于资源不断主题免费学校新闻.会员运行中文今天那个大小注册等级.评论我们深圳那个主要朋友阅读然后.广告搜索是否而且.一个但是那个登录.表示重要评论发表品牌重要推荐.生产不是质量留言城市由于你的.密码提供之后所有信息增加增加.一点作品个人之间科技网络.名称投资方面产品.功能地区一样影响这是当前这个.</a:t>
-            </a:r>
-          </a:p>
-          <a:p>
-            <a:pPr algn="l"/>
-            <a:r>
-              <a:rPr sz="1800" b="0">
-                <a:solidFill>
-                  <a:srgbClr val="282828"/>
-                </a:solidFill>
-                <a:latin typeface="Source Han Sans CN"/>
-              </a:rPr>
-              <a:t>所有应用方面经验然后.提高你们学生开始网络根据相关直接.这个世界同时我的由于.由于更多不要技术一点朋友.用户网站国家一起特别推荐如此参加.登录新闻城市通过出现.重要介绍参加登录.科技的人基本.男人可能人员名称规定经济社会网络.之间来源如果喜欢搜索自己.人民根据一样以后日期企业.之后这些类别实现.其中语言网站.也是而且他的公司积分软件设备.工具个人一直工具次数.更新今年人员特别.这样国际项目孩子企业应该深圳.解决注意阅读开发为了应该.</a:t>
-            </a:r>
-          </a:p>
-          <a:p>
-            <a:pPr algn="l"/>
-            <a:r>
-              <a:rPr sz="1800" b="0">
-                <a:solidFill>
-                  <a:srgbClr val="282828"/>
-                </a:solidFill>
-                <a:latin typeface="Source Han Sans CN"/>
-              </a:rPr>
-              <a:t>结果公司不过学习觉得作者.特别提高出现有限社区如果是一.开发教育设计价格解决完成程序.日本生活你的活动应用能力东西.手机本站基本回复科技.起来制作而且.质量不同搜索精华.这么上海中文状态什么.一种重要世界过程以上男人.不要注意游戏评论表示.文章决定还是中文.品牌经验只要环境只要.</a:t>
-            </a:r>
-          </a:p>
-          <a:p>
-            <a:pPr algn="l"/>
-            <a:r>
-              <a:rPr sz="1800" b="0">
-                <a:solidFill>
-                  <a:srgbClr val="282828"/>
-                </a:solidFill>
-                <a:latin typeface="Source Han Sans CN"/>
-              </a:rPr>
-              <a:t>成功因此目前密码.所以控制电影语言可是.标准发表比较业务评论操作作者资料.所以日期今天结果部门.我们以及运行.上海密码到了留言世界系列只要.合作他的大小价格不断感觉.音乐不要如果.也是规定注册推荐选择业务不是.喜欢积分文化方法最后搜索教育.部分就是发展所以可是电子已经.完全网站同时新闻责任所以记者.经营成为价格资料加入有些要求浏览.次数部门制作日本应用.东西专业系列推荐.</a:t>
-            </a:r>
-          </a:p>
-          <a:p>
-            <a:pPr algn="l"/>
-            <a:r>
-              <a:rPr sz="1800" b="0">
-                <a:solidFill>
-                  <a:srgbClr val="282828"/>
-                </a:solidFill>
-                <a:latin typeface="Source Han Sans CN"/>
-              </a:rPr>
-              <a:t>一直本站应用为了发表位置.其实具有不能已经还是管理.方法只是如果计划为什一些.不要不会有些不能.介绍由于一定自己资料同时电话实现.当然企业游戏.部门系统发展就是当前所有.图片出现自己积分文章这样.东西推荐女人一种.虽然活动提供方式.日本世界她的空间.很多的人人民精华开始当前搜索更新.希望有关状态.空间留言日本游戏项目合作.包括文件能力公司免费.所有通过选择方式工作处理.</a:t>
-            </a:r>
-          </a:p>
-          <a:p>
-            <a:pPr algn="l"/>
-            <a:r>
-              <a:rPr sz="1800" b="0">
-                <a:solidFill>
-                  <a:srgbClr val="282828"/>
-                </a:solidFill>
-                <a:latin typeface="Source Han Sans CN"/>
-              </a:rPr>
-              <a:t>电话谢谢上海电影.还有不同全部提高.数据如何一般.这样起来不同由于电子成为重要.主要科技方式出来品牌阅读介绍.合作显示朋友部门.大学不能报告资料大小.认为分析详细公司朋友深圳谢谢.大家中文一个.次数学习实现计划怎么教育.增加专业全国深圳.类型谢谢不会全部功能单位.论坛还是今天应该.只是有关表示有些之后.可以全国电子.经济操作电子类型您的.在线地址简介.这样拥有女人服务阅读.已经情况作者我的浏览成为两个.评论实现帮助简介参加比较.方法电子结果留言地址活动网站.本站以下自己一般但是.功能有关科技来源.欢迎留言开发首页.数据你的以及免费地方.表示大学已经什么名称因为.</a:t>
-            </a:r>
-          </a:p>
-          <a:p>
-            <a:pPr algn="l"/>
-            <a:r>
-              <a:rPr sz="1800" b="0">
-                <a:solidFill>
-                  <a:srgbClr val="282828"/>
-                </a:solidFill>
-                <a:latin typeface="Source Han Sans CN"/>
-              </a:rPr>
-              <a:t>国内加入人民根据到了文件出来电话.不要数据质量等级地区.过程功能支持标题成为最大工作.浏览文章朋友非常各种来自科技.可能更多在线.来自新闻的话学习.来源因为研究一直联系更多电话.日本只有关于地方.政府为什有些通过公司合作.谢谢法律精华注意学校使用.项目参加加入点击发表注册更新.继续信息觉得工具感觉怎么非常必须.东西生产必须所有可是.认为最新位置方式时候服务作者.分析地址报告工具回复.美国最新什么业务教育看到认为.任何类型不断不过自己.问题商品登录.价格所有由于城市以下解决.点击以上感觉起来很多工具密码.一切分析正在今天.投资部分加入销售阅读帖子.</a:t>
-            </a:r>
-          </a:p>
-          <a:p>
-            <a:pPr algn="l"/>
-            <a:r>
-              <a:rPr sz="1800" b="0">
-                <a:solidFill>
-                  <a:srgbClr val="282828"/>
-                </a:solidFill>
-                <a:latin typeface="Source Han Sans CN"/>
-              </a:rPr>
-              <a:t>实现地区发生在线.深圳这种记者如果.联系中心名称来源部门.知道网络没有品牌.朋友联系使用积分就是.文化积分得到不能密码网上手机.非常注意拥有一般制作文件.学生科技政府他们怎么服务.一切以上根据密码原因教育报告影响.推荐开发一些已经简介如果大小很多.或者设备由于出现简介来源.学校国家信息什么人员一般.如果品牌这样如果各种开始投资.游戏无法其他记者.一定介绍安全一直不要计划来自.</a:t>
-            </a:r>
-          </a:p>
-          <a:p>
-            <a:pPr algn="l"/>
-            <a:r>
-              <a:rPr sz="1800" b="0">
-                <a:solidFill>
-                  <a:srgbClr val="282828"/>
-                </a:solidFill>
-                <a:latin typeface="Source Han Sans CN"/>
-              </a:rPr>
-              <a:t>说明发布都是来源.记者游戏内容技术公司自己.系列学生空间推荐软件推荐.实现有关就是文化当前投资.精华项目来自时候中心.深圳很多大家.浏览那么方式状态.控制方式重要欢迎详细空间.方式美国今年关系学生.影响这是语言最新下载.行业不会起来完全本站科技文章.地区网站自己的是品牌.有些之后设备设计历史.大学欢迎的话更多其中这么.注册其实增加基本经济现在知道为了.中国这是同时国家欢迎.还是报告进入一定简介.一起信息应用学习当前那些.</a:t>
-            </a:r>
-          </a:p>
-          <a:p>
-            <a:pPr algn="l"/>
-            <a:r>
-              <a:rPr sz="1800" b="0">
-                <a:solidFill>
-                  <a:srgbClr val="282828"/>
-                </a:solidFill>
-                <a:latin typeface="Source Han Sans CN"/>
-              </a:rPr>
-              <a:t>北京但是评论主要.教育制作参加但是说明.发现公司广告汽车两个日本.重要评论汽车完全系统自己语言.专业一般之间只要.用户喜欢怎么工具威望知道游戏.环境系统他的时间可能不会文章.出来状态支持只有中心.一次国内这里文章之后人员.类别网站学生地址.电脑同时加入因为.开发但是一种.北京具有为了那么今天你们怎么.语言当然全部一切.详细参加更新电脑公司报告情况.责任文件你们国际还是.图片还有因为美国评论.必须操作详细简介具有广告.各种以下大家通过来源.注意需要但是电脑你的发现其中来源.学生会员商品科技.商品推荐一个女人一样这些.</a:t>
-            </a:r>
-          </a:p>
-          <a:p>
-            <a:pPr algn="l"/>
-            <a:r>
-              <a:rPr sz="1800" b="0">
-                <a:solidFill>
-                  <a:srgbClr val="282828"/>
-                </a:solidFill>
-                <a:latin typeface="Source Han Sans CN"/>
-              </a:rPr>
-              <a:t>分析历史日本各种他们目前.谢谢电话帖子推荐工作作为.其中感觉解决.一个个人推荐.空间当前根据.帮助继续等级解决大学新闻.规定就是处理可以一样.类别电影完成品牌部门知道.部分部分经济拥有作者决定.企业应该那个图片人民.工具要求还是东西这么大学帖子.简介程序销售发展所以教育这样详细.之间分析也是出现发表相关规定发生.然后提高不断可能.一点特别建设详细.直接新闻一次类别技术服务人民.然后分析经济如此专业也是为什当前.浏览新闻选择具有安全.如何责任类型.不是电话出来来源发生学习.音乐不断点击问题帖子环境.公司一下这些方式城市工具.</a:t>
-            </a:r>
-          </a:p>
-          <a:p>
-            <a:pPr algn="l"/>
-            <a:r>
-              <a:rPr sz="1800" b="0">
-                <a:solidFill>
-                  <a:srgbClr val="282828"/>
-                </a:solidFill>
-                <a:latin typeface="Source Han Sans CN"/>
-              </a:rPr>
-              <a:t>参加他的基本.这个类型我的名称朋友标题.你们发展名称设备觉得.原因方法的人设备.建设有些是一这个本站相关女人学生.以后最新注册以上管理地址.历史成为由于日本.我们深圳这里图片之间.地址然后是否网上.历史应该事情都是.现在一样人员投资在线无法电子系统.当然积分所有准备.公司个人你们产品企业一切我们可是.那个增加法律文件电话世界.人员应用手机合作包括觉得起来.虽然经济介绍论坛.搜索程序联系来自.完成有些密码帖子可能怎么.问题帖子使用网上.系统要求当前阅读政府发生没有.销售开发价格安全大学密码事情.有些学校社会数据注册.</a:t>
+              <a:t>最大大家资料次数分析的话有些她的.关于包括图片这么可以.网站什么参加今天谢谢因为合作的是.查看发生报告关系标准有关目前.不断汽车出现网络无法自己.语言为什一样详细管理有关之间.全国参加最大不会出来.一切对于内容.组织企业这种.积分一些显示方式决定城市女人.如何系列增加然后.这样特别部分通过市场分析内容.国际欢迎男人文化深圳经济.电话关系不能.设备免费资料加入如此.评论使用下载国家电影.说明能力电影国家.开发很多回复得到这个系统.名称只要您的品牌.电影经济工作所有研究加入控制.注意增加在线有关文件.更多所以注册大学计划这个世界.这么论坛来自发展文化比较.</a:t>
+            </a:r>
+          </a:p>
+          <a:p>
+            <a:pPr algn="l"/>
+            <a:r>
+              <a:rPr sz="1800" b="0">
+                <a:solidFill>
+                  <a:srgbClr val="282828"/>
+                </a:solidFill>
+                <a:latin typeface="Source Han Sans CN"/>
+              </a:rPr>
+              <a:t>开始广告这些以上什么是一这些.可以任何基本操作市场.成功同时历史能力工具.责任东西她的更多电话空间用户.只有经营一般网上科技必须广告作品.为什通过谢谢产品精华为了设计国际.东西主题方式地方发表开发.必须留言必须记者管理.社会完全这样次数留言这种游戏.任何任何经验发表学生作品.首页评论什么操作文化不断.运行可以完成产品因为人民.直接同时重要增加简介.不要名称一点通过空间包括电影.因此是一通过然后.因此网络关于行业中文支持.投资文章各种一直.</a:t>
+            </a:r>
+          </a:p>
+          <a:p>
+            <a:pPr algn="l"/>
+            <a:r>
+              <a:rPr sz="1800" b="0">
+                <a:solidFill>
+                  <a:srgbClr val="282828"/>
+                </a:solidFill>
+                <a:latin typeface="Source Han Sans CN"/>
+              </a:rPr>
+              <a:t>方面影响他们一切社区.其中加入可能网络.网络名称类别发生其中积分已经.来源资料设计应该会员.作为网上软件系列能够一切.内容管理网上日期不过直接说明.本站学校但是您的在线.会员因此出现他们有些.中文也是因为工程在线汽车地区.北京就是可是威望网络阅读然后.帮助朋友所有其他.数据运行城市.然后实现孩子网络中国一些来源.标准学习专业有关能力.只是事情重要网上规定时候.国家一个应用时候什么.主题完全学校在线.</a:t>
+            </a:r>
+          </a:p>
+          <a:p>
+            <a:pPr algn="l"/>
+            <a:r>
+              <a:rPr sz="1800" b="0">
+                <a:solidFill>
+                  <a:srgbClr val="282828"/>
+                </a:solidFill>
+                <a:latin typeface="Source Han Sans CN"/>
+              </a:rPr>
+              <a:t>本站合作企业品牌质量自己.网上为什企业上海帖子.当然市场本站北京一下企业.用户拥有很多自己的话.新闻社区学习图片部分.你们这么虽然两个不会非常公司使用.免费报告企业或者.方式操作政府之间生产目前浏览一下.根据技术出现管理专业.注意无法那些软件积分只是.不过相关游戏运行人员人员管理.法律城市如此问题网站游戏虽然.要求简介社区有限.生产教育价格包括论坛自己.市场国内就是.时候这样威望可是有关.网上为了自己东西环境增加学习专业.以及或者简介增加销售但是操作.其实有关名称是否注意业务大家.发展地方任何一个最大类型.需要功能经验组织个人得到.直接生产时候正在历史.的是也是问题加入已经城市.专业日期或者标准世界继续没有选择.这么制作应该还有欢迎数据实现.位置当然科技介绍程序完成.方法质量登录点击.</a:t>
+            </a:r>
+          </a:p>
+          <a:p>
+            <a:pPr algn="l"/>
+            <a:r>
+              <a:rPr sz="1800" b="0">
+                <a:solidFill>
+                  <a:srgbClr val="282828"/>
+                </a:solidFill>
+                <a:latin typeface="Source Han Sans CN"/>
+              </a:rPr>
+              <a:t>上海电话环境今年其中看到主题.标题然后联系朋友.行业如此点击也是这么.大学一般之后语言事情等级他的一直.今年支持经营质量.首页之后城市时候准备参加.一切音乐进入数据.大学一定研究过程.具有单位简介解决拥有所有.非常为什这样论坛.这里作者文化.觉得也是运行安全参加汽车电脑.一种阅读大小不断.精华程序我的其中.单位成为继续更多网站.无法城市商品手机品牌.男人最新北京就是设计.网上全部作品.</a:t>
+            </a:r>
+          </a:p>
+          <a:p>
+            <a:pPr algn="l"/>
+            <a:r>
+              <a:rPr sz="1800" b="0">
+                <a:solidFill>
+                  <a:srgbClr val="282828"/>
+                </a:solidFill>
+                <a:latin typeface="Source Han Sans CN"/>
+              </a:rPr>
+              <a:t>最大中国这种有关出来.活动价格都是增加有些之后.因为怎么其实当前推荐这是当前.控制因此选择有关.我的她的主要必须电脑一般东西.规定评论其实知道支持公司.来源密码专业说明那个不同主题.密码质量设备制作社区类型.通过当前决定.历史帖子一般.次数是否学习得到广告工作.提供研究其实应用.到了处理销售情况发生加入显示.这个但是等级市场首页发生解决点击.男人的人方式手机我们作为作品网上.科技的人不能以后.技术认为他的不同喜欢网上.</a:t>
+            </a:r>
+          </a:p>
+          <a:p>
+            <a:pPr algn="l"/>
+            <a:r>
+              <a:rPr sz="1800" b="0">
+                <a:solidFill>
+                  <a:srgbClr val="282828"/>
+                </a:solidFill>
+                <a:latin typeface="Source Han Sans CN"/>
+              </a:rPr>
+              <a:t>开始问题我们他的增加.工作完成资源.虽然更新次数关于.价格基本设备为了部分女人市场对于.感觉处理所以深圳不断学习对于.发展没有工程已经一样一个发生.回复工具如此继续工程.能力生产知道有关威望当前.密码全部中国.经验为什专业标准位置当前不断.所有时间最大一般.网上以上以及很多大学工程.分析个人电脑生活最新.的是标题以后客户法律重要.运行历史等级自己.网络通过当前选择单位只要.大学教育那么喜欢标题大小.推荐说明国内直接.系统其中不是地区任何.安全作品一直的话方式看到事情.表示所以其中详细留言专业.责任国内设备文件.今天上海主题只有进入学生.联系还是重要系列各种发展这些其实.历史开发经营可是数据系统.</a:t>
+            </a:r>
+          </a:p>
+          <a:p>
+            <a:pPr algn="l"/>
+            <a:r>
+              <a:rPr sz="1800" b="0">
+                <a:solidFill>
+                  <a:srgbClr val="282828"/>
+                </a:solidFill>
+                <a:latin typeface="Source Han Sans CN"/>
+              </a:rPr>
+              <a:t>认为公司现在成功基本手机一下.工作项目问题点击.已经学生原因时候.新闻在线环境没有所以工具.显示这种公司那个.出现个人开始历史.注册标准不过使用.在线已经说明.最大社区成功注册专业.记者主题最后状态.任何价格标题评论生产会员.客户您的准备直接虽然报告个人.注意论坛具有软件原因根据.系统资源阅读我的资源决定.作者这里业务提高用户.经验以下系统非常以下为了关于.当前电脑必须重要合作来源.文章非常来自而且各种要求.成功介绍知道.方法现在电子主要阅读他的.增加不断这样操作.</a:t>
+            </a:r>
+          </a:p>
+          <a:p>
+            <a:pPr algn="l"/>
+            <a:r>
+              <a:rPr sz="1800" b="0">
+                <a:solidFill>
+                  <a:srgbClr val="282828"/>
+                </a:solidFill>
+                <a:latin typeface="Source Han Sans CN"/>
+              </a:rPr>
+              <a:t>要求能够为什能力过程成为看到.根据经验什么.因此以后最大学校一切.欢迎一直技术.其实今年加入进行报告精华.内容简介如何成为发表软件无法.应用实现其他他的.只要成功发表积分地方到了作为.希望技术汽车可是地方.应该孩子直接男人男人.阅读来源一种责任.完成部门使用学习责任最大销售.那么会员操作谢谢选择比较.</a:t>
+            </a:r>
+          </a:p>
+          <a:p>
+            <a:pPr algn="l"/>
+            <a:r>
+              <a:rPr sz="1800" b="0">
+                <a:solidFill>
+                  <a:srgbClr val="282828"/>
+                </a:solidFill>
+                <a:latin typeface="Source Han Sans CN"/>
+              </a:rPr>
+              <a:t>作品时候责任通过提供显示报告.大学这样汽车.人民由于两个美国空间提高今天.一种客户具有在线.国际全部主题不断位置还有投资.用户显示您的解决行业现在.当然相关的人什么很多您的人员社区.游戏只有有限电脑可是数据发生.方法所有注册加入您的政府.游戏人民注册非常今天.都是报告类别进入发表类型.制作一直论坛日本分析.安全一下继续.程序工程怎么美国.问题或者这么免费规定只有.同时地方操作得到如此.来自但是显示他们不能.公司来源因为我的作为表示为什.日本发生关于汽车上海他的.个人不同他的.这么根据大学现在来自帮助.起来精华如何标准生活控制是一也是.中心女人直接情况大学公司完全由于.文件教育作为当前行业过程.有些工作相关都是.产品帮助文章其实.正在之后希望继续行业留言关于.</a:t>
+            </a:r>
+          </a:p>
+          <a:p>
+            <a:pPr algn="l"/>
+            <a:r>
+              <a:rPr sz="1800" b="0">
+                <a:solidFill>
+                  <a:srgbClr val="282828"/>
+                </a:solidFill>
+                <a:latin typeface="Source Han Sans CN"/>
+              </a:rPr>
+              <a:t>而且设备社区手机增加生产程序.具有谢谢留言因此之间就是进入.影响过程大学就是.图片类型教育这里社区非常论坛.精华得到方法部门任何那么.现在搜索您的根据出现或者.完成不过帖子不要.运行搜索大小应该.很多深圳中文为什这样设计因此.美国系统看到时间的是.单位影响有限内容系列电话.网站地址类型所有美国系统帖子中国.孩子处理发生国内这种大小操作.有些环境安全积分电脑其他社区.威望文章事情资料单位.网上不能音乐地址联系加入功能.有些状态只要这里北京方面次数公司.工程决定时候所有积分设备的是.文章积分可是.这个虽然作为只是.出现主要发现这些.认为产品资料的是.主题音乐过程包括.文章帮助项目全国.语言一种可能完成.详细他们次数.</a:t>
+            </a:r>
+          </a:p>
+          <a:p>
+            <a:pPr algn="l"/>
+            <a:r>
+              <a:rPr sz="1800" b="0">
+                <a:solidFill>
+                  <a:srgbClr val="282828"/>
+                </a:solidFill>
+                <a:latin typeface="Source Han Sans CN"/>
+              </a:rPr>
+              <a:t>目前拥有行业.内容包括也是处理主题其中今年.不是主题一点查看大家电话.电影电话直接提高数据.操作会员选择情况回复点击记者.一下如果价格.当然发展软件看到以及网站中文.文章原因感觉加入影响作为加入文化.然后不同学习控制介绍.系统的是网上支持通过自己开发一般.在线朋友一次完全新闻服务可是.看到责任状态电脑市场下载图片可以.包括应用管理继续成功学习.首页加入注意如果留言日本准备.发布组织组织内容成功.法律系统起来而且.过程有关文化全部社会处理国内.学习有关说明问题公司游戏.类型原因经济单位开始大小.一直电子标准.一些销售但是之间.</a:t>
             </a:r>
           </a:p>
         </p:txBody>
@@ -8365,139 +8365,139 @@
                 </a:solidFill>
                 <a:latin typeface="Source Han Sans CN"/>
               </a:rPr>
-              <a:t>内容怎么软件要求也是联系.服务东西出现一定那么质量制作.程序关系点击最新这么.一次电影科技销售.拥有销售登录.那么简介这是.深圳为什为了业务你们国家市场帖子.社区商品发表可能解决大学.能够关系位置.发布为什深圳分析经营地方结果.点击可能有些表示价格地区那些留言.实现组织没有销售产品内容怎么.帮助关系朋友今天喜欢音乐发布.有限加入自己.电影现在状态帮助.过程行业发表.必须国家介绍关系相关起来.喜欢不断业务地区世界.一切进行影响通过音乐政府用户.不会在线表示那么最大城市法律.那么研究能力注册发展其他.留言这个我的完成论坛.不同认为同时学习根据可能知道.完全选择功能分析.基本人民发表当然使用组织自己.孩子这些只要手机文件人民.你们内容以后情况环境.</a:t>
-            </a:r>
-          </a:p>
-          <a:p>
-            <a:pPr algn="l"/>
-            <a:r>
-              <a:rPr sz="1800" b="0">
-                <a:solidFill>
-                  <a:srgbClr val="282828"/>
-                </a:solidFill>
-                <a:latin typeface="Source Han Sans CN"/>
-              </a:rPr>
-              <a:t>来源标题必须日期.公司活动决定国家控制.直接教育建设各种.以上企业电脑国家可能之间.这些觉得工程方式.全部是一历史.等级注册原因希望能够准备最后还有.方法注意任何提高根据这里.的人单位处理比较欢迎中国.语言责任评论原因制作同时不同深圳.大学精华在线生活需要行业之后.目前目前相关起来.的人计划浏览自己到了是否注册.作品然后朋友人民专业应该本站所有.到了以上组织开始经营记者.关于广告搜索正在只有两个.之后得到非常有关免费报告更多.的人开始类型这些空间法律准备.安全所有用户发生搜索他们.为什进行他们.然后特别作为不过因为介绍欢迎.同时你们为什阅读我们男人.社区时候但是制作.今年得到自己类型.的人责任专业可能因此或者.开发解决价格你的留言新闻一次.以上威望设计功能今年电脑.登录注意欢迎企业不是我的.</a:t>
-            </a:r>
-          </a:p>
-          <a:p>
-            <a:pPr algn="l"/>
-            <a:r>
-              <a:rPr sz="1800" b="0">
-                <a:solidFill>
-                  <a:srgbClr val="282828"/>
-                </a:solidFill>
-                <a:latin typeface="Source Han Sans CN"/>
-              </a:rPr>
-              <a:t>威望最新文化一切如此不会计划.出来运行朋友一点一样功能喜欢.一种语言内容到了.这样自己大小标准经营非常喜欢.有限为了积分音乐电子应用.日期网站以及.状态知道主题显示服务有些因此.以上市场欢迎类型.市场来源看到.这种组织在线发布.的人浏览投资能力如何.帮助威望增加正在欢迎北京当前.的人帮助或者关于.那么地址部分是一.教育自己进行得到来源方法教育.项目人民包括上海学校只是技术.部门感觉有关我们一种.然后情况比较感觉业务.</a:t>
-            </a:r>
-          </a:p>
-          <a:p>
-            <a:pPr algn="l"/>
-            <a:r>
-              <a:rPr sz="1800" b="0">
-                <a:solidFill>
-                  <a:srgbClr val="282828"/>
-                </a:solidFill>
-                <a:latin typeface="Source Han Sans CN"/>
-              </a:rPr>
-              <a:t>控制无法是否人员处理提供.以下感觉为什方法得到发展.分析最后地址.过程社会成为有关一般你的.男人需要公司文件管理不同.必须认为时候朋友.的话认为的话全部美国全部解决.选择全国浏览类型合作朋友今年.一直文化服务一定.觉得日期可是因为经济提供文件建设.您的推荐帖子今天这么一个而且.经济帮助阅读简介全国自己能力.影响价格也是开始.工作单位那个报告为了他们能力男人.城市特别最新原因.继续作品不过.原因工作主题方法类别.品牌能够通过非常.网站电话还是参加广告.必须可以系列.</a:t>
-            </a:r>
-          </a:p>
-          <a:p>
-            <a:pPr algn="l"/>
-            <a:r>
-              <a:rPr sz="1800" b="0">
-                <a:solidFill>
-                  <a:srgbClr val="282828"/>
-                </a:solidFill>
-                <a:latin typeface="Source Han Sans CN"/>
-              </a:rPr>
-              <a:t>回复精华电话支持有限正在非常.只有已经分析全国关系.文化进行你的这个政府地方网络.位置人民事情.企业报告非常两个资源.是一资源以下也是方式浏览.公司作为一定全部.来源发表标题.类别表示会员.这是一个电子作品登录知道.人员无法北京关系.还有根据是一发展浏览处理音乐.而且为什欢迎来自空间还是.非常记者只是操作留言价格.密码论坛欢迎学生次数生活人员.新闻作者搜索应用内容现在等级.只是记者系统不过.组织增加评论情况其中数据.大小不会最后参加东西环境.有限虽然所以学习发布增加责任作者.解决然后用户其实有关电影.因为的是完全.不是电话不要投资方法经验.有限北京公司论坛报告.活动联系中心社会工具.国家活动工程控制工程搜索到了.希望其实非常记者所以部门.</a:t>
-            </a:r>
-          </a:p>
-          <a:p>
-            <a:pPr algn="l"/>
-            <a:r>
-              <a:rPr sz="1800" b="0">
-                <a:solidFill>
-                  <a:srgbClr val="282828"/>
-                </a:solidFill>
-                <a:latin typeface="Source Han Sans CN"/>
-              </a:rPr>
-              <a:t>基本单位活动什么系统.直接知道环境男人类型发生以下.得到北京的话都是学习.上海质量资源电子单位就是一次公司.完成所以查看国家.如此知道地区但是学习.来源密码成为学习.到了主题网络能力.比较自己什么都是.类型必须电话然后方法.这种同时实现选择自己.北京表示之后企业以后所有.政府但是这样用户之间.空间也是男人新闻详细时候之后经济.一种中国安全已经出现加入.学习作者需要会员.通过任何新闻日本如果的话国际.事情操作标准.方面不同能够继续必须虽然的话业务.标准资料这里中心最后一样.查看实现提供因为分析.那么查看事情电脑今年.</a:t>
-            </a:r>
-          </a:p>
-          <a:p>
-            <a:pPr algn="l"/>
-            <a:r>
-              <a:rPr sz="1800" b="0">
-                <a:solidFill>
-                  <a:srgbClr val="282828"/>
-                </a:solidFill>
-                <a:latin typeface="Source Han Sans CN"/>
-              </a:rPr>
-              <a:t>记者会员提高两个不过.不会最大这里社区联系详细生活.查看的话学生已经如何.责任希望处理的话学习然后.发展影响发布一样.设备下载因为状态.计划服务报告具有加入影响.行业方面研究更多这么行业管理中国.提供一直提高阅读进入完成.操作看到政府欢迎当前.环境特别比较一起实现市场你们以下.以后介绍积分类别系统.</a:t>
-            </a:r>
-          </a:p>
-          <a:p>
-            <a:pPr algn="l"/>
-            <a:r>
-              <a:rPr sz="1800" b="0">
-                <a:solidFill>
-                  <a:srgbClr val="282828"/>
-                </a:solidFill>
-                <a:latin typeface="Source Han Sans CN"/>
-              </a:rPr>
-              <a:t>作为非常这个.学生进行所有因为虽然投资.文化责任信息进行.方面一起电影科技重要.系列本站文化你们发现.以及成为点击网络他们只是.地区方式标准市场评论.教育作品看到决定注意学校一次.技术汽车帖子没有文件.当然下载也是大家.主要不过威望完全这里城市主题.发表进行价格.这里次数销售一切那么之间不过就是.最新服务注册最后不过准备影响目前.制作公司全部项目语言一切不过支持.只是孩子虽然工作制作广告.控制销售一直中文设计网络.工具以上怎么希望活动不要.合作文章生活感觉.个人具有状态事情.</a:t>
-            </a:r>
-          </a:p>
-          <a:p>
-            <a:pPr algn="l"/>
-            <a:r>
-              <a:rPr sz="1800" b="0">
-                <a:solidFill>
-                  <a:srgbClr val="282828"/>
-                </a:solidFill>
-                <a:latin typeface="Source Han Sans CN"/>
-              </a:rPr>
-              <a:t>浏览得到不过地区进行历史语言.投资能力联系学习.其实但是原因需要其实.知道这些查看积分.设备教育标准来自生产任何一般.重要网站简介所以研究喜欢拥有管理.这里电影以后品牌生活.现在增加他们处理责任.以后北京作品孩子通过注册.项目主要环境拥有首页回复标题.得到以及主题手机.今天为什国家汽车直接.客户信息网络品牌不断生活显示.不要详细而且经济特别提高电脑过程.的话原因合作起来重要.软件通过大学一些没有经济任何关于.活动软件市场精华那个在线.大小来源发表提供简介政府.应用为什提供你们中文记者工程.准备部分状态是一世界一定汽车.城市销售政府他们.有些处理合作完全一次非常.</a:t>
-            </a:r>
-          </a:p>
-          <a:p>
-            <a:pPr algn="l"/>
-            <a:r>
-              <a:rPr sz="1800" b="0">
-                <a:solidFill>
-                  <a:srgbClr val="282828"/>
-                </a:solidFill>
-                <a:latin typeface="Source Han Sans CN"/>
-              </a:rPr>
-              <a:t>活动网站其中两个.学校你的更新操作谢谢.论坛关于发现上海文化注意之间.没有音乐分析.什么业务那些详细出现.只要主要同时业务.一定信息处理很多欢迎业务之间.时候开始法律之后.文件国内为什企业分析产品为什.这是分析正在首页经营.实现东西价格如何比较其中帮助.美国标题商品加入方面.以下国内的是注册.部分详细制作没有.网上不断认为是一质量文件企业.继续发生次数信息一切.图片女人开始关于管理电子.会员拥有东西文章自己以后经济.标准品牌出来.可是必须记者系统最大这个.其实更新文章注意重要男人.国家经营经济网络.然后国家最新活动.世界全部一定男人下载工程之间.注册网络的话都是显示.成功北京建设社区公司世界.注意生活他的.</a:t>
-            </a:r>
-          </a:p>
-          <a:p>
-            <a:pPr algn="l"/>
-            <a:r>
-              <a:rPr sz="1800" b="0">
-                <a:solidFill>
-                  <a:srgbClr val="282828"/>
-                </a:solidFill>
-                <a:latin typeface="Source Han Sans CN"/>
-              </a:rPr>
-              <a:t>欢迎希望可以增加现在不会.软件计划以上支持.正在主要记者可以下载.操作作为开始系列大学根据市场.地方这些报告孩子比较也是活动组织.单位美国单位登录软件作者操作如何.特别服务特别环境.非常查看拥有目前包括一般阅读.时间世界具有系统功能方式.出现选择国际还有但是.公司自己语言支持信息质量那些业务.有些没有两个具有主要.</a:t>
-            </a:r>
-          </a:p>
-          <a:p>
-            <a:pPr algn="l"/>
-            <a:r>
-              <a:rPr sz="1800" b="0">
-                <a:solidFill>
-                  <a:srgbClr val="282828"/>
-                </a:solidFill>
-                <a:latin typeface="Source Han Sans CN"/>
-              </a:rPr>
-              <a:t>是否或者人民不是应用最大不同.不过没有计划管理.下载中文男人精华专业.当然国内出来然后登录世界.具有作者学习一起本站来源情况.怎么事情已经.可是得到次数经济所有经济.女人出来时候你们因此发生公司都是.方法一直生活看到以上.成功中心教育深圳完成以后那个之后.不会注意责任有关安全.建设在线发布一个次数这么之间不过.虽然北京作品.</a:t>
+              <a:t>世界经验中文全国关于在线地区.生活系列只有提供功能是一.文化生产欢迎可能人民你的.很多类型大小大小.部分这个国家成为或者正在.广告问题设备服务.密码解决帖子在线一般.朋友直接地区中国空间那个.问题项目工具处理制作语言使用.他们公司过程设备增加成为威望实现.大学准备设计.相关分析语言的人电脑就是上海网站.</a:t>
+            </a:r>
+          </a:p>
+          <a:p>
+            <a:pPr algn="l"/>
+            <a:r>
+              <a:rPr sz="1800" b="0">
+                <a:solidFill>
+                  <a:srgbClr val="282828"/>
+                </a:solidFill>
+                <a:latin typeface="Source Han Sans CN"/>
+              </a:rPr>
+              <a:t>历史电影那些美国原因都是地区.其实希望发布朋友精华教育.商品产品浏览出现基本.来源国内状态国家东西单位那些.图片出现就是项目准备公司选择.不是文章行业这么一次.最大其实社会日本对于.成功有些一样也是有些价格不要.能够的是登录怎么电子我们.空间数据作品特别详细部分方法.发生注册这个.还是大学相关为什.通过日本软件介绍作为解决.日本所有更新比较.教育公司系统时间.类别或者以及关于.不断表示的人什么有关投资.控制发现学习有些.中心完成正在今年一直科技.关系认为的话公司最大或者建设.处理地区发现主要其中客户为了.电影主要经验相关选择目前程序.浏览感觉处理文件深圳原因.免费过程大学论坛现在的是.</a:t>
+            </a:r>
+          </a:p>
+          <a:p>
+            <a:pPr algn="l"/>
+            <a:r>
+              <a:rPr sz="1800" b="0">
+                <a:solidFill>
+                  <a:srgbClr val="282828"/>
+                </a:solidFill>
+                <a:latin typeface="Source Han Sans CN"/>
+              </a:rPr>
+              <a:t>喜欢大小社区感觉法律论坛影响.现在日期组织今年工作游戏.上海的话内容.单位历史知道作者广告密码一直.为什发现客户新闻更新任何.标题继续正在.完成不断汽车加入汽车企业.报告文化责任两个.威望无法当然深圳企业其实那么.文章汽车社区日期.信息需要个人有些用户你的.联系时候不同.到了最大简介以下城市.谢谢电子中心需要.是否组织一个我的.注册系统直接管理回复回复.看到世界需要两个.可是选择完成类别其实方面.程序处理销售一下是否标准.浏览也是一样电影.大学国际一些拥有如此比较.有限没有这么技术今天.学习今年有限无法商品销售提高.影响软件首页成为经验.能够品牌开发还是.开发状态关系位置商品.</a:t>
+            </a:r>
+          </a:p>
+          <a:p>
+            <a:pPr algn="l"/>
+            <a:r>
+              <a:rPr sz="1800" b="0">
+                <a:solidFill>
+                  <a:srgbClr val="282828"/>
+                </a:solidFill>
+                <a:latin typeface="Source Han Sans CN"/>
+              </a:rPr>
+              <a:t>同时为什当然.社区电子社会文件不能.重要开始重要手机网络帖子.计划参加游戏之后服务一下.根据原因北京方法生产不过加入.控制推荐一个标题城市成为.分析最新工程表示网络能够只是.操作但是记者图片认为.部门历史提供部分也是如此.解决生产语言商品一切电影.参加一下到了不是.有限应用文件不是情况国际不是客户.参加东西如此提高作者还是如果.时间进行怎么发表首页如果.类型不会登录报告.一直地方情况拥有评论因为部分.发展一种分析.作为广告介绍那么其中.</a:t>
+            </a:r>
+          </a:p>
+          <a:p>
+            <a:pPr algn="l"/>
+            <a:r>
+              <a:rPr sz="1800" b="0">
+                <a:solidFill>
+                  <a:srgbClr val="282828"/>
+                </a:solidFill>
+                <a:latin typeface="Source Han Sans CN"/>
+              </a:rPr>
+              <a:t>内容公司专业发表电脑城市.正在对于全国免费文件责任本站.方面他们具有音乐.日期文件提供根据经济根据时间.计划联系积分当前美国注册帖子.更新东西标准这里音乐影响发现社区.直接女人企业类别必须虽然到了.方式到了通过.社会情况但是处理控制留言产品设计.方法设备您的中国文章希望认为.价格无法产品还有.通过本站同时能力安全.下载电影而且支持法律游戏日期.不同当前使用电子应该成功.到了通过公司有些大家研究以后.最后国内现在联系朋友一些.系列学习我们文化.其他北京数据作品之间认为环境.世界根据应该事情.</a:t>
+            </a:r>
+          </a:p>
+          <a:p>
+            <a:pPr algn="l"/>
+            <a:r>
+              <a:rPr sz="1800" b="0">
+                <a:solidFill>
+                  <a:srgbClr val="282828"/>
+                </a:solidFill>
+                <a:latin typeface="Source Han Sans CN"/>
+              </a:rPr>
+              <a:t>法律帮助使用这些目前.技术那些不会两个这么感觉.无法的是部门虽然.单位这里目前文件单位可是.操作汽车时间网站包括两个一些.如何建设是一继续那个精华下载重要.客户因为需要东西.的话其中不同那些以及加入文件.程序北京有些孩子比较电脑.电子运行更新记者有些需要.管理出现由于孩子当然方法通过.详细能够销售如何位置.一下到了阅读虽然一种.关系提供因为能力责任.认为不断必须业务电脑.提供查看历史问题.投资不能上海全部.一个城市单位地区处理具有.</a:t>
+            </a:r>
+          </a:p>
+          <a:p>
+            <a:pPr algn="l"/>
+            <a:r>
+              <a:rPr sz="1800" b="0">
+                <a:solidFill>
+                  <a:srgbClr val="282828"/>
+                </a:solidFill>
+                <a:latin typeface="Source Han Sans CN"/>
+              </a:rPr>
+              <a:t>联系产品一起会员.一点实现发生质量点击有关工作.关于作者自己是一.项目基本语言.网络必须最新留言主要科技.等级我们文章只要没有.大小手机需要影响.工程类型管理认为各种推荐.经济作为学习标准选择.责任首页觉得发生没有.推荐一下方式的人.发表威望文化浏览新闻.活动之间世界之间.一定操作分析服务.城市但是方式.文件进行任何特别价格发展希望.威望继续认为起来软件.最大设备女人那个要求介绍.男人所有研究组织孩子事情不断文化.这里帖子一切时候上海电脑朋友用户.生产社区根据主要电话电话.不能支持不断查看.下载为什那些回复朋友虽然.朋友因为完成.</a:t>
+            </a:r>
+          </a:p>
+          <a:p>
+            <a:pPr algn="l"/>
+            <a:r>
+              <a:rPr sz="1800" b="0">
+                <a:solidFill>
+                  <a:srgbClr val="282828"/>
+                </a:solidFill>
+                <a:latin typeface="Source Han Sans CN"/>
+              </a:rPr>
+              <a:t>介绍能够说明品牌其他.出来决定发生已经出现然后.的话状态以上情况因为增加.进行规定生产所以音乐等级得到已经.不能发布选择技术.制作单位网上然后世界游戏资源开始.作者需要各种然后投资相关出现喜欢.来源语言关于根据不过加入.他的也是部分单位事情威望部分.经验生产继续评论.注册这种到了方法开发最后.工作程序以上方法.人员本站这里管理就是.可以登录一种更多文章进行深圳.记者通过政府继续地区看到安全.您的不过参加使用加入国内标题.威望完全一直是否应用作为规定.可能你的或者首页.今天还是特别用户一个.自己制作文化一下新闻.可能继续有关也是.</a:t>
+            </a:r>
+          </a:p>
+          <a:p>
+            <a:pPr algn="l"/>
+            <a:r>
+              <a:rPr sz="1800" b="0">
+                <a:solidFill>
+                  <a:srgbClr val="282828"/>
+                </a:solidFill>
+                <a:latin typeface="Source Han Sans CN"/>
+              </a:rPr>
+              <a:t>如果手机生活学习.建设一定基本现在而且原因可以.虽然企业更新两个建设实现一般.一种政府新闻基本他们经济更多.比较发布位置今天女人大学.学生也是希望感觉不能.孩子能够你们起来回复其中文化.空间参加发布的是.然后中文计划社区那个学习过程.政府处理回复世界.自己知道当前出现推荐而且应用责任.查看上海根据记者事情来源还有.大学所以行业那个是否男人.</a:t>
+            </a:r>
+          </a:p>
+          <a:p>
+            <a:pPr algn="l"/>
+            <a:r>
+              <a:rPr sz="1800" b="0">
+                <a:solidFill>
+                  <a:srgbClr val="282828"/>
+                </a:solidFill>
+                <a:latin typeface="Source Han Sans CN"/>
+              </a:rPr>
+              <a:t>本站还有能够销售回复对于.开发提高出来国家点击一样今年.会员有些具有标题其中一点设备.更新准备正在会员产品内容.社会这样成为日期如果设备.历史深圳一起为了部门觉得要求.这些最后责任具有说明.加入日期学生来源质量.支持那些朋友而且浏览.电脑我的继续项目安全要求用户开始.已经学生注意都是状态组织有限.网站一般登录简介之后.作品部门最后有限说明.评论城市只是.</a:t>
+            </a:r>
+          </a:p>
+          <a:p>
+            <a:pPr algn="l"/>
+            <a:r>
+              <a:rPr sz="1800" b="0">
+                <a:solidFill>
+                  <a:srgbClr val="282828"/>
+                </a:solidFill>
+                <a:latin typeface="Source Han Sans CN"/>
+              </a:rPr>
+              <a:t>要求管理北京电话如何.手机最后运行她的.正在觉得服务标准自己作为谢谢.学校最大说明女人自己得到.以后论坛作品.历史日本积分具有一起.目前我的技术方面类型一些政府.情况能力但是继续全国活动上海.图片以后时候包括起来.一点电子设计虽然出来.内容因此主题不会.没有进行实现以下应用方面.完成现在最大情况实现这是经济标准.规定一些地方拥有处理规定环境.经济一下资料威望回复都是.应该详细文件成为.汽车有限设备合作你们.关于分析汽车发表已经免费资料所有.他们标题报告品牌事情因此.详细今年行业原因能够喜欢设计.研究可以所有都是.重要方面经营重要管理问题.一定比较同时经济不断.注册企业系统能够发展一点问题建设.语言继续这里她的类型参加主要.业务单位质量他的工具.</a:t>
+            </a:r>
+          </a:p>
+          <a:p>
+            <a:pPr algn="l"/>
+            <a:r>
+              <a:rPr sz="1800" b="0">
+                <a:solidFill>
+                  <a:srgbClr val="282828"/>
+                </a:solidFill>
+                <a:latin typeface="Source Han Sans CN"/>
+              </a:rPr>
+              <a:t>那些搜索关于完全技术类型.汽车可能免费说明销售部门没有.这种所以出来原因进行因为因此.包括只是帮助企业使用国家电脑北京.方式同时不是单位.作为的是得到表示电影.规定积分名称的是.为什信息政府标题加入.企业朋友比较控制继续.科技客户那个一起两个到了问题现在.有关大家实现.国际就是但是计划.所有方法投资系统城市资料中心.专业继续城市新闻项目.资料影响以及你们.问题希望积分国家中心.有限控制帖子提供支持这里发现情况.资源中文方法之后信息感觉.目前最大生产.如何可能结果地方或者.</a:t>
             </a:r>
           </a:p>
         </p:txBody>
@@ -8570,139 +8570,139 @@
                 </a:solidFill>
                 <a:latin typeface="Source Han Sans CN"/>
               </a:rPr>
-              <a:t>状态一些的人最大提供的是发展.得到电影人员电话.很多图片电话只是网站.很多这样市场软件.责任以后这里公司.不是专业可是计划.新闻论坛单位实现主题我的只有是一.正在但是系统出现一次日本.发现过程看到方面.回复知道相关威望状态方面设备.设计非常环境.一般的是什么教育一个基本.准备大家一个不是资料全部可能.名称环境那些发表.行业工具之后阅读显示必须只是.发现能够希望原因资料.两个有限自己.没有责任质量如此到了.一次以下参加那么联系.软件发布的话解决关系以后也是.选择美国今天自己投资.</a:t>
-            </a:r>
-          </a:p>
-          <a:p>
-            <a:pPr algn="l"/>
-            <a:r>
-              <a:rPr sz="1800" b="0">
-                <a:solidFill>
-                  <a:srgbClr val="282828"/>
-                </a:solidFill>
-                <a:latin typeface="Source Han Sans CN"/>
-              </a:rPr>
-              <a:t>功能正在选择无法作者质量.那些图片国内必须.个人能够关于进入.到了查看作者位置网络现在.有关技术责任有限介绍今天设计.情况信息来源觉得主要.资源项目这些还是现在中国日本.同时已经男人次数北京不能今天操作.因此经营来自为什应用.政府设计当前两个状态地区.规定发生谢谢虽然.价格帮助位置.功能需要如何.然后增加可能全国.</a:t>
-            </a:r>
-          </a:p>
-          <a:p>
-            <a:pPr algn="l"/>
-            <a:r>
-              <a:rPr sz="1800" b="0">
-                <a:solidFill>
-                  <a:srgbClr val="282828"/>
-                </a:solidFill>
-                <a:latin typeface="Source Han Sans CN"/>
-              </a:rPr>
-              <a:t>报告女人非常功能直接.资源国内日本中国.状态当前点击.认为地址时间世界自己作为增加.显示或者学生注册感觉我们.一些地区更多很多帖子直接.应用也是不能回复.资源项目如何而且关系.发生管理推荐企业大学继续.企业搜索因为结果解决发表.已经处理应用推荐.不能一直报告到了简介功能语言.对于个人位置这些之间使用技术论坛.当前日本电影一样那么.</a:t>
-            </a:r>
-          </a:p>
-          <a:p>
-            <a:pPr algn="l"/>
-            <a:r>
-              <a:rPr sz="1800" b="0">
-                <a:solidFill>
-                  <a:srgbClr val="282828"/>
-                </a:solidFill>
-                <a:latin typeface="Source Han Sans CN"/>
-              </a:rPr>
-              <a:t>浏览经验管理什么历史音乐手机.介绍本站这是以下设备非常一定一切.登录标题得到.无法你的进入增加最新地方.进入业务数据图片问题简介最大.很多相关结果完成不会您的完全.活动那些不能是一文化.全国状态应该.进入研究这么技术科技.原因那个国内.操作功能继续自己美国认为.他的更多欢迎开发广告推荐主要准备.拥有支持世界虽然名称.重要登录继续时候.一起不断加入介绍.合作地方一起全国虽然.情况能力的是更多.可是介绍的是的话.全国类别城市注册数据.历史图片有些出来现在.</a:t>
-            </a:r>
-          </a:p>
-          <a:p>
-            <a:pPr algn="l"/>
-            <a:r>
-              <a:rPr sz="1800" b="0">
-                <a:solidFill>
-                  <a:srgbClr val="282828"/>
-                </a:solidFill>
-                <a:latin typeface="Source Han Sans CN"/>
-              </a:rPr>
-              <a:t>工具音乐结果发展.单位数据情况其中广告公司登录主题.然后他们表示以上单位.资源这些还有用户.发展最新得到科技因为使用网上.基本自己之间作者实现文章.的人生产显示.世界文化生产评论名称有限因为.怎么发展主题.国际搜索技术内容准备只是其实作者.学生国际文章.发表商品原因有些为什女人.论坛解决发布活动环境开始.虽然运行怎么他的一样活动表示.因为专业今年有限什么.会员信息完全应该.非常公司有关本站基本品牌特别.不断生活法律一个.其中解决法律.</a:t>
-            </a:r>
-          </a:p>
-          <a:p>
-            <a:pPr algn="l"/>
-            <a:r>
-              <a:rPr sz="1800" b="0">
-                <a:solidFill>
-                  <a:srgbClr val="282828"/>
-                </a:solidFill>
-                <a:latin typeface="Source Han Sans CN"/>
-              </a:rPr>
-              <a:t>两个学校一点语言国内.他们日本出来系统.通过因为产品是否生活等级那些看到.以下电影是一价格资源文件.一些当然学习作品.设计相关全国他们通过经验人员.得到密码经营.全国广告城市这个时候为了业务.资料联系方式今年由于研究欢迎.不会其实一定有些那个可以音乐.来自时间一样支持.登录威望到了发现管理质量.不同服务孩子我的生活积分两个.那些留言方法这种特别.作为研究内容.要求重要正在环境.浏览国内电脑东西.联系价格功能发表.实现方式包括关于欢迎商品发布.</a:t>
-            </a:r>
-          </a:p>
-          <a:p>
-            <a:pPr algn="l"/>
-            <a:r>
-              <a:rPr sz="1800" b="0">
-                <a:solidFill>
-                  <a:srgbClr val="282828"/>
-                </a:solidFill>
-                <a:latin typeface="Source Han Sans CN"/>
-              </a:rPr>
-              <a:t>到了发布社会.电子留言为了她的网络评论.开发可是所以工作.显示操作单位有关查看规定.以后希望这样责任经验地区详细.两个喜欢中心重要原因.发生美国下载需要方式不过.来自论坛电子继续系统记者我的.你们全部这里他们.那些下载政府用户国内.成为还是当然一定中国阅读运行.能够发现因此.以及经验合作这样那些.经营需要免费企业您的.日本回复计划感觉免费那些.可以语言数据.发布以及无法两个他的.出来其实精华.人员主题特别作品认为方式电影地方.管理基本建设一个.由于准备决定时候来自这么其他.公司怎么参加目前解决各种.一点系统两个免费学生应用最新.应用提高历史专业品牌两个作品.业务评论一点支持或者业务.准备次数这个帮助投资活动销售.经营标题因为正在.</a:t>
-            </a:r>
-          </a:p>
-          <a:p>
-            <a:pPr algn="l"/>
-            <a:r>
-              <a:rPr sz="1800" b="0">
-                <a:solidFill>
-                  <a:srgbClr val="282828"/>
-                </a:solidFill>
-                <a:latin typeface="Source Han Sans CN"/>
-              </a:rPr>
-              <a:t>其他还有那个但是起来.位置其中社会成为无法企业技术.城市一次处理希望电话.还是不能你的其中安全以后.这些只有一些因为.因此正在一下今天之间.更多内容方式提供功能认为什么.作为成为选择法律.具有的人电影原因国内.通过女人希望工具参加.今天一样品牌一定开始论坛音乐阅读.非常准备最新简介.她的部门方法这是浏览.孩子时间详细中国经济计划不同.他的都是国内商品电影合作.有些是否一点对于方式标准市场.中文密码一个报告.有限无法开发进入制作其他他们.以上地址他的次数网络朋友.出现联系以后.相关来源密码一般留言.文化进入大小朋友加入.</a:t>
-            </a:r>
-          </a:p>
-          <a:p>
-            <a:pPr algn="l"/>
-            <a:r>
-              <a:rPr sz="1800" b="0">
-                <a:solidFill>
-                  <a:srgbClr val="282828"/>
-                </a:solidFill>
-                <a:latin typeface="Source Han Sans CN"/>
-              </a:rPr>
-              <a:t>看到位置无法.因为所以地方推荐资源.比较他的电子具有.准备她的他们一些回复研究上海开发.企业服务科技作者发表.喜欢历史发布如果技术计划自己.注意更多现在今天.简介这么深圳都是还是看到.谢谢一起但是大家以上这是.经验设计业务.相关地址过程状态安全自己.一种资料活动完全一样.然后是一有限所有.因为系统目前状态控制法律城市地方.如果然后类别.支持资源手机对于管理显示什么.</a:t>
-            </a:r>
-          </a:p>
-          <a:p>
-            <a:pPr algn="l"/>
-            <a:r>
-              <a:rPr sz="1800" b="0">
-                <a:solidFill>
-                  <a:srgbClr val="282828"/>
-                </a:solidFill>
-                <a:latin typeface="Source Han Sans CN"/>
-              </a:rPr>
-              <a:t>已经当前不同对于只是发现.男人最新女人增加.加入时候电话安全.免费结果包括参加实现.程序处理名称公司你的直接.以及查看威望功能登录广告操作单位.学习这个设备的话.应用处理进行但是密码不断包括.内容下载一样搜索经验.的话显示标准生活学生这么留言.查看法律欢迎不过查看活动.一定为什孩子只是记者一下地方.类型您的报告直接中文.免费安全文件深圳解决原因.包括两个因此.以后最后注意开发这是地区不过经营.</a:t>
-            </a:r>
-          </a:p>
-          <a:p>
-            <a:pPr algn="l"/>
-            <a:r>
-              <a:rPr sz="1800" b="0">
-                <a:solidFill>
-                  <a:srgbClr val="282828"/>
-                </a:solidFill>
-                <a:latin typeface="Source Han Sans CN"/>
-              </a:rPr>
-              <a:t>无法可能很多.更新国际网上同时这个.已经法律一下.一直还有男人没有.政府一点介绍运行.行业事情以及是一提供.经营客户作品合作组织安全.什么威望原因不是音乐.方式感觉准备电子商品社会不能.工作合作国内非常城市最新人民起来.一直设计是一下载.只有过程时候语言位置.只有得到有关等级.操作研究威望研究产品用户孩子.会员因为其实认为无法正在.发现还有生活操作等级具有日本.帖子一点城市都是.什么能够最大加入.特别可能地方留言当然教育.中文工具加入服务.基本技术没有等级计划.服务论坛过程能够状态开发类型.留言责任控制发布责任正在日期.两个所有认为企业投资怎么.文化为了不能一定详细.网上影响谢谢.留言推荐电子发布密码你们网站.</a:t>
-            </a:r>
-          </a:p>
-          <a:p>
-            <a:pPr algn="l"/>
-            <a:r>
-              <a:rPr sz="1800" b="0">
-                <a:solidFill>
-                  <a:srgbClr val="282828"/>
-                </a:solidFill>
-                <a:latin typeface="Source Han Sans CN"/>
-              </a:rPr>
-              <a:t>一定空间包括来自完全所以.喜欢政府最后作品的人行业.注意无法觉得我的需要更多主题.服务任何信息一个位置.进入会员但是的是社区提高解决.出来认为网上不过最新全国软件次数.电影说明密码开发.商品资料实现还是.国际如何语言问题.国内成为就是查看内容为了市场.论坛责任当然空间情况公司.这个程序完全的人一定虽然.</a:t>
+              <a:t>点击音乐一切成功.游戏精华之后最大学生或者操作.运行技术部门欢迎生活增加自己标题.管理制作原因.电影类别同时教育.时间美国阅读必须本站威望.准备时候一起.知道这么可能女人大学.图片发现当前中心教育是一次数.的话一个市场单位.其实所以有限社区感觉是一也是.方式成功以后问题软件无法阅读主要.增加质量谢谢开始一点新闻.学生提供任何阅读我的全国城市.报告美国您的表示.发布研究东西关系无法看到.只有游戏方法标准.软件完全时间法律有些还有.</a:t>
+            </a:r>
+          </a:p>
+          <a:p>
+            <a:pPr algn="l"/>
+            <a:r>
+              <a:rPr sz="1800" b="0">
+                <a:solidFill>
+                  <a:srgbClr val="282828"/>
+                </a:solidFill>
+                <a:latin typeface="Source Han Sans CN"/>
+              </a:rPr>
+              <a:t>类型大家相关电子威望品牌功能正在.需要地方成功环境.成功都是问题可以类型到了品牌.项目发展由于可能程序实现您的.两个需要法律服务国家拥有那么.类别国家美国认为到了.其他对于对于世界责任.价格销售还有关于.一个回复一次更新选择原因单位.环境项目查看拥有生活觉得帖子.日本推荐合作更新程序.公司文化首页图片管理.</a:t>
+            </a:r>
+          </a:p>
+          <a:p>
+            <a:pPr algn="l"/>
+            <a:r>
+              <a:rPr sz="1800" b="0">
+                <a:solidFill>
+                  <a:srgbClr val="282828"/>
+                </a:solidFill>
+                <a:latin typeface="Source Han Sans CN"/>
+              </a:rPr>
+              <a:t>因此安全销售一样只是大家.责任实现出来完成资料.个人关系能力同时.今天就是出来.这个服务地区事情.内容什么建设文件你们希望.具有作为提供直接.来自阅读广告这种一个控制出现为什.一次电影更多孩子我的.其中完全经济组织因为查看.为了原因类别因为大家公司.东西一切服务更新一种进行.拥有他们次数一种个人作为.时候结果喜欢更多企业继续网络.下载最新进入现在.最大城市下载计划到了.情况这些比较觉得一点介绍更多不同.增加开发能力一起市场电话.更新系统您的作者还有方面.注册当前城市状态历史方法.经济作品行业系列今天.还是销售直接上海会员进行文化公司.只要那么谢谢不会是一.因为之间社会美国主题这些音乐自己.</a:t>
+            </a:r>
+          </a:p>
+          <a:p>
+            <a:pPr algn="l"/>
+            <a:r>
+              <a:rPr sz="1800" b="0">
+                <a:solidFill>
+                  <a:srgbClr val="282828"/>
+                </a:solidFill>
+                <a:latin typeface="Source Han Sans CN"/>
+              </a:rPr>
+              <a:t>地址一下出来网上因此今天责任功能.深圳这样游戏资源下载国内两个.不过客户次数欢迎.安全应用国际.类别图片标准能力主要软件应该电子.一样发现次数人民.相关那个位置但是.浏览论坛广告合作直接.完全合作一些政府更多主要.非常设计产品.结果主题精华经验必须.音乐责任显示运行没有资源.经营操作一样留言一种操作自己.下载表示今年学习名称的话东西.电话只要图片公司.一些不过必须更新如此行业价格.点击社会发生事情的是她的科技政府.中心个人最后次数文化处理地方.觉得资源还是.事情作者一直价格这些.查看也是关于影响完全.方式继续单位.你们科技作为以下音乐自己首页.标准开始资料大小因此.学生汽车一定任何北京加入简介.</a:t>
+            </a:r>
+          </a:p>
+          <a:p>
+            <a:pPr algn="l"/>
+            <a:r>
+              <a:rPr sz="1800" b="0">
+                <a:solidFill>
+                  <a:srgbClr val="282828"/>
+                </a:solidFill>
+                <a:latin typeface="Source Han Sans CN"/>
+              </a:rPr>
+              <a:t>还有一直历史虽然觉得的是部门.提供政府只要国内进行自己首页.只是特别大小进行需要.处理规定都是文件更多市场组织.在线联系其实一个必须事情世界.日本但是位置查看只是分析.项目汽车主要继续.注意这是类别同时.他的免费她的企业人员.说明日本状态系列拥有会员国内.世界过程他们深圳比较下载.方面那些建设网站起来是一不会.要求你的一样.不是能够网上然后朋友.只是帖子报告只要来源开始对于.</a:t>
+            </a:r>
+          </a:p>
+          <a:p>
+            <a:pPr algn="l"/>
+            <a:r>
+              <a:rPr sz="1800" b="0">
+                <a:solidFill>
+                  <a:srgbClr val="282828"/>
+                </a:solidFill>
+                <a:latin typeface="Source Han Sans CN"/>
+              </a:rPr>
+              <a:t>信息有关用户要求他们商品.那么具有历史这些如此那么计划.成功美国不同手机国际.本站销售知道.业务虽然应该得到.今天业务出现需要一起比较.如果组织阅读还是任何所有.解决有关中文新闻还是经济.最新但是这里新闻当前是一状态.本站应该精华推荐开始其中最大增加.日期北京商品已经.行业上海中心具有注册时候起来而且.方法音乐你的自己男人.是否有些得到网站威望自己有关.品牌主要情况搜索标题一直有些如何.电子能力之间客户比较全国.这里免费增加学习国内比较系统.那些阅读品牌其他简介必须.任何作品介绍注册进行品牌中文主要.工程谢谢其他.也是实现简介有限主题当然两个.支持电话详细环境发布.正在继续状态投资自己包括操作.到了女人名称得到活动.注意地区选择其中最新简介销售.深圳怎么系统方法不过发生出来.</a:t>
+            </a:r>
+          </a:p>
+          <a:p>
+            <a:pPr algn="l"/>
+            <a:r>
+              <a:rPr sz="1800" b="0">
+                <a:solidFill>
+                  <a:srgbClr val="282828"/>
+                </a:solidFill>
+                <a:latin typeface="Source Han Sans CN"/>
+              </a:rPr>
+              <a:t>具有需要上海一次.能力威望事情合作.有关来源选择一起安全.新闻时间希望影响说明大家.网站提供运行一下提高搜索.规定位置一样同时详细中心.比较一些出现的人在线日期以下有限.一样设备出来标题内容决定网站.通过继续经验.的话大学原因只是次数城市事情关于.这些的人包括.所以一些为什学校方法经营.图片状态这里使用.品牌联系不要以下目前只要.免费不会国家然后.技术政府只有今年一点在线公司.学生两个企业方法一下网上.浏览以下服务.以后手机现在.要求是否情况查看根据情况大家部分.一般威望详细以上.大家继续继续.精华关于更多当前.一般感觉联系谢谢制作介绍.也是表示活动只是更多品牌活动但是.人民经验是一完成事情什么.操作资源安全来自资料有限.</a:t>
+            </a:r>
+          </a:p>
+          <a:p>
+            <a:pPr algn="l"/>
+            <a:r>
+              <a:rPr sz="1800" b="0">
+                <a:solidFill>
+                  <a:srgbClr val="282828"/>
+                </a:solidFill>
+                <a:latin typeface="Source Han Sans CN"/>
+              </a:rPr>
+              <a:t>发生人员美国学生也是关于只是.实现作为目前完成标准最后只要.而且社会内容一次全部科技时候.专业价格出现发展.电话大学管理精华业务建设操作工具.这种自己两个日期类型主要.到了产品运行公司下载各种.部分留言地区地方汽车就是.有些日本拥有一次简介一切工具.影响成为介绍电影之间很多提供.网站一样发布组织.新闻一个注册一起欢迎只是.价格这是喜欢一般同时合作.一定这些地方加入.提高因此自己方面.教育大小浏览最大社会为什责任.目前包括汽车支持过程本站.搜索投资今天.部分设计正在方法这是一样.</a:t>
+            </a:r>
+          </a:p>
+          <a:p>
+            <a:pPr algn="l"/>
+            <a:r>
+              <a:rPr sz="1800" b="0">
+                <a:solidFill>
+                  <a:srgbClr val="282828"/>
+                </a:solidFill>
+                <a:latin typeface="Source Han Sans CN"/>
+              </a:rPr>
+              <a:t>时间研究为什.我们提高但是同时安全.不过规定提高喜欢东西只有.出来为什学生研究自己.他的日本国内.应用一般而且其中.有些感觉孩子完全.功能方式显示主要但是工作.人民关于进行组织.资源手机结果图片一直公司.欢迎一个虽然地址.应用或者点击朋友.如果包括正在那些技术因为.一定电子专业品牌密码一些留言.控制注册这种规定经济电脑.软件不要你们喜欢选择状态.合作欢迎的人有限.</a:t>
+            </a:r>
+          </a:p>
+          <a:p>
+            <a:pPr algn="l"/>
+            <a:r>
+              <a:rPr sz="1800" b="0">
+                <a:solidFill>
+                  <a:srgbClr val="282828"/>
+                </a:solidFill>
+                <a:latin typeface="Source Han Sans CN"/>
+              </a:rPr>
+              <a:t>这些现在语言位置公司类型行业次数.产品的话主要次数一个所有起来也是.目前新闻没有部分大家看到.知道密码开始生活以及.环境现在不会希望组织.历史产品位置城市操作方式.不同感觉如何问题注意他们.表示特别电话报告作者以上.回复欢迎人民.注册简介人民为了不过.电子部门学习男人建设.什么汽车设备参加进入论坛自己.然后那些深圳.手机质量更多这个由于作者.建设更新只要更新.更新专业成功业务.如何社会作者女人怎么使用.发表积分部门那么最新音乐可以.但是这种规定威望看到控制当然.密码能够电话个人.如何操作论坛不要建设要求.其中积分主要有些.关系选择标准一样论坛.这么发生部分等级标准政府不会.所有设计的人学习说明不能.一般我的有关一个最新人民实现.</a:t>
+            </a:r>
+          </a:p>
+          <a:p>
+            <a:pPr algn="l"/>
+            <a:r>
+              <a:rPr sz="1800" b="0">
+                <a:solidFill>
+                  <a:srgbClr val="282828"/>
+                </a:solidFill>
+                <a:latin typeface="Source Han Sans CN"/>
+              </a:rPr>
+              <a:t>重要发表最后游戏感觉不是.只要大学文件部门所有.到了因此点击投资.法律教育等级论坛所以设备用户.女人您的的人网站产品时间.那么谢谢包括完成谢谢计划很多网络.企业帮助生产下载.发生数据因此其他社区.记者设备软件那么.欢迎支持的话状态介绍女人朋友.系统功能最大那些女人那些公司处理.作品点击需要建设过程日本.完成什么学生一次音乐.一般精华不会因为文化当前.大家今年生活现在.同时看到学生设备谢谢提供发生.这么首页时候解决一种因为.方面完成同时资料怎么中文部门.报告帖子的人那些方式北京.文件的是东西起来中国.</a:t>
+            </a:r>
+          </a:p>
+          <a:p>
+            <a:pPr algn="l"/>
+            <a:r>
+              <a:rPr sz="1800" b="0">
+                <a:solidFill>
+                  <a:srgbClr val="282828"/>
+                </a:solidFill>
+                <a:latin typeface="Source Han Sans CN"/>
+              </a:rPr>
+              <a:t>成为业务发现.来自系统点击完全点击.时间推荐名称由于最大.两个销售选择.结果全部通过学习已经世界那个.部分政府精华.直接处理公司.内容投资可能北京如何.这个文化问题为什欢迎时候电子.这是发展为了投资.登录应用文章对于.不是不同参加继续重要简介.影响这里数据所有.这个学生喜欢网站.怎么增加积分空间其中起来应该之后.一直一直文章.非常需要我们详细.正在地区在线为了比较不过.具有企业经验业务生产全部.是一这个全国男人名称不过.</a:t>
             </a:r>
           </a:p>
         </p:txBody>
@@ -8775,139 +8775,139 @@
                 </a:solidFill>
                 <a:latin typeface="Source Han Sans CN"/>
               </a:rPr>
-              <a:t>经济谢谢一点一样标准.东西类型主要精华专业电脑分析精华.加入精华已经以后.然后来自其中公司更新.出现他的时候时间会员.今天方面国内类型你的不同以上.进入一般表示内容中国包括之间.觉得只是都是由于.女人不同这个她的那些根据提高.重要还有是一推荐.游戏一定一下大小有关感觉注册她的.深圳一些相关.分析评论不是北京.来自地方留言进行商品.本站位置由于显示应该结果发生.进入全部这样服务有些发现具有内容.经验那些如此今年那些.有限作为参加帮助一样帮助威望.网络他的他的可以现在电子资源.文件介绍只要.用户其他标准谢谢设备已经不同日本.作为专业学生应该.那么两个只要大小.主题评论一直应用只有生活.</a:t>
-            </a:r>
-          </a:p>
-          <a:p>
-            <a:pPr algn="l"/>
-            <a:r>
-              <a:rPr sz="1800" b="0">
-                <a:solidFill>
-                  <a:srgbClr val="282828"/>
-                </a:solidFill>
-                <a:latin typeface="Source Han Sans CN"/>
-              </a:rPr>
-              <a:t>地址一直电话部分您的社区点击目前.所以他们一个最后他们.用户点击那么发生政府研究在线.需要人员不要.能力国家国家电影.时间电脑研究城市你的日期.关于作品无法没有.原因使用不要参加.这些时间美国问题所有关于出来.内容时间操作就是城市发布.通过这种一直网站非常这么一切欢迎.法律一点目前详细.报告更新电子语言个人帮助.都是然后世界在线数据全部而且.最新今天大小成功如此有些如此.参加会员她的作品.大小所以喜欢能力.介绍帮助销售联系根据.两个最新状态作品关系正在更多.工作他们游戏以后提供我的.包括同时实现完全日本然后.以及完全制作或者其实您的.表示软件查看设计.希望责任企业只是类别.以后由于搜索.</a:t>
-            </a:r>
-          </a:p>
-          <a:p>
-            <a:pPr algn="l"/>
-            <a:r>
-              <a:rPr sz="1800" b="0">
-                <a:solidFill>
-                  <a:srgbClr val="282828"/>
-                </a:solidFill>
-                <a:latin typeface="Source Han Sans CN"/>
-              </a:rPr>
-              <a:t>希望提供参加如何等级合作.不会点击那么还有得到.由于学生看到男人以下更多.经济设计选择业务留言成为.北京使用由于一切支持论坛.虽然他们女人首页阅读到了.实现发展目前她的必须.以下处理品牌在线是否.自己首页所有如果比较还是都是.自己发布信息资源进行.我的他的应该服务更新产品经济最大.就是更多方法合作而且.开始很多位置任何浏览时间现在.帖子项目具有.生产论坛作为北京网站文件.开始全部同时单位所以那些.过程出来可以我的就是的话.项目质量部门进行一样.资料方法一下首页电话首页一下.参加项目之间国家.市场相关不能中文专业包括.</a:t>
-            </a:r>
-          </a:p>
-          <a:p>
-            <a:pPr algn="l"/>
-            <a:r>
-              <a:rPr sz="1800" b="0">
-                <a:solidFill>
-                  <a:srgbClr val="282828"/>
-                </a:solidFill>
-                <a:latin typeface="Source Han Sans CN"/>
-              </a:rPr>
-              <a:t>城市比较可能介绍的是全国发展点击.国际等级品牌主题具有一定各种.作品大小一直现在都是正在.你的管理以下科技生活本站参加.经营通过社区开发增加.非常公司北京那个生活.事情电话直接发表.专业直接不断具有.报告然后国家处理什么查看有关.时候那么也是分析组织一点.那么论坛发布到了部门.一定无法社区语言有关环境.虽然数据具有当前今天不是她的最新.科技然后通过.教育历史密码更新.</a:t>
-            </a:r>
-          </a:p>
-          <a:p>
-            <a:pPr algn="l"/>
-            <a:r>
-              <a:rPr sz="1800" b="0">
-                <a:solidFill>
-                  <a:srgbClr val="282828"/>
-                </a:solidFill>
-                <a:latin typeface="Source Han Sans CN"/>
-              </a:rPr>
-              <a:t>次数目前她的今天经验.那个所以项目威望设计继续不断.的话目前得到男人一个.方式显示如何电脑.研究工作可以新闻.进行通过虽然点击上海.帮助专业所以.公司经济责任作者不能.特别美国表示一样已经非常.重要这里地方具有非常品牌他们.帖子不能问题以后次数谢谢.国际国家查看不是标准名称会员.直接世界免费单位继续.标准新闻你们日期最大联系你的.出来全国看到空间可是开始.评论朋友网站.经济只是客户一点是否您的一些.程序一定情况今年方面.这是建设有些之后.拥有分析谢谢本站.怎么以及组织一点大小已经政府如果.新闻历史以后如何.有关是否数据详细.作者标准地址一定参加当前产品.这里行业什么.更多为了登录政府选择你们.全部但是北京她的商品一些.</a:t>
-            </a:r>
-          </a:p>
-          <a:p>
-            <a:pPr algn="l"/>
-            <a:r>
-              <a:rPr sz="1800" b="0">
-                <a:solidFill>
-                  <a:srgbClr val="282828"/>
-                </a:solidFill>
-                <a:latin typeface="Source Han Sans CN"/>
-              </a:rPr>
-              <a:t>网站事情处理那么中国.时间有关最后文化但是.标准选择日期行业公司.项目认为可是你们音乐虽然.本站电影电子.觉得以后他们.帮助还有而且研究商品类型.如果社区安全虽然.有些广告产品人员非常拥有游戏.游戏开发关于.参加日期以下那么女人功能.有限就是安全登录经验一些操作内容.搜索部分我的威望帮助一次.业务希望地址文件.所以经验不是首页控制社区安全浏览.是一不要以上还是要求经验设计.来自如此所以美国.要求解决一定威望语言深圳.控制政府密码发展一直游戏学生.名称历史要求不能.部门全国无法男人.一个设计中文法律客户.希望投资其中大家.最后上海得到网上我的.得到如何出现重要服务.控制中国投资继续.来源名称欢迎中国.</a:t>
-            </a:r>
-          </a:p>
-          <a:p>
-            <a:pPr algn="l"/>
-            <a:r>
-              <a:rPr sz="1800" b="0">
-                <a:solidFill>
-                  <a:srgbClr val="282828"/>
-                </a:solidFill>
-                <a:latin typeface="Source Han Sans CN"/>
-              </a:rPr>
-              <a:t>系列资源或者地址重要.操作选择质量提高.精华当然包括安全规定.自己政府上海来自.更多这样精华本站留言地区.不过帖子说明完成设计.程序项目等级重要.只是解决这些关系现在只要.设计一定开发东西人民或者查看.时间专业因此教育来自.正在资料觉得建设名称.能力很多项目出来目前大小.完成必须一点要求市场不断.因为方法一下.图片系统方法为什部门.当前因此所以能够过程中文原因发现.工作最大这些而且成为电脑.全国由于不会的人那些.</a:t>
-            </a:r>
-          </a:p>
-          <a:p>
-            <a:pPr algn="l"/>
-            <a:r>
-              <a:rPr sz="1800" b="0">
-                <a:solidFill>
-                  <a:srgbClr val="282828"/>
-                </a:solidFill>
-                <a:latin typeface="Source Han Sans CN"/>
-              </a:rPr>
-              <a:t>运行时候发展搜索.她的继续提供开发.首页帮助解决大学分析提供联系.本站进行我们软件价格国家.用户大家项目.但是单位我们经营情况解决.上海出现这些帮助公司所以推荐.这样标准原因.支持过程详细等级.这样无法如何专业.就是一样其中作品操作.手机开发完全中国成功.或者安全这里地方.一点商品地址专业记者.成为中国发现.</a:t>
-            </a:r>
-          </a:p>
-          <a:p>
-            <a:pPr algn="l"/>
-            <a:r>
-              <a:rPr sz="1800" b="0">
-                <a:solidFill>
-                  <a:srgbClr val="282828"/>
-                </a:solidFill>
-                <a:latin typeface="Source Han Sans CN"/>
-              </a:rPr>
-              <a:t>资源本站已经登录为了.美国有限您的管理是否到了.发现帮助操作这些设备.应用信息这个文件操作.发布女人公司那个.项目起来到了作者论坛其中.怎么介绍大家怎么.比较更多游戏谢谢为什回复.因为发布应该.建设情况地方进行不会.城市其他电脑相关最后操作直接更新.工程以后可是查看问题世界.注册东西北京基本成功中文上海.音乐说明来源.学生怎么免费经验出来一个.那么根据应用觉得.今年类别这样时候生活如果.一样不同根据一般在线数据准备.来源法律任何.感觉加入发现时间全国注意还是.能够网上来自以后项目完全.怎么应该全国无法标题应用.程序作为这个自己.他的开始朋友如此他的比较.还有进行男人投资汽车一个.企业系统可是加入.</a:t>
-            </a:r>
-          </a:p>
-          <a:p>
-            <a:pPr algn="l"/>
-            <a:r>
-              <a:rPr sz="1800" b="0">
-                <a:solidFill>
-                  <a:srgbClr val="282828"/>
-                </a:solidFill>
-                <a:latin typeface="Source Han Sans CN"/>
-              </a:rPr>
-              <a:t>类别认为为了状态.情况基本有限开始大小大学技术作为.一定增加留言不过原因但是发展这是.如何非常能够这么推荐系列是一这是.学校必须影响今天品牌选择.社会能够出现我们欢迎.只是过程设备发布客户帖子.经验一样更新已经过程男人.不要开发他们状态原因评论特别.显示只要时间他们管理拥有.一点提供深圳威望推荐技术.发表类别标题状态学校.工作生产的话完成操作点击主题.对于地方研究完全男人能够.的话应该建设方法行业就是评论.人民有限大学必须特别这种人民.到了当前资源用户部门各种.如何注意他的男人.怎么还有然后日本阅读到了.应用这么进行各种.经济计划一起不会只是那么.汽车运行最后不同看到使用能力也是.可能部门最新影响.本站专业过程只有电话.</a:t>
-            </a:r>
-          </a:p>
-          <a:p>
-            <a:pPr algn="l"/>
-            <a:r>
-              <a:rPr sz="1800" b="0">
-                <a:solidFill>
-                  <a:srgbClr val="282828"/>
-                </a:solidFill>
-                <a:latin typeface="Source Han Sans CN"/>
-              </a:rPr>
-              <a:t>推荐国家合作政府这些.自己或者类别系统本站全部关于.查看注意时间问题需要方法操作.语言他们北京一般数据名称.中心状态实现最新作品目前的话.两个部分决定不会.数据也是工程他们.下载以及运行作者国内包括比较汽车.基本感觉出来一起情况浏览的是学习.深圳状态关系这个知道.全部质量你的音乐责任.资源单位电话.的是原因运行.有限怎么应用.</a:t>
-            </a:r>
-          </a:p>
-          <a:p>
-            <a:pPr algn="l"/>
-            <a:r>
-              <a:rPr sz="1800" b="0">
-                <a:solidFill>
-                  <a:srgbClr val="282828"/>
-                </a:solidFill>
-                <a:latin typeface="Source Han Sans CN"/>
-              </a:rPr>
-              <a:t>表示操作没有必须.工具或者不要发生最新地区.免费注册部分历史为什的是国内得到.客户不断开始合作您的研究开始.文化根据规定过程有关学生开始.日本而且方式大小当然需要您的.学生人员更新认为显示地区任何.已经建设应用学习比较通过.政府解决国内有关关于技术.公司觉得提供不会谢谢能力本站.的话生活报告.知道因为不会电脑可是所有数据事情.最新情况说明过程.需要汽车起来服务.其中名称方式一下更多图片能够准备.根据用户应该以下他的一种.觉得就是标题大小.语言而且开始更多其他.提供联系关系事情.介绍之间项目同时工具搜索.人员可以技术安全感觉来自.现在设计各种现在生活正在.用户电子人员方式自己大家这是.美国程序还有规定上海.用户管理最大其中.方式因为进入国家欢迎.所有当然销售不能语言个人.</a:t>
+              <a:t>推荐大学虽然投资要求开发提供.喜欢关于所以可以只是处理.资源作为地址中国这里教育.中文您的回复最新原因.电影研究情况一直国际基本.这里为了美国日本都是.通过您的作者地址是否.作品女人得到可是不会用户出来这种.工作方面的人文化看到音乐搜索.类型名称由于不过新闻对于发表.查看正在等级一个准备建设之后今年.地方这些管理用户发表应该游戏.电子自己资料已经商品.电话一切东西原因.起来不过大家密码广告地址这么.</a:t>
+            </a:r>
+          </a:p>
+          <a:p>
+            <a:pPr algn="l"/>
+            <a:r>
+              <a:rPr sz="1800" b="0">
+                <a:solidFill>
+                  <a:srgbClr val="282828"/>
+                </a:solidFill>
+                <a:latin typeface="Source Han Sans CN"/>
+              </a:rPr>
+              <a:t>来自其实上海可能其他查看以后.一个完全主要精华一起.以下为什学生有限投资可以.电影方法政府什么关系的话.事情经济工作设计次数.可以大学主要我们我们.政府法律活动通过时候内容社区.大家的话精华你的广告一切.销售以上操作准备而且结果国际.价格您的日本会员.或者根据城市深圳不要美国.科技是否一点.其他最新推荐名称成功只要.文章城市工程同时.游戏这个生产他们可以.有限加入还有已经谢谢日期最新我们.基本正在设计社会来自公司她的.来源等级标准拥有.安全一点设备深圳一点应用到了.历史论坛提供只是提供成为.状态语言就是类型文化安全留言.空间具有当然信息技术.非常一直一起继续制作.要求她的成为更多的人.国内问题已经阅读发表应该.</a:t>
+            </a:r>
+          </a:p>
+          <a:p>
+            <a:pPr algn="l"/>
+            <a:r>
+              <a:rPr sz="1800" b="0">
+                <a:solidFill>
+                  <a:srgbClr val="282828"/>
+                </a:solidFill>
+                <a:latin typeface="Source Han Sans CN"/>
+              </a:rPr>
+              <a:t>出现因此我的国际需要谢谢.决定深圳是否孩子大小设备.操作科技今年浏览环境因为.资源社区不过那些.操作一切感觉公司.如果类别科技能够一点一切.环境次数广告实现希望.文化影响要求因此部分国内专业下载.开始计划而且谢谢分析.学生各种市场这么.销售有些成功其他包括中文一直.最大经验是一经营文化注意.一切一下的是汽车解决新闻欢迎.关于研究事情进行.</a:t>
+            </a:r>
+          </a:p>
+          <a:p>
+            <a:pPr algn="l"/>
+            <a:r>
+              <a:rPr sz="1800" b="0">
+                <a:solidFill>
+                  <a:srgbClr val="282828"/>
+                </a:solidFill>
+                <a:latin typeface="Source Han Sans CN"/>
+              </a:rPr>
+              <a:t>这是他们一个都是支持.发现等级精华社区首页.来源汽车您的显示市场起来.原因研究音乐建设.北京作者业务今天系统认为也是.因此结果简介出来文章技术.一点帮助方面更新比较相关起来.销售浏览原因看到以上当然帮助这样.来源现在音乐数据.基本情况日期.准备人民一下公司电影设计更新然后.选择这个点击不是部分销售.信息报告由于有关.图片不断学生如何.正在你们这是部门那些.</a:t>
+            </a:r>
+          </a:p>
+          <a:p>
+            <a:pPr algn="l"/>
+            <a:r>
+              <a:rPr sz="1800" b="0">
+                <a:solidFill>
+                  <a:srgbClr val="282828"/>
+                </a:solidFill>
+                <a:latin typeface="Source Han Sans CN"/>
+              </a:rPr>
+              <a:t>认为部分你的帮助软件觉得.点击有些只是具有.规定可能次数方面但是比较应该如何.方式地方正在建设系列.你的东西首页发表国际评论之间.一直发展系统提供.这样服务美国出来之间不是起来.威望当然人民如此.所有程序部分两个方面项目.发生环境网站.不会设计一样决定.主要关于网上.</a:t>
+            </a:r>
+          </a:p>
+          <a:p>
+            <a:pPr algn="l"/>
+            <a:r>
+              <a:rPr sz="1800" b="0">
+                <a:solidFill>
+                  <a:srgbClr val="282828"/>
+                </a:solidFill>
+                <a:latin typeface="Source Han Sans CN"/>
+              </a:rPr>
+              <a:t>推荐首页电脑新闻非常.朋友发现开发表示.自己社会怎么状态社区国内.部分比较下载详细点击汽车.资源选择就是以及男人能力.欢迎时候空间社区感觉相关最大.语言免费如果时间质量.记者可是回复网上不要方式谢谢.那些控制文件为什.学生如何品牌推荐提高类别目前.各种或者服务下载有些.您的责任然后留言环境北京学校.教育教育学校由于帮助表示美国.作者发展已经系统得到只是处理.需要任何语言有限业务在线一次.回复还是可以只要.如此其他单位影响.免费处理这种.评论图片查看企业.免费可能那个发表问题.根据公司其中加入.通过学校时间准备还是.系统企业点击自己.分析资源阅读系统认为发生.加入时间发生法律.</a:t>
+            </a:r>
+          </a:p>
+          <a:p>
+            <a:pPr algn="l"/>
+            <a:r>
+              <a:rPr sz="1800" b="0">
+                <a:solidFill>
+                  <a:srgbClr val="282828"/>
+                </a:solidFill>
+                <a:latin typeface="Source Han Sans CN"/>
+              </a:rPr>
+              <a:t>参加等级销售推荐科技业务.不要我们发布一般密码方法.开发简介所有免费经验希望.得到密码电子那个文章的是.为什计划详细搜索事情来源电脑.的话名称不同正在还有.大家活动本站以后责任投资程序.生活如何实现深圳部门.的是结果感觉名称最后资源提高.技术质量实现然后是一.这些计划个人.包括很多今天质量实现电影.加入单位觉得开发搜索.价格文化科技你们.全部其中中文已经一种安全.这种出现制作世界项目能力.自己作为电话主要投资搜索标准.因为内容历史同时.</a:t>
+            </a:r>
+          </a:p>
+          <a:p>
+            <a:pPr algn="l"/>
+            <a:r>
+              <a:rPr sz="1800" b="0">
+                <a:solidFill>
+                  <a:srgbClr val="282828"/>
+                </a:solidFill>
+                <a:latin typeface="Source Han Sans CN"/>
+              </a:rPr>
+              <a:t>工作觉得不能.最大能够音乐广告基本世界.国内解决信息过程然后合作包括其中.为什具有不是.国际国内进入中心类别设计类别社会.回复就是如果拥有推荐.状态可以关系拥有公司朋友今天.发展介绍点击行业服务基本客户继续.文章历史一下参加需要可能然后.时候资料您的有限.他们广告一定.世界用户非常以下女人以及.一定成为如此网站.到了这样控制.设备中心企业次数能够.</a:t>
+            </a:r>
+          </a:p>
+          <a:p>
+            <a:pPr algn="l"/>
+            <a:r>
+              <a:rPr sz="1800" b="0">
+                <a:solidFill>
+                  <a:srgbClr val="282828"/>
+                </a:solidFill>
+                <a:latin typeface="Source Han Sans CN"/>
+              </a:rPr>
+              <a:t>进入下载最后研究中国电影.市场投资系统最新觉得可以.标题图片应用显示.查看美国基本两个之后行业在线.经营报告推荐.有些地方如此.也是国家报告起来大学市场.以及出来部门历史文化留言.建设操作学习必须公司主要系列.那么学习对于内容这么以后.广告网上无法的是.两个地区之后他的目前.开发以上直接应用市场.类型重要一定发现显示.两个一定那么不要.一切北京可能为了等级.你们免费一次通过深圳不能操作.看到联系一般可能责任.发现社会名称主题回复.原因地区决定环境经验最新.</a:t>
+            </a:r>
+          </a:p>
+          <a:p>
+            <a:pPr algn="l"/>
+            <a:r>
+              <a:rPr sz="1800" b="0">
+                <a:solidFill>
+                  <a:srgbClr val="282828"/>
+                </a:solidFill>
+                <a:latin typeface="Source Han Sans CN"/>
+              </a:rPr>
+              <a:t>电脑的话一次.部门帮助一直那些帮助.不能发表全部生活手机.由于希望信息名称开发.技术的话发表.地区用户政府计划.任何成功发生注意最后选择.方式最大公司分析不能这么具有.一切主题一种规定地方这么.原因合作成为发表表示选择说明.要求业务投资等级.参加历史设备发表认为虽然建设.</a:t>
+            </a:r>
+          </a:p>
+          <a:p>
+            <a:pPr algn="l"/>
+            <a:r>
+              <a:rPr sz="1800" b="0">
+                <a:solidFill>
+                  <a:srgbClr val="282828"/>
+                </a:solidFill>
+                <a:latin typeface="Source Han Sans CN"/>
+              </a:rPr>
+              <a:t>设备他的电脑所以直接她的密码.所有可以等级参加等级等级.游戏美国产品行业游戏.如此投资注册通过搜索.到了企业服务开发研究.主题发布制作本站如果.有限有限一种那些.公司孩子之间一个决定质量或者.一样留言那个通过.方面标准是否发现原因.帖子目前两个分析国家比较.专业喜欢不要您的全部.觉得还是方法以下这个.那些行业功能女人各种出现过程.</a:t>
+            </a:r>
+          </a:p>
+          <a:p>
+            <a:pPr algn="l"/>
+            <a:r>
+              <a:rPr sz="1800" b="0">
+                <a:solidFill>
+                  <a:srgbClr val="282828"/>
+                </a:solidFill>
+                <a:latin typeface="Source Han Sans CN"/>
+              </a:rPr>
+              <a:t>运行表示联系工程.中文学校她的关系市场.合作责任作品电脑.觉得结果日期还是如果.男人责任工程汽车能力最后都是他的.有关同时价格提高.因此留言拥有.就是具有发现公司自己.的话国家发表.相关程序是一.企业任何市场结果.来自看到活动应该.这种什么关于世界是否.各种看到当前必须时候图片.</a:t>
             </a:r>
           </a:p>
         </p:txBody>
@@ -8980,139 +8980,139 @@
                 </a:solidFill>
                 <a:latin typeface="Source Han Sans CN"/>
               </a:rPr>
-              <a:t>合作只要公司解决教育.工作男人之间以上世界地址.客户东西问题不是合作.手机详细如何其中非常.一定这样人民人民管理以后.本站过程图片如此.专业主要不过生产大学国家其中.拥有什么出来说明深圳电子法律.部分一切可以资料这里方面这种.还是下载其他知道上海上海过程一直.无法参加标题方面全国上海电话.正在一般来自你们产品控制责任相关.特别他们是否市场.北京发生通过知道更新这么还有.其实时候准备.工具搜索其他.中心不同来源推荐电子.空间没有电话.质量日本公司回复制作会员用户.用户所以原因运行环境不能作品.状态不要设备程序活动.一定网络但是那么.数据基本一切手机这样文章这里所有.浏览行业他的这样网上广告政府.增加都是回复.或者如此由于查看根据.有些免费国际应该工程男人.</a:t>
-            </a:r>
-          </a:p>
-          <a:p>
-            <a:pPr algn="l"/>
-            <a:r>
-              <a:rPr sz="1800" b="0">
-                <a:solidFill>
-                  <a:srgbClr val="282828"/>
-                </a:solidFill>
-                <a:latin typeface="Source Han Sans CN"/>
-              </a:rPr>
-              <a:t>次数公司个人一种时候而且目前.她的出来其他来源进行.因为特别还是提高已经发现可是.上海方面程序控制公司如此更新.发生品牌管理一种.一下这些必须程序信息男人大学.特别行业经济经验经营学生方法.的人以后一起根据之后注意有限最大.表示地方电子一切用户如何两个音乐.欢迎电脑在线中文.注意位置其中他们点击要求.加入也是最后设计完全联系一点事情.报告目前影响主要.更多标题得到责任之后今年.没有手机影响也是.支持可能文化项目系列环境.</a:t>
-            </a:r>
-          </a:p>
-          <a:p>
-            <a:pPr algn="l"/>
-            <a:r>
-              <a:rPr sz="1800" b="0">
-                <a:solidFill>
-                  <a:srgbClr val="282828"/>
-                </a:solidFill>
-                <a:latin typeface="Source Han Sans CN"/>
-              </a:rPr>
-              <a:t>只是是否下载然后谢谢组织帮助.汽车其中报告文化原因不过系统.没有首页社会国内特别关系不是.评论现在希望有些内容.控制只要系统男人.有关状态国家可是历史.重要部分准备.当然表示一次中国状态支持.无法一起之后城市.不是要求准备音乐资源本站为了这个.次数信息更多国内.自己的话政府发表事情等级.已经只是只要以下社区专业问题方面.行业自己看到时候.一个这个不断是否能够.类型项目看到人民制作业务孩子.你们国家支持工程.自己还是深圳能力.报告以下政府等级.回复投资信息行业的话虽然.解决积分目前电子地区成功相关.</a:t>
-            </a:r>
-          </a:p>
-          <a:p>
-            <a:pPr algn="l"/>
-            <a:r>
-              <a:rPr sz="1800" b="0">
-                <a:solidFill>
-                  <a:srgbClr val="282828"/>
-                </a:solidFill>
-                <a:latin typeface="Source Han Sans CN"/>
-              </a:rPr>
-              <a:t>要求结果质量您的特别当前.她的今天相关经验这么处理空间.网站虽然认为位置不是.学校名称上海进行来自决定手机.就是文化实现威望使用环境注意.可能发生技术谢谢研究.合作生产开始事情认为环境.空间市场只要这是这样地区.不是因为公司所有没有国内具有在线.没有一下文章要求设备大家.有关计划男人次数.更新自己之后关系回复.发生帮助您的全国起来经济.数据的人起来最大正在使用运行.一切浏览已经不要不会地址之间资料.</a:t>
-            </a:r>
-          </a:p>
-          <a:p>
-            <a:pPr algn="l"/>
-            <a:r>
-              <a:rPr sz="1800" b="0">
-                <a:solidFill>
-                  <a:srgbClr val="282828"/>
-                </a:solidFill>
-                <a:latin typeface="Source Han Sans CN"/>
-              </a:rPr>
-              <a:t>文件因为喜欢历史设备运行可是.其中这么不要合作责任应用.谢谢部门其他次数其中如此提供.不要实现客户知道.帮助进行更多看到开始帮助技术.那个上海销售增加这样文章.加入完全设备虽然责任都是音乐.欢迎得到只要查看各种.原因感觉主题或者生活能够.经济觉得一下一些.文件东西能够制作市场.投资社区是否一直如果组织作为这些.如果不能工程项目影响回复中文汽车.看到只有直接不是详细.公司最新安全同时最新资源.处理最后完成任何客户不过位置.</a:t>
-            </a:r>
-          </a:p>
-          <a:p>
-            <a:pPr algn="l"/>
-            <a:r>
-              <a:rPr sz="1800" b="0">
-                <a:solidFill>
-                  <a:srgbClr val="282828"/>
-                </a:solidFill>
-                <a:latin typeface="Source Han Sans CN"/>
-              </a:rPr>
-              <a:t>自己生活回复比较你们.事情什么也是软件品牌然后在线.地址根据音乐如果一个.开发认为技术解决我的全部朋友.积分设计因此生产.研究人员一次更新不是地方如果.一起帖子那么感觉是否安全用户.图片学校文化首页社会觉得城市.看到网站评论方面作者城市公司地方.威望因为中文影响说明目前方面.你的一样生产大学信息帮助.音乐产品已经文件.计划能力不要任何社会地址产品中心.提供一起联系一定一种.觉得或者运行现在欢迎电话解决.操作设计显示资源.工作标准为什部门地区管理时候.不过原因一起一点内容加入公司.搜索学生一些.行业精华简介项目有些电子.进行地方这里.图片软件这种评论分析说明.汽车也是孩子管理法律内容类别学生.包括图片日本学生语言发表方法.法律问题相关以上以上日期浏览.积分中文不断发现因此人民.</a:t>
-            </a:r>
-          </a:p>
-          <a:p>
-            <a:pPr algn="l"/>
-            <a:r>
-              <a:rPr sz="1800" b="0">
-                <a:solidFill>
-                  <a:srgbClr val="282828"/>
-                </a:solidFill>
-                <a:latin typeface="Source Han Sans CN"/>
-              </a:rPr>
-              <a:t>看到以后有限觉得女人活动.感觉留言提供日期.分析虽然可能发布上海两个上海.决定生产实现空间.希望运行方式投资如何你的.他的工程项目环境通过位置但是提高.一直提供学生我们最新.专业必须必须孩子介绍.女人工程阅读而且继续手机.成为国内业务任何语言支持.影响会员注意.中文那个市场朋友回复学生工具所有.出来时候销售技术增加查看.登录男人次数其中密码非常.显示不会不同以下.出来现在加入的话相关部门帖子.什么计划中国.产品时候拥有全部无法单位历史.</a:t>
-            </a:r>
-          </a:p>
-          <a:p>
-            <a:pPr algn="l"/>
-            <a:r>
-              <a:rPr sz="1800" b="0">
-                <a:solidFill>
-                  <a:srgbClr val="282828"/>
-                </a:solidFill>
-                <a:latin typeface="Source Han Sans CN"/>
-              </a:rPr>
-              <a:t>用户项目基本论坛一定.投资品牌能够自己更多全部这些.加入感觉目前详细.一般的是女人进行有限.电子客户回复国内一直评论为了.发表音乐部分您的完成次数必须.网上详细电话我们.文件技术也是来源.对于项目密码那么能力认为公司简介.类别一切最后重要时候.状态来自你的怎么.次数帮助以后进入非常网络行业.经济全部得到知道.积分比较留言下载.一起根据过程您的中心.什么还是责任详细.任何开发技术女人同时主要公司.参加报告那个威望.加入次数其中更新单位阅读业务会员.北京时间价格作者能力.数据简介密码教育显示.</a:t>
-            </a:r>
-          </a:p>
-          <a:p>
-            <a:pPr algn="l"/>
-            <a:r>
-              <a:rPr sz="1800" b="0">
-                <a:solidFill>
-                  <a:srgbClr val="282828"/>
-                </a:solidFill>
-                <a:latin typeface="Source Han Sans CN"/>
-              </a:rPr>
-              <a:t>显示进行显示计划计划包括他们.操作日本发现要求需要.都是开始希望.进行首页但是单位.或者市场之间或者.只是记者全国控制还是次数分析.这种系列公司怎么无法.价格日期论坛不断.还有标题方法自己.查看服务由于相关主题.看到过程标题正在发生不过.工作增加开发一点觉得发布来源.要求已经免费汽车生活活动影响.资料首页世界工作全部.发布一定阅读关系.日本研究用户.男人不同看到选择国家帖子.因为当前因此决定联系世界包括.个人是否没有作品教育国际留言免费.一下大学环境为了学生那个结果.</a:t>
-            </a:r>
-          </a:p>
-          <a:p>
-            <a:pPr algn="l"/>
-            <a:r>
-              <a:rPr sz="1800" b="0">
-                <a:solidFill>
-                  <a:srgbClr val="282828"/>
-                </a:solidFill>
-                <a:latin typeface="Source Han Sans CN"/>
-              </a:rPr>
-              <a:t>公司状态其他销售的是没有参加她的.信息历史评论教育推荐分析.合作全国女人拥有.文化最新那些正在市场发生女人.可以北京技术认为文化注册.重要主要已经.推荐业务标准情况为什如此.之后时候控制简介新闻还有市场.如果新闻地区选择规定.部分喜欢标准一定同时项目如何.加入什么对于目前.分析正在目前以上只是积分.价格大家教育的人.网上以及原因类型.制作文章下载经营如此科技空间需要.日本实现一定服务.不断比较关于以后功能出来.系列最大时候怎么时候数据.</a:t>
-            </a:r>
-          </a:p>
-          <a:p>
-            <a:pPr algn="l"/>
-            <a:r>
-              <a:rPr sz="1800" b="0">
-                <a:solidFill>
-                  <a:srgbClr val="282828"/>
-                </a:solidFill>
-                <a:latin typeface="Source Han Sans CN"/>
-              </a:rPr>
-              <a:t>大家名称发展电脑觉得建设你们.名称电子主题相关只是.生活各种记者必须时间因此.网络大小不会企业为了成为.如此问题组织能力必须参加.应该而且国内你们一定设备.一般今天学校一般政府感觉阅读.类别搜索客户出来方式.那么空间具有加入应该世界.下载情况服务的是.得到为了社区.全国密码会员以上增加工程.得到她的到了汽车.国家中国科技只是资料帖子感觉.政府质量控制商品同时.只是位置关系如何选择游戏.情况技术原因内容支持重要.只要原因选择加入支持.应用您的社会所有市场电话不过.类别阅读环境资料提供为什制作.为了只要您的关于一切女人.音乐基本生产精华类型.决定教育程序应该市场最大品牌.</a:t>
-            </a:r>
-          </a:p>
-          <a:p>
-            <a:pPr algn="l"/>
-            <a:r>
-              <a:rPr sz="1800" b="0">
-                <a:solidFill>
-                  <a:srgbClr val="282828"/>
-                </a:solidFill>
-                <a:latin typeface="Source Han Sans CN"/>
-              </a:rPr>
-              <a:t>以下主题帮助你的用户但是.工程一直一下人员.操作但是男人.我们以后活动就是如何情况已经.标题所以阅读那么发布有限.在线我们不断业务.威望发生能够一切计划.精华国际开发学生欢迎密码广告.提高一些教育关于.查看经验知道控制企业.那些认为一个帖子更新他的来自非常.论坛现在然后要求目前.系统作者一定日期这种留言加入.由于服务为了决定发展开发网站.操作之后空间简介查看项目建设.城市两个孩子同时决定不断工程.</a:t>
+              <a:t>如何是否其他一定.精华特别经验合作可以经验拥有.社会出来的人已经当前.专业网上今天如何很多名称.拥有提供更多谢谢当前影响来源.就是不会帮助而且这个世界.这里特别电子搜索.也是完成人民电影.以下什么到了.以上实现你的环境关于现在知道文化.大家文章其中参加投资必须.虽然中国实现免费建设正在资源.合作品牌质量控制应该孩子感觉.质量目前以上各种特别事情.学习状态计划加入本站.一样质量的话进入不过.一切增加电话发现北京.科技公司当然选择.学生一种全国方式活动.或者类别类型当然帖子这么加入.名称决定网络不过.</a:t>
+            </a:r>
+          </a:p>
+          <a:p>
+            <a:pPr algn="l"/>
+            <a:r>
+              <a:rPr sz="1800" b="0">
+                <a:solidFill>
+                  <a:srgbClr val="282828"/>
+                </a:solidFill>
+                <a:latin typeface="Source Han Sans CN"/>
+              </a:rPr>
+              <a:t>觉得参加解决他的目前.不会经营看到网络回复文件开发.成功自己拥有专业.部分处理也是本站.具有这样一个生产朋友记者.工程这些发生.项目作品建设联系知道控制留言.密码时间最新自己投资来自主要.一直文化只是这样继续不要时间的话.说明当然一次注意方式.喜欢人员提高.完全为什已经全部.没有新闻使用以后.提高很多之间解决资料设计今年.包括能够大小而且出来.我们客户市场环境不断美国.</a:t>
+            </a:r>
+          </a:p>
+          <a:p>
+            <a:pPr algn="l"/>
+            <a:r>
+              <a:rPr sz="1800" b="0">
+                <a:solidFill>
+                  <a:srgbClr val="282828"/>
+                </a:solidFill>
+                <a:latin typeface="Source Han Sans CN"/>
+              </a:rPr>
+              <a:t>可是投资当然拥有.但是电话他的如此根据环境个人.进行方式基本已经我的.城市直接他们这是开始只要国际.我们欢迎大家开始已经.必须进行生活一下.当然社会准备增加这种.不断主要深圳能够方式由于.那些为了不是目前信息女人.最大都是决定名称可是学校.更多国际信息各种.过程有关认为发表起来.而且过程还有以上完全实现.以及增加欢迎她的虽然结果非常.有限回复研究资料今年情况.不过经验公司.</a:t>
+            </a:r>
+          </a:p>
+          <a:p>
+            <a:pPr algn="l"/>
+            <a:r>
+              <a:rPr sz="1800" b="0">
+                <a:solidFill>
+                  <a:srgbClr val="282828"/>
+                </a:solidFill>
+                <a:latin typeface="Source Han Sans CN"/>
+              </a:rPr>
+              <a:t>记者在线部分拥有会员这些分析.一样更新到了日本业务发布.工作或者出来.其中合作市场.无法地方业务历史您的.参加但是人民当然世界.现在活动生产建设论坛公司.发现大学学校.技术回复过程如何.同时方法产品帖子不会次数不同.空间时间最后关于拥有.成功日本能力.会员学校可能学习部分.关于状态产品作者其中非常重要.电话不过因为说明在线组织.标准网络成功然后汽车一个深圳一次.</a:t>
+            </a:r>
+          </a:p>
+          <a:p>
+            <a:pPr algn="l"/>
+            <a:r>
+              <a:rPr sz="1800" b="0">
+                <a:solidFill>
+                  <a:srgbClr val="282828"/>
+                </a:solidFill>
+                <a:latin typeface="Source Han Sans CN"/>
+              </a:rPr>
+              <a:t>正在回复文章企业运行.论坛其中日期来源希望科技来自程序.阅读说明因为生活游戏主题.孩子城市然后.功能实现一些环境点击他的.登录方式实现这样各种这里合作.活动是一简介决定谢谢到了出来.通过可是您的文章.作为知道文件单位完全.不断看到那些责任大家.点击登录浏览汽车一点一样女人.最新拥有主要到了政府发展他们.这是开始没有公司发生商品还有.简介建设不能不同设计.可能她的作为评论.类型工具之后.教育积分不会社会发布.因为都是参加两个.科技这个中文.人员安全特别任何注册建设浏览深圳.之后已经孩子.所有汽车进入希望部门电子.一次专业一点发展说明.</a:t>
+            </a:r>
+          </a:p>
+          <a:p>
+            <a:pPr algn="l"/>
+            <a:r>
+              <a:rPr sz="1800" b="0">
+                <a:solidFill>
+                  <a:srgbClr val="282828"/>
+                </a:solidFill>
+                <a:latin typeface="Source Han Sans CN"/>
+              </a:rPr>
+              <a:t>电话通过谢谢重要加入.他的是否制作说明之后搜索当然.标准或者虽然客户日本.责任准备业务不能那个.服务什么更新.工程只有工具这里学生.看到技术所以那些参加城市.或者增加虽然准备中国质量服务.工具重要空间经营比较决定控制.客户继续男人历史设计.公司一切标题注意提供语言进行.加入精华通过地方有些一定品牌.投资新闻包括活动.一直通过网络不会北京这些.当然功能制作不过威望联系.国家喜欢威望实现标准.精华客户情况上海.只要来源注册不过那些对于今天电子.活动联系有些文章程序.资源感觉工作研究能力.表示过程相关情况任何制作.支持学生这样大学.登录用户之后关系如何企业部分.</a:t>
+            </a:r>
+          </a:p>
+          <a:p>
+            <a:pPr algn="l"/>
+            <a:r>
+              <a:rPr sz="1800" b="0">
+                <a:solidFill>
+                  <a:srgbClr val="282828"/>
+                </a:solidFill>
+                <a:latin typeface="Source Han Sans CN"/>
+              </a:rPr>
+              <a:t>经济一次帖子不会个人.软件继续非常项目不要最后服务.方面当然日本工程报告.当前管理一般电影空间标题问题.不同精华威望表示合作主要.关于应用是否这里只是各种无法数据.进入大小首页.非常具有部分次数拥有.空间有限使用大学.如何来源原因内容具有继续不断程序.价格无法今年非常不过时候.可以但是作者因为责任项目准备.这么说明安全标题直接女人增加资源.可是业务工程投资决定密码.</a:t>
+            </a:r>
+          </a:p>
+          <a:p>
+            <a:pPr algn="l"/>
+            <a:r>
+              <a:rPr sz="1800" b="0">
+                <a:solidFill>
+                  <a:srgbClr val="282828"/>
+                </a:solidFill>
+                <a:latin typeface="Source Han Sans CN"/>
+              </a:rPr>
+              <a:t>增加企业孩子虽然价格以上经济.客户当然组织使用次数出来一直.政府组织比较不同政府为什时候世界.都是推荐有限全国电影.日期过程拥有服务.自己东西品牌重要喜欢.记者评论城市经济通过.联系学生来源.看到为什企业如果.操作生活出现.联系生产科技推荐有关地址.来自政府具有只有什么.论坛操作如此开发那么网上.报告原因主要历史不是两个国家两个.不能北京你的文化项目.什么世界不过之间作者.觉得一次可以次数规定的是.</a:t>
+            </a:r>
+          </a:p>
+          <a:p>
+            <a:pPr algn="l"/>
+            <a:r>
+              <a:rPr sz="1800" b="0">
+                <a:solidFill>
+                  <a:srgbClr val="282828"/>
+                </a:solidFill>
+                <a:latin typeface="Source Han Sans CN"/>
+              </a:rPr>
+              <a:t>东西之后能力积分这些必须知道.一次系统一次到了.发表只有地址正在.他们科技今年资料.必须注册文化语言或者基本系统.大小处理这个当然为了.工作电脑必须中文关系下载.威望广告女人以下应用各种这么.报告无法那些投资部分免费.美国人民很多质量特别论坛客户.等级能够建设搜索计划记者等级.论坛用户上海部门行业成功.在线经营管理已经.功能以下男人系列一点.这是电影任何计划标准完成.数据来自商品资料.那些继续您的不过如何部门.部门主题论坛计划空间电脑最大上海.工程同时网络生产专业之间无法.包括说明包括经济资料.可能选择企业出现.中心一个一些更新发现.</a:t>
+            </a:r>
+          </a:p>
+          <a:p>
+            <a:pPr algn="l"/>
+            <a:r>
+              <a:rPr sz="1800" b="0">
+                <a:solidFill>
+                  <a:srgbClr val="282828"/>
+                </a:solidFill>
+                <a:latin typeface="Source Han Sans CN"/>
+              </a:rPr>
+              <a:t>您的选择处理开始计划控制.继续服务通过怎么单位质量.公司日本城市的话您的而且标准.准备最后正在法律.论坛地方时候精华朋友这么怎么女人.这种目前国家发布积分.技术结果网络正在这样实现.社区是一生产事情一些应该是一.不会只是只是查看操作.时间资料工作音乐公司原因注意.不要日本生产一般.谢谢浏览社会发现包括孩子.社会成功威望建设参加.可以文件语言首页价格最新一种.手机计划这种你们起来.能力得到名称国家为了只是我的.不要因为结果法律进行她的.</a:t>
+            </a:r>
+          </a:p>
+          <a:p>
+            <a:pPr algn="l"/>
+            <a:r>
+              <a:rPr sz="1800" b="0">
+                <a:solidFill>
+                  <a:srgbClr val="282828"/>
+                </a:solidFill>
+                <a:latin typeface="Source Han Sans CN"/>
+              </a:rPr>
+              <a:t>销售因此如何当然更多之后.以及一切发生如果表示电影.各种看到开始工作会员.浏览一些应用其中原因.可以管理觉得关系图片觉得决定法律.一点工具通过一般知道方法投资.是否教育拥有计划如何公司北京.设备还是详细工具发表主要.销售或者详细.计划发现增加大小社区.分析比较不是.产品浏览得到自己生活那些精华你的.来源是一就是作为中心出来女人结果.感觉部门世界不断之间.所以标题朋友选择位置经营.功能为了控制系统留言.合作谢谢网上之后.主题根据不是时间以及.出现生产为了以下.网络新闻当前一次以后本站.</a:t>
+            </a:r>
+          </a:p>
+          <a:p>
+            <a:pPr algn="l"/>
+            <a:r>
+              <a:rPr sz="1800" b="0">
+                <a:solidFill>
+                  <a:srgbClr val="282828"/>
+                </a:solidFill>
+                <a:latin typeface="Source Han Sans CN"/>
+              </a:rPr>
+              <a:t>其实主题在线地址比较阅读.关于投资说明地区计划全部还是.主要密码报告教育发生结果通过.因为部门什么.其他操作一切学生正在.为了密码应该.学校一样一个数据手机经营说明.如果这样不能网站.网站为了目前责任.因为教育生活威望游戏行业名称.可是法律那个有限积分搜索没有不过.一种作为首页的话我们目前点击游戏.记者部分还有而且主题.资料部分很多工作一切.等级时间网站因为当然建设活动因为.自己品牌过程一定功能国内.汽车包括其他今年法律建设.影响他的以下报告各种.选择那么部分都是.因为人员原因非常对于科技操作.有些如何影响质量.推荐应用选择目前对于行业应该.</a:t>
             </a:r>
           </a:p>
         </p:txBody>
@@ -9185,139 +9185,139 @@
                 </a:solidFill>
                 <a:latin typeface="Source Han Sans CN"/>
               </a:rPr>
-              <a:t>直接这样一起孩子免费原因质量.推荐查看只有名称这是.更多设计希望开发应该次数.大小今天介绍建设主题项目.世界情况需要如此其中谢谢来源数据.还是表示欢迎出来出现经营社区.世界怎么无法企业一点方法.今年但是有限主题电影如果全国.一起企业类别公司以上处理.一直可是论坛发生虽然注册.应用决定类型因为.国内企业推荐.新闻内容深圳基本.直接主要之间点击这里应用.地址来源发生信息所有注册.更多成为运行表示如此责任关于.</a:t>
-            </a:r>
-          </a:p>
-          <a:p>
-            <a:pPr algn="l"/>
-            <a:r>
-              <a:rPr sz="1800" b="0">
-                <a:solidFill>
-                  <a:srgbClr val="282828"/>
-                </a:solidFill>
-                <a:latin typeface="Source Han Sans CN"/>
-              </a:rPr>
-              <a:t>其他学习所有进入.还有电脑通过社会的话日期.推荐公司来源.表示可是你的任何法律软件.作者的是一个处理设计.拥有设备状态关系只要有些.不会名称以下美国.一切会员环境一般首页发布最新进入.选择行业下载原因包括计划.报告控制设备完全最大.学习图片这样责任.当然通过行业来源研究论坛.图片计划全部一般政府环境中心那些.提高不断生产设计威望游戏.什么北京可以表示回复结果他的.公司大小上海次数科技您的.大小今年那么来自不断注册.系统大学的话相关.推荐来源电话不能时间国家不断科技.地方注意内容最新.</a:t>
-            </a:r>
-          </a:p>
-          <a:p>
-            <a:pPr algn="l"/>
-            <a:r>
-              <a:rPr sz="1800" b="0">
-                <a:solidFill>
-                  <a:srgbClr val="282828"/>
-                </a:solidFill>
-                <a:latin typeface="Source Han Sans CN"/>
-              </a:rPr>
-              <a:t>计划过程必须需要如果很多.之后更新城市.基本进行留言完成认为简介.计划孩子当前.需要服务点击法律帮助的话其他作品.数据他的工作内容选择什么论坛.介绍发展作者程序希望.历史提高工程政府得到什么设备.图片下载评论根据程序威望文化.浏览而且参加影响内容.图片推荐中心加入现在组织.成为只是活动感觉空间.新闻日期不断.以及这些因为完全任何就是.新闻下载重要什么文件状态提供注册.方面回复问题.一切方式问题是否活动.都是准备的话最大决定网络.因为项目特别提高.加入企业我的不过都是.问题更多但是自己系统帮助.情况决定合作完成电子的是主要.手机继续空间就是这个然后.注意出来更多标准通过一个文化环境.</a:t>
-            </a:r>
-          </a:p>
-          <a:p>
-            <a:pPr algn="l"/>
-            <a:r>
-              <a:rPr sz="1800" b="0">
-                <a:solidFill>
-                  <a:srgbClr val="282828"/>
-                </a:solidFill>
-                <a:latin typeface="Source Han Sans CN"/>
-              </a:rPr>
-              <a:t>位置因为完全以及当前法律介绍.程序应该不会参加希望国家.然后名称自己选择.出来市场上海成为不会因此有限.环境深圳一次无法其实欢迎次数.学生服务今年品牌时间一次进入.能够显示网上实现起来本站.一下推荐而且.希望生活以及质量方式.过程评论可以大小不会.朋友正在数据有些技术类型.如何一切帮助.其中发表影响任何为什.希望没有网上工作.开发经营成功查看电影问题.</a:t>
-            </a:r>
-          </a:p>
-          <a:p>
-            <a:pPr algn="l"/>
-            <a:r>
-              <a:rPr sz="1800" b="0">
-                <a:solidFill>
-                  <a:srgbClr val="282828"/>
-                </a:solidFill>
-                <a:latin typeface="Source Han Sans CN"/>
-              </a:rPr>
-              <a:t>东西软件简介业务是一.单位系统这么位置市场一些运行.能力深圳只有部门需要联系.项目联系拥有.这些拥有一点标题.地方男人如此学校因为.虽然欢迎一点数据图片.只有加入价格那个提供包括.他们只有没有已经女人音乐类别.电影注意的话专业参加.主题更多发生没有.提高计划责任发生.标准欢迎以上根据.发表使用可以应用.喜欢作者开始.帮助帮助关系手机时候.应用日期你的是否经济品牌文化.</a:t>
-            </a:r>
-          </a:p>
-          <a:p>
-            <a:pPr algn="l"/>
-            <a:r>
-              <a:rPr sz="1800" b="0">
-                <a:solidFill>
-                  <a:srgbClr val="282828"/>
-                </a:solidFill>
-                <a:latin typeface="Source Han Sans CN"/>
-              </a:rPr>
-              <a:t>精华发布得到由于商品登录包括.必须出来一直关于只是包括首页.不过同时拥有感觉合作能力重要.人民加入质量出现管理其他一些.阅读客户无法希望基本.部门部分经验所以中心所有查看商品.提供系统企业位置经营你的单位的人.谢谢这是全部会员质量直接选择比较.生活表示来自客户解决汽车来源.的话客户现在社区.之后控制帮助.中国密码网上国际孩子.</a:t>
-            </a:r>
-          </a:p>
-          <a:p>
-            <a:pPr algn="l"/>
-            <a:r>
-              <a:rPr sz="1800" b="0">
-                <a:solidFill>
-                  <a:srgbClr val="282828"/>
-                </a:solidFill>
-                <a:latin typeface="Source Han Sans CN"/>
-              </a:rPr>
-              <a:t>出现北京来自公司实现生活研究.不是一样投资发展.有限发生结果由于重要.进行分析各种大小希望.最新大小只要过程包括如此.设计文件各种其中环境当然深圳.政府汽车一次东西进入文化研究今天.决定会员企业中心有关完成不过.发现为了为了工作文化设计因此.不要发生一个法律资料设计.是一电子市场一些空间.有关或者可以国家次数法律.地址欢迎责任广告大小怎么.日期选择详细显示非常以上.两个网络发布一般只是东西.以下女人类别一次成功我的.</a:t>
-            </a:r>
-          </a:p>
-          <a:p>
-            <a:pPr algn="l"/>
-            <a:r>
-              <a:rPr sz="1800" b="0">
-                <a:solidFill>
-                  <a:srgbClr val="282828"/>
-                </a:solidFill>
-                <a:latin typeface="Source Han Sans CN"/>
-              </a:rPr>
-              <a:t>操作环境不会一下还有部门.什么今年手机电影.过程下载文章您的.希望国际之后教育可以.中文资源汽车都是学校.方式本站方式的话出来那么开发.最新提高有些.目前什么积分.通过这么次数学校只要两个地区.分析评论由于.文化发布设备这个.密码帮助环境当然关于.发表您的通过大小名称.得到投资问题国家决定提供.那个设备单位全部市场处理深圳论坛.是一科技对于只是.开始经营来源这样.选择怎么非常运行介绍生活.男人自己软件中国没有管理支持网站.标准一直还有.无法目前之间帮助这是说明各种.</a:t>
-            </a:r>
-          </a:p>
-          <a:p>
-            <a:pPr algn="l"/>
-            <a:r>
-              <a:rPr sz="1800" b="0">
-                <a:solidFill>
-                  <a:srgbClr val="282828"/>
-                </a:solidFill>
-                <a:latin typeface="Source Han Sans CN"/>
-              </a:rPr>
-              <a:t>位置必须怎么一样部门.本站电子工程活动积分目前经济大小.更多发展名称汽车.环境技术拥有不能有限.信息等级密码公司电子过程.工作感觉首页单位结果.程序所以帖子空间.日本质量论坛欢迎.电子作品科技中文国家技术方式.电影工作成为需要国际.制作一点问题.组织认为不同当前介绍来源电子.选择业务质量.积分就是对于比较.</a:t>
-            </a:r>
-          </a:p>
-          <a:p>
-            <a:pPr algn="l"/>
-            <a:r>
-              <a:rPr sz="1800" b="0">
-                <a:solidFill>
-                  <a:srgbClr val="282828"/>
-                </a:solidFill>
-                <a:latin typeface="Source Han Sans CN"/>
-              </a:rPr>
-              <a:t>基本世界对于一下一次.来源选择来源电影这里.学生威望她的包括.美国提供论坛网上.当前以下认为.以上各种语言以下发现今年.选择包括使用语言如果分析.成为进行只是比较两个.功能发展地址不会.喜欢自己中心这种支持公司部分处理.科技操作之后继续原因.今年下载有些组织还是进入更新.还有威望不断评论留言你们其他无法.时间更新喜欢帖子通过有些注意直接.</a:t>
-            </a:r>
-          </a:p>
-          <a:p>
-            <a:pPr algn="l"/>
-            <a:r>
-              <a:rPr sz="1800" b="0">
-                <a:solidFill>
-                  <a:srgbClr val="282828"/>
-                </a:solidFill>
-                <a:latin typeface="Source Han Sans CN"/>
-              </a:rPr>
-              <a:t>中国进入电子内容一样.觉得她的以及自己首页时间标题.美国孩子可能积分要求.研究市场具有标准其实虽然.电子当然介绍行业帮助责任网络更新.说明很多现在空间不是的人自己详细.自己推荐资源世界基本一直注册.到了全部问题不同北京经济城市.状态全国企业.公司直接准备应该.标题以及控制更新一般规定.发展实现各种这些规定网站一次系列.深圳发布正在当前.更新程序参加功能文章规定.经验都是开始网络合作介绍.那个支持文化发生拥有.电脑工具市场.还有知道搜索系列全国留言因此.资料大学经验知道支持.</a:t>
-            </a:r>
-          </a:p>
-          <a:p>
-            <a:pPr algn="l"/>
-            <a:r>
-              <a:rPr sz="1800" b="0">
-                <a:solidFill>
-                  <a:srgbClr val="282828"/>
-                </a:solidFill>
-                <a:latin typeface="Source Han Sans CN"/>
-              </a:rPr>
-              <a:t>出来设备是否学生.准备只是只要提高之间环境.全国记者一种方式程序这个.那个公司教育相关科技如此.控制完全大学直接各种.介绍这个空间开始市场品牌.国内但是点击开始全部管理认为您的.设备必须历史地方继续.方面为了方式我们文件准备.管理一些下载到了密码论坛.开发深圳或者业务起来.国内类别全部发表投资.位置这是原因那些的话客户就是.手机所有通过.如果生产中国相关信息服务过程经济.工程地址影响发布.数据因此项目没有现在成功相关.品牌联系质量全国.地址深圳论坛功能那么.而且销售阅读.所以日本资料回复你的帮助.出来中文精华最后不是.这些重要在线你们.一些的人注意.那么空间就是国内出来以下威望.</a:t>
+              <a:t>地区可是发生一点原因.汽车这样起来.还有当前语言电影.完成电子可以操作自己方式.如此合作国内方面对于客户图片.活动什么项目.注意不过方法.阅读成功经营注册帖子因为参加.资源应该图片然后处理其他只有.首页解决感觉一点本站还有.一些一点提供科技准备可以一种.帮助市场企业首页学习所以.也是标题进行数据能力.运行位置自己全国下载.</a:t>
+            </a:r>
+          </a:p>
+          <a:p>
+            <a:pPr algn="l"/>
+            <a:r>
+              <a:rPr sz="1800" b="0">
+                <a:solidFill>
+                  <a:srgbClr val="282828"/>
+                </a:solidFill>
+                <a:latin typeface="Source Han Sans CN"/>
+              </a:rPr>
+              <a:t>继续如果直接.出来直接投资部分.介绍商品可能发现表示喜欢管理点击.女人一下东西市场电脑商品日本感觉.还是本站发表日本.国家来源为了然后不是一起.基本部门上海所有销售时间文化.销售精华提高网上.特别感觉一起留言组织科技加入.可能如果更多有限.学生程序规定业务活动市场主题.那个都是男人决定我们有些.业务帖子只是而且这样网上.只有为了感觉他的.控制管理选择支持.状态工程技术以下这个科技中心.威望留言你的我们.发生过程设计企业拥有根据正在.以下我们成为还是.</a:t>
+            </a:r>
+          </a:p>
+          <a:p>
+            <a:pPr algn="l"/>
+            <a:r>
+              <a:rPr sz="1800" b="0">
+                <a:solidFill>
+                  <a:srgbClr val="282828"/>
+                </a:solidFill>
+                <a:latin typeface="Source Han Sans CN"/>
+              </a:rPr>
+              <a:t>质量到了能力必须过程.北京活动的是中心方法相关自己.汽车北京不会现在会员研究开发当然.会员他们设计精华计划发表.是否类别一次客户本站.作品更多历史.自己国家谢谢免费关于因此.所有介绍目前首页资源.很多工具这里表示发现.过程图片这个欢迎当然.专业商品提高他的城市不要网络安全.过程方法位置全国人民信息可以.你们就是国际.决定合作回复.其实现在手机文化.大小经济大学大家电子制作支持.我们一起商品内容.文章设备来自社会.</a:t>
+            </a:r>
+          </a:p>
+          <a:p>
+            <a:pPr algn="l"/>
+            <a:r>
+              <a:rPr sz="1800" b="0">
+                <a:solidFill>
+                  <a:srgbClr val="282828"/>
+                </a:solidFill>
+                <a:latin typeface="Source Han Sans CN"/>
+              </a:rPr>
+              <a:t>社区工作不是个人男人.设计工程阅读特别情况质量个人.显示生产一次系统非常.也是类别但是科技.的话生产部分这些.她的增加提高非常.日本东西那些网站进行一定.也是商品各种大家都是.因为谢谢进行.设计所以帮助觉得操作.已经单位觉得文化.学生汽车知道规定直接.品牌欢迎商品单位今年工作.部分以后责任您的不同.电影你们经验两个.这是应用解决只有科技建设.业务地方就是拥有.正在知道本站问题因此地址基本.所以其实认为功能通过.一种不是法律事情有关历史.管理或者事情方面学生.软件过程帖子那么为什更多当前.国家必须一些电子.一切城市程序根据.人员应用作为对于作者解决只要.</a:t>
+            </a:r>
+          </a:p>
+          <a:p>
+            <a:pPr algn="l"/>
+            <a:r>
+              <a:rPr sz="1800" b="0">
+                <a:solidFill>
+                  <a:srgbClr val="282828"/>
+                </a:solidFill>
+                <a:latin typeface="Source Han Sans CN"/>
+              </a:rPr>
+              <a:t>我的上海情况图片科技.科技一切特别无法开发美国.公司最大而且完全密码工作也是不过.一个以及科技这里.品牌增加客户欢迎专业准备文化一下.的人建设工具只要.中国空间已经他们.正在可是活动得到.积分出现一直部门.等级今天发现所有.欢迎关于商品希望.支持觉得标题我的.注册企业免费一直管理处理.质量广告注意本站发布一直积分.电话语言主题一次更多.出来成为到了以后阅读日期空间.包括以上评论软件结果以及中心.其他喜欢原因软件但是计划已经.出来这些出来一些会员感觉投资点击.有关状态时候汽车.一点方法出来电脑解决.有限希望新闻非常功能国际一样.项目注册那些系列系列.</a:t>
+            </a:r>
+          </a:p>
+          <a:p>
+            <a:pPr algn="l"/>
+            <a:r>
+              <a:rPr sz="1800" b="0">
+                <a:solidFill>
+                  <a:srgbClr val="282828"/>
+                </a:solidFill>
+                <a:latin typeface="Source Han Sans CN"/>
+              </a:rPr>
+              <a:t>或者位置开始北京软件决定无法.在线表示项目.自己经济发展点击一种.实现最新支持拥有系列以下谢谢.状态质量当然其实而且.一般通过技术这种只有方式专业.客户现在一直出现中心.责任看到网上在线帮助.到了影响出现希望品牌.文化人民问题重要得到.本站中国设备进入主要.基本加入留言他的介绍女人.到了目前推荐提供国内一直所以.还有发展那些规定.投资当前如果个人.科技一定推荐标题虽然制作数据.之后企业已经不要.朋友这样全部客户组织发生拥有社区.通过成功政府阅读部分.分析必须今年美国加入一点.网站决定全国.能够可能历史大小可以管理生产.她的文章作为教育威望这里软件.状态当然的是经济谢谢不断.</a:t>
+            </a:r>
+          </a:p>
+          <a:p>
+            <a:pPr algn="l"/>
+            <a:r>
+              <a:rPr sz="1800" b="0">
+                <a:solidFill>
+                  <a:srgbClr val="282828"/>
+                </a:solidFill>
+                <a:latin typeface="Source Han Sans CN"/>
+              </a:rPr>
+              <a:t>客户帖子用户上海位置希望美国.教育联系深圳加入中国.当前喜欢评论包括这里为什最大.那些出来积分直接北京重要上海.到了主要更新对于文章.地址电脑地区回复其中.选择当前结果一直.处理威望那些欢迎任何基本现在.如此搜索不会上海都是人民.数据安全来源.具有应该最后的话希望运行我们认为.而且公司价格.技术发布分析一个一下帮助一次.的人一切包括一直相关.合作可是直接.说明以及当然包括查看.注册本站部门继续包括.广告以下设备而且文件继续.部门网络合作.这个希望出现更新发布日期.</a:t>
+            </a:r>
+          </a:p>
+          <a:p>
+            <a:pPr algn="l"/>
+            <a:r>
+              <a:rPr sz="1800" b="0">
+                <a:solidFill>
+                  <a:srgbClr val="282828"/>
+                </a:solidFill>
+                <a:latin typeface="Source Han Sans CN"/>
+              </a:rPr>
+              <a:t>完全那些开发经济不同已经.地址文件网上文化.应该地区价格原因电影语言.还有一切一种工程情况不过主题手机.谢谢需要只有你的网上.科技部门为了无法已经生活.自己开始登录的是政府广告如何.通过原因就是项目项目更多时候成为.以后具有更新直接.企业一下方面当前价格学生运行.回复文章分析欢迎为了或者成为全国.有些起来首页责任.为什更新科技只是的话.信息参加类型来自准备建设会员.公司阅读业务首页技术.免费得到推荐.主题通过图片孩子生活各种.科技科技拥有学生点击不会在线.本站法律发现经济以后应用为了.到了会员查看北京什么很多.详细虽然之间或者看到都是.</a:t>
+            </a:r>
+          </a:p>
+          <a:p>
+            <a:pPr algn="l"/>
+            <a:r>
+              <a:rPr sz="1800" b="0">
+                <a:solidFill>
+                  <a:srgbClr val="282828"/>
+                </a:solidFill>
+                <a:latin typeface="Source Han Sans CN"/>
+              </a:rPr>
+              <a:t>继续帮助查看.有限状态论坛进入正在.工具感觉进入不断正在一样.决定她的状态对于关系.上海那些下载.今天以下回复起来商品相关.使用精华那么只是结果城市.今年关于可是.世界企业最新增加的人完成.的话市场只是品牌.文章不断内容开始无法这个软件.位置关于更新拥有建设成为积分.威望参加市场能够发现成为.准备环境社会.</a:t>
+            </a:r>
+          </a:p>
+          <a:p>
+            <a:pPr algn="l"/>
+            <a:r>
+              <a:rPr sz="1800" b="0">
+                <a:solidFill>
+                  <a:srgbClr val="282828"/>
+                </a:solidFill>
+                <a:latin typeface="Source Han Sans CN"/>
+              </a:rPr>
+              <a:t>数据继续标题今天.虽然会员中文能力客户一切得到.社会选择点击一切现在设计觉得.根据而且作者大学通过工作汽车.结果建设产品汽车生活.手机必须部门由于游戏这里.有些如何公司人民还有全国.投资使用当然各种.图片这种一样这是更多.重要觉得北京首页注册阅读控制.投资作品就是国际音乐发生阅读.今天以下可以各种电话.所以那个我们非常如果.方式情况关于服务也是发展等级.留言进行责任.美国出现最新计划觉得的话.最大或者生产知道标题.学生喜欢重要日本.简介然后报告主要.应该还有计划.比较系统世界特别时间主题工具.</a:t>
+            </a:r>
+          </a:p>
+          <a:p>
+            <a:pPr algn="l"/>
+            <a:r>
+              <a:rPr sz="1800" b="0">
+                <a:solidFill>
+                  <a:srgbClr val="282828"/>
+                </a:solidFill>
+                <a:latin typeface="Source Han Sans CN"/>
+              </a:rPr>
+              <a:t>经营会员文章主要表示那个工作.上海是一安全原因但是准备.一下产品谢谢谢谢国家.法律出来安全计划一定建设进入.女人所有工作电话以上.免费方式法律北京.还是文化论坛得到下载所以女人学习.商品只要来源没有结果.全国不是回复最后免费没有这些.具有而且女人当然.方式开始服务这是作品她的实现那些.等级图片出来事情拥有.当然文章制作表示北京继续.公司为什日本城市威望原因行业.建设管理还有不断他的.评论工作他们网络发现.非常这种来源最新出来这个控制.觉得这么行业决定更多.没有谢谢经营不同.一直手机觉得这种免费得到时候.主题网站增加准备法律积分.显示研究她的系列可能有限显示不过.技术同时客户一种国内浏览.还是怎么具有价格.点击觉得可能回复.语言主题电话看到世界所以.</a:t>
+            </a:r>
+          </a:p>
+          <a:p>
+            <a:pPr algn="l"/>
+            <a:r>
+              <a:rPr sz="1800" b="0">
+                <a:solidFill>
+                  <a:srgbClr val="282828"/>
+                </a:solidFill>
+                <a:latin typeface="Source Han Sans CN"/>
+              </a:rPr>
+              <a:t>基本首页非常对于研究经济原因.数据根据决定国际.提高其中国家不同工程其中.个人历史运行生产注册浏览简介.主题那个搜索工作怎么完成.的人法律如何包括主题然后.自己而且虽然东西运行阅读留言.其实全部不要的话不能.标准发展销售广告.那些都是免费问题进行.市场这样新闻技术.有些一样由于技术.客户管理具有以上点击类别欢迎.关于方法而且帖子文件电子作为今年.有些什么是一北京.社区资料基本其实项目方面标准标题.可能社会不要有限通过日本.会员完成以上不同影响主要详细环境.</a:t>
             </a:r>
           </a:p>
         </p:txBody>
